--- a/poc/data_harness/Ascension Agentic Harness - Data Harness.pptx
+++ b/poc/data_harness/Ascension Agentic Harness - Data Harness.pptx
@@ -1920,7 +1920,7 @@
           </a:p>
           <a:p>
             <a:r>
-              <a:t>Agents and the knowledge graph see masked values and aggregates. The pre-send review shows a masked report. Only the release step, under a raw-access service account and only after G2 and G3, reads the six fields a campaign needs.</a:t>
+              <a:t>Agents and the knowledge graph see masked values and aggregates. The pre-send review shows a masked report. Only the release step, under a raw-access service account and only after G2 and G3, reads only the fields a campaign needs.</a:t>
             </a:r>
           </a:p>
         </p:txBody>
@@ -7567,15 +7567,39 @@
           <a:p/>
         </p:txBody>
       </p:sp>
-      <p:sp>
-        <p:nvSpPr>
-          <p:cNvPr id="111" name="Text 104"/>
-          <p:cNvSpPr txBox="1"/>
-          <p:nvPr/>
-        </p:nvSpPr>
-        <p:spPr>
-          <a:xfrm>
-            <a:off x="9116567" y="1554480"/>
+      <p:pic>
+        <p:nvPicPr>
+          <p:cNvPr id="111" name="Picture 110" descr="salesforce.png"/>
+          <p:cNvPicPr>
+            <a:picLocks noChangeAspect="1"/>
+          </p:cNvPicPr>
+          <p:nvPr/>
+        </p:nvPicPr>
+        <p:blipFill>
+          <a:blip r:embed="rId4"/>
+          <a:stretch>
+            <a:fillRect/>
+          </a:stretch>
+        </p:blipFill>
+        <p:spPr>
+          <a:xfrm>
+            <a:off x="9116567" y="1563624"/>
+            <a:ext cx="182880" cy="182880"/>
+          </a:xfrm>
+          <a:prstGeom prst="rect">
+            <a:avLst/>
+          </a:prstGeom>
+        </p:spPr>
+      </p:pic>
+      <p:sp>
+        <p:nvSpPr>
+          <p:cNvPr id="112" name="Text 104"/>
+          <p:cNvSpPr txBox="1"/>
+          <p:nvPr/>
+        </p:nvSpPr>
+        <p:spPr>
+          <a:xfrm>
+            <a:off x="9363455" y="1554480"/>
             <a:ext cx="2551176" cy="201168"/>
           </a:xfrm>
           <a:prstGeom prst="rect">
@@ -7603,7 +7627,7 @@
       </p:sp>
       <p:sp>
         <p:nvSpPr>
-          <p:cNvPr id="112" name="Text 105"/>
+          <p:cNvPr id="113" name="Text 105"/>
           <p:cNvSpPr txBox="1"/>
           <p:nvPr/>
         </p:nvSpPr>
@@ -7637,7 +7661,7 @@
       </p:sp>
       <p:sp>
         <p:nvSpPr>
-          <p:cNvPr id="113" name="Text 106"/>
+          <p:cNvPr id="114" name="Text 106"/>
           <p:cNvSpPr txBox="1"/>
           <p:nvPr/>
         </p:nvSpPr>
@@ -7671,7 +7695,7 @@
       </p:sp>
       <p:sp>
         <p:nvSpPr>
-          <p:cNvPr id="114" name="Shape 107"/>
+          <p:cNvPr id="115" name="Shape 107"/>
           <p:cNvSpPr/>
           <p:nvPr/>
         </p:nvSpPr>
@@ -7715,7 +7739,7 @@
       </p:sp>
       <p:sp>
         <p:nvSpPr>
-          <p:cNvPr id="115" name="Text 108"/>
+          <p:cNvPr id="116" name="Text 108"/>
           <p:cNvSpPr txBox="1"/>
           <p:nvPr/>
         </p:nvSpPr>
@@ -7748,15 +7772,39 @@
           </a:p>
         </p:txBody>
       </p:sp>
-      <p:sp>
-        <p:nvSpPr>
-          <p:cNvPr id="116" name="Text 109"/>
-          <p:cNvSpPr txBox="1"/>
-          <p:nvPr/>
-        </p:nvSpPr>
-        <p:spPr>
-          <a:xfrm>
-            <a:off x="9116567" y="2578608"/>
+      <p:pic>
+        <p:nvPicPr>
+          <p:cNvPr id="117" name="Picture 116" descr="salesforce.png"/>
+          <p:cNvPicPr>
+            <a:picLocks noChangeAspect="1"/>
+          </p:cNvPicPr>
+          <p:nvPr/>
+        </p:nvPicPr>
+        <p:blipFill>
+          <a:blip r:embed="rId4"/>
+          <a:stretch>
+            <a:fillRect/>
+          </a:stretch>
+        </p:blipFill>
+        <p:spPr>
+          <a:xfrm>
+            <a:off x="9116567" y="2587752"/>
+            <a:ext cx="182880" cy="182880"/>
+          </a:xfrm>
+          <a:prstGeom prst="rect">
+            <a:avLst/>
+          </a:prstGeom>
+        </p:spPr>
+      </p:pic>
+      <p:sp>
+        <p:nvSpPr>
+          <p:cNvPr id="118" name="Text 109"/>
+          <p:cNvSpPr txBox="1"/>
+          <p:nvPr/>
+        </p:nvSpPr>
+        <p:spPr>
+          <a:xfrm>
+            <a:off x="9363455" y="2578608"/>
             <a:ext cx="2551176" cy="201168"/>
           </a:xfrm>
           <a:prstGeom prst="rect">
@@ -7784,7 +7832,7 @@
       </p:sp>
       <p:sp>
         <p:nvSpPr>
-          <p:cNvPr id="117" name="Text 110"/>
+          <p:cNvPr id="119" name="Text 110"/>
           <p:cNvSpPr txBox="1"/>
           <p:nvPr/>
         </p:nvSpPr>
@@ -7818,7 +7866,7 @@
       </p:sp>
       <p:sp>
         <p:nvSpPr>
-          <p:cNvPr id="118" name="Text 111"/>
+          <p:cNvPr id="120" name="Text 111"/>
           <p:cNvSpPr txBox="1"/>
           <p:nvPr/>
         </p:nvSpPr>
@@ -7852,7 +7900,7 @@
       </p:sp>
       <p:sp>
         <p:nvSpPr>
-          <p:cNvPr id="119" name="Shape 112"/>
+          <p:cNvPr id="121" name="Shape 112"/>
           <p:cNvSpPr/>
           <p:nvPr/>
         </p:nvSpPr>
@@ -7896,7 +7944,7 @@
       </p:sp>
       <p:sp>
         <p:nvSpPr>
-          <p:cNvPr id="120" name="Text 113"/>
+          <p:cNvPr id="122" name="Text 113"/>
           <p:cNvSpPr txBox="1"/>
           <p:nvPr/>
         </p:nvSpPr>
@@ -7931,7 +7979,7 @@
       </p:sp>
       <p:sp>
         <p:nvSpPr>
-          <p:cNvPr id="121" name="Shape 114"/>
+          <p:cNvPr id="123" name="Shape 114"/>
           <p:cNvSpPr/>
           <p:nvPr/>
         </p:nvSpPr>
@@ -7975,7 +8023,7 @@
       </p:sp>
       <p:sp>
         <p:nvSpPr>
-          <p:cNvPr id="122" name="Text 115"/>
+          <p:cNvPr id="124" name="Text 115"/>
           <p:cNvSpPr txBox="1"/>
           <p:nvPr/>
         </p:nvSpPr>
@@ -8010,7 +8058,7 @@
       </p:sp>
       <p:sp>
         <p:nvSpPr>
-          <p:cNvPr id="123" name="Text 116"/>
+          <p:cNvPr id="125" name="Text 116"/>
           <p:cNvSpPr txBox="1"/>
           <p:nvPr/>
         </p:nvSpPr>
@@ -8044,7 +8092,7 @@
       </p:sp>
       <p:sp>
         <p:nvSpPr>
-          <p:cNvPr id="124" name="Text 117"/>
+          <p:cNvPr id="126" name="Text 117"/>
           <p:cNvSpPr txBox="1"/>
           <p:nvPr/>
         </p:nvSpPr>
@@ -8078,7 +8126,7 @@
       </p:sp>
       <p:sp>
         <p:nvSpPr>
-          <p:cNvPr id="125" name="Text 118"/>
+          <p:cNvPr id="127" name="Text 118"/>
           <p:cNvSpPr txBox="1"/>
           <p:nvPr/>
         </p:nvSpPr>
@@ -8112,7 +8160,7 @@
       </p:sp>
       <p:sp>
         <p:nvSpPr>
-          <p:cNvPr id="126" name="Shape 119"/>
+          <p:cNvPr id="128" name="Shape 119"/>
           <p:cNvSpPr/>
           <p:nvPr/>
         </p:nvSpPr>
@@ -8156,7 +8204,7 @@
       </p:sp>
       <p:sp>
         <p:nvSpPr>
-          <p:cNvPr id="127" name="Text 120"/>
+          <p:cNvPr id="129" name="Text 120"/>
           <p:cNvSpPr txBox="1"/>
           <p:nvPr/>
         </p:nvSpPr>
@@ -8190,7 +8238,7 @@
       </p:sp>
       <p:sp>
         <p:nvSpPr>
-          <p:cNvPr id="128" name="Text 121"/>
+          <p:cNvPr id="130" name="Text 121"/>
           <p:cNvSpPr txBox="1"/>
           <p:nvPr/>
         </p:nvSpPr>
@@ -8224,7 +8272,7 @@
       </p:sp>
       <p:sp>
         <p:nvSpPr>
-          <p:cNvPr id="129" name="Shape 122"/>
+          <p:cNvPr id="131" name="Shape 122"/>
           <p:cNvSpPr/>
           <p:nvPr/>
         </p:nvSpPr>
@@ -8270,7 +8318,7 @@
       </p:sp>
       <p:sp>
         <p:nvSpPr>
-          <p:cNvPr id="130" name="Text 123"/>
+          <p:cNvPr id="132" name="Text 123"/>
           <p:cNvSpPr txBox="1"/>
           <p:nvPr/>
         </p:nvSpPr>
@@ -8305,7 +8353,7 @@
       </p:sp>
       <p:cxnSp>
         <p:nvCxnSpPr>
-          <p:cNvPr id="131" name="Arrow 124"/>
+          <p:cNvPr id="133" name="Arrow 124"/>
           <p:cNvCxnSpPr/>
           <p:nvPr/>
         </p:nvCxnSpPr>
@@ -8341,7 +8389,7 @@
       </p:cxnSp>
       <p:sp>
         <p:nvSpPr>
-          <p:cNvPr id="132" name="Shape 125"/>
+          <p:cNvPr id="134" name="Shape 125"/>
           <p:cNvSpPr/>
           <p:nvPr/>
         </p:nvSpPr>
@@ -8387,7 +8435,7 @@
       </p:sp>
       <p:sp>
         <p:nvSpPr>
-          <p:cNvPr id="133" name="Text 126"/>
+          <p:cNvPr id="135" name="Text 126"/>
           <p:cNvSpPr txBox="1"/>
           <p:nvPr/>
         </p:nvSpPr>
@@ -8422,7 +8470,7 @@
       </p:sp>
       <p:cxnSp>
         <p:nvCxnSpPr>
-          <p:cNvPr id="134" name="Arrow 127"/>
+          <p:cNvPr id="136" name="Arrow 127"/>
           <p:cNvCxnSpPr/>
           <p:nvPr/>
         </p:nvCxnSpPr>
@@ -8458,7 +8506,7 @@
       </p:cxnSp>
       <p:sp>
         <p:nvSpPr>
-          <p:cNvPr id="135" name="Shape 128"/>
+          <p:cNvPr id="137" name="Shape 128"/>
           <p:cNvSpPr/>
           <p:nvPr/>
         </p:nvSpPr>
@@ -8504,7 +8552,7 @@
       </p:sp>
       <p:sp>
         <p:nvSpPr>
-          <p:cNvPr id="136" name="Text 129"/>
+          <p:cNvPr id="138" name="Text 129"/>
           <p:cNvSpPr txBox="1"/>
           <p:nvPr/>
         </p:nvSpPr>
@@ -8539,7 +8587,7 @@
       </p:sp>
       <p:cxnSp>
         <p:nvCxnSpPr>
-          <p:cNvPr id="137" name="Arrow 130"/>
+          <p:cNvPr id="139" name="Arrow 130"/>
           <p:cNvCxnSpPr/>
           <p:nvPr/>
         </p:nvCxnSpPr>
@@ -8575,7 +8623,7 @@
       </p:cxnSp>
       <p:sp>
         <p:nvSpPr>
-          <p:cNvPr id="138" name="Shape 131"/>
+          <p:cNvPr id="140" name="Shape 131"/>
           <p:cNvSpPr/>
           <p:nvPr/>
         </p:nvSpPr>
@@ -8621,7 +8669,7 @@
       </p:sp>
       <p:sp>
         <p:nvSpPr>
-          <p:cNvPr id="139" name="Text 132"/>
+          <p:cNvPr id="141" name="Text 132"/>
           <p:cNvSpPr txBox="1"/>
           <p:nvPr/>
         </p:nvSpPr>
@@ -8656,7 +8704,7 @@
       </p:sp>
       <p:cxnSp>
         <p:nvCxnSpPr>
-          <p:cNvPr id="140" name="Arrow 133"/>
+          <p:cNvPr id="142" name="Arrow 133"/>
           <p:cNvCxnSpPr/>
           <p:nvPr/>
         </p:nvCxnSpPr>
@@ -8692,7 +8740,7 @@
       </p:cxnSp>
       <p:sp>
         <p:nvSpPr>
-          <p:cNvPr id="141" name="Shape 134"/>
+          <p:cNvPr id="143" name="Shape 134"/>
           <p:cNvSpPr/>
           <p:nvPr/>
         </p:nvSpPr>
@@ -8738,7 +8786,7 @@
       </p:sp>
       <p:sp>
         <p:nvSpPr>
-          <p:cNvPr id="142" name="Text 135"/>
+          <p:cNvPr id="144" name="Text 135"/>
           <p:cNvSpPr txBox="1"/>
           <p:nvPr/>
         </p:nvSpPr>
@@ -8773,7 +8821,7 @@
       </p:sp>
       <p:cxnSp>
         <p:nvCxnSpPr>
-          <p:cNvPr id="143" name="Arrow 136"/>
+          <p:cNvPr id="145" name="Arrow 136"/>
           <p:cNvCxnSpPr/>
           <p:nvPr/>
         </p:nvCxnSpPr>
@@ -8809,7 +8857,7 @@
       </p:cxnSp>
       <p:sp>
         <p:nvSpPr>
-          <p:cNvPr id="144" name="Shape 137"/>
+          <p:cNvPr id="146" name="Shape 137"/>
           <p:cNvSpPr/>
           <p:nvPr/>
         </p:nvSpPr>
@@ -8855,7 +8903,7 @@
       </p:sp>
       <p:sp>
         <p:nvSpPr>
-          <p:cNvPr id="145" name="Text 138"/>
+          <p:cNvPr id="147" name="Text 138"/>
           <p:cNvSpPr txBox="1"/>
           <p:nvPr/>
         </p:nvSpPr>
@@ -8890,7 +8938,7 @@
       </p:sp>
       <p:cxnSp>
         <p:nvCxnSpPr>
-          <p:cNvPr id="146" name="Arrow 139"/>
+          <p:cNvPr id="148" name="Arrow 139"/>
           <p:cNvCxnSpPr/>
           <p:nvPr/>
         </p:nvCxnSpPr>
@@ -8926,7 +8974,7 @@
       </p:cxnSp>
       <p:sp>
         <p:nvSpPr>
-          <p:cNvPr id="147" name="Shape 140"/>
+          <p:cNvPr id="149" name="Shape 140"/>
           <p:cNvSpPr/>
           <p:nvPr/>
         </p:nvSpPr>
@@ -8972,7 +9020,7 @@
       </p:sp>
       <p:sp>
         <p:nvSpPr>
-          <p:cNvPr id="148" name="Text 141"/>
+          <p:cNvPr id="150" name="Text 141"/>
           <p:cNvSpPr txBox="1"/>
           <p:nvPr/>
         </p:nvSpPr>
@@ -9007,7 +9055,7 @@
       </p:sp>
       <p:cxnSp>
         <p:nvCxnSpPr>
-          <p:cNvPr id="149" name="Arrow 142"/>
+          <p:cNvPr id="151" name="Arrow 142"/>
           <p:cNvCxnSpPr/>
           <p:nvPr/>
         </p:nvCxnSpPr>
@@ -9043,7 +9091,7 @@
       </p:cxnSp>
       <p:sp>
         <p:nvSpPr>
-          <p:cNvPr id="150" name="Shape 143"/>
+          <p:cNvPr id="152" name="Shape 143"/>
           <p:cNvSpPr/>
           <p:nvPr/>
         </p:nvSpPr>
@@ -9089,7 +9137,7 @@
       </p:sp>
       <p:sp>
         <p:nvSpPr>
-          <p:cNvPr id="151" name="Text 144"/>
+          <p:cNvPr id="153" name="Text 144"/>
           <p:cNvSpPr txBox="1"/>
           <p:nvPr/>
         </p:nvSpPr>
@@ -9124,7 +9172,7 @@
       </p:sp>
       <p:cxnSp>
         <p:nvCxnSpPr>
-          <p:cNvPr id="152" name="Arrow 145"/>
+          <p:cNvPr id="154" name="Arrow 145"/>
           <p:cNvCxnSpPr/>
           <p:nvPr/>
         </p:nvCxnSpPr>
@@ -9160,7 +9208,7 @@
       </p:cxnSp>
       <p:sp>
         <p:nvSpPr>
-          <p:cNvPr id="153" name="Shape 146"/>
+          <p:cNvPr id="155" name="Shape 146"/>
           <p:cNvSpPr/>
           <p:nvPr/>
         </p:nvSpPr>
@@ -9206,7 +9254,7 @@
       </p:sp>
       <p:sp>
         <p:nvSpPr>
-          <p:cNvPr id="154" name="Text 147"/>
+          <p:cNvPr id="156" name="Text 147"/>
           <p:cNvSpPr txBox="1"/>
           <p:nvPr/>
         </p:nvSpPr>
@@ -9241,7 +9289,7 @@
       </p:sp>
       <p:sp>
         <p:nvSpPr>
-          <p:cNvPr id="155" name="Text 148"/>
+          <p:cNvPr id="157" name="Text 148"/>
           <p:cNvSpPr txBox="1"/>
           <p:nvPr/>
         </p:nvSpPr>
@@ -9275,7 +9323,7 @@
       </p:sp>
       <p:sp>
         <p:nvSpPr>
-          <p:cNvPr id="156" name="Shape 149"/>
+          <p:cNvPr id="158" name="Shape 149"/>
           <p:cNvSpPr/>
           <p:nvPr/>
         </p:nvSpPr>
@@ -9321,7 +9369,7 @@
       </p:sp>
       <p:sp>
         <p:nvSpPr>
-          <p:cNvPr id="157" name="Text 150"/>
+          <p:cNvPr id="159" name="Text 150"/>
           <p:cNvSpPr txBox="1"/>
           <p:nvPr/>
         </p:nvSpPr>
@@ -9356,7 +9404,7 @@
       </p:sp>
       <p:cxnSp>
         <p:nvCxnSpPr>
-          <p:cNvPr id="158" name="Arrow 151"/>
+          <p:cNvPr id="160" name="Arrow 151"/>
           <p:cNvCxnSpPr/>
           <p:nvPr/>
         </p:nvCxnSpPr>
@@ -9392,7 +9440,7 @@
       </p:cxnSp>
       <p:sp>
         <p:nvSpPr>
-          <p:cNvPr id="159" name="Shape 152"/>
+          <p:cNvPr id="161" name="Shape 152"/>
           <p:cNvSpPr/>
           <p:nvPr/>
         </p:nvSpPr>
@@ -9438,7 +9486,7 @@
       </p:sp>
       <p:sp>
         <p:nvSpPr>
-          <p:cNvPr id="160" name="Text 153"/>
+          <p:cNvPr id="162" name="Text 153"/>
           <p:cNvSpPr txBox="1"/>
           <p:nvPr/>
         </p:nvSpPr>
@@ -9473,7 +9521,7 @@
       </p:sp>
       <p:cxnSp>
         <p:nvCxnSpPr>
-          <p:cNvPr id="161" name="Arrow 154"/>
+          <p:cNvPr id="163" name="Arrow 154"/>
           <p:cNvCxnSpPr/>
           <p:nvPr/>
         </p:nvCxnSpPr>
@@ -9509,7 +9557,7 @@
       </p:cxnSp>
       <p:sp>
         <p:nvSpPr>
-          <p:cNvPr id="162" name="Shape 155"/>
+          <p:cNvPr id="164" name="Shape 155"/>
           <p:cNvSpPr/>
           <p:nvPr/>
         </p:nvSpPr>
@@ -9555,7 +9603,7 @@
       </p:sp>
       <p:sp>
         <p:nvSpPr>
-          <p:cNvPr id="163" name="Text 156"/>
+          <p:cNvPr id="165" name="Text 156"/>
           <p:cNvSpPr txBox="1"/>
           <p:nvPr/>
         </p:nvSpPr>
@@ -9590,7 +9638,7 @@
       </p:sp>
       <p:cxnSp>
         <p:nvCxnSpPr>
-          <p:cNvPr id="164" name="Arrow 157"/>
+          <p:cNvPr id="166" name="Arrow 157"/>
           <p:cNvCxnSpPr/>
           <p:nvPr/>
         </p:nvCxnSpPr>
@@ -9626,7 +9674,7 @@
       </p:cxnSp>
       <p:sp>
         <p:nvSpPr>
-          <p:cNvPr id="165" name="Shape 158"/>
+          <p:cNvPr id="167" name="Shape 158"/>
           <p:cNvSpPr/>
           <p:nvPr/>
         </p:nvSpPr>
@@ -9672,7 +9720,7 @@
       </p:sp>
       <p:sp>
         <p:nvSpPr>
-          <p:cNvPr id="166" name="Text 159"/>
+          <p:cNvPr id="168" name="Text 159"/>
           <p:cNvSpPr txBox="1"/>
           <p:nvPr/>
         </p:nvSpPr>
@@ -9700,14 +9748,14 @@
                 </a:solidFill>
                 <a:latin typeface="Trenda IG Text"/>
               </a:rPr>
-              <a:t>Release 6 fields</a:t>
+              <a:t>Release minimum fields</a:t>
             </a:r>
           </a:p>
         </p:txBody>
       </p:sp>
       <p:cxnSp>
         <p:nvCxnSpPr>
-          <p:cNvPr id="167" name="Arrow 160"/>
+          <p:cNvPr id="169" name="Arrow 160"/>
           <p:cNvCxnSpPr/>
           <p:nvPr/>
         </p:nvCxnSpPr>
@@ -9743,7 +9791,7 @@
       </p:cxnSp>
       <p:sp>
         <p:nvSpPr>
-          <p:cNvPr id="168" name="Shape 161"/>
+          <p:cNvPr id="170" name="Shape 161"/>
           <p:cNvSpPr/>
           <p:nvPr/>
         </p:nvSpPr>
@@ -9789,7 +9837,7 @@
       </p:sp>
       <p:sp>
         <p:nvSpPr>
-          <p:cNvPr id="169" name="Text 162"/>
+          <p:cNvPr id="171" name="Text 162"/>
           <p:cNvSpPr txBox="1"/>
           <p:nvPr/>
         </p:nvSpPr>
@@ -9824,7 +9872,7 @@
       </p:sp>
       <p:cxnSp>
         <p:nvCxnSpPr>
-          <p:cNvPr id="170" name="Arrow 163"/>
+          <p:cNvPr id="172" name="Arrow 163"/>
           <p:cNvCxnSpPr/>
           <p:nvPr/>
         </p:nvCxnSpPr>
@@ -9860,7 +9908,7 @@
       </p:cxnSp>
       <p:sp>
         <p:nvSpPr>
-          <p:cNvPr id="171" name="Shape 164"/>
+          <p:cNvPr id="173" name="Shape 164"/>
           <p:cNvSpPr/>
           <p:nvPr/>
         </p:nvSpPr>
@@ -9906,7 +9954,7 @@
       </p:sp>
       <p:sp>
         <p:nvSpPr>
-          <p:cNvPr id="172" name="Text 165"/>
+          <p:cNvPr id="174" name="Text 165"/>
           <p:cNvSpPr txBox="1"/>
           <p:nvPr/>
         </p:nvSpPr>
@@ -10551,16 +10599,40 @@
           <a:p/>
         </p:txBody>
       </p:sp>
-      <p:sp>
-        <p:nvSpPr>
-          <p:cNvPr id="17" name="Text 16"/>
-          <p:cNvSpPr txBox="1"/>
-          <p:nvPr/>
-        </p:nvSpPr>
-        <p:spPr>
-          <a:xfrm>
-            <a:off x="658368" y="1810512"/>
-            <a:ext cx="1508760" cy="384048"/>
+      <p:pic>
+        <p:nvPicPr>
+          <p:cNvPr id="17" name="Picture 16" descr="harness.png"/>
+          <p:cNvPicPr>
+            <a:picLocks noChangeAspect="1"/>
+          </p:cNvPicPr>
+          <p:nvPr/>
+        </p:nvPicPr>
+        <p:blipFill>
+          <a:blip r:embed="rId2"/>
+          <a:stretch>
+            <a:fillRect/>
+          </a:stretch>
+        </p:blipFill>
+        <p:spPr>
+          <a:xfrm>
+            <a:off x="658368" y="1865376"/>
+            <a:ext cx="256032" cy="256032"/>
+          </a:xfrm>
+          <a:prstGeom prst="rect">
+            <a:avLst/>
+          </a:prstGeom>
+        </p:spPr>
+      </p:pic>
+      <p:sp>
+        <p:nvSpPr>
+          <p:cNvPr id="18" name="Text 16"/>
+          <p:cNvSpPr txBox="1"/>
+          <p:nvPr/>
+        </p:nvSpPr>
+        <p:spPr>
+          <a:xfrm>
+            <a:off x="987552" y="1810512"/>
+            <a:ext cx="1179576" cy="384048"/>
           </a:xfrm>
           <a:prstGeom prst="rect">
             <a:avLst/>
@@ -10606,16 +10678,40 @@
           </a:p>
         </p:txBody>
       </p:sp>
-      <p:sp>
-        <p:nvSpPr>
-          <p:cNvPr id="18" name="Text 17"/>
-          <p:cNvSpPr txBox="1"/>
-          <p:nvPr/>
-        </p:nvSpPr>
-        <p:spPr>
-          <a:xfrm>
-            <a:off x="658368" y="2313432"/>
-            <a:ext cx="1508760" cy="182880"/>
+      <p:pic>
+        <p:nvPicPr>
+          <p:cNvPr id="19" name="Picture 18" descr="openai-white.png"/>
+          <p:cNvPicPr>
+            <a:picLocks noChangeAspect="1"/>
+          </p:cNvPicPr>
+          <p:nvPr/>
+        </p:nvPicPr>
+        <p:blipFill>
+          <a:blip r:embed="rId3"/>
+          <a:stretch>
+            <a:fillRect/>
+          </a:stretch>
+        </p:blipFill>
+        <p:spPr>
+          <a:xfrm>
+            <a:off x="658368" y="2322576"/>
+            <a:ext cx="182880" cy="182880"/>
+          </a:xfrm>
+          <a:prstGeom prst="rect">
+            <a:avLst/>
+          </a:prstGeom>
+        </p:spPr>
+      </p:pic>
+      <p:sp>
+        <p:nvSpPr>
+          <p:cNvPr id="20" name="Text 17"/>
+          <p:cNvSpPr txBox="1"/>
+          <p:nvPr/>
+        </p:nvSpPr>
+        <p:spPr>
+          <a:xfrm>
+            <a:off x="914400" y="2313432"/>
+            <a:ext cx="1252728" cy="182880"/>
           </a:xfrm>
           <a:prstGeom prst="rect">
             <a:avLst/>
@@ -10642,14 +10738,14 @@
       </p:sp>
       <p:sp>
         <p:nvSpPr>
-          <p:cNvPr id="19" name="Text 18"/>
-          <p:cNvSpPr txBox="1"/>
-          <p:nvPr/>
-        </p:nvSpPr>
-        <p:spPr>
-          <a:xfrm>
-            <a:off x="658368" y="2496312"/>
-            <a:ext cx="1508760" cy="274320"/>
+          <p:cNvPr id="21" name="Text 18"/>
+          <p:cNvSpPr txBox="1"/>
+          <p:nvPr/>
+        </p:nvSpPr>
+        <p:spPr>
+          <a:xfrm>
+            <a:off x="914400" y="2496312"/>
+            <a:ext cx="1252728" cy="274320"/>
           </a:xfrm>
           <a:prstGeom prst="rect">
             <a:avLst/>
@@ -10674,16 +10770,40 @@
           </a:p>
         </p:txBody>
       </p:sp>
-      <p:sp>
-        <p:nvSpPr>
-          <p:cNvPr id="20" name="Text 19"/>
-          <p:cNvSpPr txBox="1"/>
-          <p:nvPr/>
-        </p:nvSpPr>
-        <p:spPr>
-          <a:xfrm>
-            <a:off x="658368" y="2862072"/>
-            <a:ext cx="1508760" cy="182880"/>
+      <p:pic>
+        <p:nvPicPr>
+          <p:cNvPr id="22" name="Picture 21" descr="salesforce.png"/>
+          <p:cNvPicPr>
+            <a:picLocks noChangeAspect="1"/>
+          </p:cNvPicPr>
+          <p:nvPr/>
+        </p:nvPicPr>
+        <p:blipFill>
+          <a:blip r:embed="rId4"/>
+          <a:stretch>
+            <a:fillRect/>
+          </a:stretch>
+        </p:blipFill>
+        <p:spPr>
+          <a:xfrm>
+            <a:off x="658368" y="2871216"/>
+            <a:ext cx="182880" cy="182880"/>
+          </a:xfrm>
+          <a:prstGeom prst="rect">
+            <a:avLst/>
+          </a:prstGeom>
+        </p:spPr>
+      </p:pic>
+      <p:sp>
+        <p:nvSpPr>
+          <p:cNvPr id="23" name="Text 19"/>
+          <p:cNvSpPr txBox="1"/>
+          <p:nvPr/>
+        </p:nvSpPr>
+        <p:spPr>
+          <a:xfrm>
+            <a:off x="914400" y="2862072"/>
+            <a:ext cx="1252728" cy="182880"/>
           </a:xfrm>
           <a:prstGeom prst="rect">
             <a:avLst/>
@@ -10710,14 +10830,14 @@
       </p:sp>
       <p:sp>
         <p:nvSpPr>
-          <p:cNvPr id="21" name="Text 20"/>
-          <p:cNvSpPr txBox="1"/>
-          <p:nvPr/>
-        </p:nvSpPr>
-        <p:spPr>
-          <a:xfrm>
-            <a:off x="658368" y="3044952"/>
-            <a:ext cx="1508760" cy="274320"/>
+          <p:cNvPr id="24" name="Text 20"/>
+          <p:cNvSpPr txBox="1"/>
+          <p:nvPr/>
+        </p:nvSpPr>
+        <p:spPr>
+          <a:xfrm>
+            <a:off x="914400" y="3044952"/>
+            <a:ext cx="1252728" cy="274320"/>
           </a:xfrm>
           <a:prstGeom prst="rect">
             <a:avLst/>
@@ -10742,16 +10862,40 @@
           </a:p>
         </p:txBody>
       </p:sp>
-      <p:sp>
-        <p:nvSpPr>
-          <p:cNvPr id="22" name="Text 21"/>
-          <p:cNvSpPr txBox="1"/>
-          <p:nvPr/>
-        </p:nvSpPr>
-        <p:spPr>
-          <a:xfrm>
-            <a:off x="658368" y="3410712"/>
-            <a:ext cx="1508760" cy="182880"/>
+      <p:pic>
+        <p:nvPicPr>
+          <p:cNvPr id="25" name="Picture 24" descr="people.png"/>
+          <p:cNvPicPr>
+            <a:picLocks noChangeAspect="1"/>
+          </p:cNvPicPr>
+          <p:nvPr/>
+        </p:nvPicPr>
+        <p:blipFill>
+          <a:blip r:embed="rId5"/>
+          <a:stretch>
+            <a:fillRect/>
+          </a:stretch>
+        </p:blipFill>
+        <p:spPr>
+          <a:xfrm>
+            <a:off x="658368" y="3419856"/>
+            <a:ext cx="182880" cy="182880"/>
+          </a:xfrm>
+          <a:prstGeom prst="rect">
+            <a:avLst/>
+          </a:prstGeom>
+        </p:spPr>
+      </p:pic>
+      <p:sp>
+        <p:nvSpPr>
+          <p:cNvPr id="26" name="Text 21"/>
+          <p:cNvSpPr txBox="1"/>
+          <p:nvPr/>
+        </p:nvSpPr>
+        <p:spPr>
+          <a:xfrm>
+            <a:off x="914400" y="3410712"/>
+            <a:ext cx="1252728" cy="182880"/>
           </a:xfrm>
           <a:prstGeom prst="rect">
             <a:avLst/>
@@ -10778,14 +10922,14 @@
       </p:sp>
       <p:sp>
         <p:nvSpPr>
-          <p:cNvPr id="23" name="Text 22"/>
-          <p:cNvSpPr txBox="1"/>
-          <p:nvPr/>
-        </p:nvSpPr>
-        <p:spPr>
-          <a:xfrm>
-            <a:off x="658368" y="3593592"/>
-            <a:ext cx="1508760" cy="274320"/>
+          <p:cNvPr id="27" name="Text 22"/>
+          <p:cNvSpPr txBox="1"/>
+          <p:nvPr/>
+        </p:nvSpPr>
+        <p:spPr>
+          <a:xfrm>
+            <a:off x="914400" y="3593592"/>
+            <a:ext cx="1252728" cy="274320"/>
           </a:xfrm>
           <a:prstGeom prst="rect">
             <a:avLst/>
@@ -10810,16 +10954,40 @@
           </a:p>
         </p:txBody>
       </p:sp>
-      <p:sp>
-        <p:nvSpPr>
-          <p:cNvPr id="24" name="Text 23"/>
-          <p:cNvSpPr txBox="1"/>
-          <p:nvPr/>
-        </p:nvSpPr>
-        <p:spPr>
-          <a:xfrm>
-            <a:off x="658368" y="3959352"/>
-            <a:ext cx="1508760" cy="182880"/>
+      <p:pic>
+        <p:nvPicPr>
+          <p:cNvPr id="28" name="Picture 27" descr="looker.png"/>
+          <p:cNvPicPr>
+            <a:picLocks noChangeAspect="1"/>
+          </p:cNvPicPr>
+          <p:nvPr/>
+        </p:nvPicPr>
+        <p:blipFill>
+          <a:blip r:embed="rId6"/>
+          <a:stretch>
+            <a:fillRect/>
+          </a:stretch>
+        </p:blipFill>
+        <p:spPr>
+          <a:xfrm>
+            <a:off x="658368" y="3968496"/>
+            <a:ext cx="182880" cy="182880"/>
+          </a:xfrm>
+          <a:prstGeom prst="rect">
+            <a:avLst/>
+          </a:prstGeom>
+        </p:spPr>
+      </p:pic>
+      <p:sp>
+        <p:nvSpPr>
+          <p:cNvPr id="29" name="Text 23"/>
+          <p:cNvSpPr txBox="1"/>
+          <p:nvPr/>
+        </p:nvSpPr>
+        <p:spPr>
+          <a:xfrm>
+            <a:off x="914400" y="3959352"/>
+            <a:ext cx="1252728" cy="182880"/>
           </a:xfrm>
           <a:prstGeom prst="rect">
             <a:avLst/>
@@ -10846,14 +11014,14 @@
       </p:sp>
       <p:sp>
         <p:nvSpPr>
-          <p:cNvPr id="25" name="Text 24"/>
-          <p:cNvSpPr txBox="1"/>
-          <p:nvPr/>
-        </p:nvSpPr>
-        <p:spPr>
-          <a:xfrm>
-            <a:off x="658368" y="4142232"/>
-            <a:ext cx="1508760" cy="274320"/>
+          <p:cNvPr id="30" name="Text 24"/>
+          <p:cNvSpPr txBox="1"/>
+          <p:nvPr/>
+        </p:nvSpPr>
+        <p:spPr>
+          <a:xfrm>
+            <a:off x="914400" y="4142232"/>
+            <a:ext cx="1252728" cy="274320"/>
           </a:xfrm>
           <a:prstGeom prst="rect">
             <a:avLst/>
@@ -10880,7 +11048,7 @@
       </p:sp>
       <p:sp>
         <p:nvSpPr>
-          <p:cNvPr id="26" name="Shape 25"/>
+          <p:cNvPr id="31" name="Shape 25"/>
           <p:cNvSpPr/>
           <p:nvPr/>
         </p:nvSpPr>
@@ -10926,7 +11094,7 @@
       </p:sp>
       <p:sp>
         <p:nvSpPr>
-          <p:cNvPr id="27" name="Text 26"/>
+          <p:cNvPr id="32" name="Text 26"/>
           <p:cNvSpPr txBox="1"/>
           <p:nvPr/>
         </p:nvSpPr>
@@ -10959,16 +11127,40 @@
           </a:p>
         </p:txBody>
       </p:sp>
-      <p:sp>
-        <p:nvSpPr>
-          <p:cNvPr id="28" name="Text 27"/>
-          <p:cNvSpPr txBox="1"/>
-          <p:nvPr/>
-        </p:nvSpPr>
-        <p:spPr>
-          <a:xfrm>
-            <a:off x="658368" y="4507992"/>
-            <a:ext cx="1508760" cy="182880"/>
+      <p:pic>
+        <p:nvPicPr>
+          <p:cNvPr id="33" name="Picture 32" descr="jira.png"/>
+          <p:cNvPicPr>
+            <a:picLocks noChangeAspect="1"/>
+          </p:cNvPicPr>
+          <p:nvPr/>
+        </p:nvPicPr>
+        <p:blipFill>
+          <a:blip r:embed="rId7"/>
+          <a:stretch>
+            <a:fillRect/>
+          </a:stretch>
+        </p:blipFill>
+        <p:spPr>
+          <a:xfrm>
+            <a:off x="658368" y="4517136"/>
+            <a:ext cx="182880" cy="182880"/>
+          </a:xfrm>
+          <a:prstGeom prst="rect">
+            <a:avLst/>
+          </a:prstGeom>
+        </p:spPr>
+      </p:pic>
+      <p:sp>
+        <p:nvSpPr>
+          <p:cNvPr id="34" name="Text 27"/>
+          <p:cNvSpPr txBox="1"/>
+          <p:nvPr/>
+        </p:nvSpPr>
+        <p:spPr>
+          <a:xfrm>
+            <a:off x="914400" y="4507992"/>
+            <a:ext cx="1252728" cy="182880"/>
           </a:xfrm>
           <a:prstGeom prst="rect">
             <a:avLst/>
@@ -10995,14 +11187,14 @@
       </p:sp>
       <p:sp>
         <p:nvSpPr>
-          <p:cNvPr id="29" name="Text 28"/>
-          <p:cNvSpPr txBox="1"/>
-          <p:nvPr/>
-        </p:nvSpPr>
-        <p:spPr>
-          <a:xfrm>
-            <a:off x="658368" y="4690872"/>
-            <a:ext cx="1508760" cy="274320"/>
+          <p:cNvPr id="35" name="Text 28"/>
+          <p:cNvSpPr txBox="1"/>
+          <p:nvPr/>
+        </p:nvSpPr>
+        <p:spPr>
+          <a:xfrm>
+            <a:off x="914400" y="4690872"/>
+            <a:ext cx="1252728" cy="274320"/>
           </a:xfrm>
           <a:prstGeom prst="rect">
             <a:avLst/>
@@ -11029,7 +11221,7 @@
       </p:sp>
       <p:sp>
         <p:nvSpPr>
-          <p:cNvPr id="30" name="Shape 29"/>
+          <p:cNvPr id="36" name="Shape 29"/>
           <p:cNvSpPr/>
           <p:nvPr/>
         </p:nvSpPr>
@@ -11073,7 +11265,7 @@
       </p:sp>
       <p:sp>
         <p:nvSpPr>
-          <p:cNvPr id="31" name="Text 30"/>
+          <p:cNvPr id="37" name="Text 30"/>
           <p:cNvSpPr txBox="1"/>
           <p:nvPr/>
         </p:nvSpPr>
@@ -11107,7 +11299,7 @@
       </p:sp>
       <p:sp>
         <p:nvSpPr>
-          <p:cNvPr id="32" name="Text 31"/>
+          <p:cNvPr id="38" name="Text 31"/>
           <p:cNvSpPr txBox="1"/>
           <p:nvPr/>
         </p:nvSpPr>
@@ -11141,7 +11333,7 @@
       </p:sp>
       <p:sp>
         <p:nvSpPr>
-          <p:cNvPr id="33" name="Text 32"/>
+          <p:cNvPr id="39" name="Text 32"/>
           <p:cNvSpPr txBox="1"/>
           <p:nvPr/>
         </p:nvSpPr>
@@ -11176,7 +11368,7 @@
       </p:sp>
       <p:sp>
         <p:nvSpPr>
-          <p:cNvPr id="34" name="Text 33"/>
+          <p:cNvPr id="40" name="Text 33"/>
           <p:cNvSpPr txBox="1"/>
           <p:nvPr/>
         </p:nvSpPr>
@@ -11211,7 +11403,7 @@
       </p:sp>
       <p:sp>
         <p:nvSpPr>
-          <p:cNvPr id="35" name="Text 34"/>
+          <p:cNvPr id="41" name="Text 34"/>
           <p:cNvSpPr txBox="1"/>
           <p:nvPr/>
         </p:nvSpPr>
@@ -11246,7 +11438,7 @@
       </p:sp>
       <p:sp>
         <p:nvSpPr>
-          <p:cNvPr id="36" name="Text 35"/>
+          <p:cNvPr id="42" name="Text 35"/>
           <p:cNvSpPr txBox="1"/>
           <p:nvPr/>
         </p:nvSpPr>
@@ -11281,7 +11473,7 @@
       </p:sp>
       <p:sp>
         <p:nvSpPr>
-          <p:cNvPr id="37" name="Text 36"/>
+          <p:cNvPr id="43" name="Text 36"/>
           <p:cNvSpPr txBox="1"/>
           <p:nvPr/>
         </p:nvSpPr>
@@ -11316,7 +11508,7 @@
       </p:sp>
       <p:sp>
         <p:nvSpPr>
-          <p:cNvPr id="38" name="Text 37"/>
+          <p:cNvPr id="44" name="Text 37"/>
           <p:cNvSpPr txBox="1"/>
           <p:nvPr/>
         </p:nvSpPr>
@@ -11351,7 +11543,7 @@
       </p:sp>
       <p:sp>
         <p:nvSpPr>
-          <p:cNvPr id="39" name="Shape 38"/>
+          <p:cNvPr id="45" name="Shape 38"/>
           <p:cNvSpPr/>
           <p:nvPr/>
         </p:nvSpPr>
@@ -11395,7 +11587,7 @@
       </p:sp>
       <p:sp>
         <p:nvSpPr>
-          <p:cNvPr id="40" name="Text 39"/>
+          <p:cNvPr id="46" name="Text 39"/>
           <p:cNvSpPr txBox="1"/>
           <p:nvPr/>
         </p:nvSpPr>
@@ -11429,7 +11621,7 @@
       </p:sp>
       <p:sp>
         <p:nvSpPr>
-          <p:cNvPr id="41" name="Text 40"/>
+          <p:cNvPr id="47" name="Text 40"/>
           <p:cNvSpPr txBox="1"/>
           <p:nvPr/>
         </p:nvSpPr>
@@ -11463,7 +11655,7 @@
       </p:sp>
       <p:sp>
         <p:nvSpPr>
-          <p:cNvPr id="42" name="Text 41"/>
+          <p:cNvPr id="48" name="Text 41"/>
           <p:cNvSpPr txBox="1"/>
           <p:nvPr/>
         </p:nvSpPr>
@@ -11498,7 +11690,7 @@
       </p:sp>
       <p:sp>
         <p:nvSpPr>
-          <p:cNvPr id="43" name="Text 42"/>
+          <p:cNvPr id="49" name="Text 42"/>
           <p:cNvSpPr txBox="1"/>
           <p:nvPr/>
         </p:nvSpPr>
@@ -11533,7 +11725,7 @@
       </p:sp>
       <p:sp>
         <p:nvSpPr>
-          <p:cNvPr id="44" name="Text 43"/>
+          <p:cNvPr id="50" name="Text 43"/>
           <p:cNvSpPr txBox="1"/>
           <p:nvPr/>
         </p:nvSpPr>
@@ -11568,7 +11760,7 @@
       </p:sp>
       <p:sp>
         <p:nvSpPr>
-          <p:cNvPr id="45" name="Text 44"/>
+          <p:cNvPr id="51" name="Text 44"/>
           <p:cNvSpPr txBox="1"/>
           <p:nvPr/>
         </p:nvSpPr>
@@ -11603,7 +11795,7 @@
       </p:sp>
       <p:sp>
         <p:nvSpPr>
-          <p:cNvPr id="46" name="Shape 45"/>
+          <p:cNvPr id="52" name="Shape 45"/>
           <p:cNvSpPr/>
           <p:nvPr/>
         </p:nvSpPr>
@@ -11649,7 +11841,7 @@
       </p:sp>
       <p:sp>
         <p:nvSpPr>
-          <p:cNvPr id="47" name="Text 46"/>
+          <p:cNvPr id="53" name="Text 46"/>
           <p:cNvSpPr txBox="1"/>
           <p:nvPr/>
         </p:nvSpPr>
@@ -11684,7 +11876,7 @@
       </p:sp>
       <p:sp>
         <p:nvSpPr>
-          <p:cNvPr id="48" name="Text 47"/>
+          <p:cNvPr id="54" name="Text 47"/>
           <p:cNvSpPr txBox="1"/>
           <p:nvPr/>
         </p:nvSpPr>
@@ -11719,7 +11911,7 @@
       </p:sp>
       <p:sp>
         <p:nvSpPr>
-          <p:cNvPr id="49" name="Text 48"/>
+          <p:cNvPr id="55" name="Text 48"/>
           <p:cNvSpPr txBox="1"/>
           <p:nvPr/>
         </p:nvSpPr>
@@ -11754,7 +11946,7 @@
       </p:sp>
       <p:sp>
         <p:nvSpPr>
-          <p:cNvPr id="50" name="Shape 49"/>
+          <p:cNvPr id="56" name="Shape 49"/>
           <p:cNvSpPr/>
           <p:nvPr/>
         </p:nvSpPr>
@@ -11800,7 +11992,7 @@
       </p:sp>
       <p:sp>
         <p:nvSpPr>
-          <p:cNvPr id="51" name="Text 50"/>
+          <p:cNvPr id="57" name="Text 50"/>
           <p:cNvSpPr txBox="1"/>
           <p:nvPr/>
         </p:nvSpPr>
@@ -11835,7 +12027,7 @@
       </p:sp>
       <p:sp>
         <p:nvSpPr>
-          <p:cNvPr id="52" name="Shape 51"/>
+          <p:cNvPr id="58" name="Shape 51"/>
           <p:cNvSpPr/>
           <p:nvPr/>
         </p:nvSpPr>
@@ -11879,7 +12071,7 @@
       </p:sp>
       <p:sp>
         <p:nvSpPr>
-          <p:cNvPr id="53" name="Text 52"/>
+          <p:cNvPr id="59" name="Text 52"/>
           <p:cNvSpPr txBox="1"/>
           <p:nvPr/>
         </p:nvSpPr>
@@ -11913,7 +12105,7 @@
       </p:sp>
       <p:sp>
         <p:nvSpPr>
-          <p:cNvPr id="54" name="Text 53"/>
+          <p:cNvPr id="60" name="Text 53"/>
           <p:cNvSpPr txBox="1"/>
           <p:nvPr/>
         </p:nvSpPr>
@@ -11947,7 +12139,7 @@
       </p:sp>
       <p:sp>
         <p:nvSpPr>
-          <p:cNvPr id="55" name="Text 54"/>
+          <p:cNvPr id="61" name="Text 54"/>
           <p:cNvSpPr txBox="1"/>
           <p:nvPr/>
         </p:nvSpPr>
@@ -11982,7 +12174,7 @@
       </p:sp>
       <p:sp>
         <p:nvSpPr>
-          <p:cNvPr id="56" name="Text 55"/>
+          <p:cNvPr id="62" name="Text 55"/>
           <p:cNvSpPr txBox="1"/>
           <p:nvPr/>
         </p:nvSpPr>
@@ -12017,7 +12209,7 @@
       </p:sp>
       <p:sp>
         <p:nvSpPr>
-          <p:cNvPr id="57" name="Text 56"/>
+          <p:cNvPr id="63" name="Text 56"/>
           <p:cNvSpPr txBox="1"/>
           <p:nvPr/>
         </p:nvSpPr>
@@ -12052,7 +12244,7 @@
       </p:sp>
       <p:sp>
         <p:nvSpPr>
-          <p:cNvPr id="58" name="Text 57"/>
+          <p:cNvPr id="64" name="Text 57"/>
           <p:cNvSpPr txBox="1"/>
           <p:nvPr/>
         </p:nvSpPr>
@@ -12087,7 +12279,7 @@
       </p:sp>
       <p:sp>
         <p:nvSpPr>
-          <p:cNvPr id="59" name="Text 58"/>
+          <p:cNvPr id="65" name="Text 58"/>
           <p:cNvSpPr txBox="1"/>
           <p:nvPr/>
         </p:nvSpPr>
@@ -12122,7 +12314,7 @@
       </p:sp>
       <p:sp>
         <p:nvSpPr>
-          <p:cNvPr id="60" name="Text 59"/>
+          <p:cNvPr id="66" name="Text 59"/>
           <p:cNvSpPr txBox="1"/>
           <p:nvPr/>
         </p:nvSpPr>
@@ -12157,7 +12349,7 @@
       </p:sp>
       <p:sp>
         <p:nvSpPr>
-          <p:cNvPr id="61" name="Shape 60"/>
+          <p:cNvPr id="67" name="Shape 60"/>
           <p:cNvSpPr/>
           <p:nvPr/>
         </p:nvSpPr>
@@ -12203,7 +12395,7 @@
       </p:sp>
       <p:sp>
         <p:nvSpPr>
-          <p:cNvPr id="62" name="Text 61"/>
+          <p:cNvPr id="68" name="Text 61"/>
           <p:cNvSpPr txBox="1"/>
           <p:nvPr/>
         </p:nvSpPr>
@@ -12238,7 +12430,7 @@
       </p:sp>
       <p:sp>
         <p:nvSpPr>
-          <p:cNvPr id="63" name="Text 62"/>
+          <p:cNvPr id="69" name="Text 62"/>
           <p:cNvSpPr txBox="1"/>
           <p:nvPr/>
         </p:nvSpPr>
@@ -12272,7 +12464,7 @@
       </p:sp>
       <p:sp>
         <p:nvSpPr>
-          <p:cNvPr id="64" name="Shape 63"/>
+          <p:cNvPr id="70" name="Shape 63"/>
           <p:cNvSpPr/>
           <p:nvPr/>
         </p:nvSpPr>
@@ -12318,7 +12510,7 @@
       </p:sp>
       <p:sp>
         <p:nvSpPr>
-          <p:cNvPr id="65" name="Text 64"/>
+          <p:cNvPr id="71" name="Text 64"/>
           <p:cNvSpPr txBox="1"/>
           <p:nvPr/>
         </p:nvSpPr>
@@ -12353,7 +12545,7 @@
       </p:sp>
       <p:sp>
         <p:nvSpPr>
-          <p:cNvPr id="66" name="Shape 65"/>
+          <p:cNvPr id="72" name="Shape 65"/>
           <p:cNvSpPr/>
           <p:nvPr/>
         </p:nvSpPr>
@@ -12399,7 +12591,7 @@
       </p:sp>
       <p:sp>
         <p:nvSpPr>
-          <p:cNvPr id="67" name="Text 66"/>
+          <p:cNvPr id="73" name="Text 66"/>
           <p:cNvSpPr txBox="1"/>
           <p:nvPr/>
         </p:nvSpPr>
@@ -12434,7 +12626,7 @@
       </p:sp>
       <p:sp>
         <p:nvSpPr>
-          <p:cNvPr id="68" name="Shape 67"/>
+          <p:cNvPr id="74" name="Shape 67"/>
           <p:cNvSpPr/>
           <p:nvPr/>
         </p:nvSpPr>
@@ -12480,7 +12672,7 @@
       </p:sp>
       <p:sp>
         <p:nvSpPr>
-          <p:cNvPr id="69" name="Text 68"/>
+          <p:cNvPr id="75" name="Text 68"/>
           <p:cNvSpPr txBox="1"/>
           <p:nvPr/>
         </p:nvSpPr>
@@ -12515,7 +12707,7 @@
       </p:sp>
       <p:sp>
         <p:nvSpPr>
-          <p:cNvPr id="70" name="Shape 69"/>
+          <p:cNvPr id="76" name="Shape 69"/>
           <p:cNvSpPr/>
           <p:nvPr/>
         </p:nvSpPr>
@@ -12561,7 +12753,7 @@
       </p:sp>
       <p:sp>
         <p:nvSpPr>
-          <p:cNvPr id="71" name="Text 70"/>
+          <p:cNvPr id="77" name="Text 70"/>
           <p:cNvSpPr txBox="1"/>
           <p:nvPr/>
         </p:nvSpPr>
@@ -12596,7 +12788,7 @@
       </p:sp>
       <p:sp>
         <p:nvSpPr>
-          <p:cNvPr id="72" name="Shape 71"/>
+          <p:cNvPr id="78" name="Shape 71"/>
           <p:cNvSpPr/>
           <p:nvPr/>
         </p:nvSpPr>
@@ -12642,7 +12834,7 @@
       </p:sp>
       <p:sp>
         <p:nvSpPr>
-          <p:cNvPr id="73" name="Text 72"/>
+          <p:cNvPr id="79" name="Text 72"/>
           <p:cNvSpPr txBox="1"/>
           <p:nvPr/>
         </p:nvSpPr>
@@ -12677,7 +12869,7 @@
       </p:sp>
       <p:sp>
         <p:nvSpPr>
-          <p:cNvPr id="74" name="Shape 73"/>
+          <p:cNvPr id="80" name="Shape 73"/>
           <p:cNvSpPr/>
           <p:nvPr/>
         </p:nvSpPr>
@@ -12723,7 +12915,7 @@
       </p:sp>
       <p:sp>
         <p:nvSpPr>
-          <p:cNvPr id="75" name="Text 74"/>
+          <p:cNvPr id="81" name="Text 74"/>
           <p:cNvSpPr txBox="1"/>
           <p:nvPr/>
         </p:nvSpPr>
@@ -12758,7 +12950,7 @@
       </p:sp>
       <p:sp>
         <p:nvSpPr>
-          <p:cNvPr id="76" name="Shape 75"/>
+          <p:cNvPr id="82" name="Shape 75"/>
           <p:cNvSpPr/>
           <p:nvPr/>
         </p:nvSpPr>
@@ -12804,7 +12996,7 @@
       </p:sp>
       <p:sp>
         <p:nvSpPr>
-          <p:cNvPr id="77" name="Text 76"/>
+          <p:cNvPr id="83" name="Text 76"/>
           <p:cNvSpPr txBox="1"/>
           <p:nvPr/>
         </p:nvSpPr>
@@ -12839,7 +13031,7 @@
       </p:sp>
       <p:sp>
         <p:nvSpPr>
-          <p:cNvPr id="78" name="Shape 77"/>
+          <p:cNvPr id="84" name="Shape 77"/>
           <p:cNvSpPr/>
           <p:nvPr/>
         </p:nvSpPr>
@@ -12883,7 +13075,7 @@
       </p:sp>
       <p:sp>
         <p:nvSpPr>
-          <p:cNvPr id="79" name="Text 78"/>
+          <p:cNvPr id="85" name="Text 78"/>
           <p:cNvSpPr txBox="1"/>
           <p:nvPr/>
         </p:nvSpPr>
@@ -12917,7 +13109,7 @@
       </p:sp>
       <p:sp>
         <p:nvSpPr>
-          <p:cNvPr id="80" name="Text 79"/>
+          <p:cNvPr id="86" name="Text 79"/>
           <p:cNvSpPr txBox="1"/>
           <p:nvPr/>
         </p:nvSpPr>
@@ -12951,7 +13143,7 @@
       </p:sp>
       <p:sp>
         <p:nvSpPr>
-          <p:cNvPr id="81" name="Text 80"/>
+          <p:cNvPr id="87" name="Text 80"/>
           <p:cNvSpPr txBox="1"/>
           <p:nvPr/>
         </p:nvSpPr>
@@ -12985,7 +13177,7 @@
       </p:sp>
       <p:sp>
         <p:nvSpPr>
-          <p:cNvPr id="82" name="Text 81"/>
+          <p:cNvPr id="88" name="Text 81"/>
           <p:cNvSpPr txBox="1"/>
           <p:nvPr/>
         </p:nvSpPr>
@@ -13019,7 +13211,7 @@
       </p:sp>
       <p:sp>
         <p:nvSpPr>
-          <p:cNvPr id="83" name="Text 82"/>
+          <p:cNvPr id="89" name="Text 82"/>
           <p:cNvSpPr txBox="1"/>
           <p:nvPr/>
         </p:nvSpPr>
@@ -13053,7 +13245,7 @@
       </p:sp>
       <p:sp>
         <p:nvSpPr>
-          <p:cNvPr id="84" name="Text 83"/>
+          <p:cNvPr id="90" name="Text 83"/>
           <p:cNvSpPr txBox="1"/>
           <p:nvPr/>
         </p:nvSpPr>
@@ -13087,7 +13279,7 @@
       </p:sp>
       <p:sp>
         <p:nvSpPr>
-          <p:cNvPr id="85" name="Shape 84"/>
+          <p:cNvPr id="91" name="Shape 84"/>
           <p:cNvSpPr/>
           <p:nvPr/>
         </p:nvSpPr>
@@ -13133,7 +13325,7 @@
       </p:sp>
       <p:sp>
         <p:nvSpPr>
-          <p:cNvPr id="86" name="Text 85"/>
+          <p:cNvPr id="92" name="Text 85"/>
           <p:cNvSpPr txBox="1"/>
           <p:nvPr/>
         </p:nvSpPr>
@@ -13168,7 +13360,7 @@
       </p:sp>
       <p:sp>
         <p:nvSpPr>
-          <p:cNvPr id="87" name="Text 86"/>
+          <p:cNvPr id="93" name="Text 86"/>
           <p:cNvSpPr txBox="1"/>
           <p:nvPr/>
         </p:nvSpPr>
@@ -13202,7 +13394,7 @@
       </p:sp>
       <p:sp>
         <p:nvSpPr>
-          <p:cNvPr id="88" name="Shape 87"/>
+          <p:cNvPr id="94" name="Shape 87"/>
           <p:cNvSpPr/>
           <p:nvPr/>
         </p:nvSpPr>
@@ -13248,7 +13440,7 @@
       </p:sp>
       <p:sp>
         <p:nvSpPr>
-          <p:cNvPr id="89" name="Text 88"/>
+          <p:cNvPr id="95" name="Text 88"/>
           <p:cNvSpPr txBox="1"/>
           <p:nvPr/>
         </p:nvSpPr>
@@ -13283,7 +13475,7 @@
       </p:sp>
       <p:sp>
         <p:nvSpPr>
-          <p:cNvPr id="90" name="Text 89"/>
+          <p:cNvPr id="96" name="Text 89"/>
           <p:cNvSpPr txBox="1"/>
           <p:nvPr/>
         </p:nvSpPr>
@@ -13317,7 +13509,7 @@
       </p:sp>
       <p:sp>
         <p:nvSpPr>
-          <p:cNvPr id="91" name="Text 90"/>
+          <p:cNvPr id="97" name="Text 90"/>
           <p:cNvSpPr txBox="1"/>
           <p:nvPr/>
         </p:nvSpPr>
@@ -13351,7 +13543,7 @@
       </p:sp>
       <p:sp>
         <p:nvSpPr>
-          <p:cNvPr id="92" name="Text 91"/>
+          <p:cNvPr id="98" name="Text 91"/>
           <p:cNvSpPr txBox="1"/>
           <p:nvPr/>
         </p:nvSpPr>
@@ -13385,7 +13577,7 @@
       </p:sp>
       <p:sp>
         <p:nvSpPr>
-          <p:cNvPr id="93" name="Text 92"/>
+          <p:cNvPr id="99" name="Text 92"/>
           <p:cNvSpPr txBox="1"/>
           <p:nvPr/>
         </p:nvSpPr>
@@ -13419,7 +13611,7 @@
       </p:sp>
       <p:sp>
         <p:nvSpPr>
-          <p:cNvPr id="94" name="Shape 93"/>
+          <p:cNvPr id="100" name="Shape 93"/>
           <p:cNvSpPr/>
           <p:nvPr/>
         </p:nvSpPr>
@@ -13465,7 +13657,7 @@
       </p:sp>
       <p:sp>
         <p:nvSpPr>
-          <p:cNvPr id="95" name="Shape 94"/>
+          <p:cNvPr id="101" name="Shape 94"/>
           <p:cNvSpPr/>
           <p:nvPr/>
         </p:nvSpPr>
@@ -13507,7 +13699,7 @@
       </p:sp>
       <p:sp>
         <p:nvSpPr>
-          <p:cNvPr id="96" name="Text 95"/>
+          <p:cNvPr id="102" name="Text 95"/>
           <p:cNvSpPr txBox="1"/>
           <p:nvPr/>
         </p:nvSpPr>
@@ -13542,7 +13734,7 @@
       </p:sp>
       <p:sp>
         <p:nvSpPr>
-          <p:cNvPr id="97" name="Text 96"/>
+          <p:cNvPr id="103" name="Text 96"/>
           <p:cNvSpPr txBox="1"/>
           <p:nvPr/>
         </p:nvSpPr>
@@ -13576,7 +13768,7 @@
       </p:sp>
       <p:sp>
         <p:nvSpPr>
-          <p:cNvPr id="98" name="Text 97"/>
+          <p:cNvPr id="104" name="Text 97"/>
           <p:cNvSpPr txBox="1"/>
           <p:nvPr/>
         </p:nvSpPr>
@@ -13610,7 +13802,7 @@
       </p:sp>
       <p:sp>
         <p:nvSpPr>
-          <p:cNvPr id="99" name="Text 98"/>
+          <p:cNvPr id="105" name="Text 98"/>
           <p:cNvSpPr txBox="1"/>
           <p:nvPr/>
         </p:nvSpPr>
@@ -13644,7 +13836,7 @@
       </p:sp>
       <p:sp>
         <p:nvSpPr>
-          <p:cNvPr id="100" name="Shape 99"/>
+          <p:cNvPr id="106" name="Shape 99"/>
           <p:cNvSpPr/>
           <p:nvPr/>
         </p:nvSpPr>
@@ -13690,7 +13882,7 @@
       </p:sp>
       <p:sp>
         <p:nvSpPr>
-          <p:cNvPr id="101" name="Shape 100"/>
+          <p:cNvPr id="107" name="Shape 100"/>
           <p:cNvSpPr/>
           <p:nvPr/>
         </p:nvSpPr>
@@ -13732,7 +13924,7 @@
       </p:sp>
       <p:sp>
         <p:nvSpPr>
-          <p:cNvPr id="102" name="Text 101"/>
+          <p:cNvPr id="108" name="Text 101"/>
           <p:cNvSpPr txBox="1"/>
           <p:nvPr/>
         </p:nvSpPr>
@@ -13767,7 +13959,7 @@
       </p:sp>
       <p:sp>
         <p:nvSpPr>
-          <p:cNvPr id="103" name="Text 102"/>
+          <p:cNvPr id="109" name="Text 102"/>
           <p:cNvSpPr txBox="1"/>
           <p:nvPr/>
         </p:nvSpPr>
@@ -13801,7 +13993,7 @@
       </p:sp>
       <p:sp>
         <p:nvSpPr>
-          <p:cNvPr id="104" name="Text 103"/>
+          <p:cNvPr id="110" name="Text 103"/>
           <p:cNvSpPr txBox="1"/>
           <p:nvPr/>
         </p:nvSpPr>
@@ -13835,7 +14027,7 @@
       </p:sp>
       <p:sp>
         <p:nvSpPr>
-          <p:cNvPr id="105" name="Text 104"/>
+          <p:cNvPr id="111" name="Text 104"/>
           <p:cNvSpPr txBox="1"/>
           <p:nvPr/>
         </p:nvSpPr>
@@ -13869,7 +14061,7 @@
       </p:sp>
       <p:sp>
         <p:nvSpPr>
-          <p:cNvPr id="106" name="Shape 105"/>
+          <p:cNvPr id="112" name="Shape 105"/>
           <p:cNvSpPr/>
           <p:nvPr/>
         </p:nvSpPr>
@@ -13915,7 +14107,7 @@
       </p:sp>
       <p:sp>
         <p:nvSpPr>
-          <p:cNvPr id="107" name="Shape 106"/>
+          <p:cNvPr id="113" name="Shape 106"/>
           <p:cNvSpPr/>
           <p:nvPr/>
         </p:nvSpPr>
@@ -13957,7 +14149,7 @@
       </p:sp>
       <p:sp>
         <p:nvSpPr>
-          <p:cNvPr id="108" name="Text 107"/>
+          <p:cNvPr id="114" name="Text 107"/>
           <p:cNvSpPr txBox="1"/>
           <p:nvPr/>
         </p:nvSpPr>
@@ -13992,7 +14184,7 @@
       </p:sp>
       <p:sp>
         <p:nvSpPr>
-          <p:cNvPr id="109" name="Text 108"/>
+          <p:cNvPr id="115" name="Text 108"/>
           <p:cNvSpPr txBox="1"/>
           <p:nvPr/>
         </p:nvSpPr>
@@ -14026,7 +14218,7 @@
       </p:sp>
       <p:sp>
         <p:nvSpPr>
-          <p:cNvPr id="110" name="Text 109"/>
+          <p:cNvPr id="116" name="Text 109"/>
           <p:cNvSpPr txBox="1"/>
           <p:nvPr/>
         </p:nvSpPr>
@@ -14053,14 +14245,14 @@
                 </a:solidFill>
                 <a:latin typeface="Trenda IG Text"/>
               </a:rPr>
-              <a:t>Collibra policy masks PHI; only counts and tokens; six fields released after review.</a:t>
-            </a:r>
-          </a:p>
-        </p:txBody>
-      </p:sp>
-      <p:sp>
-        <p:nvSpPr>
-          <p:cNvPr id="111" name="Text 110"/>
+              <a:t>Collibra policy masks PHI; only counts and tokens; minimum fields released after review.</a:t>
+            </a:r>
+          </a:p>
+        </p:txBody>
+      </p:sp>
+      <p:sp>
+        <p:nvSpPr>
+          <p:cNvPr id="117" name="Text 110"/>
           <p:cNvSpPr txBox="1"/>
           <p:nvPr/>
         </p:nvSpPr>
@@ -14094,7 +14286,7 @@
       </p:sp>
       <p:sp>
         <p:nvSpPr>
-          <p:cNvPr id="112" name="Shape 111"/>
+          <p:cNvPr id="118" name="Shape 111"/>
           <p:cNvSpPr/>
           <p:nvPr/>
         </p:nvSpPr>
@@ -14138,7 +14330,7 @@
       </p:sp>
       <p:sp>
         <p:nvSpPr>
-          <p:cNvPr id="113" name="Text 112"/>
+          <p:cNvPr id="119" name="Text 112"/>
           <p:cNvSpPr txBox="1"/>
           <p:nvPr/>
         </p:nvSpPr>
@@ -14172,7 +14364,7 @@
       </p:sp>
       <p:sp>
         <p:nvSpPr>
-          <p:cNvPr id="114" name="Text 113"/>
+          <p:cNvPr id="120" name="Text 113"/>
           <p:cNvSpPr txBox="1"/>
           <p:nvPr/>
         </p:nvSpPr>
@@ -14215,16 +14407,40 @@
           </a:p>
         </p:txBody>
       </p:sp>
-      <p:sp>
-        <p:nvSpPr>
-          <p:cNvPr id="115" name="Text 114"/>
-          <p:cNvSpPr txBox="1"/>
-          <p:nvPr/>
-        </p:nvSpPr>
-        <p:spPr>
-          <a:xfrm>
-            <a:off x="2743200" y="5504688"/>
-            <a:ext cx="1678838" cy="237744"/>
+      <p:pic>
+        <p:nvPicPr>
+          <p:cNvPr id="121" name="Picture 120" descr="salesforce.png"/>
+          <p:cNvPicPr>
+            <a:picLocks noChangeAspect="1"/>
+          </p:cNvPicPr>
+          <p:nvPr/>
+        </p:nvPicPr>
+        <p:blipFill>
+          <a:blip r:embed="rId4"/>
+          <a:stretch>
+            <a:fillRect/>
+          </a:stretch>
+        </p:blipFill>
+        <p:spPr>
+          <a:xfrm>
+            <a:off x="2743200" y="5522976"/>
+            <a:ext cx="201168" cy="201168"/>
+          </a:xfrm>
+          <a:prstGeom prst="rect">
+            <a:avLst/>
+          </a:prstGeom>
+        </p:spPr>
+      </p:pic>
+      <p:sp>
+        <p:nvSpPr>
+          <p:cNvPr id="122" name="Text 114"/>
+          <p:cNvSpPr txBox="1"/>
+          <p:nvPr/>
+        </p:nvSpPr>
+        <p:spPr>
+          <a:xfrm>
+            <a:off x="3017520" y="5504688"/>
+            <a:ext cx="1404518" cy="237744"/>
           </a:xfrm>
           <a:prstGeom prst="rect">
             <a:avLst/>
@@ -14251,14 +14467,14 @@
       </p:sp>
       <p:sp>
         <p:nvSpPr>
-          <p:cNvPr id="116" name="Text 115"/>
-          <p:cNvSpPr txBox="1"/>
-          <p:nvPr/>
-        </p:nvSpPr>
-        <p:spPr>
-          <a:xfrm>
-            <a:off x="2743200" y="5760720"/>
-            <a:ext cx="1678838" cy="411480"/>
+          <p:cNvPr id="123" name="Text 115"/>
+          <p:cNvSpPr txBox="1"/>
+          <p:nvPr/>
+        </p:nvSpPr>
+        <p:spPr>
+          <a:xfrm>
+            <a:off x="3017520" y="5760720"/>
+            <a:ext cx="1404518" cy="411480"/>
           </a:xfrm>
           <a:prstGeom prst="rect">
             <a:avLst/>
@@ -14283,16 +14499,40 @@
           </a:p>
         </p:txBody>
       </p:sp>
-      <p:sp>
-        <p:nvSpPr>
-          <p:cNvPr id="117" name="Text 116"/>
-          <p:cNvSpPr txBox="1"/>
-          <p:nvPr/>
-        </p:nvSpPr>
-        <p:spPr>
-          <a:xfrm>
-            <a:off x="4513478" y="5504688"/>
-            <a:ext cx="1678838" cy="237744"/>
+      <p:pic>
+        <p:nvPicPr>
+          <p:cNvPr id="124" name="Picture 123" descr="git.png"/>
+          <p:cNvPicPr>
+            <a:picLocks noChangeAspect="1"/>
+          </p:cNvPicPr>
+          <p:nvPr/>
+        </p:nvPicPr>
+        <p:blipFill>
+          <a:blip r:embed="rId8"/>
+          <a:stretch>
+            <a:fillRect/>
+          </a:stretch>
+        </p:blipFill>
+        <p:spPr>
+          <a:xfrm>
+            <a:off x="4513478" y="5522976"/>
+            <a:ext cx="201168" cy="201168"/>
+          </a:xfrm>
+          <a:prstGeom prst="rect">
+            <a:avLst/>
+          </a:prstGeom>
+        </p:spPr>
+      </p:pic>
+      <p:sp>
+        <p:nvSpPr>
+          <p:cNvPr id="125" name="Text 116"/>
+          <p:cNvSpPr txBox="1"/>
+          <p:nvPr/>
+        </p:nvSpPr>
+        <p:spPr>
+          <a:xfrm>
+            <a:off x="4787798" y="5504688"/>
+            <a:ext cx="1404518" cy="237744"/>
           </a:xfrm>
           <a:prstGeom prst="rect">
             <a:avLst/>
@@ -14319,14 +14559,14 @@
       </p:sp>
       <p:sp>
         <p:nvSpPr>
-          <p:cNvPr id="118" name="Text 117"/>
-          <p:cNvSpPr txBox="1"/>
-          <p:nvPr/>
-        </p:nvSpPr>
-        <p:spPr>
-          <a:xfrm>
-            <a:off x="4513478" y="5760720"/>
-            <a:ext cx="1678838" cy="411480"/>
+          <p:cNvPr id="126" name="Text 117"/>
+          <p:cNvSpPr txBox="1"/>
+          <p:nvPr/>
+        </p:nvSpPr>
+        <p:spPr>
+          <a:xfrm>
+            <a:off x="4787798" y="5760720"/>
+            <a:ext cx="1404518" cy="411480"/>
           </a:xfrm>
           <a:prstGeom prst="rect">
             <a:avLst/>
@@ -14351,16 +14591,40 @@
           </a:p>
         </p:txBody>
       </p:sp>
-      <p:sp>
-        <p:nvSpPr>
-          <p:cNvPr id="119" name="Text 118"/>
-          <p:cNvSpPr txBox="1"/>
-          <p:nvPr/>
-        </p:nvSpPr>
-        <p:spPr>
-          <a:xfrm>
-            <a:off x="6283756" y="5504688"/>
-            <a:ext cx="1678838" cy="237744"/>
+      <p:pic>
+        <p:nvPicPr>
+          <p:cNvPr id="127" name="Picture 126" descr="googlebigquery.png"/>
+          <p:cNvPicPr>
+            <a:picLocks noChangeAspect="1"/>
+          </p:cNvPicPr>
+          <p:nvPr/>
+        </p:nvPicPr>
+        <p:blipFill>
+          <a:blip r:embed="rId9"/>
+          <a:stretch>
+            <a:fillRect/>
+          </a:stretch>
+        </p:blipFill>
+        <p:spPr>
+          <a:xfrm>
+            <a:off x="6283756" y="5522976"/>
+            <a:ext cx="201168" cy="201168"/>
+          </a:xfrm>
+          <a:prstGeom prst="rect">
+            <a:avLst/>
+          </a:prstGeom>
+        </p:spPr>
+      </p:pic>
+      <p:sp>
+        <p:nvSpPr>
+          <p:cNvPr id="128" name="Text 118"/>
+          <p:cNvSpPr txBox="1"/>
+          <p:nvPr/>
+        </p:nvSpPr>
+        <p:spPr>
+          <a:xfrm>
+            <a:off x="6558076" y="5504688"/>
+            <a:ext cx="1404518" cy="237744"/>
           </a:xfrm>
           <a:prstGeom prst="rect">
             <a:avLst/>
@@ -14387,14 +14651,14 @@
       </p:sp>
       <p:sp>
         <p:nvSpPr>
-          <p:cNvPr id="120" name="Text 119"/>
-          <p:cNvSpPr txBox="1"/>
-          <p:nvPr/>
-        </p:nvSpPr>
-        <p:spPr>
-          <a:xfrm>
-            <a:off x="6283756" y="5760720"/>
-            <a:ext cx="1678838" cy="411480"/>
+          <p:cNvPr id="129" name="Text 119"/>
+          <p:cNvSpPr txBox="1"/>
+          <p:nvPr/>
+        </p:nvSpPr>
+        <p:spPr>
+          <a:xfrm>
+            <a:off x="6558076" y="5760720"/>
+            <a:ext cx="1404518" cy="411480"/>
           </a:xfrm>
           <a:prstGeom prst="rect">
             <a:avLst/>
@@ -14419,16 +14683,40 @@
           </a:p>
         </p:txBody>
       </p:sp>
-      <p:sp>
-        <p:nvSpPr>
-          <p:cNvPr id="121" name="Text 120"/>
-          <p:cNvSpPr txBox="1"/>
-          <p:nvPr/>
-        </p:nvSpPr>
-        <p:spPr>
-          <a:xfrm>
-            <a:off x="8054035" y="5504688"/>
-            <a:ext cx="1678838" cy="237744"/>
+      <p:pic>
+        <p:nvPicPr>
+          <p:cNvPr id="130" name="Picture 129" descr="openai-white.png"/>
+          <p:cNvPicPr>
+            <a:picLocks noChangeAspect="1"/>
+          </p:cNvPicPr>
+          <p:nvPr/>
+        </p:nvPicPr>
+        <p:blipFill>
+          <a:blip r:embed="rId3"/>
+          <a:stretch>
+            <a:fillRect/>
+          </a:stretch>
+        </p:blipFill>
+        <p:spPr>
+          <a:xfrm>
+            <a:off x="8054035" y="5522976"/>
+            <a:ext cx="201168" cy="201168"/>
+          </a:xfrm>
+          <a:prstGeom prst="rect">
+            <a:avLst/>
+          </a:prstGeom>
+        </p:spPr>
+      </p:pic>
+      <p:sp>
+        <p:nvSpPr>
+          <p:cNvPr id="131" name="Text 120"/>
+          <p:cNvSpPr txBox="1"/>
+          <p:nvPr/>
+        </p:nvSpPr>
+        <p:spPr>
+          <a:xfrm>
+            <a:off x="8328355" y="5504688"/>
+            <a:ext cx="1404518" cy="237744"/>
           </a:xfrm>
           <a:prstGeom prst="rect">
             <a:avLst/>
@@ -14455,14 +14743,14 @@
       </p:sp>
       <p:sp>
         <p:nvSpPr>
-          <p:cNvPr id="122" name="Text 121"/>
-          <p:cNvSpPr txBox="1"/>
-          <p:nvPr/>
-        </p:nvSpPr>
-        <p:spPr>
-          <a:xfrm>
-            <a:off x="8054035" y="5760720"/>
-            <a:ext cx="1678838" cy="411480"/>
+          <p:cNvPr id="132" name="Text 121"/>
+          <p:cNvSpPr txBox="1"/>
+          <p:nvPr/>
+        </p:nvSpPr>
+        <p:spPr>
+          <a:xfrm>
+            <a:off x="8328355" y="5760720"/>
+            <a:ext cx="1404518" cy="411480"/>
           </a:xfrm>
           <a:prstGeom prst="rect">
             <a:avLst/>
@@ -14487,16 +14775,40 @@
           </a:p>
         </p:txBody>
       </p:sp>
-      <p:sp>
-        <p:nvSpPr>
-          <p:cNvPr id="123" name="Text 122"/>
-          <p:cNvSpPr txBox="1"/>
-          <p:nvPr/>
-        </p:nvSpPr>
-        <p:spPr>
-          <a:xfrm>
-            <a:off x="9824313" y="5504688"/>
-            <a:ext cx="1678838" cy="237744"/>
+      <p:pic>
+        <p:nvPicPr>
+          <p:cNvPr id="133" name="Picture 132" descr="googlecloud.png"/>
+          <p:cNvPicPr>
+            <a:picLocks noChangeAspect="1"/>
+          </p:cNvPicPr>
+          <p:nvPr/>
+        </p:nvPicPr>
+        <p:blipFill>
+          <a:blip r:embed="rId10"/>
+          <a:stretch>
+            <a:fillRect/>
+          </a:stretch>
+        </p:blipFill>
+        <p:spPr>
+          <a:xfrm>
+            <a:off x="9824313" y="5522976"/>
+            <a:ext cx="201168" cy="201168"/>
+          </a:xfrm>
+          <a:prstGeom prst="rect">
+            <a:avLst/>
+          </a:prstGeom>
+        </p:spPr>
+      </p:pic>
+      <p:sp>
+        <p:nvSpPr>
+          <p:cNvPr id="134" name="Text 122"/>
+          <p:cNvSpPr txBox="1"/>
+          <p:nvPr/>
+        </p:nvSpPr>
+        <p:spPr>
+          <a:xfrm>
+            <a:off x="10098633" y="5504688"/>
+            <a:ext cx="1404518" cy="237744"/>
           </a:xfrm>
           <a:prstGeom prst="rect">
             <a:avLst/>
@@ -14523,14 +14835,14 @@
       </p:sp>
       <p:sp>
         <p:nvSpPr>
-          <p:cNvPr id="124" name="Text 123"/>
-          <p:cNvSpPr txBox="1"/>
-          <p:nvPr/>
-        </p:nvSpPr>
-        <p:spPr>
-          <a:xfrm>
-            <a:off x="9824313" y="5760720"/>
-            <a:ext cx="1678838" cy="411480"/>
+          <p:cNvPr id="135" name="Text 123"/>
+          <p:cNvSpPr txBox="1"/>
+          <p:nvPr/>
+        </p:nvSpPr>
+        <p:spPr>
+          <a:xfrm>
+            <a:off x="10098633" y="5760720"/>
+            <a:ext cx="1404518" cy="411480"/>
           </a:xfrm>
           <a:prstGeom prst="rect">
             <a:avLst/>
@@ -15612,15 +15924,39 @@
           <a:p/>
         </p:txBody>
       </p:sp>
-      <p:sp>
-        <p:nvSpPr>
-          <p:cNvPr id="29" name="Text 27"/>
-          <p:cNvSpPr txBox="1"/>
-          <p:nvPr/>
-        </p:nvSpPr>
-        <p:spPr>
-          <a:xfrm>
-            <a:off x="2016251" y="2377440"/>
+      <p:pic>
+        <p:nvPicPr>
+          <p:cNvPr id="29" name="Picture 28" descr="people-black.png"/>
+          <p:cNvPicPr>
+            <a:picLocks noChangeAspect="1"/>
+          </p:cNvPicPr>
+          <p:nvPr/>
+        </p:nvPicPr>
+        <p:blipFill>
+          <a:blip r:embed="rId3"/>
+          <a:stretch>
+            <a:fillRect/>
+          </a:stretch>
+        </p:blipFill>
+        <p:spPr>
+          <a:xfrm>
+            <a:off x="2180844" y="2286000"/>
+            <a:ext cx="182880" cy="182880"/>
+          </a:xfrm>
+          <a:prstGeom prst="rect">
+            <a:avLst/>
+          </a:prstGeom>
+        </p:spPr>
+      </p:pic>
+      <p:sp>
+        <p:nvSpPr>
+          <p:cNvPr id="30" name="Text 27"/>
+          <p:cNvSpPr txBox="1"/>
+          <p:nvPr/>
+        </p:nvSpPr>
+        <p:spPr>
+          <a:xfrm>
+            <a:off x="2016251" y="2468879"/>
             <a:ext cx="512064" cy="274320"/>
           </a:xfrm>
           <a:prstGeom prst="rect">
@@ -15649,14 +15985,14 @@
       </p:sp>
       <p:sp>
         <p:nvSpPr>
-          <p:cNvPr id="30" name="Text 28"/>
-          <p:cNvSpPr txBox="1"/>
-          <p:nvPr/>
-        </p:nvSpPr>
-        <p:spPr>
-          <a:xfrm>
-            <a:off x="2016251" y="2670048"/>
-            <a:ext cx="512064" cy="548640"/>
+          <p:cNvPr id="31" name="Text 28"/>
+          <p:cNvSpPr txBox="1"/>
+          <p:nvPr/>
+        </p:nvSpPr>
+        <p:spPr>
+          <a:xfrm>
+            <a:off x="2016251" y="2761488"/>
+            <a:ext cx="512064" cy="502920"/>
           </a:xfrm>
           <a:prstGeom prst="rect">
             <a:avLst/>
@@ -15684,7 +16020,7 @@
       </p:sp>
       <p:sp>
         <p:nvSpPr>
-          <p:cNvPr id="31" name="Shape 29"/>
+          <p:cNvPr id="32" name="Shape 29"/>
           <p:cNvSpPr/>
           <p:nvPr/>
         </p:nvSpPr>
@@ -15730,7 +16066,7 @@
       </p:sp>
       <p:sp>
         <p:nvSpPr>
-          <p:cNvPr id="32" name="Shape 30"/>
+          <p:cNvPr id="33" name="Shape 30"/>
           <p:cNvSpPr/>
           <p:nvPr/>
         </p:nvSpPr>
@@ -15772,7 +16108,7 @@
       </p:sp>
       <p:sp>
         <p:nvSpPr>
-          <p:cNvPr id="33" name="Text 31"/>
+          <p:cNvPr id="34" name="Text 31"/>
           <p:cNvSpPr txBox="1"/>
           <p:nvPr/>
         </p:nvSpPr>
@@ -15807,7 +16143,7 @@
       </p:sp>
       <p:sp>
         <p:nvSpPr>
-          <p:cNvPr id="34" name="Text 32"/>
+          <p:cNvPr id="35" name="Text 32"/>
           <p:cNvSpPr txBox="1"/>
           <p:nvPr/>
         </p:nvSpPr>
@@ -15841,7 +16177,7 @@
       </p:sp>
       <p:sp>
         <p:nvSpPr>
-          <p:cNvPr id="35" name="Text 33"/>
+          <p:cNvPr id="36" name="Text 33"/>
           <p:cNvSpPr txBox="1"/>
           <p:nvPr/>
         </p:nvSpPr>
@@ -15880,7 +16216,7 @@
       </p:sp>
       <p:sp>
         <p:nvSpPr>
-          <p:cNvPr id="36" name="Shape 34"/>
+          <p:cNvPr id="37" name="Shape 34"/>
           <p:cNvSpPr/>
           <p:nvPr/>
         </p:nvSpPr>
@@ -15926,7 +16262,7 @@
       </p:sp>
       <p:sp>
         <p:nvSpPr>
-          <p:cNvPr id="37" name="Text 35"/>
+          <p:cNvPr id="38" name="Text 35"/>
           <p:cNvSpPr txBox="1"/>
           <p:nvPr/>
         </p:nvSpPr>
@@ -15961,7 +16297,7 @@
       </p:sp>
       <p:sp>
         <p:nvSpPr>
-          <p:cNvPr id="38" name="Shape 36"/>
+          <p:cNvPr id="39" name="Shape 36"/>
           <p:cNvSpPr/>
           <p:nvPr/>
         </p:nvSpPr>
@@ -16003,15 +16339,39 @@
           <a:p/>
         </p:txBody>
       </p:sp>
-      <p:sp>
-        <p:nvSpPr>
-          <p:cNvPr id="39" name="Text 37"/>
-          <p:cNvSpPr txBox="1"/>
-          <p:nvPr/>
-        </p:nvSpPr>
-        <p:spPr>
-          <a:xfrm>
-            <a:off x="4229100" y="2377440"/>
+      <p:pic>
+        <p:nvPicPr>
+          <p:cNvPr id="40" name="Picture 39" descr="people-black.png"/>
+          <p:cNvPicPr>
+            <a:picLocks noChangeAspect="1"/>
+          </p:cNvPicPr>
+          <p:nvPr/>
+        </p:nvPicPr>
+        <p:blipFill>
+          <a:blip r:embed="rId3"/>
+          <a:stretch>
+            <a:fillRect/>
+          </a:stretch>
+        </p:blipFill>
+        <p:spPr>
+          <a:xfrm>
+            <a:off x="4393692" y="2286000"/>
+            <a:ext cx="182880" cy="182880"/>
+          </a:xfrm>
+          <a:prstGeom prst="rect">
+            <a:avLst/>
+          </a:prstGeom>
+        </p:spPr>
+      </p:pic>
+      <p:sp>
+        <p:nvSpPr>
+          <p:cNvPr id="41" name="Text 37"/>
+          <p:cNvSpPr txBox="1"/>
+          <p:nvPr/>
+        </p:nvSpPr>
+        <p:spPr>
+          <a:xfrm>
+            <a:off x="4229100" y="2468879"/>
             <a:ext cx="512064" cy="274320"/>
           </a:xfrm>
           <a:prstGeom prst="rect">
@@ -16040,14 +16400,14 @@
       </p:sp>
       <p:sp>
         <p:nvSpPr>
-          <p:cNvPr id="40" name="Text 38"/>
-          <p:cNvSpPr txBox="1"/>
-          <p:nvPr/>
-        </p:nvSpPr>
-        <p:spPr>
-          <a:xfrm>
-            <a:off x="4229100" y="2670048"/>
-            <a:ext cx="512064" cy="548640"/>
+          <p:cNvPr id="42" name="Text 38"/>
+          <p:cNvSpPr txBox="1"/>
+          <p:nvPr/>
+        </p:nvSpPr>
+        <p:spPr>
+          <a:xfrm>
+            <a:off x="4229100" y="2761488"/>
+            <a:ext cx="512064" cy="502920"/>
           </a:xfrm>
           <a:prstGeom prst="rect">
             <a:avLst/>
@@ -16075,7 +16435,7 @@
       </p:sp>
       <p:sp>
         <p:nvSpPr>
-          <p:cNvPr id="41" name="Shape 39"/>
+          <p:cNvPr id="43" name="Shape 39"/>
           <p:cNvSpPr/>
           <p:nvPr/>
         </p:nvSpPr>
@@ -16121,7 +16481,7 @@
       </p:sp>
       <p:sp>
         <p:nvSpPr>
-          <p:cNvPr id="42" name="Shape 40"/>
+          <p:cNvPr id="44" name="Shape 40"/>
           <p:cNvSpPr/>
           <p:nvPr/>
         </p:nvSpPr>
@@ -16163,7 +16523,7 @@
       </p:sp>
       <p:sp>
         <p:nvSpPr>
-          <p:cNvPr id="43" name="Text 41"/>
+          <p:cNvPr id="45" name="Text 41"/>
           <p:cNvSpPr txBox="1"/>
           <p:nvPr/>
         </p:nvSpPr>
@@ -16198,7 +16558,7 @@
       </p:sp>
       <p:sp>
         <p:nvSpPr>
-          <p:cNvPr id="44" name="Text 42"/>
+          <p:cNvPr id="46" name="Text 42"/>
           <p:cNvSpPr txBox="1"/>
           <p:nvPr/>
         </p:nvSpPr>
@@ -16232,7 +16592,7 @@
       </p:sp>
       <p:sp>
         <p:nvSpPr>
-          <p:cNvPr id="45" name="Text 43"/>
+          <p:cNvPr id="47" name="Text 43"/>
           <p:cNvSpPr txBox="1"/>
           <p:nvPr/>
         </p:nvSpPr>
@@ -16271,7 +16631,7 @@
       </p:sp>
       <p:sp>
         <p:nvSpPr>
-          <p:cNvPr id="46" name="Shape 44"/>
+          <p:cNvPr id="48" name="Shape 44"/>
           <p:cNvSpPr/>
           <p:nvPr/>
         </p:nvSpPr>
@@ -16317,7 +16677,7 @@
       </p:sp>
       <p:sp>
         <p:nvSpPr>
-          <p:cNvPr id="47" name="Text 45"/>
+          <p:cNvPr id="49" name="Text 45"/>
           <p:cNvSpPr txBox="1"/>
           <p:nvPr/>
         </p:nvSpPr>
@@ -16352,7 +16712,7 @@
       </p:sp>
       <p:sp>
         <p:nvSpPr>
-          <p:cNvPr id="48" name="Shape 46"/>
+          <p:cNvPr id="50" name="Shape 46"/>
           <p:cNvSpPr/>
           <p:nvPr/>
         </p:nvSpPr>
@@ -16398,7 +16758,7 @@
       </p:sp>
       <p:sp>
         <p:nvSpPr>
-          <p:cNvPr id="49" name="Shape 47"/>
+          <p:cNvPr id="51" name="Shape 47"/>
           <p:cNvSpPr/>
           <p:nvPr/>
         </p:nvSpPr>
@@ -16440,7 +16800,7 @@
       </p:sp>
       <p:sp>
         <p:nvSpPr>
-          <p:cNvPr id="50" name="Text 48"/>
+          <p:cNvPr id="52" name="Text 48"/>
           <p:cNvSpPr txBox="1"/>
           <p:nvPr/>
         </p:nvSpPr>
@@ -16475,7 +16835,7 @@
       </p:sp>
       <p:sp>
         <p:nvSpPr>
-          <p:cNvPr id="51" name="Text 49"/>
+          <p:cNvPr id="53" name="Text 49"/>
           <p:cNvSpPr txBox="1"/>
           <p:nvPr/>
         </p:nvSpPr>
@@ -16509,7 +16869,7 @@
       </p:sp>
       <p:sp>
         <p:nvSpPr>
-          <p:cNvPr id="52" name="Text 50"/>
+          <p:cNvPr id="54" name="Text 50"/>
           <p:cNvSpPr txBox="1"/>
           <p:nvPr/>
         </p:nvSpPr>
@@ -16548,7 +16908,7 @@
       </p:sp>
       <p:sp>
         <p:nvSpPr>
-          <p:cNvPr id="53" name="Shape 51"/>
+          <p:cNvPr id="55" name="Shape 51"/>
           <p:cNvSpPr/>
           <p:nvPr/>
         </p:nvSpPr>
@@ -16594,7 +16954,7 @@
       </p:sp>
       <p:sp>
         <p:nvSpPr>
-          <p:cNvPr id="54" name="Text 52"/>
+          <p:cNvPr id="56" name="Text 52"/>
           <p:cNvSpPr txBox="1"/>
           <p:nvPr/>
         </p:nvSpPr>
@@ -16629,7 +16989,7 @@
       </p:sp>
       <p:sp>
         <p:nvSpPr>
-          <p:cNvPr id="55" name="Shape 53"/>
+          <p:cNvPr id="57" name="Shape 53"/>
           <p:cNvSpPr/>
           <p:nvPr/>
         </p:nvSpPr>
@@ -16671,15 +17031,39 @@
           <a:p/>
         </p:txBody>
       </p:sp>
-      <p:sp>
-        <p:nvSpPr>
-          <p:cNvPr id="56" name="Text 54"/>
-          <p:cNvSpPr txBox="1"/>
-          <p:nvPr/>
-        </p:nvSpPr>
-        <p:spPr>
-          <a:xfrm>
-            <a:off x="7996427" y="2377440"/>
+      <p:pic>
+        <p:nvPicPr>
+          <p:cNvPr id="58" name="Picture 57" descr="people-black.png"/>
+          <p:cNvPicPr>
+            <a:picLocks noChangeAspect="1"/>
+          </p:cNvPicPr>
+          <p:nvPr/>
+        </p:nvPicPr>
+        <p:blipFill>
+          <a:blip r:embed="rId3"/>
+          <a:stretch>
+            <a:fillRect/>
+          </a:stretch>
+        </p:blipFill>
+        <p:spPr>
+          <a:xfrm>
+            <a:off x="8161020" y="2286000"/>
+            <a:ext cx="182880" cy="182880"/>
+          </a:xfrm>
+          <a:prstGeom prst="rect">
+            <a:avLst/>
+          </a:prstGeom>
+        </p:spPr>
+      </p:pic>
+      <p:sp>
+        <p:nvSpPr>
+          <p:cNvPr id="59" name="Text 54"/>
+          <p:cNvSpPr txBox="1"/>
+          <p:nvPr/>
+        </p:nvSpPr>
+        <p:spPr>
+          <a:xfrm>
+            <a:off x="7996427" y="2468879"/>
             <a:ext cx="512064" cy="274320"/>
           </a:xfrm>
           <a:prstGeom prst="rect">
@@ -16708,14 +17092,14 @@
       </p:sp>
       <p:sp>
         <p:nvSpPr>
-          <p:cNvPr id="57" name="Text 55"/>
-          <p:cNvSpPr txBox="1"/>
-          <p:nvPr/>
-        </p:nvSpPr>
-        <p:spPr>
-          <a:xfrm>
-            <a:off x="7996427" y="2670048"/>
-            <a:ext cx="512064" cy="548640"/>
+          <p:cNvPr id="60" name="Text 55"/>
+          <p:cNvSpPr txBox="1"/>
+          <p:nvPr/>
+        </p:nvSpPr>
+        <p:spPr>
+          <a:xfrm>
+            <a:off x="7996427" y="2761488"/>
+            <a:ext cx="512064" cy="502920"/>
           </a:xfrm>
           <a:prstGeom prst="rect">
             <a:avLst/>
@@ -16743,7 +17127,7 @@
       </p:sp>
       <p:sp>
         <p:nvSpPr>
-          <p:cNvPr id="58" name="Shape 56"/>
+          <p:cNvPr id="61" name="Shape 56"/>
           <p:cNvSpPr/>
           <p:nvPr/>
         </p:nvSpPr>
@@ -16789,7 +17173,7 @@
       </p:sp>
       <p:sp>
         <p:nvSpPr>
-          <p:cNvPr id="59" name="Shape 57"/>
+          <p:cNvPr id="62" name="Shape 57"/>
           <p:cNvSpPr/>
           <p:nvPr/>
         </p:nvSpPr>
@@ -16831,7 +17215,7 @@
       </p:sp>
       <p:sp>
         <p:nvSpPr>
-          <p:cNvPr id="60" name="Text 58"/>
+          <p:cNvPr id="63" name="Text 58"/>
           <p:cNvSpPr txBox="1"/>
           <p:nvPr/>
         </p:nvSpPr>
@@ -16866,7 +17250,7 @@
       </p:sp>
       <p:sp>
         <p:nvSpPr>
-          <p:cNvPr id="61" name="Text 59"/>
+          <p:cNvPr id="64" name="Text 59"/>
           <p:cNvSpPr txBox="1"/>
           <p:nvPr/>
         </p:nvSpPr>
@@ -16900,7 +17284,7 @@
       </p:sp>
       <p:sp>
         <p:nvSpPr>
-          <p:cNvPr id="62" name="Text 60"/>
+          <p:cNvPr id="65" name="Text 60"/>
           <p:cNvSpPr txBox="1"/>
           <p:nvPr/>
         </p:nvSpPr>
@@ -16939,7 +17323,7 @@
       </p:sp>
       <p:sp>
         <p:nvSpPr>
-          <p:cNvPr id="63" name="Shape 61"/>
+          <p:cNvPr id="66" name="Shape 61"/>
           <p:cNvSpPr/>
           <p:nvPr/>
         </p:nvSpPr>
@@ -16985,7 +17369,7 @@
       </p:sp>
       <p:sp>
         <p:nvSpPr>
-          <p:cNvPr id="64" name="Text 62"/>
+          <p:cNvPr id="67" name="Text 62"/>
           <p:cNvSpPr txBox="1"/>
           <p:nvPr/>
         </p:nvSpPr>
@@ -17020,7 +17404,7 @@
       </p:sp>
       <p:sp>
         <p:nvSpPr>
-          <p:cNvPr id="65" name="Shape 63"/>
+          <p:cNvPr id="68" name="Shape 63"/>
           <p:cNvSpPr/>
           <p:nvPr/>
         </p:nvSpPr>
@@ -17062,15 +17446,39 @@
           <a:p/>
         </p:txBody>
       </p:sp>
-      <p:sp>
-        <p:nvSpPr>
-          <p:cNvPr id="66" name="Text 64"/>
-          <p:cNvSpPr txBox="1"/>
-          <p:nvPr/>
-        </p:nvSpPr>
-        <p:spPr>
-          <a:xfrm>
-            <a:off x="10209276" y="2377440"/>
+      <p:pic>
+        <p:nvPicPr>
+          <p:cNvPr id="69" name="Picture 68" descr="people-black.png"/>
+          <p:cNvPicPr>
+            <a:picLocks noChangeAspect="1"/>
+          </p:cNvPicPr>
+          <p:nvPr/>
+        </p:nvPicPr>
+        <p:blipFill>
+          <a:blip r:embed="rId3"/>
+          <a:stretch>
+            <a:fillRect/>
+          </a:stretch>
+        </p:blipFill>
+        <p:spPr>
+          <a:xfrm>
+            <a:off x="10373868" y="2286000"/>
+            <a:ext cx="182880" cy="182880"/>
+          </a:xfrm>
+          <a:prstGeom prst="rect">
+            <a:avLst/>
+          </a:prstGeom>
+        </p:spPr>
+      </p:pic>
+      <p:sp>
+        <p:nvSpPr>
+          <p:cNvPr id="70" name="Text 64"/>
+          <p:cNvSpPr txBox="1"/>
+          <p:nvPr/>
+        </p:nvSpPr>
+        <p:spPr>
+          <a:xfrm>
+            <a:off x="10209276" y="2468879"/>
             <a:ext cx="512064" cy="274320"/>
           </a:xfrm>
           <a:prstGeom prst="rect">
@@ -17099,14 +17507,14 @@
       </p:sp>
       <p:sp>
         <p:nvSpPr>
-          <p:cNvPr id="67" name="Text 65"/>
-          <p:cNvSpPr txBox="1"/>
-          <p:nvPr/>
-        </p:nvSpPr>
-        <p:spPr>
-          <a:xfrm>
-            <a:off x="10209276" y="2670048"/>
-            <a:ext cx="512064" cy="548640"/>
+          <p:cNvPr id="71" name="Text 65"/>
+          <p:cNvSpPr txBox="1"/>
+          <p:nvPr/>
+        </p:nvSpPr>
+        <p:spPr>
+          <a:xfrm>
+            <a:off x="10209276" y="2761488"/>
+            <a:ext cx="512064" cy="502920"/>
           </a:xfrm>
           <a:prstGeom prst="rect">
             <a:avLst/>
@@ -17134,7 +17542,7 @@
       </p:sp>
       <p:sp>
         <p:nvSpPr>
-          <p:cNvPr id="68" name="Shape 66"/>
+          <p:cNvPr id="72" name="Shape 66"/>
           <p:cNvSpPr/>
           <p:nvPr/>
         </p:nvSpPr>
@@ -17179,7 +17587,7 @@
       </p:sp>
       <p:sp>
         <p:nvSpPr>
-          <p:cNvPr id="69" name="Text 67"/>
+          <p:cNvPr id="73" name="Text 67"/>
           <p:cNvSpPr txBox="1"/>
           <p:nvPr/>
         </p:nvSpPr>
@@ -17214,7 +17622,7 @@
       </p:sp>
       <p:sp>
         <p:nvSpPr>
-          <p:cNvPr id="70" name="Text 68"/>
+          <p:cNvPr id="74" name="Text 68"/>
           <p:cNvSpPr txBox="1"/>
           <p:nvPr/>
         </p:nvSpPr>
@@ -17249,7 +17657,7 @@
       </p:sp>
       <p:cxnSp>
         <p:nvCxnSpPr>
-          <p:cNvPr id="71" name="Arrow 69"/>
+          <p:cNvPr id="75" name="Arrow 69"/>
           <p:cNvCxnSpPr/>
           <p:nvPr/>
         </p:nvCxnSpPr>
@@ -17285,7 +17693,7 @@
       </p:cxnSp>
       <p:cxnSp>
         <p:nvCxnSpPr>
-          <p:cNvPr id="72" name="Arrow 70"/>
+          <p:cNvPr id="76" name="Arrow 70"/>
           <p:cNvCxnSpPr/>
           <p:nvPr/>
         </p:nvCxnSpPr>
@@ -17321,7 +17729,7 @@
       </p:cxnSp>
       <p:cxnSp>
         <p:nvCxnSpPr>
-          <p:cNvPr id="73" name="Arrow 71"/>
+          <p:cNvPr id="77" name="Arrow 71"/>
           <p:cNvCxnSpPr/>
           <p:nvPr/>
         </p:nvCxnSpPr>
@@ -17357,7 +17765,7 @@
       </p:cxnSp>
       <p:cxnSp>
         <p:nvCxnSpPr>
-          <p:cNvPr id="74" name="Arrow 72"/>
+          <p:cNvPr id="78" name="Arrow 72"/>
           <p:cNvCxnSpPr/>
           <p:nvPr/>
         </p:nvCxnSpPr>
@@ -17393,7 +17801,7 @@
       </p:cxnSp>
       <p:cxnSp>
         <p:nvCxnSpPr>
-          <p:cNvPr id="75" name="Arrow 73"/>
+          <p:cNvPr id="79" name="Arrow 73"/>
           <p:cNvCxnSpPr/>
           <p:nvPr/>
         </p:nvCxnSpPr>
@@ -17429,7 +17837,7 @@
       </p:cxnSp>
       <p:cxnSp>
         <p:nvCxnSpPr>
-          <p:cNvPr id="76" name="Arrow 74"/>
+          <p:cNvPr id="80" name="Arrow 74"/>
           <p:cNvCxnSpPr/>
           <p:nvPr/>
         </p:nvCxnSpPr>
@@ -17465,7 +17873,7 @@
       </p:cxnSp>
       <p:cxnSp>
         <p:nvCxnSpPr>
-          <p:cNvPr id="77" name="Arrow 75"/>
+          <p:cNvPr id="81" name="Arrow 75"/>
           <p:cNvCxnSpPr/>
           <p:nvPr/>
         </p:nvCxnSpPr>
@@ -17501,7 +17909,7 @@
       </p:cxnSp>
       <p:cxnSp>
         <p:nvCxnSpPr>
-          <p:cNvPr id="78" name="Arrow 76"/>
+          <p:cNvPr id="82" name="Arrow 76"/>
           <p:cNvCxnSpPr/>
           <p:nvPr/>
         </p:nvCxnSpPr>
@@ -17537,7 +17945,7 @@
       </p:cxnSp>
       <p:cxnSp>
         <p:nvCxnSpPr>
-          <p:cNvPr id="79" name="Arrow 77"/>
+          <p:cNvPr id="83" name="Arrow 77"/>
           <p:cNvCxnSpPr/>
           <p:nvPr/>
         </p:nvCxnSpPr>
@@ -17573,22 +17981,23 @@
       </p:cxnSp>
       <p:cxnSp>
         <p:nvCxnSpPr>
-          <p:cNvPr id="80" name="Arrow 78"/>
+          <p:cNvPr id="84" name="Arrow 78"/>
           <p:cNvCxnSpPr/>
           <p:nvPr/>
         </p:nvCxnSpPr>
         <p:spPr>
-          <a:xfrm flipV="1">
-            <a:off x="7146036" y="2048255"/>
-            <a:ext cx="0" cy="146305"/>
+          <a:xfrm>
+            <a:off x="1165859" y="1901952"/>
+            <a:ext cx="0" cy="292608"/>
           </a:xfrm>
           <a:prstGeom prst="line">
             <a:avLst/>
           </a:prstGeom>
-          <a:ln w="19050">
+          <a:ln w="22225">
             <a:solidFill>
-              <a:srgbClr val="FF0069"/>
+              <a:srgbClr val="00D6F2"/>
             </a:solidFill>
+            <a:tailEnd type="triangle" w="med" len="med"/>
           </a:ln>
         </p:spPr>
         <p:style>
@@ -17608,19 +18017,19 @@
       </p:cxnSp>
       <p:cxnSp>
         <p:nvCxnSpPr>
-          <p:cNvPr id="81" name="Arrow 79"/>
+          <p:cNvPr id="85" name="Arrow 79"/>
           <p:cNvCxnSpPr/>
           <p:nvPr/>
         </p:nvCxnSpPr>
         <p:spPr>
-          <a:xfrm flipH="1">
-            <a:off x="5591555" y="2048255"/>
-            <a:ext cx="1554481" cy="0"/>
+          <a:xfrm flipV="1">
+            <a:off x="6734555" y="2066543"/>
+            <a:ext cx="0" cy="128017"/>
           </a:xfrm>
           <a:prstGeom prst="line">
             <a:avLst/>
           </a:prstGeom>
-          <a:ln w="19050">
+          <a:ln w="22225">
             <a:solidFill>
               <a:srgbClr val="FF0069"/>
             </a:solidFill>
@@ -17643,23 +18052,22 @@
       </p:cxnSp>
       <p:cxnSp>
         <p:nvCxnSpPr>
-          <p:cNvPr id="82" name="Arrow 80"/>
+          <p:cNvPr id="86" name="Arrow 80"/>
           <p:cNvCxnSpPr/>
           <p:nvPr/>
         </p:nvCxnSpPr>
         <p:spPr>
-          <a:xfrm>
-            <a:off x="5591555" y="2048255"/>
-            <a:ext cx="0" cy="146305"/>
+          <a:xfrm flipH="1">
+            <a:off x="6003036" y="2066543"/>
+            <a:ext cx="731519" cy="0"/>
           </a:xfrm>
           <a:prstGeom prst="line">
             <a:avLst/>
           </a:prstGeom>
-          <a:ln w="19050">
+          <a:ln w="22225">
             <a:solidFill>
               <a:srgbClr val="FF0069"/>
             </a:solidFill>
-            <a:tailEnd type="triangle" w="med" len="med"/>
           </a:ln>
         </p:spPr>
         <p:style>
@@ -17677,16 +18085,52 @@
           </a:fontRef>
         </p:style>
       </p:cxnSp>
-      <p:sp>
-        <p:nvSpPr>
-          <p:cNvPr id="83" name="Shape 81"/>
+      <p:cxnSp>
+        <p:nvCxnSpPr>
+          <p:cNvPr id="87" name="Arrow 81"/>
+          <p:cNvCxnSpPr/>
+          <p:nvPr/>
+        </p:nvCxnSpPr>
+        <p:spPr>
+          <a:xfrm>
+            <a:off x="6003036" y="2066543"/>
+            <a:ext cx="0" cy="128017"/>
+          </a:xfrm>
+          <a:prstGeom prst="line">
+            <a:avLst/>
+          </a:prstGeom>
+          <a:ln w="22225">
+            <a:solidFill>
+              <a:srgbClr val="FF0069"/>
+            </a:solidFill>
+            <a:tailEnd type="triangle" w="med" len="med"/>
+          </a:ln>
+        </p:spPr>
+        <p:style>
+          <a:lnRef idx="2">
+            <a:schemeClr val="accent1"/>
+          </a:lnRef>
+          <a:fillRef idx="0">
+            <a:schemeClr val="accent1"/>
+          </a:fillRef>
+          <a:effectRef idx="1">
+            <a:schemeClr val="accent1"/>
+          </a:effectRef>
+          <a:fontRef idx="minor">
+            <a:schemeClr val="tx1"/>
+          </a:fontRef>
+        </p:style>
+      </p:cxnSp>
+      <p:sp>
+        <p:nvSpPr>
+          <p:cNvPr id="88" name="Shape 82"/>
           <p:cNvSpPr/>
           <p:nvPr/>
         </p:nvSpPr>
         <p:spPr>
           <a:xfrm>
-            <a:off x="5500116" y="1965960"/>
-            <a:ext cx="1737360" cy="164592"/>
+            <a:off x="6825996" y="1984248"/>
+            <a:ext cx="1783080" cy="164592"/>
           </a:xfrm>
           <a:prstGeom prst="roundRect">
             <a:avLst>
@@ -17725,14 +18169,14 @@
       </p:sp>
       <p:sp>
         <p:nvSpPr>
-          <p:cNvPr id="84" name="Text 82"/>
-          <p:cNvSpPr txBox="1"/>
-          <p:nvPr/>
-        </p:nvSpPr>
-        <p:spPr>
-          <a:xfrm>
-            <a:off x="5500116" y="1965960"/>
-            <a:ext cx="1737360" cy="164592"/>
+          <p:cNvPr id="89" name="Text 83"/>
+          <p:cNvSpPr txBox="1"/>
+          <p:nvPr/>
+        </p:nvSpPr>
+        <p:spPr>
+          <a:xfrm>
+            <a:off x="6825996" y="1984248"/>
+            <a:ext cx="1783080" cy="164592"/>
           </a:xfrm>
           <a:prstGeom prst="rect">
             <a:avLst/>
@@ -17753,14 +18197,14 @@
                 </a:solidFill>
                 <a:latin typeface="Trenda IG Text"/>
               </a:rPr>
-              <a:t>FAIL → FIX · MAX 5, THEN OWNER</a:t>
-            </a:r>
-          </a:p>
-        </p:txBody>
-      </p:sp>
-      <p:sp>
-        <p:nvSpPr>
-          <p:cNvPr id="85" name="Shape 83"/>
+              <a:t>5 → 4  FAIL → FIX · MAX 5, THEN OWNER</a:t>
+            </a:r>
+          </a:p>
+        </p:txBody>
+      </p:sp>
+      <p:sp>
+        <p:nvSpPr>
+          <p:cNvPr id="90" name="Shape 84"/>
           <p:cNvSpPr/>
           <p:nvPr/>
         </p:nvSpPr>
@@ -17806,7 +18250,7 @@
       </p:sp>
       <p:sp>
         <p:nvSpPr>
-          <p:cNvPr id="86" name="Text 84"/>
+          <p:cNvPr id="91" name="Text 85"/>
           <p:cNvSpPr txBox="1"/>
           <p:nvPr/>
         </p:nvSpPr>
@@ -17849,7 +18293,7 @@
       </p:sp>
       <p:sp>
         <p:nvSpPr>
-          <p:cNvPr id="87" name="Shape 85"/>
+          <p:cNvPr id="92" name="Shape 86"/>
           <p:cNvSpPr/>
           <p:nvPr/>
         </p:nvSpPr>
@@ -17895,14 +18339,14 @@
       </p:sp>
       <p:pic>
         <p:nvPicPr>
-          <p:cNvPr id="88" name="Picture 87" descr="jira.png"/>
+          <p:cNvPr id="93" name="Picture 92" descr="jira.png"/>
           <p:cNvPicPr>
             <a:picLocks noChangeAspect="1"/>
           </p:cNvPicPr>
           <p:nvPr/>
         </p:nvPicPr>
         <p:blipFill>
-          <a:blip r:embed="rId3"/>
+          <a:blip r:embed="rId4"/>
           <a:stretch>
             <a:fillRect/>
           </a:stretch>
@@ -17919,7 +18363,7 @@
       </p:pic>
       <p:sp>
         <p:nvSpPr>
-          <p:cNvPr id="89" name="Text 86"/>
+          <p:cNvPr id="94" name="Text 87"/>
           <p:cNvSpPr txBox="1"/>
           <p:nvPr/>
         </p:nvSpPr>
@@ -17953,7 +18397,7 @@
       </p:sp>
       <p:sp>
         <p:nvSpPr>
-          <p:cNvPr id="90" name="Text 87"/>
+          <p:cNvPr id="95" name="Text 88"/>
           <p:cNvSpPr txBox="1"/>
           <p:nvPr/>
         </p:nvSpPr>
@@ -17987,7 +18431,7 @@
       </p:sp>
       <p:sp>
         <p:nvSpPr>
-          <p:cNvPr id="91" name="Shape 88"/>
+          <p:cNvPr id="96" name="Shape 89"/>
           <p:cNvSpPr/>
           <p:nvPr/>
         </p:nvSpPr>
@@ -18033,14 +18477,14 @@
       </p:sp>
       <p:pic>
         <p:nvPicPr>
-          <p:cNvPr id="92" name="Picture 91" descr="confluence.png"/>
+          <p:cNvPr id="97" name="Picture 96" descr="confluence.png"/>
           <p:cNvPicPr>
             <a:picLocks noChangeAspect="1"/>
           </p:cNvPicPr>
           <p:nvPr/>
         </p:nvPicPr>
         <p:blipFill>
-          <a:blip r:embed="rId4"/>
+          <a:blip r:embed="rId5"/>
           <a:stretch>
             <a:fillRect/>
           </a:stretch>
@@ -18057,7 +18501,7 @@
       </p:pic>
       <p:sp>
         <p:nvSpPr>
-          <p:cNvPr id="93" name="Text 89"/>
+          <p:cNvPr id="98" name="Text 90"/>
           <p:cNvSpPr txBox="1"/>
           <p:nvPr/>
         </p:nvSpPr>
@@ -18091,7 +18535,7 @@
       </p:sp>
       <p:sp>
         <p:nvSpPr>
-          <p:cNvPr id="94" name="Text 90"/>
+          <p:cNvPr id="99" name="Text 91"/>
           <p:cNvSpPr txBox="1"/>
           <p:nvPr/>
         </p:nvSpPr>
@@ -18125,7 +18569,7 @@
       </p:sp>
       <p:sp>
         <p:nvSpPr>
-          <p:cNvPr id="95" name="Shape 91"/>
+          <p:cNvPr id="100" name="Shape 92"/>
           <p:cNvSpPr/>
           <p:nvPr/>
         </p:nvSpPr>
@@ -18171,14 +18615,14 @@
       </p:sp>
       <p:pic>
         <p:nvPicPr>
-          <p:cNvPr id="96" name="Picture 95" descr="salesforce.png"/>
+          <p:cNvPr id="101" name="Picture 100" descr="salesforce.png"/>
           <p:cNvPicPr>
             <a:picLocks noChangeAspect="1"/>
           </p:cNvPicPr>
           <p:nvPr/>
         </p:nvPicPr>
         <p:blipFill>
-          <a:blip r:embed="rId5"/>
+          <a:blip r:embed="rId6"/>
           <a:stretch>
             <a:fillRect/>
           </a:stretch>
@@ -18195,7 +18639,7 @@
       </p:pic>
       <p:sp>
         <p:nvSpPr>
-          <p:cNvPr id="97" name="Text 92"/>
+          <p:cNvPr id="102" name="Text 93"/>
           <p:cNvSpPr txBox="1"/>
           <p:nvPr/>
         </p:nvSpPr>
@@ -18229,7 +18673,7 @@
       </p:sp>
       <p:sp>
         <p:nvSpPr>
-          <p:cNvPr id="98" name="Text 93"/>
+          <p:cNvPr id="103" name="Text 94"/>
           <p:cNvSpPr txBox="1"/>
           <p:nvPr/>
         </p:nvSpPr>
@@ -18263,7 +18707,7 @@
       </p:sp>
       <p:sp>
         <p:nvSpPr>
-          <p:cNvPr id="99" name="Shape 94"/>
+          <p:cNvPr id="104" name="Shape 95"/>
           <p:cNvSpPr/>
           <p:nvPr/>
         </p:nvSpPr>
@@ -18309,14 +18753,14 @@
       </p:sp>
       <p:pic>
         <p:nvPicPr>
-          <p:cNvPr id="100" name="Picture 99" descr="git.png"/>
+          <p:cNvPr id="105" name="Picture 104" descr="git.png"/>
           <p:cNvPicPr>
             <a:picLocks noChangeAspect="1"/>
           </p:cNvPicPr>
           <p:nvPr/>
         </p:nvPicPr>
         <p:blipFill>
-          <a:blip r:embed="rId6"/>
+          <a:blip r:embed="rId7"/>
           <a:stretch>
             <a:fillRect/>
           </a:stretch>
@@ -18333,7 +18777,7 @@
       </p:pic>
       <p:sp>
         <p:nvSpPr>
-          <p:cNvPr id="101" name="Text 95"/>
+          <p:cNvPr id="106" name="Text 96"/>
           <p:cNvSpPr txBox="1"/>
           <p:nvPr/>
         </p:nvSpPr>
@@ -18367,7 +18811,7 @@
       </p:sp>
       <p:sp>
         <p:nvSpPr>
-          <p:cNvPr id="102" name="Text 96"/>
+          <p:cNvPr id="107" name="Text 97"/>
           <p:cNvSpPr txBox="1"/>
           <p:nvPr/>
         </p:nvSpPr>
@@ -18401,7 +18845,7 @@
       </p:sp>
       <p:sp>
         <p:nvSpPr>
-          <p:cNvPr id="103" name="Shape 97"/>
+          <p:cNvPr id="108" name="Shape 98"/>
           <p:cNvSpPr/>
           <p:nvPr/>
         </p:nvSpPr>
@@ -18447,7 +18891,7 @@
       </p:sp>
       <p:sp>
         <p:nvSpPr>
-          <p:cNvPr id="104" name="Shape 98"/>
+          <p:cNvPr id="109" name="Shape 99"/>
           <p:cNvSpPr/>
           <p:nvPr/>
         </p:nvSpPr>
@@ -18491,7 +18935,7 @@
       </p:sp>
       <p:sp>
         <p:nvSpPr>
-          <p:cNvPr id="105" name="Text 99"/>
+          <p:cNvPr id="110" name="Text 100"/>
           <p:cNvSpPr txBox="1"/>
           <p:nvPr/>
         </p:nvSpPr>
@@ -18526,7 +18970,7 @@
       </p:sp>
       <p:sp>
         <p:nvSpPr>
-          <p:cNvPr id="106" name="Text 100"/>
+          <p:cNvPr id="111" name="Text 101"/>
           <p:cNvSpPr txBox="1"/>
           <p:nvPr/>
         </p:nvSpPr>
@@ -18560,7 +19004,7 @@
       </p:sp>
       <p:sp>
         <p:nvSpPr>
-          <p:cNvPr id="107" name="Text 101"/>
+          <p:cNvPr id="112" name="Text 102"/>
           <p:cNvSpPr txBox="1"/>
           <p:nvPr/>
         </p:nvSpPr>
@@ -18594,7 +19038,7 @@
       </p:sp>
       <p:sp>
         <p:nvSpPr>
-          <p:cNvPr id="108" name="Shape 102"/>
+          <p:cNvPr id="113" name="Shape 103"/>
           <p:cNvSpPr/>
           <p:nvPr/>
         </p:nvSpPr>
@@ -18640,14 +19084,14 @@
       </p:sp>
       <p:pic>
         <p:nvPicPr>
-          <p:cNvPr id="109" name="Picture 108" descr="googledrive.png"/>
+          <p:cNvPr id="114" name="Picture 113" descr="googledrive.png"/>
           <p:cNvPicPr>
             <a:picLocks noChangeAspect="1"/>
           </p:cNvPicPr>
           <p:nvPr/>
         </p:nvPicPr>
         <p:blipFill>
-          <a:blip r:embed="rId7"/>
+          <a:blip r:embed="rId8"/>
           <a:stretch>
             <a:fillRect/>
           </a:stretch>
@@ -18664,7 +19108,7 @@
       </p:pic>
       <p:sp>
         <p:nvSpPr>
-          <p:cNvPr id="110" name="Text 103"/>
+          <p:cNvPr id="115" name="Text 104"/>
           <p:cNvSpPr txBox="1"/>
           <p:nvPr/>
         </p:nvSpPr>
@@ -18698,7 +19142,7 @@
       </p:sp>
       <p:sp>
         <p:nvSpPr>
-          <p:cNvPr id="111" name="Text 104"/>
+          <p:cNvPr id="116" name="Text 105"/>
           <p:cNvSpPr txBox="1"/>
           <p:nvPr/>
         </p:nvSpPr>
@@ -18732,7 +19176,7 @@
       </p:sp>
       <p:sp>
         <p:nvSpPr>
-          <p:cNvPr id="112" name="Shape 105"/>
+          <p:cNvPr id="117" name="Shape 106"/>
           <p:cNvSpPr/>
           <p:nvPr/>
         </p:nvSpPr>
@@ -18777,16 +19221,40 @@
           <a:p/>
         </p:txBody>
       </p:sp>
-      <p:sp>
-        <p:nvSpPr>
-          <p:cNvPr id="113" name="Text 106"/>
-          <p:cNvSpPr txBox="1"/>
-          <p:nvPr/>
-        </p:nvSpPr>
-        <p:spPr>
-          <a:xfrm>
-            <a:off x="6373367" y="4087368"/>
-            <a:ext cx="777239" cy="219456"/>
+      <p:pic>
+        <p:nvPicPr>
+          <p:cNvPr id="118" name="Picture 117" descr="googlecloud-grey.png"/>
+          <p:cNvPicPr>
+            <a:picLocks noChangeAspect="1"/>
+          </p:cNvPicPr>
+          <p:nvPr/>
+        </p:nvPicPr>
+        <p:blipFill>
+          <a:blip r:embed="rId9"/>
+          <a:stretch>
+            <a:fillRect/>
+          </a:stretch>
+        </p:blipFill>
+        <p:spPr>
+          <a:xfrm>
+            <a:off x="6373367" y="4114800"/>
+            <a:ext cx="182880" cy="182880"/>
+          </a:xfrm>
+          <a:prstGeom prst="rect">
+            <a:avLst/>
+          </a:prstGeom>
+        </p:spPr>
+      </p:pic>
+      <p:sp>
+        <p:nvSpPr>
+          <p:cNvPr id="119" name="Text 107"/>
+          <p:cNvSpPr txBox="1"/>
+          <p:nvPr/>
+        </p:nvSpPr>
+        <p:spPr>
+          <a:xfrm>
+            <a:off x="6601967" y="4087368"/>
+            <a:ext cx="557783" cy="219456"/>
           </a:xfrm>
           <a:prstGeom prst="rect">
             <a:avLst/>
@@ -18813,7 +19281,7 @@
       </p:sp>
       <p:sp>
         <p:nvSpPr>
-          <p:cNvPr id="114" name="Text 107"/>
+          <p:cNvPr id="120" name="Text 108"/>
           <p:cNvSpPr txBox="1"/>
           <p:nvPr/>
         </p:nvSpPr>
@@ -18847,7 +19315,7 @@
       </p:sp>
       <p:sp>
         <p:nvSpPr>
-          <p:cNvPr id="115" name="Text 108"/>
+          <p:cNvPr id="121" name="Text 109"/>
           <p:cNvSpPr txBox="1"/>
           <p:nvPr/>
         </p:nvSpPr>
@@ -18881,7 +19349,7 @@
       </p:sp>
       <p:sp>
         <p:nvSpPr>
-          <p:cNvPr id="116" name="Shape 109"/>
+          <p:cNvPr id="122" name="Shape 110"/>
           <p:cNvSpPr/>
           <p:nvPr/>
         </p:nvSpPr>
@@ -18927,7 +19395,7 @@
       </p:sp>
       <p:sp>
         <p:nvSpPr>
-          <p:cNvPr id="117" name="Text 110"/>
+          <p:cNvPr id="123" name="Text 111"/>
           <p:cNvSpPr txBox="1"/>
           <p:nvPr/>
         </p:nvSpPr>
@@ -18962,7 +19430,7 @@
       </p:sp>
       <p:sp>
         <p:nvSpPr>
-          <p:cNvPr id="118" name="Shape 111"/>
+          <p:cNvPr id="124" name="Shape 112"/>
           <p:cNvSpPr/>
           <p:nvPr/>
         </p:nvSpPr>
@@ -19008,7 +19476,7 @@
       </p:sp>
       <p:sp>
         <p:nvSpPr>
-          <p:cNvPr id="119" name="Text 112"/>
+          <p:cNvPr id="125" name="Text 113"/>
           <p:cNvSpPr txBox="1"/>
           <p:nvPr/>
         </p:nvSpPr>
@@ -19043,7 +19511,7 @@
       </p:sp>
       <p:sp>
         <p:nvSpPr>
-          <p:cNvPr id="120" name="Shape 113"/>
+          <p:cNvPr id="126" name="Shape 114"/>
           <p:cNvSpPr/>
           <p:nvPr/>
         </p:nvSpPr>
@@ -19089,7 +19557,7 @@
       </p:sp>
       <p:sp>
         <p:nvSpPr>
-          <p:cNvPr id="121" name="Text 114"/>
+          <p:cNvPr id="127" name="Text 115"/>
           <p:cNvSpPr txBox="1"/>
           <p:nvPr/>
         </p:nvSpPr>
@@ -19124,7 +19592,7 @@
       </p:sp>
       <p:sp>
         <p:nvSpPr>
-          <p:cNvPr id="122" name="Shape 115"/>
+          <p:cNvPr id="128" name="Shape 116"/>
           <p:cNvSpPr/>
           <p:nvPr/>
         </p:nvSpPr>
@@ -19170,7 +19638,7 @@
       </p:sp>
       <p:sp>
         <p:nvSpPr>
-          <p:cNvPr id="123" name="Text 116"/>
+          <p:cNvPr id="129" name="Text 117"/>
           <p:cNvSpPr txBox="1"/>
           <p:nvPr/>
         </p:nvSpPr>
@@ -19205,7 +19673,7 @@
       </p:sp>
       <p:sp>
         <p:nvSpPr>
-          <p:cNvPr id="124" name="Shape 117"/>
+          <p:cNvPr id="130" name="Shape 118"/>
           <p:cNvSpPr/>
           <p:nvPr/>
         </p:nvSpPr>
@@ -19251,7 +19719,7 @@
       </p:sp>
       <p:sp>
         <p:nvSpPr>
-          <p:cNvPr id="125" name="Text 118"/>
+          <p:cNvPr id="131" name="Text 119"/>
           <p:cNvSpPr txBox="1"/>
           <p:nvPr/>
         </p:nvSpPr>
@@ -19286,7 +19754,7 @@
       </p:sp>
       <p:sp>
         <p:nvSpPr>
-          <p:cNvPr id="126" name="Text 119"/>
+          <p:cNvPr id="132" name="Text 120"/>
           <p:cNvSpPr txBox="1"/>
           <p:nvPr/>
         </p:nvSpPr>
@@ -19320,7 +19788,7 @@
       </p:sp>
       <p:cxnSp>
         <p:nvCxnSpPr>
-          <p:cNvPr id="127" name="Arrow 120"/>
+          <p:cNvPr id="133" name="Arrow 121"/>
           <p:cNvCxnSpPr/>
           <p:nvPr/>
         </p:nvCxnSpPr>
@@ -19356,7 +19824,7 @@
       </p:cxnSp>
       <p:cxnSp>
         <p:nvCxnSpPr>
-          <p:cNvPr id="128" name="Arrow 121"/>
+          <p:cNvPr id="134" name="Arrow 122"/>
           <p:cNvCxnSpPr/>
           <p:nvPr/>
         </p:nvCxnSpPr>
@@ -19392,7 +19860,7 @@
       </p:cxnSp>
       <p:sp>
         <p:nvSpPr>
-          <p:cNvPr id="129" name="Shape 122"/>
+          <p:cNvPr id="135" name="Shape 123"/>
           <p:cNvSpPr/>
           <p:nvPr/>
         </p:nvSpPr>
@@ -19438,7 +19906,7 @@
       </p:sp>
       <p:sp>
         <p:nvSpPr>
-          <p:cNvPr id="130" name="Text 123"/>
+          <p:cNvPr id="136" name="Text 124"/>
           <p:cNvSpPr txBox="1"/>
           <p:nvPr/>
         </p:nvSpPr>
@@ -19481,74 +19949,7 @@
       </p:sp>
       <p:pic>
         <p:nvPicPr>
-          <p:cNvPr id="131" name="Picture 130" descr="jira.png"/>
-          <p:cNvPicPr>
-            <a:picLocks noChangeAspect="1"/>
-          </p:cNvPicPr>
-          <p:nvPr/>
-        </p:nvPicPr>
-        <p:blipFill>
-          <a:blip r:embed="rId3"/>
-          <a:stretch>
-            <a:fillRect/>
-          </a:stretch>
-        </p:blipFill>
-        <p:spPr>
-          <a:xfrm>
-            <a:off x="7580376" y="4078224"/>
-            <a:ext cx="182880" cy="182880"/>
-          </a:xfrm>
-          <a:prstGeom prst="rect">
-            <a:avLst/>
-          </a:prstGeom>
-        </p:spPr>
-      </p:pic>
-      <p:sp>
-        <p:nvSpPr>
-          <p:cNvPr id="132" name="Text 124"/>
-          <p:cNvSpPr txBox="1"/>
-          <p:nvPr/>
-        </p:nvSpPr>
-        <p:spPr>
-          <a:xfrm>
-            <a:off x="7827264" y="4032504"/>
-            <a:ext cx="1783080" cy="292608"/>
-          </a:xfrm>
-          <a:prstGeom prst="rect">
-            <a:avLst/>
-          </a:prstGeom>
-          <a:noFill/>
-        </p:spPr>
-        <p:txBody>
-          <a:bodyPr wrap="square" lIns="0" rIns="0" tIns="0" bIns="0" anchor="ctr">
-            <a:spAutoFit/>
-          </a:bodyPr>
-          <a:lstStyle/>
-          <a:p>
-            <a:r>
-              <a:rPr sz="700" b="1" i="0">
-                <a:solidFill>
-                  <a:srgbClr val="FFFFFF"/>
-                </a:solidFill>
-                <a:latin typeface="Trenda IG Text"/>
-              </a:rPr>
-              <a:t>Jira</a:t>
-            </a:r>
-            <a:r>
-              <a:rPr sz="600" b="0" i="0">
-                <a:solidFill>
-                  <a:srgbClr val="BFBFBF"/>
-                </a:solidFill>
-                <a:latin typeface="Trenda IG Text"/>
-              </a:rPr>
-              <a:t>  brief, status to Done</a:t>
-            </a:r>
-          </a:p>
-        </p:txBody>
-      </p:sp>
-      <p:pic>
-        <p:nvPicPr>
-          <p:cNvPr id="133" name="Picture 132" descr="confluence.png"/>
+          <p:cNvPr id="137" name="Picture 136" descr="jira.png"/>
           <p:cNvPicPr>
             <a:picLocks noChangeAspect="1"/>
           </p:cNvPicPr>
@@ -19562,6 +19963,73 @@
         </p:blipFill>
         <p:spPr>
           <a:xfrm>
+            <a:off x="7580376" y="4078224"/>
+            <a:ext cx="182880" cy="182880"/>
+          </a:xfrm>
+          <a:prstGeom prst="rect">
+            <a:avLst/>
+          </a:prstGeom>
+        </p:spPr>
+      </p:pic>
+      <p:sp>
+        <p:nvSpPr>
+          <p:cNvPr id="138" name="Text 125"/>
+          <p:cNvSpPr txBox="1"/>
+          <p:nvPr/>
+        </p:nvSpPr>
+        <p:spPr>
+          <a:xfrm>
+            <a:off x="7827264" y="4032504"/>
+            <a:ext cx="1783080" cy="292608"/>
+          </a:xfrm>
+          <a:prstGeom prst="rect">
+            <a:avLst/>
+          </a:prstGeom>
+          <a:noFill/>
+        </p:spPr>
+        <p:txBody>
+          <a:bodyPr wrap="square" lIns="0" rIns="0" tIns="0" bIns="0" anchor="ctr">
+            <a:spAutoFit/>
+          </a:bodyPr>
+          <a:lstStyle/>
+          <a:p>
+            <a:r>
+              <a:rPr sz="700" b="1" i="0">
+                <a:solidFill>
+                  <a:srgbClr val="FFFFFF"/>
+                </a:solidFill>
+                <a:latin typeface="Trenda IG Text"/>
+              </a:rPr>
+              <a:t>Jira</a:t>
+            </a:r>
+            <a:r>
+              <a:rPr sz="600" b="0" i="0">
+                <a:solidFill>
+                  <a:srgbClr val="BFBFBF"/>
+                </a:solidFill>
+                <a:latin typeface="Trenda IG Text"/>
+              </a:rPr>
+              <a:t>  brief, status to Done</a:t>
+            </a:r>
+          </a:p>
+        </p:txBody>
+      </p:sp>
+      <p:pic>
+        <p:nvPicPr>
+          <p:cNvPr id="139" name="Picture 138" descr="confluence.png"/>
+          <p:cNvPicPr>
+            <a:picLocks noChangeAspect="1"/>
+          </p:cNvPicPr>
+          <p:nvPr/>
+        </p:nvPicPr>
+        <p:blipFill>
+          <a:blip r:embed="rId5"/>
+          <a:stretch>
+            <a:fillRect/>
+          </a:stretch>
+        </p:blipFill>
+        <p:spPr>
+          <a:xfrm>
             <a:off x="9637776" y="4078224"/>
             <a:ext cx="182880" cy="182880"/>
           </a:xfrm>
@@ -19572,7 +20040,7 @@
       </p:pic>
       <p:sp>
         <p:nvSpPr>
-          <p:cNvPr id="134" name="Text 125"/>
+          <p:cNvPr id="140" name="Text 126"/>
           <p:cNvSpPr txBox="1"/>
           <p:nvPr/>
         </p:nvSpPr>
@@ -19615,7 +20083,74 @@
       </p:sp>
       <p:pic>
         <p:nvPicPr>
-          <p:cNvPr id="135" name="Picture 134" descr="git.png"/>
+          <p:cNvPr id="141" name="Picture 140" descr="git.png"/>
+          <p:cNvPicPr>
+            <a:picLocks noChangeAspect="1"/>
+          </p:cNvPicPr>
+          <p:nvPr/>
+        </p:nvPicPr>
+        <p:blipFill>
+          <a:blip r:embed="rId7"/>
+          <a:stretch>
+            <a:fillRect/>
+          </a:stretch>
+        </p:blipFill>
+        <p:spPr>
+          <a:xfrm>
+            <a:off x="7580376" y="4398264"/>
+            <a:ext cx="182880" cy="182880"/>
+          </a:xfrm>
+          <a:prstGeom prst="rect">
+            <a:avLst/>
+          </a:prstGeom>
+        </p:spPr>
+      </p:pic>
+      <p:sp>
+        <p:nvSpPr>
+          <p:cNvPr id="142" name="Text 127"/>
+          <p:cNvSpPr txBox="1"/>
+          <p:nvPr/>
+        </p:nvSpPr>
+        <p:spPr>
+          <a:xfrm>
+            <a:off x="7827264" y="4352544"/>
+            <a:ext cx="1783080" cy="292608"/>
+          </a:xfrm>
+          <a:prstGeom prst="rect">
+            <a:avLst/>
+          </a:prstGeom>
+          <a:noFill/>
+        </p:spPr>
+        <p:txBody>
+          <a:bodyPr wrap="square" lIns="0" rIns="0" tIns="0" bIns="0" anchor="ctr">
+            <a:spAutoFit/>
+          </a:bodyPr>
+          <a:lstStyle/>
+          <a:p>
+            <a:r>
+              <a:rPr sz="700" b="1" i="0">
+                <a:solidFill>
+                  <a:srgbClr val="FFFFFF"/>
+                </a:solidFill>
+                <a:latin typeface="Trenda IG Text"/>
+              </a:rPr>
+              <a:t>Git</a:t>
+            </a:r>
+            <a:r>
+              <a:rPr sz="600" b="0" i="0">
+                <a:solidFill>
+                  <a:srgbClr val="BFBFBF"/>
+                </a:solidFill>
+                <a:latin typeface="Trenda IG Text"/>
+              </a:rPr>
+              <a:t>  branch, pull request</a:t>
+            </a:r>
+          </a:p>
+        </p:txBody>
+      </p:sp>
+      <p:pic>
+        <p:nvPicPr>
+          <p:cNvPr id="143" name="Picture 142" descr="salesforce.png"/>
           <p:cNvPicPr>
             <a:picLocks noChangeAspect="1"/>
           </p:cNvPicPr>
@@ -19629,73 +20164,6 @@
         </p:blipFill>
         <p:spPr>
           <a:xfrm>
-            <a:off x="7580376" y="4398264"/>
-            <a:ext cx="182880" cy="182880"/>
-          </a:xfrm>
-          <a:prstGeom prst="rect">
-            <a:avLst/>
-          </a:prstGeom>
-        </p:spPr>
-      </p:pic>
-      <p:sp>
-        <p:nvSpPr>
-          <p:cNvPr id="136" name="Text 126"/>
-          <p:cNvSpPr txBox="1"/>
-          <p:nvPr/>
-        </p:nvSpPr>
-        <p:spPr>
-          <a:xfrm>
-            <a:off x="7827264" y="4352544"/>
-            <a:ext cx="1783080" cy="292608"/>
-          </a:xfrm>
-          <a:prstGeom prst="rect">
-            <a:avLst/>
-          </a:prstGeom>
-          <a:noFill/>
-        </p:spPr>
-        <p:txBody>
-          <a:bodyPr wrap="square" lIns="0" rIns="0" tIns="0" bIns="0" anchor="ctr">
-            <a:spAutoFit/>
-          </a:bodyPr>
-          <a:lstStyle/>
-          <a:p>
-            <a:r>
-              <a:rPr sz="700" b="1" i="0">
-                <a:solidFill>
-                  <a:srgbClr val="FFFFFF"/>
-                </a:solidFill>
-                <a:latin typeface="Trenda IG Text"/>
-              </a:rPr>
-              <a:t>Git</a:t>
-            </a:r>
-            <a:r>
-              <a:rPr sz="600" b="0" i="0">
-                <a:solidFill>
-                  <a:srgbClr val="BFBFBF"/>
-                </a:solidFill>
-                <a:latin typeface="Trenda IG Text"/>
-              </a:rPr>
-              <a:t>  branch, pull request</a:t>
-            </a:r>
-          </a:p>
-        </p:txBody>
-      </p:sp>
-      <p:pic>
-        <p:nvPicPr>
-          <p:cNvPr id="137" name="Picture 136" descr="salesforce.png"/>
-          <p:cNvPicPr>
-            <a:picLocks noChangeAspect="1"/>
-          </p:cNvPicPr>
-          <p:nvPr/>
-        </p:nvPicPr>
-        <p:blipFill>
-          <a:blip r:embed="rId5"/>
-          <a:stretch>
-            <a:fillRect/>
-          </a:stretch>
-        </p:blipFill>
-        <p:spPr>
-          <a:xfrm>
             <a:off x="9637776" y="4398264"/>
             <a:ext cx="182880" cy="182880"/>
           </a:xfrm>
@@ -19706,7 +20174,7 @@
       </p:pic>
       <p:sp>
         <p:nvSpPr>
-          <p:cNvPr id="138" name="Text 127"/>
+          <p:cNvPr id="144" name="Text 128"/>
           <p:cNvSpPr txBox="1"/>
           <p:nvPr/>
         </p:nvSpPr>
@@ -19749,7 +20217,7 @@
       </p:sp>
       <p:sp>
         <p:nvSpPr>
-          <p:cNvPr id="139" name="Shape 128"/>
+          <p:cNvPr id="145" name="Shape 129"/>
           <p:cNvSpPr/>
           <p:nvPr/>
         </p:nvSpPr>
@@ -19793,7 +20261,7 @@
       </p:sp>
       <p:sp>
         <p:nvSpPr>
-          <p:cNvPr id="140" name="Text 129"/>
+          <p:cNvPr id="146" name="Text 130"/>
           <p:cNvSpPr txBox="1"/>
           <p:nvPr/>
         </p:nvSpPr>
@@ -19828,7 +20296,7 @@
       </p:sp>
       <p:sp>
         <p:nvSpPr>
-          <p:cNvPr id="141" name="Text 130"/>
+          <p:cNvPr id="147" name="Text 131"/>
           <p:cNvSpPr txBox="1"/>
           <p:nvPr/>
         </p:nvSpPr>
@@ -19871,7 +20339,7 @@
       </p:sp>
       <p:sp>
         <p:nvSpPr>
-          <p:cNvPr id="142" name="Shape 131"/>
+          <p:cNvPr id="148" name="Shape 132"/>
           <p:cNvSpPr/>
           <p:nvPr/>
         </p:nvSpPr>
@@ -19915,7 +20383,7 @@
       </p:sp>
       <p:sp>
         <p:nvSpPr>
-          <p:cNvPr id="143" name="Text 132"/>
+          <p:cNvPr id="149" name="Text 133"/>
           <p:cNvSpPr txBox="1"/>
           <p:nvPr/>
         </p:nvSpPr>
@@ -19950,7 +20418,7 @@
       </p:sp>
       <p:sp>
         <p:nvSpPr>
-          <p:cNvPr id="144" name="Text 133"/>
+          <p:cNvPr id="150" name="Text 134"/>
           <p:cNvSpPr txBox="1"/>
           <p:nvPr/>
         </p:nvSpPr>
@@ -19993,7 +20461,7 @@
       </p:sp>
       <p:sp>
         <p:nvSpPr>
-          <p:cNvPr id="145" name="Text 134"/>
+          <p:cNvPr id="151" name="Text 135"/>
           <p:cNvSpPr txBox="1"/>
           <p:nvPr/>
         </p:nvSpPr>
@@ -20027,7 +20495,7 @@
       </p:sp>
       <p:sp>
         <p:nvSpPr>
-          <p:cNvPr id="146" name="Shape 135"/>
+          <p:cNvPr id="152" name="Shape 136"/>
           <p:cNvSpPr/>
           <p:nvPr/>
         </p:nvSpPr>
@@ -20069,7 +20537,7 @@
       </p:sp>
       <p:sp>
         <p:nvSpPr>
-          <p:cNvPr id="147" name="Shape 136"/>
+          <p:cNvPr id="153" name="Shape 137"/>
           <p:cNvSpPr/>
           <p:nvPr/>
         </p:nvSpPr>
@@ -20111,7 +20579,7 @@
       </p:sp>
       <p:sp>
         <p:nvSpPr>
-          <p:cNvPr id="148" name="Text 137"/>
+          <p:cNvPr id="154" name="Text 138"/>
           <p:cNvSpPr txBox="1"/>
           <p:nvPr/>
         </p:nvSpPr>
@@ -20145,7 +20613,7 @@
       </p:sp>
       <p:sp>
         <p:nvSpPr>
-          <p:cNvPr id="149" name="Text 138"/>
+          <p:cNvPr id="155" name="Text 139"/>
           <p:cNvSpPr txBox="1"/>
           <p:nvPr/>
         </p:nvSpPr>
@@ -20179,7 +20647,7 @@
       </p:sp>
       <p:sp>
         <p:nvSpPr>
-          <p:cNvPr id="150" name="Shape 139"/>
+          <p:cNvPr id="156" name="Shape 140"/>
           <p:cNvSpPr/>
           <p:nvPr/>
         </p:nvSpPr>
@@ -20221,7 +20689,7 @@
       </p:sp>
       <p:sp>
         <p:nvSpPr>
-          <p:cNvPr id="151" name="Shape 140"/>
+          <p:cNvPr id="157" name="Shape 141"/>
           <p:cNvSpPr/>
           <p:nvPr/>
         </p:nvSpPr>
@@ -20263,7 +20731,7 @@
       </p:sp>
       <p:sp>
         <p:nvSpPr>
-          <p:cNvPr id="152" name="Text 141"/>
+          <p:cNvPr id="158" name="Text 142"/>
           <p:cNvSpPr txBox="1"/>
           <p:nvPr/>
         </p:nvSpPr>
@@ -20297,7 +20765,7 @@
       </p:sp>
       <p:sp>
         <p:nvSpPr>
-          <p:cNvPr id="153" name="Text 142"/>
+          <p:cNvPr id="159" name="Text 143"/>
           <p:cNvSpPr txBox="1"/>
           <p:nvPr/>
         </p:nvSpPr>
@@ -20331,7 +20799,7 @@
       </p:sp>
       <p:sp>
         <p:nvSpPr>
-          <p:cNvPr id="154" name="Shape 143"/>
+          <p:cNvPr id="160" name="Shape 144"/>
           <p:cNvSpPr/>
           <p:nvPr/>
         </p:nvSpPr>
@@ -20373,7 +20841,7 @@
       </p:sp>
       <p:sp>
         <p:nvSpPr>
-          <p:cNvPr id="155" name="Shape 144"/>
+          <p:cNvPr id="161" name="Shape 145"/>
           <p:cNvSpPr/>
           <p:nvPr/>
         </p:nvSpPr>
@@ -20415,7 +20883,7 @@
       </p:sp>
       <p:sp>
         <p:nvSpPr>
-          <p:cNvPr id="156" name="Text 145"/>
+          <p:cNvPr id="162" name="Text 146"/>
           <p:cNvSpPr txBox="1"/>
           <p:nvPr/>
         </p:nvSpPr>
@@ -20449,7 +20917,7 @@
       </p:sp>
       <p:sp>
         <p:nvSpPr>
-          <p:cNvPr id="157" name="Text 146"/>
+          <p:cNvPr id="163" name="Text 147"/>
           <p:cNvSpPr txBox="1"/>
           <p:nvPr/>
         </p:nvSpPr>
@@ -20697,16 +21165,40 @@
           <a:p/>
         </p:txBody>
       </p:sp>
-      <p:sp>
-        <p:nvSpPr>
-          <p:cNvPr id="7" name="Text 6"/>
+      <p:pic>
+        <p:nvPicPr>
+          <p:cNvPr id="7" name="Picture 6" descr="people.png"/>
+          <p:cNvPicPr>
+            <a:picLocks noChangeAspect="1"/>
+          </p:cNvPicPr>
+          <p:nvPr/>
+        </p:nvPicPr>
+        <p:blipFill>
+          <a:blip r:embed="rId2"/>
+          <a:stretch>
+            <a:fillRect/>
+          </a:stretch>
+        </p:blipFill>
+        <p:spPr>
+          <a:xfrm>
+            <a:off x="448056" y="1243584"/>
+            <a:ext cx="201168" cy="201168"/>
+          </a:xfrm>
+          <a:prstGeom prst="rect">
+            <a:avLst/>
+          </a:prstGeom>
+        </p:spPr>
+      </p:pic>
+      <p:sp>
+        <p:nvSpPr>
+          <p:cNvPr id="8" name="Text 6"/>
           <p:cNvSpPr txBox="1"/>
           <p:nvPr/>
         </p:nvSpPr>
         <p:spPr>
           <a:xfrm rot="16200000">
-            <a:off x="45719" y="1545336"/>
-            <a:ext cx="1005840" cy="256032"/>
+            <a:off x="182879" y="1682495"/>
+            <a:ext cx="731520" cy="256032"/>
           </a:xfrm>
           <a:prstGeom prst="rect">
             <a:avLst/>
@@ -20734,7 +21226,7 @@
       </p:sp>
       <p:sp>
         <p:nvSpPr>
-          <p:cNvPr id="8" name="Shape 7"/>
+          <p:cNvPr id="9" name="Shape 7"/>
           <p:cNvSpPr/>
           <p:nvPr/>
         </p:nvSpPr>
@@ -20780,7 +21272,7 @@
       </p:sp>
       <p:sp>
         <p:nvSpPr>
-          <p:cNvPr id="9" name="Shape 8"/>
+          <p:cNvPr id="10" name="Shape 8"/>
           <p:cNvSpPr/>
           <p:nvPr/>
         </p:nvSpPr>
@@ -20793,7 +21285,7 @@
             <a:avLst/>
           </a:prstGeom>
           <a:solidFill>
-            <a:srgbClr val="00D6F2"/>
+            <a:srgbClr val="0A4A52"/>
           </a:solidFill>
           <a:ln>
             <a:noFill/>
@@ -20820,16 +21312,40 @@
           <a:p/>
         </p:txBody>
       </p:sp>
-      <p:sp>
-        <p:nvSpPr>
-          <p:cNvPr id="10" name="Text 9"/>
+      <p:pic>
+        <p:nvPicPr>
+          <p:cNvPr id="11" name="Picture 10" descr="harness.png"/>
+          <p:cNvPicPr>
+            <a:picLocks noChangeAspect="1"/>
+          </p:cNvPicPr>
+          <p:nvPr/>
+        </p:nvPicPr>
+        <p:blipFill>
+          <a:blip r:embed="rId3"/>
+          <a:stretch>
+            <a:fillRect/>
+          </a:stretch>
+        </p:blipFill>
+        <p:spPr>
+          <a:xfrm>
+            <a:off x="448056" y="2322576"/>
+            <a:ext cx="201168" cy="201168"/>
+          </a:xfrm>
+          <a:prstGeom prst="rect">
+            <a:avLst/>
+          </a:prstGeom>
+        </p:spPr>
+      </p:pic>
+      <p:sp>
+        <p:nvSpPr>
+          <p:cNvPr id="12" name="Text 9"/>
           <p:cNvSpPr txBox="1"/>
           <p:nvPr/>
         </p:nvSpPr>
         <p:spPr>
           <a:xfrm rot="16200000">
-            <a:off x="73151" y="2596896"/>
-            <a:ext cx="950976" cy="256032"/>
+            <a:off x="210311" y="2734056"/>
+            <a:ext cx="676656" cy="256032"/>
           </a:xfrm>
           <a:prstGeom prst="rect">
             <a:avLst/>
@@ -20846,7 +21362,7 @@
             <a:r>
               <a:rPr sz="660" b="1" i="0" spc="150">
                 <a:solidFill>
-                  <a:srgbClr val="000000"/>
+                  <a:srgbClr val="FFFFFF"/>
                 </a:solidFill>
                 <a:latin typeface="Trenda IG Text"/>
               </a:rPr>
@@ -20857,7 +21373,7 @@
       </p:sp>
       <p:sp>
         <p:nvSpPr>
-          <p:cNvPr id="11" name="Shape 10"/>
+          <p:cNvPr id="13" name="Shape 10"/>
           <p:cNvSpPr/>
           <p:nvPr/>
         </p:nvSpPr>
@@ -20904,7 +21420,7 @@
       </p:sp>
       <p:sp>
         <p:nvSpPr>
-          <p:cNvPr id="12" name="Shape 11"/>
+          <p:cNvPr id="14" name="Shape 11"/>
           <p:cNvSpPr/>
           <p:nvPr/>
         </p:nvSpPr>
@@ -20917,7 +21433,7 @@
             <a:avLst/>
           </a:prstGeom>
           <a:solidFill>
-            <a:srgbClr val="FF0069"/>
+            <a:srgbClr val="3A0A1E"/>
           </a:solidFill>
           <a:ln>
             <a:noFill/>
@@ -20944,16 +21460,40 @@
           <a:p/>
         </p:txBody>
       </p:sp>
-      <p:sp>
-        <p:nvSpPr>
-          <p:cNvPr id="13" name="Text 12"/>
+      <p:pic>
+        <p:nvPicPr>
+          <p:cNvPr id="15" name="Picture 14" descr="googlecloud.png"/>
+          <p:cNvPicPr>
+            <a:picLocks noChangeAspect="1"/>
+          </p:cNvPicPr>
+          <p:nvPr/>
+        </p:nvPicPr>
+        <p:blipFill>
+          <a:blip r:embed="rId4"/>
+          <a:stretch>
+            <a:fillRect/>
+          </a:stretch>
+        </p:blipFill>
+        <p:spPr>
+          <a:xfrm>
+            <a:off x="448056" y="3346704"/>
+            <a:ext cx="201168" cy="201168"/>
+          </a:xfrm>
+          <a:prstGeom prst="rect">
+            <a:avLst/>
+          </a:prstGeom>
+        </p:spPr>
+      </p:pic>
+      <p:sp>
+        <p:nvSpPr>
+          <p:cNvPr id="16" name="Text 12"/>
           <p:cNvSpPr txBox="1"/>
           <p:nvPr/>
         </p:nvSpPr>
         <p:spPr>
           <a:xfrm rot="16200000">
-            <a:off x="-384048" y="4078224"/>
-            <a:ext cx="1865376" cy="256032"/>
+            <a:off x="-246888" y="4215384"/>
+            <a:ext cx="1591056" cy="256032"/>
           </a:xfrm>
           <a:prstGeom prst="rect">
             <a:avLst/>
@@ -20981,7 +21521,7 @@
       </p:sp>
       <p:sp>
         <p:nvSpPr>
-          <p:cNvPr id="14" name="Shape 13"/>
+          <p:cNvPr id="17" name="Shape 13"/>
           <p:cNvSpPr/>
           <p:nvPr/>
         </p:nvSpPr>
@@ -21027,7 +21567,7 @@
       </p:sp>
       <p:sp>
         <p:nvSpPr>
-          <p:cNvPr id="15" name="Shape 14"/>
+          <p:cNvPr id="18" name="Shape 14"/>
           <p:cNvSpPr/>
           <p:nvPr/>
         </p:nvSpPr>
@@ -21069,7 +21609,7 @@
       </p:sp>
       <p:sp>
         <p:nvSpPr>
-          <p:cNvPr id="16" name="Text 15"/>
+          <p:cNvPr id="19" name="Text 15"/>
           <p:cNvSpPr txBox="1"/>
           <p:nvPr/>
         </p:nvSpPr>
@@ -21102,16 +21642,40 @@
           </a:p>
         </p:txBody>
       </p:sp>
-      <p:sp>
-        <p:nvSpPr>
-          <p:cNvPr id="17" name="Text 16"/>
-          <p:cNvSpPr txBox="1"/>
-          <p:nvPr/>
-        </p:nvSpPr>
-        <p:spPr>
-          <a:xfrm>
-            <a:off x="1115568" y="1353312"/>
-            <a:ext cx="1691640" cy="201168"/>
+      <p:pic>
+        <p:nvPicPr>
+          <p:cNvPr id="20" name="Picture 19" descr="openai-white.png"/>
+          <p:cNvPicPr>
+            <a:picLocks noChangeAspect="1"/>
+          </p:cNvPicPr>
+          <p:nvPr/>
+        </p:nvPicPr>
+        <p:blipFill>
+          <a:blip r:embed="rId5"/>
+          <a:stretch>
+            <a:fillRect/>
+          </a:stretch>
+        </p:blipFill>
+        <p:spPr>
+          <a:xfrm>
+            <a:off x="1124712" y="1371600"/>
+            <a:ext cx="164592" cy="164592"/>
+          </a:xfrm>
+          <a:prstGeom prst="rect">
+            <a:avLst/>
+          </a:prstGeom>
+        </p:spPr>
+      </p:pic>
+      <p:sp>
+        <p:nvSpPr>
+          <p:cNvPr id="21" name="Text 16"/>
+          <p:cNvSpPr txBox="1"/>
+          <p:nvPr/>
+        </p:nvSpPr>
+        <p:spPr>
+          <a:xfrm>
+            <a:off x="1335024" y="1353312"/>
+            <a:ext cx="1472184" cy="201168"/>
           </a:xfrm>
           <a:prstGeom prst="rect">
             <a:avLst/>
@@ -21138,7 +21702,7 @@
       </p:sp>
       <p:sp>
         <p:nvSpPr>
-          <p:cNvPr id="18" name="Text 17"/>
+          <p:cNvPr id="22" name="Text 17"/>
           <p:cNvSpPr txBox="1"/>
           <p:nvPr/>
         </p:nvSpPr>
@@ -21193,7 +21757,7 @@
       </p:sp>
       <p:sp>
         <p:nvSpPr>
-          <p:cNvPr id="19" name="Shape 18"/>
+          <p:cNvPr id="23" name="Shape 18"/>
           <p:cNvSpPr/>
           <p:nvPr/>
         </p:nvSpPr>
@@ -21239,7 +21803,7 @@
       </p:sp>
       <p:sp>
         <p:nvSpPr>
-          <p:cNvPr id="20" name="Shape 19"/>
+          <p:cNvPr id="24" name="Shape 19"/>
           <p:cNvSpPr/>
           <p:nvPr/>
         </p:nvSpPr>
@@ -21281,7 +21845,7 @@
       </p:sp>
       <p:sp>
         <p:nvSpPr>
-          <p:cNvPr id="21" name="Text 20"/>
+          <p:cNvPr id="25" name="Text 20"/>
           <p:cNvSpPr txBox="1"/>
           <p:nvPr/>
         </p:nvSpPr>
@@ -21316,7 +21880,7 @@
       </p:sp>
       <p:sp>
         <p:nvSpPr>
-          <p:cNvPr id="22" name="Shape 21"/>
+          <p:cNvPr id="26" name="Shape 21"/>
           <p:cNvSpPr/>
           <p:nvPr/>
         </p:nvSpPr>
@@ -21362,7 +21926,7 @@
       </p:sp>
       <p:sp>
         <p:nvSpPr>
-          <p:cNvPr id="23" name="Text 22"/>
+          <p:cNvPr id="27" name="Text 22"/>
           <p:cNvSpPr txBox="1"/>
           <p:nvPr/>
         </p:nvSpPr>
@@ -21397,7 +21961,7 @@
       </p:sp>
       <p:sp>
         <p:nvSpPr>
-          <p:cNvPr id="24" name="Text 23"/>
+          <p:cNvPr id="28" name="Text 23"/>
           <p:cNvSpPr txBox="1"/>
           <p:nvPr/>
         </p:nvSpPr>
@@ -21431,7 +21995,7 @@
       </p:sp>
       <p:sp>
         <p:nvSpPr>
-          <p:cNvPr id="25" name="Text 24"/>
+          <p:cNvPr id="29" name="Text 24"/>
           <p:cNvSpPr txBox="1"/>
           <p:nvPr/>
         </p:nvSpPr>
@@ -21502,7 +22066,7 @@
       </p:sp>
       <p:sp>
         <p:nvSpPr>
-          <p:cNvPr id="26" name="Shape 25"/>
+          <p:cNvPr id="30" name="Shape 25"/>
           <p:cNvSpPr/>
           <p:nvPr/>
         </p:nvSpPr>
@@ -21548,7 +22112,7 @@
       </p:sp>
       <p:sp>
         <p:nvSpPr>
-          <p:cNvPr id="27" name="Shape 26"/>
+          <p:cNvPr id="31" name="Shape 26"/>
           <p:cNvSpPr/>
           <p:nvPr/>
         </p:nvSpPr>
@@ -21590,7 +22154,7 @@
       </p:sp>
       <p:sp>
         <p:nvSpPr>
-          <p:cNvPr id="28" name="Text 27"/>
+          <p:cNvPr id="32" name="Text 27"/>
           <p:cNvSpPr txBox="1"/>
           <p:nvPr/>
         </p:nvSpPr>
@@ -21623,9 +22187,33 @@
           </a:p>
         </p:txBody>
       </p:sp>
-      <p:sp>
-        <p:nvSpPr>
-          <p:cNvPr id="29" name="Shape 28"/>
+      <p:pic>
+        <p:nvPicPr>
+          <p:cNvPr id="33" name="Picture 32" descr="looker.png"/>
+          <p:cNvPicPr>
+            <a:picLocks noChangeAspect="1"/>
+          </p:cNvPicPr>
+          <p:nvPr/>
+        </p:nvPicPr>
+        <p:blipFill>
+          <a:blip r:embed="rId6"/>
+          <a:stretch>
+            <a:fillRect/>
+          </a:stretch>
+        </p:blipFill>
+        <p:spPr>
+          <a:xfrm>
+            <a:off x="5486400" y="1371600"/>
+            <a:ext cx="182880" cy="182880"/>
+          </a:xfrm>
+          <a:prstGeom prst="rect">
+            <a:avLst/>
+          </a:prstGeom>
+        </p:spPr>
+      </p:pic>
+      <p:sp>
+        <p:nvSpPr>
+          <p:cNvPr id="34" name="Shape 28"/>
           <p:cNvSpPr/>
           <p:nvPr/>
         </p:nvSpPr>
@@ -21671,7 +22259,7 @@
       </p:sp>
       <p:sp>
         <p:nvSpPr>
-          <p:cNvPr id="30" name="Text 29"/>
+          <p:cNvPr id="35" name="Text 29"/>
           <p:cNvSpPr txBox="1"/>
           <p:nvPr/>
         </p:nvSpPr>
@@ -21706,14 +22294,14 @@
       </p:sp>
       <p:sp>
         <p:nvSpPr>
-          <p:cNvPr id="31" name="Text 30"/>
-          <p:cNvSpPr txBox="1"/>
-          <p:nvPr/>
-        </p:nvSpPr>
-        <p:spPr>
-          <a:xfrm>
-            <a:off x="5486400" y="1362456"/>
-            <a:ext cx="1335023" cy="201168"/>
+          <p:cNvPr id="36" name="Text 30"/>
+          <p:cNvSpPr txBox="1"/>
+          <p:nvPr/>
+        </p:nvSpPr>
+        <p:spPr>
+          <a:xfrm>
+            <a:off x="5724144" y="1362456"/>
+            <a:ext cx="1097280" cy="201168"/>
           </a:xfrm>
           <a:prstGeom prst="rect">
             <a:avLst/>
@@ -21740,7 +22328,7 @@
       </p:sp>
       <p:sp>
         <p:nvSpPr>
-          <p:cNvPr id="32" name="Text 31"/>
+          <p:cNvPr id="37" name="Text 31"/>
           <p:cNvSpPr txBox="1"/>
           <p:nvPr/>
         </p:nvSpPr>
@@ -21795,7 +22383,7 @@
       </p:sp>
       <p:sp>
         <p:nvSpPr>
-          <p:cNvPr id="33" name="Shape 32"/>
+          <p:cNvPr id="38" name="Shape 32"/>
           <p:cNvSpPr/>
           <p:nvPr/>
         </p:nvSpPr>
@@ -21841,7 +22429,7 @@
       </p:sp>
       <p:sp>
         <p:nvSpPr>
-          <p:cNvPr id="34" name="Shape 33"/>
+          <p:cNvPr id="39" name="Shape 33"/>
           <p:cNvSpPr/>
           <p:nvPr/>
         </p:nvSpPr>
@@ -21887,7 +22475,7 @@
       </p:sp>
       <p:sp>
         <p:nvSpPr>
-          <p:cNvPr id="35" name="Text 34"/>
+          <p:cNvPr id="40" name="Text 34"/>
           <p:cNvSpPr txBox="1"/>
           <p:nvPr/>
         </p:nvSpPr>
@@ -21922,7 +22510,7 @@
       </p:sp>
       <p:sp>
         <p:nvSpPr>
-          <p:cNvPr id="36" name="Text 35"/>
+          <p:cNvPr id="41" name="Text 35"/>
           <p:cNvSpPr txBox="1"/>
           <p:nvPr/>
         </p:nvSpPr>
@@ -21956,7 +22544,7 @@
       </p:sp>
       <p:sp>
         <p:nvSpPr>
-          <p:cNvPr id="37" name="Text 36"/>
+          <p:cNvPr id="42" name="Text 36"/>
           <p:cNvSpPr txBox="1"/>
           <p:nvPr/>
         </p:nvSpPr>
@@ -21995,7 +22583,7 @@
       </p:sp>
       <p:sp>
         <p:nvSpPr>
-          <p:cNvPr id="38" name="Shape 37"/>
+          <p:cNvPr id="43" name="Shape 37"/>
           <p:cNvSpPr/>
           <p:nvPr/>
         </p:nvSpPr>
@@ -22041,7 +22629,7 @@
       </p:sp>
       <p:sp>
         <p:nvSpPr>
-          <p:cNvPr id="39" name="Shape 38"/>
+          <p:cNvPr id="44" name="Shape 38"/>
           <p:cNvSpPr/>
           <p:nvPr/>
         </p:nvSpPr>
@@ -22083,7 +22671,7 @@
       </p:sp>
       <p:sp>
         <p:nvSpPr>
-          <p:cNvPr id="40" name="Text 39"/>
+          <p:cNvPr id="45" name="Text 39"/>
           <p:cNvSpPr txBox="1"/>
           <p:nvPr/>
         </p:nvSpPr>
@@ -22118,7 +22706,7 @@
       </p:sp>
       <p:sp>
         <p:nvSpPr>
-          <p:cNvPr id="41" name="Text 40"/>
+          <p:cNvPr id="46" name="Text 40"/>
           <p:cNvSpPr txBox="1"/>
           <p:nvPr/>
         </p:nvSpPr>
@@ -22152,7 +22740,7 @@
       </p:sp>
       <p:sp>
         <p:nvSpPr>
-          <p:cNvPr id="42" name="Text 41"/>
+          <p:cNvPr id="47" name="Text 41"/>
           <p:cNvSpPr txBox="1"/>
           <p:nvPr/>
         </p:nvSpPr>
@@ -22191,7 +22779,7 @@
       </p:sp>
       <p:sp>
         <p:nvSpPr>
-          <p:cNvPr id="43" name="Shape 42"/>
+          <p:cNvPr id="48" name="Shape 42"/>
           <p:cNvSpPr/>
           <p:nvPr/>
         </p:nvSpPr>
@@ -22237,7 +22825,7 @@
       </p:sp>
       <p:sp>
         <p:nvSpPr>
-          <p:cNvPr id="44" name="Shape 43"/>
+          <p:cNvPr id="49" name="Shape 43"/>
           <p:cNvSpPr/>
           <p:nvPr/>
         </p:nvSpPr>
@@ -22279,7 +22867,7 @@
       </p:sp>
       <p:sp>
         <p:nvSpPr>
-          <p:cNvPr id="45" name="Text 44"/>
+          <p:cNvPr id="50" name="Text 44"/>
           <p:cNvSpPr txBox="1"/>
           <p:nvPr/>
         </p:nvSpPr>
@@ -22314,7 +22902,7 @@
       </p:sp>
       <p:sp>
         <p:nvSpPr>
-          <p:cNvPr id="46" name="Text 45"/>
+          <p:cNvPr id="51" name="Text 45"/>
           <p:cNvSpPr txBox="1"/>
           <p:nvPr/>
         </p:nvSpPr>
@@ -22348,7 +22936,7 @@
       </p:sp>
       <p:sp>
         <p:nvSpPr>
-          <p:cNvPr id="47" name="Text 46"/>
+          <p:cNvPr id="52" name="Text 46"/>
           <p:cNvSpPr txBox="1"/>
           <p:nvPr/>
         </p:nvSpPr>
@@ -22387,7 +22975,7 @@
       </p:sp>
       <p:sp>
         <p:nvSpPr>
-          <p:cNvPr id="48" name="Shape 47"/>
+          <p:cNvPr id="53" name="Shape 47"/>
           <p:cNvSpPr/>
           <p:nvPr/>
         </p:nvSpPr>
@@ -22433,7 +23021,7 @@
       </p:sp>
       <p:sp>
         <p:nvSpPr>
-          <p:cNvPr id="49" name="Shape 48"/>
+          <p:cNvPr id="54" name="Shape 48"/>
           <p:cNvSpPr/>
           <p:nvPr/>
         </p:nvSpPr>
@@ -22475,7 +23063,7 @@
       </p:sp>
       <p:sp>
         <p:nvSpPr>
-          <p:cNvPr id="50" name="Text 49"/>
+          <p:cNvPr id="55" name="Text 49"/>
           <p:cNvSpPr txBox="1"/>
           <p:nvPr/>
         </p:nvSpPr>
@@ -22510,7 +23098,7 @@
       </p:sp>
       <p:sp>
         <p:nvSpPr>
-          <p:cNvPr id="51" name="Text 50"/>
+          <p:cNvPr id="56" name="Text 50"/>
           <p:cNvSpPr txBox="1"/>
           <p:nvPr/>
         </p:nvSpPr>
@@ -22544,7 +23132,7 @@
       </p:sp>
       <p:sp>
         <p:nvSpPr>
-          <p:cNvPr id="52" name="Text 51"/>
+          <p:cNvPr id="57" name="Text 51"/>
           <p:cNvSpPr txBox="1"/>
           <p:nvPr/>
         </p:nvSpPr>
@@ -22583,7 +23171,7 @@
       </p:sp>
       <p:sp>
         <p:nvSpPr>
-          <p:cNvPr id="53" name="Shape 52"/>
+          <p:cNvPr id="58" name="Shape 52"/>
           <p:cNvSpPr/>
           <p:nvPr/>
         </p:nvSpPr>
@@ -22629,7 +23217,7 @@
       </p:sp>
       <p:sp>
         <p:nvSpPr>
-          <p:cNvPr id="54" name="Shape 53"/>
+          <p:cNvPr id="59" name="Shape 53"/>
           <p:cNvSpPr/>
           <p:nvPr/>
         </p:nvSpPr>
@@ -22671,7 +23259,7 @@
       </p:sp>
       <p:sp>
         <p:nvSpPr>
-          <p:cNvPr id="55" name="Text 54"/>
+          <p:cNvPr id="60" name="Text 54"/>
           <p:cNvSpPr txBox="1"/>
           <p:nvPr/>
         </p:nvSpPr>
@@ -22706,7 +23294,7 @@
       </p:sp>
       <p:sp>
         <p:nvSpPr>
-          <p:cNvPr id="56" name="Text 55"/>
+          <p:cNvPr id="61" name="Text 55"/>
           <p:cNvSpPr txBox="1"/>
           <p:nvPr/>
         </p:nvSpPr>
@@ -22740,7 +23328,7 @@
       </p:sp>
       <p:sp>
         <p:nvSpPr>
-          <p:cNvPr id="57" name="Text 56"/>
+          <p:cNvPr id="62" name="Text 56"/>
           <p:cNvSpPr txBox="1"/>
           <p:nvPr/>
         </p:nvSpPr>
@@ -22779,7 +23367,7 @@
       </p:sp>
       <p:sp>
         <p:nvSpPr>
-          <p:cNvPr id="58" name="Shape 57"/>
+          <p:cNvPr id="63" name="Shape 57"/>
           <p:cNvSpPr/>
           <p:nvPr/>
         </p:nvSpPr>
@@ -22825,7 +23413,7 @@
       </p:sp>
       <p:sp>
         <p:nvSpPr>
-          <p:cNvPr id="59" name="Shape 58"/>
+          <p:cNvPr id="64" name="Shape 58"/>
           <p:cNvSpPr/>
           <p:nvPr/>
         </p:nvSpPr>
@@ -22867,7 +23455,7 @@
       </p:sp>
       <p:sp>
         <p:nvSpPr>
-          <p:cNvPr id="60" name="Text 59"/>
+          <p:cNvPr id="65" name="Text 59"/>
           <p:cNvSpPr txBox="1"/>
           <p:nvPr/>
         </p:nvSpPr>
@@ -22900,16 +23488,40 @@
           </a:p>
         </p:txBody>
       </p:sp>
-      <p:sp>
-        <p:nvSpPr>
-          <p:cNvPr id="61" name="Text 60"/>
-          <p:cNvSpPr txBox="1"/>
-          <p:nvPr/>
-        </p:nvSpPr>
-        <p:spPr>
-          <a:xfrm>
-            <a:off x="1133856" y="3438144"/>
-            <a:ext cx="1655063" cy="201168"/>
+      <p:pic>
+        <p:nvPicPr>
+          <p:cNvPr id="66" name="Picture 65" descr="googlecloudspanner.png"/>
+          <p:cNvPicPr>
+            <a:picLocks noChangeAspect="1"/>
+          </p:cNvPicPr>
+          <p:nvPr/>
+        </p:nvPicPr>
+        <p:blipFill>
+          <a:blip r:embed="rId7"/>
+          <a:stretch>
+            <a:fillRect/>
+          </a:stretch>
+        </p:blipFill>
+        <p:spPr>
+          <a:xfrm>
+            <a:off x="1133856" y="3447288"/>
+            <a:ext cx="182880" cy="182880"/>
+          </a:xfrm>
+          <a:prstGeom prst="rect">
+            <a:avLst/>
+          </a:prstGeom>
+        </p:spPr>
+      </p:pic>
+      <p:sp>
+        <p:nvSpPr>
+          <p:cNvPr id="67" name="Text 60"/>
+          <p:cNvSpPr txBox="1"/>
+          <p:nvPr/>
+        </p:nvSpPr>
+        <p:spPr>
+          <a:xfrm>
+            <a:off x="1371600" y="3438144"/>
+            <a:ext cx="1417319" cy="201168"/>
           </a:xfrm>
           <a:prstGeom prst="rect">
             <a:avLst/>
@@ -22936,7 +23548,7 @@
       </p:sp>
       <p:sp>
         <p:nvSpPr>
-          <p:cNvPr id="62" name="Text 61"/>
+          <p:cNvPr id="68" name="Text 61"/>
           <p:cNvSpPr txBox="1"/>
           <p:nvPr/>
         </p:nvSpPr>
@@ -22991,7 +23603,7 @@
       </p:sp>
       <p:sp>
         <p:nvSpPr>
-          <p:cNvPr id="63" name="Shape 62"/>
+          <p:cNvPr id="69" name="Shape 62"/>
           <p:cNvSpPr/>
           <p:nvPr/>
         </p:nvSpPr>
@@ -23037,7 +23649,7 @@
       </p:sp>
       <p:sp>
         <p:nvSpPr>
-          <p:cNvPr id="64" name="Shape 63"/>
+          <p:cNvPr id="70" name="Shape 63"/>
           <p:cNvSpPr/>
           <p:nvPr/>
         </p:nvSpPr>
@@ -23079,7 +23691,7 @@
       </p:sp>
       <p:sp>
         <p:nvSpPr>
-          <p:cNvPr id="65" name="Text 64"/>
+          <p:cNvPr id="71" name="Text 64"/>
           <p:cNvSpPr txBox="1"/>
           <p:nvPr/>
         </p:nvSpPr>
@@ -23112,16 +23724,40 @@
           </a:p>
         </p:txBody>
       </p:sp>
-      <p:sp>
-        <p:nvSpPr>
-          <p:cNvPr id="66" name="Text 65"/>
-          <p:cNvSpPr txBox="1"/>
-          <p:nvPr/>
-        </p:nvSpPr>
-        <p:spPr>
-          <a:xfrm>
-            <a:off x="3310127" y="3438144"/>
-            <a:ext cx="1655064" cy="201168"/>
+      <p:pic>
+        <p:nvPicPr>
+          <p:cNvPr id="72" name="Picture 71" descr="googlebigquery.png"/>
+          <p:cNvPicPr>
+            <a:picLocks noChangeAspect="1"/>
+          </p:cNvPicPr>
+          <p:nvPr/>
+        </p:nvPicPr>
+        <p:blipFill>
+          <a:blip r:embed="rId8"/>
+          <a:stretch>
+            <a:fillRect/>
+          </a:stretch>
+        </p:blipFill>
+        <p:spPr>
+          <a:xfrm>
+            <a:off x="3310127" y="3447288"/>
+            <a:ext cx="182880" cy="182880"/>
+          </a:xfrm>
+          <a:prstGeom prst="rect">
+            <a:avLst/>
+          </a:prstGeom>
+        </p:spPr>
+      </p:pic>
+      <p:sp>
+        <p:nvSpPr>
+          <p:cNvPr id="73" name="Text 65"/>
+          <p:cNvSpPr txBox="1"/>
+          <p:nvPr/>
+        </p:nvSpPr>
+        <p:spPr>
+          <a:xfrm>
+            <a:off x="3547872" y="3438144"/>
+            <a:ext cx="1417319" cy="201168"/>
           </a:xfrm>
           <a:prstGeom prst="rect">
             <a:avLst/>
@@ -23148,7 +23784,7 @@
       </p:sp>
       <p:sp>
         <p:nvSpPr>
-          <p:cNvPr id="67" name="Text 66"/>
+          <p:cNvPr id="74" name="Text 66"/>
           <p:cNvSpPr txBox="1"/>
           <p:nvPr/>
         </p:nvSpPr>
@@ -23203,7 +23839,7 @@
       </p:sp>
       <p:sp>
         <p:nvSpPr>
-          <p:cNvPr id="68" name="Shape 67"/>
+          <p:cNvPr id="75" name="Shape 67"/>
           <p:cNvSpPr/>
           <p:nvPr/>
         </p:nvSpPr>
@@ -23247,16 +23883,40 @@
           <a:p/>
         </p:txBody>
       </p:sp>
-      <p:sp>
-        <p:nvSpPr>
-          <p:cNvPr id="69" name="Text 68"/>
-          <p:cNvSpPr txBox="1"/>
-          <p:nvPr/>
-        </p:nvSpPr>
-        <p:spPr>
-          <a:xfrm>
-            <a:off x="5248655" y="3438144"/>
-            <a:ext cx="1892808" cy="201168"/>
+      <p:pic>
+        <p:nvPicPr>
+          <p:cNvPr id="76" name="Picture 75" descr="googlebigquery.png"/>
+          <p:cNvPicPr>
+            <a:picLocks noChangeAspect="1"/>
+          </p:cNvPicPr>
+          <p:nvPr/>
+        </p:nvPicPr>
+        <p:blipFill>
+          <a:blip r:embed="rId8"/>
+          <a:stretch>
+            <a:fillRect/>
+          </a:stretch>
+        </p:blipFill>
+        <p:spPr>
+          <a:xfrm>
+            <a:off x="5248655" y="3447288"/>
+            <a:ext cx="182880" cy="182880"/>
+          </a:xfrm>
+          <a:prstGeom prst="rect">
+            <a:avLst/>
+          </a:prstGeom>
+        </p:spPr>
+      </p:pic>
+      <p:sp>
+        <p:nvSpPr>
+          <p:cNvPr id="77" name="Text 68"/>
+          <p:cNvSpPr txBox="1"/>
+          <p:nvPr/>
+        </p:nvSpPr>
+        <p:spPr>
+          <a:xfrm>
+            <a:off x="5486399" y="3438144"/>
+            <a:ext cx="1655064" cy="201168"/>
           </a:xfrm>
           <a:prstGeom prst="rect">
             <a:avLst/>
@@ -23283,7 +23943,7 @@
       </p:sp>
       <p:sp>
         <p:nvSpPr>
-          <p:cNvPr id="70" name="Text 69"/>
+          <p:cNvPr id="78" name="Text 69"/>
           <p:cNvSpPr txBox="1"/>
           <p:nvPr/>
         </p:nvSpPr>
@@ -23322,7 +23982,7 @@
       </p:sp>
       <p:sp>
         <p:nvSpPr>
-          <p:cNvPr id="71" name="Differentiator Border 71"/>
+          <p:cNvPr id="79" name="Differentiator Border 71"/>
           <p:cNvSpPr/>
           <p:nvPr/>
         </p:nvSpPr>
@@ -23375,7 +24035,7 @@
       </p:sp>
       <p:sp>
         <p:nvSpPr>
-          <p:cNvPr id="72" name="Shape 72"/>
+          <p:cNvPr id="80" name="Shape 72"/>
           <p:cNvSpPr/>
           <p:nvPr/>
         </p:nvSpPr>
@@ -23417,7 +24077,7 @@
       </p:sp>
       <p:sp>
         <p:nvSpPr>
-          <p:cNvPr id="73" name="Shape 73"/>
+          <p:cNvPr id="81" name="Shape 73"/>
           <p:cNvSpPr/>
           <p:nvPr/>
         </p:nvSpPr>
@@ -23459,7 +24119,7 @@
       </p:sp>
       <p:sp>
         <p:nvSpPr>
-          <p:cNvPr id="74" name="Text 74"/>
+          <p:cNvPr id="82" name="Text 74"/>
           <p:cNvSpPr txBox="1"/>
           <p:nvPr/>
         </p:nvSpPr>
@@ -23492,16 +24152,40 @@
           </a:p>
         </p:txBody>
       </p:sp>
-      <p:sp>
-        <p:nvSpPr>
-          <p:cNvPr id="75" name="Text 75"/>
-          <p:cNvSpPr txBox="1"/>
-          <p:nvPr/>
-        </p:nvSpPr>
-        <p:spPr>
-          <a:xfrm>
-            <a:off x="7662671" y="3447288"/>
-            <a:ext cx="1655064" cy="219456"/>
+      <p:pic>
+        <p:nvPicPr>
+          <p:cNvPr id="83" name="Picture 82" descr="googlecloudspanner.png"/>
+          <p:cNvPicPr>
+            <a:picLocks noChangeAspect="1"/>
+          </p:cNvPicPr>
+          <p:nvPr/>
+        </p:nvPicPr>
+        <p:blipFill>
+          <a:blip r:embed="rId7"/>
+          <a:stretch>
+            <a:fillRect/>
+          </a:stretch>
+        </p:blipFill>
+        <p:spPr>
+          <a:xfrm>
+            <a:off x="7671815" y="3465576"/>
+            <a:ext cx="182880" cy="182880"/>
+          </a:xfrm>
+          <a:prstGeom prst="rect">
+            <a:avLst/>
+          </a:prstGeom>
+        </p:spPr>
+      </p:pic>
+      <p:sp>
+        <p:nvSpPr>
+          <p:cNvPr id="84" name="Text 75"/>
+          <p:cNvSpPr txBox="1"/>
+          <p:nvPr/>
+        </p:nvSpPr>
+        <p:spPr>
+          <a:xfrm>
+            <a:off x="7900415" y="3447288"/>
+            <a:ext cx="1417319" cy="219456"/>
           </a:xfrm>
           <a:prstGeom prst="rect">
             <a:avLst/>
@@ -23528,7 +24212,7 @@
       </p:sp>
       <p:sp>
         <p:nvSpPr>
-          <p:cNvPr id="76" name="Text 76"/>
+          <p:cNvPr id="85" name="Text 76"/>
           <p:cNvSpPr txBox="1"/>
           <p:nvPr/>
         </p:nvSpPr>
@@ -23571,7 +24255,7 @@
       </p:sp>
       <p:sp>
         <p:nvSpPr>
-          <p:cNvPr id="77" name="Shape 77"/>
+          <p:cNvPr id="86" name="Shape 77"/>
           <p:cNvSpPr/>
           <p:nvPr/>
         </p:nvSpPr>
@@ -23617,7 +24301,7 @@
       </p:sp>
       <p:sp>
         <p:nvSpPr>
-          <p:cNvPr id="78" name="Shape 78"/>
+          <p:cNvPr id="87" name="Shape 78"/>
           <p:cNvSpPr/>
           <p:nvPr/>
         </p:nvSpPr>
@@ -23663,7 +24347,7 @@
       </p:sp>
       <p:sp>
         <p:nvSpPr>
-          <p:cNvPr id="79" name="Text 79"/>
+          <p:cNvPr id="88" name="Text 79"/>
           <p:cNvSpPr txBox="1"/>
           <p:nvPr/>
         </p:nvSpPr>
@@ -23698,7 +24382,7 @@
       </p:sp>
       <p:sp>
         <p:nvSpPr>
-          <p:cNvPr id="80" name="Text 80"/>
+          <p:cNvPr id="89" name="Text 80"/>
           <p:cNvSpPr txBox="1"/>
           <p:nvPr/>
         </p:nvSpPr>
@@ -23750,7 +24434,7 @@
       </p:sp>
       <p:cxnSp>
         <p:nvCxnSpPr>
-          <p:cNvPr id="81" name="Arrow 81"/>
+          <p:cNvPr id="90" name="Arrow 81"/>
           <p:cNvCxnSpPr/>
           <p:nvPr/>
         </p:nvCxnSpPr>
@@ -23786,7 +24470,7 @@
       </p:cxnSp>
       <p:cxnSp>
         <p:nvCxnSpPr>
-          <p:cNvPr id="82" name="Arrow 82"/>
+          <p:cNvPr id="91" name="Arrow 82"/>
           <p:cNvCxnSpPr/>
           <p:nvPr/>
         </p:nvCxnSpPr>
@@ -23822,7 +24506,7 @@
       </p:cxnSp>
       <p:cxnSp>
         <p:nvCxnSpPr>
-          <p:cNvPr id="83" name="Arrow 83"/>
+          <p:cNvPr id="92" name="Arrow 83"/>
           <p:cNvCxnSpPr/>
           <p:nvPr/>
         </p:nvCxnSpPr>
@@ -23858,7 +24542,7 @@
       </p:cxnSp>
       <p:cxnSp>
         <p:nvCxnSpPr>
-          <p:cNvPr id="84" name="Arrow 84"/>
+          <p:cNvPr id="93" name="Arrow 84"/>
           <p:cNvCxnSpPr/>
           <p:nvPr/>
         </p:nvCxnSpPr>
@@ -23893,7 +24577,7 @@
       </p:cxnSp>
       <p:cxnSp>
         <p:nvCxnSpPr>
-          <p:cNvPr id="85" name="Arrow 85"/>
+          <p:cNvPr id="94" name="Arrow 85"/>
           <p:cNvCxnSpPr/>
           <p:nvPr/>
         </p:nvCxnSpPr>
@@ -23928,7 +24612,7 @@
       </p:cxnSp>
       <p:cxnSp>
         <p:nvCxnSpPr>
-          <p:cNvPr id="86" name="Arrow 86"/>
+          <p:cNvPr id="95" name="Arrow 86"/>
           <p:cNvCxnSpPr/>
           <p:nvPr/>
         </p:nvCxnSpPr>
@@ -23964,7 +24648,7 @@
       </p:cxnSp>
       <p:cxnSp>
         <p:nvCxnSpPr>
-          <p:cNvPr id="87" name="Arrow 87"/>
+          <p:cNvPr id="96" name="Arrow 87"/>
           <p:cNvCxnSpPr/>
           <p:nvPr/>
         </p:nvCxnSpPr>
@@ -24000,7 +24684,7 @@
       </p:cxnSp>
       <p:cxnSp>
         <p:nvCxnSpPr>
-          <p:cNvPr id="88" name="Arrow 88"/>
+          <p:cNvPr id="97" name="Arrow 88"/>
           <p:cNvCxnSpPr/>
           <p:nvPr/>
         </p:nvCxnSpPr>
@@ -24036,7 +24720,7 @@
       </p:cxnSp>
       <p:cxnSp>
         <p:nvCxnSpPr>
-          <p:cNvPr id="89" name="Arrow 89"/>
+          <p:cNvPr id="98" name="Arrow 89"/>
           <p:cNvCxnSpPr/>
           <p:nvPr/>
         </p:nvCxnSpPr>
@@ -24071,7 +24755,7 @@
       </p:cxnSp>
       <p:cxnSp>
         <p:nvCxnSpPr>
-          <p:cNvPr id="90" name="Arrow 90"/>
+          <p:cNvPr id="99" name="Arrow 90"/>
           <p:cNvCxnSpPr/>
           <p:nvPr/>
         </p:nvCxnSpPr>
@@ -24106,7 +24790,7 @@
       </p:cxnSp>
       <p:cxnSp>
         <p:nvCxnSpPr>
-          <p:cNvPr id="91" name="Arrow 91"/>
+          <p:cNvPr id="100" name="Arrow 91"/>
           <p:cNvCxnSpPr/>
           <p:nvPr/>
         </p:nvCxnSpPr>
@@ -24142,7 +24826,7 @@
       </p:cxnSp>
       <p:cxnSp>
         <p:nvCxnSpPr>
-          <p:cNvPr id="92" name="Arrow 92"/>
+          <p:cNvPr id="101" name="Arrow 92"/>
           <p:cNvCxnSpPr/>
           <p:nvPr/>
         </p:nvCxnSpPr>
@@ -24177,14 +24861,14 @@
       </p:cxnSp>
       <p:cxnSp>
         <p:nvCxnSpPr>
-          <p:cNvPr id="93" name="Arrow 93"/>
+          <p:cNvPr id="102" name="Arrow 93"/>
           <p:cNvCxnSpPr/>
           <p:nvPr/>
         </p:nvCxnSpPr>
         <p:spPr>
           <a:xfrm>
             <a:off x="7274052" y="1682495"/>
-            <a:ext cx="0" cy="2020825"/>
+            <a:ext cx="0" cy="1051561"/>
           </a:xfrm>
           <a:prstGeom prst="line">
             <a:avLst/>
@@ -24212,13 +24896,13 @@
       </p:cxnSp>
       <p:cxnSp>
         <p:nvCxnSpPr>
-          <p:cNvPr id="94" name="Arrow 94"/>
+          <p:cNvPr id="103" name="Arrow 94"/>
           <p:cNvCxnSpPr/>
           <p:nvPr/>
         </p:nvCxnSpPr>
         <p:spPr>
           <a:xfrm>
-            <a:off x="7274052" y="3703320"/>
+            <a:off x="7274052" y="2734056"/>
             <a:ext cx="59436" cy="0"/>
           </a:xfrm>
           <a:prstGeom prst="line">
@@ -24248,21 +24932,21 @@
       </p:cxnSp>
       <p:cxnSp>
         <p:nvCxnSpPr>
-          <p:cNvPr id="95" name="Arrow 95"/>
+          <p:cNvPr id="104" name="Arrow 95"/>
           <p:cNvCxnSpPr/>
           <p:nvPr/>
         </p:nvCxnSpPr>
         <p:spPr>
-          <a:xfrm flipH="1">
-            <a:off x="7274052" y="1929384"/>
-            <a:ext cx="59436" cy="0"/>
+          <a:xfrm flipV="1">
+            <a:off x="8362188" y="2057400"/>
+            <a:ext cx="0" cy="338328"/>
           </a:xfrm>
           <a:prstGeom prst="line">
             <a:avLst/>
           </a:prstGeom>
-          <a:ln w="22225">
+          <a:ln w="19050">
             <a:solidFill>
-              <a:srgbClr val="FFD700"/>
+              <a:srgbClr val="00D6F2"/>
             </a:solidFill>
             <a:tailEnd type="triangle" w="med" len="med"/>
           </a:ln>
@@ -24284,23 +24968,22 @@
       </p:cxnSp>
       <p:cxnSp>
         <p:nvCxnSpPr>
-          <p:cNvPr id="96" name="Arrow 96"/>
+          <p:cNvPr id="105" name="Arrow 96"/>
           <p:cNvCxnSpPr/>
           <p:nvPr/>
         </p:nvCxnSpPr>
         <p:spPr>
-          <a:xfrm flipV="1">
-            <a:off x="8362188" y="2057400"/>
-            <a:ext cx="0" cy="338328"/>
+          <a:xfrm>
+            <a:off x="9390888" y="1682495"/>
+            <a:ext cx="59436" cy="0"/>
           </a:xfrm>
           <a:prstGeom prst="line">
             <a:avLst/>
           </a:prstGeom>
-          <a:ln w="15875">
+          <a:ln w="22225">
             <a:solidFill>
-              <a:srgbClr val="00D6F2"/>
+              <a:srgbClr val="FFD700"/>
             </a:solidFill>
-            <a:tailEnd type="triangle" w="med" len="med"/>
           </a:ln>
         </p:spPr>
         <p:style>
@@ -24320,23 +25003,22 @@
       </p:cxnSp>
       <p:cxnSp>
         <p:nvCxnSpPr>
-          <p:cNvPr id="97" name="Arrow 97"/>
+          <p:cNvPr id="106" name="Arrow 97"/>
           <p:cNvCxnSpPr/>
           <p:nvPr/>
         </p:nvCxnSpPr>
         <p:spPr>
-          <a:xfrm flipV="1">
-            <a:off x="6185916" y="3072384"/>
-            <a:ext cx="0" cy="310896"/>
+          <a:xfrm>
+            <a:off x="9450324" y="1682495"/>
+            <a:ext cx="0" cy="1929385"/>
           </a:xfrm>
           <a:prstGeom prst="line">
             <a:avLst/>
           </a:prstGeom>
-          <a:ln w="19050">
+          <a:ln w="22225">
             <a:solidFill>
-              <a:srgbClr val="FF0069"/>
+              <a:srgbClr val="FFD700"/>
             </a:solidFill>
-            <a:tailEnd type="triangle" w="med" len="med"/>
           </a:ln>
         </p:spPr>
         <p:style>
@@ -24356,22 +25038,23 @@
       </p:cxnSp>
       <p:cxnSp>
         <p:nvCxnSpPr>
-          <p:cNvPr id="98" name="Arrow 98"/>
+          <p:cNvPr id="107" name="Arrow 98"/>
           <p:cNvCxnSpPr/>
           <p:nvPr/>
         </p:nvCxnSpPr>
         <p:spPr>
-          <a:xfrm>
-            <a:off x="5614416" y="4251960"/>
-            <a:ext cx="0" cy="155448"/>
+          <a:xfrm flipH="1">
+            <a:off x="9390888" y="3611880"/>
+            <a:ext cx="59436" cy="0"/>
           </a:xfrm>
           <a:prstGeom prst="line">
             <a:avLst/>
           </a:prstGeom>
-          <a:ln w="19050">
+          <a:ln w="22225">
             <a:solidFill>
-              <a:srgbClr val="56E13B"/>
+              <a:srgbClr val="FFD700"/>
             </a:solidFill>
+            <a:tailEnd type="triangle" w="med" len="med"/>
           </a:ln>
         </p:spPr>
         <p:style>
@@ -24391,22 +25074,23 @@
       </p:cxnSp>
       <p:cxnSp>
         <p:nvCxnSpPr>
-          <p:cNvPr id="99" name="Arrow 99"/>
+          <p:cNvPr id="108" name="Arrow 99"/>
           <p:cNvCxnSpPr/>
           <p:nvPr/>
         </p:nvCxnSpPr>
         <p:spPr>
-          <a:xfrm flipH="1">
-            <a:off x="1833372" y="4407408"/>
-            <a:ext cx="3781044" cy="0"/>
+          <a:xfrm flipV="1">
+            <a:off x="6185916" y="3072384"/>
+            <a:ext cx="0" cy="310896"/>
           </a:xfrm>
           <a:prstGeom prst="line">
             <a:avLst/>
           </a:prstGeom>
           <a:ln w="19050">
             <a:solidFill>
-              <a:srgbClr val="56E13B"/>
+              <a:srgbClr val="FF0069"/>
             </a:solidFill>
+            <a:tailEnd type="triangle" w="med" len="med"/>
           </a:ln>
         </p:spPr>
         <p:style>
@@ -24426,7 +25110,77 @@
       </p:cxnSp>
       <p:cxnSp>
         <p:nvCxnSpPr>
-          <p:cNvPr id="100" name="Arrow 100"/>
+          <p:cNvPr id="109" name="Arrow 100"/>
+          <p:cNvCxnSpPr/>
+          <p:nvPr/>
+        </p:nvCxnSpPr>
+        <p:spPr>
+          <a:xfrm>
+            <a:off x="5614416" y="4251960"/>
+            <a:ext cx="0" cy="155448"/>
+          </a:xfrm>
+          <a:prstGeom prst="line">
+            <a:avLst/>
+          </a:prstGeom>
+          <a:ln w="19050">
+            <a:solidFill>
+              <a:srgbClr val="56E13B"/>
+            </a:solidFill>
+          </a:ln>
+        </p:spPr>
+        <p:style>
+          <a:lnRef idx="2">
+            <a:schemeClr val="accent1"/>
+          </a:lnRef>
+          <a:fillRef idx="0">
+            <a:schemeClr val="accent1"/>
+          </a:fillRef>
+          <a:effectRef idx="1">
+            <a:schemeClr val="accent1"/>
+          </a:effectRef>
+          <a:fontRef idx="minor">
+            <a:schemeClr val="tx1"/>
+          </a:fontRef>
+        </p:style>
+      </p:cxnSp>
+      <p:cxnSp>
+        <p:nvCxnSpPr>
+          <p:cNvPr id="110" name="Arrow 101"/>
+          <p:cNvCxnSpPr/>
+          <p:nvPr/>
+        </p:nvCxnSpPr>
+        <p:spPr>
+          <a:xfrm flipH="1">
+            <a:off x="1833372" y="4407408"/>
+            <a:ext cx="3781044" cy="0"/>
+          </a:xfrm>
+          <a:prstGeom prst="line">
+            <a:avLst/>
+          </a:prstGeom>
+          <a:ln w="19050">
+            <a:solidFill>
+              <a:srgbClr val="56E13B"/>
+            </a:solidFill>
+          </a:ln>
+        </p:spPr>
+        <p:style>
+          <a:lnRef idx="2">
+            <a:schemeClr val="accent1"/>
+          </a:lnRef>
+          <a:fillRef idx="0">
+            <a:schemeClr val="accent1"/>
+          </a:fillRef>
+          <a:effectRef idx="1">
+            <a:schemeClr val="accent1"/>
+          </a:effectRef>
+          <a:fontRef idx="minor">
+            <a:schemeClr val="tx1"/>
+          </a:fontRef>
+        </p:style>
+      </p:cxnSp>
+      <p:cxnSp>
+        <p:nvCxnSpPr>
+          <p:cNvPr id="111" name="Arrow 102"/>
           <p:cNvCxnSpPr/>
           <p:nvPr/>
         </p:nvCxnSpPr>
@@ -24462,7 +25216,7 @@
       </p:cxnSp>
       <p:sp>
         <p:nvSpPr>
-          <p:cNvPr id="101" name="Shape 101"/>
+          <p:cNvPr id="112" name="Shape 103"/>
           <p:cNvSpPr/>
           <p:nvPr/>
         </p:nvSpPr>
@@ -24508,7 +25262,7 @@
       </p:sp>
       <p:sp>
         <p:nvSpPr>
-          <p:cNvPr id="102" name="Text 102"/>
+          <p:cNvPr id="113" name="Text 104"/>
           <p:cNvSpPr txBox="1"/>
           <p:nvPr/>
         </p:nvSpPr>
@@ -24543,7 +25297,7 @@
       </p:sp>
       <p:sp>
         <p:nvSpPr>
-          <p:cNvPr id="103" name="Shape 103"/>
+          <p:cNvPr id="114" name="Shape 105"/>
           <p:cNvSpPr/>
           <p:nvPr/>
         </p:nvSpPr>
@@ -24583,16 +25337,40 @@
           <a:p/>
         </p:txBody>
       </p:sp>
-      <p:sp>
-        <p:nvSpPr>
-          <p:cNvPr id="104" name="Text 104"/>
-          <p:cNvSpPr txBox="1"/>
-          <p:nvPr/>
-        </p:nvSpPr>
-        <p:spPr>
-          <a:xfrm>
-            <a:off x="9738360" y="1170432"/>
-            <a:ext cx="1947672" cy="274320"/>
+      <p:pic>
+        <p:nvPicPr>
+          <p:cNvPr id="115" name="Picture 114" descr="salesforce.png"/>
+          <p:cNvPicPr>
+            <a:picLocks noChangeAspect="1"/>
+          </p:cNvPicPr>
+          <p:nvPr/>
+        </p:nvPicPr>
+        <p:blipFill>
+          <a:blip r:embed="rId9"/>
+          <a:stretch>
+            <a:fillRect/>
+          </a:stretch>
+        </p:blipFill>
+        <p:spPr>
+          <a:xfrm>
+            <a:off x="9720072" y="1197864"/>
+            <a:ext cx="219456" cy="219456"/>
+          </a:xfrm>
+          <a:prstGeom prst="rect">
+            <a:avLst/>
+          </a:prstGeom>
+        </p:spPr>
+      </p:pic>
+      <p:sp>
+        <p:nvSpPr>
+          <p:cNvPr id="116" name="Text 106"/>
+          <p:cNvSpPr txBox="1"/>
+          <p:nvPr/>
+        </p:nvSpPr>
+        <p:spPr>
+          <a:xfrm>
+            <a:off x="10012680" y="1170432"/>
+            <a:ext cx="1673352" cy="274320"/>
           </a:xfrm>
           <a:prstGeom prst="rect">
             <a:avLst/>
@@ -24619,7 +25397,7 @@
       </p:sp>
       <p:sp>
         <p:nvSpPr>
-          <p:cNvPr id="105" name="Shape 105"/>
+          <p:cNvPr id="117" name="Shape 107"/>
           <p:cNvSpPr/>
           <p:nvPr/>
         </p:nvSpPr>
@@ -24663,7 +25441,7 @@
       </p:sp>
       <p:sp>
         <p:nvSpPr>
-          <p:cNvPr id="106" name="Shape 106"/>
+          <p:cNvPr id="118" name="Shape 108"/>
           <p:cNvSpPr/>
           <p:nvPr/>
         </p:nvSpPr>
@@ -24709,7 +25487,7 @@
       </p:sp>
       <p:sp>
         <p:nvSpPr>
-          <p:cNvPr id="107" name="Text 107"/>
+          <p:cNvPr id="119" name="Text 109"/>
           <p:cNvSpPr txBox="1"/>
           <p:nvPr/>
         </p:nvSpPr>
@@ -24743,7 +25521,7 @@
       </p:sp>
       <p:sp>
         <p:nvSpPr>
-          <p:cNvPr id="108" name="Text 108"/>
+          <p:cNvPr id="120" name="Text 110"/>
           <p:cNvSpPr txBox="1"/>
           <p:nvPr/>
         </p:nvSpPr>
@@ -24782,7 +25560,7 @@
       </p:sp>
       <p:sp>
         <p:nvSpPr>
-          <p:cNvPr id="109" name="Shape 109"/>
+          <p:cNvPr id="121" name="Shape 111"/>
           <p:cNvSpPr/>
           <p:nvPr/>
         </p:nvSpPr>
@@ -24828,7 +25606,7 @@
       </p:sp>
       <p:sp>
         <p:nvSpPr>
-          <p:cNvPr id="110" name="Text 110"/>
+          <p:cNvPr id="122" name="Text 112"/>
           <p:cNvSpPr txBox="1"/>
           <p:nvPr/>
         </p:nvSpPr>
@@ -24862,7 +25640,7 @@
       </p:sp>
       <p:sp>
         <p:nvSpPr>
-          <p:cNvPr id="111" name="Text 111"/>
+          <p:cNvPr id="123" name="Text 113"/>
           <p:cNvSpPr txBox="1"/>
           <p:nvPr/>
         </p:nvSpPr>
@@ -24894,14 +25672,14 @@
                 </a:solidFill>
                 <a:latin typeface="Trenda IG Text"/>
               </a:rPr>
-              <a:t>New records in the data extension enter the approved journey.</a:t>
-            </a:r>
-          </a:p>
-        </p:txBody>
-      </p:sp>
-      <p:sp>
-        <p:nvSpPr>
-          <p:cNvPr id="112" name="Differentiator Border 113"/>
+              <a:t>Built by the Developer Agent (8); new records in the data extension enter it.</a:t>
+            </a:r>
+          </a:p>
+        </p:txBody>
+      </p:sp>
+      <p:sp>
+        <p:nvSpPr>
+          <p:cNvPr id="124" name="Differentiator Border 115"/>
           <p:cNvSpPr/>
           <p:nvPr/>
         </p:nvSpPr>
@@ -24954,7 +25732,7 @@
       </p:sp>
       <p:sp>
         <p:nvSpPr>
-          <p:cNvPr id="113" name="Shape 114"/>
+          <p:cNvPr id="125" name="Shape 116"/>
           <p:cNvSpPr/>
           <p:nvPr/>
         </p:nvSpPr>
@@ -24996,7 +25774,7 @@
       </p:sp>
       <p:sp>
         <p:nvSpPr>
-          <p:cNvPr id="114" name="Text 115"/>
+          <p:cNvPr id="126" name="Text 117"/>
           <p:cNvSpPr txBox="1"/>
           <p:nvPr/>
         </p:nvSpPr>
@@ -25030,7 +25808,7 @@
       </p:sp>
       <p:sp>
         <p:nvSpPr>
-          <p:cNvPr id="115" name="Text 116"/>
+          <p:cNvPr id="127" name="Text 118"/>
           <p:cNvSpPr txBox="1"/>
           <p:nvPr/>
         </p:nvSpPr>
@@ -25057,14 +25835,14 @@
                 </a:solidFill>
                 <a:latin typeface="Trenda IG Text"/>
               </a:rPr>
-              <a:t>The six released fields, for this run only.</a:t>
-            </a:r>
-          </a:p>
-        </p:txBody>
-      </p:sp>
-      <p:sp>
-        <p:nvSpPr>
-          <p:cNvPr id="116" name="Shape 117"/>
+              <a:t>Only the released minimum fields, for this run.</a:t>
+            </a:r>
+          </a:p>
+        </p:txBody>
+      </p:sp>
+      <p:sp>
+        <p:nvSpPr>
+          <p:cNvPr id="128" name="Shape 119"/>
           <p:cNvSpPr/>
           <p:nvPr/>
         </p:nvSpPr>
@@ -25110,7 +25888,7 @@
       </p:sp>
       <p:sp>
         <p:nvSpPr>
-          <p:cNvPr id="117" name="Shape 118"/>
+          <p:cNvPr id="129" name="Shape 120"/>
           <p:cNvSpPr/>
           <p:nvPr/>
         </p:nvSpPr>
@@ -25152,7 +25930,7 @@
       </p:sp>
       <p:sp>
         <p:nvSpPr>
-          <p:cNvPr id="118" name="Text 119"/>
+          <p:cNvPr id="130" name="Text 121"/>
           <p:cNvSpPr txBox="1"/>
           <p:nvPr/>
         </p:nvSpPr>
@@ -25185,16 +25963,40 @@
           </a:p>
         </p:txBody>
       </p:sp>
-      <p:sp>
-        <p:nvSpPr>
-          <p:cNvPr id="119" name="Text 120"/>
-          <p:cNvSpPr txBox="1"/>
-          <p:nvPr/>
-        </p:nvSpPr>
-        <p:spPr>
-          <a:xfrm>
-            <a:off x="10067544" y="3986783"/>
-            <a:ext cx="1545336" cy="201168"/>
+      <p:pic>
+        <p:nvPicPr>
+          <p:cNvPr id="131" name="Picture 130" descr="salesforce.png"/>
+          <p:cNvPicPr>
+            <a:picLocks noChangeAspect="1"/>
+          </p:cNvPicPr>
+          <p:nvPr/>
+        </p:nvPicPr>
+        <p:blipFill>
+          <a:blip r:embed="rId9"/>
+          <a:stretch>
+            <a:fillRect/>
+          </a:stretch>
+        </p:blipFill>
+        <p:spPr>
+          <a:xfrm>
+            <a:off x="10067544" y="3995928"/>
+            <a:ext cx="182880" cy="182880"/>
+          </a:xfrm>
+          <a:prstGeom prst="rect">
+            <a:avLst/>
+          </a:prstGeom>
+        </p:spPr>
+      </p:pic>
+      <p:sp>
+        <p:nvSpPr>
+          <p:cNvPr id="132" name="Text 122"/>
+          <p:cNvSpPr txBox="1"/>
+          <p:nvPr/>
+        </p:nvSpPr>
+        <p:spPr>
+          <a:xfrm>
+            <a:off x="10305288" y="3986783"/>
+            <a:ext cx="1307592" cy="201168"/>
           </a:xfrm>
           <a:prstGeom prst="rect">
             <a:avLst/>
@@ -25221,7 +26023,7 @@
       </p:sp>
       <p:sp>
         <p:nvSpPr>
-          <p:cNvPr id="120" name="Text 121"/>
+          <p:cNvPr id="133" name="Text 123"/>
           <p:cNvSpPr txBox="1"/>
           <p:nvPr/>
         </p:nvSpPr>
@@ -25260,7 +26062,7 @@
       </p:sp>
       <p:cxnSp>
         <p:nvCxnSpPr>
-          <p:cNvPr id="121" name="Arrow 122"/>
+          <p:cNvPr id="134" name="Arrow 124"/>
           <p:cNvCxnSpPr/>
           <p:nvPr/>
         </p:nvCxnSpPr>
@@ -25296,7 +26098,7 @@
       </p:cxnSp>
       <p:cxnSp>
         <p:nvCxnSpPr>
-          <p:cNvPr id="122" name="Arrow 123"/>
+          <p:cNvPr id="135" name="Arrow 125"/>
           <p:cNvCxnSpPr/>
           <p:nvPr/>
         </p:nvCxnSpPr>
@@ -25332,7 +26134,7 @@
       </p:cxnSp>
       <p:cxnSp>
         <p:nvCxnSpPr>
-          <p:cNvPr id="123" name="Arrow 124"/>
+          <p:cNvPr id="136" name="Arrow 126"/>
           <p:cNvCxnSpPr/>
           <p:nvPr/>
         </p:nvCxnSpPr>
@@ -25368,21 +26170,21 @@
       </p:cxnSp>
       <p:cxnSp>
         <p:nvCxnSpPr>
-          <p:cNvPr id="124" name="Arrow 125"/>
+          <p:cNvPr id="137" name="Arrow 127"/>
           <p:cNvCxnSpPr/>
           <p:nvPr/>
         </p:nvCxnSpPr>
         <p:spPr>
-          <a:xfrm flipV="1">
-            <a:off x="9390888" y="2615184"/>
-            <a:ext cx="347472" cy="118872"/>
+          <a:xfrm>
+            <a:off x="9390888" y="3950208"/>
+            <a:ext cx="347472" cy="274320"/>
           </a:xfrm>
           <a:prstGeom prst="line">
             <a:avLst/>
           </a:prstGeom>
-          <a:ln w="19050">
+          <a:ln w="25400">
             <a:solidFill>
-              <a:srgbClr val="00D6F2"/>
+              <a:srgbClr val="FFFFFF"/>
             </a:solidFill>
             <a:tailEnd type="triangle" w="med" len="med"/>
           </a:ln>
@@ -25404,23 +26206,22 @@
       </p:cxnSp>
       <p:cxnSp>
         <p:nvCxnSpPr>
-          <p:cNvPr id="125" name="Arrow 126"/>
+          <p:cNvPr id="138" name="Arrow 128"/>
           <p:cNvCxnSpPr/>
           <p:nvPr/>
         </p:nvCxnSpPr>
         <p:spPr>
           <a:xfrm>
-            <a:off x="9390888" y="3950208"/>
-            <a:ext cx="347472" cy="274320"/>
+            <a:off x="10712196" y="4681728"/>
+            <a:ext cx="0" cy="402336"/>
           </a:xfrm>
           <a:prstGeom prst="line">
             <a:avLst/>
           </a:prstGeom>
-          <a:ln w="25400">
+          <a:ln w="15875">
             <a:solidFill>
-              <a:srgbClr val="FFFFFF"/>
+              <a:srgbClr val="FF0069"/>
             </a:solidFill>
-            <a:tailEnd type="triangle" w="med" len="med"/>
           </a:ln>
         </p:spPr>
         <p:style>
@@ -25440,14 +26241,14 @@
       </p:cxnSp>
       <p:cxnSp>
         <p:nvCxnSpPr>
-          <p:cNvPr id="126" name="Arrow 127"/>
+          <p:cNvPr id="139" name="Arrow 129"/>
           <p:cNvCxnSpPr/>
           <p:nvPr/>
         </p:nvCxnSpPr>
         <p:spPr>
-          <a:xfrm>
-            <a:off x="10712196" y="4681728"/>
-            <a:ext cx="0" cy="402336"/>
+          <a:xfrm flipH="1">
+            <a:off x="6620256" y="5084064"/>
+            <a:ext cx="4091940" cy="0"/>
           </a:xfrm>
           <a:prstGeom prst="line">
             <a:avLst/>
@@ -25475,14 +26276,14 @@
       </p:cxnSp>
       <p:cxnSp>
         <p:nvCxnSpPr>
-          <p:cNvPr id="127" name="Arrow 128"/>
+          <p:cNvPr id="140" name="Arrow 130"/>
           <p:cNvCxnSpPr/>
           <p:nvPr/>
         </p:nvCxnSpPr>
         <p:spPr>
-          <a:xfrm flipH="1">
-            <a:off x="6620256" y="5084064"/>
-            <a:ext cx="4091940" cy="0"/>
+          <a:xfrm flipV="1">
+            <a:off x="6620256" y="5029200"/>
+            <a:ext cx="0" cy="54864"/>
           </a:xfrm>
           <a:prstGeom prst="line">
             <a:avLst/>
@@ -25491,6 +26292,7 @@
             <a:solidFill>
               <a:srgbClr val="FF0069"/>
             </a:solidFill>
+            <a:tailEnd type="triangle" w="med" len="med"/>
           </a:ln>
         </p:spPr>
         <p:style>
@@ -25508,45 +26310,9 @@
           </a:fontRef>
         </p:style>
       </p:cxnSp>
-      <p:cxnSp>
-        <p:nvCxnSpPr>
-          <p:cNvPr id="128" name="Arrow 129"/>
-          <p:cNvCxnSpPr/>
-          <p:nvPr/>
-        </p:nvCxnSpPr>
-        <p:spPr>
-          <a:xfrm flipV="1">
-            <a:off x="6620256" y="5029200"/>
-            <a:ext cx="0" cy="54864"/>
-          </a:xfrm>
-          <a:prstGeom prst="line">
-            <a:avLst/>
-          </a:prstGeom>
-          <a:ln w="15875">
-            <a:solidFill>
-              <a:srgbClr val="FF0069"/>
-            </a:solidFill>
-            <a:tailEnd type="triangle" w="med" len="med"/>
-          </a:ln>
-        </p:spPr>
-        <p:style>
-          <a:lnRef idx="2">
-            <a:schemeClr val="accent1"/>
-          </a:lnRef>
-          <a:fillRef idx="0">
-            <a:schemeClr val="accent1"/>
-          </a:fillRef>
-          <a:effectRef idx="1">
-            <a:schemeClr val="accent1"/>
-          </a:effectRef>
-          <a:fontRef idx="minor">
-            <a:schemeClr val="tx1"/>
-          </a:fontRef>
-        </p:style>
-      </p:cxnSp>
-      <p:sp>
-        <p:nvSpPr>
-          <p:cNvPr id="129" name="Text 130"/>
+      <p:sp>
+        <p:nvSpPr>
+          <p:cNvPr id="141" name="Text 131"/>
           <p:cNvSpPr txBox="1"/>
           <p:nvPr/>
         </p:nvSpPr>
@@ -25580,7 +26346,7 @@
       </p:sp>
       <p:sp>
         <p:nvSpPr>
-          <p:cNvPr id="130" name="Shape 131"/>
+          <p:cNvPr id="142" name="Shape 132"/>
           <p:cNvSpPr/>
           <p:nvPr/>
         </p:nvSpPr>
@@ -25622,7 +26388,7 @@
       </p:sp>
       <p:sp>
         <p:nvSpPr>
-          <p:cNvPr id="131" name="Shape 132"/>
+          <p:cNvPr id="143" name="Shape 133"/>
           <p:cNvSpPr/>
           <p:nvPr/>
         </p:nvSpPr>
@@ -25664,7 +26430,7 @@
       </p:sp>
       <p:sp>
         <p:nvSpPr>
-          <p:cNvPr id="132" name="Text 133"/>
+          <p:cNvPr id="144" name="Text 134"/>
           <p:cNvSpPr txBox="1"/>
           <p:nvPr/>
         </p:nvSpPr>
@@ -25719,7 +26485,7 @@
       </p:sp>
       <p:sp>
         <p:nvSpPr>
-          <p:cNvPr id="133" name="Shape 134"/>
+          <p:cNvPr id="145" name="Shape 135"/>
           <p:cNvSpPr/>
           <p:nvPr/>
         </p:nvSpPr>
@@ -25761,7 +26527,7 @@
       </p:sp>
       <p:sp>
         <p:nvSpPr>
-          <p:cNvPr id="134" name="Shape 135"/>
+          <p:cNvPr id="146" name="Shape 136"/>
           <p:cNvSpPr/>
           <p:nvPr/>
         </p:nvSpPr>
@@ -25803,7 +26569,7 @@
       </p:sp>
       <p:sp>
         <p:nvSpPr>
-          <p:cNvPr id="135" name="Text 136"/>
+          <p:cNvPr id="147" name="Text 137"/>
           <p:cNvSpPr txBox="1"/>
           <p:nvPr/>
         </p:nvSpPr>
@@ -25858,7 +26624,7 @@
       </p:sp>
       <p:sp>
         <p:nvSpPr>
-          <p:cNvPr id="136" name="Shape 137"/>
+          <p:cNvPr id="148" name="Shape 138"/>
           <p:cNvSpPr/>
           <p:nvPr/>
         </p:nvSpPr>
@@ -25900,7 +26666,7 @@
       </p:sp>
       <p:sp>
         <p:nvSpPr>
-          <p:cNvPr id="137" name="Shape 138"/>
+          <p:cNvPr id="149" name="Shape 139"/>
           <p:cNvSpPr/>
           <p:nvPr/>
         </p:nvSpPr>
@@ -25942,7 +26708,7 @@
       </p:sp>
       <p:sp>
         <p:nvSpPr>
-          <p:cNvPr id="138" name="Text 139"/>
+          <p:cNvPr id="150" name="Text 140"/>
           <p:cNvSpPr txBox="1"/>
           <p:nvPr/>
         </p:nvSpPr>
@@ -25990,14 +26756,14 @@
                 </a:solidFill>
                 <a:latin typeface="Trenda IG Text"/>
               </a:rPr>
-              <a:t>Six fields, for one run, time-limited.</a:t>
-            </a:r>
-          </a:p>
-        </p:txBody>
-      </p:sp>
-      <p:sp>
-        <p:nvSpPr>
-          <p:cNvPr id="139" name="Shape 140"/>
+              <a:t>Only the fields a campaign needs, one run, time-limited.</a:t>
+            </a:r>
+          </a:p>
+        </p:txBody>
+      </p:sp>
+      <p:sp>
+        <p:nvSpPr>
+          <p:cNvPr id="151" name="Shape 141"/>
           <p:cNvSpPr/>
           <p:nvPr/>
         </p:nvSpPr>
@@ -26039,7 +26805,7 @@
       </p:sp>
       <p:sp>
         <p:nvSpPr>
-          <p:cNvPr id="140" name="Shape 141"/>
+          <p:cNvPr id="152" name="Shape 142"/>
           <p:cNvSpPr/>
           <p:nvPr/>
         </p:nvSpPr>
@@ -26081,7 +26847,7 @@
       </p:sp>
       <p:sp>
         <p:nvSpPr>
-          <p:cNvPr id="141" name="Text 142"/>
+          <p:cNvPr id="153" name="Text 143"/>
           <p:cNvSpPr txBox="1"/>
           <p:nvPr/>
         </p:nvSpPr>
@@ -26346,15 +27112,39 @@
           <a:p/>
         </p:txBody>
       </p:sp>
-      <p:sp>
-        <p:nvSpPr>
-          <p:cNvPr id="7" name="Text 6"/>
-          <p:cNvSpPr txBox="1"/>
-          <p:nvPr/>
-        </p:nvSpPr>
-        <p:spPr>
-          <a:xfrm>
-            <a:off x="502920" y="1426464"/>
+      <p:pic>
+        <p:nvPicPr>
+          <p:cNvPr id="7" name="Picture 6" descr="people.png"/>
+          <p:cNvPicPr>
+            <a:picLocks noChangeAspect="1"/>
+          </p:cNvPicPr>
+          <p:nvPr/>
+        </p:nvPicPr>
+        <p:blipFill>
+          <a:blip r:embed="rId2"/>
+          <a:stretch>
+            <a:fillRect/>
+          </a:stretch>
+        </p:blipFill>
+        <p:spPr>
+          <a:xfrm>
+            <a:off x="502920" y="1280160"/>
+            <a:ext cx="182880" cy="182880"/>
+          </a:xfrm>
+          <a:prstGeom prst="rect">
+            <a:avLst/>
+          </a:prstGeom>
+        </p:spPr>
+      </p:pic>
+      <p:sp>
+        <p:nvSpPr>
+          <p:cNvPr id="8" name="Text 6"/>
+          <p:cNvSpPr txBox="1"/>
+          <p:nvPr/>
+        </p:nvSpPr>
+        <p:spPr>
+          <a:xfrm>
+            <a:off x="502920" y="1536192"/>
             <a:ext cx="914400" cy="365760"/>
           </a:xfrm>
           <a:prstGeom prst="rect">
@@ -26403,7 +27193,7 @@
       </p:sp>
       <p:sp>
         <p:nvSpPr>
-          <p:cNvPr id="8" name="Shape 7"/>
+          <p:cNvPr id="9" name="Shape 7"/>
           <p:cNvSpPr/>
           <p:nvPr/>
         </p:nvSpPr>
@@ -26445,7 +27235,7 @@
       </p:sp>
       <p:sp>
         <p:nvSpPr>
-          <p:cNvPr id="9" name="Shape 8"/>
+          <p:cNvPr id="10" name="Shape 8"/>
           <p:cNvSpPr/>
           <p:nvPr/>
         </p:nvSpPr>
@@ -26485,15 +27275,39 @@
           <a:p/>
         </p:txBody>
       </p:sp>
-      <p:sp>
-        <p:nvSpPr>
-          <p:cNvPr id="10" name="Text 9"/>
-          <p:cNvSpPr txBox="1"/>
-          <p:nvPr/>
-        </p:nvSpPr>
-        <p:spPr>
-          <a:xfrm>
-            <a:off x="502920" y="2340863"/>
+      <p:pic>
+        <p:nvPicPr>
+          <p:cNvPr id="11" name="Picture 10" descr="googlecloud.png"/>
+          <p:cNvPicPr>
+            <a:picLocks noChangeAspect="1"/>
+          </p:cNvPicPr>
+          <p:nvPr/>
+        </p:nvPicPr>
+        <p:blipFill>
+          <a:blip r:embed="rId3"/>
+          <a:stretch>
+            <a:fillRect/>
+          </a:stretch>
+        </p:blipFill>
+        <p:spPr>
+          <a:xfrm>
+            <a:off x="502920" y="2194560"/>
+            <a:ext cx="182880" cy="182880"/>
+          </a:xfrm>
+          <a:prstGeom prst="rect">
+            <a:avLst/>
+          </a:prstGeom>
+        </p:spPr>
+      </p:pic>
+      <p:sp>
+        <p:nvSpPr>
+          <p:cNvPr id="12" name="Text 9"/>
+          <p:cNvSpPr txBox="1"/>
+          <p:nvPr/>
+        </p:nvSpPr>
+        <p:spPr>
+          <a:xfrm>
+            <a:off x="502920" y="2450591"/>
             <a:ext cx="914400" cy="365760"/>
           </a:xfrm>
           <a:prstGeom prst="rect">
@@ -26542,7 +27356,7 @@
       </p:sp>
       <p:sp>
         <p:nvSpPr>
-          <p:cNvPr id="11" name="Shape 10"/>
+          <p:cNvPr id="13" name="Shape 10"/>
           <p:cNvSpPr/>
           <p:nvPr/>
         </p:nvSpPr>
@@ -26584,7 +27398,7 @@
       </p:sp>
       <p:sp>
         <p:nvSpPr>
-          <p:cNvPr id="12" name="Shape 11"/>
+          <p:cNvPr id="14" name="Shape 11"/>
           <p:cNvSpPr/>
           <p:nvPr/>
         </p:nvSpPr>
@@ -26624,15 +27438,39 @@
           <a:p/>
         </p:txBody>
       </p:sp>
-      <p:sp>
-        <p:nvSpPr>
-          <p:cNvPr id="13" name="Text 12"/>
-          <p:cNvSpPr txBox="1"/>
-          <p:nvPr/>
-        </p:nvSpPr>
-        <p:spPr>
-          <a:xfrm>
-            <a:off x="502920" y="3255263"/>
+      <p:pic>
+        <p:nvPicPr>
+          <p:cNvPr id="15" name="Picture 14" descr="googlecloud.png"/>
+          <p:cNvPicPr>
+            <a:picLocks noChangeAspect="1"/>
+          </p:cNvPicPr>
+          <p:nvPr/>
+        </p:nvPicPr>
+        <p:blipFill>
+          <a:blip r:embed="rId3"/>
+          <a:stretch>
+            <a:fillRect/>
+          </a:stretch>
+        </p:blipFill>
+        <p:spPr>
+          <a:xfrm>
+            <a:off x="502920" y="3108960"/>
+            <a:ext cx="182880" cy="182880"/>
+          </a:xfrm>
+          <a:prstGeom prst="rect">
+            <a:avLst/>
+          </a:prstGeom>
+        </p:spPr>
+      </p:pic>
+      <p:sp>
+        <p:nvSpPr>
+          <p:cNvPr id="16" name="Text 12"/>
+          <p:cNvSpPr txBox="1"/>
+          <p:nvPr/>
+        </p:nvSpPr>
+        <p:spPr>
+          <a:xfrm>
+            <a:off x="502920" y="3364991"/>
             <a:ext cx="914400" cy="365760"/>
           </a:xfrm>
           <a:prstGeom prst="rect">
@@ -26681,7 +27519,7 @@
       </p:sp>
       <p:sp>
         <p:nvSpPr>
-          <p:cNvPr id="14" name="Shape 13"/>
+          <p:cNvPr id="17" name="Shape 13"/>
           <p:cNvSpPr/>
           <p:nvPr/>
         </p:nvSpPr>
@@ -26723,7 +27561,7 @@
       </p:sp>
       <p:sp>
         <p:nvSpPr>
-          <p:cNvPr id="15" name="Shape 14"/>
+          <p:cNvPr id="18" name="Shape 14"/>
           <p:cNvSpPr/>
           <p:nvPr/>
         </p:nvSpPr>
@@ -26763,15 +27601,39 @@
           <a:p/>
         </p:txBody>
       </p:sp>
-      <p:sp>
-        <p:nvSpPr>
-          <p:cNvPr id="16" name="Text 15"/>
-          <p:cNvSpPr txBox="1"/>
-          <p:nvPr/>
-        </p:nvSpPr>
-        <p:spPr>
-          <a:xfrm>
-            <a:off x="502920" y="4169663"/>
+      <p:pic>
+        <p:nvPicPr>
+          <p:cNvPr id="19" name="Picture 18" descr="googlecloud.png"/>
+          <p:cNvPicPr>
+            <a:picLocks noChangeAspect="1"/>
+          </p:cNvPicPr>
+          <p:nvPr/>
+        </p:nvPicPr>
+        <p:blipFill>
+          <a:blip r:embed="rId3"/>
+          <a:stretch>
+            <a:fillRect/>
+          </a:stretch>
+        </p:blipFill>
+        <p:spPr>
+          <a:xfrm>
+            <a:off x="502920" y="4023359"/>
+            <a:ext cx="182880" cy="182880"/>
+          </a:xfrm>
+          <a:prstGeom prst="rect">
+            <a:avLst/>
+          </a:prstGeom>
+        </p:spPr>
+      </p:pic>
+      <p:sp>
+        <p:nvSpPr>
+          <p:cNvPr id="20" name="Text 15"/>
+          <p:cNvSpPr txBox="1"/>
+          <p:nvPr/>
+        </p:nvSpPr>
+        <p:spPr>
+          <a:xfrm>
+            <a:off x="502920" y="4279392"/>
             <a:ext cx="914400" cy="365760"/>
           </a:xfrm>
           <a:prstGeom prst="rect">
@@ -26820,7 +27682,7 @@
       </p:sp>
       <p:cxnSp>
         <p:nvCxnSpPr>
-          <p:cNvPr id="17" name="Arrow 16"/>
+          <p:cNvPr id="21" name="Arrow 16"/>
           <p:cNvCxnSpPr/>
           <p:nvPr/>
         </p:nvCxnSpPr>
@@ -26855,7 +27717,7 @@
       </p:cxnSp>
       <p:cxnSp>
         <p:nvCxnSpPr>
-          <p:cNvPr id="18" name="Arrow 17"/>
+          <p:cNvPr id="22" name="Arrow 17"/>
           <p:cNvCxnSpPr/>
           <p:nvPr/>
         </p:nvCxnSpPr>
@@ -26890,7 +27752,7 @@
       </p:cxnSp>
       <p:cxnSp>
         <p:nvCxnSpPr>
-          <p:cNvPr id="19" name="Arrow 18"/>
+          <p:cNvPr id="23" name="Arrow 18"/>
           <p:cNvCxnSpPr/>
           <p:nvPr/>
         </p:nvCxnSpPr>
@@ -26926,7 +27788,7 @@
       </p:cxnSp>
       <p:cxnSp>
         <p:nvCxnSpPr>
-          <p:cNvPr id="20" name="Arrow 19"/>
+          <p:cNvPr id="24" name="Arrow 19"/>
           <p:cNvCxnSpPr/>
           <p:nvPr/>
         </p:nvCxnSpPr>
@@ -26961,7 +27823,7 @@
       </p:cxnSp>
       <p:cxnSp>
         <p:nvCxnSpPr>
-          <p:cNvPr id="21" name="Arrow 20"/>
+          <p:cNvPr id="25" name="Arrow 20"/>
           <p:cNvCxnSpPr/>
           <p:nvPr/>
         </p:nvCxnSpPr>
@@ -26996,7 +27858,7 @@
       </p:cxnSp>
       <p:cxnSp>
         <p:nvCxnSpPr>
-          <p:cNvPr id="22" name="Arrow 21"/>
+          <p:cNvPr id="26" name="Arrow 21"/>
           <p:cNvCxnSpPr/>
           <p:nvPr/>
         </p:nvCxnSpPr>
@@ -27032,7 +27894,7 @@
       </p:cxnSp>
       <p:cxnSp>
         <p:nvCxnSpPr>
-          <p:cNvPr id="23" name="Arrow 22"/>
+          <p:cNvPr id="27" name="Arrow 22"/>
           <p:cNvCxnSpPr/>
           <p:nvPr/>
         </p:nvCxnSpPr>
@@ -27067,7 +27929,7 @@
       </p:cxnSp>
       <p:cxnSp>
         <p:nvCxnSpPr>
-          <p:cNvPr id="24" name="Arrow 23"/>
+          <p:cNvPr id="28" name="Arrow 23"/>
           <p:cNvCxnSpPr/>
           <p:nvPr/>
         </p:nvCxnSpPr>
@@ -27102,7 +27964,7 @@
       </p:cxnSp>
       <p:cxnSp>
         <p:nvCxnSpPr>
-          <p:cNvPr id="25" name="Arrow 24"/>
+          <p:cNvPr id="29" name="Arrow 24"/>
           <p:cNvCxnSpPr/>
           <p:nvPr/>
         </p:nvCxnSpPr>
@@ -27138,7 +28000,7 @@
       </p:cxnSp>
       <p:cxnSp>
         <p:nvCxnSpPr>
-          <p:cNvPr id="26" name="Arrow 25"/>
+          <p:cNvPr id="30" name="Arrow 25"/>
           <p:cNvCxnSpPr/>
           <p:nvPr/>
         </p:nvCxnSpPr>
@@ -27173,7 +28035,7 @@
       </p:cxnSp>
       <p:cxnSp>
         <p:nvCxnSpPr>
-          <p:cNvPr id="27" name="Arrow 26"/>
+          <p:cNvPr id="31" name="Arrow 26"/>
           <p:cNvCxnSpPr/>
           <p:nvPr/>
         </p:nvCxnSpPr>
@@ -27208,7 +28070,7 @@
       </p:cxnSp>
       <p:cxnSp>
         <p:nvCxnSpPr>
-          <p:cNvPr id="28" name="Arrow 27"/>
+          <p:cNvPr id="32" name="Arrow 27"/>
           <p:cNvCxnSpPr/>
           <p:nvPr/>
         </p:nvCxnSpPr>
@@ -27244,7 +28106,7 @@
       </p:cxnSp>
       <p:cxnSp>
         <p:nvCxnSpPr>
-          <p:cNvPr id="29" name="Arrow 28"/>
+          <p:cNvPr id="33" name="Arrow 28"/>
           <p:cNvCxnSpPr/>
           <p:nvPr/>
         </p:nvCxnSpPr>
@@ -27279,7 +28141,7 @@
       </p:cxnSp>
       <p:cxnSp>
         <p:nvCxnSpPr>
-          <p:cNvPr id="30" name="Arrow 29"/>
+          <p:cNvPr id="34" name="Arrow 29"/>
           <p:cNvCxnSpPr/>
           <p:nvPr/>
         </p:nvCxnSpPr>
@@ -27314,7 +28176,7 @@
       </p:cxnSp>
       <p:cxnSp>
         <p:nvCxnSpPr>
-          <p:cNvPr id="31" name="Arrow 30"/>
+          <p:cNvPr id="35" name="Arrow 30"/>
           <p:cNvCxnSpPr/>
           <p:nvPr/>
         </p:nvCxnSpPr>
@@ -27350,7 +28212,7 @@
       </p:cxnSp>
       <p:cxnSp>
         <p:nvCxnSpPr>
-          <p:cNvPr id="32" name="Arrow 31"/>
+          <p:cNvPr id="36" name="Arrow 31"/>
           <p:cNvCxnSpPr/>
           <p:nvPr/>
         </p:nvCxnSpPr>
@@ -27385,7 +28247,7 @@
       </p:cxnSp>
       <p:cxnSp>
         <p:nvCxnSpPr>
-          <p:cNvPr id="33" name="Arrow 32"/>
+          <p:cNvPr id="37" name="Arrow 32"/>
           <p:cNvCxnSpPr/>
           <p:nvPr/>
         </p:nvCxnSpPr>
@@ -27420,7 +28282,7 @@
       </p:cxnSp>
       <p:cxnSp>
         <p:nvCxnSpPr>
-          <p:cNvPr id="34" name="Arrow 33"/>
+          <p:cNvPr id="38" name="Arrow 33"/>
           <p:cNvCxnSpPr/>
           <p:nvPr/>
         </p:nvCxnSpPr>
@@ -27456,7 +28318,7 @@
       </p:cxnSp>
       <p:cxnSp>
         <p:nvCxnSpPr>
-          <p:cNvPr id="35" name="Arrow 34"/>
+          <p:cNvPr id="39" name="Arrow 34"/>
           <p:cNvCxnSpPr/>
           <p:nvPr/>
         </p:nvCxnSpPr>
@@ -27492,7 +28354,7 @@
       </p:cxnSp>
       <p:cxnSp>
         <p:nvCxnSpPr>
-          <p:cNvPr id="36" name="Arrow 35"/>
+          <p:cNvPr id="40" name="Arrow 35"/>
           <p:cNvCxnSpPr/>
           <p:nvPr/>
         </p:nvCxnSpPr>
@@ -27529,7 +28391,7 @@
       </p:cxnSp>
       <p:cxnSp>
         <p:nvCxnSpPr>
-          <p:cNvPr id="37" name="Arrow 36"/>
+          <p:cNvPr id="41" name="Arrow 36"/>
           <p:cNvCxnSpPr/>
           <p:nvPr/>
         </p:nvCxnSpPr>
@@ -27566,7 +28428,7 @@
       </p:cxnSp>
       <p:sp>
         <p:nvSpPr>
-          <p:cNvPr id="38" name="Shape 37"/>
+          <p:cNvPr id="42" name="Shape 37"/>
           <p:cNvSpPr/>
           <p:nvPr/>
         </p:nvSpPr>
@@ -27612,7 +28474,7 @@
       </p:sp>
       <p:sp>
         <p:nvSpPr>
-          <p:cNvPr id="39" name="Text 38"/>
+          <p:cNvPr id="43" name="Text 38"/>
           <p:cNvSpPr txBox="1"/>
           <p:nvPr/>
         </p:nvSpPr>
@@ -27667,7 +28529,7 @@
       </p:sp>
       <p:sp>
         <p:nvSpPr>
-          <p:cNvPr id="40" name="Shape 39"/>
+          <p:cNvPr id="44" name="Shape 39"/>
           <p:cNvSpPr/>
           <p:nvPr/>
         </p:nvSpPr>
@@ -27711,7 +28573,7 @@
       </p:sp>
       <p:sp>
         <p:nvSpPr>
-          <p:cNvPr id="41" name="Text 40"/>
+          <p:cNvPr id="45" name="Text 40"/>
           <p:cNvSpPr txBox="1"/>
           <p:nvPr/>
         </p:nvSpPr>
@@ -27746,7 +28608,7 @@
       </p:sp>
       <p:sp>
         <p:nvSpPr>
-          <p:cNvPr id="42" name="Text 41"/>
+          <p:cNvPr id="46" name="Text 41"/>
           <p:cNvSpPr txBox="1"/>
           <p:nvPr/>
         </p:nvSpPr>
@@ -27780,7 +28642,7 @@
       </p:sp>
       <p:sp>
         <p:nvSpPr>
-          <p:cNvPr id="43" name="Shape 42"/>
+          <p:cNvPr id="47" name="Shape 42"/>
           <p:cNvSpPr/>
           <p:nvPr/>
         </p:nvSpPr>
@@ -27826,7 +28688,7 @@
       </p:sp>
       <p:sp>
         <p:nvSpPr>
-          <p:cNvPr id="44" name="Text 43"/>
+          <p:cNvPr id="48" name="Text 43"/>
           <p:cNvSpPr txBox="1"/>
           <p:nvPr/>
         </p:nvSpPr>
@@ -27881,7 +28743,7 @@
       </p:sp>
       <p:sp>
         <p:nvSpPr>
-          <p:cNvPr id="45" name="Shape 44"/>
+          <p:cNvPr id="49" name="Shape 44"/>
           <p:cNvSpPr/>
           <p:nvPr/>
         </p:nvSpPr>
@@ -27925,7 +28787,7 @@
       </p:sp>
       <p:sp>
         <p:nvSpPr>
-          <p:cNvPr id="46" name="Text 45"/>
+          <p:cNvPr id="50" name="Text 45"/>
           <p:cNvSpPr txBox="1"/>
           <p:nvPr/>
         </p:nvSpPr>
@@ -27960,7 +28822,7 @@
       </p:sp>
       <p:sp>
         <p:nvSpPr>
-          <p:cNvPr id="47" name="Text 46"/>
+          <p:cNvPr id="51" name="Text 46"/>
           <p:cNvSpPr txBox="1"/>
           <p:nvPr/>
         </p:nvSpPr>
@@ -27994,7 +28856,7 @@
       </p:sp>
       <p:sp>
         <p:nvSpPr>
-          <p:cNvPr id="48" name="Shape 47"/>
+          <p:cNvPr id="52" name="Shape 47"/>
           <p:cNvSpPr/>
           <p:nvPr/>
         </p:nvSpPr>
@@ -28040,7 +28902,7 @@
       </p:sp>
       <p:sp>
         <p:nvSpPr>
-          <p:cNvPr id="49" name="Text 48"/>
+          <p:cNvPr id="53" name="Text 48"/>
           <p:cNvSpPr txBox="1"/>
           <p:nvPr/>
         </p:nvSpPr>
@@ -28095,7 +28957,7 @@
       </p:sp>
       <p:sp>
         <p:nvSpPr>
-          <p:cNvPr id="50" name="Shape 49"/>
+          <p:cNvPr id="54" name="Shape 49"/>
           <p:cNvSpPr/>
           <p:nvPr/>
         </p:nvSpPr>
@@ -28139,7 +29001,7 @@
       </p:sp>
       <p:sp>
         <p:nvSpPr>
-          <p:cNvPr id="51" name="Text 50"/>
+          <p:cNvPr id="55" name="Text 50"/>
           <p:cNvSpPr txBox="1"/>
           <p:nvPr/>
         </p:nvSpPr>
@@ -28174,7 +29036,7 @@
       </p:sp>
       <p:sp>
         <p:nvSpPr>
-          <p:cNvPr id="52" name="Text 51"/>
+          <p:cNvPr id="56" name="Text 51"/>
           <p:cNvSpPr txBox="1"/>
           <p:nvPr/>
         </p:nvSpPr>
@@ -28208,7 +29070,7 @@
       </p:sp>
       <p:sp>
         <p:nvSpPr>
-          <p:cNvPr id="53" name="Shape 52"/>
+          <p:cNvPr id="57" name="Shape 52"/>
           <p:cNvSpPr/>
           <p:nvPr/>
         </p:nvSpPr>
@@ -28255,7 +29117,7 @@
       </p:sp>
       <p:sp>
         <p:nvSpPr>
-          <p:cNvPr id="54" name="Text 53"/>
+          <p:cNvPr id="58" name="Text 53"/>
           <p:cNvSpPr txBox="1"/>
           <p:nvPr/>
         </p:nvSpPr>
@@ -28310,7 +29172,7 @@
       </p:sp>
       <p:sp>
         <p:nvSpPr>
-          <p:cNvPr id="55" name="Shape 54"/>
+          <p:cNvPr id="59" name="Shape 54"/>
           <p:cNvSpPr/>
           <p:nvPr/>
         </p:nvSpPr>
@@ -28354,7 +29216,7 @@
       </p:sp>
       <p:sp>
         <p:nvSpPr>
-          <p:cNvPr id="56" name="Text 55"/>
+          <p:cNvPr id="60" name="Text 55"/>
           <p:cNvSpPr txBox="1"/>
           <p:nvPr/>
         </p:nvSpPr>
@@ -28389,7 +29251,7 @@
       </p:sp>
       <p:sp>
         <p:nvSpPr>
-          <p:cNvPr id="57" name="Text 56"/>
+          <p:cNvPr id="61" name="Text 56"/>
           <p:cNvSpPr txBox="1"/>
           <p:nvPr/>
         </p:nvSpPr>
@@ -28423,7 +29285,7 @@
       </p:sp>
       <p:sp>
         <p:nvSpPr>
-          <p:cNvPr id="58" name="Shape 57"/>
+          <p:cNvPr id="62" name="Shape 57"/>
           <p:cNvSpPr/>
           <p:nvPr/>
         </p:nvSpPr>
@@ -28469,7 +29331,7 @@
       </p:sp>
       <p:sp>
         <p:nvSpPr>
-          <p:cNvPr id="59" name="Text 58"/>
+          <p:cNvPr id="63" name="Text 58"/>
           <p:cNvSpPr txBox="1"/>
           <p:nvPr/>
         </p:nvSpPr>
@@ -28524,7 +29386,7 @@
       </p:sp>
       <p:sp>
         <p:nvSpPr>
-          <p:cNvPr id="60" name="Shape 59"/>
+          <p:cNvPr id="64" name="Shape 59"/>
           <p:cNvSpPr/>
           <p:nvPr/>
         </p:nvSpPr>
@@ -28568,7 +29430,7 @@
       </p:sp>
       <p:sp>
         <p:nvSpPr>
-          <p:cNvPr id="61" name="Text 60"/>
+          <p:cNvPr id="65" name="Text 60"/>
           <p:cNvSpPr txBox="1"/>
           <p:nvPr/>
         </p:nvSpPr>
@@ -28603,7 +29465,7 @@
       </p:sp>
       <p:sp>
         <p:nvSpPr>
-          <p:cNvPr id="62" name="Text 61"/>
+          <p:cNvPr id="66" name="Text 61"/>
           <p:cNvSpPr txBox="1"/>
           <p:nvPr/>
         </p:nvSpPr>
@@ -28637,7 +29499,7 @@
       </p:sp>
       <p:sp>
         <p:nvSpPr>
-          <p:cNvPr id="63" name="Shape 62"/>
+          <p:cNvPr id="67" name="Shape 62"/>
           <p:cNvSpPr/>
           <p:nvPr/>
         </p:nvSpPr>
@@ -28683,7 +29545,7 @@
       </p:sp>
       <p:sp>
         <p:nvSpPr>
-          <p:cNvPr id="64" name="Text 63"/>
+          <p:cNvPr id="68" name="Text 63"/>
           <p:cNvSpPr txBox="1"/>
           <p:nvPr/>
         </p:nvSpPr>
@@ -28738,7 +29600,7 @@
       </p:sp>
       <p:sp>
         <p:nvSpPr>
-          <p:cNvPr id="65" name="Shape 64"/>
+          <p:cNvPr id="69" name="Shape 64"/>
           <p:cNvSpPr/>
           <p:nvPr/>
         </p:nvSpPr>
@@ -28782,7 +29644,7 @@
       </p:sp>
       <p:sp>
         <p:nvSpPr>
-          <p:cNvPr id="66" name="Text 65"/>
+          <p:cNvPr id="70" name="Text 65"/>
           <p:cNvSpPr txBox="1"/>
           <p:nvPr/>
         </p:nvSpPr>
@@ -28817,7 +29679,7 @@
       </p:sp>
       <p:sp>
         <p:nvSpPr>
-          <p:cNvPr id="67" name="Text 66"/>
+          <p:cNvPr id="71" name="Text 66"/>
           <p:cNvSpPr txBox="1"/>
           <p:nvPr/>
         </p:nvSpPr>
@@ -28851,7 +29713,7 @@
       </p:sp>
       <p:sp>
         <p:nvSpPr>
-          <p:cNvPr id="68" name="Shape 67"/>
+          <p:cNvPr id="72" name="Shape 67"/>
           <p:cNvSpPr/>
           <p:nvPr/>
         </p:nvSpPr>
@@ -28897,7 +29759,7 @@
       </p:sp>
       <p:sp>
         <p:nvSpPr>
-          <p:cNvPr id="69" name="Text 68"/>
+          <p:cNvPr id="73" name="Text 68"/>
           <p:cNvSpPr txBox="1"/>
           <p:nvPr/>
         </p:nvSpPr>
@@ -28952,7 +29814,7 @@
       </p:sp>
       <p:sp>
         <p:nvSpPr>
-          <p:cNvPr id="70" name="Shape 69"/>
+          <p:cNvPr id="74" name="Shape 69"/>
           <p:cNvSpPr/>
           <p:nvPr/>
         </p:nvSpPr>
@@ -28996,7 +29858,7 @@
       </p:sp>
       <p:sp>
         <p:nvSpPr>
-          <p:cNvPr id="71" name="Text 70"/>
+          <p:cNvPr id="75" name="Text 70"/>
           <p:cNvSpPr txBox="1"/>
           <p:nvPr/>
         </p:nvSpPr>
@@ -29031,7 +29893,7 @@
       </p:sp>
       <p:sp>
         <p:nvSpPr>
-          <p:cNvPr id="72" name="Text 71"/>
+          <p:cNvPr id="76" name="Text 71"/>
           <p:cNvSpPr txBox="1"/>
           <p:nvPr/>
         </p:nvSpPr>
@@ -29065,7 +29927,7 @@
       </p:sp>
       <p:sp>
         <p:nvSpPr>
-          <p:cNvPr id="73" name="Shape 72"/>
+          <p:cNvPr id="77" name="Shape 72"/>
           <p:cNvSpPr/>
           <p:nvPr/>
         </p:nvSpPr>
@@ -29111,7 +29973,7 @@
       </p:sp>
       <p:sp>
         <p:nvSpPr>
-          <p:cNvPr id="74" name="Text 73"/>
+          <p:cNvPr id="78" name="Text 73"/>
           <p:cNvSpPr txBox="1"/>
           <p:nvPr/>
         </p:nvSpPr>
@@ -29166,7 +30028,7 @@
       </p:sp>
       <p:sp>
         <p:nvSpPr>
-          <p:cNvPr id="75" name="Shape 74"/>
+          <p:cNvPr id="79" name="Shape 74"/>
           <p:cNvSpPr/>
           <p:nvPr/>
         </p:nvSpPr>
@@ -29210,7 +30072,7 @@
       </p:sp>
       <p:sp>
         <p:nvSpPr>
-          <p:cNvPr id="76" name="Text 75"/>
+          <p:cNvPr id="80" name="Text 75"/>
           <p:cNvSpPr txBox="1"/>
           <p:nvPr/>
         </p:nvSpPr>
@@ -29245,7 +30107,7 @@
       </p:sp>
       <p:sp>
         <p:nvSpPr>
-          <p:cNvPr id="77" name="Text 76"/>
+          <p:cNvPr id="81" name="Text 76"/>
           <p:cNvSpPr txBox="1"/>
           <p:nvPr/>
         </p:nvSpPr>
@@ -29279,7 +30141,7 @@
       </p:sp>
       <p:cxnSp>
         <p:nvCxnSpPr>
-          <p:cNvPr id="78" name="Arrow 77"/>
+          <p:cNvPr id="82" name="Arrow 77"/>
           <p:cNvCxnSpPr/>
           <p:nvPr/>
         </p:nvCxnSpPr>
@@ -29315,7 +30177,7 @@
       </p:cxnSp>
       <p:sp>
         <p:nvSpPr>
-          <p:cNvPr id="79" name="Text 78"/>
+          <p:cNvPr id="83" name="Text 78"/>
           <p:cNvSpPr txBox="1"/>
           <p:nvPr/>
         </p:nvSpPr>
@@ -29349,7 +30211,7 @@
       </p:sp>
       <p:cxnSp>
         <p:nvCxnSpPr>
-          <p:cNvPr id="80" name="Arrow 79"/>
+          <p:cNvPr id="84" name="Arrow 79"/>
           <p:cNvCxnSpPr/>
           <p:nvPr/>
         </p:nvCxnSpPr>
@@ -29386,7 +30248,7 @@
       </p:cxnSp>
       <p:sp>
         <p:nvSpPr>
-          <p:cNvPr id="81" name="Text 80"/>
+          <p:cNvPr id="85" name="Text 80"/>
           <p:cNvSpPr txBox="1"/>
           <p:nvPr/>
         </p:nvSpPr>
@@ -29420,7 +30282,7 @@
       </p:sp>
       <p:sp>
         <p:nvSpPr>
-          <p:cNvPr id="82" name="Text 81"/>
+          <p:cNvPr id="86" name="Text 81"/>
           <p:cNvSpPr txBox="1"/>
           <p:nvPr/>
         </p:nvSpPr>
@@ -29454,7 +30316,7 @@
       </p:sp>
       <p:sp>
         <p:nvSpPr>
-          <p:cNvPr id="83" name="Shape 82"/>
+          <p:cNvPr id="87" name="Shape 82"/>
           <p:cNvSpPr/>
           <p:nvPr/>
         </p:nvSpPr>
@@ -29500,7 +30362,7 @@
       </p:sp>
       <p:sp>
         <p:nvSpPr>
-          <p:cNvPr id="84" name="Text 83"/>
+          <p:cNvPr id="88" name="Text 83"/>
           <p:cNvSpPr txBox="1"/>
           <p:nvPr/>
         </p:nvSpPr>
@@ -29534,7 +30396,7 @@
       </p:sp>
       <p:sp>
         <p:nvSpPr>
-          <p:cNvPr id="85" name="Text 84"/>
+          <p:cNvPr id="89" name="Text 84"/>
           <p:cNvSpPr txBox="1"/>
           <p:nvPr/>
         </p:nvSpPr>
@@ -29568,7 +30430,7 @@
       </p:sp>
       <p:sp>
         <p:nvSpPr>
-          <p:cNvPr id="86" name="Text 85"/>
+          <p:cNvPr id="90" name="Text 85"/>
           <p:cNvSpPr txBox="1"/>
           <p:nvPr/>
         </p:nvSpPr>
@@ -29602,7 +30464,7 @@
       </p:sp>
       <p:sp>
         <p:nvSpPr>
-          <p:cNvPr id="87" name="Text 86"/>
+          <p:cNvPr id="91" name="Text 86"/>
           <p:cNvSpPr txBox="1"/>
           <p:nvPr/>
         </p:nvSpPr>
@@ -29636,7 +30498,7 @@
       </p:sp>
       <p:sp>
         <p:nvSpPr>
-          <p:cNvPr id="88" name="Shape 87"/>
+          <p:cNvPr id="92" name="Shape 87"/>
           <p:cNvSpPr/>
           <p:nvPr/>
         </p:nvSpPr>
@@ -29678,7 +30540,7 @@
       </p:sp>
       <p:sp>
         <p:nvSpPr>
-          <p:cNvPr id="89" name="Text 88"/>
+          <p:cNvPr id="93" name="Text 88"/>
           <p:cNvSpPr txBox="1"/>
           <p:nvPr/>
         </p:nvSpPr>
@@ -29712,7 +30574,7 @@
       </p:sp>
       <p:sp>
         <p:nvSpPr>
-          <p:cNvPr id="90" name="Text 89"/>
+          <p:cNvPr id="94" name="Text 89"/>
           <p:cNvSpPr txBox="1"/>
           <p:nvPr/>
         </p:nvSpPr>
@@ -29746,7 +30608,7 @@
       </p:sp>
       <p:sp>
         <p:nvSpPr>
-          <p:cNvPr id="91" name="Text 90"/>
+          <p:cNvPr id="95" name="Text 90"/>
           <p:cNvSpPr txBox="1"/>
           <p:nvPr/>
         </p:nvSpPr>
@@ -29780,7 +30642,7 @@
       </p:sp>
       <p:sp>
         <p:nvSpPr>
-          <p:cNvPr id="92" name="Shape 91"/>
+          <p:cNvPr id="96" name="Shape 91"/>
           <p:cNvSpPr/>
           <p:nvPr/>
         </p:nvSpPr>
@@ -29822,7 +30684,7 @@
       </p:sp>
       <p:sp>
         <p:nvSpPr>
-          <p:cNvPr id="93" name="Text 92"/>
+          <p:cNvPr id="97" name="Text 92"/>
           <p:cNvSpPr txBox="1"/>
           <p:nvPr/>
         </p:nvSpPr>
@@ -29856,7 +30718,7 @@
       </p:sp>
       <p:sp>
         <p:nvSpPr>
-          <p:cNvPr id="94" name="Text 93"/>
+          <p:cNvPr id="98" name="Text 93"/>
           <p:cNvSpPr txBox="1"/>
           <p:nvPr/>
         </p:nvSpPr>
@@ -29890,7 +30752,7 @@
       </p:sp>
       <p:sp>
         <p:nvSpPr>
-          <p:cNvPr id="95" name="Text 94"/>
+          <p:cNvPr id="99" name="Text 94"/>
           <p:cNvSpPr txBox="1"/>
           <p:nvPr/>
         </p:nvSpPr>
@@ -29924,7 +30786,7 @@
       </p:sp>
       <p:sp>
         <p:nvSpPr>
-          <p:cNvPr id="96" name="Shape 95"/>
+          <p:cNvPr id="100" name="Shape 95"/>
           <p:cNvSpPr/>
           <p:nvPr/>
         </p:nvSpPr>
@@ -29966,7 +30828,7 @@
       </p:sp>
       <p:sp>
         <p:nvSpPr>
-          <p:cNvPr id="97" name="Text 96"/>
+          <p:cNvPr id="101" name="Text 96"/>
           <p:cNvSpPr txBox="1"/>
           <p:nvPr/>
         </p:nvSpPr>
@@ -30000,7 +30862,7 @@
       </p:sp>
       <p:sp>
         <p:nvSpPr>
-          <p:cNvPr id="98" name="Text 97"/>
+          <p:cNvPr id="102" name="Text 97"/>
           <p:cNvSpPr txBox="1"/>
           <p:nvPr/>
         </p:nvSpPr>
@@ -30034,7 +30896,7 @@
       </p:sp>
       <p:sp>
         <p:nvSpPr>
-          <p:cNvPr id="99" name="Text 98"/>
+          <p:cNvPr id="103" name="Text 98"/>
           <p:cNvSpPr txBox="1"/>
           <p:nvPr/>
         </p:nvSpPr>
@@ -30068,7 +30930,7 @@
       </p:sp>
       <p:sp>
         <p:nvSpPr>
-          <p:cNvPr id="100" name="Shape 99"/>
+          <p:cNvPr id="104" name="Shape 99"/>
           <p:cNvSpPr/>
           <p:nvPr/>
         </p:nvSpPr>
@@ -30110,7 +30972,7 @@
       </p:sp>
       <p:sp>
         <p:nvSpPr>
-          <p:cNvPr id="101" name="Text 100"/>
+          <p:cNvPr id="105" name="Text 100"/>
           <p:cNvSpPr txBox="1"/>
           <p:nvPr/>
         </p:nvSpPr>
@@ -30144,7 +31006,7 @@
       </p:sp>
       <p:sp>
         <p:nvSpPr>
-          <p:cNvPr id="102" name="Text 101"/>
+          <p:cNvPr id="106" name="Text 101"/>
           <p:cNvSpPr txBox="1"/>
           <p:nvPr/>
         </p:nvSpPr>
@@ -30178,7 +31040,7 @@
       </p:sp>
       <p:sp>
         <p:nvSpPr>
-          <p:cNvPr id="103" name="Text 102"/>
+          <p:cNvPr id="107" name="Text 102"/>
           <p:cNvSpPr txBox="1"/>
           <p:nvPr/>
         </p:nvSpPr>
@@ -30212,7 +31074,7 @@
       </p:sp>
       <p:sp>
         <p:nvSpPr>
-          <p:cNvPr id="104" name="Shape 103"/>
+          <p:cNvPr id="108" name="Shape 103"/>
           <p:cNvSpPr/>
           <p:nvPr/>
         </p:nvSpPr>
@@ -30254,7 +31116,7 @@
       </p:sp>
       <p:sp>
         <p:nvSpPr>
-          <p:cNvPr id="105" name="Text 104"/>
+          <p:cNvPr id="109" name="Text 104"/>
           <p:cNvSpPr txBox="1"/>
           <p:nvPr/>
         </p:nvSpPr>
@@ -30288,7 +31150,7 @@
       </p:sp>
       <p:sp>
         <p:nvSpPr>
-          <p:cNvPr id="106" name="Text 105"/>
+          <p:cNvPr id="110" name="Text 105"/>
           <p:cNvSpPr txBox="1"/>
           <p:nvPr/>
         </p:nvSpPr>
@@ -30322,7 +31184,7 @@
       </p:sp>
       <p:sp>
         <p:nvSpPr>
-          <p:cNvPr id="107" name="Text 106"/>
+          <p:cNvPr id="111" name="Text 106"/>
           <p:cNvSpPr txBox="1"/>
           <p:nvPr/>
         </p:nvSpPr>
@@ -30356,7 +31218,7 @@
       </p:sp>
       <p:sp>
         <p:nvSpPr>
-          <p:cNvPr id="108" name="Shape 107"/>
+          <p:cNvPr id="112" name="Shape 107"/>
           <p:cNvSpPr/>
           <p:nvPr/>
         </p:nvSpPr>
@@ -30402,7 +31264,7 @@
       </p:sp>
       <p:sp>
         <p:nvSpPr>
-          <p:cNvPr id="109" name="Text 108"/>
+          <p:cNvPr id="113" name="Text 108"/>
           <p:cNvSpPr txBox="1"/>
           <p:nvPr/>
         </p:nvSpPr>
@@ -30436,7 +31298,7 @@
       </p:sp>
       <p:sp>
         <p:nvSpPr>
-          <p:cNvPr id="110" name="Shape 109"/>
+          <p:cNvPr id="114" name="Shape 109"/>
           <p:cNvSpPr/>
           <p:nvPr/>
         </p:nvSpPr>
@@ -30478,7 +31340,7 @@
       </p:sp>
       <p:sp>
         <p:nvSpPr>
-          <p:cNvPr id="111" name="Text 110"/>
+          <p:cNvPr id="115" name="Text 110"/>
           <p:cNvSpPr txBox="1"/>
           <p:nvPr/>
         </p:nvSpPr>
@@ -30523,7 +31385,7 @@
       </p:sp>
       <p:sp>
         <p:nvSpPr>
-          <p:cNvPr id="112" name="Shape 111"/>
+          <p:cNvPr id="116" name="Shape 111"/>
           <p:cNvSpPr/>
           <p:nvPr/>
         </p:nvSpPr>
@@ -30565,7 +31427,7 @@
       </p:sp>
       <p:sp>
         <p:nvSpPr>
-          <p:cNvPr id="113" name="Text 112"/>
+          <p:cNvPr id="117" name="Text 112"/>
           <p:cNvSpPr txBox="1"/>
           <p:nvPr/>
         </p:nvSpPr>
@@ -30610,7 +31472,7 @@
       </p:sp>
       <p:sp>
         <p:nvSpPr>
-          <p:cNvPr id="114" name="Shape 113"/>
+          <p:cNvPr id="118" name="Shape 113"/>
           <p:cNvSpPr/>
           <p:nvPr/>
         </p:nvSpPr>
@@ -30652,7 +31514,7 @@
       </p:sp>
       <p:sp>
         <p:nvSpPr>
-          <p:cNvPr id="115" name="Text 114"/>
+          <p:cNvPr id="119" name="Text 114"/>
           <p:cNvSpPr txBox="1"/>
           <p:nvPr/>
         </p:nvSpPr>
@@ -30697,7 +31559,7 @@
       </p:sp>
       <p:sp>
         <p:nvSpPr>
-          <p:cNvPr id="116" name="Shape 115"/>
+          <p:cNvPr id="120" name="Shape 115"/>
           <p:cNvSpPr/>
           <p:nvPr/>
         </p:nvSpPr>
@@ -30739,7 +31601,7 @@
       </p:sp>
       <p:sp>
         <p:nvSpPr>
-          <p:cNvPr id="117" name="Text 116"/>
+          <p:cNvPr id="121" name="Text 116"/>
           <p:cNvSpPr txBox="1"/>
           <p:nvPr/>
         </p:nvSpPr>
@@ -30777,14 +31639,14 @@
                 </a:solidFill>
                 <a:latin typeface="Trenda IG Text"/>
               </a:rPr>
-              <a:t>raw-access service account, 6 fields, after G2 + G3 only</a:t>
-            </a:r>
-          </a:p>
-        </p:txBody>
-      </p:sp>
-      <p:sp>
-        <p:nvSpPr>
-          <p:cNvPr id="118" name="Shape 117"/>
+              <a:t>raw-access service account, minimum fields, after G2 + G3</a:t>
+            </a:r>
+          </a:p>
+        </p:txBody>
+      </p:sp>
+      <p:sp>
+        <p:nvSpPr>
+          <p:cNvPr id="122" name="Shape 117"/>
           <p:cNvSpPr/>
           <p:nvPr/>
         </p:nvSpPr>
@@ -30826,7 +31688,7 @@
       </p:sp>
       <p:sp>
         <p:nvSpPr>
-          <p:cNvPr id="119" name="Text 118"/>
+          <p:cNvPr id="123" name="Text 118"/>
           <p:cNvSpPr txBox="1"/>
           <p:nvPr/>
         </p:nvSpPr>
@@ -30864,14 +31726,14 @@
                 </a:solidFill>
                 <a:latin typeface="Trenda IG Text"/>
               </a:rPr>
-              <a:t>pulls those 6 fields for one run</a:t>
-            </a:r>
-          </a:p>
-        </p:txBody>
-      </p:sp>
-      <p:sp>
-        <p:nvSpPr>
-          <p:cNvPr id="120" name="Shape 119"/>
+              <a:t>pulls only those fields, for one run</a:t>
+            </a:r>
+          </a:p>
+        </p:txBody>
+      </p:sp>
+      <p:sp>
+        <p:nvSpPr>
+          <p:cNvPr id="124" name="Shape 119"/>
           <p:cNvSpPr/>
           <p:nvPr/>
         </p:nvSpPr>
@@ -30913,7 +31775,7 @@
       </p:sp>
       <p:sp>
         <p:nvSpPr>
-          <p:cNvPr id="121" name="Shape 120"/>
+          <p:cNvPr id="125" name="Shape 120"/>
           <p:cNvSpPr/>
           <p:nvPr/>
         </p:nvSpPr>
@@ -30955,7 +31817,7 @@
       </p:sp>
       <p:sp>
         <p:nvSpPr>
-          <p:cNvPr id="122" name="Text 121"/>
+          <p:cNvPr id="126" name="Text 121"/>
           <p:cNvSpPr txBox="1"/>
           <p:nvPr/>
         </p:nvSpPr>
@@ -31010,7 +31872,7 @@
       </p:sp>
       <p:sp>
         <p:nvSpPr>
-          <p:cNvPr id="123" name="Shape 122"/>
+          <p:cNvPr id="127" name="Shape 122"/>
           <p:cNvSpPr/>
           <p:nvPr/>
         </p:nvSpPr>
@@ -31052,7 +31914,7 @@
       </p:sp>
       <p:sp>
         <p:nvSpPr>
-          <p:cNvPr id="124" name="Shape 123"/>
+          <p:cNvPr id="128" name="Shape 123"/>
           <p:cNvSpPr/>
           <p:nvPr/>
         </p:nvSpPr>
@@ -31094,7 +31956,7 @@
       </p:sp>
       <p:sp>
         <p:nvSpPr>
-          <p:cNvPr id="125" name="Text 124"/>
+          <p:cNvPr id="129" name="Text 124"/>
           <p:cNvSpPr txBox="1"/>
           <p:nvPr/>
         </p:nvSpPr>
@@ -31149,7 +32011,7 @@
       </p:sp>
       <p:sp>
         <p:nvSpPr>
-          <p:cNvPr id="126" name="Shape 125"/>
+          <p:cNvPr id="130" name="Shape 125"/>
           <p:cNvSpPr/>
           <p:nvPr/>
         </p:nvSpPr>
@@ -31191,7 +32053,7 @@
       </p:sp>
       <p:sp>
         <p:nvSpPr>
-          <p:cNvPr id="127" name="Shape 126"/>
+          <p:cNvPr id="131" name="Shape 126"/>
           <p:cNvSpPr/>
           <p:nvPr/>
         </p:nvSpPr>
@@ -31233,7 +32095,7 @@
       </p:sp>
       <p:sp>
         <p:nvSpPr>
-          <p:cNvPr id="128" name="Text 127"/>
+          <p:cNvPr id="132" name="Text 127"/>
           <p:cNvSpPr txBox="1"/>
           <p:nvPr/>
         </p:nvSpPr>
@@ -31288,7 +32150,7 @@
       </p:sp>
       <p:sp>
         <p:nvSpPr>
-          <p:cNvPr id="129" name="Shape 128"/>
+          <p:cNvPr id="133" name="Shape 128"/>
           <p:cNvSpPr/>
           <p:nvPr/>
         </p:nvSpPr>
@@ -31330,7 +32192,7 @@
       </p:sp>
       <p:sp>
         <p:nvSpPr>
-          <p:cNvPr id="130" name="Shape 129"/>
+          <p:cNvPr id="134" name="Shape 129"/>
           <p:cNvSpPr/>
           <p:nvPr/>
         </p:nvSpPr>
@@ -31372,7 +32234,7 @@
       </p:sp>
       <p:sp>
         <p:nvSpPr>
-          <p:cNvPr id="131" name="Text 130"/>
+          <p:cNvPr id="135" name="Text 130"/>
           <p:cNvSpPr txBox="1"/>
           <p:nvPr/>
         </p:nvSpPr>

--- a/poc/data_harness/Ascension Agentic Harness - Data Harness.pptx
+++ b/poc/data_harness/Ascension Agentic Harness - Data Harness.pptx
@@ -22625,7 +22625,7 @@
             <a:r>
               <a:rPr sz="800" b="1" i="0" spc="300">
                 <a:solidFill>
-                  <a:srgbClr val="00D6F2"/>
+                  <a:srgbClr val="6EA8FF"/>
                 </a:solidFill>
                 <a:latin typeface="Trenda IG Text"/>
               </a:rPr>
@@ -22659,7 +22659,7 @@
             <a:r>
               <a:rPr sz="2200" b="1" i="0">
                 <a:solidFill>
-                  <a:srgbClr val="FFFFFF"/>
+                  <a:srgbClr val="F2F2F2"/>
                 </a:solidFill>
                 <a:latin typeface="Trenda IG Text"/>
               </a:rPr>
@@ -22693,7 +22693,7 @@
             <a:r>
               <a:rPr sz="1050" b="0" i="0">
                 <a:solidFill>
-                  <a:srgbClr val="BFBFBF"/>
+                  <a:srgbClr val="B3B3B3"/>
                 </a:solidFill>
                 <a:latin typeface="Trenda IG Text"/>
               </a:rPr>
@@ -22727,7 +22727,7 @@
             <a:r>
               <a:rPr sz="640" b="1" i="0" spc="120">
                 <a:solidFill>
-                  <a:srgbClr val="FFFFFF"/>
+                  <a:srgbClr val="F2F2F2"/>
                 </a:solidFill>
                 <a:latin typeface="Trenda IG Text"/>
               </a:rPr>
@@ -22869,7 +22869,7 @@
             <a:r>
               <a:rPr sz="540" b="1" i="0">
                 <a:solidFill>
-                  <a:srgbClr val="FFFFFF"/>
+                  <a:srgbClr val="F2F2F2"/>
                 </a:solidFill>
                 <a:latin typeface="Trenda IG Text"/>
               </a:rPr>
@@ -23022,7 +23022,7 @@
             <a:r>
               <a:rPr sz="540" b="1" i="0">
                 <a:solidFill>
-                  <a:srgbClr val="FFFFFF"/>
+                  <a:srgbClr val="F2F2F2"/>
                 </a:solidFill>
                 <a:latin typeface="Trenda IG Text"/>
               </a:rPr>
@@ -23175,7 +23175,7 @@
             <a:r>
               <a:rPr sz="540" b="1" i="0">
                 <a:solidFill>
-                  <a:srgbClr val="FFFFFF"/>
+                  <a:srgbClr val="F2F2F2"/>
                 </a:solidFill>
                 <a:latin typeface="Trenda IG Text"/>
               </a:rPr>
@@ -23328,7 +23328,7 @@
             <a:r>
               <a:rPr sz="540" b="1" i="0">
                 <a:solidFill>
-                  <a:srgbClr val="FFFFFF"/>
+                  <a:srgbClr val="F2F2F2"/>
                 </a:solidFill>
                 <a:latin typeface="Trenda IG Text"/>
               </a:rPr>
@@ -23362,9 +23362,9 @@
           <a:prstGeom prst="line">
             <a:avLst/>
           </a:prstGeom>
-          <a:ln w="15875">
+          <a:ln w="9525">
             <a:solidFill>
-              <a:srgbClr val="00D6F2"/>
+              <a:srgbClr val="5B8DEF"/>
             </a:solidFill>
           </a:ln>
         </p:spPr>
@@ -23397,9 +23397,9 @@
           <a:prstGeom prst="line">
             <a:avLst/>
           </a:prstGeom>
-          <a:ln w="15875">
+          <a:ln w="9525">
             <a:solidFill>
-              <a:srgbClr val="00D6F2"/>
+              <a:srgbClr val="5B8DEF"/>
             </a:solidFill>
           </a:ln>
         </p:spPr>
@@ -23432,9 +23432,9 @@
           <a:prstGeom prst="line">
             <a:avLst/>
           </a:prstGeom>
-          <a:ln w="15875">
+          <a:ln w="9525">
             <a:solidFill>
-              <a:srgbClr val="00D6F2"/>
+              <a:srgbClr val="5B8DEF"/>
             </a:solidFill>
             <a:tailEnd type="triangle" w="med" len="med"/>
           </a:ln>
@@ -23468,9 +23468,9 @@
           <a:prstGeom prst="line">
             <a:avLst/>
           </a:prstGeom>
-          <a:ln w="15875">
+          <a:ln w="9525">
             <a:solidFill>
-              <a:srgbClr val="00D6F2"/>
+              <a:srgbClr val="5B8DEF"/>
             </a:solidFill>
           </a:ln>
         </p:spPr>
@@ -23503,9 +23503,9 @@
           <a:prstGeom prst="line">
             <a:avLst/>
           </a:prstGeom>
-          <a:ln w="15875">
+          <a:ln w="9525">
             <a:solidFill>
-              <a:srgbClr val="00D6F2"/>
+              <a:srgbClr val="5B8DEF"/>
             </a:solidFill>
           </a:ln>
         </p:spPr>
@@ -23538,9 +23538,9 @@
           <a:prstGeom prst="line">
             <a:avLst/>
           </a:prstGeom>
-          <a:ln w="15875">
+          <a:ln w="9525">
             <a:solidFill>
-              <a:srgbClr val="00D6F2"/>
+              <a:srgbClr val="5B8DEF"/>
             </a:solidFill>
             <a:tailEnd type="triangle" w="med" len="med"/>
           </a:ln>
@@ -23574,9 +23574,9 @@
           <a:prstGeom prst="line">
             <a:avLst/>
           </a:prstGeom>
-          <a:ln w="15875">
+          <a:ln w="9525">
             <a:solidFill>
-              <a:srgbClr val="00D6F2"/>
+              <a:srgbClr val="5B8DEF"/>
             </a:solidFill>
           </a:ln>
         </p:spPr>
@@ -23609,9 +23609,9 @@
           <a:prstGeom prst="line">
             <a:avLst/>
           </a:prstGeom>
-          <a:ln w="15875">
+          <a:ln w="9525">
             <a:solidFill>
-              <a:srgbClr val="00D6F2"/>
+              <a:srgbClr val="5B8DEF"/>
             </a:solidFill>
           </a:ln>
         </p:spPr>
@@ -23644,9 +23644,9 @@
           <a:prstGeom prst="line">
             <a:avLst/>
           </a:prstGeom>
-          <a:ln w="15875">
+          <a:ln w="9525">
             <a:solidFill>
-              <a:srgbClr val="00D6F2"/>
+              <a:srgbClr val="5B8DEF"/>
             </a:solidFill>
             <a:tailEnd type="triangle" w="med" len="med"/>
           </a:ln>
@@ -23680,9 +23680,9 @@
           <a:prstGeom prst="line">
             <a:avLst/>
           </a:prstGeom>
-          <a:ln w="15875">
+          <a:ln w="9525">
             <a:solidFill>
-              <a:srgbClr val="00D6F2"/>
+              <a:srgbClr val="5B8DEF"/>
             </a:solidFill>
           </a:ln>
         </p:spPr>
@@ -23715,9 +23715,9 @@
           <a:prstGeom prst="line">
             <a:avLst/>
           </a:prstGeom>
-          <a:ln w="15875">
+          <a:ln w="9525">
             <a:solidFill>
-              <a:srgbClr val="00D6F2"/>
+              <a:srgbClr val="5B8DEF"/>
             </a:solidFill>
           </a:ln>
         </p:spPr>
@@ -23750,9 +23750,9 @@
           <a:prstGeom prst="line">
             <a:avLst/>
           </a:prstGeom>
-          <a:ln w="15875">
+          <a:ln w="9525">
             <a:solidFill>
-              <a:srgbClr val="00D6F2"/>
+              <a:srgbClr val="5B8DEF"/>
             </a:solidFill>
             <a:tailEnd type="triangle" w="med" len="med"/>
           </a:ln>
@@ -23786,9 +23786,9 @@
           <a:prstGeom prst="line">
             <a:avLst/>
           </a:prstGeom>
-          <a:ln w="15875">
+          <a:ln w="9525">
             <a:solidFill>
-              <a:srgbClr val="00D6F2"/>
+              <a:srgbClr val="5B8DEF"/>
             </a:solidFill>
           </a:ln>
         </p:spPr>
@@ -23821,9 +23821,9 @@
           <a:prstGeom prst="line">
             <a:avLst/>
           </a:prstGeom>
-          <a:ln w="15875">
+          <a:ln w="9525">
             <a:solidFill>
-              <a:srgbClr val="00D6F2"/>
+              <a:srgbClr val="5B8DEF"/>
             </a:solidFill>
           </a:ln>
         </p:spPr>
@@ -23856,9 +23856,9 @@
           <a:prstGeom prst="line">
             <a:avLst/>
           </a:prstGeom>
-          <a:ln w="15875">
+          <a:ln w="9525">
             <a:solidFill>
-              <a:srgbClr val="00D6F2"/>
+              <a:srgbClr val="5B8DEF"/>
             </a:solidFill>
             <a:tailEnd type="triangle" w="med" len="med"/>
           </a:ln>
@@ -23892,9 +23892,9 @@
           <a:prstGeom prst="line">
             <a:avLst/>
           </a:prstGeom>
-          <a:ln w="15875">
+          <a:ln w="9525">
             <a:solidFill>
-              <a:srgbClr val="00D6F2"/>
+              <a:srgbClr val="5B8DEF"/>
             </a:solidFill>
           </a:ln>
         </p:spPr>
@@ -23927,9 +23927,9 @@
           <a:prstGeom prst="line">
             <a:avLst/>
           </a:prstGeom>
-          <a:ln w="15875">
+          <a:ln w="9525">
             <a:solidFill>
-              <a:srgbClr val="00D6F2"/>
+              <a:srgbClr val="5B8DEF"/>
             </a:solidFill>
           </a:ln>
         </p:spPr>
@@ -23962,9 +23962,9 @@
           <a:prstGeom prst="line">
             <a:avLst/>
           </a:prstGeom>
-          <a:ln w="15875">
+          <a:ln w="9525">
             <a:solidFill>
-              <a:srgbClr val="00D6F2"/>
+              <a:srgbClr val="5B8DEF"/>
             </a:solidFill>
             <a:tailEnd type="triangle" w="med" len="med"/>
           </a:ln>
@@ -23998,9 +23998,9 @@
           <a:prstGeom prst="line">
             <a:avLst/>
           </a:prstGeom>
-          <a:ln w="15875">
+          <a:ln w="9525">
             <a:solidFill>
-              <a:srgbClr val="8B7CD8"/>
+              <a:srgbClr val="4A4A4A"/>
             </a:solidFill>
             <a:prstDash val="dash"/>
           </a:ln>
@@ -24034,9 +24034,9 @@
           <a:prstGeom prst="line">
             <a:avLst/>
           </a:prstGeom>
-          <a:ln w="15875">
+          <a:ln w="9525">
             <a:solidFill>
-              <a:srgbClr val="8B7CD8"/>
+              <a:srgbClr val="4A4A4A"/>
             </a:solidFill>
             <a:prstDash val="dash"/>
             <a:tailEnd type="triangle" w="med" len="med"/>
@@ -24071,9 +24071,9 @@
           <a:prstGeom prst="line">
             <a:avLst/>
           </a:prstGeom>
-          <a:ln w="15875">
+          <a:ln w="9525">
             <a:solidFill>
-              <a:srgbClr val="8B7CD8"/>
+              <a:srgbClr val="4A4A4A"/>
             </a:solidFill>
             <a:prstDash val="dash"/>
             <a:tailEnd type="triangle" w="med" len="med"/>
@@ -24113,9 +24113,9 @@
           <a:solidFill>
             <a:srgbClr val="000000"/>
           </a:solidFill>
-          <a:ln w="12700">
+          <a:ln w="7620">
             <a:solidFill>
-              <a:srgbClr val="3A3A3A"/>
+              <a:srgbClr val="333333"/>
             </a:solidFill>
           </a:ln>
           <a:effectLst/>
@@ -24170,7 +24170,7 @@
             <a:r>
               <a:rPr sz="560" b="1" i="0">
                 <a:solidFill>
-                  <a:srgbClr val="FFFFFF"/>
+                  <a:srgbClr val="F2F2F2"/>
                 </a:solidFill>
                 <a:latin typeface="Trenda IG Text"/>
               </a:rPr>
@@ -24196,9 +24196,9 @@
             </a:avLst>
           </a:prstGeom>
           <a:noFill/>
-          <a:ln w="9525">
+          <a:ln w="6350">
             <a:solidFill>
-              <a:srgbClr val="BFBFBF"/>
+              <a:srgbClr val="6B6B6B"/>
             </a:solidFill>
           </a:ln>
           <a:effectLst/>
@@ -24249,7 +24249,7 @@
             <a:r>
               <a:rPr sz="420" b="1" i="0" spc="80">
                 <a:solidFill>
-                  <a:srgbClr val="BFBFBF"/>
+                  <a:srgbClr val="B3B3B3"/>
                 </a:solidFill>
                 <a:latin typeface="Trenda IG Text"/>
               </a:rPr>
@@ -24275,9 +24275,9 @@
             </a:avLst>
           </a:prstGeom>
           <a:solidFill>
-            <a:srgbClr val="2B2508"/>
+            <a:srgbClr val="161616"/>
           </a:solidFill>
-          <a:ln w="12700">
+          <a:ln w="7620">
             <a:solidFill>
               <a:srgbClr val="FFD700"/>
             </a:solidFill>
@@ -24334,7 +24334,7 @@
             <a:r>
               <a:rPr sz="560" b="1" i="0">
                 <a:solidFill>
-                  <a:srgbClr val="FFFFFF"/>
+                  <a:srgbClr val="F2F2F2"/>
                 </a:solidFill>
                 <a:latin typeface="Trenda IG Text"/>
               </a:rPr>
@@ -24360,9 +24360,9 @@
             </a:avLst>
           </a:prstGeom>
           <a:noFill/>
-          <a:ln w="9525">
+          <a:ln w="6350">
             <a:solidFill>
-              <a:srgbClr val="BFBFBF"/>
+              <a:srgbClr val="6B6B6B"/>
             </a:solidFill>
           </a:ln>
           <a:effectLst/>
@@ -24413,7 +24413,7 @@
             <a:r>
               <a:rPr sz="420" b="1" i="0" spc="80">
                 <a:solidFill>
-                  <a:srgbClr val="BFBFBF"/>
+                  <a:srgbClr val="B3B3B3"/>
                 </a:solidFill>
                 <a:latin typeface="Trenda IG Text"/>
               </a:rPr>
@@ -24441,9 +24441,9 @@
           <a:solidFill>
             <a:srgbClr val="000000"/>
           </a:solidFill>
-          <a:ln w="12700">
+          <a:ln w="7620">
             <a:solidFill>
-              <a:srgbClr val="3A3A3A"/>
+              <a:srgbClr val="333333"/>
             </a:solidFill>
           </a:ln>
           <a:effectLst/>
@@ -24498,7 +24498,7 @@
             <a:r>
               <a:rPr sz="560" b="1" i="0">
                 <a:solidFill>
-                  <a:srgbClr val="FFFFFF"/>
+                  <a:srgbClr val="F2F2F2"/>
                 </a:solidFill>
                 <a:latin typeface="Trenda IG Text"/>
               </a:rPr>
@@ -24524,9 +24524,9 @@
             </a:avLst>
           </a:prstGeom>
           <a:noFill/>
-          <a:ln w="9525">
+          <a:ln w="6350">
             <a:solidFill>
-              <a:srgbClr val="56E13B"/>
+              <a:srgbClr val="4A4A4A"/>
             </a:solidFill>
           </a:ln>
           <a:effectLst/>
@@ -24577,7 +24577,7 @@
             <a:r>
               <a:rPr sz="420" b="1" i="0" spc="80">
                 <a:solidFill>
-                  <a:srgbClr val="56E13B"/>
+                  <a:srgbClr val="F2F2F2"/>
                 </a:solidFill>
                 <a:latin typeface="Trenda IG Text"/>
               </a:rPr>
@@ -24603,9 +24603,9 @@
             </a:avLst>
           </a:prstGeom>
           <a:solidFill>
-            <a:srgbClr val="2B2508"/>
+            <a:srgbClr val="161616"/>
           </a:solidFill>
-          <a:ln w="12700">
+          <a:ln w="7620">
             <a:solidFill>
               <a:srgbClr val="FFD700"/>
             </a:solidFill>
@@ -24663,7 +24663,7 @@
             <a:r>
               <a:rPr sz="560" b="1" i="0">
                 <a:solidFill>
-                  <a:srgbClr val="FFFFFF"/>
+                  <a:srgbClr val="F2F2F2"/>
                 </a:solidFill>
                 <a:latin typeface="Trenda IG Text"/>
               </a:rPr>
@@ -24689,9 +24689,9 @@
             </a:avLst>
           </a:prstGeom>
           <a:noFill/>
-          <a:ln w="9525">
+          <a:ln w="6350">
             <a:solidFill>
-              <a:srgbClr val="56E13B"/>
+              <a:srgbClr val="4A4A4A"/>
             </a:solidFill>
           </a:ln>
           <a:effectLst/>
@@ -24742,7 +24742,7 @@
             <a:r>
               <a:rPr sz="420" b="1" i="0" spc="80">
                 <a:solidFill>
-                  <a:srgbClr val="56E13B"/>
+                  <a:srgbClr val="F2F2F2"/>
                 </a:solidFill>
                 <a:latin typeface="Trenda IG Text"/>
               </a:rPr>
@@ -24770,9 +24770,9 @@
           <a:solidFill>
             <a:srgbClr val="000000"/>
           </a:solidFill>
-          <a:ln w="12700">
+          <a:ln w="7620">
             <a:solidFill>
-              <a:srgbClr val="3A3A3A"/>
+              <a:srgbClr val="333333"/>
             </a:solidFill>
           </a:ln>
           <a:effectLst/>
@@ -24827,7 +24827,7 @@
             <a:r>
               <a:rPr sz="560" b="1" i="0">
                 <a:solidFill>
-                  <a:srgbClr val="FFFFFF"/>
+                  <a:srgbClr val="F2F2F2"/>
                 </a:solidFill>
                 <a:latin typeface="Trenda IG Text"/>
               </a:rPr>
@@ -24853,9 +24853,9 @@
             </a:avLst>
           </a:prstGeom>
           <a:noFill/>
-          <a:ln w="9525">
+          <a:ln w="6350">
             <a:solidFill>
-              <a:srgbClr val="00D6F2"/>
+              <a:srgbClr val="5B8DEF"/>
             </a:solidFill>
           </a:ln>
           <a:effectLst/>
@@ -24906,7 +24906,7 @@
             <a:r>
               <a:rPr sz="420" b="1" i="0" spc="80">
                 <a:solidFill>
-                  <a:srgbClr val="00D6F2"/>
+                  <a:srgbClr val="6EA8FF"/>
                 </a:solidFill>
                 <a:latin typeface="Trenda IG Text"/>
               </a:rPr>
@@ -24934,9 +24934,9 @@
           <a:solidFill>
             <a:srgbClr val="000000"/>
           </a:solidFill>
-          <a:ln w="12700">
+          <a:ln w="7620">
             <a:solidFill>
-              <a:srgbClr val="3A3A3A"/>
+              <a:srgbClr val="333333"/>
             </a:solidFill>
           </a:ln>
           <a:effectLst/>
@@ -24991,7 +24991,7 @@
             <a:r>
               <a:rPr sz="560" b="1" i="0">
                 <a:solidFill>
-                  <a:srgbClr val="FFFFFF"/>
+                  <a:srgbClr val="F2F2F2"/>
                 </a:solidFill>
                 <a:latin typeface="Trenda IG Text"/>
               </a:rPr>
@@ -25017,9 +25017,9 @@
             </a:avLst>
           </a:prstGeom>
           <a:noFill/>
-          <a:ln w="9525">
+          <a:ln w="6350">
             <a:solidFill>
-              <a:srgbClr val="00D6F2"/>
+              <a:srgbClr val="5B8DEF"/>
             </a:solidFill>
           </a:ln>
           <a:effectLst/>
@@ -25070,7 +25070,7 @@
             <a:r>
               <a:rPr sz="420" b="1" i="0" spc="80">
                 <a:solidFill>
-                  <a:srgbClr val="00D6F2"/>
+                  <a:srgbClr val="6EA8FF"/>
                 </a:solidFill>
                 <a:latin typeface="Trenda IG Text"/>
               </a:rPr>
@@ -25098,9 +25098,9 @@
           <a:solidFill>
             <a:srgbClr val="000000"/>
           </a:solidFill>
-          <a:ln w="12700">
+          <a:ln w="7620">
             <a:solidFill>
-              <a:srgbClr val="3A3A3A"/>
+              <a:srgbClr val="333333"/>
             </a:solidFill>
           </a:ln>
           <a:effectLst/>
@@ -25155,7 +25155,7 @@
             <a:r>
               <a:rPr sz="560" b="1" i="0">
                 <a:solidFill>
-                  <a:srgbClr val="FFFFFF"/>
+                  <a:srgbClr val="F2F2F2"/>
                 </a:solidFill>
                 <a:latin typeface="Trenda IG Text"/>
               </a:rPr>
@@ -25181,9 +25181,9 @@
             </a:avLst>
           </a:prstGeom>
           <a:noFill/>
-          <a:ln w="9525">
+          <a:ln w="6350">
             <a:solidFill>
-              <a:srgbClr val="56E13B"/>
+              <a:srgbClr val="4A4A4A"/>
             </a:solidFill>
           </a:ln>
           <a:effectLst/>
@@ -25234,7 +25234,7 @@
             <a:r>
               <a:rPr sz="420" b="1" i="0" spc="80">
                 <a:solidFill>
-                  <a:srgbClr val="56E13B"/>
+                  <a:srgbClr val="F2F2F2"/>
                 </a:solidFill>
                 <a:latin typeface="Trenda IG Text"/>
               </a:rPr>
@@ -25262,9 +25262,9 @@
           <a:solidFill>
             <a:srgbClr val="000000"/>
           </a:solidFill>
-          <a:ln w="12700">
+          <a:ln w="7620">
             <a:solidFill>
-              <a:srgbClr val="8B7CD8"/>
+              <a:srgbClr val="4A4A4A"/>
             </a:solidFill>
             <a:prstDash val="dash"/>
           </a:ln>
@@ -25320,7 +25320,7 @@
             <a:r>
               <a:rPr sz="560" b="1" i="0">
                 <a:solidFill>
-                  <a:srgbClr val="FFFFFF"/>
+                  <a:srgbClr val="F2F2F2"/>
                 </a:solidFill>
                 <a:latin typeface="Trenda IG Text"/>
               </a:rPr>
@@ -25346,9 +25346,9 @@
             </a:avLst>
           </a:prstGeom>
           <a:noFill/>
-          <a:ln w="9525">
+          <a:ln w="6350">
             <a:solidFill>
-              <a:srgbClr val="8B7CD8"/>
+              <a:srgbClr val="4A4A4A"/>
             </a:solidFill>
           </a:ln>
           <a:effectLst/>
@@ -25399,7 +25399,7 @@
             <a:r>
               <a:rPr sz="420" b="1" i="0" spc="80">
                 <a:solidFill>
-                  <a:srgbClr val="8B7CD8"/>
+                  <a:srgbClr val="F2F2F2"/>
                 </a:solidFill>
                 <a:latin typeface="Trenda IG Text"/>
               </a:rPr>
@@ -25433,7 +25433,7 @@
             <a:r>
               <a:rPr sz="580" b="1" i="0">
                 <a:solidFill>
-                  <a:srgbClr val="8B7CD8"/>
+                  <a:srgbClr val="F2F2F2"/>
                 </a:solidFill>
                 <a:latin typeface="Trenda IG Text"/>
               </a:rPr>
@@ -25442,7 +25442,7 @@
             <a:r>
               <a:rPr sz="580" b="0" i="0">
                 <a:solidFill>
-                  <a:srgbClr val="BFBFBF"/>
+                  <a:srgbClr val="B3B3B3"/>
                 </a:solidFill>
                 <a:latin typeface="Trenda IG Text"/>
               </a:rPr>
@@ -25470,9 +25470,9 @@
           <a:solidFill>
             <a:srgbClr val="141414"/>
           </a:solidFill>
-          <a:ln w="9525">
+          <a:ln w="6350">
             <a:solidFill>
-              <a:srgbClr val="3A3A3A"/>
+              <a:srgbClr val="333333"/>
             </a:solidFill>
           </a:ln>
           <a:effectLst/>
@@ -25690,7 +25690,7 @@
             <a:avLst/>
           </a:prstGeom>
           <a:solidFill>
-            <a:srgbClr val="FF0069"/>
+            <a:srgbClr val="2B2B2B"/>
           </a:solidFill>
           <a:ln>
             <a:noFill/>
@@ -25742,7 +25742,7 @@
             <a:r>
               <a:rPr sz="660" b="1" i="0">
                 <a:solidFill>
-                  <a:srgbClr val="FF0069"/>
+                  <a:srgbClr val="F2F2F2"/>
                 </a:solidFill>
                 <a:latin typeface="Trenda IG Text"/>
               </a:rPr>
@@ -25776,7 +25776,7 @@
             <a:r>
               <a:rPr sz="580" b="0" i="0">
                 <a:solidFill>
-                  <a:srgbClr val="FFFFFF"/>
+                  <a:srgbClr val="F2F2F2"/>
                 </a:solidFill>
                 <a:latin typeface="Trenda IG Text"/>
               </a:rPr>
@@ -25810,7 +25810,7 @@
             <a:r>
               <a:rPr sz="580" b="0" i="0">
                 <a:solidFill>
-                  <a:srgbClr val="BFBFBF"/>
+                  <a:srgbClr val="B3B3B3"/>
                 </a:solidFill>
                 <a:latin typeface="Trenda IG Text"/>
               </a:rPr>
@@ -25876,7 +25876,7 @@
             <a:avLst/>
           </a:prstGeom>
           <a:solidFill>
-            <a:srgbClr val="FA8B35"/>
+            <a:srgbClr val="2B2B2B"/>
           </a:solidFill>
           <a:ln>
             <a:noFill/>
@@ -25928,7 +25928,7 @@
             <a:r>
               <a:rPr sz="660" b="1" i="0">
                 <a:solidFill>
-                  <a:srgbClr val="FA8B35"/>
+                  <a:srgbClr val="F2F2F2"/>
                 </a:solidFill>
                 <a:latin typeface="Trenda IG Text"/>
               </a:rPr>
@@ -25962,7 +25962,7 @@
             <a:r>
               <a:rPr sz="580" b="0" i="0">
                 <a:solidFill>
-                  <a:srgbClr val="FFFFFF"/>
+                  <a:srgbClr val="F2F2F2"/>
                 </a:solidFill>
                 <a:latin typeface="Trenda IG Text"/>
               </a:rPr>
@@ -25996,7 +25996,7 @@
             <a:r>
               <a:rPr sz="580" b="0" i="0">
                 <a:solidFill>
-                  <a:srgbClr val="BFBFBF"/>
+                  <a:srgbClr val="B3B3B3"/>
                 </a:solidFill>
                 <a:latin typeface="Trenda IG Text"/>
               </a:rPr>
@@ -26062,7 +26062,7 @@
             <a:avLst/>
           </a:prstGeom>
           <a:solidFill>
-            <a:srgbClr val="56E13B"/>
+            <a:srgbClr val="2B2B2B"/>
           </a:solidFill>
           <a:ln>
             <a:noFill/>
@@ -26114,7 +26114,7 @@
             <a:r>
               <a:rPr sz="660" b="1" i="0">
                 <a:solidFill>
-                  <a:srgbClr val="56E13B"/>
+                  <a:srgbClr val="F2F2F2"/>
                 </a:solidFill>
                 <a:latin typeface="Trenda IG Text"/>
               </a:rPr>
@@ -26148,7 +26148,7 @@
             <a:r>
               <a:rPr sz="580" b="0" i="0">
                 <a:solidFill>
-                  <a:srgbClr val="FFFFFF"/>
+                  <a:srgbClr val="F2F2F2"/>
                 </a:solidFill>
                 <a:latin typeface="Trenda IG Text"/>
               </a:rPr>
@@ -26182,7 +26182,7 @@
             <a:r>
               <a:rPr sz="580" b="0" i="0">
                 <a:solidFill>
-                  <a:srgbClr val="BFBFBF"/>
+                  <a:srgbClr val="B3B3B3"/>
                 </a:solidFill>
                 <a:latin typeface="Trenda IG Text"/>
               </a:rPr>
@@ -26216,7 +26216,7 @@
             <a:r>
               <a:rPr sz="600" b="0" i="0">
                 <a:solidFill>
-                  <a:srgbClr val="FFFFFF"/>
+                  <a:srgbClr val="F2F2F2"/>
                 </a:solidFill>
                 <a:latin typeface="Trenda IG Text"/>
               </a:rPr>
@@ -26259,7 +26259,7 @@
             <a:r>
               <a:rPr sz="640" b="1" i="0" spc="120">
                 <a:solidFill>
-                  <a:srgbClr val="8B7CD8"/>
+                  <a:srgbClr val="F2F2F2"/>
                 </a:solidFill>
                 <a:latin typeface="Trenda IG Text"/>
               </a:rPr>
@@ -26268,7 +26268,7 @@
             <a:r>
               <a:rPr sz="640" b="0" i="0">
                 <a:solidFill>
-                  <a:srgbClr val="BFBFBF"/>
+                  <a:srgbClr val="B3B3B3"/>
                 </a:solidFill>
                 <a:latin typeface="Trenda IG Text"/>
               </a:rPr>
@@ -26285,23 +26285,71 @@
         </p:nvSpPr>
         <p:spPr>
           <a:xfrm>
-            <a:off x="411480" y="4187952"/>
-            <a:ext cx="2759202" cy="1536192"/>
+            <a:off x="393192" y="4169664"/>
+            <a:ext cx="2795778" cy="1572768"/>
           </a:xfrm>
           <a:prstGeom prst="roundRect">
             <a:avLst>
               <a:gd name="adj" fmla="val 5000"/>
             </a:avLst>
           </a:prstGeom>
+          <a:gradFill rotWithShape="1">
+            <a:gsLst>
+              <a:gs pos="0">
+                <a:srgbClr val="FFD700"/>
+              </a:gs>
+              <a:gs pos="50000">
+                <a:srgbClr val="FF0069"/>
+              </a:gs>
+              <a:gs pos="100000">
+                <a:srgbClr val="00D6F2"/>
+              </a:gs>
+            </a:gsLst>
+            <a:lin ang="0" scaled="0"/>
+          </a:gradFill>
+          <a:effectLst/>
+          <a:ln>
+            <a:noFill/>
+          </a:ln>
+        </p:spPr>
+        <p:style>
+          <a:lnRef idx="1">
+            <a:schemeClr val="accent1"/>
+          </a:lnRef>
+          <a:fillRef idx="3">
+            <a:schemeClr val="accent1"/>
+          </a:fillRef>
+          <a:effectRef idx="2">
+            <a:schemeClr val="accent1"/>
+          </a:effectRef>
+          <a:fontRef idx="minor">
+            <a:schemeClr val="lt1"/>
+          </a:fontRef>
+        </p:style>
+      </p:sp>
+      <p:sp>
+        <p:nvSpPr>
+          <p:cNvPr id="98" name="Shape 93"/>
+          <p:cNvSpPr/>
+          <p:nvPr/>
+        </p:nvSpPr>
+        <p:spPr>
+          <a:xfrm>
+            <a:off x="411480" y="4187952"/>
+            <a:ext cx="2759202" cy="1536192"/>
+          </a:xfrm>
+          <a:prstGeom prst="roundRect">
+            <a:avLst>
+              <a:gd name="adj" fmla="val 5000"/>
+            </a:avLst>
+          </a:prstGeom>
           <a:solidFill>
             <a:srgbClr val="141414"/>
           </a:solidFill>
-          <a:ln w="12700">
-            <a:solidFill>
-              <a:srgbClr val="FFD700"/>
-            </a:solidFill>
-          </a:ln>
           <a:effectLst/>
+          <a:ln>
+            <a:noFill/>
+          </a:ln>
         </p:spPr>
         <p:style>
           <a:lnRef idx="1">
@@ -26338,7 +26386,7 @@
             <a:avLst/>
           </a:prstGeom>
           <a:solidFill>
-            <a:srgbClr val="FFD700"/>
+            <a:srgbClr val="2B2B2B"/>
           </a:solidFill>
           <a:ln>
             <a:noFill/>
@@ -26390,7 +26438,7 @@
             <a:r>
               <a:rPr sz="720" b="1" i="0">
                 <a:solidFill>
-                  <a:srgbClr val="000000"/>
+                  <a:srgbClr val="F2F2F2"/>
                 </a:solidFill>
                 <a:latin typeface="Trenda IG Text"/>
               </a:rPr>
@@ -26399,7 +26447,7 @@
             <a:r>
               <a:rPr sz="720" b="1" i="0">
                 <a:solidFill>
-                  <a:srgbClr val="000000"/>
+                  <a:srgbClr val="F2F2F2"/>
                 </a:solidFill>
                 <a:latin typeface="Trenda IG Text"/>
               </a:rPr>
@@ -26425,9 +26473,9 @@
             </a:avLst>
           </a:prstGeom>
           <a:noFill/>
-          <a:ln w="9525">
+          <a:ln w="6350">
             <a:solidFill>
-              <a:srgbClr val="000000"/>
+              <a:srgbClr val="8C8C8C"/>
             </a:solidFill>
           </a:ln>
           <a:effectLst/>
@@ -26478,7 +26526,7 @@
             <a:r>
               <a:rPr sz="459" b="1" i="0" spc="80">
                 <a:solidFill>
-                  <a:srgbClr val="000000"/>
+                  <a:srgbClr val="F2F2F2"/>
                 </a:solidFill>
                 <a:latin typeface="Trenda IG Text"/>
               </a:rPr>
@@ -26512,7 +26560,7 @@
             <a:r>
               <a:rPr sz="580" b="1" i="0">
                 <a:solidFill>
-                  <a:srgbClr val="FFFFFF"/>
+                  <a:srgbClr val="F2F2F2"/>
                 </a:solidFill>
                 <a:latin typeface="Trenda IG Text"/>
               </a:rPr>
@@ -26521,7 +26569,7 @@
             <a:r>
               <a:rPr sz="580" b="0" i="0">
                 <a:solidFill>
-                  <a:srgbClr val="BFBFBF"/>
+                  <a:srgbClr val="B3B3B3"/>
                 </a:solidFill>
                 <a:latin typeface="Trenda IG Text"/>
               </a:rPr>
@@ -26545,7 +26593,7 @@
             <a:avLst/>
           </a:prstGeom>
           <a:solidFill>
-            <a:srgbClr val="FFD700"/>
+            <a:srgbClr val="2B2B2B"/>
           </a:solidFill>
           <a:ln>
             <a:noFill/>
@@ -26597,7 +26645,7 @@
             <a:r>
               <a:rPr sz="570" b="0" i="0">
                 <a:solidFill>
-                  <a:srgbClr val="FFFFFF"/>
+                  <a:srgbClr val="F2F2F2"/>
                 </a:solidFill>
                 <a:latin typeface="Trenda IG Text"/>
               </a:rPr>
@@ -26621,7 +26669,7 @@
             <a:avLst/>
           </a:prstGeom>
           <a:solidFill>
-            <a:srgbClr val="FFD700"/>
+            <a:srgbClr val="2B2B2B"/>
           </a:solidFill>
           <a:ln>
             <a:noFill/>
@@ -26673,7 +26721,7 @@
             <a:r>
               <a:rPr sz="570" b="0" i="0">
                 <a:solidFill>
-                  <a:srgbClr val="FFFFFF"/>
+                  <a:srgbClr val="F2F2F2"/>
                 </a:solidFill>
                 <a:latin typeface="Trenda IG Text"/>
               </a:rPr>
@@ -26697,7 +26745,7 @@
             <a:avLst/>
           </a:prstGeom>
           <a:solidFill>
-            <a:srgbClr val="FFD700"/>
+            <a:srgbClr val="2B2B2B"/>
           </a:solidFill>
           <a:ln>
             <a:noFill/>
@@ -26749,7 +26797,7 @@
             <a:r>
               <a:rPr sz="570" b="0" i="0">
                 <a:solidFill>
-                  <a:srgbClr val="FFFFFF"/>
+                  <a:srgbClr val="F2F2F2"/>
                 </a:solidFill>
                 <a:latin typeface="Trenda IG Text"/>
               </a:rPr>
@@ -26766,23 +26814,71 @@
         </p:nvSpPr>
         <p:spPr>
           <a:xfrm>
-            <a:off x="3280410" y="4187952"/>
-            <a:ext cx="2759202" cy="1536192"/>
+            <a:off x="3262122" y="4169664"/>
+            <a:ext cx="2795778" cy="1572768"/>
           </a:xfrm>
           <a:prstGeom prst="roundRect">
             <a:avLst>
               <a:gd name="adj" fmla="val 5000"/>
             </a:avLst>
           </a:prstGeom>
+          <a:gradFill rotWithShape="1">
+            <a:gsLst>
+              <a:gs pos="0">
+                <a:srgbClr val="FFD700"/>
+              </a:gs>
+              <a:gs pos="50000">
+                <a:srgbClr val="FF0069"/>
+              </a:gs>
+              <a:gs pos="100000">
+                <a:srgbClr val="00D6F2"/>
+              </a:gs>
+            </a:gsLst>
+            <a:lin ang="0" scaled="0"/>
+          </a:gradFill>
+          <a:effectLst/>
+          <a:ln>
+            <a:noFill/>
+          </a:ln>
+        </p:spPr>
+        <p:style>
+          <a:lnRef idx="1">
+            <a:schemeClr val="accent1"/>
+          </a:lnRef>
+          <a:fillRef idx="3">
+            <a:schemeClr val="accent1"/>
+          </a:fillRef>
+          <a:effectRef idx="2">
+            <a:schemeClr val="accent1"/>
+          </a:effectRef>
+          <a:fontRef idx="minor">
+            <a:schemeClr val="lt1"/>
+          </a:fontRef>
+        </p:style>
+      </p:sp>
+      <p:sp>
+        <p:nvSpPr>
+          <p:cNvPr id="110" name="Shape 105"/>
+          <p:cNvSpPr/>
+          <p:nvPr/>
+        </p:nvSpPr>
+        <p:spPr>
+          <a:xfrm>
+            <a:off x="3280410" y="4187952"/>
+            <a:ext cx="2759202" cy="1536192"/>
+          </a:xfrm>
+          <a:prstGeom prst="roundRect">
+            <a:avLst>
+              <a:gd name="adj" fmla="val 5000"/>
+            </a:avLst>
+          </a:prstGeom>
           <a:solidFill>
             <a:srgbClr val="141414"/>
           </a:solidFill>
-          <a:ln w="12700">
-            <a:solidFill>
-              <a:srgbClr val="FF0069"/>
-            </a:solidFill>
-          </a:ln>
           <a:effectLst/>
+          <a:ln>
+            <a:noFill/>
+          </a:ln>
         </p:spPr>
         <p:style>
           <a:lnRef idx="1">
@@ -26819,7 +26915,7 @@
             <a:avLst/>
           </a:prstGeom>
           <a:solidFill>
-            <a:srgbClr val="FF0069"/>
+            <a:srgbClr val="2B2B2B"/>
           </a:solidFill>
           <a:ln>
             <a:noFill/>
@@ -26871,7 +26967,7 @@
             <a:r>
               <a:rPr sz="720" b="1" i="0">
                 <a:solidFill>
-                  <a:srgbClr val="FFFFFE"/>
+                  <a:srgbClr val="F2F2F2"/>
                 </a:solidFill>
                 <a:latin typeface="Trenda IG Text"/>
               </a:rPr>
@@ -26880,7 +26976,7 @@
             <a:r>
               <a:rPr sz="720" b="1" i="0">
                 <a:solidFill>
-                  <a:srgbClr val="FFFFFE"/>
+                  <a:srgbClr val="F2F2F2"/>
                 </a:solidFill>
                 <a:latin typeface="Trenda IG Text"/>
               </a:rPr>
@@ -26906,7 +27002,7 @@
             </a:avLst>
           </a:prstGeom>
           <a:noFill/>
-          <a:ln w="9525">
+          <a:ln w="6350">
             <a:solidFill>
               <a:srgbClr val="FFFFFE"/>
             </a:solidFill>
@@ -26959,7 +27055,7 @@
             <a:r>
               <a:rPr sz="459" b="1" i="0" spc="80">
                 <a:solidFill>
-                  <a:srgbClr val="FFFFFE"/>
+                  <a:srgbClr val="F2F2F2"/>
                 </a:solidFill>
                 <a:latin typeface="Trenda IG Text"/>
               </a:rPr>
@@ -26993,7 +27089,7 @@
             <a:r>
               <a:rPr sz="580" b="1" i="0">
                 <a:solidFill>
-                  <a:srgbClr val="FFFFFF"/>
+                  <a:srgbClr val="F2F2F2"/>
                 </a:solidFill>
                 <a:latin typeface="Trenda IG Text"/>
               </a:rPr>
@@ -27002,7 +27098,7 @@
             <a:r>
               <a:rPr sz="580" b="0" i="0">
                 <a:solidFill>
-                  <a:srgbClr val="BFBFBF"/>
+                  <a:srgbClr val="B3B3B3"/>
                 </a:solidFill>
                 <a:latin typeface="Trenda IG Text"/>
               </a:rPr>
@@ -27026,7 +27122,7 @@
             <a:avLst/>
           </a:prstGeom>
           <a:solidFill>
-            <a:srgbClr val="FF0069"/>
+            <a:srgbClr val="2B2B2B"/>
           </a:solidFill>
           <a:ln>
             <a:noFill/>
@@ -27078,7 +27174,7 @@
             <a:r>
               <a:rPr sz="570" b="0" i="0">
                 <a:solidFill>
-                  <a:srgbClr val="FFFFFF"/>
+                  <a:srgbClr val="F2F2F2"/>
                 </a:solidFill>
                 <a:latin typeface="Trenda IG Text"/>
               </a:rPr>
@@ -27102,7 +27198,7 @@
             <a:avLst/>
           </a:prstGeom>
           <a:solidFill>
-            <a:srgbClr val="FF0069"/>
+            <a:srgbClr val="2B2B2B"/>
           </a:solidFill>
           <a:ln>
             <a:noFill/>
@@ -27154,7 +27250,7 @@
             <a:r>
               <a:rPr sz="570" b="0" i="0">
                 <a:solidFill>
-                  <a:srgbClr val="FFFFFF"/>
+                  <a:srgbClr val="F2F2F2"/>
                 </a:solidFill>
                 <a:latin typeface="Trenda IG Text"/>
               </a:rPr>
@@ -27178,7 +27274,7 @@
             <a:avLst/>
           </a:prstGeom>
           <a:solidFill>
-            <a:srgbClr val="FF0069"/>
+            <a:srgbClr val="2B2B2B"/>
           </a:solidFill>
           <a:ln>
             <a:noFill/>
@@ -27230,7 +27326,7 @@
             <a:r>
               <a:rPr sz="570" b="0" i="0">
                 <a:solidFill>
-                  <a:srgbClr val="FFFFFF"/>
+                  <a:srgbClr val="F2F2F2"/>
                 </a:solidFill>
                 <a:latin typeface="Trenda IG Text"/>
               </a:rPr>
@@ -27247,23 +27343,71 @@
         </p:nvSpPr>
         <p:spPr>
           <a:xfrm>
-            <a:off x="6149340" y="4187952"/>
-            <a:ext cx="2759202" cy="1536192"/>
+            <a:off x="6131052" y="4169664"/>
+            <a:ext cx="2795778" cy="1572768"/>
           </a:xfrm>
           <a:prstGeom prst="roundRect">
             <a:avLst>
               <a:gd name="adj" fmla="val 5000"/>
             </a:avLst>
           </a:prstGeom>
+          <a:gradFill rotWithShape="1">
+            <a:gsLst>
+              <a:gs pos="0">
+                <a:srgbClr val="FFD700"/>
+              </a:gs>
+              <a:gs pos="50000">
+                <a:srgbClr val="FF0069"/>
+              </a:gs>
+              <a:gs pos="100000">
+                <a:srgbClr val="00D6F2"/>
+              </a:gs>
+            </a:gsLst>
+            <a:lin ang="0" scaled="0"/>
+          </a:gradFill>
+          <a:effectLst/>
+          <a:ln>
+            <a:noFill/>
+          </a:ln>
+        </p:spPr>
+        <p:style>
+          <a:lnRef idx="1">
+            <a:schemeClr val="accent1"/>
+          </a:lnRef>
+          <a:fillRef idx="3">
+            <a:schemeClr val="accent1"/>
+          </a:fillRef>
+          <a:effectRef idx="2">
+            <a:schemeClr val="accent1"/>
+          </a:effectRef>
+          <a:fontRef idx="minor">
+            <a:schemeClr val="lt1"/>
+          </a:fontRef>
+        </p:style>
+      </p:sp>
+      <p:sp>
+        <p:nvSpPr>
+          <p:cNvPr id="122" name="Shape 117"/>
+          <p:cNvSpPr/>
+          <p:nvPr/>
+        </p:nvSpPr>
+        <p:spPr>
+          <a:xfrm>
+            <a:off x="6149340" y="4187952"/>
+            <a:ext cx="2759202" cy="1536192"/>
+          </a:xfrm>
+          <a:prstGeom prst="roundRect">
+            <a:avLst>
+              <a:gd name="adj" fmla="val 5000"/>
+            </a:avLst>
+          </a:prstGeom>
           <a:solidFill>
             <a:srgbClr val="141414"/>
           </a:solidFill>
-          <a:ln w="12700">
-            <a:solidFill>
-              <a:srgbClr val="00D6F2"/>
-            </a:solidFill>
-          </a:ln>
           <a:effectLst/>
+          <a:ln>
+            <a:noFill/>
+          </a:ln>
         </p:spPr>
         <p:style>
           <a:lnRef idx="1">
@@ -27300,7 +27444,7 @@
             <a:avLst/>
           </a:prstGeom>
           <a:solidFill>
-            <a:srgbClr val="00D6F2"/>
+            <a:srgbClr val="2B2B2B"/>
           </a:solidFill>
           <a:ln>
             <a:noFill/>
@@ -27352,7 +27496,7 @@
             <a:r>
               <a:rPr sz="720" b="1" i="0">
                 <a:solidFill>
-                  <a:srgbClr val="000000"/>
+                  <a:srgbClr val="F2F2F2"/>
                 </a:solidFill>
                 <a:latin typeface="Trenda IG Text"/>
               </a:rPr>
@@ -27361,7 +27505,7 @@
             <a:r>
               <a:rPr sz="720" b="1" i="0">
                 <a:solidFill>
-                  <a:srgbClr val="000000"/>
+                  <a:srgbClr val="F2F2F2"/>
                 </a:solidFill>
                 <a:latin typeface="Trenda IG Text"/>
               </a:rPr>
@@ -27387,9 +27531,9 @@
             </a:avLst>
           </a:prstGeom>
           <a:noFill/>
-          <a:ln w="9525">
+          <a:ln w="6350">
             <a:solidFill>
-              <a:srgbClr val="000000"/>
+              <a:srgbClr val="8C8C8C"/>
             </a:solidFill>
           </a:ln>
           <a:effectLst/>
@@ -27440,7 +27584,7 @@
             <a:r>
               <a:rPr sz="459" b="1" i="0" spc="80">
                 <a:solidFill>
-                  <a:srgbClr val="000000"/>
+                  <a:srgbClr val="F2F2F2"/>
                 </a:solidFill>
                 <a:latin typeface="Trenda IG Text"/>
               </a:rPr>
@@ -27474,7 +27618,7 @@
             <a:r>
               <a:rPr sz="580" b="1" i="0">
                 <a:solidFill>
-                  <a:srgbClr val="FFFFFF"/>
+                  <a:srgbClr val="F2F2F2"/>
                 </a:solidFill>
                 <a:latin typeface="Trenda IG Text"/>
               </a:rPr>
@@ -27483,7 +27627,7 @@
             <a:r>
               <a:rPr sz="580" b="0" i="0">
                 <a:solidFill>
-                  <a:srgbClr val="BFBFBF"/>
+                  <a:srgbClr val="B3B3B3"/>
                 </a:solidFill>
                 <a:latin typeface="Trenda IG Text"/>
               </a:rPr>
@@ -27507,7 +27651,7 @@
             <a:avLst/>
           </a:prstGeom>
           <a:solidFill>
-            <a:srgbClr val="00D6F2"/>
+            <a:srgbClr val="2B2B2B"/>
           </a:solidFill>
           <a:ln>
             <a:noFill/>
@@ -27559,7 +27703,7 @@
             <a:r>
               <a:rPr sz="570" b="0" i="0">
                 <a:solidFill>
-                  <a:srgbClr val="FFFFFF"/>
+                  <a:srgbClr val="F2F2F2"/>
                 </a:solidFill>
                 <a:latin typeface="Trenda IG Text"/>
               </a:rPr>
@@ -27583,7 +27727,7 @@
             <a:avLst/>
           </a:prstGeom>
           <a:solidFill>
-            <a:srgbClr val="00D6F2"/>
+            <a:srgbClr val="2B2B2B"/>
           </a:solidFill>
           <a:ln>
             <a:noFill/>
@@ -27635,7 +27779,7 @@
             <a:r>
               <a:rPr sz="570" b="0" i="0">
                 <a:solidFill>
-                  <a:srgbClr val="FFFFFF"/>
+                  <a:srgbClr val="F2F2F2"/>
                 </a:solidFill>
                 <a:latin typeface="Trenda IG Text"/>
               </a:rPr>
@@ -27659,7 +27803,7 @@
             <a:avLst/>
           </a:prstGeom>
           <a:solidFill>
-            <a:srgbClr val="00D6F2"/>
+            <a:srgbClr val="2B2B2B"/>
           </a:solidFill>
           <a:ln>
             <a:noFill/>
@@ -27711,7 +27855,7 @@
             <a:r>
               <a:rPr sz="570" b="0" i="0">
                 <a:solidFill>
-                  <a:srgbClr val="FFFFFF"/>
+                  <a:srgbClr val="F2F2F2"/>
                 </a:solidFill>
                 <a:latin typeface="Trenda IG Text"/>
               </a:rPr>
@@ -27728,23 +27872,71 @@
         </p:nvSpPr>
         <p:spPr>
           <a:xfrm>
-            <a:off x="9018270" y="4187952"/>
-            <a:ext cx="2759202" cy="1536192"/>
+            <a:off x="8999982" y="4169664"/>
+            <a:ext cx="2795778" cy="1572768"/>
           </a:xfrm>
           <a:prstGeom prst="roundRect">
             <a:avLst>
               <a:gd name="adj" fmla="val 5000"/>
             </a:avLst>
           </a:prstGeom>
+          <a:gradFill rotWithShape="1">
+            <a:gsLst>
+              <a:gs pos="0">
+                <a:srgbClr val="FFD700"/>
+              </a:gs>
+              <a:gs pos="50000">
+                <a:srgbClr val="FF0069"/>
+              </a:gs>
+              <a:gs pos="100000">
+                <a:srgbClr val="00D6F2"/>
+              </a:gs>
+            </a:gsLst>
+            <a:lin ang="0" scaled="0"/>
+          </a:gradFill>
+          <a:effectLst/>
+          <a:ln>
+            <a:noFill/>
+          </a:ln>
+        </p:spPr>
+        <p:style>
+          <a:lnRef idx="1">
+            <a:schemeClr val="accent1"/>
+          </a:lnRef>
+          <a:fillRef idx="3">
+            <a:schemeClr val="accent1"/>
+          </a:fillRef>
+          <a:effectRef idx="2">
+            <a:schemeClr val="accent1"/>
+          </a:effectRef>
+          <a:fontRef idx="minor">
+            <a:schemeClr val="lt1"/>
+          </a:fontRef>
+        </p:style>
+      </p:sp>
+      <p:sp>
+        <p:nvSpPr>
+          <p:cNvPr id="134" name="Shape 129"/>
+          <p:cNvSpPr/>
+          <p:nvPr/>
+        </p:nvSpPr>
+        <p:spPr>
+          <a:xfrm>
+            <a:off x="9018270" y="4187952"/>
+            <a:ext cx="2759202" cy="1536192"/>
+          </a:xfrm>
+          <a:prstGeom prst="roundRect">
+            <a:avLst>
+              <a:gd name="adj" fmla="val 5000"/>
+            </a:avLst>
+          </a:prstGeom>
           <a:solidFill>
             <a:srgbClr val="141414"/>
           </a:solidFill>
-          <a:ln w="12700">
-            <a:solidFill>
-              <a:srgbClr val="56E13B"/>
-            </a:solidFill>
-          </a:ln>
           <a:effectLst/>
+          <a:ln>
+            <a:noFill/>
+          </a:ln>
         </p:spPr>
         <p:style>
           <a:lnRef idx="1">
@@ -27781,7 +27973,7 @@
             <a:avLst/>
           </a:prstGeom>
           <a:solidFill>
-            <a:srgbClr val="56E13B"/>
+            <a:srgbClr val="2B2B2B"/>
           </a:solidFill>
           <a:ln>
             <a:noFill/>
@@ -27833,7 +28025,7 @@
             <a:r>
               <a:rPr sz="720" b="1" i="0">
                 <a:solidFill>
-                  <a:srgbClr val="000000"/>
+                  <a:srgbClr val="F2F2F2"/>
                 </a:solidFill>
                 <a:latin typeface="Trenda IG Text"/>
               </a:rPr>
@@ -27842,7 +28034,7 @@
             <a:r>
               <a:rPr sz="720" b="1" i="0">
                 <a:solidFill>
-                  <a:srgbClr val="000000"/>
+                  <a:srgbClr val="F2F2F2"/>
                 </a:solidFill>
                 <a:latin typeface="Trenda IG Text"/>
               </a:rPr>
@@ -27868,9 +28060,9 @@
             </a:avLst>
           </a:prstGeom>
           <a:noFill/>
-          <a:ln w="9525">
+          <a:ln w="6350">
             <a:solidFill>
-              <a:srgbClr val="000000"/>
+              <a:srgbClr val="8C8C8C"/>
             </a:solidFill>
           </a:ln>
           <a:effectLst/>
@@ -27921,7 +28113,7 @@
             <a:r>
               <a:rPr sz="459" b="1" i="0" spc="80">
                 <a:solidFill>
-                  <a:srgbClr val="000000"/>
+                  <a:srgbClr val="F2F2F2"/>
                 </a:solidFill>
                 <a:latin typeface="Trenda IG Text"/>
               </a:rPr>
@@ -27955,7 +28147,7 @@
             <a:r>
               <a:rPr sz="580" b="1" i="0">
                 <a:solidFill>
-                  <a:srgbClr val="FFFFFF"/>
+                  <a:srgbClr val="F2F2F2"/>
                 </a:solidFill>
                 <a:latin typeface="Trenda IG Text"/>
               </a:rPr>
@@ -27964,7 +28156,7 @@
             <a:r>
               <a:rPr sz="580" b="0" i="0">
                 <a:solidFill>
-                  <a:srgbClr val="BFBFBF"/>
+                  <a:srgbClr val="B3B3B3"/>
                 </a:solidFill>
                 <a:latin typeface="Trenda IG Text"/>
               </a:rPr>
@@ -27988,7 +28180,7 @@
             <a:avLst/>
           </a:prstGeom>
           <a:solidFill>
-            <a:srgbClr val="56E13B"/>
+            <a:srgbClr val="2B2B2B"/>
           </a:solidFill>
           <a:ln>
             <a:noFill/>
@@ -28040,7 +28232,7 @@
             <a:r>
               <a:rPr sz="570" b="0" i="0">
                 <a:solidFill>
-                  <a:srgbClr val="FFFFFF"/>
+                  <a:srgbClr val="F2F2F2"/>
                 </a:solidFill>
                 <a:latin typeface="Trenda IG Text"/>
               </a:rPr>
@@ -28064,7 +28256,7 @@
             <a:avLst/>
           </a:prstGeom>
           <a:solidFill>
-            <a:srgbClr val="56E13B"/>
+            <a:srgbClr val="2B2B2B"/>
           </a:solidFill>
           <a:ln>
             <a:noFill/>
@@ -28116,7 +28308,7 @@
             <a:r>
               <a:rPr sz="570" b="0" i="0">
                 <a:solidFill>
-                  <a:srgbClr val="FFFFFF"/>
+                  <a:srgbClr val="F2F2F2"/>
                 </a:solidFill>
                 <a:latin typeface="Trenda IG Text"/>
               </a:rPr>
@@ -28140,7 +28332,7 @@
             <a:avLst/>
           </a:prstGeom>
           <a:solidFill>
-            <a:srgbClr val="56E13B"/>
+            <a:srgbClr val="2B2B2B"/>
           </a:solidFill>
           <a:ln>
             <a:noFill/>
@@ -28192,7 +28384,7 @@
             <a:r>
               <a:rPr sz="570" b="0" i="0">
                 <a:solidFill>
-                  <a:srgbClr val="FFFFFF"/>
+                  <a:srgbClr val="F2F2F2"/>
                 </a:solidFill>
                 <a:latin typeface="Trenda IG Text"/>
               </a:rPr>
@@ -28218,11 +28410,11 @@
             </a:avLst>
           </a:prstGeom>
           <a:solidFill>
-            <a:srgbClr val="0E2A08"/>
+            <a:srgbClr val="161616"/>
           </a:solidFill>
-          <a:ln w="11430">
+          <a:ln w="6858">
             <a:solidFill>
-              <a:srgbClr val="56E13B"/>
+              <a:srgbClr val="4A4A4A"/>
             </a:solidFill>
           </a:ln>
           <a:effectLst/>
@@ -28272,7 +28464,7 @@
             <a:r>
               <a:rPr sz="590" b="1" i="0" spc="100">
                 <a:solidFill>
-                  <a:srgbClr val="56E13B"/>
+                  <a:srgbClr val="F2F2F2"/>
                 </a:solidFill>
                 <a:latin typeface="Trenda IG Text"/>
               </a:rPr>
@@ -28281,7 +28473,7 @@
             <a:r>
               <a:rPr sz="590" b="0" i="0">
                 <a:solidFill>
-                  <a:srgbClr val="FFFFFF"/>
+                  <a:srgbClr val="F2F2F2"/>
                 </a:solidFill>
                 <a:latin typeface="Trenda IG Text"/>
               </a:rPr>
@@ -28290,7 +28482,7 @@
             <a:r>
               <a:rPr sz="590" b="1" i="0">
                 <a:solidFill>
-                  <a:srgbClr val="FFFFFF"/>
+                  <a:srgbClr val="F2F2F2"/>
                 </a:solidFill>
                 <a:latin typeface="Trenda IG Text"/>
               </a:rPr>
@@ -36560,7 +36752,7 @@
     <p:bg>
       <p:bgPr>
         <a:solidFill>
-          <a:srgbClr val="FFFFFF"/>
+          <a:srgbClr val="000000"/>
         </a:solidFill>
         <a:effectLst/>
       </p:bgPr>
@@ -36597,7 +36789,7 @@
             <a:r>
               <a:rPr sz="800" b="1" i="0" spc="300">
                 <a:solidFill>
-                  <a:srgbClr val="0089A0"/>
+                  <a:srgbClr val="F2F2F2"/>
                 </a:solidFill>
                 <a:latin typeface="Trenda IG Text"/>
               </a:rPr>
@@ -36631,7 +36823,7 @@
             <a:r>
               <a:rPr sz="2200" b="1" i="0">
                 <a:solidFill>
-                  <a:srgbClr val="1A1A1A"/>
+                  <a:srgbClr val="F2F2F2"/>
                 </a:solidFill>
                 <a:latin typeface="Trenda IG Text"/>
               </a:rPr>
@@ -36665,7 +36857,7 @@
             <a:r>
               <a:rPr sz="1050" b="0" i="0">
                 <a:solidFill>
-                  <a:srgbClr val="4D4D4D"/>
+                  <a:srgbClr val="B3B3B3"/>
                 </a:solidFill>
                 <a:latin typeface="Trenda IG Text"/>
               </a:rPr>
@@ -36689,7 +36881,7 @@
             <a:avLst/>
           </a:prstGeom>
           <a:solidFill>
-            <a:srgbClr val="00D6F2"/>
+            <a:srgbClr val="2B2B2B"/>
           </a:solidFill>
           <a:ln>
             <a:noFill/>
@@ -36741,7 +36933,7 @@
             <a:r>
               <a:rPr sz="620" b="1" i="0">
                 <a:solidFill>
-                  <a:srgbClr val="000000"/>
+                  <a:srgbClr val="F2F2F2"/>
                 </a:solidFill>
                 <a:latin typeface="Trenda IG Text"/>
               </a:rPr>
@@ -36750,7 +36942,7 @@
             <a:r>
               <a:rPr sz="620" b="1" i="0">
                 <a:solidFill>
-                  <a:srgbClr val="000000"/>
+                  <a:srgbClr val="F2F2F2"/>
                 </a:solidFill>
                 <a:latin typeface="Trenda IG Text"/>
               </a:rPr>
@@ -36776,11 +36968,11 @@
             </a:avLst>
           </a:prstGeom>
           <a:solidFill>
-            <a:srgbClr val="F7F7F7"/>
+            <a:srgbClr val="141414"/>
           </a:solidFill>
-          <a:ln w="12700">
+          <a:ln w="7620">
             <a:solidFill>
-              <a:srgbClr val="00D6F2"/>
+              <a:srgbClr val="4A4A4A"/>
             </a:solidFill>
           </a:ln>
           <a:effectLst/>
@@ -36830,7 +37022,7 @@
             <a:r>
               <a:rPr sz="480" b="1" i="0" spc="100">
                 <a:solidFill>
-                  <a:srgbClr val="6B6B6B"/>
+                  <a:srgbClr val="8C8C8C"/>
                 </a:solidFill>
                 <a:latin typeface="Trenda IG Text"/>
               </a:rPr>
@@ -36856,11 +37048,11 @@
             </a:avLst>
           </a:prstGeom>
           <a:solidFill>
-            <a:srgbClr val="E0FAFE"/>
+            <a:srgbClr val="161616"/>
           </a:solidFill>
-          <a:ln w="9525">
+          <a:ln w="6350">
             <a:solidFill>
-              <a:srgbClr val="00D6F2"/>
+              <a:srgbClr val="4A4A4A"/>
             </a:solidFill>
           </a:ln>
           <a:effectLst/>
@@ -36911,7 +37103,7 @@
             <a:r>
               <a:rPr sz="640" b="1" i="0">
                 <a:solidFill>
-                  <a:srgbClr val="1A1A1A"/>
+                  <a:srgbClr val="F2F2F2"/>
                 </a:solidFill>
                 <a:latin typeface="Trenda IG Text"/>
               </a:rPr>
@@ -36935,7 +37127,7 @@
             <a:avLst/>
           </a:prstGeom>
           <a:solidFill>
-            <a:srgbClr val="00D6F2"/>
+            <a:srgbClr val="2B2B2B"/>
           </a:solidFill>
           <a:ln>
             <a:noFill/>
@@ -36987,7 +37179,7 @@
             <a:r>
               <a:rPr sz="580" b="0" i="0">
                 <a:solidFill>
-                  <a:srgbClr val="4D4D4D"/>
+                  <a:srgbClr val="B3B3B3"/>
                 </a:solidFill>
                 <a:latin typeface="Trenda IG Text"/>
               </a:rPr>
@@ -37011,7 +37203,7 @@
             <a:avLst/>
           </a:prstGeom>
           <a:solidFill>
-            <a:srgbClr val="00D6F2"/>
+            <a:srgbClr val="2B2B2B"/>
           </a:solidFill>
           <a:ln>
             <a:noFill/>
@@ -37063,7 +37255,7 @@
             <a:r>
               <a:rPr sz="580" b="0" i="0">
                 <a:solidFill>
-                  <a:srgbClr val="4D4D4D"/>
+                  <a:srgbClr val="B3B3B3"/>
                 </a:solidFill>
                 <a:latin typeface="Trenda IG Text"/>
               </a:rPr>
@@ -37087,7 +37279,7 @@
             <a:avLst/>
           </a:prstGeom>
           <a:solidFill>
-            <a:srgbClr val="00D6F2"/>
+            <a:srgbClr val="2B2B2B"/>
           </a:solidFill>
           <a:ln>
             <a:noFill/>
@@ -37139,7 +37331,7 @@
             <a:r>
               <a:rPr sz="580" b="0" i="0">
                 <a:solidFill>
-                  <a:srgbClr val="4D4D4D"/>
+                  <a:srgbClr val="B3B3B3"/>
                 </a:solidFill>
                 <a:latin typeface="Trenda IG Text"/>
               </a:rPr>
@@ -37163,7 +37355,7 @@
             <a:avLst/>
           </a:prstGeom>
           <a:solidFill>
-            <a:srgbClr val="00D6F2"/>
+            <a:srgbClr val="2B2B2B"/>
           </a:solidFill>
           <a:ln>
             <a:noFill/>
@@ -37215,7 +37407,7 @@
             <a:r>
               <a:rPr sz="580" b="0" i="0">
                 <a:solidFill>
-                  <a:srgbClr val="4D4D4D"/>
+                  <a:srgbClr val="B3B3B3"/>
                 </a:solidFill>
                 <a:latin typeface="Trenda IG Text"/>
               </a:rPr>
@@ -37241,7 +37433,7 @@
             </a:avLst>
           </a:prstGeom>
           <a:solidFill>
-            <a:srgbClr val="EFEFEF"/>
+            <a:srgbClr val="1E1E1E"/>
           </a:solidFill>
           <a:ln>
             <a:noFill/>
@@ -37298,7 +37490,7 @@
             <a:r>
               <a:rPr sz="520" b="1" i="0">
                 <a:solidFill>
-                  <a:srgbClr val="0089A0"/>
+                  <a:srgbClr val="F2F2F2"/>
                 </a:solidFill>
                 <a:latin typeface="Trenda IG Text"/>
               </a:rPr>
@@ -37314,7 +37506,7 @@
             <a:r>
               <a:rPr sz="600" b="1" i="0">
                 <a:solidFill>
-                  <a:srgbClr val="1A1A1A"/>
+                  <a:srgbClr val="F2F2F2"/>
                 </a:solidFill>
                 <a:latin typeface="Trenda IG Text"/>
               </a:rPr>
@@ -37338,7 +37530,7 @@
             <a:avLst/>
           </a:prstGeom>
           <a:solidFill>
-            <a:srgbClr val="FF0069"/>
+            <a:srgbClr val="2B2B2B"/>
           </a:solidFill>
           <a:ln>
             <a:noFill/>
@@ -37390,7 +37582,7 @@
             <a:r>
               <a:rPr sz="620" b="1" i="0">
                 <a:solidFill>
-                  <a:srgbClr val="FFFFFE"/>
+                  <a:srgbClr val="F2F2F2"/>
                 </a:solidFill>
                 <a:latin typeface="Trenda IG Text"/>
               </a:rPr>
@@ -37399,7 +37591,7 @@
             <a:r>
               <a:rPr sz="620" b="1" i="0">
                 <a:solidFill>
-                  <a:srgbClr val="FFFFFE"/>
+                  <a:srgbClr val="F2F2F2"/>
                 </a:solidFill>
                 <a:latin typeface="Trenda IG Text"/>
               </a:rPr>
@@ -37425,11 +37617,11 @@
             </a:avLst>
           </a:prstGeom>
           <a:solidFill>
-            <a:srgbClr val="F7F7F7"/>
+            <a:srgbClr val="141414"/>
           </a:solidFill>
-          <a:ln w="12700">
+          <a:ln w="7620">
             <a:solidFill>
-              <a:srgbClr val="FF0069"/>
+              <a:srgbClr val="4A4A4A"/>
             </a:solidFill>
           </a:ln>
           <a:effectLst/>
@@ -37479,7 +37671,7 @@
             <a:r>
               <a:rPr sz="480" b="1" i="0" spc="100">
                 <a:solidFill>
-                  <a:srgbClr val="6B6B6B"/>
+                  <a:srgbClr val="8C8C8C"/>
                 </a:solidFill>
                 <a:latin typeface="Trenda IG Text"/>
               </a:rPr>
@@ -37505,11 +37697,11 @@
             </a:avLst>
           </a:prstGeom>
           <a:solidFill>
-            <a:srgbClr val="FFE6F0"/>
+            <a:srgbClr val="161616"/>
           </a:solidFill>
-          <a:ln w="9525">
+          <a:ln w="6350">
             <a:solidFill>
-              <a:srgbClr val="FF0069"/>
+              <a:srgbClr val="4A4A4A"/>
             </a:solidFill>
           </a:ln>
           <a:effectLst/>
@@ -37560,7 +37752,7 @@
             <a:r>
               <a:rPr sz="640" b="1" i="0">
                 <a:solidFill>
-                  <a:srgbClr val="1A1A1A"/>
+                  <a:srgbClr val="F2F2F2"/>
                 </a:solidFill>
                 <a:latin typeface="Trenda IG Text"/>
               </a:rPr>
@@ -37584,7 +37776,7 @@
             <a:avLst/>
           </a:prstGeom>
           <a:solidFill>
-            <a:srgbClr val="FF0069"/>
+            <a:srgbClr val="2B2B2B"/>
           </a:solidFill>
           <a:ln>
             <a:noFill/>
@@ -37636,7 +37828,7 @@
             <a:r>
               <a:rPr sz="580" b="0" i="0">
                 <a:solidFill>
-                  <a:srgbClr val="4D4D4D"/>
+                  <a:srgbClr val="B3B3B3"/>
                 </a:solidFill>
                 <a:latin typeface="Trenda IG Text"/>
               </a:rPr>
@@ -37660,7 +37852,7 @@
             <a:avLst/>
           </a:prstGeom>
           <a:solidFill>
-            <a:srgbClr val="FF0069"/>
+            <a:srgbClr val="2B2B2B"/>
           </a:solidFill>
           <a:ln>
             <a:noFill/>
@@ -37712,7 +37904,7 @@
             <a:r>
               <a:rPr sz="580" b="0" i="0">
                 <a:solidFill>
-                  <a:srgbClr val="4D4D4D"/>
+                  <a:srgbClr val="B3B3B3"/>
                 </a:solidFill>
                 <a:latin typeface="Trenda IG Text"/>
               </a:rPr>
@@ -37736,7 +37928,7 @@
             <a:avLst/>
           </a:prstGeom>
           <a:solidFill>
-            <a:srgbClr val="FF0069"/>
+            <a:srgbClr val="2B2B2B"/>
           </a:solidFill>
           <a:ln>
             <a:noFill/>
@@ -37788,7 +37980,7 @@
             <a:r>
               <a:rPr sz="580" b="0" i="0">
                 <a:solidFill>
-                  <a:srgbClr val="4D4D4D"/>
+                  <a:srgbClr val="B3B3B3"/>
                 </a:solidFill>
                 <a:latin typeface="Trenda IG Text"/>
               </a:rPr>
@@ -37812,7 +38004,7 @@
             <a:avLst/>
           </a:prstGeom>
           <a:solidFill>
-            <a:srgbClr val="FF0069"/>
+            <a:srgbClr val="2B2B2B"/>
           </a:solidFill>
           <a:ln>
             <a:noFill/>
@@ -37864,7 +38056,7 @@
             <a:r>
               <a:rPr sz="580" b="0" i="0">
                 <a:solidFill>
-                  <a:srgbClr val="4D4D4D"/>
+                  <a:srgbClr val="B3B3B3"/>
                 </a:solidFill>
                 <a:latin typeface="Trenda IG Text"/>
               </a:rPr>
@@ -37890,7 +38082,7 @@
             </a:avLst>
           </a:prstGeom>
           <a:solidFill>
-            <a:srgbClr val="EFEFEF"/>
+            <a:srgbClr val="1E1E1E"/>
           </a:solidFill>
           <a:ln>
             <a:noFill/>
@@ -37947,7 +38139,7 @@
             <a:r>
               <a:rPr sz="520" b="1" i="0">
                 <a:solidFill>
-                  <a:srgbClr val="FF0069"/>
+                  <a:srgbClr val="F2F2F2"/>
                 </a:solidFill>
                 <a:latin typeface="Trenda IG Text"/>
               </a:rPr>
@@ -37963,7 +38155,7 @@
             <a:r>
               <a:rPr sz="600" b="1" i="0">
                 <a:solidFill>
-                  <a:srgbClr val="1A1A1A"/>
+                  <a:srgbClr val="F2F2F2"/>
                 </a:solidFill>
                 <a:latin typeface="Trenda IG Text"/>
               </a:rPr>
@@ -37987,7 +38179,7 @@
             <a:avLst/>
           </a:prstGeom>
           <a:solidFill>
-            <a:srgbClr val="FF0069"/>
+            <a:srgbClr val="2B2B2B"/>
           </a:solidFill>
           <a:ln>
             <a:noFill/>
@@ -38039,7 +38231,7 @@
             <a:r>
               <a:rPr sz="620" b="1" i="0">
                 <a:solidFill>
-                  <a:srgbClr val="FFFFFE"/>
+                  <a:srgbClr val="F2F2F2"/>
                 </a:solidFill>
                 <a:latin typeface="Trenda IG Text"/>
               </a:rPr>
@@ -38048,7 +38240,7 @@
             <a:r>
               <a:rPr sz="620" b="1" i="0">
                 <a:solidFill>
-                  <a:srgbClr val="FFFFFE"/>
+                  <a:srgbClr val="F2F2F2"/>
                 </a:solidFill>
                 <a:latin typeface="Trenda IG Text"/>
               </a:rPr>
@@ -38074,11 +38266,11 @@
             </a:avLst>
           </a:prstGeom>
           <a:solidFill>
-            <a:srgbClr val="F7F7F7"/>
+            <a:srgbClr val="141414"/>
           </a:solidFill>
-          <a:ln w="12700">
+          <a:ln w="7620">
             <a:solidFill>
-              <a:srgbClr val="FF0069"/>
+              <a:srgbClr val="4A4A4A"/>
             </a:solidFill>
           </a:ln>
           <a:effectLst/>
@@ -38128,7 +38320,7 @@
             <a:r>
               <a:rPr sz="480" b="1" i="0" spc="100">
                 <a:solidFill>
-                  <a:srgbClr val="6B6B6B"/>
+                  <a:srgbClr val="8C8C8C"/>
                 </a:solidFill>
                 <a:latin typeface="Trenda IG Text"/>
               </a:rPr>
@@ -38154,11 +38346,11 @@
             </a:avLst>
           </a:prstGeom>
           <a:solidFill>
-            <a:srgbClr val="FFE6F0"/>
+            <a:srgbClr val="161616"/>
           </a:solidFill>
-          <a:ln w="9525">
+          <a:ln w="6350">
             <a:solidFill>
-              <a:srgbClr val="FF0069"/>
+              <a:srgbClr val="4A4A4A"/>
             </a:solidFill>
           </a:ln>
           <a:effectLst/>
@@ -38209,7 +38401,7 @@
             <a:r>
               <a:rPr sz="640" b="1" i="0">
                 <a:solidFill>
-                  <a:srgbClr val="1A1A1A"/>
+                  <a:srgbClr val="F2F2F2"/>
                 </a:solidFill>
                 <a:latin typeface="Trenda IG Text"/>
               </a:rPr>
@@ -38233,7 +38425,7 @@
             <a:avLst/>
           </a:prstGeom>
           <a:solidFill>
-            <a:srgbClr val="FF0069"/>
+            <a:srgbClr val="2B2B2B"/>
           </a:solidFill>
           <a:ln>
             <a:noFill/>
@@ -38285,7 +38477,7 @@
             <a:r>
               <a:rPr sz="580" b="0" i="0">
                 <a:solidFill>
-                  <a:srgbClr val="4D4D4D"/>
+                  <a:srgbClr val="B3B3B3"/>
                 </a:solidFill>
                 <a:latin typeface="Trenda IG Text"/>
               </a:rPr>
@@ -38309,7 +38501,7 @@
             <a:avLst/>
           </a:prstGeom>
           <a:solidFill>
-            <a:srgbClr val="FF0069"/>
+            <a:srgbClr val="2B2B2B"/>
           </a:solidFill>
           <a:ln>
             <a:noFill/>
@@ -38361,7 +38553,7 @@
             <a:r>
               <a:rPr sz="580" b="0" i="0">
                 <a:solidFill>
-                  <a:srgbClr val="4D4D4D"/>
+                  <a:srgbClr val="B3B3B3"/>
                 </a:solidFill>
                 <a:latin typeface="Trenda IG Text"/>
               </a:rPr>
@@ -38385,7 +38577,7 @@
             <a:avLst/>
           </a:prstGeom>
           <a:solidFill>
-            <a:srgbClr val="FF0069"/>
+            <a:srgbClr val="2B2B2B"/>
           </a:solidFill>
           <a:ln>
             <a:noFill/>
@@ -38437,7 +38629,7 @@
             <a:r>
               <a:rPr sz="580" b="0" i="0">
                 <a:solidFill>
-                  <a:srgbClr val="4D4D4D"/>
+                  <a:srgbClr val="B3B3B3"/>
                 </a:solidFill>
                 <a:latin typeface="Trenda IG Text"/>
               </a:rPr>
@@ -38463,7 +38655,7 @@
             </a:avLst>
           </a:prstGeom>
           <a:solidFill>
-            <a:srgbClr val="EFEFEF"/>
+            <a:srgbClr val="1E1E1E"/>
           </a:solidFill>
           <a:ln>
             <a:noFill/>
@@ -38520,7 +38712,7 @@
             <a:r>
               <a:rPr sz="520" b="1" i="0">
                 <a:solidFill>
-                  <a:srgbClr val="FF0069"/>
+                  <a:srgbClr val="F2F2F2"/>
                 </a:solidFill>
                 <a:latin typeface="Trenda IG Text"/>
               </a:rPr>
@@ -38536,7 +38728,7 @@
             <a:r>
               <a:rPr sz="600" b="1" i="0">
                 <a:solidFill>
-                  <a:srgbClr val="1A1A1A"/>
+                  <a:srgbClr val="F2F2F2"/>
                 </a:solidFill>
                 <a:latin typeface="Trenda IG Text"/>
               </a:rPr>
@@ -38560,7 +38752,7 @@
             <a:avLst/>
           </a:prstGeom>
           <a:solidFill>
-            <a:srgbClr val="8B7CD8"/>
+            <a:srgbClr val="2B2B2B"/>
           </a:solidFill>
           <a:ln>
             <a:noFill/>
@@ -38612,7 +38804,7 @@
             <a:r>
               <a:rPr sz="620" b="1" i="0">
                 <a:solidFill>
-                  <a:srgbClr val="FFFFFE"/>
+                  <a:srgbClr val="F2F2F2"/>
                 </a:solidFill>
                 <a:latin typeface="Trenda IG Text"/>
               </a:rPr>
@@ -38621,7 +38813,7 @@
             <a:r>
               <a:rPr sz="620" b="1" i="0">
                 <a:solidFill>
-                  <a:srgbClr val="FFFFFE"/>
+                  <a:srgbClr val="F2F2F2"/>
                 </a:solidFill>
                 <a:latin typeface="Trenda IG Text"/>
               </a:rPr>
@@ -38647,11 +38839,11 @@
             </a:avLst>
           </a:prstGeom>
           <a:solidFill>
-            <a:srgbClr val="F7F7F7"/>
+            <a:srgbClr val="141414"/>
           </a:solidFill>
-          <a:ln w="12700">
+          <a:ln w="7620">
             <a:solidFill>
-              <a:srgbClr val="8B7CD8"/>
+              <a:srgbClr val="4A4A4A"/>
             </a:solidFill>
           </a:ln>
           <a:effectLst/>
@@ -38701,7 +38893,7 @@
             <a:r>
               <a:rPr sz="480" b="1" i="0" spc="100">
                 <a:solidFill>
-                  <a:srgbClr val="6B6B6B"/>
+                  <a:srgbClr val="8C8C8C"/>
                 </a:solidFill>
                 <a:latin typeface="Trenda IG Text"/>
               </a:rPr>
@@ -38727,11 +38919,11 @@
             </a:avLst>
           </a:prstGeom>
           <a:solidFill>
-            <a:srgbClr val="ECE9F5"/>
+            <a:srgbClr val="161616"/>
           </a:solidFill>
-          <a:ln w="9525">
+          <a:ln w="6350">
             <a:solidFill>
-              <a:srgbClr val="8B7CD8"/>
+              <a:srgbClr val="4A4A4A"/>
             </a:solidFill>
           </a:ln>
           <a:effectLst/>
@@ -38782,7 +38974,7 @@
             <a:r>
               <a:rPr sz="640" b="1" i="0">
                 <a:solidFill>
-                  <a:srgbClr val="1A1A1A"/>
+                  <a:srgbClr val="F2F2F2"/>
                 </a:solidFill>
                 <a:latin typeface="Trenda IG Text"/>
               </a:rPr>
@@ -38806,7 +38998,7 @@
             <a:avLst/>
           </a:prstGeom>
           <a:solidFill>
-            <a:srgbClr val="8B7CD8"/>
+            <a:srgbClr val="2B2B2B"/>
           </a:solidFill>
           <a:ln>
             <a:noFill/>
@@ -38858,7 +39050,7 @@
             <a:r>
               <a:rPr sz="580" b="0" i="0">
                 <a:solidFill>
-                  <a:srgbClr val="4D4D4D"/>
+                  <a:srgbClr val="B3B3B3"/>
                 </a:solidFill>
                 <a:latin typeface="Trenda IG Text"/>
               </a:rPr>
@@ -38882,7 +39074,7 @@
             <a:avLst/>
           </a:prstGeom>
           <a:solidFill>
-            <a:srgbClr val="8B7CD8"/>
+            <a:srgbClr val="2B2B2B"/>
           </a:solidFill>
           <a:ln>
             <a:noFill/>
@@ -38934,7 +39126,7 @@
             <a:r>
               <a:rPr sz="580" b="0" i="0">
                 <a:solidFill>
-                  <a:srgbClr val="4D4D4D"/>
+                  <a:srgbClr val="B3B3B3"/>
                 </a:solidFill>
                 <a:latin typeface="Trenda IG Text"/>
               </a:rPr>
@@ -38958,7 +39150,7 @@
             <a:avLst/>
           </a:prstGeom>
           <a:solidFill>
-            <a:srgbClr val="8B7CD8"/>
+            <a:srgbClr val="2B2B2B"/>
           </a:solidFill>
           <a:ln>
             <a:noFill/>
@@ -39010,7 +39202,7 @@
             <a:r>
               <a:rPr sz="580" b="0" i="0">
                 <a:solidFill>
-                  <a:srgbClr val="4D4D4D"/>
+                  <a:srgbClr val="B3B3B3"/>
                 </a:solidFill>
                 <a:latin typeface="Trenda IG Text"/>
               </a:rPr>
@@ -39036,7 +39228,7 @@
             </a:avLst>
           </a:prstGeom>
           <a:solidFill>
-            <a:srgbClr val="EFEFEF"/>
+            <a:srgbClr val="1E1E1E"/>
           </a:solidFill>
           <a:ln>
             <a:noFill/>
@@ -39093,7 +39285,7 @@
             <a:r>
               <a:rPr sz="520" b="1" i="0">
                 <a:solidFill>
-                  <a:srgbClr val="8B7CD8"/>
+                  <a:srgbClr val="F2F2F2"/>
                 </a:solidFill>
                 <a:latin typeface="Trenda IG Text"/>
               </a:rPr>
@@ -39109,7 +39301,7 @@
             <a:r>
               <a:rPr sz="600" b="1" i="0">
                 <a:solidFill>
-                  <a:srgbClr val="1A1A1A"/>
+                  <a:srgbClr val="F2F2F2"/>
                 </a:solidFill>
                 <a:latin typeface="Trenda IG Text"/>
               </a:rPr>
@@ -39133,7 +39325,7 @@
             <a:avLst/>
           </a:prstGeom>
           <a:solidFill>
-            <a:srgbClr val="56E13B"/>
+            <a:srgbClr val="2B2B2B"/>
           </a:solidFill>
           <a:ln>
             <a:noFill/>
@@ -39185,7 +39377,7 @@
             <a:r>
               <a:rPr sz="620" b="1" i="0">
                 <a:solidFill>
-                  <a:srgbClr val="000000"/>
+                  <a:srgbClr val="F2F2F2"/>
                 </a:solidFill>
                 <a:latin typeface="Trenda IG Text"/>
               </a:rPr>
@@ -39194,7 +39386,7 @@
             <a:r>
               <a:rPr sz="620" b="1" i="0">
                 <a:solidFill>
-                  <a:srgbClr val="000000"/>
+                  <a:srgbClr val="F2F2F2"/>
                 </a:solidFill>
                 <a:latin typeface="Trenda IG Text"/>
               </a:rPr>
@@ -39220,11 +39412,11 @@
             </a:avLst>
           </a:prstGeom>
           <a:solidFill>
-            <a:srgbClr val="F7F7F7"/>
+            <a:srgbClr val="141414"/>
           </a:solidFill>
-          <a:ln w="12700">
+          <a:ln w="7620">
             <a:solidFill>
-              <a:srgbClr val="56E13B"/>
+              <a:srgbClr val="4A4A4A"/>
             </a:solidFill>
           </a:ln>
           <a:effectLst/>
@@ -39274,7 +39466,7 @@
             <a:r>
               <a:rPr sz="480" b="1" i="0" spc="100">
                 <a:solidFill>
-                  <a:srgbClr val="6B6B6B"/>
+                  <a:srgbClr val="8C8C8C"/>
                 </a:solidFill>
                 <a:latin typeface="Trenda IG Text"/>
               </a:rPr>
@@ -39300,11 +39492,11 @@
             </a:avLst>
           </a:prstGeom>
           <a:solidFill>
-            <a:srgbClr val="EAFBE6"/>
+            <a:srgbClr val="161616"/>
           </a:solidFill>
-          <a:ln w="9525">
+          <a:ln w="6350">
             <a:solidFill>
-              <a:srgbClr val="56E13B"/>
+              <a:srgbClr val="4A4A4A"/>
             </a:solidFill>
           </a:ln>
           <a:effectLst/>
@@ -39355,7 +39547,7 @@
             <a:r>
               <a:rPr sz="640" b="1" i="0">
                 <a:solidFill>
-                  <a:srgbClr val="1A1A1A"/>
+                  <a:srgbClr val="F2F2F2"/>
                 </a:solidFill>
                 <a:latin typeface="Trenda IG Text"/>
               </a:rPr>
@@ -39379,7 +39571,7 @@
             <a:avLst/>
           </a:prstGeom>
           <a:solidFill>
-            <a:srgbClr val="56E13B"/>
+            <a:srgbClr val="2B2B2B"/>
           </a:solidFill>
           <a:ln>
             <a:noFill/>
@@ -39431,7 +39623,7 @@
             <a:r>
               <a:rPr sz="580" b="0" i="0">
                 <a:solidFill>
-                  <a:srgbClr val="4D4D4D"/>
+                  <a:srgbClr val="B3B3B3"/>
                 </a:solidFill>
                 <a:latin typeface="Trenda IG Text"/>
               </a:rPr>
@@ -39455,7 +39647,7 @@
             <a:avLst/>
           </a:prstGeom>
           <a:solidFill>
-            <a:srgbClr val="56E13B"/>
+            <a:srgbClr val="2B2B2B"/>
           </a:solidFill>
           <a:ln>
             <a:noFill/>
@@ -39507,7 +39699,7 @@
             <a:r>
               <a:rPr sz="580" b="0" i="0">
                 <a:solidFill>
-                  <a:srgbClr val="4D4D4D"/>
+                  <a:srgbClr val="B3B3B3"/>
                 </a:solidFill>
                 <a:latin typeface="Trenda IG Text"/>
               </a:rPr>
@@ -39531,7 +39723,7 @@
             <a:avLst/>
           </a:prstGeom>
           <a:solidFill>
-            <a:srgbClr val="56E13B"/>
+            <a:srgbClr val="2B2B2B"/>
           </a:solidFill>
           <a:ln>
             <a:noFill/>
@@ -39583,7 +39775,7 @@
             <a:r>
               <a:rPr sz="580" b="0" i="0">
                 <a:solidFill>
-                  <a:srgbClr val="4D4D4D"/>
+                  <a:srgbClr val="B3B3B3"/>
                 </a:solidFill>
                 <a:latin typeface="Trenda IG Text"/>
               </a:rPr>
@@ -39609,7 +39801,7 @@
             </a:avLst>
           </a:prstGeom>
           <a:solidFill>
-            <a:srgbClr val="EFEFEF"/>
+            <a:srgbClr val="1E1E1E"/>
           </a:solidFill>
           <a:ln>
             <a:noFill/>
@@ -39666,7 +39858,7 @@
             <a:r>
               <a:rPr sz="520" b="1" i="0">
                 <a:solidFill>
-                  <a:srgbClr val="2E8F1C"/>
+                  <a:srgbClr val="F2F2F2"/>
                 </a:solidFill>
                 <a:latin typeface="Trenda IG Text"/>
               </a:rPr>
@@ -39682,7 +39874,7 @@
             <a:r>
               <a:rPr sz="600" b="1" i="0">
                 <a:solidFill>
-                  <a:srgbClr val="1A1A1A"/>
+                  <a:srgbClr val="F2F2F2"/>
                 </a:solidFill>
                 <a:latin typeface="Trenda IG Text"/>
               </a:rPr>
@@ -39758,7 +39950,7 @@
             <a:r>
               <a:rPr sz="620" b="1" i="0">
                 <a:solidFill>
-                  <a:srgbClr val="000000"/>
+                  <a:srgbClr val="1A1A1A"/>
                 </a:solidFill>
                 <a:latin typeface="Trenda IG Text"/>
               </a:rPr>
@@ -39767,7 +39959,7 @@
             <a:r>
               <a:rPr sz="620" b="1" i="0">
                 <a:solidFill>
-                  <a:srgbClr val="000000"/>
+                  <a:srgbClr val="1A1A1A"/>
                 </a:solidFill>
                 <a:latin typeface="Trenda IG Text"/>
               </a:rPr>
@@ -39793,9 +39985,9 @@
             </a:avLst>
           </a:prstGeom>
           <a:solidFill>
-            <a:srgbClr val="F7F7F7"/>
+            <a:srgbClr val="141414"/>
           </a:solidFill>
-          <a:ln w="12700">
+          <a:ln w="7620">
             <a:solidFill>
               <a:srgbClr val="FFD700"/>
             </a:solidFill>
@@ -39847,7 +40039,7 @@
             <a:r>
               <a:rPr sz="480" b="1" i="0" spc="100">
                 <a:solidFill>
-                  <a:srgbClr val="6B6B6B"/>
+                  <a:srgbClr val="8C8C8C"/>
                 </a:solidFill>
                 <a:latin typeface="Trenda IG Text"/>
               </a:rPr>
@@ -39873,9 +40065,9 @@
             </a:avLst>
           </a:prstGeom>
           <a:solidFill>
-            <a:srgbClr val="FFF7CC"/>
+            <a:srgbClr val="161616"/>
           </a:solidFill>
-          <a:ln w="9525">
+          <a:ln w="6350">
             <a:solidFill>
               <a:srgbClr val="FFD700"/>
             </a:solidFill>
@@ -39928,7 +40120,7 @@
             <a:r>
               <a:rPr sz="640" b="1" i="0">
                 <a:solidFill>
-                  <a:srgbClr val="1A1A1A"/>
+                  <a:srgbClr val="F2F2F2"/>
                 </a:solidFill>
                 <a:latin typeface="Trenda IG Text"/>
               </a:rPr>
@@ -40004,7 +40196,7 @@
             <a:r>
               <a:rPr sz="580" b="0" i="0">
                 <a:solidFill>
-                  <a:srgbClr val="4D4D4D"/>
+                  <a:srgbClr val="B3B3B3"/>
                 </a:solidFill>
                 <a:latin typeface="Trenda IG Text"/>
               </a:rPr>
@@ -40080,7 +40272,7 @@
             <a:r>
               <a:rPr sz="580" b="0" i="0">
                 <a:solidFill>
-                  <a:srgbClr val="4D4D4D"/>
+                  <a:srgbClr val="B3B3B3"/>
                 </a:solidFill>
                 <a:latin typeface="Trenda IG Text"/>
               </a:rPr>
@@ -40156,7 +40348,7 @@
             <a:r>
               <a:rPr sz="580" b="0" i="0">
                 <a:solidFill>
-                  <a:srgbClr val="4D4D4D"/>
+                  <a:srgbClr val="B3B3B3"/>
                 </a:solidFill>
                 <a:latin typeface="Trenda IG Text"/>
               </a:rPr>
@@ -40232,7 +40424,7 @@
             <a:r>
               <a:rPr sz="580" b="0" i="0">
                 <a:solidFill>
-                  <a:srgbClr val="4D4D4D"/>
+                  <a:srgbClr val="B3B3B3"/>
                 </a:solidFill>
                 <a:latin typeface="Trenda IG Text"/>
               </a:rPr>
@@ -40308,7 +40500,7 @@
             <a:r>
               <a:rPr sz="580" b="0" i="0">
                 <a:solidFill>
-                  <a:srgbClr val="4D4D4D"/>
+                  <a:srgbClr val="B3B3B3"/>
                 </a:solidFill>
                 <a:latin typeface="Trenda IG Text"/>
               </a:rPr>
@@ -40334,7 +40526,7 @@
             </a:avLst>
           </a:prstGeom>
           <a:solidFill>
-            <a:srgbClr val="EFEFEF"/>
+            <a:srgbClr val="1E1E1E"/>
           </a:solidFill>
           <a:ln>
             <a:noFill/>
@@ -40391,7 +40583,7 @@
             <a:r>
               <a:rPr sz="520" b="1" i="0">
                 <a:solidFill>
-                  <a:srgbClr val="9A7B00"/>
+                  <a:srgbClr val="FFD700"/>
                 </a:solidFill>
                 <a:latin typeface="Trenda IG Text"/>
               </a:rPr>
@@ -40407,7 +40599,7 @@
             <a:r>
               <a:rPr sz="600" b="1" i="0">
                 <a:solidFill>
-                  <a:srgbClr val="1A1A1A"/>
+                  <a:srgbClr val="F2F2F2"/>
                 </a:solidFill>
                 <a:latin typeface="Trenda IG Text"/>
               </a:rPr>
@@ -40431,7 +40623,7 @@
             <a:avLst/>
           </a:prstGeom>
           <a:solidFill>
-            <a:srgbClr val="00D6F2"/>
+            <a:srgbClr val="2B2B2B"/>
           </a:solidFill>
           <a:ln>
             <a:noFill/>
@@ -40483,7 +40675,7 @@
             <a:r>
               <a:rPr sz="620" b="1" i="0">
                 <a:solidFill>
-                  <a:srgbClr val="000000"/>
+                  <a:srgbClr val="F2F2F2"/>
                 </a:solidFill>
                 <a:latin typeface="Trenda IG Text"/>
               </a:rPr>
@@ -40492,7 +40684,7 @@
             <a:r>
               <a:rPr sz="620" b="1" i="0">
                 <a:solidFill>
-                  <a:srgbClr val="000000"/>
+                  <a:srgbClr val="F2F2F2"/>
                 </a:solidFill>
                 <a:latin typeface="Trenda IG Text"/>
               </a:rPr>
@@ -40518,11 +40710,11 @@
             </a:avLst>
           </a:prstGeom>
           <a:solidFill>
-            <a:srgbClr val="F7F7F7"/>
+            <a:srgbClr val="141414"/>
           </a:solidFill>
-          <a:ln w="12700">
+          <a:ln w="7620">
             <a:solidFill>
-              <a:srgbClr val="00D6F2"/>
+              <a:srgbClr val="4A4A4A"/>
             </a:solidFill>
           </a:ln>
           <a:effectLst/>
@@ -40572,7 +40764,7 @@
             <a:r>
               <a:rPr sz="480" b="1" i="0" spc="100">
                 <a:solidFill>
-                  <a:srgbClr val="6B6B6B"/>
+                  <a:srgbClr val="8C8C8C"/>
                 </a:solidFill>
                 <a:latin typeface="Trenda IG Text"/>
               </a:rPr>
@@ -40598,11 +40790,11 @@
             </a:avLst>
           </a:prstGeom>
           <a:solidFill>
-            <a:srgbClr val="E0FAFE"/>
+            <a:srgbClr val="161616"/>
           </a:solidFill>
-          <a:ln w="9525">
+          <a:ln w="6350">
             <a:solidFill>
-              <a:srgbClr val="00D6F2"/>
+              <a:srgbClr val="4A4A4A"/>
             </a:solidFill>
           </a:ln>
           <a:effectLst/>
@@ -40653,7 +40845,7 @@
             <a:r>
               <a:rPr sz="640" b="1" i="0">
                 <a:solidFill>
-                  <a:srgbClr val="1A1A1A"/>
+                  <a:srgbClr val="F2F2F2"/>
                 </a:solidFill>
                 <a:latin typeface="Trenda IG Text"/>
               </a:rPr>
@@ -40677,7 +40869,7 @@
             <a:avLst/>
           </a:prstGeom>
           <a:solidFill>
-            <a:srgbClr val="00D6F2"/>
+            <a:srgbClr val="2B2B2B"/>
           </a:solidFill>
           <a:ln>
             <a:noFill/>
@@ -40729,7 +40921,7 @@
             <a:r>
               <a:rPr sz="580" b="0" i="0">
                 <a:solidFill>
-                  <a:srgbClr val="4D4D4D"/>
+                  <a:srgbClr val="B3B3B3"/>
                 </a:solidFill>
                 <a:latin typeface="Trenda IG Text"/>
               </a:rPr>
@@ -40753,7 +40945,7 @@
             <a:avLst/>
           </a:prstGeom>
           <a:solidFill>
-            <a:srgbClr val="00D6F2"/>
+            <a:srgbClr val="2B2B2B"/>
           </a:solidFill>
           <a:ln>
             <a:noFill/>
@@ -40805,7 +40997,7 @@
             <a:r>
               <a:rPr sz="580" b="0" i="0">
                 <a:solidFill>
-                  <a:srgbClr val="4D4D4D"/>
+                  <a:srgbClr val="B3B3B3"/>
                 </a:solidFill>
                 <a:latin typeface="Trenda IG Text"/>
               </a:rPr>
@@ -40829,7 +41021,7 @@
             <a:avLst/>
           </a:prstGeom>
           <a:solidFill>
-            <a:srgbClr val="00D6F2"/>
+            <a:srgbClr val="2B2B2B"/>
           </a:solidFill>
           <a:ln>
             <a:noFill/>
@@ -40881,7 +41073,7 @@
             <a:r>
               <a:rPr sz="580" b="0" i="0">
                 <a:solidFill>
-                  <a:srgbClr val="4D4D4D"/>
+                  <a:srgbClr val="B3B3B3"/>
                 </a:solidFill>
                 <a:latin typeface="Trenda IG Text"/>
               </a:rPr>
@@ -40907,7 +41099,7 @@
             </a:avLst>
           </a:prstGeom>
           <a:solidFill>
-            <a:srgbClr val="EFEFEF"/>
+            <a:srgbClr val="1E1E1E"/>
           </a:solidFill>
           <a:ln>
             <a:noFill/>
@@ -40964,7 +41156,7 @@
             <a:r>
               <a:rPr sz="520" b="1" i="0">
                 <a:solidFill>
-                  <a:srgbClr val="0089A0"/>
+                  <a:srgbClr val="F2F2F2"/>
                 </a:solidFill>
                 <a:latin typeface="Trenda IG Text"/>
               </a:rPr>
@@ -40980,7 +41172,7 @@
             <a:r>
               <a:rPr sz="600" b="1" i="0">
                 <a:solidFill>
-                  <a:srgbClr val="1A1A1A"/>
+                  <a:srgbClr val="F2F2F2"/>
                 </a:solidFill>
                 <a:latin typeface="Trenda IG Text"/>
               </a:rPr>
@@ -41006,9 +41198,9 @@
             </a:avLst>
           </a:prstGeom>
           <a:noFill/>
-          <a:ln w="12700">
+          <a:ln w="7620">
             <a:solidFill>
-              <a:srgbClr val="FF0069"/>
+              <a:srgbClr val="4A4A4A"/>
             </a:solidFill>
             <a:prstDash val="dash"/>
           </a:ln>
@@ -41060,7 +41252,7 @@
             <a:r>
               <a:rPr sz="500" b="1" i="0" spc="80">
                 <a:solidFill>
-                  <a:srgbClr val="FF0069"/>
+                  <a:srgbClr val="F2F2F2"/>
                 </a:solidFill>
                 <a:latin typeface="Trenda IG Text"/>
               </a:rPr>
@@ -41086,11 +41278,11 @@
             </a:avLst>
           </a:prstGeom>
           <a:solidFill>
-            <a:srgbClr val="FF0069"/>
+            <a:srgbClr val="2B2B2B"/>
           </a:solidFill>
-          <a:ln w="9525">
+          <a:ln w="6350">
             <a:solidFill>
-              <a:srgbClr val="FF0069"/>
+              <a:srgbClr val="4A4A4A"/>
             </a:solidFill>
           </a:ln>
           <a:effectLst/>
@@ -41141,7 +41333,7 @@
             <a:r>
               <a:rPr sz="500" b="1" i="0" spc="80">
                 <a:solidFill>
-                  <a:srgbClr val="FFFFFE"/>
+                  <a:srgbClr val="F2F2F2"/>
                 </a:solidFill>
                 <a:latin typeface="Trenda IG Text"/>
               </a:rPr>
@@ -41167,9 +41359,9 @@
             </a:avLst>
           </a:prstGeom>
           <a:noFill/>
-          <a:ln w="12700">
+          <a:ln w="7620">
             <a:solidFill>
-              <a:srgbClr val="8B7CD8"/>
+              <a:srgbClr val="4A4A4A"/>
             </a:solidFill>
             <a:prstDash val="dash"/>
           </a:ln>
@@ -41221,7 +41413,7 @@
             <a:r>
               <a:rPr sz="459" b="1" i="0">
                 <a:solidFill>
-                  <a:srgbClr val="8B7CD8"/>
+                  <a:srgbClr val="F2F2F2"/>
                 </a:solidFill>
                 <a:latin typeface="Trenda IG Text"/>
               </a:rPr>
@@ -41300,7 +41492,7 @@
             <a:r>
               <a:rPr sz="480" b="1" i="0" spc="80">
                 <a:solidFill>
-                  <a:srgbClr val="000000"/>
+                  <a:srgbClr val="1A1A1A"/>
                 </a:solidFill>
                 <a:latin typeface="Trenda IG Text"/>
               </a:rPr>
@@ -41334,7 +41526,7 @@
             <a:r>
               <a:rPr sz="620" b="1" i="0" spc="120">
                 <a:solidFill>
-                  <a:srgbClr val="1A1A1A"/>
+                  <a:srgbClr val="F2F2F2"/>
                 </a:solidFill>
                 <a:latin typeface="Trenda IG Text"/>
               </a:rPr>
@@ -41358,7 +41550,7 @@
             <a:avLst/>
           </a:prstGeom>
           <a:solidFill>
-            <a:srgbClr val="F7F7F7"/>
+            <a:srgbClr val="141414"/>
           </a:solidFill>
           <a:ln>
             <a:noFill/>
@@ -41399,9 +41591,20 @@
           <a:prstGeom prst="rect">
             <a:avLst/>
           </a:prstGeom>
-          <a:solidFill>
-            <a:srgbClr val="FF0069"/>
-          </a:solidFill>
+          <a:gradFill rotWithShape="1">
+            <a:gsLst>
+              <a:gs pos="0">
+                <a:srgbClr val="FFD700"/>
+              </a:gs>
+              <a:gs pos="50000">
+                <a:srgbClr val="FF0069"/>
+              </a:gs>
+              <a:gs pos="100000">
+                <a:srgbClr val="00D6F2"/>
+              </a:gs>
+            </a:gsLst>
+            <a:lin ang="5400000" scaled="0"/>
+          </a:gradFill>
           <a:ln>
             <a:noFill/>
           </a:ln>
@@ -41457,7 +41660,7 @@
             <a:r>
               <a:rPr sz="760" b="1" i="0">
                 <a:solidFill>
-                  <a:srgbClr val="1A1A1A"/>
+                  <a:srgbClr val="F2F2F2"/>
                 </a:solidFill>
                 <a:latin typeface="Trenda IG Text"/>
               </a:rPr>
@@ -41473,7 +41676,7 @@
             <a:r>
               <a:rPr sz="620" b="0" i="0">
                 <a:solidFill>
-                  <a:srgbClr val="4D4D4D"/>
+                  <a:srgbClr val="B3B3B3"/>
                 </a:solidFill>
                 <a:latin typeface="Trenda IG Text"/>
               </a:rPr>
@@ -41497,7 +41700,7 @@
             <a:avLst/>
           </a:prstGeom>
           <a:solidFill>
-            <a:srgbClr val="F7F7F7"/>
+            <a:srgbClr val="141414"/>
           </a:solidFill>
           <a:ln>
             <a:noFill/>
@@ -41538,9 +41741,20 @@
           <a:prstGeom prst="rect">
             <a:avLst/>
           </a:prstGeom>
-          <a:solidFill>
-            <a:srgbClr val="56E13B"/>
-          </a:solidFill>
+          <a:gradFill rotWithShape="1">
+            <a:gsLst>
+              <a:gs pos="0">
+                <a:srgbClr val="FFD700"/>
+              </a:gs>
+              <a:gs pos="50000">
+                <a:srgbClr val="FF0069"/>
+              </a:gs>
+              <a:gs pos="100000">
+                <a:srgbClr val="00D6F2"/>
+              </a:gs>
+            </a:gsLst>
+            <a:lin ang="5400000" scaled="0"/>
+          </a:gradFill>
           <a:ln>
             <a:noFill/>
           </a:ln>
@@ -41596,7 +41810,7 @@
             <a:r>
               <a:rPr sz="760" b="1" i="0">
                 <a:solidFill>
-                  <a:srgbClr val="1A1A1A"/>
+                  <a:srgbClr val="F2F2F2"/>
                 </a:solidFill>
                 <a:latin typeface="Trenda IG Text"/>
               </a:rPr>
@@ -41612,7 +41826,7 @@
             <a:r>
               <a:rPr sz="620" b="0" i="0">
                 <a:solidFill>
-                  <a:srgbClr val="4D4D4D"/>
+                  <a:srgbClr val="B3B3B3"/>
                 </a:solidFill>
                 <a:latin typeface="Trenda IG Text"/>
               </a:rPr>
@@ -41636,7 +41850,7 @@
             <a:avLst/>
           </a:prstGeom>
           <a:solidFill>
-            <a:srgbClr val="F7F7F7"/>
+            <a:srgbClr val="141414"/>
           </a:solidFill>
           <a:ln>
             <a:noFill/>
@@ -41677,9 +41891,20 @@
           <a:prstGeom prst="rect">
             <a:avLst/>
           </a:prstGeom>
-          <a:solidFill>
-            <a:srgbClr val="00D6F2"/>
-          </a:solidFill>
+          <a:gradFill rotWithShape="1">
+            <a:gsLst>
+              <a:gs pos="0">
+                <a:srgbClr val="FFD700"/>
+              </a:gs>
+              <a:gs pos="50000">
+                <a:srgbClr val="FF0069"/>
+              </a:gs>
+              <a:gs pos="100000">
+                <a:srgbClr val="00D6F2"/>
+              </a:gs>
+            </a:gsLst>
+            <a:lin ang="5400000" scaled="0"/>
+          </a:gradFill>
           <a:ln>
             <a:noFill/>
           </a:ln>
@@ -41735,7 +41960,7 @@
             <a:r>
               <a:rPr sz="760" b="1" i="0">
                 <a:solidFill>
-                  <a:srgbClr val="1A1A1A"/>
+                  <a:srgbClr val="F2F2F2"/>
                 </a:solidFill>
                 <a:latin typeface="Trenda IG Text"/>
               </a:rPr>
@@ -41751,7 +41976,7 @@
             <a:r>
               <a:rPr sz="620" b="0" i="0">
                 <a:solidFill>
-                  <a:srgbClr val="4D4D4D"/>
+                  <a:srgbClr val="B3B3B3"/>
                 </a:solidFill>
                 <a:latin typeface="Trenda IG Text"/>
               </a:rPr>
@@ -41785,7 +42010,7 @@
             <a:r>
               <a:rPr sz="660" b="1" i="0">
                 <a:solidFill>
-                  <a:srgbClr val="1A1A1A"/>
+                  <a:srgbClr val="F2F2F2"/>
                 </a:solidFill>
                 <a:latin typeface="Trenda IG Text"/>
               </a:rPr>
@@ -41794,7 +42019,7 @@
             <a:r>
               <a:rPr sz="660" b="0" i="0">
                 <a:solidFill>
-                  <a:srgbClr val="4D4D4D"/>
+                  <a:srgbClr val="B3B3B3"/>
                 </a:solidFill>
                 <a:latin typeface="Trenda IG Text"/>
               </a:rPr>

--- a/poc/data_harness/Ascension Agentic Harness - Data Harness.pptx
+++ b/poc/data_harness/Ascension Agentic Harness - Data Harness.pptx
@@ -17,6 +17,7 @@
     <p:sldId id="324" r:id="rId16"/>
     <p:sldId id="325" r:id="rId17"/>
     <p:sldId id="323" r:id="rId15"/>
+    <p:sldId id="326" r:id="rId18"/>
   </p:sldIdLst>
   <p:sldSz cx="12192000" cy="6858000"/>
   <p:notesSz cx="6858000" cy="12192000"/>
@@ -2184,6 +2185,94 @@
 </p:notes>
 </file>
 
+<file path=ppt/notesSlides/notesSlide9.xml><?xml version="1.0" encoding="utf-8"?>
+<p:notes xmlns:a="http://schemas.openxmlformats.org/drawingml/2006/main" xmlns:p="http://schemas.openxmlformats.org/presentationml/2006/main" xmlns:r="http://schemas.openxmlformats.org/officeDocument/2006/relationships">
+  <p:cSld>
+    <p:spTree>
+      <p:nvGrpSpPr>
+        <p:cNvPr id="1" name=""/>
+        <p:cNvGrpSpPr/>
+        <p:nvPr/>
+      </p:nvGrpSpPr>
+      <p:grpSpPr>
+        <a:xfrm>
+          <a:off x="0" y="0"/>
+          <a:ext cx="0" cy="0"/>
+          <a:chOff x="0" y="0"/>
+          <a:chExt cx="0" cy="0"/>
+        </a:xfrm>
+      </p:grpSpPr>
+      <p:sp>
+        <p:nvSpPr>
+          <p:cNvPr id="3" name="Notes Placeholder 2"/>
+          <p:cNvSpPr>
+            <a:spLocks noGrp="1"/>
+          </p:cNvSpPr>
+          <p:nvPr>
+            <p:ph type="body" idx="1"/>
+          </p:nvPr>
+        </p:nvSpPr>
+        <p:spPr/>
+        <p:txBody>
+          <a:bodyPr/>
+          <a:lstStyle/>
+          <a:p>
+            <a:r>
+              <a:t>SLIDE: Sierra voice agent: accurate answers, safe patient actions   (about 2 minutes)</a:t>
+            </a:r>
+          </a:p>
+          <a:p/>
+          <a:p>
+            <a:r>
+              <a:t>KEY MESSAGE</a:t>
+            </a:r>
+          </a:p>
+          <a:p>
+            <a:r>
+              <a:t>Sierra answers questions from governed knowledge base articles in Google Cloud, and books, cancels or reschedules only through scoped APIs to the scheduling system of record, after the caller is verified. Patient records never go into the knowledge base.</a:t>
+            </a:r>
+          </a:p>
+          <a:p/>
+          <a:p>
+            <a:r>
+              <a:t>WALK IT</a:t>
+            </a:r>
+          </a:p>
+          <a:p>
+            <a:r>
+              <a:t>- Left: the caller talks to the Sierra voice agent.</a:t>
+            </a:r>
+          </a:p>
+          <a:p>
+            <a:r>
+              <a:t>- Top, knowledge path (no PHI): articles live in GCP with an owner, version, review date and approval; DLP and Collibra scan them for PHI; only approved articles are indexed and synced to Sierra when they change.</a:t>
+            </a:r>
+          </a:p>
+          <a:p>
+            <a:r>
+              <a:t>- Bottom, patient path: verify the caller first; then a scoped scheduling API returns only that patient's data and enforces the rules (cancellation window, reschedule rules, provider restrictions); bookings are written to the scheduling system of record, never a GCP copy.</a:t>
+            </a:r>
+          </a:p>
+          <a:p>
+            <a:r>
+              <a:t>- Right, after every call: hand-off to a person when needed, masked transcripts with retention limits, outcomes as aggregates into Gold A, and test calls before every release.</a:t>
+            </a:r>
+          </a:p>
+          <a:p>
+            <a:r>
+              <a:t>- Bottom: the six safeguards.</a:t>
+            </a:r>
+          </a:p>
+        </p:txBody>
+      </p:sp>
+    </p:spTree>
+  </p:cSld>
+  <p:clrMapOvr>
+    <a:masterClrMapping/>
+  </p:clrMapOvr>
+</p:notes>
+</file>
+
 <file path=ppt/slideLayouts/slideLayout1.xml><?xml version="1.0" encoding="utf-8"?>
 <p:sldLayout xmlns:a="http://schemas.openxmlformats.org/drawingml/2006/main" xmlns:r="http://schemas.openxmlformats.org/officeDocument/2006/relationships" xmlns:p="http://schemas.openxmlformats.org/presentationml/2006/main" preserve="1">
   <p:cSld name="DEFAULT">
@@ -42024,6 +42113,5137 @@
                 <a:latin typeface="Trenda IG Text"/>
               </a:rPr>
               <a:t>No speed or ROI number is committed before Phase 6 compares the pilot with today's baseline.</a:t>
+            </a:r>
+          </a:p>
+        </p:txBody>
+      </p:sp>
+    </p:spTree>
+  </p:cSld>
+  <p:clrMapOvr>
+    <a:masterClrMapping/>
+  </p:clrMapOvr>
+</p:sld>
+</file>
+
+<file path=ppt/slides/slide9.xml><?xml version="1.0" encoding="utf-8"?>
+<p:sld xmlns:a="http://schemas.openxmlformats.org/drawingml/2006/main" xmlns:p="http://schemas.openxmlformats.org/presentationml/2006/main" xmlns:r="http://schemas.openxmlformats.org/officeDocument/2006/relationships">
+  <p:cSld>
+    <p:bg>
+      <p:bgPr>
+        <a:solidFill>
+          <a:srgbClr val="000000"/>
+        </a:solidFill>
+        <a:effectLst/>
+      </p:bgPr>
+    </p:bg>
+    <p:spTree>
+      <p:nvGrpSpPr>
+        <p:cNvPr id="1" name=""/>
+        <p:cNvGrpSpPr/>
+        <p:nvPr/>
+      </p:nvGrpSpPr>
+      <p:grpSpPr/>
+      <p:sp>
+        <p:nvSpPr>
+          <p:cNvPr id="2" name="Text 1"/>
+          <p:cNvSpPr txBox="1"/>
+          <p:nvPr/>
+        </p:nvSpPr>
+        <p:spPr>
+          <a:xfrm>
+            <a:off x="411480" y="201168"/>
+            <a:ext cx="8229600" cy="182880"/>
+          </a:xfrm>
+          <a:prstGeom prst="rect">
+            <a:avLst/>
+          </a:prstGeom>
+          <a:noFill/>
+        </p:spPr>
+        <p:txBody>
+          <a:bodyPr wrap="square" lIns="0" rIns="0" tIns="0" bIns="0" anchor="ctr">
+            <a:spAutoFit/>
+          </a:bodyPr>
+          <a:lstStyle/>
+          <a:p>
+            <a:r>
+              <a:rPr sz="800" b="1" i="0" spc="300">
+                <a:solidFill>
+                  <a:srgbClr val="00D6F2"/>
+                </a:solidFill>
+                <a:latin typeface="Trenda IG Text"/>
+              </a:rPr>
+              <a:t>ASCENSION · SIERRA VOICE AGENT</a:t>
+            </a:r>
+          </a:p>
+        </p:txBody>
+      </p:sp>
+      <p:sp>
+        <p:nvSpPr>
+          <p:cNvPr id="3" name="Text 2"/>
+          <p:cNvSpPr txBox="1"/>
+          <p:nvPr/>
+        </p:nvSpPr>
+        <p:spPr>
+          <a:xfrm>
+            <a:off x="411480" y="384048"/>
+            <a:ext cx="11365992" cy="411480"/>
+          </a:xfrm>
+          <a:prstGeom prst="rect">
+            <a:avLst/>
+          </a:prstGeom>
+          <a:noFill/>
+        </p:spPr>
+        <p:txBody>
+          <a:bodyPr wrap="square" lIns="0" rIns="0" tIns="0" bIns="0" anchor="ctr">
+            <a:spAutoFit/>
+          </a:bodyPr>
+          <a:lstStyle/>
+          <a:p>
+            <a:r>
+              <a:rPr sz="2200" b="1" i="0">
+                <a:solidFill>
+                  <a:srgbClr val="FFFFFF"/>
+                </a:solidFill>
+                <a:latin typeface="Trenda IG Text"/>
+              </a:rPr>
+              <a:t>Sierra voice agent: governed knowledge for answers, scoped APIs for patient actions</a:t>
+            </a:r>
+          </a:p>
+        </p:txBody>
+      </p:sp>
+      <p:sp>
+        <p:nvSpPr>
+          <p:cNvPr id="4" name="Text 3"/>
+          <p:cNvSpPr txBox="1"/>
+          <p:nvPr/>
+        </p:nvSpPr>
+        <p:spPr>
+          <a:xfrm>
+            <a:off x="411480" y="804672"/>
+            <a:ext cx="11365992" cy="237744"/>
+          </a:xfrm>
+          <a:prstGeom prst="rect">
+            <a:avLst/>
+          </a:prstGeom>
+          <a:noFill/>
+        </p:spPr>
+        <p:txBody>
+          <a:bodyPr wrap="square" lIns="0" rIns="0" tIns="0" bIns="0" anchor="ctr">
+            <a:spAutoFit/>
+          </a:bodyPr>
+          <a:lstStyle/>
+          <a:p>
+            <a:r>
+              <a:rPr sz="1050" b="0" i="0">
+                <a:solidFill>
+                  <a:srgbClr val="BFBFBF"/>
+                </a:solidFill>
+                <a:latin typeface="Trenda IG Text"/>
+              </a:rPr>
+              <a:t>Articles in Google Cloud keep every answer accurate. Booking, cancelling and rescheduling go through the scheduling system of record, only after the caller is verified.</a:t>
+            </a:r>
+          </a:p>
+        </p:txBody>
+      </p:sp>
+      <p:sp>
+        <p:nvSpPr>
+          <p:cNvPr id="5" name="Shape 4"/>
+          <p:cNvSpPr/>
+          <p:nvPr/>
+        </p:nvSpPr>
+        <p:spPr>
+          <a:xfrm>
+            <a:off x="411480" y="1188720"/>
+            <a:ext cx="1874519" cy="960120"/>
+          </a:xfrm>
+          <a:prstGeom prst="roundRect">
+            <a:avLst>
+              <a:gd name="adj" fmla="val 6000"/>
+            </a:avLst>
+          </a:prstGeom>
+          <a:solidFill>
+            <a:srgbClr val="141414"/>
+          </a:solidFill>
+          <a:ln w="9525">
+            <a:solidFill>
+              <a:srgbClr val="333333"/>
+            </a:solidFill>
+          </a:ln>
+          <a:effectLst/>
+        </p:spPr>
+        <p:style>
+          <a:lnRef idx="1">
+            <a:schemeClr val="accent1"/>
+          </a:lnRef>
+          <a:fillRef idx="3">
+            <a:schemeClr val="accent1"/>
+          </a:fillRef>
+          <a:effectRef idx="2">
+            <a:schemeClr val="accent1"/>
+          </a:effectRef>
+          <a:fontRef idx="minor">
+            <a:schemeClr val="lt1"/>
+          </a:fontRef>
+        </p:style>
+        <p:txBody>
+          <a:bodyPr rtlCol="0" anchor="ctr"/>
+          <a:lstStyle/>
+          <a:p/>
+        </p:txBody>
+      </p:sp>
+      <p:pic>
+        <p:nvPicPr>
+          <p:cNvPr id="6" name="Picture 5" descr="people.png"/>
+          <p:cNvPicPr>
+            <a:picLocks noChangeAspect="1"/>
+          </p:cNvPicPr>
+          <p:nvPr/>
+        </p:nvPicPr>
+        <p:blipFill>
+          <a:blip r:embed="rId2"/>
+          <a:stretch>
+            <a:fillRect/>
+          </a:stretch>
+        </p:blipFill>
+        <p:spPr>
+          <a:xfrm>
+            <a:off x="521208" y="1280160"/>
+            <a:ext cx="219456" cy="219456"/>
+          </a:xfrm>
+          <a:prstGeom prst="rect">
+            <a:avLst/>
+          </a:prstGeom>
+        </p:spPr>
+      </p:pic>
+      <p:sp>
+        <p:nvSpPr>
+          <p:cNvPr id="7" name="Text 5"/>
+          <p:cNvSpPr txBox="1"/>
+          <p:nvPr/>
+        </p:nvSpPr>
+        <p:spPr>
+          <a:xfrm>
+            <a:off x="813816" y="1261872"/>
+            <a:ext cx="1417319" cy="256032"/>
+          </a:xfrm>
+          <a:prstGeom prst="rect">
+            <a:avLst/>
+          </a:prstGeom>
+          <a:noFill/>
+        </p:spPr>
+        <p:txBody>
+          <a:bodyPr wrap="square" lIns="0" rIns="0" tIns="0" bIns="0" anchor="ctr">
+            <a:spAutoFit/>
+          </a:bodyPr>
+          <a:lstStyle/>
+          <a:p>
+            <a:r>
+              <a:rPr sz="800" b="1" i="0">
+                <a:solidFill>
+                  <a:srgbClr val="F2F2F2"/>
+                </a:solidFill>
+                <a:latin typeface="Trenda IG Text"/>
+              </a:rPr>
+              <a:t>Patient calls</a:t>
+            </a:r>
+          </a:p>
+        </p:txBody>
+      </p:sp>
+      <p:sp>
+        <p:nvSpPr>
+          <p:cNvPr id="8" name="Text 6"/>
+          <p:cNvSpPr txBox="1"/>
+          <p:nvPr/>
+        </p:nvSpPr>
+        <p:spPr>
+          <a:xfrm>
+            <a:off x="521208" y="1572768"/>
+            <a:ext cx="1673351" cy="548640"/>
+          </a:xfrm>
+          <a:prstGeom prst="rect">
+            <a:avLst/>
+          </a:prstGeom>
+          <a:noFill/>
+        </p:spPr>
+        <p:txBody>
+          <a:bodyPr wrap="square" lIns="0" rIns="0" tIns="0" bIns="0" anchor="t">
+            <a:spAutoFit/>
+          </a:bodyPr>
+          <a:lstStyle/>
+          <a:p>
+            <a:r>
+              <a:rPr sz="620" b="0" i="0">
+                <a:solidFill>
+                  <a:srgbClr val="B3B3B3"/>
+                </a:solidFill>
+                <a:latin typeface="Trenda IG Text"/>
+              </a:rPr>
+              <a:t>Book, cancel or reschedule, or ask a question: prep, locations, hours, insurance.</a:t>
+            </a:r>
+          </a:p>
+        </p:txBody>
+      </p:sp>
+      <p:sp>
+        <p:nvSpPr>
+          <p:cNvPr id="9" name="Shape 7"/>
+          <p:cNvSpPr/>
+          <p:nvPr/>
+        </p:nvSpPr>
+        <p:spPr>
+          <a:xfrm>
+            <a:off x="411480" y="2377440"/>
+            <a:ext cx="1874519" cy="2852927"/>
+          </a:xfrm>
+          <a:prstGeom prst="roundRect">
+            <a:avLst>
+              <a:gd name="adj" fmla="val 4000"/>
+            </a:avLst>
+          </a:prstGeom>
+          <a:solidFill>
+            <a:srgbClr val="141414"/>
+          </a:solidFill>
+          <a:ln w="12700">
+            <a:solidFill>
+              <a:srgbClr val="00D6F2"/>
+            </a:solidFill>
+          </a:ln>
+          <a:effectLst/>
+        </p:spPr>
+        <p:style>
+          <a:lnRef idx="1">
+            <a:schemeClr val="accent1"/>
+          </a:lnRef>
+          <a:fillRef idx="3">
+            <a:schemeClr val="accent1"/>
+          </a:fillRef>
+          <a:effectRef idx="2">
+            <a:schemeClr val="accent1"/>
+          </a:effectRef>
+          <a:fontRef idx="minor">
+            <a:schemeClr val="lt1"/>
+          </a:fontRef>
+        </p:style>
+        <p:txBody>
+          <a:bodyPr rtlCol="0" anchor="ctr"/>
+          <a:lstStyle/>
+          <a:p/>
+        </p:txBody>
+      </p:sp>
+      <p:sp>
+        <p:nvSpPr>
+          <p:cNvPr id="10" name="Text 8"/>
+          <p:cNvSpPr txBox="1"/>
+          <p:nvPr/>
+        </p:nvSpPr>
+        <p:spPr>
+          <a:xfrm>
+            <a:off x="521208" y="2468880"/>
+            <a:ext cx="1691639" cy="310896"/>
+          </a:xfrm>
+          <a:prstGeom prst="rect">
+            <a:avLst/>
+          </a:prstGeom>
+          <a:noFill/>
+        </p:spPr>
+        <p:txBody>
+          <a:bodyPr wrap="square" lIns="0" rIns="0" tIns="0" bIns="0" anchor="t">
+            <a:spAutoFit/>
+          </a:bodyPr>
+          <a:lstStyle/>
+          <a:p>
+            <a:pPr>
+              <a:lnSpc>
+                <a:spcPct val="90000"/>
+              </a:lnSpc>
+            </a:pPr>
+            <a:r>
+              <a:rPr sz="840" b="1" i="0">
+                <a:solidFill>
+                  <a:srgbClr val="F2F2F2"/>
+                </a:solidFill>
+                <a:latin typeface="Trenda IG Text"/>
+              </a:rPr>
+              <a:t>Sierra</a:t>
+            </a:r>
+          </a:p>
+          <a:p>
+            <a:pPr>
+              <a:lnSpc>
+                <a:spcPct val="90000"/>
+              </a:lnSpc>
+            </a:pPr>
+            <a:r>
+              <a:rPr sz="620" b="0" i="0">
+                <a:solidFill>
+                  <a:srgbClr val="B3B3B3"/>
+                </a:solidFill>
+                <a:latin typeface="Trenda IG Text"/>
+              </a:rPr>
+              <a:t>voice agent</a:t>
+            </a:r>
+          </a:p>
+        </p:txBody>
+      </p:sp>
+      <p:sp>
+        <p:nvSpPr>
+          <p:cNvPr id="11" name="Shape 9"/>
+          <p:cNvSpPr/>
+          <p:nvPr/>
+        </p:nvSpPr>
+        <p:spPr>
+          <a:xfrm>
+            <a:off x="521208" y="2990088"/>
+            <a:ext cx="64008" cy="64008"/>
+          </a:xfrm>
+          <a:prstGeom prst="ellipse">
+            <a:avLst/>
+          </a:prstGeom>
+          <a:solidFill>
+            <a:srgbClr val="00D6F2"/>
+          </a:solidFill>
+          <a:ln>
+            <a:noFill/>
+          </a:ln>
+          <a:effectLst/>
+        </p:spPr>
+        <p:style>
+          <a:lnRef idx="1">
+            <a:schemeClr val="accent1"/>
+          </a:lnRef>
+          <a:fillRef idx="3">
+            <a:schemeClr val="accent1"/>
+          </a:fillRef>
+          <a:effectRef idx="2">
+            <a:schemeClr val="accent1"/>
+          </a:effectRef>
+          <a:fontRef idx="minor">
+            <a:schemeClr val="lt1"/>
+          </a:fontRef>
+        </p:style>
+        <p:txBody>
+          <a:bodyPr rtlCol="0" anchor="ctr"/>
+          <a:lstStyle/>
+          <a:p/>
+        </p:txBody>
+      </p:sp>
+      <p:sp>
+        <p:nvSpPr>
+          <p:cNvPr id="12" name="Text 10"/>
+          <p:cNvSpPr txBox="1"/>
+          <p:nvPr/>
+        </p:nvSpPr>
+        <p:spPr>
+          <a:xfrm>
+            <a:off x="649224" y="2926080"/>
+            <a:ext cx="1563623" cy="512064"/>
+          </a:xfrm>
+          <a:prstGeom prst="rect">
+            <a:avLst/>
+          </a:prstGeom>
+          <a:noFill/>
+        </p:spPr>
+        <p:txBody>
+          <a:bodyPr wrap="square" lIns="0" rIns="0" tIns="0" bIns="0" anchor="t">
+            <a:spAutoFit/>
+          </a:bodyPr>
+          <a:lstStyle/>
+          <a:p>
+            <a:pPr>
+              <a:spcAft>
+                <a:spcPts val="100"/>
+              </a:spcAft>
+            </a:pPr>
+            <a:r>
+              <a:rPr sz="660" b="1" i="0">
+                <a:solidFill>
+                  <a:srgbClr val="F2F2F2"/>
+                </a:solidFill>
+                <a:latin typeface="Trenda IG Text"/>
+              </a:rPr>
+              <a:t>Answers questions</a:t>
+            </a:r>
+          </a:p>
+          <a:p>
+            <a:pPr>
+              <a:spcAft>
+                <a:spcPts val="100"/>
+              </a:spcAft>
+            </a:pPr>
+            <a:r>
+              <a:rPr sz="580" b="0" i="0">
+                <a:solidFill>
+                  <a:srgbClr val="B3B3B3"/>
+                </a:solidFill>
+                <a:latin typeface="Trenda IG Text"/>
+              </a:rPr>
+              <a:t>from approved articles only</a:t>
+            </a:r>
+          </a:p>
+        </p:txBody>
+      </p:sp>
+      <p:sp>
+        <p:nvSpPr>
+          <p:cNvPr id="13" name="Shape 11"/>
+          <p:cNvSpPr/>
+          <p:nvPr/>
+        </p:nvSpPr>
+        <p:spPr>
+          <a:xfrm>
+            <a:off x="521208" y="3557016"/>
+            <a:ext cx="64008" cy="64008"/>
+          </a:xfrm>
+          <a:prstGeom prst="ellipse">
+            <a:avLst/>
+          </a:prstGeom>
+          <a:solidFill>
+            <a:srgbClr val="00D6F2"/>
+          </a:solidFill>
+          <a:ln>
+            <a:noFill/>
+          </a:ln>
+          <a:effectLst/>
+        </p:spPr>
+        <p:style>
+          <a:lnRef idx="1">
+            <a:schemeClr val="accent1"/>
+          </a:lnRef>
+          <a:fillRef idx="3">
+            <a:schemeClr val="accent1"/>
+          </a:fillRef>
+          <a:effectRef idx="2">
+            <a:schemeClr val="accent1"/>
+          </a:effectRef>
+          <a:fontRef idx="minor">
+            <a:schemeClr val="lt1"/>
+          </a:fontRef>
+        </p:style>
+        <p:txBody>
+          <a:bodyPr rtlCol="0" anchor="ctr"/>
+          <a:lstStyle/>
+          <a:p/>
+        </p:txBody>
+      </p:sp>
+      <p:sp>
+        <p:nvSpPr>
+          <p:cNvPr id="14" name="Text 12"/>
+          <p:cNvSpPr txBox="1"/>
+          <p:nvPr/>
+        </p:nvSpPr>
+        <p:spPr>
+          <a:xfrm>
+            <a:off x="649224" y="3493008"/>
+            <a:ext cx="1563623" cy="512064"/>
+          </a:xfrm>
+          <a:prstGeom prst="rect">
+            <a:avLst/>
+          </a:prstGeom>
+          <a:noFill/>
+        </p:spPr>
+        <p:txBody>
+          <a:bodyPr wrap="square" lIns="0" rIns="0" tIns="0" bIns="0" anchor="t">
+            <a:spAutoFit/>
+          </a:bodyPr>
+          <a:lstStyle/>
+          <a:p>
+            <a:pPr>
+              <a:spcAft>
+                <a:spcPts val="100"/>
+              </a:spcAft>
+            </a:pPr>
+            <a:r>
+              <a:rPr sz="660" b="1" i="0">
+                <a:solidFill>
+                  <a:srgbClr val="F2F2F2"/>
+                </a:solidFill>
+                <a:latin typeface="Trenda IG Text"/>
+              </a:rPr>
+              <a:t>Verifies the caller</a:t>
+            </a:r>
+          </a:p>
+          <a:p>
+            <a:pPr>
+              <a:spcAft>
+                <a:spcPts val="100"/>
+              </a:spcAft>
+            </a:pPr>
+            <a:r>
+              <a:rPr sz="580" b="0" i="0">
+                <a:solidFill>
+                  <a:srgbClr val="B3B3B3"/>
+                </a:solidFill>
+                <a:latin typeface="Trenda IG Text"/>
+              </a:rPr>
+              <a:t>before anything patient-specific</a:t>
+            </a:r>
+          </a:p>
+        </p:txBody>
+      </p:sp>
+      <p:sp>
+        <p:nvSpPr>
+          <p:cNvPr id="15" name="Shape 13"/>
+          <p:cNvSpPr/>
+          <p:nvPr/>
+        </p:nvSpPr>
+        <p:spPr>
+          <a:xfrm>
+            <a:off x="521208" y="4123944"/>
+            <a:ext cx="64008" cy="64008"/>
+          </a:xfrm>
+          <a:prstGeom prst="ellipse">
+            <a:avLst/>
+          </a:prstGeom>
+          <a:solidFill>
+            <a:srgbClr val="00D6F2"/>
+          </a:solidFill>
+          <a:ln>
+            <a:noFill/>
+          </a:ln>
+          <a:effectLst/>
+        </p:spPr>
+        <p:style>
+          <a:lnRef idx="1">
+            <a:schemeClr val="accent1"/>
+          </a:lnRef>
+          <a:fillRef idx="3">
+            <a:schemeClr val="accent1"/>
+          </a:fillRef>
+          <a:effectRef idx="2">
+            <a:schemeClr val="accent1"/>
+          </a:effectRef>
+          <a:fontRef idx="minor">
+            <a:schemeClr val="lt1"/>
+          </a:fontRef>
+        </p:style>
+        <p:txBody>
+          <a:bodyPr rtlCol="0" anchor="ctr"/>
+          <a:lstStyle/>
+          <a:p/>
+        </p:txBody>
+      </p:sp>
+      <p:sp>
+        <p:nvSpPr>
+          <p:cNvPr id="16" name="Text 14"/>
+          <p:cNvSpPr txBox="1"/>
+          <p:nvPr/>
+        </p:nvSpPr>
+        <p:spPr>
+          <a:xfrm>
+            <a:off x="649224" y="4059936"/>
+            <a:ext cx="1563623" cy="512064"/>
+          </a:xfrm>
+          <a:prstGeom prst="rect">
+            <a:avLst/>
+          </a:prstGeom>
+          <a:noFill/>
+        </p:spPr>
+        <p:txBody>
+          <a:bodyPr wrap="square" lIns="0" rIns="0" tIns="0" bIns="0" anchor="t">
+            <a:spAutoFit/>
+          </a:bodyPr>
+          <a:lstStyle/>
+          <a:p>
+            <a:pPr>
+              <a:spcAft>
+                <a:spcPts val="100"/>
+              </a:spcAft>
+            </a:pPr>
+            <a:r>
+              <a:rPr sz="660" b="1" i="0">
+                <a:solidFill>
+                  <a:srgbClr val="F2F2F2"/>
+                </a:solidFill>
+                <a:latin typeface="Trenda IG Text"/>
+              </a:rPr>
+              <a:t>Books, cancels, reschedules</a:t>
+            </a:r>
+          </a:p>
+          <a:p>
+            <a:pPr>
+              <a:spcAft>
+                <a:spcPts val="100"/>
+              </a:spcAft>
+            </a:pPr>
+            <a:r>
+              <a:rPr sz="580" b="0" i="0">
+                <a:solidFill>
+                  <a:srgbClr val="B3B3B3"/>
+                </a:solidFill>
+                <a:latin typeface="Trenda IG Text"/>
+              </a:rPr>
+              <a:t>through the scoped API</a:t>
+            </a:r>
+          </a:p>
+        </p:txBody>
+      </p:sp>
+      <p:sp>
+        <p:nvSpPr>
+          <p:cNvPr id="17" name="Shape 15"/>
+          <p:cNvSpPr/>
+          <p:nvPr/>
+        </p:nvSpPr>
+        <p:spPr>
+          <a:xfrm>
+            <a:off x="521208" y="4690872"/>
+            <a:ext cx="64008" cy="64008"/>
+          </a:xfrm>
+          <a:prstGeom prst="ellipse">
+            <a:avLst/>
+          </a:prstGeom>
+          <a:solidFill>
+            <a:srgbClr val="00D6F2"/>
+          </a:solidFill>
+          <a:ln>
+            <a:noFill/>
+          </a:ln>
+          <a:effectLst/>
+        </p:spPr>
+        <p:style>
+          <a:lnRef idx="1">
+            <a:schemeClr val="accent1"/>
+          </a:lnRef>
+          <a:fillRef idx="3">
+            <a:schemeClr val="accent1"/>
+          </a:fillRef>
+          <a:effectRef idx="2">
+            <a:schemeClr val="accent1"/>
+          </a:effectRef>
+          <a:fontRef idx="minor">
+            <a:schemeClr val="lt1"/>
+          </a:fontRef>
+        </p:style>
+        <p:txBody>
+          <a:bodyPr rtlCol="0" anchor="ctr"/>
+          <a:lstStyle/>
+          <a:p/>
+        </p:txBody>
+      </p:sp>
+      <p:sp>
+        <p:nvSpPr>
+          <p:cNvPr id="18" name="Text 16"/>
+          <p:cNvSpPr txBox="1"/>
+          <p:nvPr/>
+        </p:nvSpPr>
+        <p:spPr>
+          <a:xfrm>
+            <a:off x="649224" y="4626864"/>
+            <a:ext cx="1563623" cy="512064"/>
+          </a:xfrm>
+          <a:prstGeom prst="rect">
+            <a:avLst/>
+          </a:prstGeom>
+          <a:noFill/>
+        </p:spPr>
+        <p:txBody>
+          <a:bodyPr wrap="square" lIns="0" rIns="0" tIns="0" bIns="0" anchor="t">
+            <a:spAutoFit/>
+          </a:bodyPr>
+          <a:lstStyle/>
+          <a:p>
+            <a:pPr>
+              <a:spcAft>
+                <a:spcPts val="100"/>
+              </a:spcAft>
+            </a:pPr>
+            <a:r>
+              <a:rPr sz="660" b="1" i="0">
+                <a:solidFill>
+                  <a:srgbClr val="F2F2F2"/>
+                </a:solidFill>
+                <a:latin typeface="Trenda IG Text"/>
+              </a:rPr>
+              <a:t>Hands off to a person</a:t>
+            </a:r>
+          </a:p>
+          <a:p>
+            <a:pPr>
+              <a:spcAft>
+                <a:spcPts val="100"/>
+              </a:spcAft>
+            </a:pPr>
+            <a:r>
+              <a:rPr sz="580" b="0" i="0">
+                <a:solidFill>
+                  <a:srgbClr val="B3B3B3"/>
+                </a:solidFill>
+                <a:latin typeface="Trenda IG Text"/>
+              </a:rPr>
+              <a:t>when it should not decide</a:t>
+            </a:r>
+          </a:p>
+        </p:txBody>
+      </p:sp>
+      <p:cxnSp>
+        <p:nvCxnSpPr>
+          <p:cNvPr id="19" name="Arrow 17"/>
+          <p:cNvCxnSpPr/>
+          <p:nvPr/>
+        </p:nvCxnSpPr>
+        <p:spPr>
+          <a:xfrm>
+            <a:off x="1348739" y="2148840"/>
+            <a:ext cx="0" cy="228600"/>
+          </a:xfrm>
+          <a:prstGeom prst="line">
+            <a:avLst/>
+          </a:prstGeom>
+          <a:ln w="12700">
+            <a:solidFill>
+              <a:srgbClr val="8C8C8C"/>
+            </a:solidFill>
+            <a:tailEnd type="triangle" w="med" len="med"/>
+          </a:ln>
+        </p:spPr>
+        <p:style>
+          <a:lnRef idx="2">
+            <a:schemeClr val="accent1"/>
+          </a:lnRef>
+          <a:fillRef idx="0">
+            <a:schemeClr val="accent1"/>
+          </a:fillRef>
+          <a:effectRef idx="1">
+            <a:schemeClr val="accent1"/>
+          </a:effectRef>
+          <a:fontRef idx="minor">
+            <a:schemeClr val="tx1"/>
+          </a:fontRef>
+        </p:style>
+      </p:cxnSp>
+      <p:sp>
+        <p:nvSpPr>
+          <p:cNvPr id="20" name="Shape 18"/>
+          <p:cNvSpPr/>
+          <p:nvPr/>
+        </p:nvSpPr>
+        <p:spPr>
+          <a:xfrm>
+            <a:off x="2468880" y="1188720"/>
+            <a:ext cx="6583680" cy="1874519"/>
+          </a:xfrm>
+          <a:prstGeom prst="roundRect">
+            <a:avLst>
+              <a:gd name="adj" fmla="val 2000"/>
+            </a:avLst>
+          </a:prstGeom>
+          <a:solidFill>
+            <a:srgbClr val="1E1E1E"/>
+          </a:solidFill>
+          <a:ln>
+            <a:noFill/>
+          </a:ln>
+          <a:effectLst/>
+        </p:spPr>
+        <p:style>
+          <a:lnRef idx="1">
+            <a:schemeClr val="accent1"/>
+          </a:lnRef>
+          <a:fillRef idx="3">
+            <a:schemeClr val="accent1"/>
+          </a:fillRef>
+          <a:effectRef idx="2">
+            <a:schemeClr val="accent1"/>
+          </a:effectRef>
+          <a:fontRef idx="minor">
+            <a:schemeClr val="lt1"/>
+          </a:fontRef>
+        </p:style>
+        <p:txBody>
+          <a:bodyPr rtlCol="0" anchor="ctr"/>
+          <a:lstStyle/>
+          <a:p/>
+        </p:txBody>
+      </p:sp>
+      <p:sp>
+        <p:nvSpPr>
+          <p:cNvPr id="21" name="Shape 19"/>
+          <p:cNvSpPr/>
+          <p:nvPr/>
+        </p:nvSpPr>
+        <p:spPr>
+          <a:xfrm>
+            <a:off x="2468880" y="1188720"/>
+            <a:ext cx="6583680" cy="256032"/>
+          </a:xfrm>
+          <a:prstGeom prst="rect">
+            <a:avLst/>
+          </a:prstGeom>
+          <a:solidFill>
+            <a:srgbClr val="2B2B2B"/>
+          </a:solidFill>
+          <a:ln>
+            <a:noFill/>
+          </a:ln>
+          <a:effectLst/>
+        </p:spPr>
+        <p:style>
+          <a:lnRef idx="1">
+            <a:schemeClr val="accent1"/>
+          </a:lnRef>
+          <a:fillRef idx="3">
+            <a:schemeClr val="accent1"/>
+          </a:fillRef>
+          <a:effectRef idx="2">
+            <a:schemeClr val="accent1"/>
+          </a:effectRef>
+          <a:fontRef idx="minor">
+            <a:schemeClr val="lt1"/>
+          </a:fontRef>
+        </p:style>
+        <p:txBody>
+          <a:bodyPr rtlCol="0" anchor="ctr"/>
+          <a:lstStyle/>
+          <a:p/>
+        </p:txBody>
+      </p:sp>
+      <p:sp>
+        <p:nvSpPr>
+          <p:cNvPr id="22" name="Text 20"/>
+          <p:cNvSpPr txBox="1"/>
+          <p:nvPr/>
+        </p:nvSpPr>
+        <p:spPr>
+          <a:xfrm>
+            <a:off x="2578608" y="1188720"/>
+            <a:ext cx="6364224" cy="256032"/>
+          </a:xfrm>
+          <a:prstGeom prst="rect">
+            <a:avLst/>
+          </a:prstGeom>
+          <a:noFill/>
+        </p:spPr>
+        <p:txBody>
+          <a:bodyPr wrap="square" lIns="0" rIns="0" tIns="0" bIns="0" anchor="ctr">
+            <a:spAutoFit/>
+          </a:bodyPr>
+          <a:lstStyle/>
+          <a:p>
+            <a:r>
+              <a:rPr sz="640" b="1" i="0" spc="120">
+                <a:solidFill>
+                  <a:srgbClr val="F2F2F2"/>
+                </a:solidFill>
+                <a:latin typeface="Trenda IG Text"/>
+              </a:rPr>
+              <a:t>1  KNOWLEDGE PATH</a:t>
+            </a:r>
+            <a:r>
+              <a:rPr sz="640" b="0" i="0">
+                <a:solidFill>
+                  <a:srgbClr val="B3B3B3"/>
+                </a:solidFill>
+                <a:latin typeface="Trenda IG Text"/>
+              </a:rPr>
+              <a:t>   no PHI · keeps every answer accurate</a:t>
+            </a:r>
+          </a:p>
+        </p:txBody>
+      </p:sp>
+      <p:sp>
+        <p:nvSpPr>
+          <p:cNvPr id="23" name="Shape 21"/>
+          <p:cNvSpPr/>
+          <p:nvPr/>
+        </p:nvSpPr>
+        <p:spPr>
+          <a:xfrm>
+            <a:off x="2468880" y="3355848"/>
+            <a:ext cx="6583680" cy="1874519"/>
+          </a:xfrm>
+          <a:prstGeom prst="roundRect">
+            <a:avLst>
+              <a:gd name="adj" fmla="val 2000"/>
+            </a:avLst>
+          </a:prstGeom>
+          <a:solidFill>
+            <a:srgbClr val="1E1E1E"/>
+          </a:solidFill>
+          <a:ln>
+            <a:noFill/>
+          </a:ln>
+          <a:effectLst/>
+        </p:spPr>
+        <p:style>
+          <a:lnRef idx="1">
+            <a:schemeClr val="accent1"/>
+          </a:lnRef>
+          <a:fillRef idx="3">
+            <a:schemeClr val="accent1"/>
+          </a:fillRef>
+          <a:effectRef idx="2">
+            <a:schemeClr val="accent1"/>
+          </a:effectRef>
+          <a:fontRef idx="minor">
+            <a:schemeClr val="lt1"/>
+          </a:fontRef>
+        </p:style>
+        <p:txBody>
+          <a:bodyPr rtlCol="0" anchor="ctr"/>
+          <a:lstStyle/>
+          <a:p/>
+        </p:txBody>
+      </p:sp>
+      <p:sp>
+        <p:nvSpPr>
+          <p:cNvPr id="24" name="Shape 22"/>
+          <p:cNvSpPr/>
+          <p:nvPr/>
+        </p:nvSpPr>
+        <p:spPr>
+          <a:xfrm>
+            <a:off x="2468880" y="3355848"/>
+            <a:ext cx="6583680" cy="256032"/>
+          </a:xfrm>
+          <a:prstGeom prst="rect">
+            <a:avLst/>
+          </a:prstGeom>
+          <a:solidFill>
+            <a:srgbClr val="2B2B2B"/>
+          </a:solidFill>
+          <a:ln>
+            <a:noFill/>
+          </a:ln>
+          <a:effectLst/>
+        </p:spPr>
+        <p:style>
+          <a:lnRef idx="1">
+            <a:schemeClr val="accent1"/>
+          </a:lnRef>
+          <a:fillRef idx="3">
+            <a:schemeClr val="accent1"/>
+          </a:fillRef>
+          <a:effectRef idx="2">
+            <a:schemeClr val="accent1"/>
+          </a:effectRef>
+          <a:fontRef idx="minor">
+            <a:schemeClr val="lt1"/>
+          </a:fontRef>
+        </p:style>
+        <p:txBody>
+          <a:bodyPr rtlCol="0" anchor="ctr"/>
+          <a:lstStyle/>
+          <a:p/>
+        </p:txBody>
+      </p:sp>
+      <p:sp>
+        <p:nvSpPr>
+          <p:cNvPr id="25" name="Text 23"/>
+          <p:cNvSpPr txBox="1"/>
+          <p:nvPr/>
+        </p:nvSpPr>
+        <p:spPr>
+          <a:xfrm>
+            <a:off x="2578608" y="3355848"/>
+            <a:ext cx="6364224" cy="256032"/>
+          </a:xfrm>
+          <a:prstGeom prst="rect">
+            <a:avLst/>
+          </a:prstGeom>
+          <a:noFill/>
+        </p:spPr>
+        <p:txBody>
+          <a:bodyPr wrap="square" lIns="0" rIns="0" tIns="0" bIns="0" anchor="ctr">
+            <a:spAutoFit/>
+          </a:bodyPr>
+          <a:lstStyle/>
+          <a:p>
+            <a:r>
+              <a:rPr sz="640" b="1" i="0" spc="120">
+                <a:solidFill>
+                  <a:srgbClr val="F2F2F2"/>
+                </a:solidFill>
+                <a:latin typeface="Trenda IG Text"/>
+              </a:rPr>
+              <a:t>2  PATIENT PATH</a:t>
+            </a:r>
+            <a:r>
+              <a:rPr sz="640" b="0" i="0">
+                <a:solidFill>
+                  <a:srgbClr val="B3B3B3"/>
+                </a:solidFill>
+                <a:latin typeface="Trenda IG Text"/>
+              </a:rPr>
+              <a:t>   PHI · verified caller only · this patient only</a:t>
+            </a:r>
+          </a:p>
+        </p:txBody>
+      </p:sp>
+      <p:sp>
+        <p:nvSpPr>
+          <p:cNvPr id="26" name="Shape 24"/>
+          <p:cNvSpPr/>
+          <p:nvPr/>
+        </p:nvSpPr>
+        <p:spPr>
+          <a:xfrm>
+            <a:off x="2578608" y="1554480"/>
+            <a:ext cx="1481328" cy="896112"/>
+          </a:xfrm>
+          <a:prstGeom prst="roundRect">
+            <a:avLst>
+              <a:gd name="adj" fmla="val 7000"/>
+            </a:avLst>
+          </a:prstGeom>
+          <a:solidFill>
+            <a:srgbClr val="141414"/>
+          </a:solidFill>
+          <a:ln w="12700">
+            <a:solidFill>
+              <a:srgbClr val="333333"/>
+            </a:solidFill>
+          </a:ln>
+          <a:effectLst/>
+        </p:spPr>
+        <p:style>
+          <a:lnRef idx="1">
+            <a:schemeClr val="accent1"/>
+          </a:lnRef>
+          <a:fillRef idx="3">
+            <a:schemeClr val="accent1"/>
+          </a:fillRef>
+          <a:effectRef idx="2">
+            <a:schemeClr val="accent1"/>
+          </a:effectRef>
+          <a:fontRef idx="minor">
+            <a:schemeClr val="lt1"/>
+          </a:fontRef>
+        </p:style>
+        <p:txBody>
+          <a:bodyPr rtlCol="0" anchor="ctr"/>
+          <a:lstStyle/>
+          <a:p/>
+        </p:txBody>
+      </p:sp>
+      <p:pic>
+        <p:nvPicPr>
+          <p:cNvPr id="27" name="Picture 26" descr="googlecloud.png"/>
+          <p:cNvPicPr>
+            <a:picLocks noChangeAspect="1"/>
+          </p:cNvPicPr>
+          <p:nvPr/>
+        </p:nvPicPr>
+        <p:blipFill>
+          <a:blip r:embed="rId3"/>
+          <a:stretch>
+            <a:fillRect/>
+          </a:stretch>
+        </p:blipFill>
+        <p:spPr>
+          <a:xfrm>
+            <a:off x="2670048" y="1618488"/>
+            <a:ext cx="182880" cy="182880"/>
+          </a:xfrm>
+          <a:prstGeom prst="rect">
+            <a:avLst/>
+          </a:prstGeom>
+        </p:spPr>
+      </p:pic>
+      <p:sp>
+        <p:nvSpPr>
+          <p:cNvPr id="28" name="Text 25"/>
+          <p:cNvSpPr txBox="1"/>
+          <p:nvPr/>
+        </p:nvSpPr>
+        <p:spPr>
+          <a:xfrm>
+            <a:off x="2907792" y="1609344"/>
+            <a:ext cx="1078991" cy="201168"/>
+          </a:xfrm>
+          <a:prstGeom prst="rect">
+            <a:avLst/>
+          </a:prstGeom>
+          <a:noFill/>
+        </p:spPr>
+        <p:txBody>
+          <a:bodyPr wrap="square" lIns="0" rIns="0" tIns="0" bIns="0" anchor="ctr">
+            <a:spAutoFit/>
+          </a:bodyPr>
+          <a:lstStyle/>
+          <a:p>
+            <a:r>
+              <a:rPr sz="660" b="1" i="0">
+                <a:solidFill>
+                  <a:srgbClr val="F2F2F2"/>
+                </a:solidFill>
+                <a:latin typeface="Trenda IG Text"/>
+              </a:rPr>
+              <a:t>KB articles in GCP</a:t>
+            </a:r>
+          </a:p>
+        </p:txBody>
+      </p:sp>
+      <p:sp>
+        <p:nvSpPr>
+          <p:cNvPr id="29" name="Text 26"/>
+          <p:cNvSpPr txBox="1"/>
+          <p:nvPr/>
+        </p:nvSpPr>
+        <p:spPr>
+          <a:xfrm>
+            <a:off x="2670048" y="1837944"/>
+            <a:ext cx="1298448" cy="585215"/>
+          </a:xfrm>
+          <a:prstGeom prst="rect">
+            <a:avLst/>
+          </a:prstGeom>
+          <a:noFill/>
+        </p:spPr>
+        <p:txBody>
+          <a:bodyPr wrap="square" lIns="0" rIns="0" tIns="0" bIns="0" anchor="t">
+            <a:spAutoFit/>
+          </a:bodyPr>
+          <a:lstStyle/>
+          <a:p>
+            <a:pPr>
+              <a:spcAft>
+                <a:spcPts val="100"/>
+              </a:spcAft>
+            </a:pPr>
+            <a:r>
+              <a:rPr sz="590" b="0" i="0">
+                <a:solidFill>
+                  <a:srgbClr val="B3B3B3"/>
+                </a:solidFill>
+                <a:latin typeface="Trenda IG Text"/>
+              </a:rPr>
+              <a:t>Source of truth. Each has an owner, version and review date.</a:t>
+            </a:r>
+          </a:p>
+        </p:txBody>
+      </p:sp>
+      <p:sp>
+        <p:nvSpPr>
+          <p:cNvPr id="30" name="Shape 27"/>
+          <p:cNvSpPr/>
+          <p:nvPr/>
+        </p:nvSpPr>
+        <p:spPr>
+          <a:xfrm>
+            <a:off x="4206240" y="1554480"/>
+            <a:ext cx="1481328" cy="896112"/>
+          </a:xfrm>
+          <a:prstGeom prst="roundRect">
+            <a:avLst>
+              <a:gd name="adj" fmla="val 7000"/>
+            </a:avLst>
+          </a:prstGeom>
+          <a:solidFill>
+            <a:srgbClr val="141414"/>
+          </a:solidFill>
+          <a:ln w="12700">
+            <a:solidFill>
+              <a:srgbClr val="333333"/>
+            </a:solidFill>
+          </a:ln>
+          <a:effectLst/>
+        </p:spPr>
+        <p:style>
+          <a:lnRef idx="1">
+            <a:schemeClr val="accent1"/>
+          </a:lnRef>
+          <a:fillRef idx="3">
+            <a:schemeClr val="accent1"/>
+          </a:fillRef>
+          <a:effectRef idx="2">
+            <a:schemeClr val="accent1"/>
+          </a:effectRef>
+          <a:fontRef idx="minor">
+            <a:schemeClr val="lt1"/>
+          </a:fontRef>
+        </p:style>
+        <p:txBody>
+          <a:bodyPr rtlCol="0" anchor="ctr"/>
+          <a:lstStyle/>
+          <a:p/>
+        </p:txBody>
+      </p:sp>
+      <p:sp>
+        <p:nvSpPr>
+          <p:cNvPr id="31" name="Text 28"/>
+          <p:cNvSpPr txBox="1"/>
+          <p:nvPr/>
+        </p:nvSpPr>
+        <p:spPr>
+          <a:xfrm>
+            <a:off x="4297680" y="1609344"/>
+            <a:ext cx="1316736" cy="201168"/>
+          </a:xfrm>
+          <a:prstGeom prst="rect">
+            <a:avLst/>
+          </a:prstGeom>
+          <a:noFill/>
+        </p:spPr>
+        <p:txBody>
+          <a:bodyPr wrap="square" lIns="0" rIns="0" tIns="0" bIns="0" anchor="ctr">
+            <a:spAutoFit/>
+          </a:bodyPr>
+          <a:lstStyle/>
+          <a:p>
+            <a:r>
+              <a:rPr sz="660" b="1" i="0">
+                <a:solidFill>
+                  <a:srgbClr val="F2F2F2"/>
+                </a:solidFill>
+                <a:latin typeface="Trenda IG Text"/>
+              </a:rPr>
+              <a:t>PHI scan</a:t>
+            </a:r>
+          </a:p>
+        </p:txBody>
+      </p:sp>
+      <p:sp>
+        <p:nvSpPr>
+          <p:cNvPr id="32" name="Text 29"/>
+          <p:cNvSpPr txBox="1"/>
+          <p:nvPr/>
+        </p:nvSpPr>
+        <p:spPr>
+          <a:xfrm>
+            <a:off x="4297680" y="1837944"/>
+            <a:ext cx="1298448" cy="585215"/>
+          </a:xfrm>
+          <a:prstGeom prst="rect">
+            <a:avLst/>
+          </a:prstGeom>
+          <a:noFill/>
+        </p:spPr>
+        <p:txBody>
+          <a:bodyPr wrap="square" lIns="0" rIns="0" tIns="0" bIns="0" anchor="t">
+            <a:spAutoFit/>
+          </a:bodyPr>
+          <a:lstStyle/>
+          <a:p>
+            <a:pPr>
+              <a:spcAft>
+                <a:spcPts val="100"/>
+              </a:spcAft>
+            </a:pPr>
+            <a:r>
+              <a:rPr sz="590" b="0" i="0">
+                <a:solidFill>
+                  <a:srgbClr val="B3B3B3"/>
+                </a:solidFill>
+                <a:latin typeface="Trenda IG Text"/>
+              </a:rPr>
+              <a:t>DLP and Collibra check every article; no patient example is published.</a:t>
+            </a:r>
+          </a:p>
+        </p:txBody>
+      </p:sp>
+      <p:sp>
+        <p:nvSpPr>
+          <p:cNvPr id="33" name="Shape 30"/>
+          <p:cNvSpPr/>
+          <p:nvPr/>
+        </p:nvSpPr>
+        <p:spPr>
+          <a:xfrm>
+            <a:off x="5833872" y="1554480"/>
+            <a:ext cx="1481328" cy="896112"/>
+          </a:xfrm>
+          <a:prstGeom prst="roundRect">
+            <a:avLst>
+              <a:gd name="adj" fmla="val 8000"/>
+            </a:avLst>
+          </a:prstGeom>
+          <a:solidFill>
+            <a:srgbClr val="2B2508"/>
+          </a:solidFill>
+          <a:ln w="11430">
+            <a:solidFill>
+              <a:srgbClr val="FFD700"/>
+            </a:solidFill>
+          </a:ln>
+          <a:effectLst/>
+        </p:spPr>
+        <p:style>
+          <a:lnRef idx="1">
+            <a:schemeClr val="accent1"/>
+          </a:lnRef>
+          <a:fillRef idx="3">
+            <a:schemeClr val="accent1"/>
+          </a:fillRef>
+          <a:effectRef idx="2">
+            <a:schemeClr val="accent1"/>
+          </a:effectRef>
+          <a:fontRef idx="minor">
+            <a:schemeClr val="lt1"/>
+          </a:fontRef>
+        </p:style>
+        <p:txBody>
+          <a:bodyPr rtlCol="0" anchor="ctr"/>
+          <a:lstStyle/>
+          <a:p/>
+        </p:txBody>
+      </p:sp>
+      <p:pic>
+        <p:nvPicPr>
+          <p:cNvPr id="34" name="Picture 33" descr="people.png"/>
+          <p:cNvPicPr>
+            <a:picLocks noChangeAspect="1"/>
+          </p:cNvPicPr>
+          <p:nvPr/>
+        </p:nvPicPr>
+        <p:blipFill>
+          <a:blip r:embed="rId2"/>
+          <a:stretch>
+            <a:fillRect/>
+          </a:stretch>
+        </p:blipFill>
+        <p:spPr>
+          <a:xfrm>
+            <a:off x="5925312" y="1627632"/>
+            <a:ext cx="182880" cy="182880"/>
+          </a:xfrm>
+          <a:prstGeom prst="rect">
+            <a:avLst/>
+          </a:prstGeom>
+        </p:spPr>
+      </p:pic>
+      <p:sp>
+        <p:nvSpPr>
+          <p:cNvPr id="35" name="Text 31"/>
+          <p:cNvSpPr txBox="1"/>
+          <p:nvPr/>
+        </p:nvSpPr>
+        <p:spPr>
+          <a:xfrm>
+            <a:off x="6163056" y="1600200"/>
+            <a:ext cx="1078992" cy="237744"/>
+          </a:xfrm>
+          <a:prstGeom prst="rect">
+            <a:avLst/>
+          </a:prstGeom>
+          <a:noFill/>
+        </p:spPr>
+        <p:txBody>
+          <a:bodyPr wrap="square" lIns="0" rIns="0" tIns="0" bIns="0" anchor="ctr">
+            <a:spAutoFit/>
+          </a:bodyPr>
+          <a:lstStyle/>
+          <a:p>
+            <a:r>
+              <a:rPr sz="700" b="1" i="0">
+                <a:solidFill>
+                  <a:srgbClr val="FFD700"/>
+                </a:solidFill>
+                <a:latin typeface="Trenda IG Text"/>
+              </a:rPr>
+              <a:t>Owner approves</a:t>
+            </a:r>
+          </a:p>
+        </p:txBody>
+      </p:sp>
+      <p:sp>
+        <p:nvSpPr>
+          <p:cNvPr id="36" name="Text 32"/>
+          <p:cNvSpPr txBox="1"/>
+          <p:nvPr/>
+        </p:nvSpPr>
+        <p:spPr>
+          <a:xfrm>
+            <a:off x="5925312" y="1883664"/>
+            <a:ext cx="1316736" cy="530352"/>
+          </a:xfrm>
+          <a:prstGeom prst="rect">
+            <a:avLst/>
+          </a:prstGeom>
+          <a:noFill/>
+        </p:spPr>
+        <p:txBody>
+          <a:bodyPr wrap="square" lIns="0" rIns="0" tIns="0" bIns="0" anchor="t">
+            <a:spAutoFit/>
+          </a:bodyPr>
+          <a:lstStyle/>
+          <a:p>
+            <a:r>
+              <a:rPr sz="600" b="0" i="0">
+                <a:solidFill>
+                  <a:srgbClr val="B3B3B3"/>
+                </a:solidFill>
+                <a:latin typeface="Trenda IG Text"/>
+              </a:rPr>
+              <a:t>Clinical content gets a clinical reviewer. Conflicting versions retired.</a:t>
+            </a:r>
+          </a:p>
+        </p:txBody>
+      </p:sp>
+      <p:sp>
+        <p:nvSpPr>
+          <p:cNvPr id="37" name="Shape 33"/>
+          <p:cNvSpPr/>
+          <p:nvPr/>
+        </p:nvSpPr>
+        <p:spPr>
+          <a:xfrm>
+            <a:off x="7461504" y="1554480"/>
+            <a:ext cx="1481328" cy="896112"/>
+          </a:xfrm>
+          <a:prstGeom prst="roundRect">
+            <a:avLst>
+              <a:gd name="adj" fmla="val 7000"/>
+            </a:avLst>
+          </a:prstGeom>
+          <a:solidFill>
+            <a:srgbClr val="141414"/>
+          </a:solidFill>
+          <a:ln w="12700">
+            <a:solidFill>
+              <a:srgbClr val="00D6F2"/>
+            </a:solidFill>
+          </a:ln>
+          <a:effectLst/>
+        </p:spPr>
+        <p:style>
+          <a:lnRef idx="1">
+            <a:schemeClr val="accent1"/>
+          </a:lnRef>
+          <a:fillRef idx="3">
+            <a:schemeClr val="accent1"/>
+          </a:fillRef>
+          <a:effectRef idx="2">
+            <a:schemeClr val="accent1"/>
+          </a:effectRef>
+          <a:fontRef idx="minor">
+            <a:schemeClr val="lt1"/>
+          </a:fontRef>
+        </p:style>
+        <p:txBody>
+          <a:bodyPr rtlCol="0" anchor="ctr"/>
+          <a:lstStyle/>
+          <a:p/>
+        </p:txBody>
+      </p:sp>
+      <p:sp>
+        <p:nvSpPr>
+          <p:cNvPr id="38" name="Text 34"/>
+          <p:cNvSpPr txBox="1"/>
+          <p:nvPr/>
+        </p:nvSpPr>
+        <p:spPr>
+          <a:xfrm>
+            <a:off x="7552944" y="1609344"/>
+            <a:ext cx="1316736" cy="201168"/>
+          </a:xfrm>
+          <a:prstGeom prst="rect">
+            <a:avLst/>
+          </a:prstGeom>
+          <a:noFill/>
+        </p:spPr>
+        <p:txBody>
+          <a:bodyPr wrap="square" lIns="0" rIns="0" tIns="0" bIns="0" anchor="ctr">
+            <a:spAutoFit/>
+          </a:bodyPr>
+          <a:lstStyle/>
+          <a:p>
+            <a:r>
+              <a:rPr sz="660" b="1" i="0">
+                <a:solidFill>
+                  <a:srgbClr val="F2F2F2"/>
+                </a:solidFill>
+                <a:latin typeface="Trenda IG Text"/>
+              </a:rPr>
+              <a:t>Approved KB index</a:t>
+            </a:r>
+          </a:p>
+        </p:txBody>
+      </p:sp>
+      <p:sp>
+        <p:nvSpPr>
+          <p:cNvPr id="39" name="Text 35"/>
+          <p:cNvSpPr txBox="1"/>
+          <p:nvPr/>
+        </p:nvSpPr>
+        <p:spPr>
+          <a:xfrm>
+            <a:off x="7552944" y="1837944"/>
+            <a:ext cx="1298448" cy="585215"/>
+          </a:xfrm>
+          <a:prstGeom prst="rect">
+            <a:avLst/>
+          </a:prstGeom>
+          <a:noFill/>
+        </p:spPr>
+        <p:txBody>
+          <a:bodyPr wrap="square" lIns="0" rIns="0" tIns="0" bIns="0" anchor="t">
+            <a:spAutoFit/>
+          </a:bodyPr>
+          <a:lstStyle/>
+          <a:p>
+            <a:pPr>
+              <a:spcAft>
+                <a:spcPts val="100"/>
+              </a:spcAft>
+            </a:pPr>
+            <a:r>
+              <a:rPr sz="590" b="0" i="0">
+                <a:solidFill>
+                  <a:srgbClr val="B3B3B3"/>
+                </a:solidFill>
+                <a:latin typeface="Trenda IG Text"/>
+              </a:rPr>
+              <a:t>Synced to Sierra on every change, so no stale answer.</a:t>
+            </a:r>
+          </a:p>
+        </p:txBody>
+      </p:sp>
+      <p:cxnSp>
+        <p:nvCxnSpPr>
+          <p:cNvPr id="40" name="Arrow 36"/>
+          <p:cNvCxnSpPr/>
+          <p:nvPr/>
+        </p:nvCxnSpPr>
+        <p:spPr>
+          <a:xfrm>
+            <a:off x="4059936" y="2002536"/>
+            <a:ext cx="146304" cy="0"/>
+          </a:xfrm>
+          <a:prstGeom prst="line">
+            <a:avLst/>
+          </a:prstGeom>
+          <a:ln w="12700">
+            <a:solidFill>
+              <a:srgbClr val="8C8C8C"/>
+            </a:solidFill>
+            <a:tailEnd type="triangle" w="med" len="med"/>
+          </a:ln>
+        </p:spPr>
+        <p:style>
+          <a:lnRef idx="2">
+            <a:schemeClr val="accent1"/>
+          </a:lnRef>
+          <a:fillRef idx="0">
+            <a:schemeClr val="accent1"/>
+          </a:fillRef>
+          <a:effectRef idx="1">
+            <a:schemeClr val="accent1"/>
+          </a:effectRef>
+          <a:fontRef idx="minor">
+            <a:schemeClr val="tx1"/>
+          </a:fontRef>
+        </p:style>
+      </p:cxnSp>
+      <p:cxnSp>
+        <p:nvCxnSpPr>
+          <p:cNvPr id="41" name="Arrow 37"/>
+          <p:cNvCxnSpPr/>
+          <p:nvPr/>
+        </p:nvCxnSpPr>
+        <p:spPr>
+          <a:xfrm>
+            <a:off x="5687568" y="2002536"/>
+            <a:ext cx="146304" cy="0"/>
+          </a:xfrm>
+          <a:prstGeom prst="line">
+            <a:avLst/>
+          </a:prstGeom>
+          <a:ln w="12700">
+            <a:solidFill>
+              <a:srgbClr val="8C8C8C"/>
+            </a:solidFill>
+            <a:tailEnd type="triangle" w="med" len="med"/>
+          </a:ln>
+        </p:spPr>
+        <p:style>
+          <a:lnRef idx="2">
+            <a:schemeClr val="accent1"/>
+          </a:lnRef>
+          <a:fillRef idx="0">
+            <a:schemeClr val="accent1"/>
+          </a:fillRef>
+          <a:effectRef idx="1">
+            <a:schemeClr val="accent1"/>
+          </a:effectRef>
+          <a:fontRef idx="minor">
+            <a:schemeClr val="tx1"/>
+          </a:fontRef>
+        </p:style>
+      </p:cxnSp>
+      <p:cxnSp>
+        <p:nvCxnSpPr>
+          <p:cNvPr id="42" name="Arrow 38"/>
+          <p:cNvCxnSpPr/>
+          <p:nvPr/>
+        </p:nvCxnSpPr>
+        <p:spPr>
+          <a:xfrm>
+            <a:off x="7315200" y="2002536"/>
+            <a:ext cx="146304" cy="0"/>
+          </a:xfrm>
+          <a:prstGeom prst="line">
+            <a:avLst/>
+          </a:prstGeom>
+          <a:ln w="12700">
+            <a:solidFill>
+              <a:srgbClr val="8C8C8C"/>
+            </a:solidFill>
+            <a:tailEnd type="triangle" w="med" len="med"/>
+          </a:ln>
+        </p:spPr>
+        <p:style>
+          <a:lnRef idx="2">
+            <a:schemeClr val="accent1"/>
+          </a:lnRef>
+          <a:fillRef idx="0">
+            <a:schemeClr val="accent1"/>
+          </a:fillRef>
+          <a:effectRef idx="1">
+            <a:schemeClr val="accent1"/>
+          </a:effectRef>
+          <a:fontRef idx="minor">
+            <a:schemeClr val="tx1"/>
+          </a:fontRef>
+        </p:style>
+      </p:cxnSp>
+      <p:cxnSp>
+        <p:nvCxnSpPr>
+          <p:cNvPr id="43" name="Arrow 39"/>
+          <p:cNvCxnSpPr/>
+          <p:nvPr/>
+        </p:nvCxnSpPr>
+        <p:spPr>
+          <a:xfrm>
+            <a:off x="8805672" y="2450592"/>
+            <a:ext cx="0" cy="429767"/>
+          </a:xfrm>
+          <a:prstGeom prst="line">
+            <a:avLst/>
+          </a:prstGeom>
+          <a:ln w="15875">
+            <a:solidFill>
+              <a:srgbClr val="00D6F2"/>
+            </a:solidFill>
+          </a:ln>
+        </p:spPr>
+        <p:style>
+          <a:lnRef idx="2">
+            <a:schemeClr val="accent1"/>
+          </a:lnRef>
+          <a:fillRef idx="0">
+            <a:schemeClr val="accent1"/>
+          </a:fillRef>
+          <a:effectRef idx="1">
+            <a:schemeClr val="accent1"/>
+          </a:effectRef>
+          <a:fontRef idx="minor">
+            <a:schemeClr val="tx1"/>
+          </a:fontRef>
+        </p:style>
+      </p:cxnSp>
+      <p:cxnSp>
+        <p:nvCxnSpPr>
+          <p:cNvPr id="44" name="Arrow 40"/>
+          <p:cNvCxnSpPr/>
+          <p:nvPr/>
+        </p:nvCxnSpPr>
+        <p:spPr>
+          <a:xfrm flipH="1">
+            <a:off x="2286000" y="2880359"/>
+            <a:ext cx="6519672" cy="0"/>
+          </a:xfrm>
+          <a:prstGeom prst="line">
+            <a:avLst/>
+          </a:prstGeom>
+          <a:ln w="15875">
+            <a:solidFill>
+              <a:srgbClr val="00D6F2"/>
+            </a:solidFill>
+            <a:tailEnd type="triangle" w="med" len="med"/>
+          </a:ln>
+        </p:spPr>
+        <p:style>
+          <a:lnRef idx="2">
+            <a:schemeClr val="accent1"/>
+          </a:lnRef>
+          <a:fillRef idx="0">
+            <a:schemeClr val="accent1"/>
+          </a:fillRef>
+          <a:effectRef idx="1">
+            <a:schemeClr val="accent1"/>
+          </a:effectRef>
+          <a:fontRef idx="minor">
+            <a:schemeClr val="tx1"/>
+          </a:fontRef>
+        </p:style>
+      </p:cxnSp>
+      <p:sp>
+        <p:nvSpPr>
+          <p:cNvPr id="45" name="Text 41"/>
+          <p:cNvSpPr txBox="1"/>
+          <p:nvPr/>
+        </p:nvSpPr>
+        <p:spPr>
+          <a:xfrm>
+            <a:off x="4297680" y="2724911"/>
+            <a:ext cx="2743200" cy="137160"/>
+          </a:xfrm>
+          <a:prstGeom prst="rect">
+            <a:avLst/>
+          </a:prstGeom>
+          <a:noFill/>
+        </p:spPr>
+        <p:txBody>
+          <a:bodyPr wrap="square" lIns="0" rIns="0" tIns="0" bIns="0" anchor="ctr">
+            <a:spAutoFit/>
+          </a:bodyPr>
+          <a:lstStyle/>
+          <a:p>
+            <a:r>
+              <a:rPr sz="560" b="0" i="0">
+                <a:solidFill>
+                  <a:srgbClr val="00D6F2"/>
+                </a:solidFill>
+                <a:latin typeface="Trenda IG Text"/>
+              </a:rPr>
+              <a:t>Sierra reads approved articles only</a:t>
+            </a:r>
+          </a:p>
+        </p:txBody>
+      </p:sp>
+      <p:sp>
+        <p:nvSpPr>
+          <p:cNvPr id="46" name="Text 42"/>
+          <p:cNvSpPr txBox="1"/>
+          <p:nvPr/>
+        </p:nvSpPr>
+        <p:spPr>
+          <a:xfrm>
+            <a:off x="2578608" y="2542032"/>
+            <a:ext cx="960120" cy="201168"/>
+          </a:xfrm>
+          <a:prstGeom prst="rect">
+            <a:avLst/>
+          </a:prstGeom>
+          <a:noFill/>
+        </p:spPr>
+        <p:txBody>
+          <a:bodyPr wrap="square" lIns="0" rIns="0" tIns="0" bIns="0" anchor="ctr">
+            <a:spAutoFit/>
+          </a:bodyPr>
+          <a:lstStyle/>
+          <a:p>
+            <a:r>
+              <a:rPr sz="540" b="1" i="0" spc="100">
+                <a:solidFill>
+                  <a:srgbClr val="8C8C8C"/>
+                </a:solidFill>
+                <a:latin typeface="Trenda IG Text"/>
+              </a:rPr>
+              <a:t>ARTICLES</a:t>
+            </a:r>
+          </a:p>
+        </p:txBody>
+      </p:sp>
+      <p:sp>
+        <p:nvSpPr>
+          <p:cNvPr id="47" name="Shape 43"/>
+          <p:cNvSpPr/>
+          <p:nvPr/>
+        </p:nvSpPr>
+        <p:spPr>
+          <a:xfrm>
+            <a:off x="3566160" y="2542032"/>
+            <a:ext cx="373075" cy="201168"/>
+          </a:xfrm>
+          <a:prstGeom prst="roundRect">
+            <a:avLst>
+              <a:gd name="adj" fmla="val 40000"/>
+            </a:avLst>
+          </a:prstGeom>
+          <a:solidFill>
+            <a:srgbClr val="141414"/>
+          </a:solidFill>
+          <a:ln w="7620">
+            <a:solidFill>
+              <a:srgbClr val="333333"/>
+            </a:solidFill>
+          </a:ln>
+          <a:effectLst/>
+        </p:spPr>
+        <p:style>
+          <a:lnRef idx="1">
+            <a:schemeClr val="accent1"/>
+          </a:lnRef>
+          <a:fillRef idx="3">
+            <a:schemeClr val="accent1"/>
+          </a:fillRef>
+          <a:effectRef idx="2">
+            <a:schemeClr val="accent1"/>
+          </a:effectRef>
+          <a:fontRef idx="minor">
+            <a:schemeClr val="lt1"/>
+          </a:fontRef>
+        </p:style>
+        <p:txBody>
+          <a:bodyPr rtlCol="0" anchor="ctr"/>
+          <a:lstStyle/>
+          <a:p/>
+        </p:txBody>
+      </p:sp>
+      <p:sp>
+        <p:nvSpPr>
+          <p:cNvPr id="48" name="Text 44"/>
+          <p:cNvSpPr txBox="1"/>
+          <p:nvPr/>
+        </p:nvSpPr>
+        <p:spPr>
+          <a:xfrm>
+            <a:off x="3566160" y="2542032"/>
+            <a:ext cx="373075" cy="201168"/>
+          </a:xfrm>
+          <a:prstGeom prst="rect">
+            <a:avLst/>
+          </a:prstGeom>
+          <a:noFill/>
+        </p:spPr>
+        <p:txBody>
+          <a:bodyPr wrap="square" lIns="0" rIns="0" tIns="0" bIns="0" anchor="ctr">
+            <a:spAutoFit/>
+          </a:bodyPr>
+          <a:lstStyle/>
+          <a:p>
+            <a:pPr algn="ctr"/>
+            <a:r>
+              <a:rPr sz="560" b="0" i="0">
+                <a:solidFill>
+                  <a:srgbClr val="F2F2F2"/>
+                </a:solidFill>
+                <a:latin typeface="Trenda IG Text"/>
+              </a:rPr>
+              <a:t>FAQs</a:t>
+            </a:r>
+          </a:p>
+        </p:txBody>
+      </p:sp>
+      <p:sp>
+        <p:nvSpPr>
+          <p:cNvPr id="49" name="Shape 45"/>
+          <p:cNvSpPr/>
+          <p:nvPr/>
+        </p:nvSpPr>
+        <p:spPr>
+          <a:xfrm>
+            <a:off x="3994099" y="2542032"/>
+            <a:ext cx="991209" cy="201168"/>
+          </a:xfrm>
+          <a:prstGeom prst="roundRect">
+            <a:avLst>
+              <a:gd name="adj" fmla="val 40000"/>
+            </a:avLst>
+          </a:prstGeom>
+          <a:solidFill>
+            <a:srgbClr val="141414"/>
+          </a:solidFill>
+          <a:ln w="7620">
+            <a:solidFill>
+              <a:srgbClr val="333333"/>
+            </a:solidFill>
+          </a:ln>
+          <a:effectLst/>
+        </p:spPr>
+        <p:style>
+          <a:lnRef idx="1">
+            <a:schemeClr val="accent1"/>
+          </a:lnRef>
+          <a:fillRef idx="3">
+            <a:schemeClr val="accent1"/>
+          </a:fillRef>
+          <a:effectRef idx="2">
+            <a:schemeClr val="accent1"/>
+          </a:effectRef>
+          <a:fontRef idx="minor">
+            <a:schemeClr val="lt1"/>
+          </a:fontRef>
+        </p:style>
+        <p:txBody>
+          <a:bodyPr rtlCol="0" anchor="ctr"/>
+          <a:lstStyle/>
+          <a:p/>
+        </p:txBody>
+      </p:sp>
+      <p:sp>
+        <p:nvSpPr>
+          <p:cNvPr id="50" name="Text 46"/>
+          <p:cNvSpPr txBox="1"/>
+          <p:nvPr/>
+        </p:nvSpPr>
+        <p:spPr>
+          <a:xfrm>
+            <a:off x="3994099" y="2542032"/>
+            <a:ext cx="991209" cy="201168"/>
+          </a:xfrm>
+          <a:prstGeom prst="rect">
+            <a:avLst/>
+          </a:prstGeom>
+          <a:noFill/>
+        </p:spPr>
+        <p:txBody>
+          <a:bodyPr wrap="square" lIns="0" rIns="0" tIns="0" bIns="0" anchor="ctr">
+            <a:spAutoFit/>
+          </a:bodyPr>
+          <a:lstStyle/>
+          <a:p>
+            <a:pPr algn="ctr"/>
+            <a:r>
+              <a:rPr sz="560" b="0" i="0">
+                <a:solidFill>
+                  <a:srgbClr val="F2F2F2"/>
+                </a:solidFill>
+                <a:latin typeface="Trenda IG Text"/>
+              </a:rPr>
+              <a:t>prep instructions</a:t>
+            </a:r>
+          </a:p>
+        </p:txBody>
+      </p:sp>
+      <p:sp>
+        <p:nvSpPr>
+          <p:cNvPr id="51" name="Shape 47"/>
+          <p:cNvSpPr/>
+          <p:nvPr/>
+        </p:nvSpPr>
+        <p:spPr>
+          <a:xfrm>
+            <a:off x="5040172" y="2542032"/>
+            <a:ext cx="991209" cy="201168"/>
+          </a:xfrm>
+          <a:prstGeom prst="roundRect">
+            <a:avLst>
+              <a:gd name="adj" fmla="val 40000"/>
+            </a:avLst>
+          </a:prstGeom>
+          <a:solidFill>
+            <a:srgbClr val="141414"/>
+          </a:solidFill>
+          <a:ln w="7620">
+            <a:solidFill>
+              <a:srgbClr val="333333"/>
+            </a:solidFill>
+          </a:ln>
+          <a:effectLst/>
+        </p:spPr>
+        <p:style>
+          <a:lnRef idx="1">
+            <a:schemeClr val="accent1"/>
+          </a:lnRef>
+          <a:fillRef idx="3">
+            <a:schemeClr val="accent1"/>
+          </a:fillRef>
+          <a:effectRef idx="2">
+            <a:schemeClr val="accent1"/>
+          </a:effectRef>
+          <a:fontRef idx="minor">
+            <a:schemeClr val="lt1"/>
+          </a:fontRef>
+        </p:style>
+        <p:txBody>
+          <a:bodyPr rtlCol="0" anchor="ctr"/>
+          <a:lstStyle/>
+          <a:p/>
+        </p:txBody>
+      </p:sp>
+      <p:sp>
+        <p:nvSpPr>
+          <p:cNvPr id="52" name="Text 48"/>
+          <p:cNvSpPr txBox="1"/>
+          <p:nvPr/>
+        </p:nvSpPr>
+        <p:spPr>
+          <a:xfrm>
+            <a:off x="5040172" y="2542032"/>
+            <a:ext cx="991209" cy="201168"/>
+          </a:xfrm>
+          <a:prstGeom prst="rect">
+            <a:avLst/>
+          </a:prstGeom>
+          <a:noFill/>
+        </p:spPr>
+        <p:txBody>
+          <a:bodyPr wrap="square" lIns="0" rIns="0" tIns="0" bIns="0" anchor="ctr">
+            <a:spAutoFit/>
+          </a:bodyPr>
+          <a:lstStyle/>
+          <a:p>
+            <a:pPr algn="ctr"/>
+            <a:r>
+              <a:rPr sz="560" b="0" i="0">
+                <a:solidFill>
+                  <a:srgbClr val="F2F2F2"/>
+                </a:solidFill>
+                <a:latin typeface="Trenda IG Text"/>
+              </a:rPr>
+              <a:t>locations + hours</a:t>
+            </a:r>
+          </a:p>
+        </p:txBody>
+      </p:sp>
+      <p:sp>
+        <p:nvSpPr>
+          <p:cNvPr id="53" name="Shape 49"/>
+          <p:cNvSpPr/>
+          <p:nvPr/>
+        </p:nvSpPr>
+        <p:spPr>
+          <a:xfrm>
+            <a:off x="6086246" y="2542032"/>
+            <a:ext cx="1086307" cy="201168"/>
+          </a:xfrm>
+          <a:prstGeom prst="roundRect">
+            <a:avLst>
+              <a:gd name="adj" fmla="val 40000"/>
+            </a:avLst>
+          </a:prstGeom>
+          <a:solidFill>
+            <a:srgbClr val="141414"/>
+          </a:solidFill>
+          <a:ln w="7620">
+            <a:solidFill>
+              <a:srgbClr val="333333"/>
+            </a:solidFill>
+          </a:ln>
+          <a:effectLst/>
+        </p:spPr>
+        <p:style>
+          <a:lnRef idx="1">
+            <a:schemeClr val="accent1"/>
+          </a:lnRef>
+          <a:fillRef idx="3">
+            <a:schemeClr val="accent1"/>
+          </a:fillRef>
+          <a:effectRef idx="2">
+            <a:schemeClr val="accent1"/>
+          </a:effectRef>
+          <a:fontRef idx="minor">
+            <a:schemeClr val="lt1"/>
+          </a:fontRef>
+        </p:style>
+        <p:txBody>
+          <a:bodyPr rtlCol="0" anchor="ctr"/>
+          <a:lstStyle/>
+          <a:p/>
+        </p:txBody>
+      </p:sp>
+      <p:sp>
+        <p:nvSpPr>
+          <p:cNvPr id="54" name="Text 50"/>
+          <p:cNvSpPr txBox="1"/>
+          <p:nvPr/>
+        </p:nvSpPr>
+        <p:spPr>
+          <a:xfrm>
+            <a:off x="6086246" y="2542032"/>
+            <a:ext cx="1086307" cy="201168"/>
+          </a:xfrm>
+          <a:prstGeom prst="rect">
+            <a:avLst/>
+          </a:prstGeom>
+          <a:noFill/>
+        </p:spPr>
+        <p:txBody>
+          <a:bodyPr wrap="square" lIns="0" rIns="0" tIns="0" bIns="0" anchor="ctr">
+            <a:spAutoFit/>
+          </a:bodyPr>
+          <a:lstStyle/>
+          <a:p>
+            <a:pPr algn="ctr"/>
+            <a:r>
+              <a:rPr sz="560" b="0" i="0">
+                <a:solidFill>
+                  <a:srgbClr val="F2F2F2"/>
+                </a:solidFill>
+                <a:latin typeface="Trenda IG Text"/>
+              </a:rPr>
+              <a:t>insurance + billing</a:t>
+            </a:r>
+          </a:p>
+        </p:txBody>
+      </p:sp>
+      <p:sp>
+        <p:nvSpPr>
+          <p:cNvPr id="55" name="Shape 51"/>
+          <p:cNvSpPr/>
+          <p:nvPr/>
+        </p:nvSpPr>
+        <p:spPr>
+          <a:xfrm>
+            <a:off x="7227417" y="2542032"/>
+            <a:ext cx="801014" cy="201168"/>
+          </a:xfrm>
+          <a:prstGeom prst="roundRect">
+            <a:avLst>
+              <a:gd name="adj" fmla="val 40000"/>
+            </a:avLst>
+          </a:prstGeom>
+          <a:solidFill>
+            <a:srgbClr val="141414"/>
+          </a:solidFill>
+          <a:ln w="7620">
+            <a:solidFill>
+              <a:srgbClr val="333333"/>
+            </a:solidFill>
+          </a:ln>
+          <a:effectLst/>
+        </p:spPr>
+        <p:style>
+          <a:lnRef idx="1">
+            <a:schemeClr val="accent1"/>
+          </a:lnRef>
+          <a:fillRef idx="3">
+            <a:schemeClr val="accent1"/>
+          </a:fillRef>
+          <a:effectRef idx="2">
+            <a:schemeClr val="accent1"/>
+          </a:effectRef>
+          <a:fontRef idx="minor">
+            <a:schemeClr val="lt1"/>
+          </a:fontRef>
+        </p:style>
+        <p:txBody>
+          <a:bodyPr rtlCol="0" anchor="ctr"/>
+          <a:lstStyle/>
+          <a:p/>
+        </p:txBody>
+      </p:sp>
+      <p:sp>
+        <p:nvSpPr>
+          <p:cNvPr id="56" name="Text 52"/>
+          <p:cNvSpPr txBox="1"/>
+          <p:nvPr/>
+        </p:nvSpPr>
+        <p:spPr>
+          <a:xfrm>
+            <a:off x="7227417" y="2542032"/>
+            <a:ext cx="801014" cy="201168"/>
+          </a:xfrm>
+          <a:prstGeom prst="rect">
+            <a:avLst/>
+          </a:prstGeom>
+          <a:noFill/>
+        </p:spPr>
+        <p:txBody>
+          <a:bodyPr wrap="square" lIns="0" rIns="0" tIns="0" bIns="0" anchor="ctr">
+            <a:spAutoFit/>
+          </a:bodyPr>
+          <a:lstStyle/>
+          <a:p>
+            <a:pPr algn="ctr"/>
+            <a:r>
+              <a:rPr sz="560" b="0" i="0">
+                <a:solidFill>
+                  <a:srgbClr val="F2F2F2"/>
+                </a:solidFill>
+                <a:latin typeface="Trenda IG Text"/>
+              </a:rPr>
+              <a:t>visitor rules</a:t>
+            </a:r>
+          </a:p>
+        </p:txBody>
+      </p:sp>
+      <p:sp>
+        <p:nvSpPr>
+          <p:cNvPr id="57" name="Shape 53"/>
+          <p:cNvSpPr/>
+          <p:nvPr/>
+        </p:nvSpPr>
+        <p:spPr>
+          <a:xfrm>
+            <a:off x="8083296" y="2542032"/>
+            <a:ext cx="563270" cy="201168"/>
+          </a:xfrm>
+          <a:prstGeom prst="roundRect">
+            <a:avLst>
+              <a:gd name="adj" fmla="val 40000"/>
+            </a:avLst>
+          </a:prstGeom>
+          <a:solidFill>
+            <a:srgbClr val="141414"/>
+          </a:solidFill>
+          <a:ln w="7620">
+            <a:solidFill>
+              <a:srgbClr val="333333"/>
+            </a:solidFill>
+          </a:ln>
+          <a:effectLst/>
+        </p:spPr>
+        <p:style>
+          <a:lnRef idx="1">
+            <a:schemeClr val="accent1"/>
+          </a:lnRef>
+          <a:fillRef idx="3">
+            <a:schemeClr val="accent1"/>
+          </a:fillRef>
+          <a:effectRef idx="2">
+            <a:schemeClr val="accent1"/>
+          </a:effectRef>
+          <a:fontRef idx="minor">
+            <a:schemeClr val="lt1"/>
+          </a:fontRef>
+        </p:style>
+        <p:txBody>
+          <a:bodyPr rtlCol="0" anchor="ctr"/>
+          <a:lstStyle/>
+          <a:p/>
+        </p:txBody>
+      </p:sp>
+      <p:sp>
+        <p:nvSpPr>
+          <p:cNvPr id="58" name="Text 54"/>
+          <p:cNvSpPr txBox="1"/>
+          <p:nvPr/>
+        </p:nvSpPr>
+        <p:spPr>
+          <a:xfrm>
+            <a:off x="8083296" y="2542032"/>
+            <a:ext cx="563270" cy="201168"/>
+          </a:xfrm>
+          <a:prstGeom prst="rect">
+            <a:avLst/>
+          </a:prstGeom>
+          <a:noFill/>
+        </p:spPr>
+        <p:txBody>
+          <a:bodyPr wrap="square" lIns="0" rIns="0" tIns="0" bIns="0" anchor="ctr">
+            <a:spAutoFit/>
+          </a:bodyPr>
+          <a:lstStyle/>
+          <a:p>
+            <a:pPr algn="ctr"/>
+            <a:r>
+              <a:rPr sz="560" b="0" i="0">
+                <a:solidFill>
+                  <a:srgbClr val="F2F2F2"/>
+                </a:solidFill>
+                <a:latin typeface="Trenda IG Text"/>
+              </a:rPr>
+              <a:t>policies</a:t>
+            </a:r>
+          </a:p>
+        </p:txBody>
+      </p:sp>
+      <p:cxnSp>
+        <p:nvCxnSpPr>
+          <p:cNvPr id="59" name="Arrow 55"/>
+          <p:cNvCxnSpPr/>
+          <p:nvPr/>
+        </p:nvCxnSpPr>
+        <p:spPr>
+          <a:xfrm>
+            <a:off x="2468880" y="3209544"/>
+            <a:ext cx="6583680" cy="0"/>
+          </a:xfrm>
+          <a:prstGeom prst="line">
+            <a:avLst/>
+          </a:prstGeom>
+          <a:ln w="12700">
+            <a:solidFill>
+              <a:srgbClr val="5C5C5C"/>
+            </a:solidFill>
+            <a:prstDash val="dash"/>
+          </a:ln>
+        </p:spPr>
+        <p:style>
+          <a:lnRef idx="2">
+            <a:schemeClr val="accent1"/>
+          </a:lnRef>
+          <a:fillRef idx="0">
+            <a:schemeClr val="accent1"/>
+          </a:fillRef>
+          <a:effectRef idx="1">
+            <a:schemeClr val="accent1"/>
+          </a:effectRef>
+          <a:fontRef idx="minor">
+            <a:schemeClr val="tx1"/>
+          </a:fontRef>
+        </p:style>
+      </p:cxnSp>
+      <p:sp>
+        <p:nvSpPr>
+          <p:cNvPr id="60" name="Shape 56"/>
+          <p:cNvSpPr/>
+          <p:nvPr/>
+        </p:nvSpPr>
+        <p:spPr>
+          <a:xfrm>
+            <a:off x="4297680" y="3118103"/>
+            <a:ext cx="2926080" cy="182880"/>
+          </a:xfrm>
+          <a:prstGeom prst="rect">
+            <a:avLst/>
+          </a:prstGeom>
+          <a:solidFill>
+            <a:srgbClr val="000000"/>
+          </a:solidFill>
+          <a:ln>
+            <a:noFill/>
+          </a:ln>
+          <a:effectLst/>
+        </p:spPr>
+        <p:style>
+          <a:lnRef idx="1">
+            <a:schemeClr val="accent1"/>
+          </a:lnRef>
+          <a:fillRef idx="3">
+            <a:schemeClr val="accent1"/>
+          </a:fillRef>
+          <a:effectRef idx="2">
+            <a:schemeClr val="accent1"/>
+          </a:effectRef>
+          <a:fontRef idx="minor">
+            <a:schemeClr val="lt1"/>
+          </a:fontRef>
+        </p:style>
+        <p:txBody>
+          <a:bodyPr rtlCol="0" anchor="ctr"/>
+          <a:lstStyle/>
+          <a:p/>
+        </p:txBody>
+      </p:sp>
+      <p:sp>
+        <p:nvSpPr>
+          <p:cNvPr id="61" name="Shape 57"/>
+          <p:cNvSpPr/>
+          <p:nvPr/>
+        </p:nvSpPr>
+        <p:spPr>
+          <a:xfrm>
+            <a:off x="4343400" y="3127248"/>
+            <a:ext cx="2834640" cy="164592"/>
+          </a:xfrm>
+          <a:prstGeom prst="roundRect">
+            <a:avLst>
+              <a:gd name="adj" fmla="val 50000"/>
+            </a:avLst>
+          </a:prstGeom>
+          <a:noFill/>
+          <a:ln w="9525">
+            <a:solidFill>
+              <a:srgbClr val="00D6F2"/>
+            </a:solidFill>
+          </a:ln>
+          <a:effectLst/>
+        </p:spPr>
+        <p:style>
+          <a:lnRef idx="1">
+            <a:schemeClr val="accent1"/>
+          </a:lnRef>
+          <a:fillRef idx="3">
+            <a:schemeClr val="accent1"/>
+          </a:fillRef>
+          <a:effectRef idx="2">
+            <a:schemeClr val="accent1"/>
+          </a:effectRef>
+          <a:fontRef idx="minor">
+            <a:schemeClr val="lt1"/>
+          </a:fontRef>
+        </p:style>
+        <p:txBody>
+          <a:bodyPr rtlCol="0" anchor="ctr"/>
+          <a:lstStyle/>
+          <a:p/>
+        </p:txBody>
+      </p:sp>
+      <p:sp>
+        <p:nvSpPr>
+          <p:cNvPr id="62" name="Text 58"/>
+          <p:cNvSpPr txBox="1"/>
+          <p:nvPr/>
+        </p:nvSpPr>
+        <p:spPr>
+          <a:xfrm>
+            <a:off x="4343400" y="3127248"/>
+            <a:ext cx="2834640" cy="164592"/>
+          </a:xfrm>
+          <a:prstGeom prst="rect">
+            <a:avLst/>
+          </a:prstGeom>
+          <a:noFill/>
+        </p:spPr>
+        <p:txBody>
+          <a:bodyPr wrap="square" lIns="0" rIns="0" tIns="0" bIns="0" anchor="ctr">
+            <a:spAutoFit/>
+          </a:bodyPr>
+          <a:lstStyle/>
+          <a:p>
+            <a:pPr algn="ctr"/>
+            <a:r>
+              <a:rPr sz="520" b="1" i="0" spc="80">
+                <a:solidFill>
+                  <a:srgbClr val="00D6F2"/>
+                </a:solidFill>
+                <a:latin typeface="Trenda IG Text"/>
+              </a:rPr>
+              <a:t>NO PATIENT RECORDS IN THE KNOWLEDGE BASE</a:t>
+            </a:r>
+          </a:p>
+        </p:txBody>
+      </p:sp>
+      <p:sp>
+        <p:nvSpPr>
+          <p:cNvPr id="63" name="Shape 59"/>
+          <p:cNvSpPr/>
+          <p:nvPr/>
+        </p:nvSpPr>
+        <p:spPr>
+          <a:xfrm>
+            <a:off x="2578608" y="3721608"/>
+            <a:ext cx="1600200" cy="914400"/>
+          </a:xfrm>
+          <a:prstGeom prst="roundRect">
+            <a:avLst>
+              <a:gd name="adj" fmla="val 8000"/>
+            </a:avLst>
+          </a:prstGeom>
+          <a:solidFill>
+            <a:srgbClr val="2B2508"/>
+          </a:solidFill>
+          <a:ln w="11430">
+            <a:solidFill>
+              <a:srgbClr val="FFD700"/>
+            </a:solidFill>
+          </a:ln>
+          <a:effectLst/>
+        </p:spPr>
+        <p:style>
+          <a:lnRef idx="1">
+            <a:schemeClr val="accent1"/>
+          </a:lnRef>
+          <a:fillRef idx="3">
+            <a:schemeClr val="accent1"/>
+          </a:fillRef>
+          <a:effectRef idx="2">
+            <a:schemeClr val="accent1"/>
+          </a:effectRef>
+          <a:fontRef idx="minor">
+            <a:schemeClr val="lt1"/>
+          </a:fontRef>
+        </p:style>
+        <p:txBody>
+          <a:bodyPr rtlCol="0" anchor="ctr"/>
+          <a:lstStyle/>
+          <a:p/>
+        </p:txBody>
+      </p:sp>
+      <p:pic>
+        <p:nvPicPr>
+          <p:cNvPr id="64" name="Picture 63" descr="people.png"/>
+          <p:cNvPicPr>
+            <a:picLocks noChangeAspect="1"/>
+          </p:cNvPicPr>
+          <p:nvPr/>
+        </p:nvPicPr>
+        <p:blipFill>
+          <a:blip r:embed="rId2"/>
+          <a:stretch>
+            <a:fillRect/>
+          </a:stretch>
+        </p:blipFill>
+        <p:spPr>
+          <a:xfrm>
+            <a:off x="2670048" y="3794760"/>
+            <a:ext cx="182880" cy="182880"/>
+          </a:xfrm>
+          <a:prstGeom prst="rect">
+            <a:avLst/>
+          </a:prstGeom>
+        </p:spPr>
+      </p:pic>
+      <p:sp>
+        <p:nvSpPr>
+          <p:cNvPr id="65" name="Text 60"/>
+          <p:cNvSpPr txBox="1"/>
+          <p:nvPr/>
+        </p:nvSpPr>
+        <p:spPr>
+          <a:xfrm>
+            <a:off x="2907792" y="3767328"/>
+            <a:ext cx="1197864" cy="237744"/>
+          </a:xfrm>
+          <a:prstGeom prst="rect">
+            <a:avLst/>
+          </a:prstGeom>
+          <a:noFill/>
+        </p:spPr>
+        <p:txBody>
+          <a:bodyPr wrap="square" lIns="0" rIns="0" tIns="0" bIns="0" anchor="ctr">
+            <a:spAutoFit/>
+          </a:bodyPr>
+          <a:lstStyle/>
+          <a:p>
+            <a:r>
+              <a:rPr sz="700" b="1" i="0">
+                <a:solidFill>
+                  <a:srgbClr val="FFD700"/>
+                </a:solidFill>
+                <a:latin typeface="Trenda IG Text"/>
+              </a:rPr>
+              <a:t>Verify the caller</a:t>
+            </a:r>
+          </a:p>
+        </p:txBody>
+      </p:sp>
+      <p:sp>
+        <p:nvSpPr>
+          <p:cNvPr id="66" name="Text 61"/>
+          <p:cNvSpPr txBox="1"/>
+          <p:nvPr/>
+        </p:nvSpPr>
+        <p:spPr>
+          <a:xfrm>
+            <a:off x="2670048" y="4050792"/>
+            <a:ext cx="1435608" cy="548640"/>
+          </a:xfrm>
+          <a:prstGeom prst="rect">
+            <a:avLst/>
+          </a:prstGeom>
+          <a:noFill/>
+        </p:spPr>
+        <p:txBody>
+          <a:bodyPr wrap="square" lIns="0" rIns="0" tIns="0" bIns="0" anchor="t">
+            <a:spAutoFit/>
+          </a:bodyPr>
+          <a:lstStyle/>
+          <a:p>
+            <a:r>
+              <a:rPr sz="600" b="0" i="0">
+                <a:solidFill>
+                  <a:srgbClr val="B3B3B3"/>
+                </a:solidFill>
+                <a:latin typeface="Trenda IG Text"/>
+              </a:rPr>
+              <a:t>Date of birth plus a one-time code, before any patient detail.</a:t>
+            </a:r>
+          </a:p>
+        </p:txBody>
+      </p:sp>
+      <p:sp>
+        <p:nvSpPr>
+          <p:cNvPr id="67" name="Differentiator Border 63"/>
+          <p:cNvSpPr/>
+          <p:nvPr/>
+        </p:nvSpPr>
+        <p:spPr>
+          <a:xfrm>
+            <a:off x="4361688" y="3721608"/>
+            <a:ext cx="2331720" cy="914400"/>
+          </a:xfrm>
+          <a:prstGeom prst="rect">
+            <a:avLst/>
+          </a:prstGeom>
+          <a:gradFill rotWithShape="1">
+            <a:gsLst>
+              <a:gs pos="0">
+                <a:srgbClr val="FFD700"/>
+              </a:gs>
+              <a:gs pos="50000">
+                <a:srgbClr val="FF0069"/>
+              </a:gs>
+              <a:gs pos="100000">
+                <a:srgbClr val="00D6F2"/>
+              </a:gs>
+            </a:gsLst>
+            <a:lin ang="0" scaled="0"/>
+          </a:gradFill>
+          <a:ln>
+            <a:noFill/>
+          </a:ln>
+          <a:effectLst/>
+        </p:spPr>
+        <p:style>
+          <a:lnRef idx="1">
+            <a:schemeClr val="accent1"/>
+          </a:lnRef>
+          <a:fillRef idx="3">
+            <a:schemeClr val="accent1"/>
+          </a:fillRef>
+          <a:effectRef idx="2">
+            <a:schemeClr val="accent1"/>
+          </a:effectRef>
+          <a:fontRef idx="minor">
+            <a:schemeClr val="lt1"/>
+          </a:fontRef>
+        </p:style>
+        <p:txBody>
+          <a:bodyPr rtlCol="0" anchor="ctr"/>
+          <a:lstStyle/>
+          <a:p/>
+        </p:txBody>
+      </p:sp>
+      <p:sp>
+        <p:nvSpPr>
+          <p:cNvPr id="68" name="Shape 64"/>
+          <p:cNvSpPr/>
+          <p:nvPr/>
+        </p:nvSpPr>
+        <p:spPr>
+          <a:xfrm>
+            <a:off x="4379976" y="3739896"/>
+            <a:ext cx="2295144" cy="877824"/>
+          </a:xfrm>
+          <a:prstGeom prst="rect">
+            <a:avLst/>
+          </a:prstGeom>
+          <a:solidFill>
+            <a:srgbClr val="141414"/>
+          </a:solidFill>
+          <a:ln>
+            <a:noFill/>
+          </a:ln>
+          <a:effectLst/>
+        </p:spPr>
+        <p:style>
+          <a:lnRef idx="1">
+            <a:schemeClr val="accent1"/>
+          </a:lnRef>
+          <a:fillRef idx="3">
+            <a:schemeClr val="accent1"/>
+          </a:fillRef>
+          <a:effectRef idx="2">
+            <a:schemeClr val="accent1"/>
+          </a:effectRef>
+          <a:fontRef idx="minor">
+            <a:schemeClr val="lt1"/>
+          </a:fontRef>
+        </p:style>
+        <p:txBody>
+          <a:bodyPr rtlCol="0" anchor="ctr"/>
+          <a:lstStyle/>
+          <a:p/>
+        </p:txBody>
+      </p:sp>
+      <p:sp>
+        <p:nvSpPr>
+          <p:cNvPr id="69" name="Text 65"/>
+          <p:cNvSpPr txBox="1"/>
+          <p:nvPr/>
+        </p:nvSpPr>
+        <p:spPr>
+          <a:xfrm>
+            <a:off x="4471416" y="3776472"/>
+            <a:ext cx="2112263" cy="237744"/>
+          </a:xfrm>
+          <a:prstGeom prst="rect">
+            <a:avLst/>
+          </a:prstGeom>
+          <a:noFill/>
+        </p:spPr>
+        <p:txBody>
+          <a:bodyPr wrap="square" lIns="0" rIns="0" tIns="0" bIns="0" anchor="ctr">
+            <a:spAutoFit/>
+          </a:bodyPr>
+          <a:lstStyle/>
+          <a:p>
+            <a:r>
+              <a:rPr sz="700" b="1" i="0">
+                <a:solidFill>
+                  <a:srgbClr val="F2F2F2"/>
+                </a:solidFill>
+                <a:latin typeface="Trenda IG Text"/>
+              </a:rPr>
+              <a:t>Scoped scheduling API</a:t>
+            </a:r>
+          </a:p>
+        </p:txBody>
+      </p:sp>
+      <p:sp>
+        <p:nvSpPr>
+          <p:cNvPr id="70" name="Text 66"/>
+          <p:cNvSpPr txBox="1"/>
+          <p:nvPr/>
+        </p:nvSpPr>
+        <p:spPr>
+          <a:xfrm>
+            <a:off x="4471416" y="4032504"/>
+            <a:ext cx="2130551" cy="566927"/>
+          </a:xfrm>
+          <a:prstGeom prst="rect">
+            <a:avLst/>
+          </a:prstGeom>
+          <a:noFill/>
+        </p:spPr>
+        <p:txBody>
+          <a:bodyPr wrap="square" lIns="0" rIns="0" tIns="0" bIns="0" anchor="t">
+            <a:spAutoFit/>
+          </a:bodyPr>
+          <a:lstStyle/>
+          <a:p>
+            <a:r>
+              <a:rPr sz="600" b="0" i="0">
+                <a:solidFill>
+                  <a:srgbClr val="B3B3B3"/>
+                </a:solidFill>
+                <a:latin typeface="Trenda IG Text"/>
+              </a:rPr>
+              <a:t>Returns only this patient's data and minimum fields. Enforces the rules; the agent never writes queries.</a:t>
+            </a:r>
+          </a:p>
+        </p:txBody>
+      </p:sp>
+      <p:sp>
+        <p:nvSpPr>
+          <p:cNvPr id="71" name="Shape 67"/>
+          <p:cNvSpPr/>
+          <p:nvPr/>
+        </p:nvSpPr>
+        <p:spPr>
+          <a:xfrm>
+            <a:off x="6876288" y="3721608"/>
+            <a:ext cx="2212848" cy="914400"/>
+          </a:xfrm>
+          <a:prstGeom prst="roundRect">
+            <a:avLst>
+              <a:gd name="adj" fmla="val 8000"/>
+            </a:avLst>
+          </a:prstGeom>
+          <a:solidFill>
+            <a:srgbClr val="141414"/>
+          </a:solidFill>
+          <a:ln w="9525">
+            <a:solidFill>
+              <a:srgbClr val="333333"/>
+            </a:solidFill>
+          </a:ln>
+          <a:effectLst/>
+        </p:spPr>
+        <p:style>
+          <a:lnRef idx="1">
+            <a:schemeClr val="accent1"/>
+          </a:lnRef>
+          <a:fillRef idx="3">
+            <a:schemeClr val="accent1"/>
+          </a:fillRef>
+          <a:effectRef idx="2">
+            <a:schemeClr val="accent1"/>
+          </a:effectRef>
+          <a:fontRef idx="minor">
+            <a:schemeClr val="lt1"/>
+          </a:fontRef>
+        </p:style>
+        <p:txBody>
+          <a:bodyPr rtlCol="0" anchor="ctr"/>
+          <a:lstStyle/>
+          <a:p/>
+        </p:txBody>
+      </p:sp>
+      <p:sp>
+        <p:nvSpPr>
+          <p:cNvPr id="72" name="Shape 68"/>
+          <p:cNvSpPr/>
+          <p:nvPr/>
+        </p:nvSpPr>
+        <p:spPr>
+          <a:xfrm>
+            <a:off x="6967728" y="3794760"/>
+            <a:ext cx="329184" cy="182880"/>
+          </a:xfrm>
+          <a:prstGeom prst="roundRect">
+            <a:avLst>
+              <a:gd name="adj" fmla="val 30000"/>
+            </a:avLst>
+          </a:prstGeom>
+          <a:solidFill>
+            <a:srgbClr val="1E1E1E"/>
+          </a:solidFill>
+          <a:ln w="7620">
+            <a:solidFill>
+              <a:srgbClr val="333333"/>
+            </a:solidFill>
+          </a:ln>
+          <a:effectLst/>
+        </p:spPr>
+        <p:style>
+          <a:lnRef idx="1">
+            <a:schemeClr val="accent1"/>
+          </a:lnRef>
+          <a:fillRef idx="3">
+            <a:schemeClr val="accent1"/>
+          </a:fillRef>
+          <a:effectRef idx="2">
+            <a:schemeClr val="accent1"/>
+          </a:effectRef>
+          <a:fontRef idx="minor">
+            <a:schemeClr val="lt1"/>
+          </a:fontRef>
+        </p:style>
+        <p:txBody>
+          <a:bodyPr rtlCol="0" anchor="ctr"/>
+          <a:lstStyle/>
+          <a:p/>
+        </p:txBody>
+      </p:sp>
+      <p:sp>
+        <p:nvSpPr>
+          <p:cNvPr id="73" name="Text 69"/>
+          <p:cNvSpPr txBox="1"/>
+          <p:nvPr/>
+        </p:nvSpPr>
+        <p:spPr>
+          <a:xfrm>
+            <a:off x="6967728" y="3794760"/>
+            <a:ext cx="329184" cy="182880"/>
+          </a:xfrm>
+          <a:prstGeom prst="rect">
+            <a:avLst/>
+          </a:prstGeom>
+          <a:noFill/>
+        </p:spPr>
+        <p:txBody>
+          <a:bodyPr wrap="square" lIns="0" rIns="0" tIns="0" bIns="0" anchor="ctr">
+            <a:spAutoFit/>
+          </a:bodyPr>
+          <a:lstStyle/>
+          <a:p>
+            <a:pPr algn="ctr"/>
+            <a:r>
+              <a:rPr sz="540" b="1" i="0">
+                <a:solidFill>
+                  <a:srgbClr val="F2F2F2"/>
+                </a:solidFill>
+                <a:latin typeface="Trenda IG Text"/>
+              </a:rPr>
+              <a:t>Epic</a:t>
+            </a:r>
+          </a:p>
+        </p:txBody>
+      </p:sp>
+      <p:sp>
+        <p:nvSpPr>
+          <p:cNvPr id="74" name="Text 70"/>
+          <p:cNvSpPr txBox="1"/>
+          <p:nvPr/>
+        </p:nvSpPr>
+        <p:spPr>
+          <a:xfrm>
+            <a:off x="7351776" y="3767328"/>
+            <a:ext cx="1664207" cy="237744"/>
+          </a:xfrm>
+          <a:prstGeom prst="rect">
+            <a:avLst/>
+          </a:prstGeom>
+          <a:noFill/>
+        </p:spPr>
+        <p:txBody>
+          <a:bodyPr wrap="square" lIns="0" rIns="0" tIns="0" bIns="0" anchor="ctr">
+            <a:spAutoFit/>
+          </a:bodyPr>
+          <a:lstStyle/>
+          <a:p>
+            <a:r>
+              <a:rPr sz="700" b="1" i="0">
+                <a:solidFill>
+                  <a:srgbClr val="F2F2F2"/>
+                </a:solidFill>
+                <a:latin typeface="Trenda IG Text"/>
+              </a:rPr>
+              <a:t>Scheduling system of record</a:t>
+            </a:r>
+          </a:p>
+        </p:txBody>
+      </p:sp>
+      <p:sp>
+        <p:nvSpPr>
+          <p:cNvPr id="75" name="Text 71"/>
+          <p:cNvSpPr txBox="1"/>
+          <p:nvPr/>
+        </p:nvSpPr>
+        <p:spPr>
+          <a:xfrm>
+            <a:off x="6967728" y="4050792"/>
+            <a:ext cx="2048255" cy="548640"/>
+          </a:xfrm>
+          <a:prstGeom prst="rect">
+            <a:avLst/>
+          </a:prstGeom>
+          <a:noFill/>
+        </p:spPr>
+        <p:txBody>
+          <a:bodyPr wrap="square" lIns="0" rIns="0" tIns="0" bIns="0" anchor="t">
+            <a:spAutoFit/>
+          </a:bodyPr>
+          <a:lstStyle/>
+          <a:p>
+            <a:r>
+              <a:rPr sz="600" b="0" i="0">
+                <a:solidFill>
+                  <a:srgbClr val="B3B3B3"/>
+                </a:solidFill>
+                <a:latin typeface="Trenda IG Text"/>
+              </a:rPr>
+              <a:t>Live availability; book, cancel, reschedule written here. Never a GCP copy, which can lag.</a:t>
+            </a:r>
+          </a:p>
+        </p:txBody>
+      </p:sp>
+      <p:cxnSp>
+        <p:nvCxnSpPr>
+          <p:cNvPr id="76" name="Arrow 72"/>
+          <p:cNvCxnSpPr/>
+          <p:nvPr/>
+        </p:nvCxnSpPr>
+        <p:spPr>
+          <a:xfrm>
+            <a:off x="4178808" y="4178808"/>
+            <a:ext cx="182880" cy="0"/>
+          </a:xfrm>
+          <a:prstGeom prst="line">
+            <a:avLst/>
+          </a:prstGeom>
+          <a:ln w="12700">
+            <a:solidFill>
+              <a:srgbClr val="8C8C8C"/>
+            </a:solidFill>
+            <a:tailEnd type="triangle" w="med" len="med"/>
+          </a:ln>
+        </p:spPr>
+        <p:style>
+          <a:lnRef idx="2">
+            <a:schemeClr val="accent1"/>
+          </a:lnRef>
+          <a:fillRef idx="0">
+            <a:schemeClr val="accent1"/>
+          </a:fillRef>
+          <a:effectRef idx="1">
+            <a:schemeClr val="accent1"/>
+          </a:effectRef>
+          <a:fontRef idx="minor">
+            <a:schemeClr val="tx1"/>
+          </a:fontRef>
+        </p:style>
+      </p:cxnSp>
+      <p:cxnSp>
+        <p:nvCxnSpPr>
+          <p:cNvPr id="77" name="Arrow 73"/>
+          <p:cNvCxnSpPr/>
+          <p:nvPr/>
+        </p:nvCxnSpPr>
+        <p:spPr>
+          <a:xfrm>
+            <a:off x="6693408" y="4069080"/>
+            <a:ext cx="182880" cy="0"/>
+          </a:xfrm>
+          <a:prstGeom prst="line">
+            <a:avLst/>
+          </a:prstGeom>
+          <a:ln w="15875">
+            <a:solidFill>
+              <a:srgbClr val="00D6F2"/>
+            </a:solidFill>
+            <a:tailEnd type="triangle" w="med" len="med"/>
+          </a:ln>
+        </p:spPr>
+        <p:style>
+          <a:lnRef idx="2">
+            <a:schemeClr val="accent1"/>
+          </a:lnRef>
+          <a:fillRef idx="0">
+            <a:schemeClr val="accent1"/>
+          </a:fillRef>
+          <a:effectRef idx="1">
+            <a:schemeClr val="accent1"/>
+          </a:effectRef>
+          <a:fontRef idx="minor">
+            <a:schemeClr val="tx1"/>
+          </a:fontRef>
+        </p:style>
+      </p:cxnSp>
+      <p:cxnSp>
+        <p:nvCxnSpPr>
+          <p:cNvPr id="78" name="Arrow 74"/>
+          <p:cNvCxnSpPr/>
+          <p:nvPr/>
+        </p:nvCxnSpPr>
+        <p:spPr>
+          <a:xfrm flipH="1">
+            <a:off x="6693408" y="4288536"/>
+            <a:ext cx="182880" cy="0"/>
+          </a:xfrm>
+          <a:prstGeom prst="line">
+            <a:avLst/>
+          </a:prstGeom>
+          <a:ln w="15875">
+            <a:solidFill>
+              <a:srgbClr val="00D6F2"/>
+            </a:solidFill>
+            <a:tailEnd type="triangle" w="med" len="med"/>
+          </a:ln>
+        </p:spPr>
+        <p:style>
+          <a:lnRef idx="2">
+            <a:schemeClr val="accent1"/>
+          </a:lnRef>
+          <a:fillRef idx="0">
+            <a:schemeClr val="accent1"/>
+          </a:fillRef>
+          <a:effectRef idx="1">
+            <a:schemeClr val="accent1"/>
+          </a:effectRef>
+          <a:fontRef idx="minor">
+            <a:schemeClr val="tx1"/>
+          </a:fontRef>
+        </p:style>
+      </p:cxnSp>
+      <p:cxnSp>
+        <p:nvCxnSpPr>
+          <p:cNvPr id="79" name="Arrow 75"/>
+          <p:cNvCxnSpPr/>
+          <p:nvPr/>
+        </p:nvCxnSpPr>
+        <p:spPr>
+          <a:xfrm>
+            <a:off x="2286000" y="4178808"/>
+            <a:ext cx="292608" cy="0"/>
+          </a:xfrm>
+          <a:prstGeom prst="line">
+            <a:avLst/>
+          </a:prstGeom>
+          <a:ln w="15875">
+            <a:solidFill>
+              <a:srgbClr val="00D6F2"/>
+            </a:solidFill>
+            <a:tailEnd type="triangle" w="med" len="med"/>
+          </a:ln>
+        </p:spPr>
+        <p:style>
+          <a:lnRef idx="2">
+            <a:schemeClr val="accent1"/>
+          </a:lnRef>
+          <a:fillRef idx="0">
+            <a:schemeClr val="accent1"/>
+          </a:fillRef>
+          <a:effectRef idx="1">
+            <a:schemeClr val="accent1"/>
+          </a:effectRef>
+          <a:fontRef idx="minor">
+            <a:schemeClr val="tx1"/>
+          </a:fontRef>
+        </p:style>
+      </p:cxnSp>
+      <p:sp>
+        <p:nvSpPr>
+          <p:cNvPr id="80" name="Text 76"/>
+          <p:cNvSpPr txBox="1"/>
+          <p:nvPr/>
+        </p:nvSpPr>
+        <p:spPr>
+          <a:xfrm>
+            <a:off x="2578608" y="4764024"/>
+            <a:ext cx="960120" cy="201168"/>
+          </a:xfrm>
+          <a:prstGeom prst="rect">
+            <a:avLst/>
+          </a:prstGeom>
+          <a:noFill/>
+        </p:spPr>
+        <p:txBody>
+          <a:bodyPr wrap="square" lIns="0" rIns="0" tIns="0" bIns="0" anchor="ctr">
+            <a:spAutoFit/>
+          </a:bodyPr>
+          <a:lstStyle/>
+          <a:p>
+            <a:r>
+              <a:rPr sz="540" b="1" i="0" spc="100">
+                <a:solidFill>
+                  <a:srgbClr val="8C8C8C"/>
+                </a:solidFill>
+                <a:latin typeface="Trenda IG Text"/>
+              </a:rPr>
+              <a:t>RULES IN THE API</a:t>
+            </a:r>
+          </a:p>
+        </p:txBody>
+      </p:sp>
+      <p:sp>
+        <p:nvSpPr>
+          <p:cNvPr id="81" name="Shape 77"/>
+          <p:cNvSpPr/>
+          <p:nvPr/>
+        </p:nvSpPr>
+        <p:spPr>
+          <a:xfrm>
+            <a:off x="3566160" y="4764024"/>
+            <a:ext cx="1086307" cy="201168"/>
+          </a:xfrm>
+          <a:prstGeom prst="roundRect">
+            <a:avLst>
+              <a:gd name="adj" fmla="val 40000"/>
+            </a:avLst>
+          </a:prstGeom>
+          <a:solidFill>
+            <a:srgbClr val="141414"/>
+          </a:solidFill>
+          <a:ln w="7620">
+            <a:solidFill>
+              <a:srgbClr val="333333"/>
+            </a:solidFill>
+          </a:ln>
+          <a:effectLst/>
+        </p:spPr>
+        <p:style>
+          <a:lnRef idx="1">
+            <a:schemeClr val="accent1"/>
+          </a:lnRef>
+          <a:fillRef idx="3">
+            <a:schemeClr val="accent1"/>
+          </a:fillRef>
+          <a:effectRef idx="2">
+            <a:schemeClr val="accent1"/>
+          </a:effectRef>
+          <a:fontRef idx="minor">
+            <a:schemeClr val="lt1"/>
+          </a:fontRef>
+        </p:style>
+        <p:txBody>
+          <a:bodyPr rtlCol="0" anchor="ctr"/>
+          <a:lstStyle/>
+          <a:p/>
+        </p:txBody>
+      </p:sp>
+      <p:sp>
+        <p:nvSpPr>
+          <p:cNvPr id="82" name="Text 78"/>
+          <p:cNvSpPr txBox="1"/>
+          <p:nvPr/>
+        </p:nvSpPr>
+        <p:spPr>
+          <a:xfrm>
+            <a:off x="3566160" y="4764024"/>
+            <a:ext cx="1086307" cy="201168"/>
+          </a:xfrm>
+          <a:prstGeom prst="rect">
+            <a:avLst/>
+          </a:prstGeom>
+          <a:noFill/>
+        </p:spPr>
+        <p:txBody>
+          <a:bodyPr wrap="square" lIns="0" rIns="0" tIns="0" bIns="0" anchor="ctr">
+            <a:spAutoFit/>
+          </a:bodyPr>
+          <a:lstStyle/>
+          <a:p>
+            <a:pPr algn="ctr"/>
+            <a:r>
+              <a:rPr sz="560" b="0" i="0">
+                <a:solidFill>
+                  <a:srgbClr val="F2F2F2"/>
+                </a:solidFill>
+                <a:latin typeface="Trenda IG Text"/>
+              </a:rPr>
+              <a:t>cancellation window</a:t>
+            </a:r>
+          </a:p>
+        </p:txBody>
+      </p:sp>
+      <p:sp>
+        <p:nvSpPr>
+          <p:cNvPr id="83" name="Shape 79"/>
+          <p:cNvSpPr/>
+          <p:nvPr/>
+        </p:nvSpPr>
+        <p:spPr>
+          <a:xfrm>
+            <a:off x="4707331" y="4764024"/>
+            <a:ext cx="943660" cy="201168"/>
+          </a:xfrm>
+          <a:prstGeom prst="roundRect">
+            <a:avLst>
+              <a:gd name="adj" fmla="val 40000"/>
+            </a:avLst>
+          </a:prstGeom>
+          <a:solidFill>
+            <a:srgbClr val="141414"/>
+          </a:solidFill>
+          <a:ln w="7620">
+            <a:solidFill>
+              <a:srgbClr val="333333"/>
+            </a:solidFill>
+          </a:ln>
+          <a:effectLst/>
+        </p:spPr>
+        <p:style>
+          <a:lnRef idx="1">
+            <a:schemeClr val="accent1"/>
+          </a:lnRef>
+          <a:fillRef idx="3">
+            <a:schemeClr val="accent1"/>
+          </a:fillRef>
+          <a:effectRef idx="2">
+            <a:schemeClr val="accent1"/>
+          </a:effectRef>
+          <a:fontRef idx="minor">
+            <a:schemeClr val="lt1"/>
+          </a:fontRef>
+        </p:style>
+        <p:txBody>
+          <a:bodyPr rtlCol="0" anchor="ctr"/>
+          <a:lstStyle/>
+          <a:p/>
+        </p:txBody>
+      </p:sp>
+      <p:sp>
+        <p:nvSpPr>
+          <p:cNvPr id="84" name="Text 80"/>
+          <p:cNvSpPr txBox="1"/>
+          <p:nvPr/>
+        </p:nvSpPr>
+        <p:spPr>
+          <a:xfrm>
+            <a:off x="4707331" y="4764024"/>
+            <a:ext cx="943660" cy="201168"/>
+          </a:xfrm>
+          <a:prstGeom prst="rect">
+            <a:avLst/>
+          </a:prstGeom>
+          <a:noFill/>
+        </p:spPr>
+        <p:txBody>
+          <a:bodyPr wrap="square" lIns="0" rIns="0" tIns="0" bIns="0" anchor="ctr">
+            <a:spAutoFit/>
+          </a:bodyPr>
+          <a:lstStyle/>
+          <a:p>
+            <a:pPr algn="ctr"/>
+            <a:r>
+              <a:rPr sz="560" b="0" i="0">
+                <a:solidFill>
+                  <a:srgbClr val="F2F2F2"/>
+                </a:solidFill>
+                <a:latin typeface="Trenda IG Text"/>
+              </a:rPr>
+              <a:t>reschedule rules</a:t>
+            </a:r>
+          </a:p>
+        </p:txBody>
+      </p:sp>
+      <p:sp>
+        <p:nvSpPr>
+          <p:cNvPr id="85" name="Shape 81"/>
+          <p:cNvSpPr/>
+          <p:nvPr/>
+        </p:nvSpPr>
+        <p:spPr>
+          <a:xfrm>
+            <a:off x="5705856" y="4764024"/>
+            <a:ext cx="705916" cy="201168"/>
+          </a:xfrm>
+          <a:prstGeom prst="roundRect">
+            <a:avLst>
+              <a:gd name="adj" fmla="val 40000"/>
+            </a:avLst>
+          </a:prstGeom>
+          <a:solidFill>
+            <a:srgbClr val="141414"/>
+          </a:solidFill>
+          <a:ln w="7620">
+            <a:solidFill>
+              <a:srgbClr val="333333"/>
+            </a:solidFill>
+          </a:ln>
+          <a:effectLst/>
+        </p:spPr>
+        <p:style>
+          <a:lnRef idx="1">
+            <a:schemeClr val="accent1"/>
+          </a:lnRef>
+          <a:fillRef idx="3">
+            <a:schemeClr val="accent1"/>
+          </a:fillRef>
+          <a:effectRef idx="2">
+            <a:schemeClr val="accent1"/>
+          </a:effectRef>
+          <a:fontRef idx="minor">
+            <a:schemeClr val="lt1"/>
+          </a:fontRef>
+        </p:style>
+        <p:txBody>
+          <a:bodyPr rtlCol="0" anchor="ctr"/>
+          <a:lstStyle/>
+          <a:p/>
+        </p:txBody>
+      </p:sp>
+      <p:sp>
+        <p:nvSpPr>
+          <p:cNvPr id="86" name="Text 82"/>
+          <p:cNvSpPr txBox="1"/>
+          <p:nvPr/>
+        </p:nvSpPr>
+        <p:spPr>
+          <a:xfrm>
+            <a:off x="5705856" y="4764024"/>
+            <a:ext cx="705916" cy="201168"/>
+          </a:xfrm>
+          <a:prstGeom prst="rect">
+            <a:avLst/>
+          </a:prstGeom>
+          <a:noFill/>
+        </p:spPr>
+        <p:txBody>
+          <a:bodyPr wrap="square" lIns="0" rIns="0" tIns="0" bIns="0" anchor="ctr">
+            <a:spAutoFit/>
+          </a:bodyPr>
+          <a:lstStyle/>
+          <a:p>
+            <a:pPr algn="ctr"/>
+            <a:r>
+              <a:rPr sz="560" b="0" i="0">
+                <a:solidFill>
+                  <a:srgbClr val="F2F2F2"/>
+                </a:solidFill>
+                <a:latin typeface="Trenda IG Text"/>
+              </a:rPr>
+              <a:t>visit types</a:t>
+            </a:r>
+          </a:p>
+        </p:txBody>
+      </p:sp>
+      <p:sp>
+        <p:nvSpPr>
+          <p:cNvPr id="87" name="Shape 83"/>
+          <p:cNvSpPr/>
+          <p:nvPr/>
+        </p:nvSpPr>
+        <p:spPr>
+          <a:xfrm>
+            <a:off x="6466636" y="4764024"/>
+            <a:ext cx="1181404" cy="201168"/>
+          </a:xfrm>
+          <a:prstGeom prst="roundRect">
+            <a:avLst>
+              <a:gd name="adj" fmla="val 40000"/>
+            </a:avLst>
+          </a:prstGeom>
+          <a:solidFill>
+            <a:srgbClr val="141414"/>
+          </a:solidFill>
+          <a:ln w="7620">
+            <a:solidFill>
+              <a:srgbClr val="333333"/>
+            </a:solidFill>
+          </a:ln>
+          <a:effectLst/>
+        </p:spPr>
+        <p:style>
+          <a:lnRef idx="1">
+            <a:schemeClr val="accent1"/>
+          </a:lnRef>
+          <a:fillRef idx="3">
+            <a:schemeClr val="accent1"/>
+          </a:fillRef>
+          <a:effectRef idx="2">
+            <a:schemeClr val="accent1"/>
+          </a:effectRef>
+          <a:fontRef idx="minor">
+            <a:schemeClr val="lt1"/>
+          </a:fontRef>
+        </p:style>
+        <p:txBody>
+          <a:bodyPr rtlCol="0" anchor="ctr"/>
+          <a:lstStyle/>
+          <a:p/>
+        </p:txBody>
+      </p:sp>
+      <p:sp>
+        <p:nvSpPr>
+          <p:cNvPr id="88" name="Text 84"/>
+          <p:cNvSpPr txBox="1"/>
+          <p:nvPr/>
+        </p:nvSpPr>
+        <p:spPr>
+          <a:xfrm>
+            <a:off x="6466636" y="4764024"/>
+            <a:ext cx="1181404" cy="201168"/>
+          </a:xfrm>
+          <a:prstGeom prst="rect">
+            <a:avLst/>
+          </a:prstGeom>
+          <a:noFill/>
+        </p:spPr>
+        <p:txBody>
+          <a:bodyPr wrap="square" lIns="0" rIns="0" tIns="0" bIns="0" anchor="ctr">
+            <a:spAutoFit/>
+          </a:bodyPr>
+          <a:lstStyle/>
+          <a:p>
+            <a:pPr algn="ctr"/>
+            <a:r>
+              <a:rPr sz="560" b="0" i="0">
+                <a:solidFill>
+                  <a:srgbClr val="F2F2F2"/>
+                </a:solidFill>
+                <a:latin typeface="Trenda IG Text"/>
+              </a:rPr>
+              <a:t>provider restrictions</a:t>
+            </a:r>
+          </a:p>
+        </p:txBody>
+      </p:sp>
+      <p:sp>
+        <p:nvSpPr>
+          <p:cNvPr id="89" name="Shape 85"/>
+          <p:cNvSpPr/>
+          <p:nvPr/>
+        </p:nvSpPr>
+        <p:spPr>
+          <a:xfrm>
+            <a:off x="7702905" y="4764024"/>
+            <a:ext cx="848563" cy="201168"/>
+          </a:xfrm>
+          <a:prstGeom prst="roundRect">
+            <a:avLst>
+              <a:gd name="adj" fmla="val 40000"/>
+            </a:avLst>
+          </a:prstGeom>
+          <a:solidFill>
+            <a:srgbClr val="141414"/>
+          </a:solidFill>
+          <a:ln w="7620">
+            <a:solidFill>
+              <a:srgbClr val="333333"/>
+            </a:solidFill>
+          </a:ln>
+          <a:effectLst/>
+        </p:spPr>
+        <p:style>
+          <a:lnRef idx="1">
+            <a:schemeClr val="accent1"/>
+          </a:lnRef>
+          <a:fillRef idx="3">
+            <a:schemeClr val="accent1"/>
+          </a:fillRef>
+          <a:effectRef idx="2">
+            <a:schemeClr val="accent1"/>
+          </a:effectRef>
+          <a:fontRef idx="minor">
+            <a:schemeClr val="lt1"/>
+          </a:fontRef>
+        </p:style>
+        <p:txBody>
+          <a:bodyPr rtlCol="0" anchor="ctr"/>
+          <a:lstStyle/>
+          <a:p/>
+        </p:txBody>
+      </p:sp>
+      <p:sp>
+        <p:nvSpPr>
+          <p:cNvPr id="90" name="Text 86"/>
+          <p:cNvSpPr txBox="1"/>
+          <p:nvPr/>
+        </p:nvSpPr>
+        <p:spPr>
+          <a:xfrm>
+            <a:off x="7702905" y="4764024"/>
+            <a:ext cx="848563" cy="201168"/>
+          </a:xfrm>
+          <a:prstGeom prst="rect">
+            <a:avLst/>
+          </a:prstGeom>
+          <a:noFill/>
+        </p:spPr>
+        <p:txBody>
+          <a:bodyPr wrap="square" lIns="0" rIns="0" tIns="0" bIns="0" anchor="ctr">
+            <a:spAutoFit/>
+          </a:bodyPr>
+          <a:lstStyle/>
+          <a:p>
+            <a:pPr algn="ctr"/>
+            <a:r>
+              <a:rPr sz="560" b="0" i="0">
+                <a:solidFill>
+                  <a:srgbClr val="F2F2F2"/>
+                </a:solidFill>
+                <a:latin typeface="Trenda IG Text"/>
+              </a:rPr>
+              <a:t>minimum fields</a:t>
+            </a:r>
+          </a:p>
+        </p:txBody>
+      </p:sp>
+      <p:sp>
+        <p:nvSpPr>
+          <p:cNvPr id="91" name="Shape 87"/>
+          <p:cNvSpPr/>
+          <p:nvPr/>
+        </p:nvSpPr>
+        <p:spPr>
+          <a:xfrm>
+            <a:off x="9189720" y="1188720"/>
+            <a:ext cx="2587752" cy="4041648"/>
+          </a:xfrm>
+          <a:prstGeom prst="roundRect">
+            <a:avLst>
+              <a:gd name="adj" fmla="val 2000"/>
+            </a:avLst>
+          </a:prstGeom>
+          <a:solidFill>
+            <a:srgbClr val="1E1E1E"/>
+          </a:solidFill>
+          <a:ln>
+            <a:noFill/>
+          </a:ln>
+          <a:effectLst/>
+        </p:spPr>
+        <p:style>
+          <a:lnRef idx="1">
+            <a:schemeClr val="accent1"/>
+          </a:lnRef>
+          <a:fillRef idx="3">
+            <a:schemeClr val="accent1"/>
+          </a:fillRef>
+          <a:effectRef idx="2">
+            <a:schemeClr val="accent1"/>
+          </a:effectRef>
+          <a:fontRef idx="minor">
+            <a:schemeClr val="lt1"/>
+          </a:fontRef>
+        </p:style>
+        <p:txBody>
+          <a:bodyPr rtlCol="0" anchor="ctr"/>
+          <a:lstStyle/>
+          <a:p/>
+        </p:txBody>
+      </p:sp>
+      <p:sp>
+        <p:nvSpPr>
+          <p:cNvPr id="92" name="Shape 88"/>
+          <p:cNvSpPr/>
+          <p:nvPr/>
+        </p:nvSpPr>
+        <p:spPr>
+          <a:xfrm>
+            <a:off x="9189720" y="1188720"/>
+            <a:ext cx="2587752" cy="256032"/>
+          </a:xfrm>
+          <a:prstGeom prst="rect">
+            <a:avLst/>
+          </a:prstGeom>
+          <a:solidFill>
+            <a:srgbClr val="2B2B2B"/>
+          </a:solidFill>
+          <a:ln>
+            <a:noFill/>
+          </a:ln>
+          <a:effectLst/>
+        </p:spPr>
+        <p:style>
+          <a:lnRef idx="1">
+            <a:schemeClr val="accent1"/>
+          </a:lnRef>
+          <a:fillRef idx="3">
+            <a:schemeClr val="accent1"/>
+          </a:fillRef>
+          <a:effectRef idx="2">
+            <a:schemeClr val="accent1"/>
+          </a:effectRef>
+          <a:fontRef idx="minor">
+            <a:schemeClr val="lt1"/>
+          </a:fontRef>
+        </p:style>
+        <p:txBody>
+          <a:bodyPr rtlCol="0" anchor="ctr"/>
+          <a:lstStyle/>
+          <a:p/>
+        </p:txBody>
+      </p:sp>
+      <p:sp>
+        <p:nvSpPr>
+          <p:cNvPr id="93" name="Text 89"/>
+          <p:cNvSpPr txBox="1"/>
+          <p:nvPr/>
+        </p:nvSpPr>
+        <p:spPr>
+          <a:xfrm>
+            <a:off x="9299448" y="1188720"/>
+            <a:ext cx="2368296" cy="256032"/>
+          </a:xfrm>
+          <a:prstGeom prst="rect">
+            <a:avLst/>
+          </a:prstGeom>
+          <a:noFill/>
+        </p:spPr>
+        <p:txBody>
+          <a:bodyPr wrap="square" lIns="0" rIns="0" tIns="0" bIns="0" anchor="ctr">
+            <a:spAutoFit/>
+          </a:bodyPr>
+          <a:lstStyle/>
+          <a:p>
+            <a:r>
+              <a:rPr sz="640" b="1" i="0" spc="120">
+                <a:solidFill>
+                  <a:srgbClr val="F2F2F2"/>
+                </a:solidFill>
+                <a:latin typeface="Trenda IG Text"/>
+              </a:rPr>
+              <a:t>3  AFTER EVERY CALL</a:t>
+            </a:r>
+          </a:p>
+        </p:txBody>
+      </p:sp>
+      <p:sp>
+        <p:nvSpPr>
+          <p:cNvPr id="94" name="Shape 90"/>
+          <p:cNvSpPr/>
+          <p:nvPr/>
+        </p:nvSpPr>
+        <p:spPr>
+          <a:xfrm>
+            <a:off x="9299448" y="1554480"/>
+            <a:ext cx="2368296" cy="749808"/>
+          </a:xfrm>
+          <a:prstGeom prst="roundRect">
+            <a:avLst>
+              <a:gd name="adj" fmla="val 8000"/>
+            </a:avLst>
+          </a:prstGeom>
+          <a:solidFill>
+            <a:srgbClr val="2B2508"/>
+          </a:solidFill>
+          <a:ln w="11430">
+            <a:solidFill>
+              <a:srgbClr val="FFD700"/>
+            </a:solidFill>
+          </a:ln>
+          <a:effectLst/>
+        </p:spPr>
+        <p:style>
+          <a:lnRef idx="1">
+            <a:schemeClr val="accent1"/>
+          </a:lnRef>
+          <a:fillRef idx="3">
+            <a:schemeClr val="accent1"/>
+          </a:fillRef>
+          <a:effectRef idx="2">
+            <a:schemeClr val="accent1"/>
+          </a:effectRef>
+          <a:fontRef idx="minor">
+            <a:schemeClr val="lt1"/>
+          </a:fontRef>
+        </p:style>
+        <p:txBody>
+          <a:bodyPr rtlCol="0" anchor="ctr"/>
+          <a:lstStyle/>
+          <a:p/>
+        </p:txBody>
+      </p:sp>
+      <p:pic>
+        <p:nvPicPr>
+          <p:cNvPr id="95" name="Picture 94" descr="people.png"/>
+          <p:cNvPicPr>
+            <a:picLocks noChangeAspect="1"/>
+          </p:cNvPicPr>
+          <p:nvPr/>
+        </p:nvPicPr>
+        <p:blipFill>
+          <a:blip r:embed="rId2"/>
+          <a:stretch>
+            <a:fillRect/>
+          </a:stretch>
+        </p:blipFill>
+        <p:spPr>
+          <a:xfrm>
+            <a:off x="9390888" y="1627632"/>
+            <a:ext cx="182880" cy="182880"/>
+          </a:xfrm>
+          <a:prstGeom prst="rect">
+            <a:avLst/>
+          </a:prstGeom>
+        </p:spPr>
+      </p:pic>
+      <p:sp>
+        <p:nvSpPr>
+          <p:cNvPr id="96" name="Text 91"/>
+          <p:cNvSpPr txBox="1"/>
+          <p:nvPr/>
+        </p:nvSpPr>
+        <p:spPr>
+          <a:xfrm>
+            <a:off x="9628632" y="1600200"/>
+            <a:ext cx="1965960" cy="237744"/>
+          </a:xfrm>
+          <a:prstGeom prst="rect">
+            <a:avLst/>
+          </a:prstGeom>
+          <a:noFill/>
+        </p:spPr>
+        <p:txBody>
+          <a:bodyPr wrap="square" lIns="0" rIns="0" tIns="0" bIns="0" anchor="ctr">
+            <a:spAutoFit/>
+          </a:bodyPr>
+          <a:lstStyle/>
+          <a:p>
+            <a:r>
+              <a:rPr sz="700" b="1" i="0">
+                <a:solidFill>
+                  <a:srgbClr val="FFD700"/>
+                </a:solidFill>
+                <a:latin typeface="Trenda IG Text"/>
+              </a:rPr>
+              <a:t>Hand-off to a person</a:t>
+            </a:r>
+          </a:p>
+        </p:txBody>
+      </p:sp>
+      <p:sp>
+        <p:nvSpPr>
+          <p:cNvPr id="97" name="Text 92"/>
+          <p:cNvSpPr txBox="1"/>
+          <p:nvPr/>
+        </p:nvSpPr>
+        <p:spPr>
+          <a:xfrm>
+            <a:off x="9390888" y="1883664"/>
+            <a:ext cx="2203703" cy="384047"/>
+          </a:xfrm>
+          <a:prstGeom prst="rect">
+            <a:avLst/>
+          </a:prstGeom>
+          <a:noFill/>
+        </p:spPr>
+        <p:txBody>
+          <a:bodyPr wrap="square" lIns="0" rIns="0" tIns="0" bIns="0" anchor="t">
+            <a:spAutoFit/>
+          </a:bodyPr>
+          <a:lstStyle/>
+          <a:p>
+            <a:r>
+              <a:rPr sz="600" b="0" i="0">
+                <a:solidFill>
+                  <a:srgbClr val="B3B3B3"/>
+                </a:solidFill>
+                <a:latin typeface="Trenda IG Text"/>
+              </a:rPr>
+              <a:t>Identity not verified, upset caller or a clinical question.</a:t>
+            </a:r>
+          </a:p>
+        </p:txBody>
+      </p:sp>
+      <p:sp>
+        <p:nvSpPr>
+          <p:cNvPr id="98" name="Shape 93"/>
+          <p:cNvSpPr/>
+          <p:nvPr/>
+        </p:nvSpPr>
+        <p:spPr>
+          <a:xfrm>
+            <a:off x="9299448" y="2432304"/>
+            <a:ext cx="2368296" cy="822960"/>
+          </a:xfrm>
+          <a:prstGeom prst="roundRect">
+            <a:avLst>
+              <a:gd name="adj" fmla="val 7000"/>
+            </a:avLst>
+          </a:prstGeom>
+          <a:solidFill>
+            <a:srgbClr val="141414"/>
+          </a:solidFill>
+          <a:ln w="12700">
+            <a:solidFill>
+              <a:srgbClr val="333333"/>
+            </a:solidFill>
+          </a:ln>
+          <a:effectLst/>
+        </p:spPr>
+        <p:style>
+          <a:lnRef idx="1">
+            <a:schemeClr val="accent1"/>
+          </a:lnRef>
+          <a:fillRef idx="3">
+            <a:schemeClr val="accent1"/>
+          </a:fillRef>
+          <a:effectRef idx="2">
+            <a:schemeClr val="accent1"/>
+          </a:effectRef>
+          <a:fontRef idx="minor">
+            <a:schemeClr val="lt1"/>
+          </a:fontRef>
+        </p:style>
+        <p:txBody>
+          <a:bodyPr rtlCol="0" anchor="ctr"/>
+          <a:lstStyle/>
+          <a:p/>
+        </p:txBody>
+      </p:sp>
+      <p:sp>
+        <p:nvSpPr>
+          <p:cNvPr id="99" name="Text 94"/>
+          <p:cNvSpPr txBox="1"/>
+          <p:nvPr/>
+        </p:nvSpPr>
+        <p:spPr>
+          <a:xfrm>
+            <a:off x="9390888" y="2487168"/>
+            <a:ext cx="2203704" cy="201168"/>
+          </a:xfrm>
+          <a:prstGeom prst="rect">
+            <a:avLst/>
+          </a:prstGeom>
+          <a:noFill/>
+        </p:spPr>
+        <p:txBody>
+          <a:bodyPr wrap="square" lIns="0" rIns="0" tIns="0" bIns="0" anchor="ctr">
+            <a:spAutoFit/>
+          </a:bodyPr>
+          <a:lstStyle/>
+          <a:p>
+            <a:r>
+              <a:rPr sz="680" b="1" i="0">
+                <a:solidFill>
+                  <a:srgbClr val="F2F2F2"/>
+                </a:solidFill>
+                <a:latin typeface="Trenda IG Text"/>
+              </a:rPr>
+              <a:t>Masked transcripts</a:t>
+            </a:r>
+          </a:p>
+        </p:txBody>
+      </p:sp>
+      <p:sp>
+        <p:nvSpPr>
+          <p:cNvPr id="100" name="Text 95"/>
+          <p:cNvSpPr txBox="1"/>
+          <p:nvPr/>
+        </p:nvSpPr>
+        <p:spPr>
+          <a:xfrm>
+            <a:off x="9390888" y="2715768"/>
+            <a:ext cx="2185415" cy="512064"/>
+          </a:xfrm>
+          <a:prstGeom prst="rect">
+            <a:avLst/>
+          </a:prstGeom>
+          <a:noFill/>
+        </p:spPr>
+        <p:txBody>
+          <a:bodyPr wrap="square" lIns="0" rIns="0" tIns="0" bIns="0" anchor="t">
+            <a:spAutoFit/>
+          </a:bodyPr>
+          <a:lstStyle/>
+          <a:p>
+            <a:pPr>
+              <a:spcAft>
+                <a:spcPts val="100"/>
+              </a:spcAft>
+            </a:pPr>
+            <a:r>
+              <a:rPr sz="600" b="0" i="0">
+                <a:solidFill>
+                  <a:srgbClr val="B3B3B3"/>
+                </a:solidFill>
+                <a:latin typeface="Trenda IG Text"/>
+              </a:rPr>
+              <a:t>Recordings hold PHI: access control, retention limits, masked before analytics.</a:t>
+            </a:r>
+          </a:p>
+        </p:txBody>
+      </p:sp>
+      <p:sp>
+        <p:nvSpPr>
+          <p:cNvPr id="101" name="Shape 96"/>
+          <p:cNvSpPr/>
+          <p:nvPr/>
+        </p:nvSpPr>
+        <p:spPr>
+          <a:xfrm>
+            <a:off x="9299448" y="3346704"/>
+            <a:ext cx="2368296" cy="822960"/>
+          </a:xfrm>
+          <a:prstGeom prst="roundRect">
+            <a:avLst>
+              <a:gd name="adj" fmla="val 7000"/>
+            </a:avLst>
+          </a:prstGeom>
+          <a:solidFill>
+            <a:srgbClr val="141414"/>
+          </a:solidFill>
+          <a:ln w="12700">
+            <a:solidFill>
+              <a:srgbClr val="333333"/>
+            </a:solidFill>
+          </a:ln>
+          <a:effectLst/>
+        </p:spPr>
+        <p:style>
+          <a:lnRef idx="1">
+            <a:schemeClr val="accent1"/>
+          </a:lnRef>
+          <a:fillRef idx="3">
+            <a:schemeClr val="accent1"/>
+          </a:fillRef>
+          <a:effectRef idx="2">
+            <a:schemeClr val="accent1"/>
+          </a:effectRef>
+          <a:fontRef idx="minor">
+            <a:schemeClr val="lt1"/>
+          </a:fontRef>
+        </p:style>
+        <p:txBody>
+          <a:bodyPr rtlCol="0" anchor="ctr"/>
+          <a:lstStyle/>
+          <a:p/>
+        </p:txBody>
+      </p:sp>
+      <p:pic>
+        <p:nvPicPr>
+          <p:cNvPr id="102" name="Picture 101" descr="googlebigquery.png"/>
+          <p:cNvPicPr>
+            <a:picLocks noChangeAspect="1"/>
+          </p:cNvPicPr>
+          <p:nvPr/>
+        </p:nvPicPr>
+        <p:blipFill>
+          <a:blip r:embed="rId4"/>
+          <a:stretch>
+            <a:fillRect/>
+          </a:stretch>
+        </p:blipFill>
+        <p:spPr>
+          <a:xfrm>
+            <a:off x="9390888" y="3410712"/>
+            <a:ext cx="182880" cy="182880"/>
+          </a:xfrm>
+          <a:prstGeom prst="rect">
+            <a:avLst/>
+          </a:prstGeom>
+        </p:spPr>
+      </p:pic>
+      <p:sp>
+        <p:nvSpPr>
+          <p:cNvPr id="103" name="Text 97"/>
+          <p:cNvSpPr txBox="1"/>
+          <p:nvPr/>
+        </p:nvSpPr>
+        <p:spPr>
+          <a:xfrm>
+            <a:off x="9628632" y="3401568"/>
+            <a:ext cx="1965960" cy="201168"/>
+          </a:xfrm>
+          <a:prstGeom prst="rect">
+            <a:avLst/>
+          </a:prstGeom>
+          <a:noFill/>
+        </p:spPr>
+        <p:txBody>
+          <a:bodyPr wrap="square" lIns="0" rIns="0" tIns="0" bIns="0" anchor="ctr">
+            <a:spAutoFit/>
+          </a:bodyPr>
+          <a:lstStyle/>
+          <a:p>
+            <a:r>
+              <a:rPr sz="680" b="1" i="0">
+                <a:solidFill>
+                  <a:srgbClr val="F2F2F2"/>
+                </a:solidFill>
+                <a:latin typeface="Trenda IG Text"/>
+              </a:rPr>
+              <a:t>Outcomes to Gold A</a:t>
+            </a:r>
+          </a:p>
+        </p:txBody>
+      </p:sp>
+      <p:sp>
+        <p:nvSpPr>
+          <p:cNvPr id="104" name="Text 98"/>
+          <p:cNvSpPr txBox="1"/>
+          <p:nvPr/>
+        </p:nvSpPr>
+        <p:spPr>
+          <a:xfrm>
+            <a:off x="9390888" y="3630168"/>
+            <a:ext cx="2185415" cy="512064"/>
+          </a:xfrm>
+          <a:prstGeom prst="rect">
+            <a:avLst/>
+          </a:prstGeom>
+          <a:noFill/>
+        </p:spPr>
+        <p:txBody>
+          <a:bodyPr wrap="square" lIns="0" rIns="0" tIns="0" bIns="0" anchor="t">
+            <a:spAutoFit/>
+          </a:bodyPr>
+          <a:lstStyle/>
+          <a:p>
+            <a:pPr>
+              <a:spcAft>
+                <a:spcPts val="100"/>
+              </a:spcAft>
+            </a:pPr>
+            <a:r>
+              <a:rPr sz="600" b="0" i="0">
+                <a:solidFill>
+                  <a:srgbClr val="B3B3B3"/>
+                </a:solidFill>
+                <a:latin typeface="Trenda IG Text"/>
+              </a:rPr>
+              <a:t>Booked, cancelled, rescheduled, escalated, as aggregates for measurement.</a:t>
+            </a:r>
+          </a:p>
+        </p:txBody>
+      </p:sp>
+      <p:sp>
+        <p:nvSpPr>
+          <p:cNvPr id="105" name="Shape 99"/>
+          <p:cNvSpPr/>
+          <p:nvPr/>
+        </p:nvSpPr>
+        <p:spPr>
+          <a:xfrm>
+            <a:off x="9299448" y="4261104"/>
+            <a:ext cx="2368296" cy="822960"/>
+          </a:xfrm>
+          <a:prstGeom prst="roundRect">
+            <a:avLst>
+              <a:gd name="adj" fmla="val 7000"/>
+            </a:avLst>
+          </a:prstGeom>
+          <a:solidFill>
+            <a:srgbClr val="141414"/>
+          </a:solidFill>
+          <a:ln w="12700">
+            <a:solidFill>
+              <a:srgbClr val="333333"/>
+            </a:solidFill>
+          </a:ln>
+          <a:effectLst/>
+        </p:spPr>
+        <p:style>
+          <a:lnRef idx="1">
+            <a:schemeClr val="accent1"/>
+          </a:lnRef>
+          <a:fillRef idx="3">
+            <a:schemeClr val="accent1"/>
+          </a:fillRef>
+          <a:effectRef idx="2">
+            <a:schemeClr val="accent1"/>
+          </a:effectRef>
+          <a:fontRef idx="minor">
+            <a:schemeClr val="lt1"/>
+          </a:fontRef>
+        </p:style>
+        <p:txBody>
+          <a:bodyPr rtlCol="0" anchor="ctr"/>
+          <a:lstStyle/>
+          <a:p/>
+        </p:txBody>
+      </p:sp>
+      <p:sp>
+        <p:nvSpPr>
+          <p:cNvPr id="106" name="Text 100"/>
+          <p:cNvSpPr txBox="1"/>
+          <p:nvPr/>
+        </p:nvSpPr>
+        <p:spPr>
+          <a:xfrm>
+            <a:off x="9390888" y="4315968"/>
+            <a:ext cx="2203704" cy="201168"/>
+          </a:xfrm>
+          <a:prstGeom prst="rect">
+            <a:avLst/>
+          </a:prstGeom>
+          <a:noFill/>
+        </p:spPr>
+        <p:txBody>
+          <a:bodyPr wrap="square" lIns="0" rIns="0" tIns="0" bIns="0" anchor="ctr">
+            <a:spAutoFit/>
+          </a:bodyPr>
+          <a:lstStyle/>
+          <a:p>
+            <a:r>
+              <a:rPr sz="680" b="1" i="0">
+                <a:solidFill>
+                  <a:srgbClr val="F2F2F2"/>
+                </a:solidFill>
+                <a:latin typeface="Trenda IG Text"/>
+              </a:rPr>
+              <a:t>Test calls before go-live</a:t>
+            </a:r>
+          </a:p>
+        </p:txBody>
+      </p:sp>
+      <p:sp>
+        <p:nvSpPr>
+          <p:cNvPr id="107" name="Text 101"/>
+          <p:cNvSpPr txBox="1"/>
+          <p:nvPr/>
+        </p:nvSpPr>
+        <p:spPr>
+          <a:xfrm>
+            <a:off x="9390888" y="4544568"/>
+            <a:ext cx="2185415" cy="512064"/>
+          </a:xfrm>
+          <a:prstGeom prst="rect">
+            <a:avLst/>
+          </a:prstGeom>
+          <a:noFill/>
+        </p:spPr>
+        <p:txBody>
+          <a:bodyPr wrap="square" lIns="0" rIns="0" tIns="0" bIns="0" anchor="t">
+            <a:spAutoFit/>
+          </a:bodyPr>
+          <a:lstStyle/>
+          <a:p>
+            <a:pPr>
+              <a:spcAft>
+                <a:spcPts val="100"/>
+              </a:spcAft>
+            </a:pPr>
+            <a:r>
+              <a:rPr sz="600" b="0" i="0">
+                <a:solidFill>
+                  <a:srgbClr val="B3B3B3"/>
+                </a:solidFill>
+                <a:latin typeface="Trenda IG Text"/>
+              </a:rPr>
+              <a:t>Wrong caller, outside the window, a question no article covers.</a:t>
+            </a:r>
+          </a:p>
+        </p:txBody>
+      </p:sp>
+      <p:sp>
+        <p:nvSpPr>
+          <p:cNvPr id="108" name="Text 102"/>
+          <p:cNvSpPr txBox="1"/>
+          <p:nvPr/>
+        </p:nvSpPr>
+        <p:spPr>
+          <a:xfrm>
+            <a:off x="411480" y="5376672"/>
+            <a:ext cx="1188720" cy="786384"/>
+          </a:xfrm>
+          <a:prstGeom prst="rect">
+            <a:avLst/>
+          </a:prstGeom>
+          <a:noFill/>
+        </p:spPr>
+        <p:txBody>
+          <a:bodyPr wrap="square" lIns="0" rIns="0" tIns="0" bIns="0" anchor="ctr">
+            <a:spAutoFit/>
+          </a:bodyPr>
+          <a:lstStyle/>
+          <a:p>
+            <a:pPr>
+              <a:spcAft>
+                <a:spcPts val="100"/>
+              </a:spcAft>
+            </a:pPr>
+            <a:r>
+              <a:rPr sz="640" b="1" i="0" spc="120">
+                <a:solidFill>
+                  <a:srgbClr val="F2F2F2"/>
+                </a:solidFill>
+                <a:latin typeface="Trenda IG Text"/>
+              </a:rPr>
+              <a:t>SAFEGUARDS</a:t>
+            </a:r>
+          </a:p>
+          <a:p>
+            <a:pPr>
+              <a:spcAft>
+                <a:spcPts val="100"/>
+              </a:spcAft>
+            </a:pPr>
+            <a:r>
+              <a:rPr sz="520" b="0" i="0">
+                <a:solidFill>
+                  <a:srgbClr val="8C8C8C"/>
+                </a:solidFill>
+                <a:latin typeface="Trenda IG Text"/>
+              </a:rPr>
+              <a:t>accurate, and safe for patients</a:t>
+            </a:r>
+          </a:p>
+        </p:txBody>
+      </p:sp>
+      <p:sp>
+        <p:nvSpPr>
+          <p:cNvPr id="109" name="Shape 103"/>
+          <p:cNvSpPr/>
+          <p:nvPr/>
+        </p:nvSpPr>
+        <p:spPr>
+          <a:xfrm>
+            <a:off x="1645920" y="5376672"/>
+            <a:ext cx="1612392" cy="786384"/>
+          </a:xfrm>
+          <a:prstGeom prst="rect">
+            <a:avLst/>
+          </a:prstGeom>
+          <a:solidFill>
+            <a:srgbClr val="141414"/>
+          </a:solidFill>
+          <a:ln>
+            <a:noFill/>
+          </a:ln>
+          <a:effectLst/>
+        </p:spPr>
+        <p:style>
+          <a:lnRef idx="1">
+            <a:schemeClr val="accent1"/>
+          </a:lnRef>
+          <a:fillRef idx="3">
+            <a:schemeClr val="accent1"/>
+          </a:fillRef>
+          <a:effectRef idx="2">
+            <a:schemeClr val="accent1"/>
+          </a:effectRef>
+          <a:fontRef idx="minor">
+            <a:schemeClr val="lt1"/>
+          </a:fontRef>
+        </p:style>
+        <p:txBody>
+          <a:bodyPr rtlCol="0" anchor="ctr"/>
+          <a:lstStyle/>
+          <a:p/>
+        </p:txBody>
+      </p:sp>
+      <p:sp>
+        <p:nvSpPr>
+          <p:cNvPr id="110" name="Shape 104"/>
+          <p:cNvSpPr/>
+          <p:nvPr/>
+        </p:nvSpPr>
+        <p:spPr>
+          <a:xfrm>
+            <a:off x="1645920" y="5376672"/>
+            <a:ext cx="45720" cy="786384"/>
+          </a:xfrm>
+          <a:prstGeom prst="rect">
+            <a:avLst/>
+          </a:prstGeom>
+          <a:gradFill rotWithShape="1">
+            <a:gsLst>
+              <a:gs pos="0">
+                <a:srgbClr val="FFD700"/>
+              </a:gs>
+              <a:gs pos="50000">
+                <a:srgbClr val="FF0069"/>
+              </a:gs>
+              <a:gs pos="100000">
+                <a:srgbClr val="00D6F2"/>
+              </a:gs>
+            </a:gsLst>
+            <a:lin ang="5400000" scaled="0"/>
+          </a:gradFill>
+          <a:ln>
+            <a:noFill/>
+          </a:ln>
+          <a:effectLst/>
+        </p:spPr>
+        <p:style>
+          <a:lnRef idx="1">
+            <a:schemeClr val="accent1"/>
+          </a:lnRef>
+          <a:fillRef idx="3">
+            <a:schemeClr val="accent1"/>
+          </a:fillRef>
+          <a:effectRef idx="2">
+            <a:schemeClr val="accent1"/>
+          </a:effectRef>
+          <a:fontRef idx="minor">
+            <a:schemeClr val="lt1"/>
+          </a:fontRef>
+        </p:style>
+        <p:txBody>
+          <a:bodyPr rtlCol="0" anchor="ctr"/>
+          <a:lstStyle/>
+          <a:p/>
+        </p:txBody>
+      </p:sp>
+      <p:sp>
+        <p:nvSpPr>
+          <p:cNvPr id="111" name="Text 105"/>
+          <p:cNvSpPr txBox="1"/>
+          <p:nvPr/>
+        </p:nvSpPr>
+        <p:spPr>
+          <a:xfrm>
+            <a:off x="1792224" y="5376672"/>
+            <a:ext cx="1411224" cy="786384"/>
+          </a:xfrm>
+          <a:prstGeom prst="rect">
+            <a:avLst/>
+          </a:prstGeom>
+          <a:noFill/>
+        </p:spPr>
+        <p:txBody>
+          <a:bodyPr wrap="square" lIns="0" rIns="0" tIns="0" bIns="0" anchor="ctr">
+            <a:spAutoFit/>
+          </a:bodyPr>
+          <a:lstStyle/>
+          <a:p>
+            <a:pPr>
+              <a:spcAft>
+                <a:spcPts val="100"/>
+              </a:spcAft>
+            </a:pPr>
+            <a:r>
+              <a:rPr sz="720" b="1" i="0">
+                <a:solidFill>
+                  <a:srgbClr val="F2F2F2"/>
+                </a:solidFill>
+                <a:latin typeface="Trenda IG Text"/>
+              </a:rPr>
+              <a:t>BAA with Sierra</a:t>
+            </a:r>
+          </a:p>
+          <a:p>
+            <a:pPr>
+              <a:spcAft>
+                <a:spcPts val="100"/>
+              </a:spcAft>
+            </a:pPr>
+            <a:r>
+              <a:rPr sz="600" b="0" i="0">
+                <a:solidFill>
+                  <a:srgbClr val="B3B3B3"/>
+                </a:solidFill>
+                <a:latin typeface="Trenda IG Text"/>
+              </a:rPr>
+              <a:t>calls carry PHI</a:t>
+            </a:r>
+          </a:p>
+        </p:txBody>
+      </p:sp>
+      <p:sp>
+        <p:nvSpPr>
+          <p:cNvPr id="112" name="Shape 106"/>
+          <p:cNvSpPr/>
+          <p:nvPr/>
+        </p:nvSpPr>
+        <p:spPr>
+          <a:xfrm>
+            <a:off x="3349752" y="5376672"/>
+            <a:ext cx="1612392" cy="786384"/>
+          </a:xfrm>
+          <a:prstGeom prst="rect">
+            <a:avLst/>
+          </a:prstGeom>
+          <a:solidFill>
+            <a:srgbClr val="141414"/>
+          </a:solidFill>
+          <a:ln>
+            <a:noFill/>
+          </a:ln>
+          <a:effectLst/>
+        </p:spPr>
+        <p:style>
+          <a:lnRef idx="1">
+            <a:schemeClr val="accent1"/>
+          </a:lnRef>
+          <a:fillRef idx="3">
+            <a:schemeClr val="accent1"/>
+          </a:fillRef>
+          <a:effectRef idx="2">
+            <a:schemeClr val="accent1"/>
+          </a:effectRef>
+          <a:fontRef idx="minor">
+            <a:schemeClr val="lt1"/>
+          </a:fontRef>
+        </p:style>
+        <p:txBody>
+          <a:bodyPr rtlCol="0" anchor="ctr"/>
+          <a:lstStyle/>
+          <a:p/>
+        </p:txBody>
+      </p:sp>
+      <p:sp>
+        <p:nvSpPr>
+          <p:cNvPr id="113" name="Shape 107"/>
+          <p:cNvSpPr/>
+          <p:nvPr/>
+        </p:nvSpPr>
+        <p:spPr>
+          <a:xfrm>
+            <a:off x="3349752" y="5376672"/>
+            <a:ext cx="45720" cy="786384"/>
+          </a:xfrm>
+          <a:prstGeom prst="rect">
+            <a:avLst/>
+          </a:prstGeom>
+          <a:gradFill rotWithShape="1">
+            <a:gsLst>
+              <a:gs pos="0">
+                <a:srgbClr val="FFD700"/>
+              </a:gs>
+              <a:gs pos="50000">
+                <a:srgbClr val="FF0069"/>
+              </a:gs>
+              <a:gs pos="100000">
+                <a:srgbClr val="00D6F2"/>
+              </a:gs>
+            </a:gsLst>
+            <a:lin ang="5400000" scaled="0"/>
+          </a:gradFill>
+          <a:ln>
+            <a:noFill/>
+          </a:ln>
+          <a:effectLst/>
+        </p:spPr>
+        <p:style>
+          <a:lnRef idx="1">
+            <a:schemeClr val="accent1"/>
+          </a:lnRef>
+          <a:fillRef idx="3">
+            <a:schemeClr val="accent1"/>
+          </a:fillRef>
+          <a:effectRef idx="2">
+            <a:schemeClr val="accent1"/>
+          </a:effectRef>
+          <a:fontRef idx="minor">
+            <a:schemeClr val="lt1"/>
+          </a:fontRef>
+        </p:style>
+        <p:txBody>
+          <a:bodyPr rtlCol="0" anchor="ctr"/>
+          <a:lstStyle/>
+          <a:p/>
+        </p:txBody>
+      </p:sp>
+      <p:sp>
+        <p:nvSpPr>
+          <p:cNvPr id="114" name="Text 108"/>
+          <p:cNvSpPr txBox="1"/>
+          <p:nvPr/>
+        </p:nvSpPr>
+        <p:spPr>
+          <a:xfrm>
+            <a:off x="3496056" y="5376672"/>
+            <a:ext cx="1411224" cy="786384"/>
+          </a:xfrm>
+          <a:prstGeom prst="rect">
+            <a:avLst/>
+          </a:prstGeom>
+          <a:noFill/>
+        </p:spPr>
+        <p:txBody>
+          <a:bodyPr wrap="square" lIns="0" rIns="0" tIns="0" bIns="0" anchor="ctr">
+            <a:spAutoFit/>
+          </a:bodyPr>
+          <a:lstStyle/>
+          <a:p>
+            <a:pPr>
+              <a:spcAft>
+                <a:spcPts val="100"/>
+              </a:spcAft>
+            </a:pPr>
+            <a:r>
+              <a:rPr sz="720" b="1" i="0">
+                <a:solidFill>
+                  <a:srgbClr val="F2F2F2"/>
+                </a:solidFill>
+                <a:latin typeface="Trenda IG Text"/>
+              </a:rPr>
+              <a:t>Verify before any PHI</a:t>
+            </a:r>
+          </a:p>
+          <a:p>
+            <a:pPr>
+              <a:spcAft>
+                <a:spcPts val="100"/>
+              </a:spcAft>
+            </a:pPr>
+            <a:r>
+              <a:rPr sz="600" b="0" i="0">
+                <a:solidFill>
+                  <a:srgbClr val="B3B3B3"/>
+                </a:solidFill>
+                <a:latin typeface="Trenda IG Text"/>
+              </a:rPr>
+              <a:t>then this patient only</a:t>
+            </a:r>
+          </a:p>
+        </p:txBody>
+      </p:sp>
+      <p:sp>
+        <p:nvSpPr>
+          <p:cNvPr id="115" name="Shape 109"/>
+          <p:cNvSpPr/>
+          <p:nvPr/>
+        </p:nvSpPr>
+        <p:spPr>
+          <a:xfrm>
+            <a:off x="5053584" y="5376672"/>
+            <a:ext cx="1612392" cy="786384"/>
+          </a:xfrm>
+          <a:prstGeom prst="rect">
+            <a:avLst/>
+          </a:prstGeom>
+          <a:solidFill>
+            <a:srgbClr val="141414"/>
+          </a:solidFill>
+          <a:ln>
+            <a:noFill/>
+          </a:ln>
+          <a:effectLst/>
+        </p:spPr>
+        <p:style>
+          <a:lnRef idx="1">
+            <a:schemeClr val="accent1"/>
+          </a:lnRef>
+          <a:fillRef idx="3">
+            <a:schemeClr val="accent1"/>
+          </a:fillRef>
+          <a:effectRef idx="2">
+            <a:schemeClr val="accent1"/>
+          </a:effectRef>
+          <a:fontRef idx="minor">
+            <a:schemeClr val="lt1"/>
+          </a:fontRef>
+        </p:style>
+        <p:txBody>
+          <a:bodyPr rtlCol="0" anchor="ctr"/>
+          <a:lstStyle/>
+          <a:p/>
+        </p:txBody>
+      </p:sp>
+      <p:sp>
+        <p:nvSpPr>
+          <p:cNvPr id="116" name="Shape 110"/>
+          <p:cNvSpPr/>
+          <p:nvPr/>
+        </p:nvSpPr>
+        <p:spPr>
+          <a:xfrm>
+            <a:off x="5053584" y="5376672"/>
+            <a:ext cx="45720" cy="786384"/>
+          </a:xfrm>
+          <a:prstGeom prst="rect">
+            <a:avLst/>
+          </a:prstGeom>
+          <a:gradFill rotWithShape="1">
+            <a:gsLst>
+              <a:gs pos="0">
+                <a:srgbClr val="FFD700"/>
+              </a:gs>
+              <a:gs pos="50000">
+                <a:srgbClr val="FF0069"/>
+              </a:gs>
+              <a:gs pos="100000">
+                <a:srgbClr val="00D6F2"/>
+              </a:gs>
+            </a:gsLst>
+            <a:lin ang="5400000" scaled="0"/>
+          </a:gradFill>
+          <a:ln>
+            <a:noFill/>
+          </a:ln>
+          <a:effectLst/>
+        </p:spPr>
+        <p:style>
+          <a:lnRef idx="1">
+            <a:schemeClr val="accent1"/>
+          </a:lnRef>
+          <a:fillRef idx="3">
+            <a:schemeClr val="accent1"/>
+          </a:fillRef>
+          <a:effectRef idx="2">
+            <a:schemeClr val="accent1"/>
+          </a:effectRef>
+          <a:fontRef idx="minor">
+            <a:schemeClr val="lt1"/>
+          </a:fontRef>
+        </p:style>
+        <p:txBody>
+          <a:bodyPr rtlCol="0" anchor="ctr"/>
+          <a:lstStyle/>
+          <a:p/>
+        </p:txBody>
+      </p:sp>
+      <p:sp>
+        <p:nvSpPr>
+          <p:cNvPr id="117" name="Text 111"/>
+          <p:cNvSpPr txBox="1"/>
+          <p:nvPr/>
+        </p:nvSpPr>
+        <p:spPr>
+          <a:xfrm>
+            <a:off x="5199888" y="5376672"/>
+            <a:ext cx="1411224" cy="786384"/>
+          </a:xfrm>
+          <a:prstGeom prst="rect">
+            <a:avLst/>
+          </a:prstGeom>
+          <a:noFill/>
+        </p:spPr>
+        <p:txBody>
+          <a:bodyPr wrap="square" lIns="0" rIns="0" tIns="0" bIns="0" anchor="ctr">
+            <a:spAutoFit/>
+          </a:bodyPr>
+          <a:lstStyle/>
+          <a:p>
+            <a:pPr>
+              <a:spcAft>
+                <a:spcPts val="100"/>
+              </a:spcAft>
+            </a:pPr>
+            <a:r>
+              <a:rPr sz="720" b="1" i="0">
+                <a:solidFill>
+                  <a:srgbClr val="F2F2F2"/>
+                </a:solidFill>
+                <a:latin typeface="Trenda IG Text"/>
+              </a:rPr>
+              <a:t>System of record</a:t>
+            </a:r>
+          </a:p>
+          <a:p>
+            <a:pPr>
+              <a:spcAft>
+                <a:spcPts val="100"/>
+              </a:spcAft>
+            </a:pPr>
+            <a:r>
+              <a:rPr sz="600" b="0" i="0">
+                <a:solidFill>
+                  <a:srgbClr val="B3B3B3"/>
+                </a:solidFill>
+                <a:latin typeface="Trenda IG Text"/>
+              </a:rPr>
+              <a:t>never a GCP copy</a:t>
+            </a:r>
+          </a:p>
+        </p:txBody>
+      </p:sp>
+      <p:sp>
+        <p:nvSpPr>
+          <p:cNvPr id="118" name="Shape 112"/>
+          <p:cNvSpPr/>
+          <p:nvPr/>
+        </p:nvSpPr>
+        <p:spPr>
+          <a:xfrm>
+            <a:off x="6757416" y="5376672"/>
+            <a:ext cx="1612392" cy="786384"/>
+          </a:xfrm>
+          <a:prstGeom prst="rect">
+            <a:avLst/>
+          </a:prstGeom>
+          <a:solidFill>
+            <a:srgbClr val="141414"/>
+          </a:solidFill>
+          <a:ln>
+            <a:noFill/>
+          </a:ln>
+          <a:effectLst/>
+        </p:spPr>
+        <p:style>
+          <a:lnRef idx="1">
+            <a:schemeClr val="accent1"/>
+          </a:lnRef>
+          <a:fillRef idx="3">
+            <a:schemeClr val="accent1"/>
+          </a:fillRef>
+          <a:effectRef idx="2">
+            <a:schemeClr val="accent1"/>
+          </a:effectRef>
+          <a:fontRef idx="minor">
+            <a:schemeClr val="lt1"/>
+          </a:fontRef>
+        </p:style>
+        <p:txBody>
+          <a:bodyPr rtlCol="0" anchor="ctr"/>
+          <a:lstStyle/>
+          <a:p/>
+        </p:txBody>
+      </p:sp>
+      <p:sp>
+        <p:nvSpPr>
+          <p:cNvPr id="119" name="Shape 113"/>
+          <p:cNvSpPr/>
+          <p:nvPr/>
+        </p:nvSpPr>
+        <p:spPr>
+          <a:xfrm>
+            <a:off x="6757416" y="5376672"/>
+            <a:ext cx="45720" cy="786384"/>
+          </a:xfrm>
+          <a:prstGeom prst="rect">
+            <a:avLst/>
+          </a:prstGeom>
+          <a:gradFill rotWithShape="1">
+            <a:gsLst>
+              <a:gs pos="0">
+                <a:srgbClr val="FFD700"/>
+              </a:gs>
+              <a:gs pos="50000">
+                <a:srgbClr val="FF0069"/>
+              </a:gs>
+              <a:gs pos="100000">
+                <a:srgbClr val="00D6F2"/>
+              </a:gs>
+            </a:gsLst>
+            <a:lin ang="5400000" scaled="0"/>
+          </a:gradFill>
+          <a:ln>
+            <a:noFill/>
+          </a:ln>
+          <a:effectLst/>
+        </p:spPr>
+        <p:style>
+          <a:lnRef idx="1">
+            <a:schemeClr val="accent1"/>
+          </a:lnRef>
+          <a:fillRef idx="3">
+            <a:schemeClr val="accent1"/>
+          </a:fillRef>
+          <a:effectRef idx="2">
+            <a:schemeClr val="accent1"/>
+          </a:effectRef>
+          <a:fontRef idx="minor">
+            <a:schemeClr val="lt1"/>
+          </a:fontRef>
+        </p:style>
+        <p:txBody>
+          <a:bodyPr rtlCol="0" anchor="ctr"/>
+          <a:lstStyle/>
+          <a:p/>
+        </p:txBody>
+      </p:sp>
+      <p:sp>
+        <p:nvSpPr>
+          <p:cNvPr id="120" name="Text 114"/>
+          <p:cNvSpPr txBox="1"/>
+          <p:nvPr/>
+        </p:nvSpPr>
+        <p:spPr>
+          <a:xfrm>
+            <a:off x="6903720" y="5376672"/>
+            <a:ext cx="1411224" cy="786384"/>
+          </a:xfrm>
+          <a:prstGeom prst="rect">
+            <a:avLst/>
+          </a:prstGeom>
+          <a:noFill/>
+        </p:spPr>
+        <p:txBody>
+          <a:bodyPr wrap="square" lIns="0" rIns="0" tIns="0" bIns="0" anchor="ctr">
+            <a:spAutoFit/>
+          </a:bodyPr>
+          <a:lstStyle/>
+          <a:p>
+            <a:pPr>
+              <a:spcAft>
+                <a:spcPts val="100"/>
+              </a:spcAft>
+            </a:pPr>
+            <a:r>
+              <a:rPr sz="720" b="1" i="0">
+                <a:solidFill>
+                  <a:srgbClr val="F2F2F2"/>
+                </a:solidFill>
+                <a:latin typeface="Trenda IG Text"/>
+              </a:rPr>
+              <a:t>Rules in the API</a:t>
+            </a:r>
+          </a:p>
+          <a:p>
+            <a:pPr>
+              <a:spcAft>
+                <a:spcPts val="100"/>
+              </a:spcAft>
+            </a:pPr>
+            <a:r>
+              <a:rPr sz="600" b="0" i="0">
+                <a:solidFill>
+                  <a:srgbClr val="B3B3B3"/>
+                </a:solidFill>
+                <a:latin typeface="Trenda IG Text"/>
+              </a:rPr>
+              <a:t>not only in an article</a:t>
+            </a:r>
+          </a:p>
+        </p:txBody>
+      </p:sp>
+      <p:sp>
+        <p:nvSpPr>
+          <p:cNvPr id="121" name="Shape 115"/>
+          <p:cNvSpPr/>
+          <p:nvPr/>
+        </p:nvSpPr>
+        <p:spPr>
+          <a:xfrm>
+            <a:off x="8461248" y="5376672"/>
+            <a:ext cx="1612392" cy="786384"/>
+          </a:xfrm>
+          <a:prstGeom prst="rect">
+            <a:avLst/>
+          </a:prstGeom>
+          <a:solidFill>
+            <a:srgbClr val="141414"/>
+          </a:solidFill>
+          <a:ln>
+            <a:noFill/>
+          </a:ln>
+          <a:effectLst/>
+        </p:spPr>
+        <p:style>
+          <a:lnRef idx="1">
+            <a:schemeClr val="accent1"/>
+          </a:lnRef>
+          <a:fillRef idx="3">
+            <a:schemeClr val="accent1"/>
+          </a:fillRef>
+          <a:effectRef idx="2">
+            <a:schemeClr val="accent1"/>
+          </a:effectRef>
+          <a:fontRef idx="minor">
+            <a:schemeClr val="lt1"/>
+          </a:fontRef>
+        </p:style>
+        <p:txBody>
+          <a:bodyPr rtlCol="0" anchor="ctr"/>
+          <a:lstStyle/>
+          <a:p/>
+        </p:txBody>
+      </p:sp>
+      <p:sp>
+        <p:nvSpPr>
+          <p:cNvPr id="122" name="Shape 116"/>
+          <p:cNvSpPr/>
+          <p:nvPr/>
+        </p:nvSpPr>
+        <p:spPr>
+          <a:xfrm>
+            <a:off x="8461248" y="5376672"/>
+            <a:ext cx="45720" cy="786384"/>
+          </a:xfrm>
+          <a:prstGeom prst="rect">
+            <a:avLst/>
+          </a:prstGeom>
+          <a:gradFill rotWithShape="1">
+            <a:gsLst>
+              <a:gs pos="0">
+                <a:srgbClr val="FFD700"/>
+              </a:gs>
+              <a:gs pos="50000">
+                <a:srgbClr val="FF0069"/>
+              </a:gs>
+              <a:gs pos="100000">
+                <a:srgbClr val="00D6F2"/>
+              </a:gs>
+            </a:gsLst>
+            <a:lin ang="5400000" scaled="0"/>
+          </a:gradFill>
+          <a:ln>
+            <a:noFill/>
+          </a:ln>
+          <a:effectLst/>
+        </p:spPr>
+        <p:style>
+          <a:lnRef idx="1">
+            <a:schemeClr val="accent1"/>
+          </a:lnRef>
+          <a:fillRef idx="3">
+            <a:schemeClr val="accent1"/>
+          </a:fillRef>
+          <a:effectRef idx="2">
+            <a:schemeClr val="accent1"/>
+          </a:effectRef>
+          <a:fontRef idx="minor">
+            <a:schemeClr val="lt1"/>
+          </a:fontRef>
+        </p:style>
+        <p:txBody>
+          <a:bodyPr rtlCol="0" anchor="ctr"/>
+          <a:lstStyle/>
+          <a:p/>
+        </p:txBody>
+      </p:sp>
+      <p:sp>
+        <p:nvSpPr>
+          <p:cNvPr id="123" name="Text 117"/>
+          <p:cNvSpPr txBox="1"/>
+          <p:nvPr/>
+        </p:nvSpPr>
+        <p:spPr>
+          <a:xfrm>
+            <a:off x="8607552" y="5376672"/>
+            <a:ext cx="1411224" cy="786384"/>
+          </a:xfrm>
+          <a:prstGeom prst="rect">
+            <a:avLst/>
+          </a:prstGeom>
+          <a:noFill/>
+        </p:spPr>
+        <p:txBody>
+          <a:bodyPr wrap="square" lIns="0" rIns="0" tIns="0" bIns="0" anchor="ctr">
+            <a:spAutoFit/>
+          </a:bodyPr>
+          <a:lstStyle/>
+          <a:p>
+            <a:pPr>
+              <a:spcAft>
+                <a:spcPts val="100"/>
+              </a:spcAft>
+            </a:pPr>
+            <a:r>
+              <a:rPr sz="720" b="1" i="0">
+                <a:solidFill>
+                  <a:srgbClr val="F2F2F2"/>
+                </a:solidFill>
+                <a:latin typeface="Trenda IG Text"/>
+              </a:rPr>
+              <a:t>Governed articles</a:t>
+            </a:r>
+          </a:p>
+          <a:p>
+            <a:pPr>
+              <a:spcAft>
+                <a:spcPts val="100"/>
+              </a:spcAft>
+            </a:pPr>
+            <a:r>
+              <a:rPr sz="600" b="0" i="0">
+                <a:solidFill>
+                  <a:srgbClr val="B3B3B3"/>
+                </a:solidFill>
+                <a:latin typeface="Trenda IG Text"/>
+              </a:rPr>
+              <a:t>owner, version, PHI-scanned</a:t>
+            </a:r>
+          </a:p>
+        </p:txBody>
+      </p:sp>
+      <p:sp>
+        <p:nvSpPr>
+          <p:cNvPr id="124" name="Shape 118"/>
+          <p:cNvSpPr/>
+          <p:nvPr/>
+        </p:nvSpPr>
+        <p:spPr>
+          <a:xfrm>
+            <a:off x="10165080" y="5376672"/>
+            <a:ext cx="1612392" cy="786384"/>
+          </a:xfrm>
+          <a:prstGeom prst="rect">
+            <a:avLst/>
+          </a:prstGeom>
+          <a:solidFill>
+            <a:srgbClr val="141414"/>
+          </a:solidFill>
+          <a:ln>
+            <a:noFill/>
+          </a:ln>
+          <a:effectLst/>
+        </p:spPr>
+        <p:style>
+          <a:lnRef idx="1">
+            <a:schemeClr val="accent1"/>
+          </a:lnRef>
+          <a:fillRef idx="3">
+            <a:schemeClr val="accent1"/>
+          </a:fillRef>
+          <a:effectRef idx="2">
+            <a:schemeClr val="accent1"/>
+          </a:effectRef>
+          <a:fontRef idx="minor">
+            <a:schemeClr val="lt1"/>
+          </a:fontRef>
+        </p:style>
+        <p:txBody>
+          <a:bodyPr rtlCol="0" anchor="ctr"/>
+          <a:lstStyle/>
+          <a:p/>
+        </p:txBody>
+      </p:sp>
+      <p:sp>
+        <p:nvSpPr>
+          <p:cNvPr id="125" name="Shape 119"/>
+          <p:cNvSpPr/>
+          <p:nvPr/>
+        </p:nvSpPr>
+        <p:spPr>
+          <a:xfrm>
+            <a:off x="10165080" y="5376672"/>
+            <a:ext cx="45720" cy="786384"/>
+          </a:xfrm>
+          <a:prstGeom prst="rect">
+            <a:avLst/>
+          </a:prstGeom>
+          <a:gradFill rotWithShape="1">
+            <a:gsLst>
+              <a:gs pos="0">
+                <a:srgbClr val="FFD700"/>
+              </a:gs>
+              <a:gs pos="50000">
+                <a:srgbClr val="FF0069"/>
+              </a:gs>
+              <a:gs pos="100000">
+                <a:srgbClr val="00D6F2"/>
+              </a:gs>
+            </a:gsLst>
+            <a:lin ang="5400000" scaled="0"/>
+          </a:gradFill>
+          <a:ln>
+            <a:noFill/>
+          </a:ln>
+          <a:effectLst/>
+        </p:spPr>
+        <p:style>
+          <a:lnRef idx="1">
+            <a:schemeClr val="accent1"/>
+          </a:lnRef>
+          <a:fillRef idx="3">
+            <a:schemeClr val="accent1"/>
+          </a:fillRef>
+          <a:effectRef idx="2">
+            <a:schemeClr val="accent1"/>
+          </a:effectRef>
+          <a:fontRef idx="minor">
+            <a:schemeClr val="lt1"/>
+          </a:fontRef>
+        </p:style>
+        <p:txBody>
+          <a:bodyPr rtlCol="0" anchor="ctr"/>
+          <a:lstStyle/>
+          <a:p/>
+        </p:txBody>
+      </p:sp>
+      <p:sp>
+        <p:nvSpPr>
+          <p:cNvPr id="126" name="Text 120"/>
+          <p:cNvSpPr txBox="1"/>
+          <p:nvPr/>
+        </p:nvSpPr>
+        <p:spPr>
+          <a:xfrm>
+            <a:off x="10311384" y="5376672"/>
+            <a:ext cx="1411224" cy="786384"/>
+          </a:xfrm>
+          <a:prstGeom prst="rect">
+            <a:avLst/>
+          </a:prstGeom>
+          <a:noFill/>
+        </p:spPr>
+        <p:txBody>
+          <a:bodyPr wrap="square" lIns="0" rIns="0" tIns="0" bIns="0" anchor="ctr">
+            <a:spAutoFit/>
+          </a:bodyPr>
+          <a:lstStyle/>
+          <a:p>
+            <a:pPr>
+              <a:spcAft>
+                <a:spcPts val="100"/>
+              </a:spcAft>
+            </a:pPr>
+            <a:r>
+              <a:rPr sz="720" b="1" i="0">
+                <a:solidFill>
+                  <a:srgbClr val="F2F2F2"/>
+                </a:solidFill>
+                <a:latin typeface="Trenda IG Text"/>
+              </a:rPr>
+              <a:t>Tested before release</a:t>
+            </a:r>
+          </a:p>
+          <a:p>
+            <a:pPr>
+              <a:spcAft>
+                <a:spcPts val="100"/>
+              </a:spcAft>
+            </a:pPr>
+            <a:r>
+              <a:rPr sz="600" b="0" i="0">
+                <a:solidFill>
+                  <a:srgbClr val="B3B3B3"/>
+                </a:solidFill>
+                <a:latin typeface="Trenda IG Text"/>
+              </a:rPr>
+              <a:t>scripted test calls</a:t>
             </a:r>
           </a:p>
         </p:txBody>

--- a/poc/data_harness/Ascension Agentic Harness - Data Harness.pptx
+++ b/poc/data_harness/Ascension Agentic Harness - Data Harness.pptx
@@ -16200,7 +16200,7 @@
             <a:r>
               <a:rPr sz="800" b="1" i="0" spc="300">
                 <a:solidFill>
-                  <a:srgbClr val="6EA8FF"/>
+                  <a:srgbClr val="00D6F2"/>
                 </a:solidFill>
                 <a:latin typeface="Trenda IG Text"/>
               </a:rPr>
@@ -16298,7 +16298,7 @@
           </a:solidFill>
           <a:ln w="9525">
             <a:solidFill>
-              <a:srgbClr val="5B8DEF"/>
+              <a:srgbClr val="00D6F2"/>
             </a:solidFill>
           </a:ln>
           <a:effectLst/>
@@ -16513,7 +16513,7 @@
           </a:solidFill>
           <a:ln w="7620">
             <a:solidFill>
-              <a:srgbClr val="5B8DEF"/>
+              <a:srgbClr val="00D6F2"/>
             </a:solidFill>
           </a:ln>
           <a:effectLst/>
@@ -16751,7 +16751,7 @@
           </a:solidFill>
           <a:ln w="7620">
             <a:solidFill>
-              <a:srgbClr val="5B8DEF"/>
+              <a:srgbClr val="00D6F2"/>
             </a:solidFill>
           </a:ln>
           <a:effectLst/>
@@ -16865,7 +16865,7 @@
           </a:prstGeom>
           <a:ln w="11430">
             <a:solidFill>
-              <a:srgbClr val="5B8DEF"/>
+              <a:srgbClr val="00D6F2"/>
             </a:solidFill>
             <a:tailEnd type="triangle" w="med" len="med"/>
           </a:ln>
@@ -16906,7 +16906,7 @@
           </a:solidFill>
           <a:ln w="7620">
             <a:solidFill>
-              <a:srgbClr val="5B8DEF"/>
+              <a:srgbClr val="00D6F2"/>
             </a:solidFill>
           </a:ln>
           <a:effectLst/>
@@ -17098,11 +17098,11 @@
             </a:avLst>
           </a:prstGeom>
           <a:solidFill>
-            <a:srgbClr val="1F5FD6"/>
+            <a:srgbClr val="00D6F2"/>
           </a:solidFill>
           <a:ln w="6350">
             <a:solidFill>
-              <a:srgbClr val="5B8DEF"/>
+              <a:srgbClr val="00D6F2"/>
             </a:solidFill>
           </a:ln>
           <a:effectLst/>
@@ -17153,7 +17153,7 @@
             <a:r>
               <a:rPr sz="560" b="1" i="0" spc="80">
                 <a:solidFill>
-                  <a:srgbClr val="F2F2F2"/>
+                  <a:srgbClr val="1A1A1A"/>
                 </a:solidFill>
                 <a:latin typeface="Trenda IG Text"/>
               </a:rPr>
@@ -17321,7 +17321,7 @@
           </a:solidFill>
           <a:ln w="7620">
             <a:solidFill>
-              <a:srgbClr val="5B8DEF"/>
+              <a:srgbClr val="00D6F2"/>
             </a:solidFill>
           </a:ln>
           <a:effectLst/>
@@ -17513,11 +17513,11 @@
             </a:avLst>
           </a:prstGeom>
           <a:solidFill>
-            <a:srgbClr val="1F5FD6"/>
+            <a:srgbClr val="00D6F2"/>
           </a:solidFill>
           <a:ln w="6350">
             <a:solidFill>
-              <a:srgbClr val="5B8DEF"/>
+              <a:srgbClr val="00D6F2"/>
             </a:solidFill>
           </a:ln>
           <a:effectLst/>
@@ -17568,7 +17568,7 @@
             <a:r>
               <a:rPr sz="560" b="1" i="0" spc="80">
                 <a:solidFill>
-                  <a:srgbClr val="F2F2F2"/>
+                  <a:srgbClr val="1A1A1A"/>
                 </a:solidFill>
                 <a:latin typeface="Trenda IG Text"/>
               </a:rPr>
@@ -17736,7 +17736,7 @@
           </a:solidFill>
           <a:ln w="7620">
             <a:solidFill>
-              <a:srgbClr val="5B8DEF"/>
+              <a:srgbClr val="00D6F2"/>
             </a:solidFill>
           </a:ln>
           <a:effectLst/>
@@ -17928,11 +17928,11 @@
             </a:avLst>
           </a:prstGeom>
           <a:solidFill>
-            <a:srgbClr val="1F5FD6"/>
+            <a:srgbClr val="00D6F2"/>
           </a:solidFill>
           <a:ln w="6350">
             <a:solidFill>
-              <a:srgbClr val="5B8DEF"/>
+              <a:srgbClr val="00D6F2"/>
             </a:solidFill>
           </a:ln>
           <a:effectLst/>
@@ -17983,7 +17983,7 @@
             <a:r>
               <a:rPr sz="560" b="1" i="0" spc="80">
                 <a:solidFill>
-                  <a:srgbClr val="F2F2F2"/>
+                  <a:srgbClr val="1A1A1A"/>
                 </a:solidFill>
                 <a:latin typeface="Trenda IG Text"/>
               </a:rPr>
@@ -18013,7 +18013,7 @@
           </a:solidFill>
           <a:ln w="7620">
             <a:solidFill>
-              <a:srgbClr val="5B8DEF"/>
+              <a:srgbClr val="00D6F2"/>
             </a:solidFill>
           </a:ln>
           <a:effectLst/>
@@ -18205,11 +18205,11 @@
             </a:avLst>
           </a:prstGeom>
           <a:solidFill>
-            <a:srgbClr val="1F5FD6"/>
+            <a:srgbClr val="00D6F2"/>
           </a:solidFill>
           <a:ln w="6350">
             <a:solidFill>
-              <a:srgbClr val="5B8DEF"/>
+              <a:srgbClr val="00D6F2"/>
             </a:solidFill>
           </a:ln>
           <a:effectLst/>
@@ -18260,7 +18260,7 @@
             <a:r>
               <a:rPr sz="560" b="1" i="0" spc="80">
                 <a:solidFill>
-                  <a:srgbClr val="F2F2F2"/>
+                  <a:srgbClr val="1A1A1A"/>
                 </a:solidFill>
                 <a:latin typeface="Trenda IG Text"/>
               </a:rPr>
@@ -18428,7 +18428,7 @@
           </a:solidFill>
           <a:ln w="7620">
             <a:solidFill>
-              <a:srgbClr val="5B8DEF"/>
+              <a:srgbClr val="00D6F2"/>
             </a:solidFill>
           </a:ln>
           <a:effectLst/>
@@ -18620,11 +18620,11 @@
             </a:avLst>
           </a:prstGeom>
           <a:solidFill>
-            <a:srgbClr val="1F5FD6"/>
+            <a:srgbClr val="00D6F2"/>
           </a:solidFill>
           <a:ln w="6350">
             <a:solidFill>
-              <a:srgbClr val="5B8DEF"/>
+              <a:srgbClr val="00D6F2"/>
             </a:solidFill>
           </a:ln>
           <a:effectLst/>
@@ -18675,7 +18675,7 @@
             <a:r>
               <a:rPr sz="560" b="1" i="0" spc="80">
                 <a:solidFill>
-                  <a:srgbClr val="F2F2F2"/>
+                  <a:srgbClr val="1A1A1A"/>
                 </a:solidFill>
                 <a:latin typeface="Trenda IG Text"/>
               </a:rPr>
@@ -19277,7 +19277,7 @@
           </a:prstGeom>
           <a:ln w="13335">
             <a:solidFill>
-              <a:srgbClr val="5B8DEF"/>
+              <a:srgbClr val="00D6F2"/>
             </a:solidFill>
             <a:tailEnd type="triangle" w="med" len="med"/>
           </a:ln>
@@ -22714,7 +22714,7 @@
             <a:r>
               <a:rPr sz="800" b="1" i="0" spc="300">
                 <a:solidFill>
-                  <a:srgbClr val="6EA8FF"/>
+                  <a:srgbClr val="00D6F2"/>
                 </a:solidFill>
                 <a:latin typeface="Trenda IG Text"/>
               </a:rPr>
@@ -23453,7 +23453,7 @@
           </a:prstGeom>
           <a:ln w="9525">
             <a:solidFill>
-              <a:srgbClr val="5B8DEF"/>
+              <a:srgbClr val="00D6F2"/>
             </a:solidFill>
           </a:ln>
         </p:spPr>
@@ -23488,7 +23488,7 @@
           </a:prstGeom>
           <a:ln w="9525">
             <a:solidFill>
-              <a:srgbClr val="5B8DEF"/>
+              <a:srgbClr val="00D6F2"/>
             </a:solidFill>
           </a:ln>
         </p:spPr>
@@ -23523,7 +23523,7 @@
           </a:prstGeom>
           <a:ln w="9525">
             <a:solidFill>
-              <a:srgbClr val="5B8DEF"/>
+              <a:srgbClr val="00D6F2"/>
             </a:solidFill>
             <a:tailEnd type="triangle" w="med" len="med"/>
           </a:ln>
@@ -23559,7 +23559,7 @@
           </a:prstGeom>
           <a:ln w="9525">
             <a:solidFill>
-              <a:srgbClr val="5B8DEF"/>
+              <a:srgbClr val="00D6F2"/>
             </a:solidFill>
           </a:ln>
         </p:spPr>
@@ -23594,7 +23594,7 @@
           </a:prstGeom>
           <a:ln w="9525">
             <a:solidFill>
-              <a:srgbClr val="5B8DEF"/>
+              <a:srgbClr val="00D6F2"/>
             </a:solidFill>
           </a:ln>
         </p:spPr>
@@ -23629,7 +23629,7 @@
           </a:prstGeom>
           <a:ln w="9525">
             <a:solidFill>
-              <a:srgbClr val="5B8DEF"/>
+              <a:srgbClr val="00D6F2"/>
             </a:solidFill>
             <a:tailEnd type="triangle" w="med" len="med"/>
           </a:ln>
@@ -23665,7 +23665,7 @@
           </a:prstGeom>
           <a:ln w="9525">
             <a:solidFill>
-              <a:srgbClr val="5B8DEF"/>
+              <a:srgbClr val="00D6F2"/>
             </a:solidFill>
           </a:ln>
         </p:spPr>
@@ -23700,7 +23700,7 @@
           </a:prstGeom>
           <a:ln w="9525">
             <a:solidFill>
-              <a:srgbClr val="5B8DEF"/>
+              <a:srgbClr val="00D6F2"/>
             </a:solidFill>
           </a:ln>
         </p:spPr>
@@ -23735,7 +23735,7 @@
           </a:prstGeom>
           <a:ln w="9525">
             <a:solidFill>
-              <a:srgbClr val="5B8DEF"/>
+              <a:srgbClr val="00D6F2"/>
             </a:solidFill>
             <a:tailEnd type="triangle" w="med" len="med"/>
           </a:ln>
@@ -23771,7 +23771,7 @@
           </a:prstGeom>
           <a:ln w="9525">
             <a:solidFill>
-              <a:srgbClr val="5B8DEF"/>
+              <a:srgbClr val="00D6F2"/>
             </a:solidFill>
           </a:ln>
         </p:spPr>
@@ -23806,7 +23806,7 @@
           </a:prstGeom>
           <a:ln w="9525">
             <a:solidFill>
-              <a:srgbClr val="5B8DEF"/>
+              <a:srgbClr val="00D6F2"/>
             </a:solidFill>
           </a:ln>
         </p:spPr>
@@ -23841,7 +23841,7 @@
           </a:prstGeom>
           <a:ln w="9525">
             <a:solidFill>
-              <a:srgbClr val="5B8DEF"/>
+              <a:srgbClr val="00D6F2"/>
             </a:solidFill>
             <a:tailEnd type="triangle" w="med" len="med"/>
           </a:ln>
@@ -23877,7 +23877,7 @@
           </a:prstGeom>
           <a:ln w="9525">
             <a:solidFill>
-              <a:srgbClr val="5B8DEF"/>
+              <a:srgbClr val="00D6F2"/>
             </a:solidFill>
           </a:ln>
         </p:spPr>
@@ -23912,7 +23912,7 @@
           </a:prstGeom>
           <a:ln w="9525">
             <a:solidFill>
-              <a:srgbClr val="5B8DEF"/>
+              <a:srgbClr val="00D6F2"/>
             </a:solidFill>
           </a:ln>
         </p:spPr>
@@ -23947,7 +23947,7 @@
           </a:prstGeom>
           <a:ln w="9525">
             <a:solidFill>
-              <a:srgbClr val="5B8DEF"/>
+              <a:srgbClr val="00D6F2"/>
             </a:solidFill>
             <a:tailEnd type="triangle" w="med" len="med"/>
           </a:ln>
@@ -23983,7 +23983,7 @@
           </a:prstGeom>
           <a:ln w="9525">
             <a:solidFill>
-              <a:srgbClr val="5B8DEF"/>
+              <a:srgbClr val="00D6F2"/>
             </a:solidFill>
           </a:ln>
         </p:spPr>
@@ -24018,7 +24018,7 @@
           </a:prstGeom>
           <a:ln w="9525">
             <a:solidFill>
-              <a:srgbClr val="5B8DEF"/>
+              <a:srgbClr val="00D6F2"/>
             </a:solidFill>
           </a:ln>
         </p:spPr>
@@ -24053,7 +24053,7 @@
           </a:prstGeom>
           <a:ln w="9525">
             <a:solidFill>
-              <a:srgbClr val="5B8DEF"/>
+              <a:srgbClr val="00D6F2"/>
             </a:solidFill>
             <a:tailEnd type="triangle" w="med" len="med"/>
           </a:ln>
@@ -24944,7 +24944,7 @@
           <a:noFill/>
           <a:ln w="6350">
             <a:solidFill>
-              <a:srgbClr val="5B8DEF"/>
+              <a:srgbClr val="00D6F2"/>
             </a:solidFill>
           </a:ln>
           <a:effectLst/>
@@ -24995,7 +24995,7 @@
             <a:r>
               <a:rPr sz="420" b="1" i="0" spc="80">
                 <a:solidFill>
-                  <a:srgbClr val="6EA8FF"/>
+                  <a:srgbClr val="00D6F2"/>
                 </a:solidFill>
                 <a:latin typeface="Trenda IG Text"/>
               </a:rPr>
@@ -25108,7 +25108,7 @@
           <a:noFill/>
           <a:ln w="6350">
             <a:solidFill>
-              <a:srgbClr val="5B8DEF"/>
+              <a:srgbClr val="00D6F2"/>
             </a:solidFill>
           </a:ln>
           <a:effectLst/>
@@ -25159,7 +25159,7 @@
             <a:r>
               <a:rPr sz="420" b="1" i="0" spc="80">
                 <a:solidFill>
-                  <a:srgbClr val="6EA8FF"/>
+                  <a:srgbClr val="00D6F2"/>
                 </a:solidFill>
                 <a:latin typeface="Trenda IG Text"/>
               </a:rPr>
@@ -28631,7 +28631,7 @@
             <a:r>
               <a:rPr sz="800" b="1" i="0" spc="300">
                 <a:solidFill>
-                  <a:srgbClr val="6EA8FF"/>
+                  <a:srgbClr val="00D6F2"/>
                 </a:solidFill>
                 <a:latin typeface="Trenda IG Text"/>
               </a:rPr>
@@ -29885,7 +29885,7 @@
             <a:r>
               <a:rPr sz="660" b="1" i="0">
                 <a:solidFill>
-                  <a:srgbClr val="F2F2F2"/>
+                  <a:srgbClr val="1A1A1A"/>
                 </a:solidFill>
                 <a:latin typeface="Trenda IG Text"/>
               </a:rPr>
@@ -30081,7 +30081,7 @@
             <a:r>
               <a:rPr sz="660" b="1" i="0">
                 <a:solidFill>
-                  <a:srgbClr val="F2F2F2"/>
+                  <a:srgbClr val="1A1A1A"/>
                 </a:solidFill>
                 <a:latin typeface="Trenda IG Text"/>
               </a:rPr>
@@ -30544,7 +30544,7 @@
           </a:solidFill>
           <a:ln w="7620">
             <a:solidFill>
-              <a:srgbClr val="5B8DEF"/>
+              <a:srgbClr val="00D6F2"/>
             </a:solidFill>
           </a:ln>
           <a:effectLst/>
@@ -30960,7 +30960,7 @@
           </a:solidFill>
           <a:ln w="9525">
             <a:solidFill>
-              <a:srgbClr val="5B8DEF"/>
+              <a:srgbClr val="00D6F2"/>
             </a:solidFill>
           </a:ln>
           <a:effectLst/>
@@ -31000,7 +31000,7 @@
             <a:avLst/>
           </a:prstGeom>
           <a:solidFill>
-            <a:srgbClr val="1F5FD6"/>
+            <a:srgbClr val="00D6F2"/>
           </a:solidFill>
           <a:ln>
             <a:noFill/>
@@ -31053,7 +31053,7 @@
             <a:r>
               <a:rPr sz="660" b="1" i="0">
                 <a:solidFill>
-                  <a:srgbClr val="F2F2F2"/>
+                  <a:srgbClr val="1A1A1A"/>
                 </a:solidFill>
                 <a:latin typeface="Trenda IG Text"/>
               </a:rPr>
@@ -31137,11 +31137,11 @@
             </a:avLst>
           </a:prstGeom>
           <a:solidFill>
-            <a:srgbClr val="1F5FD6"/>
+            <a:srgbClr val="00D6F2"/>
           </a:solidFill>
           <a:ln w="6350">
             <a:solidFill>
-              <a:srgbClr val="5B8DEF"/>
+              <a:srgbClr val="00D6F2"/>
             </a:solidFill>
           </a:ln>
           <a:effectLst/>
@@ -31192,7 +31192,7 @@
             <a:r>
               <a:rPr sz="500" b="1" i="0" spc="80">
                 <a:solidFill>
-                  <a:srgbClr val="F2F2F2"/>
+                  <a:srgbClr val="1A1A1A"/>
                 </a:solidFill>
                 <a:latin typeface="Trenda IG Text"/>
               </a:rPr>
@@ -31652,7 +31652,7 @@
           </a:solidFill>
           <a:ln w="9525">
             <a:solidFill>
-              <a:srgbClr val="5B8DEF"/>
+              <a:srgbClr val="00D6F2"/>
             </a:solidFill>
           </a:ln>
           <a:effectLst/>
@@ -31692,7 +31692,7 @@
             <a:avLst/>
           </a:prstGeom>
           <a:solidFill>
-            <a:srgbClr val="1F5FD6"/>
+            <a:srgbClr val="00D6F2"/>
           </a:solidFill>
           <a:ln>
             <a:noFill/>
@@ -31745,7 +31745,7 @@
             <a:r>
               <a:rPr sz="660" b="1" i="0">
                 <a:solidFill>
-                  <a:srgbClr val="F2F2F2"/>
+                  <a:srgbClr val="1A1A1A"/>
                 </a:solidFill>
                 <a:latin typeface="Trenda IG Text"/>
               </a:rPr>
@@ -31829,11 +31829,11 @@
             </a:avLst>
           </a:prstGeom>
           <a:solidFill>
-            <a:srgbClr val="1F5FD6"/>
+            <a:srgbClr val="00D6F2"/>
           </a:solidFill>
           <a:ln w="6350">
             <a:solidFill>
-              <a:srgbClr val="5B8DEF"/>
+              <a:srgbClr val="00D6F2"/>
             </a:solidFill>
           </a:ln>
           <a:effectLst/>
@@ -31884,7 +31884,7 @@
             <a:r>
               <a:rPr sz="500" b="1" i="0" spc="80">
                 <a:solidFill>
-                  <a:srgbClr val="F2F2F2"/>
+                  <a:srgbClr val="1A1A1A"/>
                 </a:solidFill>
                 <a:latin typeface="Trenda IG Text"/>
               </a:rPr>
@@ -32813,7 +32813,7 @@
           </a:solidFill>
           <a:ln w="9525">
             <a:solidFill>
-              <a:srgbClr val="5B8DEF"/>
+              <a:srgbClr val="00D6F2"/>
             </a:solidFill>
           </a:ln>
           <a:effectLst/>
@@ -32913,11 +32913,11 @@
             </a:avLst>
           </a:prstGeom>
           <a:solidFill>
-            <a:srgbClr val="1F5FD6"/>
+            <a:srgbClr val="00D6F2"/>
           </a:solidFill>
           <a:ln w="6350">
             <a:solidFill>
-              <a:srgbClr val="5B8DEF"/>
+              <a:srgbClr val="00D6F2"/>
             </a:solidFill>
           </a:ln>
           <a:effectLst/>
@@ -32968,7 +32968,7 @@
             <a:r>
               <a:rPr sz="500" b="1" i="0" spc="80">
                 <a:solidFill>
-                  <a:srgbClr val="F2F2F2"/>
+                  <a:srgbClr val="1A1A1A"/>
                 </a:solidFill>
                 <a:latin typeface="Trenda IG Text"/>
               </a:rPr>
@@ -33063,7 +33063,7 @@
           </a:prstGeom>
           <a:ln w="9525">
             <a:solidFill>
-              <a:srgbClr val="E97627"/>
+              <a:srgbClr val="00D6F2"/>
             </a:solidFill>
             <a:tailEnd type="triangle" w="med" len="med"/>
           </a:ln>
@@ -33099,7 +33099,7 @@
           </a:prstGeom>
           <a:ln w="11430">
             <a:solidFill>
-              <a:srgbClr val="5B8DEF"/>
+              <a:srgbClr val="00D6F2"/>
             </a:solidFill>
           </a:ln>
         </p:spPr>
@@ -33134,7 +33134,7 @@
           </a:prstGeom>
           <a:ln w="11430">
             <a:solidFill>
-              <a:srgbClr val="5B8DEF"/>
+              <a:srgbClr val="00D6F2"/>
             </a:solidFill>
           </a:ln>
         </p:spPr>
@@ -33169,7 +33169,7 @@
           </a:prstGeom>
           <a:ln w="11430">
             <a:solidFill>
-              <a:srgbClr val="5B8DEF"/>
+              <a:srgbClr val="00D6F2"/>
             </a:solidFill>
             <a:tailEnd type="triangle" w="med" len="med"/>
           </a:ln>
@@ -33327,7 +33327,7 @@
           </a:solidFill>
           <a:ln w="7620">
             <a:solidFill>
-              <a:srgbClr val="5B8DEF"/>
+              <a:srgbClr val="00D6F2"/>
             </a:solidFill>
           </a:ln>
           <a:effectLst/>
@@ -33670,7 +33670,7 @@
           </a:solidFill>
           <a:ln w="9525">
             <a:solidFill>
-              <a:srgbClr val="5B8DEF"/>
+              <a:srgbClr val="00D6F2"/>
             </a:solidFill>
           </a:ln>
           <a:effectLst/>
@@ -33710,7 +33710,7 @@
             <a:avLst/>
           </a:prstGeom>
           <a:solidFill>
-            <a:srgbClr val="1F5FD6"/>
+            <a:srgbClr val="00D6F2"/>
           </a:solidFill>
           <a:ln>
             <a:noFill/>
@@ -33763,7 +33763,7 @@
             <a:r>
               <a:rPr sz="660" b="1" i="0">
                 <a:solidFill>
-                  <a:srgbClr val="F2F2F2"/>
+                  <a:srgbClr val="1A1A1A"/>
                 </a:solidFill>
                 <a:latin typeface="Trenda IG Text"/>
               </a:rPr>
@@ -33847,11 +33847,11 @@
             </a:avLst>
           </a:prstGeom>
           <a:solidFill>
-            <a:srgbClr val="1F5FD6"/>
+            <a:srgbClr val="00D6F2"/>
           </a:solidFill>
           <a:ln w="6350">
             <a:solidFill>
-              <a:srgbClr val="5B8DEF"/>
+              <a:srgbClr val="00D6F2"/>
             </a:solidFill>
           </a:ln>
           <a:effectLst/>
@@ -33902,7 +33902,7 @@
             <a:r>
               <a:rPr sz="500" b="1" i="0" spc="80">
                 <a:solidFill>
-                  <a:srgbClr val="F2F2F2"/>
+                  <a:srgbClr val="1A1A1A"/>
                 </a:solidFill>
                 <a:latin typeface="Trenda IG Text"/>
               </a:rPr>
@@ -34055,7 +34055,7 @@
             <a:avLst/>
           </a:prstGeom>
           <a:solidFill>
-            <a:srgbClr val="1F5FD6"/>
+            <a:srgbClr val="00D6F2"/>
           </a:solidFill>
           <a:ln>
             <a:noFill/>
@@ -34108,7 +34108,7 @@
             <a:r>
               <a:rPr sz="660" b="1" i="0">
                 <a:solidFill>
-                  <a:srgbClr val="F2F2F2"/>
+                  <a:srgbClr val="1A1A1A"/>
                 </a:solidFill>
                 <a:latin typeface="Trenda IG Text"/>
               </a:rPr>
@@ -34211,7 +34211,7 @@
           </a:solidFill>
           <a:ln w="7620">
             <a:solidFill>
-              <a:srgbClr val="5B8DEF"/>
+              <a:srgbClr val="00D6F2"/>
             </a:solidFill>
           </a:ln>
           <a:effectLst/>
@@ -34392,7 +34392,7 @@
           </a:solidFill>
           <a:ln w="7620">
             <a:solidFill>
-              <a:srgbClr val="5B8DEF"/>
+              <a:srgbClr val="00D6F2"/>
             </a:solidFill>
             <a:prstDash val="dash"/>
           </a:ln>

--- a/poc/data_harness/Ascension Agentic Harness - Data Harness.pptx
+++ b/poc/data_harness/Ascension Agentic Harness - Data Harness.pptx
@@ -18,6 +18,7 @@
     <p:sldId id="325" r:id="rId17"/>
     <p:sldId id="323" r:id="rId15"/>
     <p:sldId id="326" r:id="rId18"/>
+    <p:sldId id="327" r:id="rId19"/>
   </p:sldIdLst>
   <p:sldSz cx="12192000" cy="6858000"/>
   <p:notesSz cx="6858000" cy="12192000"/>
@@ -1434,6 +1435,120 @@
 </p:notes>
 </file>
 
+<file path=ppt/notesSlides/notesSlide10.xml><?xml version="1.0" encoding="utf-8"?>
+<p:notes xmlns:a="http://schemas.openxmlformats.org/drawingml/2006/main" xmlns:p="http://schemas.openxmlformats.org/presentationml/2006/main" xmlns:r="http://schemas.openxmlformats.org/officeDocument/2006/relationships">
+  <p:cSld>
+    <p:spTree>
+      <p:nvGrpSpPr>
+        <p:cNvPr id="1" name=""/>
+        <p:cNvGrpSpPr/>
+        <p:nvPr/>
+      </p:nvGrpSpPr>
+      <p:grpSpPr>
+        <a:xfrm>
+          <a:off x="0" y="0"/>
+          <a:ext cx="0" cy="0"/>
+          <a:chOff x="0" y="0"/>
+          <a:chExt cx="0" cy="0"/>
+        </a:xfrm>
+      </p:grpSpPr>
+      <p:sp>
+        <p:nvSpPr>
+          <p:cNvPr id="3" name="Notes Placeholder 2"/>
+          <p:cNvSpPr>
+            <a:spLocks noGrp="1"/>
+          </p:cNvSpPr>
+          <p:nvPr>
+            <p:ph type="body" idx="1"/>
+          </p:nvPr>
+        </p:nvSpPr>
+        <p:spPr/>
+        <p:txBody>
+          <a:bodyPr/>
+          <a:lstStyle/>
+          <a:p>
+            <a:r>
+              <a:t>SLIDE: Lean team and cost saving   (about 2-3 minutes)</a:t>
+            </a:r>
+          </a:p>
+          <a:p/>
+          <a:p>
+            <a:r>
+              <a:t>KEY MESSAGE</a:t>
+            </a:r>
+          </a:p>
+          <a:p>
+            <a:r>
+              <a:t>Every squad of 4-5 developers becomes 1 developer directing the harness agent, plus 1 QA. Pods run lean on one shared platform. $16M a year today becomes $7M: $9M back every year on a $5.0M build, paid back in under 7 months.</a:t>
+            </a:r>
+          </a:p>
+          <a:p/>
+          <a:p>
+            <a:r>
+              <a:t>WALK IT</a:t>
+            </a:r>
+          </a:p>
+          <a:p>
+            <a:r>
+              <a:t>- The squad: 4 developers and a QA today; with the harness, one developer directs the agent, a QA verifies, and the agent drafts code, tests and the Copado package overnight. People review, approve and own every change.</a:t>
+            </a:r>
+          </a:p>
+          <a:p>
+            <a:r>
+              <a:t>- The pod: today every pod carries its own full stack. With the harness: owner, lead and 2-4 engineers, on one shared platform run by a small team. 20-30% smaller for the same scope, or 1.4-1.6x the output with the same team.</a:t>
+            </a:r>
+          </a:p>
+          <a:p>
+            <a:r>
+              <a:t>- The build: 17 people at peak, 10 roles, 18 months, $4.79M fixed fee paid only when each gate is signed. From month 19 a run team of 4 keeps it running, about $1.24M a year with platform usage.</a:t>
+            </a:r>
+          </a:p>
+          <a:p>
+            <a:r>
+              <a:t>- The return (target, first full year after go-live): $16M a year today, $7M with the harness, $9M saved every year, on a $5.0M investment. Paid back in under 7 months; 80% first-year return.</a:t>
+            </a:r>
+          </a:p>
+          <a:p>
+            <a:r>
+              <a:t>- Floor we commit to: 20-25% lower net run cost per pod, measured against each pod's baseline.</a:t>
+            </a:r>
+          </a:p>
+          <a:p/>
+          <a:p>
+            <a:r>
+              <a:t>KEEP IT HONEST</a:t>
+            </a:r>
+          </a:p>
+          <a:p>
+            <a:r>
+              <a:t>- Baseline every pod first. Year 1 delivers about 60-70% of steady state while pods onboard.</a:t>
+            </a:r>
+          </a:p>
+          <a:p>
+            <a:r>
+              <a:t>- Approvals, UAT and CAB stay human and take the same time.</a:t>
+            </a:r>
+          </a:p>
+          <a:p>
+            <a:r>
+              <a:t>- These figures cover delivery. The campaign data platform and the Sierra voice agent are sized separately, after Phase 0.</a:t>
+            </a:r>
+          </a:p>
+          <a:p>
+            <a:r>
+              <a:t>- Rates are assumed for sizing; replace with the Insight Global rate card before sharing.</a:t>
+            </a:r>
+          </a:p>
+        </p:txBody>
+      </p:sp>
+    </p:spTree>
+  </p:cSld>
+  <p:clrMapOvr>
+    <a:masterClrMapping/>
+  </p:clrMapOvr>
+</p:notes>
+</file>
+
 <file path=ppt/notesSlides/notesSlide2.xml><?xml version="1.0" encoding="utf-8"?>
 <p:notes xmlns:a="http://schemas.openxmlformats.org/drawingml/2006/main" xmlns:p="http://schemas.openxmlformats.org/presentationml/2006/main" xmlns:r="http://schemas.openxmlformats.org/officeDocument/2006/relationships">
   <p:cSld>
@@ -3760,6 +3875,3783 @@
         <p14:creationId xmlns:p14="http://schemas.microsoft.com/office/powerpoint/2010/main" val="3603168410"/>
       </p:ext>
     </p:extLst>
+  </p:cSld>
+  <p:clrMapOvr>
+    <a:masterClrMapping/>
+  </p:clrMapOvr>
+</p:sld>
+</file>
+
+<file path=ppt/slides/slide10.xml><?xml version="1.0" encoding="utf-8"?>
+<p:sld xmlns:a="http://schemas.openxmlformats.org/drawingml/2006/main" xmlns:p="http://schemas.openxmlformats.org/presentationml/2006/main" xmlns:r="http://schemas.openxmlformats.org/officeDocument/2006/relationships">
+  <p:cSld>
+    <p:bg>
+      <p:bgPr>
+        <a:solidFill>
+          <a:srgbClr val="000000"/>
+        </a:solidFill>
+        <a:effectLst/>
+      </p:bgPr>
+    </p:bg>
+    <p:spTree>
+      <p:nvGrpSpPr>
+        <p:cNvPr id="1" name=""/>
+        <p:cNvGrpSpPr/>
+        <p:nvPr/>
+      </p:nvGrpSpPr>
+      <p:grpSpPr/>
+      <p:sp>
+        <p:nvSpPr>
+          <p:cNvPr id="2" name="Text 1"/>
+          <p:cNvSpPr txBox="1"/>
+          <p:nvPr/>
+        </p:nvSpPr>
+        <p:spPr>
+          <a:xfrm>
+            <a:off x="411480" y="201168"/>
+            <a:ext cx="8229600" cy="182880"/>
+          </a:xfrm>
+          <a:prstGeom prst="rect">
+            <a:avLst/>
+          </a:prstGeom>
+          <a:noFill/>
+        </p:spPr>
+        <p:txBody>
+          <a:bodyPr wrap="square" lIns="0" rIns="0" tIns="0" bIns="0" anchor="ctr">
+            <a:spAutoFit/>
+          </a:bodyPr>
+          <a:lstStyle/>
+          <a:p>
+            <a:r>
+              <a:rPr sz="800" b="1" i="0" spc="300">
+                <a:solidFill>
+                  <a:srgbClr val="00D6F2"/>
+                </a:solidFill>
+                <a:latin typeface="Trenda IG Text"/>
+              </a:rPr>
+              <a:t>ASCENSION AGENTIC HARNESS · LEAN TEAM AND COST</a:t>
+            </a:r>
+          </a:p>
+        </p:txBody>
+      </p:sp>
+      <p:sp>
+        <p:nvSpPr>
+          <p:cNvPr id="3" name="Text 2"/>
+          <p:cNvSpPr txBox="1"/>
+          <p:nvPr/>
+        </p:nvSpPr>
+        <p:spPr>
+          <a:xfrm>
+            <a:off x="411480" y="384048"/>
+            <a:ext cx="11365992" cy="411480"/>
+          </a:xfrm>
+          <a:prstGeom prst="rect">
+            <a:avLst/>
+          </a:prstGeom>
+          <a:noFill/>
+        </p:spPr>
+        <p:txBody>
+          <a:bodyPr wrap="square" lIns="0" rIns="0" tIns="0" bIns="0" anchor="ctr">
+            <a:spAutoFit/>
+          </a:bodyPr>
+          <a:lstStyle/>
+          <a:p>
+            <a:r>
+              <a:rPr sz="2200" b="1" i="0">
+                <a:solidFill>
+                  <a:srgbClr val="FFFFFF"/>
+                </a:solidFill>
+                <a:latin typeface="Trenda IG Text"/>
+              </a:rPr>
+              <a:t>Lean teams on one platform: $9M back every year on a $5.0M build</a:t>
+            </a:r>
+          </a:p>
+        </p:txBody>
+      </p:sp>
+      <p:sp>
+        <p:nvSpPr>
+          <p:cNvPr id="4" name="Text 3"/>
+          <p:cNvSpPr txBox="1"/>
+          <p:nvPr/>
+        </p:nvSpPr>
+        <p:spPr>
+          <a:xfrm>
+            <a:off x="411480" y="804672"/>
+            <a:ext cx="11365992" cy="237744"/>
+          </a:xfrm>
+          <a:prstGeom prst="rect">
+            <a:avLst/>
+          </a:prstGeom>
+          <a:noFill/>
+        </p:spPr>
+        <p:txBody>
+          <a:bodyPr wrap="square" lIns="0" rIns="0" tIns="0" bIns="0" anchor="ctr">
+            <a:spAutoFit/>
+          </a:bodyPr>
+          <a:lstStyle/>
+          <a:p>
+            <a:r>
+              <a:rPr sz="1050" b="0" i="0">
+                <a:solidFill>
+                  <a:srgbClr val="BFBFBF"/>
+                </a:solidFill>
+                <a:latin typeface="Trenda IG Text"/>
+              </a:rPr>
+              <a:t>Every squad of 4-5 developers becomes 1 developer directing the harness agent, plus 1 QA. People review, approve and own every change.</a:t>
+            </a:r>
+          </a:p>
+        </p:txBody>
+      </p:sp>
+      <p:sp>
+        <p:nvSpPr>
+          <p:cNvPr id="5" name="Shape 4"/>
+          <p:cNvSpPr/>
+          <p:nvPr/>
+        </p:nvSpPr>
+        <p:spPr>
+          <a:xfrm>
+            <a:off x="411480" y="1188720"/>
+            <a:ext cx="3715512" cy="1965960"/>
+          </a:xfrm>
+          <a:prstGeom prst="roundRect">
+            <a:avLst>
+              <a:gd name="adj" fmla="val 2000"/>
+            </a:avLst>
+          </a:prstGeom>
+          <a:solidFill>
+            <a:srgbClr val="1E1E1E"/>
+          </a:solidFill>
+          <a:ln>
+            <a:noFill/>
+          </a:ln>
+          <a:effectLst/>
+        </p:spPr>
+        <p:style>
+          <a:lnRef idx="1">
+            <a:schemeClr val="accent1"/>
+          </a:lnRef>
+          <a:fillRef idx="3">
+            <a:schemeClr val="accent1"/>
+          </a:fillRef>
+          <a:effectRef idx="2">
+            <a:schemeClr val="accent1"/>
+          </a:effectRef>
+          <a:fontRef idx="minor">
+            <a:schemeClr val="lt1"/>
+          </a:fontRef>
+        </p:style>
+        <p:txBody>
+          <a:bodyPr rtlCol="0" anchor="ctr"/>
+          <a:lstStyle/>
+          <a:p/>
+        </p:txBody>
+      </p:sp>
+      <p:sp>
+        <p:nvSpPr>
+          <p:cNvPr id="6" name="Shape 5"/>
+          <p:cNvSpPr/>
+          <p:nvPr/>
+        </p:nvSpPr>
+        <p:spPr>
+          <a:xfrm>
+            <a:off x="411480" y="1188720"/>
+            <a:ext cx="3715512" cy="256032"/>
+          </a:xfrm>
+          <a:prstGeom prst="rect">
+            <a:avLst/>
+          </a:prstGeom>
+          <a:solidFill>
+            <a:srgbClr val="2B2B2B"/>
+          </a:solidFill>
+          <a:ln>
+            <a:noFill/>
+          </a:ln>
+          <a:effectLst/>
+        </p:spPr>
+        <p:style>
+          <a:lnRef idx="1">
+            <a:schemeClr val="accent1"/>
+          </a:lnRef>
+          <a:fillRef idx="3">
+            <a:schemeClr val="accent1"/>
+          </a:fillRef>
+          <a:effectRef idx="2">
+            <a:schemeClr val="accent1"/>
+          </a:effectRef>
+          <a:fontRef idx="minor">
+            <a:schemeClr val="lt1"/>
+          </a:fontRef>
+        </p:style>
+        <p:txBody>
+          <a:bodyPr rtlCol="0" anchor="ctr"/>
+          <a:lstStyle/>
+          <a:p/>
+        </p:txBody>
+      </p:sp>
+      <p:sp>
+        <p:nvSpPr>
+          <p:cNvPr id="7" name="Text 6"/>
+          <p:cNvSpPr txBox="1"/>
+          <p:nvPr/>
+        </p:nvSpPr>
+        <p:spPr>
+          <a:xfrm>
+            <a:off x="521208" y="1188720"/>
+            <a:ext cx="3496056" cy="256032"/>
+          </a:xfrm>
+          <a:prstGeom prst="rect">
+            <a:avLst/>
+          </a:prstGeom>
+          <a:noFill/>
+        </p:spPr>
+        <p:txBody>
+          <a:bodyPr wrap="square" lIns="0" rIns="0" tIns="0" bIns="0" anchor="ctr">
+            <a:spAutoFit/>
+          </a:bodyPr>
+          <a:lstStyle/>
+          <a:p>
+            <a:r>
+              <a:rPr sz="640" b="1" i="0" spc="120">
+                <a:solidFill>
+                  <a:srgbClr val="F2F2F2"/>
+                </a:solidFill>
+                <a:latin typeface="Trenda IG Text"/>
+              </a:rPr>
+              <a:t>THE SQUAD</a:t>
+            </a:r>
+            <a:r>
+              <a:rPr sz="640" b="0" i="0">
+                <a:solidFill>
+                  <a:srgbClr val="B3B3B3"/>
+                </a:solidFill>
+                <a:latin typeface="Trenda IG Text"/>
+              </a:rPr>
+              <a:t>   same scope, two people</a:t>
+            </a:r>
+          </a:p>
+        </p:txBody>
+      </p:sp>
+      <p:sp>
+        <p:nvSpPr>
+          <p:cNvPr id="8" name="Text 7"/>
+          <p:cNvSpPr txBox="1"/>
+          <p:nvPr/>
+        </p:nvSpPr>
+        <p:spPr>
+          <a:xfrm>
+            <a:off x="539496" y="1536192"/>
+            <a:ext cx="1371600" cy="164592"/>
+          </a:xfrm>
+          <a:prstGeom prst="rect">
+            <a:avLst/>
+          </a:prstGeom>
+          <a:noFill/>
+        </p:spPr>
+        <p:txBody>
+          <a:bodyPr wrap="square" lIns="0" rIns="0" tIns="0" bIns="0" anchor="ctr">
+            <a:spAutoFit/>
+          </a:bodyPr>
+          <a:lstStyle/>
+          <a:p>
+            <a:r>
+              <a:rPr sz="540" b="1" i="0" spc="100">
+                <a:solidFill>
+                  <a:srgbClr val="8C8C8C"/>
+                </a:solidFill>
+                <a:latin typeface="Trenda IG Text"/>
+              </a:rPr>
+              <a:t>TODAY</a:t>
+            </a:r>
+          </a:p>
+        </p:txBody>
+      </p:sp>
+      <p:sp>
+        <p:nvSpPr>
+          <p:cNvPr id="9" name="Shape 8"/>
+          <p:cNvSpPr/>
+          <p:nvPr/>
+        </p:nvSpPr>
+        <p:spPr>
+          <a:xfrm>
+            <a:off x="539496" y="1719072"/>
+            <a:ext cx="648004" cy="274320"/>
+          </a:xfrm>
+          <a:prstGeom prst="roundRect">
+            <a:avLst>
+              <a:gd name="adj" fmla="val 25000"/>
+            </a:avLst>
+          </a:prstGeom>
+          <a:solidFill>
+            <a:srgbClr val="141414"/>
+          </a:solidFill>
+          <a:ln w="9525">
+            <a:solidFill>
+              <a:srgbClr val="333333"/>
+            </a:solidFill>
+          </a:ln>
+          <a:effectLst/>
+        </p:spPr>
+        <p:style>
+          <a:lnRef idx="1">
+            <a:schemeClr val="accent1"/>
+          </a:lnRef>
+          <a:fillRef idx="3">
+            <a:schemeClr val="accent1"/>
+          </a:fillRef>
+          <a:effectRef idx="2">
+            <a:schemeClr val="accent1"/>
+          </a:effectRef>
+          <a:fontRef idx="minor">
+            <a:schemeClr val="lt1"/>
+          </a:fontRef>
+        </p:style>
+        <p:txBody>
+          <a:bodyPr rtlCol="0" anchor="ctr"/>
+          <a:lstStyle/>
+          <a:p/>
+        </p:txBody>
+      </p:sp>
+      <p:sp>
+        <p:nvSpPr>
+          <p:cNvPr id="10" name="Text 9"/>
+          <p:cNvSpPr txBox="1"/>
+          <p:nvPr/>
+        </p:nvSpPr>
+        <p:spPr>
+          <a:xfrm>
+            <a:off x="539496" y="1719072"/>
+            <a:ext cx="648004" cy="274320"/>
+          </a:xfrm>
+          <a:prstGeom prst="rect">
+            <a:avLst/>
+          </a:prstGeom>
+          <a:noFill/>
+        </p:spPr>
+        <p:txBody>
+          <a:bodyPr wrap="square" lIns="0" rIns="0" tIns="0" bIns="0" anchor="ctr">
+            <a:spAutoFit/>
+          </a:bodyPr>
+          <a:lstStyle/>
+          <a:p>
+            <a:pPr algn="ctr"/>
+            <a:r>
+              <a:rPr sz="640" b="1" i="0">
+                <a:solidFill>
+                  <a:srgbClr val="B3B3B3"/>
+                </a:solidFill>
+                <a:latin typeface="Trenda IG Text"/>
+              </a:rPr>
+              <a:t>Dev</a:t>
+            </a:r>
+          </a:p>
+        </p:txBody>
+      </p:sp>
+      <p:sp>
+        <p:nvSpPr>
+          <p:cNvPr id="11" name="Shape 10"/>
+          <p:cNvSpPr/>
+          <p:nvPr/>
+        </p:nvSpPr>
+        <p:spPr>
+          <a:xfrm>
+            <a:off x="1242364" y="1719072"/>
+            <a:ext cx="648004" cy="274320"/>
+          </a:xfrm>
+          <a:prstGeom prst="roundRect">
+            <a:avLst>
+              <a:gd name="adj" fmla="val 25000"/>
+            </a:avLst>
+          </a:prstGeom>
+          <a:solidFill>
+            <a:srgbClr val="141414"/>
+          </a:solidFill>
+          <a:ln w="9525">
+            <a:solidFill>
+              <a:srgbClr val="333333"/>
+            </a:solidFill>
+          </a:ln>
+          <a:effectLst/>
+        </p:spPr>
+        <p:style>
+          <a:lnRef idx="1">
+            <a:schemeClr val="accent1"/>
+          </a:lnRef>
+          <a:fillRef idx="3">
+            <a:schemeClr val="accent1"/>
+          </a:fillRef>
+          <a:effectRef idx="2">
+            <a:schemeClr val="accent1"/>
+          </a:effectRef>
+          <a:fontRef idx="minor">
+            <a:schemeClr val="lt1"/>
+          </a:fontRef>
+        </p:style>
+        <p:txBody>
+          <a:bodyPr rtlCol="0" anchor="ctr"/>
+          <a:lstStyle/>
+          <a:p/>
+        </p:txBody>
+      </p:sp>
+      <p:sp>
+        <p:nvSpPr>
+          <p:cNvPr id="12" name="Text 11"/>
+          <p:cNvSpPr txBox="1"/>
+          <p:nvPr/>
+        </p:nvSpPr>
+        <p:spPr>
+          <a:xfrm>
+            <a:off x="1242364" y="1719072"/>
+            <a:ext cx="648004" cy="274320"/>
+          </a:xfrm>
+          <a:prstGeom prst="rect">
+            <a:avLst/>
+          </a:prstGeom>
+          <a:noFill/>
+        </p:spPr>
+        <p:txBody>
+          <a:bodyPr wrap="square" lIns="0" rIns="0" tIns="0" bIns="0" anchor="ctr">
+            <a:spAutoFit/>
+          </a:bodyPr>
+          <a:lstStyle/>
+          <a:p>
+            <a:pPr algn="ctr"/>
+            <a:r>
+              <a:rPr sz="640" b="1" i="0">
+                <a:solidFill>
+                  <a:srgbClr val="B3B3B3"/>
+                </a:solidFill>
+                <a:latin typeface="Trenda IG Text"/>
+              </a:rPr>
+              <a:t>Dev</a:t>
+            </a:r>
+          </a:p>
+        </p:txBody>
+      </p:sp>
+      <p:sp>
+        <p:nvSpPr>
+          <p:cNvPr id="13" name="Shape 12"/>
+          <p:cNvSpPr/>
+          <p:nvPr/>
+        </p:nvSpPr>
+        <p:spPr>
+          <a:xfrm>
+            <a:off x="1945233" y="1719072"/>
+            <a:ext cx="648004" cy="274320"/>
+          </a:xfrm>
+          <a:prstGeom prst="roundRect">
+            <a:avLst>
+              <a:gd name="adj" fmla="val 25000"/>
+            </a:avLst>
+          </a:prstGeom>
+          <a:solidFill>
+            <a:srgbClr val="141414"/>
+          </a:solidFill>
+          <a:ln w="9525">
+            <a:solidFill>
+              <a:srgbClr val="333333"/>
+            </a:solidFill>
+          </a:ln>
+          <a:effectLst/>
+        </p:spPr>
+        <p:style>
+          <a:lnRef idx="1">
+            <a:schemeClr val="accent1"/>
+          </a:lnRef>
+          <a:fillRef idx="3">
+            <a:schemeClr val="accent1"/>
+          </a:fillRef>
+          <a:effectRef idx="2">
+            <a:schemeClr val="accent1"/>
+          </a:effectRef>
+          <a:fontRef idx="minor">
+            <a:schemeClr val="lt1"/>
+          </a:fontRef>
+        </p:style>
+        <p:txBody>
+          <a:bodyPr rtlCol="0" anchor="ctr"/>
+          <a:lstStyle/>
+          <a:p/>
+        </p:txBody>
+      </p:sp>
+      <p:sp>
+        <p:nvSpPr>
+          <p:cNvPr id="14" name="Text 13"/>
+          <p:cNvSpPr txBox="1"/>
+          <p:nvPr/>
+        </p:nvSpPr>
+        <p:spPr>
+          <a:xfrm>
+            <a:off x="1945233" y="1719072"/>
+            <a:ext cx="648004" cy="274320"/>
+          </a:xfrm>
+          <a:prstGeom prst="rect">
+            <a:avLst/>
+          </a:prstGeom>
+          <a:noFill/>
+        </p:spPr>
+        <p:txBody>
+          <a:bodyPr wrap="square" lIns="0" rIns="0" tIns="0" bIns="0" anchor="ctr">
+            <a:spAutoFit/>
+          </a:bodyPr>
+          <a:lstStyle/>
+          <a:p>
+            <a:pPr algn="ctr"/>
+            <a:r>
+              <a:rPr sz="640" b="1" i="0">
+                <a:solidFill>
+                  <a:srgbClr val="B3B3B3"/>
+                </a:solidFill>
+                <a:latin typeface="Trenda IG Text"/>
+              </a:rPr>
+              <a:t>Dev</a:t>
+            </a:r>
+          </a:p>
+        </p:txBody>
+      </p:sp>
+      <p:sp>
+        <p:nvSpPr>
+          <p:cNvPr id="15" name="Shape 14"/>
+          <p:cNvSpPr/>
+          <p:nvPr/>
+        </p:nvSpPr>
+        <p:spPr>
+          <a:xfrm>
+            <a:off x="2648102" y="1719072"/>
+            <a:ext cx="648004" cy="274320"/>
+          </a:xfrm>
+          <a:prstGeom prst="roundRect">
+            <a:avLst>
+              <a:gd name="adj" fmla="val 25000"/>
+            </a:avLst>
+          </a:prstGeom>
+          <a:solidFill>
+            <a:srgbClr val="141414"/>
+          </a:solidFill>
+          <a:ln w="9525">
+            <a:solidFill>
+              <a:srgbClr val="333333"/>
+            </a:solidFill>
+          </a:ln>
+          <a:effectLst/>
+        </p:spPr>
+        <p:style>
+          <a:lnRef idx="1">
+            <a:schemeClr val="accent1"/>
+          </a:lnRef>
+          <a:fillRef idx="3">
+            <a:schemeClr val="accent1"/>
+          </a:fillRef>
+          <a:effectRef idx="2">
+            <a:schemeClr val="accent1"/>
+          </a:effectRef>
+          <a:fontRef idx="minor">
+            <a:schemeClr val="lt1"/>
+          </a:fontRef>
+        </p:style>
+        <p:txBody>
+          <a:bodyPr rtlCol="0" anchor="ctr"/>
+          <a:lstStyle/>
+          <a:p/>
+        </p:txBody>
+      </p:sp>
+      <p:sp>
+        <p:nvSpPr>
+          <p:cNvPr id="16" name="Text 15"/>
+          <p:cNvSpPr txBox="1"/>
+          <p:nvPr/>
+        </p:nvSpPr>
+        <p:spPr>
+          <a:xfrm>
+            <a:off x="2648102" y="1719072"/>
+            <a:ext cx="648004" cy="274320"/>
+          </a:xfrm>
+          <a:prstGeom prst="rect">
+            <a:avLst/>
+          </a:prstGeom>
+          <a:noFill/>
+        </p:spPr>
+        <p:txBody>
+          <a:bodyPr wrap="square" lIns="0" rIns="0" tIns="0" bIns="0" anchor="ctr">
+            <a:spAutoFit/>
+          </a:bodyPr>
+          <a:lstStyle/>
+          <a:p>
+            <a:pPr algn="ctr"/>
+            <a:r>
+              <a:rPr sz="640" b="1" i="0">
+                <a:solidFill>
+                  <a:srgbClr val="B3B3B3"/>
+                </a:solidFill>
+                <a:latin typeface="Trenda IG Text"/>
+              </a:rPr>
+              <a:t>Dev</a:t>
+            </a:r>
+          </a:p>
+        </p:txBody>
+      </p:sp>
+      <p:sp>
+        <p:nvSpPr>
+          <p:cNvPr id="17" name="Shape 16"/>
+          <p:cNvSpPr/>
+          <p:nvPr/>
+        </p:nvSpPr>
+        <p:spPr>
+          <a:xfrm>
+            <a:off x="3350971" y="1719072"/>
+            <a:ext cx="648004" cy="274320"/>
+          </a:xfrm>
+          <a:prstGeom prst="roundRect">
+            <a:avLst>
+              <a:gd name="adj" fmla="val 25000"/>
+            </a:avLst>
+          </a:prstGeom>
+          <a:solidFill>
+            <a:srgbClr val="141414"/>
+          </a:solidFill>
+          <a:ln w="9525">
+            <a:solidFill>
+              <a:srgbClr val="333333"/>
+            </a:solidFill>
+          </a:ln>
+          <a:effectLst/>
+        </p:spPr>
+        <p:style>
+          <a:lnRef idx="1">
+            <a:schemeClr val="accent1"/>
+          </a:lnRef>
+          <a:fillRef idx="3">
+            <a:schemeClr val="accent1"/>
+          </a:fillRef>
+          <a:effectRef idx="2">
+            <a:schemeClr val="accent1"/>
+          </a:effectRef>
+          <a:fontRef idx="minor">
+            <a:schemeClr val="lt1"/>
+          </a:fontRef>
+        </p:style>
+        <p:txBody>
+          <a:bodyPr rtlCol="0" anchor="ctr"/>
+          <a:lstStyle/>
+          <a:p/>
+        </p:txBody>
+      </p:sp>
+      <p:sp>
+        <p:nvSpPr>
+          <p:cNvPr id="18" name="Text 17"/>
+          <p:cNvSpPr txBox="1"/>
+          <p:nvPr/>
+        </p:nvSpPr>
+        <p:spPr>
+          <a:xfrm>
+            <a:off x="3350971" y="1719072"/>
+            <a:ext cx="648004" cy="274320"/>
+          </a:xfrm>
+          <a:prstGeom prst="rect">
+            <a:avLst/>
+          </a:prstGeom>
+          <a:noFill/>
+        </p:spPr>
+        <p:txBody>
+          <a:bodyPr wrap="square" lIns="0" rIns="0" tIns="0" bIns="0" anchor="ctr">
+            <a:spAutoFit/>
+          </a:bodyPr>
+          <a:lstStyle/>
+          <a:p>
+            <a:pPr algn="ctr"/>
+            <a:r>
+              <a:rPr sz="640" b="1" i="0">
+                <a:solidFill>
+                  <a:srgbClr val="B3B3B3"/>
+                </a:solidFill>
+                <a:latin typeface="Trenda IG Text"/>
+              </a:rPr>
+              <a:t>QA</a:t>
+            </a:r>
+          </a:p>
+        </p:txBody>
+      </p:sp>
+      <p:sp>
+        <p:nvSpPr>
+          <p:cNvPr id="19" name="Text 18"/>
+          <p:cNvSpPr txBox="1"/>
+          <p:nvPr/>
+        </p:nvSpPr>
+        <p:spPr>
+          <a:xfrm>
+            <a:off x="539496" y="2084832"/>
+            <a:ext cx="1371600" cy="164592"/>
+          </a:xfrm>
+          <a:prstGeom prst="rect">
+            <a:avLst/>
+          </a:prstGeom>
+          <a:noFill/>
+        </p:spPr>
+        <p:txBody>
+          <a:bodyPr wrap="square" lIns="0" rIns="0" tIns="0" bIns="0" anchor="ctr">
+            <a:spAutoFit/>
+          </a:bodyPr>
+          <a:lstStyle/>
+          <a:p>
+            <a:r>
+              <a:rPr sz="540" b="1" i="0" spc="100">
+                <a:solidFill>
+                  <a:srgbClr val="00D6F2"/>
+                </a:solidFill>
+                <a:latin typeface="Trenda IG Text"/>
+              </a:rPr>
+              <a:t>WITH THE HARNESS</a:t>
+            </a:r>
+          </a:p>
+        </p:txBody>
+      </p:sp>
+      <p:sp>
+        <p:nvSpPr>
+          <p:cNvPr id="20" name="Shape 19"/>
+          <p:cNvSpPr/>
+          <p:nvPr/>
+        </p:nvSpPr>
+        <p:spPr>
+          <a:xfrm>
+            <a:off x="539496" y="2267712"/>
+            <a:ext cx="1116584" cy="274320"/>
+          </a:xfrm>
+          <a:prstGeom prst="roundRect">
+            <a:avLst>
+              <a:gd name="adj" fmla="val 25000"/>
+            </a:avLst>
+          </a:prstGeom>
+          <a:solidFill>
+            <a:srgbClr val="141414"/>
+          </a:solidFill>
+          <a:ln w="9525">
+            <a:solidFill>
+              <a:srgbClr val="00D6F2"/>
+            </a:solidFill>
+          </a:ln>
+          <a:effectLst/>
+        </p:spPr>
+        <p:style>
+          <a:lnRef idx="1">
+            <a:schemeClr val="accent1"/>
+          </a:lnRef>
+          <a:fillRef idx="3">
+            <a:schemeClr val="accent1"/>
+          </a:fillRef>
+          <a:effectRef idx="2">
+            <a:schemeClr val="accent1"/>
+          </a:effectRef>
+          <a:fontRef idx="minor">
+            <a:schemeClr val="lt1"/>
+          </a:fontRef>
+        </p:style>
+        <p:txBody>
+          <a:bodyPr rtlCol="0" anchor="ctr"/>
+          <a:lstStyle/>
+          <a:p/>
+        </p:txBody>
+      </p:sp>
+      <p:sp>
+        <p:nvSpPr>
+          <p:cNvPr id="21" name="Text 20"/>
+          <p:cNvSpPr txBox="1"/>
+          <p:nvPr/>
+        </p:nvSpPr>
+        <p:spPr>
+          <a:xfrm>
+            <a:off x="539496" y="2267712"/>
+            <a:ext cx="1116584" cy="274320"/>
+          </a:xfrm>
+          <a:prstGeom prst="rect">
+            <a:avLst/>
+          </a:prstGeom>
+          <a:noFill/>
+        </p:spPr>
+        <p:txBody>
+          <a:bodyPr wrap="square" lIns="0" rIns="0" tIns="0" bIns="0" anchor="ctr">
+            <a:spAutoFit/>
+          </a:bodyPr>
+          <a:lstStyle/>
+          <a:p>
+            <a:pPr algn="ctr"/>
+            <a:r>
+              <a:rPr sz="640" b="1" i="0">
+                <a:solidFill>
+                  <a:srgbClr val="F2F2F2"/>
+                </a:solidFill>
+                <a:latin typeface="Trenda IG Text"/>
+              </a:rPr>
+              <a:t>Developer</a:t>
+            </a:r>
+          </a:p>
+        </p:txBody>
+      </p:sp>
+      <p:sp>
+        <p:nvSpPr>
+          <p:cNvPr id="22" name="Shape 21"/>
+          <p:cNvSpPr/>
+          <p:nvPr/>
+        </p:nvSpPr>
+        <p:spPr>
+          <a:xfrm>
+            <a:off x="1710944" y="2267712"/>
+            <a:ext cx="1116584" cy="274320"/>
+          </a:xfrm>
+          <a:prstGeom prst="roundRect">
+            <a:avLst>
+              <a:gd name="adj" fmla="val 25000"/>
+            </a:avLst>
+          </a:prstGeom>
+          <a:solidFill>
+            <a:srgbClr val="06262B"/>
+          </a:solidFill>
+          <a:ln w="9525">
+            <a:solidFill>
+              <a:srgbClr val="00D6F2"/>
+            </a:solidFill>
+          </a:ln>
+          <a:effectLst/>
+        </p:spPr>
+        <p:style>
+          <a:lnRef idx="1">
+            <a:schemeClr val="accent1"/>
+          </a:lnRef>
+          <a:fillRef idx="3">
+            <a:schemeClr val="accent1"/>
+          </a:fillRef>
+          <a:effectRef idx="2">
+            <a:schemeClr val="accent1"/>
+          </a:effectRef>
+          <a:fontRef idx="minor">
+            <a:schemeClr val="lt1"/>
+          </a:fontRef>
+        </p:style>
+        <p:txBody>
+          <a:bodyPr rtlCol="0" anchor="ctr"/>
+          <a:lstStyle/>
+          <a:p/>
+        </p:txBody>
+      </p:sp>
+      <p:pic>
+        <p:nvPicPr>
+          <p:cNvPr id="23" name="Picture 22" descr="harness.png"/>
+          <p:cNvPicPr>
+            <a:picLocks noChangeAspect="1"/>
+          </p:cNvPicPr>
+          <p:nvPr/>
+        </p:nvPicPr>
+        <p:blipFill>
+          <a:blip r:embed="rId2"/>
+          <a:stretch>
+            <a:fillRect/>
+          </a:stretch>
+        </p:blipFill>
+        <p:spPr>
+          <a:xfrm>
+            <a:off x="1784096" y="2322576"/>
+            <a:ext cx="164592" cy="164592"/>
+          </a:xfrm>
+          <a:prstGeom prst="rect">
+            <a:avLst/>
+          </a:prstGeom>
+        </p:spPr>
+      </p:pic>
+      <p:sp>
+        <p:nvSpPr>
+          <p:cNvPr id="24" name="Text 22"/>
+          <p:cNvSpPr txBox="1"/>
+          <p:nvPr/>
+        </p:nvSpPr>
+        <p:spPr>
+          <a:xfrm>
+            <a:off x="1930400" y="2267712"/>
+            <a:ext cx="860551" cy="274320"/>
+          </a:xfrm>
+          <a:prstGeom prst="rect">
+            <a:avLst/>
+          </a:prstGeom>
+          <a:noFill/>
+        </p:spPr>
+        <p:txBody>
+          <a:bodyPr wrap="square" lIns="0" rIns="0" tIns="0" bIns="0" anchor="ctr">
+            <a:spAutoFit/>
+          </a:bodyPr>
+          <a:lstStyle/>
+          <a:p>
+            <a:pPr algn="ctr"/>
+            <a:r>
+              <a:rPr sz="600" b="1" i="0">
+                <a:solidFill>
+                  <a:srgbClr val="00D6F2"/>
+                </a:solidFill>
+                <a:latin typeface="Trenda IG Text"/>
+              </a:rPr>
+              <a:t>Harness agent</a:t>
+            </a:r>
+          </a:p>
+        </p:txBody>
+      </p:sp>
+      <p:sp>
+        <p:nvSpPr>
+          <p:cNvPr id="25" name="Shape 23"/>
+          <p:cNvSpPr/>
+          <p:nvPr/>
+        </p:nvSpPr>
+        <p:spPr>
+          <a:xfrm>
+            <a:off x="2882392" y="2267712"/>
+            <a:ext cx="1116584" cy="274320"/>
+          </a:xfrm>
+          <a:prstGeom prst="roundRect">
+            <a:avLst>
+              <a:gd name="adj" fmla="val 25000"/>
+            </a:avLst>
+          </a:prstGeom>
+          <a:solidFill>
+            <a:srgbClr val="141414"/>
+          </a:solidFill>
+          <a:ln w="9525">
+            <a:solidFill>
+              <a:srgbClr val="00D6F2"/>
+            </a:solidFill>
+          </a:ln>
+          <a:effectLst/>
+        </p:spPr>
+        <p:style>
+          <a:lnRef idx="1">
+            <a:schemeClr val="accent1"/>
+          </a:lnRef>
+          <a:fillRef idx="3">
+            <a:schemeClr val="accent1"/>
+          </a:fillRef>
+          <a:effectRef idx="2">
+            <a:schemeClr val="accent1"/>
+          </a:effectRef>
+          <a:fontRef idx="minor">
+            <a:schemeClr val="lt1"/>
+          </a:fontRef>
+        </p:style>
+        <p:txBody>
+          <a:bodyPr rtlCol="0" anchor="ctr"/>
+          <a:lstStyle/>
+          <a:p/>
+        </p:txBody>
+      </p:sp>
+      <p:sp>
+        <p:nvSpPr>
+          <p:cNvPr id="26" name="Text 24"/>
+          <p:cNvSpPr txBox="1"/>
+          <p:nvPr/>
+        </p:nvSpPr>
+        <p:spPr>
+          <a:xfrm>
+            <a:off x="2882392" y="2267712"/>
+            <a:ext cx="1116584" cy="274320"/>
+          </a:xfrm>
+          <a:prstGeom prst="rect">
+            <a:avLst/>
+          </a:prstGeom>
+          <a:noFill/>
+        </p:spPr>
+        <p:txBody>
+          <a:bodyPr wrap="square" lIns="0" rIns="0" tIns="0" bIns="0" anchor="ctr">
+            <a:spAutoFit/>
+          </a:bodyPr>
+          <a:lstStyle/>
+          <a:p>
+            <a:pPr algn="ctr"/>
+            <a:r>
+              <a:rPr sz="640" b="1" i="0">
+                <a:solidFill>
+                  <a:srgbClr val="F2F2F2"/>
+                </a:solidFill>
+                <a:latin typeface="Trenda IG Text"/>
+              </a:rPr>
+              <a:t>QA</a:t>
+            </a:r>
+          </a:p>
+        </p:txBody>
+      </p:sp>
+      <p:sp>
+        <p:nvSpPr>
+          <p:cNvPr id="27" name="Text 25"/>
+          <p:cNvSpPr txBox="1"/>
+          <p:nvPr/>
+        </p:nvSpPr>
+        <p:spPr>
+          <a:xfrm>
+            <a:off x="539496" y="2615184"/>
+            <a:ext cx="3459480" cy="384048"/>
+          </a:xfrm>
+          <a:prstGeom prst="rect">
+            <a:avLst/>
+          </a:prstGeom>
+          <a:noFill/>
+        </p:spPr>
+        <p:txBody>
+          <a:bodyPr wrap="square" lIns="0" rIns="0" tIns="0" bIns="0" anchor="t">
+            <a:spAutoFit/>
+          </a:bodyPr>
+          <a:lstStyle/>
+          <a:p>
+            <a:r>
+              <a:rPr sz="600" b="1" i="0">
+                <a:solidFill>
+                  <a:srgbClr val="00D6F2"/>
+                </a:solidFill>
+                <a:latin typeface="Trenda IG Text"/>
+              </a:rPr>
+              <a:t>Agent </a:t>
+            </a:r>
+            <a:r>
+              <a:rPr sz="600" b="0" i="0">
+                <a:solidFill>
+                  <a:srgbClr val="B3B3B3"/>
+                </a:solidFill>
+                <a:latin typeface="Trenda IG Text"/>
+              </a:rPr>
+              <a:t>drafts code, tests and the Copado package overnight. </a:t>
+            </a:r>
+            <a:r>
+              <a:rPr sz="600" b="1" i="0">
+                <a:solidFill>
+                  <a:srgbClr val="F2F2F2"/>
+                </a:solidFill>
+                <a:latin typeface="Trenda IG Text"/>
+              </a:rPr>
+              <a:t>Developer </a:t>
+            </a:r>
+            <a:r>
+              <a:rPr sz="600" b="0" i="0">
+                <a:solidFill>
+                  <a:srgbClr val="B3B3B3"/>
+                </a:solidFill>
+                <a:latin typeface="Trenda IG Text"/>
+              </a:rPr>
+              <a:t>directs and approves. </a:t>
+            </a:r>
+            <a:r>
+              <a:rPr sz="600" b="1" i="0">
+                <a:solidFill>
+                  <a:srgbClr val="F2F2F2"/>
+                </a:solidFill>
+                <a:latin typeface="Trenda IG Text"/>
+              </a:rPr>
+              <a:t>QA </a:t>
+            </a:r>
+            <a:r>
+              <a:rPr sz="600" b="0" i="0">
+                <a:solidFill>
+                  <a:srgbClr val="B3B3B3"/>
+                </a:solidFill>
+                <a:latin typeface="Trenda IG Text"/>
+              </a:rPr>
+              <a:t>signs off.</a:t>
+            </a:r>
+          </a:p>
+        </p:txBody>
+      </p:sp>
+      <p:sp>
+        <p:nvSpPr>
+          <p:cNvPr id="28" name="Shape 26"/>
+          <p:cNvSpPr/>
+          <p:nvPr/>
+        </p:nvSpPr>
+        <p:spPr>
+          <a:xfrm>
+            <a:off x="4236720" y="1188720"/>
+            <a:ext cx="3715512" cy="1965960"/>
+          </a:xfrm>
+          <a:prstGeom prst="roundRect">
+            <a:avLst>
+              <a:gd name="adj" fmla="val 2000"/>
+            </a:avLst>
+          </a:prstGeom>
+          <a:solidFill>
+            <a:srgbClr val="1E1E1E"/>
+          </a:solidFill>
+          <a:ln>
+            <a:noFill/>
+          </a:ln>
+          <a:effectLst/>
+        </p:spPr>
+        <p:style>
+          <a:lnRef idx="1">
+            <a:schemeClr val="accent1"/>
+          </a:lnRef>
+          <a:fillRef idx="3">
+            <a:schemeClr val="accent1"/>
+          </a:fillRef>
+          <a:effectRef idx="2">
+            <a:schemeClr val="accent1"/>
+          </a:effectRef>
+          <a:fontRef idx="minor">
+            <a:schemeClr val="lt1"/>
+          </a:fontRef>
+        </p:style>
+        <p:txBody>
+          <a:bodyPr rtlCol="0" anchor="ctr"/>
+          <a:lstStyle/>
+          <a:p/>
+        </p:txBody>
+      </p:sp>
+      <p:sp>
+        <p:nvSpPr>
+          <p:cNvPr id="29" name="Shape 27"/>
+          <p:cNvSpPr/>
+          <p:nvPr/>
+        </p:nvSpPr>
+        <p:spPr>
+          <a:xfrm>
+            <a:off x="4236720" y="1188720"/>
+            <a:ext cx="3715512" cy="256032"/>
+          </a:xfrm>
+          <a:prstGeom prst="rect">
+            <a:avLst/>
+          </a:prstGeom>
+          <a:solidFill>
+            <a:srgbClr val="2B2B2B"/>
+          </a:solidFill>
+          <a:ln>
+            <a:noFill/>
+          </a:ln>
+          <a:effectLst/>
+        </p:spPr>
+        <p:style>
+          <a:lnRef idx="1">
+            <a:schemeClr val="accent1"/>
+          </a:lnRef>
+          <a:fillRef idx="3">
+            <a:schemeClr val="accent1"/>
+          </a:fillRef>
+          <a:effectRef idx="2">
+            <a:schemeClr val="accent1"/>
+          </a:effectRef>
+          <a:fontRef idx="minor">
+            <a:schemeClr val="lt1"/>
+          </a:fontRef>
+        </p:style>
+        <p:txBody>
+          <a:bodyPr rtlCol="0" anchor="ctr"/>
+          <a:lstStyle/>
+          <a:p/>
+        </p:txBody>
+      </p:sp>
+      <p:sp>
+        <p:nvSpPr>
+          <p:cNvPr id="30" name="Text 28"/>
+          <p:cNvSpPr txBox="1"/>
+          <p:nvPr/>
+        </p:nvSpPr>
+        <p:spPr>
+          <a:xfrm>
+            <a:off x="4346448" y="1188720"/>
+            <a:ext cx="3496056" cy="256032"/>
+          </a:xfrm>
+          <a:prstGeom prst="rect">
+            <a:avLst/>
+          </a:prstGeom>
+          <a:noFill/>
+        </p:spPr>
+        <p:txBody>
+          <a:bodyPr wrap="square" lIns="0" rIns="0" tIns="0" bIns="0" anchor="ctr">
+            <a:spAutoFit/>
+          </a:bodyPr>
+          <a:lstStyle/>
+          <a:p>
+            <a:r>
+              <a:rPr sz="640" b="1" i="0" spc="120">
+                <a:solidFill>
+                  <a:srgbClr val="F2F2F2"/>
+                </a:solidFill>
+                <a:latin typeface="Trenda IG Text"/>
+              </a:rPr>
+              <a:t>THE POD</a:t>
+            </a:r>
+            <a:r>
+              <a:rPr sz="640" b="0" i="0">
+                <a:solidFill>
+                  <a:srgbClr val="B3B3B3"/>
+                </a:solidFill>
+                <a:latin typeface="Trenda IG Text"/>
+              </a:rPr>
+              <a:t>   lean pods share one platform</a:t>
+            </a:r>
+          </a:p>
+        </p:txBody>
+      </p:sp>
+      <p:sp>
+        <p:nvSpPr>
+          <p:cNvPr id="31" name="Text 29"/>
+          <p:cNvSpPr txBox="1"/>
+          <p:nvPr/>
+        </p:nvSpPr>
+        <p:spPr>
+          <a:xfrm>
+            <a:off x="4364736" y="1536192"/>
+            <a:ext cx="1828800" cy="164592"/>
+          </a:xfrm>
+          <a:prstGeom prst="rect">
+            <a:avLst/>
+          </a:prstGeom>
+          <a:noFill/>
+        </p:spPr>
+        <p:txBody>
+          <a:bodyPr wrap="square" lIns="0" rIns="0" tIns="0" bIns="0" anchor="ctr">
+            <a:spAutoFit/>
+          </a:bodyPr>
+          <a:lstStyle/>
+          <a:p>
+            <a:r>
+              <a:rPr sz="540" b="1" i="0" spc="100">
+                <a:solidFill>
+                  <a:srgbClr val="8C8C8C"/>
+                </a:solidFill>
+                <a:latin typeface="Trenda IG Text"/>
+              </a:rPr>
+              <a:t>TODAY · EVERY POD, FULL STACK</a:t>
+            </a:r>
+          </a:p>
+        </p:txBody>
+      </p:sp>
+      <p:sp>
+        <p:nvSpPr>
+          <p:cNvPr id="32" name="Shape 30"/>
+          <p:cNvSpPr/>
+          <p:nvPr/>
+        </p:nvSpPr>
+        <p:spPr>
+          <a:xfrm>
+            <a:off x="4364736" y="1719072"/>
+            <a:ext cx="3459480" cy="274320"/>
+          </a:xfrm>
+          <a:prstGeom prst="roundRect">
+            <a:avLst>
+              <a:gd name="adj" fmla="val 25000"/>
+            </a:avLst>
+          </a:prstGeom>
+          <a:solidFill>
+            <a:srgbClr val="141414"/>
+          </a:solidFill>
+          <a:ln w="9525">
+            <a:solidFill>
+              <a:srgbClr val="333333"/>
+            </a:solidFill>
+          </a:ln>
+          <a:effectLst/>
+        </p:spPr>
+        <p:style>
+          <a:lnRef idx="1">
+            <a:schemeClr val="accent1"/>
+          </a:lnRef>
+          <a:fillRef idx="3">
+            <a:schemeClr val="accent1"/>
+          </a:fillRef>
+          <a:effectRef idx="2">
+            <a:schemeClr val="accent1"/>
+          </a:effectRef>
+          <a:fontRef idx="minor">
+            <a:schemeClr val="lt1"/>
+          </a:fontRef>
+        </p:style>
+        <p:txBody>
+          <a:bodyPr rtlCol="0" anchor="ctr"/>
+          <a:lstStyle/>
+          <a:p/>
+        </p:txBody>
+      </p:sp>
+      <p:sp>
+        <p:nvSpPr>
+          <p:cNvPr id="33" name="Text 31"/>
+          <p:cNvSpPr txBox="1"/>
+          <p:nvPr/>
+        </p:nvSpPr>
+        <p:spPr>
+          <a:xfrm>
+            <a:off x="4364736" y="1719072"/>
+            <a:ext cx="3459480" cy="274320"/>
+          </a:xfrm>
+          <a:prstGeom prst="rect">
+            <a:avLst/>
+          </a:prstGeom>
+          <a:noFill/>
+        </p:spPr>
+        <p:txBody>
+          <a:bodyPr wrap="square" lIns="0" rIns="0" tIns="0" bIns="0" anchor="ctr">
+            <a:spAutoFit/>
+          </a:bodyPr>
+          <a:lstStyle/>
+          <a:p>
+            <a:pPr algn="ctr"/>
+            <a:r>
+              <a:rPr sz="620" b="1" i="0">
+                <a:solidFill>
+                  <a:srgbClr val="B3B3B3"/>
+                </a:solidFill>
+                <a:latin typeface="Trenda IG Text"/>
+              </a:rPr>
+              <a:t>BA · Devs · QA · Release · Support</a:t>
+            </a:r>
+          </a:p>
+        </p:txBody>
+      </p:sp>
+      <p:sp>
+        <p:nvSpPr>
+          <p:cNvPr id="34" name="Text 32"/>
+          <p:cNvSpPr txBox="1"/>
+          <p:nvPr/>
+        </p:nvSpPr>
+        <p:spPr>
+          <a:xfrm>
+            <a:off x="4364736" y="2084832"/>
+            <a:ext cx="2194560" cy="164592"/>
+          </a:xfrm>
+          <a:prstGeom prst="rect">
+            <a:avLst/>
+          </a:prstGeom>
+          <a:noFill/>
+        </p:spPr>
+        <p:txBody>
+          <a:bodyPr wrap="square" lIns="0" rIns="0" tIns="0" bIns="0" anchor="ctr">
+            <a:spAutoFit/>
+          </a:bodyPr>
+          <a:lstStyle/>
+          <a:p>
+            <a:r>
+              <a:rPr sz="540" b="1" i="0" spc="100">
+                <a:solidFill>
+                  <a:srgbClr val="00D6F2"/>
+                </a:solidFill>
+                <a:latin typeface="Trenda IG Text"/>
+              </a:rPr>
+              <a:t>WITH THE HARNESS</a:t>
+            </a:r>
+          </a:p>
+        </p:txBody>
+      </p:sp>
+      <p:sp>
+        <p:nvSpPr>
+          <p:cNvPr id="35" name="Shape 33"/>
+          <p:cNvSpPr/>
+          <p:nvPr/>
+        </p:nvSpPr>
+        <p:spPr>
+          <a:xfrm>
+            <a:off x="4364736" y="2267712"/>
+            <a:ext cx="1872538" cy="274320"/>
+          </a:xfrm>
+          <a:prstGeom prst="roundRect">
+            <a:avLst>
+              <a:gd name="adj" fmla="val 25000"/>
+            </a:avLst>
+          </a:prstGeom>
+          <a:solidFill>
+            <a:srgbClr val="141414"/>
+          </a:solidFill>
+          <a:ln w="9525">
+            <a:solidFill>
+              <a:srgbClr val="00D6F2"/>
+            </a:solidFill>
+          </a:ln>
+          <a:effectLst/>
+        </p:spPr>
+        <p:style>
+          <a:lnRef idx="1">
+            <a:schemeClr val="accent1"/>
+          </a:lnRef>
+          <a:fillRef idx="3">
+            <a:schemeClr val="accent1"/>
+          </a:fillRef>
+          <a:effectRef idx="2">
+            <a:schemeClr val="accent1"/>
+          </a:effectRef>
+          <a:fontRef idx="minor">
+            <a:schemeClr val="lt1"/>
+          </a:fontRef>
+        </p:style>
+        <p:txBody>
+          <a:bodyPr rtlCol="0" anchor="ctr"/>
+          <a:lstStyle/>
+          <a:p/>
+        </p:txBody>
+      </p:sp>
+      <p:sp>
+        <p:nvSpPr>
+          <p:cNvPr id="36" name="Text 34"/>
+          <p:cNvSpPr txBox="1"/>
+          <p:nvPr/>
+        </p:nvSpPr>
+        <p:spPr>
+          <a:xfrm>
+            <a:off x="4364736" y="2267712"/>
+            <a:ext cx="1872538" cy="274320"/>
+          </a:xfrm>
+          <a:prstGeom prst="rect">
+            <a:avLst/>
+          </a:prstGeom>
+          <a:noFill/>
+        </p:spPr>
+        <p:txBody>
+          <a:bodyPr wrap="square" lIns="0" rIns="0" tIns="0" bIns="0" anchor="ctr">
+            <a:spAutoFit/>
+          </a:bodyPr>
+          <a:lstStyle/>
+          <a:p>
+            <a:pPr algn="ctr"/>
+            <a:r>
+              <a:rPr sz="600" b="1" i="0">
+                <a:solidFill>
+                  <a:srgbClr val="F2F2F2"/>
+                </a:solidFill>
+                <a:latin typeface="Trenda IG Text"/>
+              </a:rPr>
+              <a:t>Owner · Lead · 2-4 engineers</a:t>
+            </a:r>
+          </a:p>
+        </p:txBody>
+      </p:sp>
+      <p:sp>
+        <p:nvSpPr>
+          <p:cNvPr id="37" name="Shape 35"/>
+          <p:cNvSpPr/>
+          <p:nvPr/>
+        </p:nvSpPr>
+        <p:spPr>
+          <a:xfrm>
+            <a:off x="6292138" y="2267712"/>
+            <a:ext cx="1532077" cy="274320"/>
+          </a:xfrm>
+          <a:prstGeom prst="roundRect">
+            <a:avLst>
+              <a:gd name="adj" fmla="val 25000"/>
+            </a:avLst>
+          </a:prstGeom>
+          <a:solidFill>
+            <a:srgbClr val="06262B"/>
+          </a:solidFill>
+          <a:ln w="9525">
+            <a:solidFill>
+              <a:srgbClr val="00D6F2"/>
+            </a:solidFill>
+          </a:ln>
+          <a:effectLst/>
+        </p:spPr>
+        <p:style>
+          <a:lnRef idx="1">
+            <a:schemeClr val="accent1"/>
+          </a:lnRef>
+          <a:fillRef idx="3">
+            <a:schemeClr val="accent1"/>
+          </a:fillRef>
+          <a:effectRef idx="2">
+            <a:schemeClr val="accent1"/>
+          </a:effectRef>
+          <a:fontRef idx="minor">
+            <a:schemeClr val="lt1"/>
+          </a:fontRef>
+        </p:style>
+        <p:txBody>
+          <a:bodyPr rtlCol="0" anchor="ctr"/>
+          <a:lstStyle/>
+          <a:p/>
+        </p:txBody>
+      </p:sp>
+      <p:sp>
+        <p:nvSpPr>
+          <p:cNvPr id="38" name="Text 36"/>
+          <p:cNvSpPr txBox="1"/>
+          <p:nvPr/>
+        </p:nvSpPr>
+        <p:spPr>
+          <a:xfrm>
+            <a:off x="6292138" y="2267712"/>
+            <a:ext cx="1532077" cy="274320"/>
+          </a:xfrm>
+          <a:prstGeom prst="rect">
+            <a:avLst/>
+          </a:prstGeom>
+          <a:noFill/>
+        </p:spPr>
+        <p:txBody>
+          <a:bodyPr wrap="square" lIns="0" rIns="0" tIns="0" bIns="0" anchor="ctr">
+            <a:spAutoFit/>
+          </a:bodyPr>
+          <a:lstStyle/>
+          <a:p>
+            <a:pPr algn="ctr"/>
+            <a:r>
+              <a:rPr sz="600" b="1" i="0">
+                <a:solidFill>
+                  <a:srgbClr val="00D6F2"/>
+                </a:solidFill>
+                <a:latin typeface="Trenda IG Text"/>
+              </a:rPr>
+              <a:t>Shared platform</a:t>
+            </a:r>
+          </a:p>
+        </p:txBody>
+      </p:sp>
+      <p:sp>
+        <p:nvSpPr>
+          <p:cNvPr id="39" name="Text 37"/>
+          <p:cNvSpPr txBox="1"/>
+          <p:nvPr/>
+        </p:nvSpPr>
+        <p:spPr>
+          <a:xfrm>
+            <a:off x="4364736" y="2615184"/>
+            <a:ext cx="1702308" cy="384048"/>
+          </a:xfrm>
+          <a:prstGeom prst="rect">
+            <a:avLst/>
+          </a:prstGeom>
+          <a:noFill/>
+        </p:spPr>
+        <p:txBody>
+          <a:bodyPr wrap="square" lIns="0" rIns="0" tIns="0" bIns="0" anchor="ctr">
+            <a:spAutoFit/>
+          </a:bodyPr>
+          <a:lstStyle/>
+          <a:p>
+            <a:r>
+              <a:rPr sz="1200" b="0" i="0">
+                <a:solidFill>
+                  <a:srgbClr val="00D6F2"/>
+                </a:solidFill>
+                <a:latin typeface="Trenda IG Text"/>
+              </a:rPr>
+              <a:t>20-30%</a:t>
+            </a:r>
+          </a:p>
+          <a:p>
+            <a:r>
+              <a:rPr sz="600" b="0" i="0">
+                <a:solidFill>
+                  <a:srgbClr val="B3B3B3"/>
+                </a:solidFill>
+                <a:latin typeface="Trenda IG Text"/>
+              </a:rPr>
+              <a:t>smaller team, same scope</a:t>
+            </a:r>
+          </a:p>
+        </p:txBody>
+      </p:sp>
+      <p:sp>
+        <p:nvSpPr>
+          <p:cNvPr id="40" name="Text 38"/>
+          <p:cNvSpPr txBox="1"/>
+          <p:nvPr/>
+        </p:nvSpPr>
+        <p:spPr>
+          <a:xfrm>
+            <a:off x="6121908" y="2615184"/>
+            <a:ext cx="1702308" cy="384048"/>
+          </a:xfrm>
+          <a:prstGeom prst="rect">
+            <a:avLst/>
+          </a:prstGeom>
+          <a:noFill/>
+        </p:spPr>
+        <p:txBody>
+          <a:bodyPr wrap="square" lIns="0" rIns="0" tIns="0" bIns="0" anchor="ctr">
+            <a:spAutoFit/>
+          </a:bodyPr>
+          <a:lstStyle/>
+          <a:p>
+            <a:r>
+              <a:rPr sz="1200" b="0" i="0">
+                <a:solidFill>
+                  <a:srgbClr val="00D6F2"/>
+                </a:solidFill>
+                <a:latin typeface="Trenda IG Text"/>
+              </a:rPr>
+              <a:t>1.4-1.6x</a:t>
+            </a:r>
+          </a:p>
+          <a:p>
+            <a:r>
+              <a:rPr sz="600" b="0" i="0">
+                <a:solidFill>
+                  <a:srgbClr val="B3B3B3"/>
+                </a:solidFill>
+                <a:latin typeface="Trenda IG Text"/>
+              </a:rPr>
+              <a:t>output, same team</a:t>
+            </a:r>
+          </a:p>
+        </p:txBody>
+      </p:sp>
+      <p:sp>
+        <p:nvSpPr>
+          <p:cNvPr id="41" name="Shape 39"/>
+          <p:cNvSpPr/>
+          <p:nvPr/>
+        </p:nvSpPr>
+        <p:spPr>
+          <a:xfrm>
+            <a:off x="8061960" y="1188720"/>
+            <a:ext cx="3715512" cy="1965960"/>
+          </a:xfrm>
+          <a:prstGeom prst="roundRect">
+            <a:avLst>
+              <a:gd name="adj" fmla="val 2000"/>
+            </a:avLst>
+          </a:prstGeom>
+          <a:solidFill>
+            <a:srgbClr val="1E1E1E"/>
+          </a:solidFill>
+          <a:ln>
+            <a:noFill/>
+          </a:ln>
+          <a:effectLst/>
+        </p:spPr>
+        <p:style>
+          <a:lnRef idx="1">
+            <a:schemeClr val="accent1"/>
+          </a:lnRef>
+          <a:fillRef idx="3">
+            <a:schemeClr val="accent1"/>
+          </a:fillRef>
+          <a:effectRef idx="2">
+            <a:schemeClr val="accent1"/>
+          </a:effectRef>
+          <a:fontRef idx="minor">
+            <a:schemeClr val="lt1"/>
+          </a:fontRef>
+        </p:style>
+        <p:txBody>
+          <a:bodyPr rtlCol="0" anchor="ctr"/>
+          <a:lstStyle/>
+          <a:p/>
+        </p:txBody>
+      </p:sp>
+      <p:sp>
+        <p:nvSpPr>
+          <p:cNvPr id="42" name="Shape 40"/>
+          <p:cNvSpPr/>
+          <p:nvPr/>
+        </p:nvSpPr>
+        <p:spPr>
+          <a:xfrm>
+            <a:off x="8061960" y="1188720"/>
+            <a:ext cx="3715512" cy="256032"/>
+          </a:xfrm>
+          <a:prstGeom prst="rect">
+            <a:avLst/>
+          </a:prstGeom>
+          <a:solidFill>
+            <a:srgbClr val="2B2B2B"/>
+          </a:solidFill>
+          <a:ln>
+            <a:noFill/>
+          </a:ln>
+          <a:effectLst/>
+        </p:spPr>
+        <p:style>
+          <a:lnRef idx="1">
+            <a:schemeClr val="accent1"/>
+          </a:lnRef>
+          <a:fillRef idx="3">
+            <a:schemeClr val="accent1"/>
+          </a:fillRef>
+          <a:effectRef idx="2">
+            <a:schemeClr val="accent1"/>
+          </a:effectRef>
+          <a:fontRef idx="minor">
+            <a:schemeClr val="lt1"/>
+          </a:fontRef>
+        </p:style>
+        <p:txBody>
+          <a:bodyPr rtlCol="0" anchor="ctr"/>
+          <a:lstStyle/>
+          <a:p/>
+        </p:txBody>
+      </p:sp>
+      <p:sp>
+        <p:nvSpPr>
+          <p:cNvPr id="43" name="Text 41"/>
+          <p:cNvSpPr txBox="1"/>
+          <p:nvPr/>
+        </p:nvSpPr>
+        <p:spPr>
+          <a:xfrm>
+            <a:off x="8171687" y="1188720"/>
+            <a:ext cx="3496056" cy="256032"/>
+          </a:xfrm>
+          <a:prstGeom prst="rect">
+            <a:avLst/>
+          </a:prstGeom>
+          <a:noFill/>
+        </p:spPr>
+        <p:txBody>
+          <a:bodyPr wrap="square" lIns="0" rIns="0" tIns="0" bIns="0" anchor="ctr">
+            <a:spAutoFit/>
+          </a:bodyPr>
+          <a:lstStyle/>
+          <a:p>
+            <a:r>
+              <a:rPr sz="640" b="1" i="0" spc="120">
+                <a:solidFill>
+                  <a:srgbClr val="F2F2F2"/>
+                </a:solidFill>
+                <a:latin typeface="Trenda IG Text"/>
+              </a:rPr>
+              <a:t>THE BUILD AND RUN</a:t>
+            </a:r>
+            <a:r>
+              <a:rPr sz="640" b="0" i="0">
+                <a:solidFill>
+                  <a:srgbClr val="B3B3B3"/>
+                </a:solidFill>
+                <a:latin typeface="Trenda IG Text"/>
+              </a:rPr>
+              <a:t>   fixed fee, paid by gate</a:t>
+            </a:r>
+          </a:p>
+        </p:txBody>
+      </p:sp>
+      <p:sp>
+        <p:nvSpPr>
+          <p:cNvPr id="44" name="Shape 42"/>
+          <p:cNvSpPr/>
+          <p:nvPr/>
+        </p:nvSpPr>
+        <p:spPr>
+          <a:xfrm>
+            <a:off x="8189976" y="1554480"/>
+            <a:ext cx="1104391" cy="896112"/>
+          </a:xfrm>
+          <a:prstGeom prst="rect">
+            <a:avLst/>
+          </a:prstGeom>
+          <a:solidFill>
+            <a:srgbClr val="141414"/>
+          </a:solidFill>
+          <a:ln>
+            <a:noFill/>
+          </a:ln>
+          <a:effectLst/>
+        </p:spPr>
+        <p:style>
+          <a:lnRef idx="1">
+            <a:schemeClr val="accent1"/>
+          </a:lnRef>
+          <a:fillRef idx="3">
+            <a:schemeClr val="accent1"/>
+          </a:fillRef>
+          <a:effectRef idx="2">
+            <a:schemeClr val="accent1"/>
+          </a:effectRef>
+          <a:fontRef idx="minor">
+            <a:schemeClr val="lt1"/>
+          </a:fontRef>
+        </p:style>
+        <p:txBody>
+          <a:bodyPr rtlCol="0" anchor="ctr"/>
+          <a:lstStyle/>
+          <a:p/>
+        </p:txBody>
+      </p:sp>
+      <p:sp>
+        <p:nvSpPr>
+          <p:cNvPr id="45" name="Text 43"/>
+          <p:cNvSpPr txBox="1"/>
+          <p:nvPr/>
+        </p:nvSpPr>
+        <p:spPr>
+          <a:xfrm>
+            <a:off x="8281416" y="1591056"/>
+            <a:ext cx="976376" cy="402336"/>
+          </a:xfrm>
+          <a:prstGeom prst="rect">
+            <a:avLst/>
+          </a:prstGeom>
+          <a:noFill/>
+        </p:spPr>
+        <p:txBody>
+          <a:bodyPr wrap="square" lIns="0" rIns="0" tIns="0" bIns="0" anchor="ctr">
+            <a:spAutoFit/>
+          </a:bodyPr>
+          <a:lstStyle/>
+          <a:p>
+            <a:r>
+              <a:rPr sz="1600" b="0" i="0">
+                <a:solidFill>
+                  <a:srgbClr val="F2F2F2"/>
+                </a:solidFill>
+                <a:latin typeface="Trenda IG Text"/>
+              </a:rPr>
+              <a:t>17</a:t>
+            </a:r>
+          </a:p>
+        </p:txBody>
+      </p:sp>
+      <p:sp>
+        <p:nvSpPr>
+          <p:cNvPr id="46" name="Text 44"/>
+          <p:cNvSpPr txBox="1"/>
+          <p:nvPr/>
+        </p:nvSpPr>
+        <p:spPr>
+          <a:xfrm>
+            <a:off x="8281416" y="1993392"/>
+            <a:ext cx="976376" cy="420624"/>
+          </a:xfrm>
+          <a:prstGeom prst="rect">
+            <a:avLst/>
+          </a:prstGeom>
+          <a:noFill/>
+        </p:spPr>
+        <p:txBody>
+          <a:bodyPr wrap="square" lIns="0" rIns="0" tIns="0" bIns="0" anchor="t">
+            <a:spAutoFit/>
+          </a:bodyPr>
+          <a:lstStyle/>
+          <a:p>
+            <a:r>
+              <a:rPr sz="590" b="0" i="0">
+                <a:solidFill>
+                  <a:srgbClr val="B3B3B3"/>
+                </a:solidFill>
+                <a:latin typeface="Trenda IG Text"/>
+              </a:rPr>
+              <a:t>people at peak, 10 roles</a:t>
+            </a:r>
+          </a:p>
+        </p:txBody>
+      </p:sp>
+      <p:sp>
+        <p:nvSpPr>
+          <p:cNvPr id="47" name="Shape 45"/>
+          <p:cNvSpPr/>
+          <p:nvPr/>
+        </p:nvSpPr>
+        <p:spPr>
+          <a:xfrm>
+            <a:off x="9367520" y="1554480"/>
+            <a:ext cx="1104391" cy="896112"/>
+          </a:xfrm>
+          <a:prstGeom prst="rect">
+            <a:avLst/>
+          </a:prstGeom>
+          <a:solidFill>
+            <a:srgbClr val="141414"/>
+          </a:solidFill>
+          <a:ln>
+            <a:noFill/>
+          </a:ln>
+          <a:effectLst/>
+        </p:spPr>
+        <p:style>
+          <a:lnRef idx="1">
+            <a:schemeClr val="accent1"/>
+          </a:lnRef>
+          <a:fillRef idx="3">
+            <a:schemeClr val="accent1"/>
+          </a:fillRef>
+          <a:effectRef idx="2">
+            <a:schemeClr val="accent1"/>
+          </a:effectRef>
+          <a:fontRef idx="minor">
+            <a:schemeClr val="lt1"/>
+          </a:fontRef>
+        </p:style>
+        <p:txBody>
+          <a:bodyPr rtlCol="0" anchor="ctr"/>
+          <a:lstStyle/>
+          <a:p/>
+        </p:txBody>
+      </p:sp>
+      <p:sp>
+        <p:nvSpPr>
+          <p:cNvPr id="48" name="Text 46"/>
+          <p:cNvSpPr txBox="1"/>
+          <p:nvPr/>
+        </p:nvSpPr>
+        <p:spPr>
+          <a:xfrm>
+            <a:off x="9458960" y="1591056"/>
+            <a:ext cx="976376" cy="402336"/>
+          </a:xfrm>
+          <a:prstGeom prst="rect">
+            <a:avLst/>
+          </a:prstGeom>
+          <a:noFill/>
+        </p:spPr>
+        <p:txBody>
+          <a:bodyPr wrap="square" lIns="0" rIns="0" tIns="0" bIns="0" anchor="ctr">
+            <a:spAutoFit/>
+          </a:bodyPr>
+          <a:lstStyle/>
+          <a:p>
+            <a:r>
+              <a:rPr sz="1600" b="0" i="0">
+                <a:solidFill>
+                  <a:srgbClr val="F2F2F2"/>
+                </a:solidFill>
+                <a:latin typeface="Trenda IG Text"/>
+              </a:rPr>
+              <a:t>18</a:t>
+            </a:r>
+          </a:p>
+        </p:txBody>
+      </p:sp>
+      <p:sp>
+        <p:nvSpPr>
+          <p:cNvPr id="49" name="Text 47"/>
+          <p:cNvSpPr txBox="1"/>
+          <p:nvPr/>
+        </p:nvSpPr>
+        <p:spPr>
+          <a:xfrm>
+            <a:off x="9458960" y="1993392"/>
+            <a:ext cx="976376" cy="420624"/>
+          </a:xfrm>
+          <a:prstGeom prst="rect">
+            <a:avLst/>
+          </a:prstGeom>
+          <a:noFill/>
+        </p:spPr>
+        <p:txBody>
+          <a:bodyPr wrap="square" lIns="0" rIns="0" tIns="0" bIns="0" anchor="t">
+            <a:spAutoFit/>
+          </a:bodyPr>
+          <a:lstStyle/>
+          <a:p>
+            <a:r>
+              <a:rPr sz="590" b="0" i="0">
+                <a:solidFill>
+                  <a:srgbClr val="B3B3B3"/>
+                </a:solidFill>
+                <a:latin typeface="Trenda IG Text"/>
+              </a:rPr>
+              <a:t>months, seven phases</a:t>
+            </a:r>
+          </a:p>
+        </p:txBody>
+      </p:sp>
+      <p:sp>
+        <p:nvSpPr>
+          <p:cNvPr id="50" name="Shape 48"/>
+          <p:cNvSpPr/>
+          <p:nvPr/>
+        </p:nvSpPr>
+        <p:spPr>
+          <a:xfrm>
+            <a:off x="10545064" y="1554480"/>
+            <a:ext cx="1104391" cy="896112"/>
+          </a:xfrm>
+          <a:prstGeom prst="rect">
+            <a:avLst/>
+          </a:prstGeom>
+          <a:solidFill>
+            <a:srgbClr val="141414"/>
+          </a:solidFill>
+          <a:ln>
+            <a:noFill/>
+          </a:ln>
+          <a:effectLst/>
+        </p:spPr>
+        <p:style>
+          <a:lnRef idx="1">
+            <a:schemeClr val="accent1"/>
+          </a:lnRef>
+          <a:fillRef idx="3">
+            <a:schemeClr val="accent1"/>
+          </a:fillRef>
+          <a:effectRef idx="2">
+            <a:schemeClr val="accent1"/>
+          </a:effectRef>
+          <a:fontRef idx="minor">
+            <a:schemeClr val="lt1"/>
+          </a:fontRef>
+        </p:style>
+        <p:txBody>
+          <a:bodyPr rtlCol="0" anchor="ctr"/>
+          <a:lstStyle/>
+          <a:p/>
+        </p:txBody>
+      </p:sp>
+      <p:sp>
+        <p:nvSpPr>
+          <p:cNvPr id="51" name="Text 49"/>
+          <p:cNvSpPr txBox="1"/>
+          <p:nvPr/>
+        </p:nvSpPr>
+        <p:spPr>
+          <a:xfrm>
+            <a:off x="10636504" y="1591056"/>
+            <a:ext cx="976376" cy="402336"/>
+          </a:xfrm>
+          <a:prstGeom prst="rect">
+            <a:avLst/>
+          </a:prstGeom>
+          <a:noFill/>
+        </p:spPr>
+        <p:txBody>
+          <a:bodyPr wrap="square" lIns="0" rIns="0" tIns="0" bIns="0" anchor="ctr">
+            <a:spAutoFit/>
+          </a:bodyPr>
+          <a:lstStyle/>
+          <a:p>
+            <a:r>
+              <a:rPr sz="1600" b="0" i="0">
+                <a:solidFill>
+                  <a:srgbClr val="F2F2F2"/>
+                </a:solidFill>
+                <a:latin typeface="Trenda IG Text"/>
+              </a:rPr>
+              <a:t>$4.79M</a:t>
+            </a:r>
+          </a:p>
+        </p:txBody>
+      </p:sp>
+      <p:sp>
+        <p:nvSpPr>
+          <p:cNvPr id="52" name="Text 50"/>
+          <p:cNvSpPr txBox="1"/>
+          <p:nvPr/>
+        </p:nvSpPr>
+        <p:spPr>
+          <a:xfrm>
+            <a:off x="10636504" y="1993392"/>
+            <a:ext cx="976376" cy="420624"/>
+          </a:xfrm>
+          <a:prstGeom prst="rect">
+            <a:avLst/>
+          </a:prstGeom>
+          <a:noFill/>
+        </p:spPr>
+        <p:txBody>
+          <a:bodyPr wrap="square" lIns="0" rIns="0" tIns="0" bIns="0" anchor="t">
+            <a:spAutoFit/>
+          </a:bodyPr>
+          <a:lstStyle/>
+          <a:p>
+            <a:r>
+              <a:rPr sz="590" b="0" i="0">
+                <a:solidFill>
+                  <a:srgbClr val="B3B3B3"/>
+                </a:solidFill>
+                <a:latin typeface="Trenda IG Text"/>
+              </a:rPr>
+              <a:t>fixed fee, paid as each gate is signed</a:t>
+            </a:r>
+          </a:p>
+        </p:txBody>
+      </p:sp>
+      <p:sp>
+        <p:nvSpPr>
+          <p:cNvPr id="53" name="Text 51"/>
+          <p:cNvSpPr txBox="1"/>
+          <p:nvPr/>
+        </p:nvSpPr>
+        <p:spPr>
+          <a:xfrm>
+            <a:off x="8189976" y="2542032"/>
+            <a:ext cx="3459480" cy="457200"/>
+          </a:xfrm>
+          <a:prstGeom prst="rect">
+            <a:avLst/>
+          </a:prstGeom>
+          <a:noFill/>
+        </p:spPr>
+        <p:txBody>
+          <a:bodyPr wrap="square" lIns="0" rIns="0" tIns="0" bIns="0" anchor="t">
+            <a:spAutoFit/>
+          </a:bodyPr>
+          <a:lstStyle/>
+          <a:p>
+            <a:r>
+              <a:rPr sz="600" b="1" i="0">
+                <a:solidFill>
+                  <a:srgbClr val="F2F2F2"/>
+                </a:solidFill>
+                <a:latin typeface="Trenda IG Text"/>
+              </a:rPr>
+              <a:t>From month 19 </a:t>
+            </a:r>
+            <a:r>
+              <a:rPr sz="600" b="0" i="0">
+                <a:solidFill>
+                  <a:srgbClr val="B3B3B3"/>
+                </a:solidFill>
+                <a:latin typeface="Trenda IG Text"/>
+              </a:rPr>
+              <a:t>a run team of 4 keeps the graph, agents and evals current: about $1.24M a year with platform usage.</a:t>
+            </a:r>
+          </a:p>
+        </p:txBody>
+      </p:sp>
+      <p:sp>
+        <p:nvSpPr>
+          <p:cNvPr id="54" name="Shape 52"/>
+          <p:cNvSpPr/>
+          <p:nvPr/>
+        </p:nvSpPr>
+        <p:spPr>
+          <a:xfrm>
+            <a:off x="411480" y="3291840"/>
+            <a:ext cx="11365992" cy="1965960"/>
+          </a:xfrm>
+          <a:prstGeom prst="roundRect">
+            <a:avLst>
+              <a:gd name="adj" fmla="val 2000"/>
+            </a:avLst>
+          </a:prstGeom>
+          <a:solidFill>
+            <a:srgbClr val="1E1E1E"/>
+          </a:solidFill>
+          <a:ln>
+            <a:noFill/>
+          </a:ln>
+          <a:effectLst/>
+        </p:spPr>
+        <p:style>
+          <a:lnRef idx="1">
+            <a:schemeClr val="accent1"/>
+          </a:lnRef>
+          <a:fillRef idx="3">
+            <a:schemeClr val="accent1"/>
+          </a:fillRef>
+          <a:effectRef idx="2">
+            <a:schemeClr val="accent1"/>
+          </a:effectRef>
+          <a:fontRef idx="minor">
+            <a:schemeClr val="lt1"/>
+          </a:fontRef>
+        </p:style>
+        <p:txBody>
+          <a:bodyPr rtlCol="0" anchor="ctr"/>
+          <a:lstStyle/>
+          <a:p/>
+        </p:txBody>
+      </p:sp>
+      <p:sp>
+        <p:nvSpPr>
+          <p:cNvPr id="55" name="Shape 53"/>
+          <p:cNvSpPr/>
+          <p:nvPr/>
+        </p:nvSpPr>
+        <p:spPr>
+          <a:xfrm>
+            <a:off x="411480" y="3291840"/>
+            <a:ext cx="11365992" cy="256032"/>
+          </a:xfrm>
+          <a:prstGeom prst="rect">
+            <a:avLst/>
+          </a:prstGeom>
+          <a:solidFill>
+            <a:srgbClr val="2B2B2B"/>
+          </a:solidFill>
+          <a:ln>
+            <a:noFill/>
+          </a:ln>
+          <a:effectLst/>
+        </p:spPr>
+        <p:style>
+          <a:lnRef idx="1">
+            <a:schemeClr val="accent1"/>
+          </a:lnRef>
+          <a:fillRef idx="3">
+            <a:schemeClr val="accent1"/>
+          </a:fillRef>
+          <a:effectRef idx="2">
+            <a:schemeClr val="accent1"/>
+          </a:effectRef>
+          <a:fontRef idx="minor">
+            <a:schemeClr val="lt1"/>
+          </a:fontRef>
+        </p:style>
+        <p:txBody>
+          <a:bodyPr rtlCol="0" anchor="ctr"/>
+          <a:lstStyle/>
+          <a:p/>
+        </p:txBody>
+      </p:sp>
+      <p:sp>
+        <p:nvSpPr>
+          <p:cNvPr id="56" name="Text 54"/>
+          <p:cNvSpPr txBox="1"/>
+          <p:nvPr/>
+        </p:nvSpPr>
+        <p:spPr>
+          <a:xfrm>
+            <a:off x="521208" y="3291840"/>
+            <a:ext cx="11146536" cy="256032"/>
+          </a:xfrm>
+          <a:prstGeom prst="rect">
+            <a:avLst/>
+          </a:prstGeom>
+          <a:noFill/>
+        </p:spPr>
+        <p:txBody>
+          <a:bodyPr wrap="square" lIns="0" rIns="0" tIns="0" bIns="0" anchor="ctr">
+            <a:spAutoFit/>
+          </a:bodyPr>
+          <a:lstStyle/>
+          <a:p>
+            <a:r>
+              <a:rPr sz="640" b="1" i="0" spc="120">
+                <a:solidFill>
+                  <a:srgbClr val="F2F2F2"/>
+                </a:solidFill>
+                <a:latin typeface="Trenda IG Text"/>
+              </a:rPr>
+              <a:t>THE RETURN</a:t>
+            </a:r>
+            <a:r>
+              <a:rPr sz="640" b="0" i="0">
+                <a:solidFill>
+                  <a:srgbClr val="B3B3B3"/>
+                </a:solidFill>
+                <a:latin typeface="Trenda IG Text"/>
+              </a:rPr>
+              <a:t>   target · first full year after go-live</a:t>
+            </a:r>
+          </a:p>
+        </p:txBody>
+      </p:sp>
+      <p:sp>
+        <p:nvSpPr>
+          <p:cNvPr id="57" name="Shape 55"/>
+          <p:cNvSpPr/>
+          <p:nvPr/>
+        </p:nvSpPr>
+        <p:spPr>
+          <a:xfrm>
+            <a:off x="539496" y="3639312"/>
+            <a:ext cx="1796796" cy="1490472"/>
+          </a:xfrm>
+          <a:prstGeom prst="rect">
+            <a:avLst/>
+          </a:prstGeom>
+          <a:solidFill>
+            <a:srgbClr val="141414"/>
+          </a:solidFill>
+          <a:ln>
+            <a:noFill/>
+          </a:ln>
+          <a:effectLst/>
+        </p:spPr>
+        <p:style>
+          <a:lnRef idx="1">
+            <a:schemeClr val="accent1"/>
+          </a:lnRef>
+          <a:fillRef idx="3">
+            <a:schemeClr val="accent1"/>
+          </a:fillRef>
+          <a:effectRef idx="2">
+            <a:schemeClr val="accent1"/>
+          </a:effectRef>
+          <a:fontRef idx="minor">
+            <a:schemeClr val="lt1"/>
+          </a:fontRef>
+        </p:style>
+        <p:txBody>
+          <a:bodyPr rtlCol="0" anchor="ctr"/>
+          <a:lstStyle/>
+          <a:p/>
+        </p:txBody>
+      </p:sp>
+      <p:sp>
+        <p:nvSpPr>
+          <p:cNvPr id="58" name="Text 56"/>
+          <p:cNvSpPr txBox="1"/>
+          <p:nvPr/>
+        </p:nvSpPr>
+        <p:spPr>
+          <a:xfrm>
+            <a:off x="667512" y="3977639"/>
+            <a:ext cx="1577340" cy="457200"/>
+          </a:xfrm>
+          <a:prstGeom prst="rect">
+            <a:avLst/>
+          </a:prstGeom>
+          <a:noFill/>
+        </p:spPr>
+        <p:txBody>
+          <a:bodyPr wrap="square" lIns="0" rIns="0" tIns="0" bIns="0" anchor="ctr">
+            <a:spAutoFit/>
+          </a:bodyPr>
+          <a:lstStyle/>
+          <a:p>
+            <a:r>
+              <a:rPr sz="2200" b="0" i="0">
+                <a:solidFill>
+                  <a:srgbClr val="F2F2F2"/>
+                </a:solidFill>
+                <a:latin typeface="Trenda IG Text"/>
+              </a:rPr>
+              <a:t>$16M</a:t>
+            </a:r>
+          </a:p>
+        </p:txBody>
+      </p:sp>
+      <p:sp>
+        <p:nvSpPr>
+          <p:cNvPr id="59" name="Text 57"/>
+          <p:cNvSpPr txBox="1"/>
+          <p:nvPr/>
+        </p:nvSpPr>
+        <p:spPr>
+          <a:xfrm>
+            <a:off x="667512" y="4453127"/>
+            <a:ext cx="1577340" cy="201168"/>
+          </a:xfrm>
+          <a:prstGeom prst="rect">
+            <a:avLst/>
+          </a:prstGeom>
+          <a:noFill/>
+        </p:spPr>
+        <p:txBody>
+          <a:bodyPr wrap="square" lIns="0" rIns="0" tIns="0" bIns="0" anchor="ctr">
+            <a:spAutoFit/>
+          </a:bodyPr>
+          <a:lstStyle/>
+          <a:p>
+            <a:r>
+              <a:rPr sz="700" b="1" i="0">
+                <a:solidFill>
+                  <a:srgbClr val="F2F2F2"/>
+                </a:solidFill>
+                <a:latin typeface="Trenda IG Text"/>
+              </a:rPr>
+              <a:t>a year today</a:t>
+            </a:r>
+          </a:p>
+        </p:txBody>
+      </p:sp>
+      <p:sp>
+        <p:nvSpPr>
+          <p:cNvPr id="60" name="Text 58"/>
+          <p:cNvSpPr txBox="1"/>
+          <p:nvPr/>
+        </p:nvSpPr>
+        <p:spPr>
+          <a:xfrm>
+            <a:off x="667512" y="4654296"/>
+            <a:ext cx="1577340" cy="201168"/>
+          </a:xfrm>
+          <a:prstGeom prst="rect">
+            <a:avLst/>
+          </a:prstGeom>
+          <a:noFill/>
+        </p:spPr>
+        <p:txBody>
+          <a:bodyPr wrap="square" lIns="0" rIns="0" tIns="0" bIns="0" anchor="ctr">
+            <a:spAutoFit/>
+          </a:bodyPr>
+          <a:lstStyle/>
+          <a:p>
+            <a:r>
+              <a:rPr sz="600" b="0" i="0">
+                <a:solidFill>
+                  <a:srgbClr val="B3B3B3"/>
+                </a:solidFill>
+                <a:latin typeface="Trenda IG Text"/>
+              </a:rPr>
+              <a:t>as provided by Ascension</a:t>
+            </a:r>
+          </a:p>
+        </p:txBody>
+      </p:sp>
+      <p:sp>
+        <p:nvSpPr>
+          <p:cNvPr id="61" name="Shape 59"/>
+          <p:cNvSpPr/>
+          <p:nvPr/>
+        </p:nvSpPr>
+        <p:spPr>
+          <a:xfrm>
+            <a:off x="2427732" y="3639312"/>
+            <a:ext cx="1796796" cy="1490472"/>
+          </a:xfrm>
+          <a:prstGeom prst="rect">
+            <a:avLst/>
+          </a:prstGeom>
+          <a:solidFill>
+            <a:srgbClr val="141414"/>
+          </a:solidFill>
+          <a:ln>
+            <a:noFill/>
+          </a:ln>
+          <a:effectLst/>
+        </p:spPr>
+        <p:style>
+          <a:lnRef idx="1">
+            <a:schemeClr val="accent1"/>
+          </a:lnRef>
+          <a:fillRef idx="3">
+            <a:schemeClr val="accent1"/>
+          </a:fillRef>
+          <a:effectRef idx="2">
+            <a:schemeClr val="accent1"/>
+          </a:effectRef>
+          <a:fontRef idx="minor">
+            <a:schemeClr val="lt1"/>
+          </a:fontRef>
+        </p:style>
+        <p:txBody>
+          <a:bodyPr rtlCol="0" anchor="ctr"/>
+          <a:lstStyle/>
+          <a:p/>
+        </p:txBody>
+      </p:sp>
+      <p:sp>
+        <p:nvSpPr>
+          <p:cNvPr id="62" name="Text 60"/>
+          <p:cNvSpPr txBox="1"/>
+          <p:nvPr/>
+        </p:nvSpPr>
+        <p:spPr>
+          <a:xfrm>
+            <a:off x="2555748" y="3977639"/>
+            <a:ext cx="1577340" cy="457200"/>
+          </a:xfrm>
+          <a:prstGeom prst="rect">
+            <a:avLst/>
+          </a:prstGeom>
+          <a:noFill/>
+        </p:spPr>
+        <p:txBody>
+          <a:bodyPr wrap="square" lIns="0" rIns="0" tIns="0" bIns="0" anchor="ctr">
+            <a:spAutoFit/>
+          </a:bodyPr>
+          <a:lstStyle/>
+          <a:p>
+            <a:r>
+              <a:rPr sz="2200" b="0" i="0">
+                <a:solidFill>
+                  <a:srgbClr val="F2F2F2"/>
+                </a:solidFill>
+                <a:latin typeface="Trenda IG Text"/>
+              </a:rPr>
+              <a:t>$7M</a:t>
+            </a:r>
+          </a:p>
+        </p:txBody>
+      </p:sp>
+      <p:sp>
+        <p:nvSpPr>
+          <p:cNvPr id="63" name="Text 61"/>
+          <p:cNvSpPr txBox="1"/>
+          <p:nvPr/>
+        </p:nvSpPr>
+        <p:spPr>
+          <a:xfrm>
+            <a:off x="2555748" y="4453127"/>
+            <a:ext cx="1577340" cy="201168"/>
+          </a:xfrm>
+          <a:prstGeom prst="rect">
+            <a:avLst/>
+          </a:prstGeom>
+          <a:noFill/>
+        </p:spPr>
+        <p:txBody>
+          <a:bodyPr wrap="square" lIns="0" rIns="0" tIns="0" bIns="0" anchor="ctr">
+            <a:spAutoFit/>
+          </a:bodyPr>
+          <a:lstStyle/>
+          <a:p>
+            <a:r>
+              <a:rPr sz="700" b="1" i="0">
+                <a:solidFill>
+                  <a:srgbClr val="F2F2F2"/>
+                </a:solidFill>
+                <a:latin typeface="Trenda IG Text"/>
+              </a:rPr>
+              <a:t>a year with the harness</a:t>
+            </a:r>
+          </a:p>
+        </p:txBody>
+      </p:sp>
+      <p:sp>
+        <p:nvSpPr>
+          <p:cNvPr id="64" name="Text 62"/>
+          <p:cNvSpPr txBox="1"/>
+          <p:nvPr/>
+        </p:nvSpPr>
+        <p:spPr>
+          <a:xfrm>
+            <a:off x="2555748" y="4654296"/>
+            <a:ext cx="1577340" cy="201168"/>
+          </a:xfrm>
+          <a:prstGeom prst="rect">
+            <a:avLst/>
+          </a:prstGeom>
+          <a:noFill/>
+        </p:spPr>
+        <p:txBody>
+          <a:bodyPr wrap="square" lIns="0" rIns="0" tIns="0" bIns="0" anchor="ctr">
+            <a:spAutoFit/>
+          </a:bodyPr>
+          <a:lstStyle/>
+          <a:p>
+            <a:r>
+              <a:rPr sz="600" b="0" i="0">
+                <a:solidFill>
+                  <a:srgbClr val="B3B3B3"/>
+                </a:solidFill>
+                <a:latin typeface="Trenda IG Text"/>
+              </a:rPr>
+              <a:t>agents and run team included</a:t>
+            </a:r>
+          </a:p>
+        </p:txBody>
+      </p:sp>
+      <p:sp>
+        <p:nvSpPr>
+          <p:cNvPr id="65" name="Differentiator Border 64"/>
+          <p:cNvSpPr/>
+          <p:nvPr/>
+        </p:nvSpPr>
+        <p:spPr>
+          <a:xfrm>
+            <a:off x="4315968" y="3639312"/>
+            <a:ext cx="1796796" cy="1490472"/>
+          </a:xfrm>
+          <a:prstGeom prst="rect">
+            <a:avLst/>
+          </a:prstGeom>
+          <a:gradFill rotWithShape="1">
+            <a:gsLst>
+              <a:gs pos="0">
+                <a:srgbClr val="FFD700"/>
+              </a:gs>
+              <a:gs pos="50000">
+                <a:srgbClr val="FF0069"/>
+              </a:gs>
+              <a:gs pos="100000">
+                <a:srgbClr val="00D6F2"/>
+              </a:gs>
+            </a:gsLst>
+            <a:lin ang="0" scaled="0"/>
+          </a:gradFill>
+          <a:ln>
+            <a:noFill/>
+          </a:ln>
+          <a:effectLst/>
+        </p:spPr>
+        <p:style>
+          <a:lnRef idx="1">
+            <a:schemeClr val="accent1"/>
+          </a:lnRef>
+          <a:fillRef idx="3">
+            <a:schemeClr val="accent1"/>
+          </a:fillRef>
+          <a:effectRef idx="2">
+            <a:schemeClr val="accent1"/>
+          </a:effectRef>
+          <a:fontRef idx="minor">
+            <a:schemeClr val="lt1"/>
+          </a:fontRef>
+        </p:style>
+        <p:txBody>
+          <a:bodyPr rtlCol="0" anchor="ctr"/>
+          <a:lstStyle/>
+          <a:p/>
+        </p:txBody>
+      </p:sp>
+      <p:sp>
+        <p:nvSpPr>
+          <p:cNvPr id="66" name="Shape 65"/>
+          <p:cNvSpPr/>
+          <p:nvPr/>
+        </p:nvSpPr>
+        <p:spPr>
+          <a:xfrm>
+            <a:off x="4334255" y="3657600"/>
+            <a:ext cx="1760220" cy="1453895"/>
+          </a:xfrm>
+          <a:prstGeom prst="rect">
+            <a:avLst/>
+          </a:prstGeom>
+          <a:solidFill>
+            <a:srgbClr val="141414"/>
+          </a:solidFill>
+          <a:ln>
+            <a:noFill/>
+          </a:ln>
+          <a:effectLst/>
+        </p:spPr>
+        <p:style>
+          <a:lnRef idx="1">
+            <a:schemeClr val="accent1"/>
+          </a:lnRef>
+          <a:fillRef idx="3">
+            <a:schemeClr val="accent1"/>
+          </a:fillRef>
+          <a:effectRef idx="2">
+            <a:schemeClr val="accent1"/>
+          </a:effectRef>
+          <a:fontRef idx="minor">
+            <a:schemeClr val="lt1"/>
+          </a:fontRef>
+        </p:style>
+        <p:txBody>
+          <a:bodyPr rtlCol="0" anchor="ctr"/>
+          <a:lstStyle/>
+          <a:p/>
+        </p:txBody>
+      </p:sp>
+      <p:sp>
+        <p:nvSpPr>
+          <p:cNvPr id="67" name="Text 66"/>
+          <p:cNvSpPr txBox="1"/>
+          <p:nvPr/>
+        </p:nvSpPr>
+        <p:spPr>
+          <a:xfrm>
+            <a:off x="4443983" y="3977639"/>
+            <a:ext cx="1577340" cy="457200"/>
+          </a:xfrm>
+          <a:prstGeom prst="rect">
+            <a:avLst/>
+          </a:prstGeom>
+          <a:noFill/>
+        </p:spPr>
+        <p:txBody>
+          <a:bodyPr wrap="square" lIns="0" rIns="0" tIns="0" bIns="0" anchor="ctr">
+            <a:spAutoFit/>
+          </a:bodyPr>
+          <a:lstStyle/>
+          <a:p>
+            <a:r>
+              <a:rPr sz="2200" b="0" i="0">
+                <a:solidFill>
+                  <a:srgbClr val="00D6F2"/>
+                </a:solidFill>
+                <a:latin typeface="Trenda IG Text"/>
+              </a:rPr>
+              <a:t>$9M</a:t>
+            </a:r>
+          </a:p>
+        </p:txBody>
+      </p:sp>
+      <p:sp>
+        <p:nvSpPr>
+          <p:cNvPr id="68" name="Text 67"/>
+          <p:cNvSpPr txBox="1"/>
+          <p:nvPr/>
+        </p:nvSpPr>
+        <p:spPr>
+          <a:xfrm>
+            <a:off x="4443983" y="4453127"/>
+            <a:ext cx="1577340" cy="201168"/>
+          </a:xfrm>
+          <a:prstGeom prst="rect">
+            <a:avLst/>
+          </a:prstGeom>
+          <a:noFill/>
+        </p:spPr>
+        <p:txBody>
+          <a:bodyPr wrap="square" lIns="0" rIns="0" tIns="0" bIns="0" anchor="ctr">
+            <a:spAutoFit/>
+          </a:bodyPr>
+          <a:lstStyle/>
+          <a:p>
+            <a:r>
+              <a:rPr sz="700" b="1" i="0">
+                <a:solidFill>
+                  <a:srgbClr val="F2F2F2"/>
+                </a:solidFill>
+                <a:latin typeface="Trenda IG Text"/>
+              </a:rPr>
+              <a:t>saved every year</a:t>
+            </a:r>
+          </a:p>
+        </p:txBody>
+      </p:sp>
+      <p:sp>
+        <p:nvSpPr>
+          <p:cNvPr id="69" name="Text 68"/>
+          <p:cNvSpPr txBox="1"/>
+          <p:nvPr/>
+        </p:nvSpPr>
+        <p:spPr>
+          <a:xfrm>
+            <a:off x="4443983" y="4654296"/>
+            <a:ext cx="1577340" cy="201168"/>
+          </a:xfrm>
+          <a:prstGeom prst="rect">
+            <a:avLst/>
+          </a:prstGeom>
+          <a:noFill/>
+        </p:spPr>
+        <p:txBody>
+          <a:bodyPr wrap="square" lIns="0" rIns="0" tIns="0" bIns="0" anchor="ctr">
+            <a:spAutoFit/>
+          </a:bodyPr>
+          <a:lstStyle/>
+          <a:p>
+            <a:r>
+              <a:rPr sz="600" b="0" i="0">
+                <a:solidFill>
+                  <a:srgbClr val="B3B3B3"/>
+                </a:solidFill>
+                <a:latin typeface="Trenda IG Text"/>
+              </a:rPr>
+              <a:t>from go-live</a:t>
+            </a:r>
+          </a:p>
+        </p:txBody>
+      </p:sp>
+      <p:sp>
+        <p:nvSpPr>
+          <p:cNvPr id="70" name="Shape 69"/>
+          <p:cNvSpPr/>
+          <p:nvPr/>
+        </p:nvSpPr>
+        <p:spPr>
+          <a:xfrm>
+            <a:off x="6204204" y="3639312"/>
+            <a:ext cx="1796796" cy="1490472"/>
+          </a:xfrm>
+          <a:prstGeom prst="rect">
+            <a:avLst/>
+          </a:prstGeom>
+          <a:solidFill>
+            <a:srgbClr val="141414"/>
+          </a:solidFill>
+          <a:ln>
+            <a:noFill/>
+          </a:ln>
+          <a:effectLst/>
+        </p:spPr>
+        <p:style>
+          <a:lnRef idx="1">
+            <a:schemeClr val="accent1"/>
+          </a:lnRef>
+          <a:fillRef idx="3">
+            <a:schemeClr val="accent1"/>
+          </a:fillRef>
+          <a:effectRef idx="2">
+            <a:schemeClr val="accent1"/>
+          </a:effectRef>
+          <a:fontRef idx="minor">
+            <a:schemeClr val="lt1"/>
+          </a:fontRef>
+        </p:style>
+        <p:txBody>
+          <a:bodyPr rtlCol="0" anchor="ctr"/>
+          <a:lstStyle/>
+          <a:p/>
+        </p:txBody>
+      </p:sp>
+      <p:sp>
+        <p:nvSpPr>
+          <p:cNvPr id="71" name="Text 70"/>
+          <p:cNvSpPr txBox="1"/>
+          <p:nvPr/>
+        </p:nvSpPr>
+        <p:spPr>
+          <a:xfrm>
+            <a:off x="6332220" y="3977639"/>
+            <a:ext cx="1577340" cy="457200"/>
+          </a:xfrm>
+          <a:prstGeom prst="rect">
+            <a:avLst/>
+          </a:prstGeom>
+          <a:noFill/>
+        </p:spPr>
+        <p:txBody>
+          <a:bodyPr wrap="square" lIns="0" rIns="0" tIns="0" bIns="0" anchor="ctr">
+            <a:spAutoFit/>
+          </a:bodyPr>
+          <a:lstStyle/>
+          <a:p>
+            <a:r>
+              <a:rPr sz="2200" b="0" i="0">
+                <a:solidFill>
+                  <a:srgbClr val="F2F2F2"/>
+                </a:solidFill>
+                <a:latin typeface="Trenda IG Text"/>
+              </a:rPr>
+              <a:t>$5.0M</a:t>
+            </a:r>
+          </a:p>
+        </p:txBody>
+      </p:sp>
+      <p:sp>
+        <p:nvSpPr>
+          <p:cNvPr id="72" name="Text 71"/>
+          <p:cNvSpPr txBox="1"/>
+          <p:nvPr/>
+        </p:nvSpPr>
+        <p:spPr>
+          <a:xfrm>
+            <a:off x="6332220" y="4453127"/>
+            <a:ext cx="1577340" cy="201168"/>
+          </a:xfrm>
+          <a:prstGeom prst="rect">
+            <a:avLst/>
+          </a:prstGeom>
+          <a:noFill/>
+        </p:spPr>
+        <p:txBody>
+          <a:bodyPr wrap="square" lIns="0" rIns="0" tIns="0" bIns="0" anchor="ctr">
+            <a:spAutoFit/>
+          </a:bodyPr>
+          <a:lstStyle/>
+          <a:p>
+            <a:r>
+              <a:rPr sz="700" b="1" i="0">
+                <a:solidFill>
+                  <a:srgbClr val="F2F2F2"/>
+                </a:solidFill>
+                <a:latin typeface="Trenda IG Text"/>
+              </a:rPr>
+              <a:t>invested once</a:t>
+            </a:r>
+          </a:p>
+        </p:txBody>
+      </p:sp>
+      <p:sp>
+        <p:nvSpPr>
+          <p:cNvPr id="73" name="Text 72"/>
+          <p:cNvSpPr txBox="1"/>
+          <p:nvPr/>
+        </p:nvSpPr>
+        <p:spPr>
+          <a:xfrm>
+            <a:off x="6332220" y="4654296"/>
+            <a:ext cx="1577340" cy="201168"/>
+          </a:xfrm>
+          <a:prstGeom prst="rect">
+            <a:avLst/>
+          </a:prstGeom>
+          <a:noFill/>
+        </p:spPr>
+        <p:txBody>
+          <a:bodyPr wrap="square" lIns="0" rIns="0" tIns="0" bIns="0" anchor="ctr">
+            <a:spAutoFit/>
+          </a:bodyPr>
+          <a:lstStyle/>
+          <a:p>
+            <a:r>
+              <a:rPr sz="600" b="0" i="0">
+                <a:solidFill>
+                  <a:srgbClr val="B3B3B3"/>
+                </a:solidFill>
+                <a:latin typeface="Trenda IG Text"/>
+              </a:rPr>
+              <a:t>$4.79M build + $0.23M usage</a:t>
+            </a:r>
+          </a:p>
+        </p:txBody>
+      </p:sp>
+      <p:sp>
+        <p:nvSpPr>
+          <p:cNvPr id="74" name="Shape 73"/>
+          <p:cNvSpPr/>
+          <p:nvPr/>
+        </p:nvSpPr>
+        <p:spPr>
+          <a:xfrm>
+            <a:off x="8220456" y="3639312"/>
+            <a:ext cx="3429000" cy="699515"/>
+          </a:xfrm>
+          <a:prstGeom prst="rect">
+            <a:avLst/>
+          </a:prstGeom>
+          <a:solidFill>
+            <a:srgbClr val="141414"/>
+          </a:solidFill>
+          <a:ln>
+            <a:noFill/>
+          </a:ln>
+          <a:effectLst/>
+        </p:spPr>
+        <p:style>
+          <a:lnRef idx="1">
+            <a:schemeClr val="accent1"/>
+          </a:lnRef>
+          <a:fillRef idx="3">
+            <a:schemeClr val="accent1"/>
+          </a:fillRef>
+          <a:effectRef idx="2">
+            <a:schemeClr val="accent1"/>
+          </a:effectRef>
+          <a:fontRef idx="minor">
+            <a:schemeClr val="lt1"/>
+          </a:fontRef>
+        </p:style>
+        <p:txBody>
+          <a:bodyPr rtlCol="0" anchor="ctr"/>
+          <a:lstStyle/>
+          <a:p/>
+        </p:txBody>
+      </p:sp>
+      <p:sp>
+        <p:nvSpPr>
+          <p:cNvPr id="75" name="Shape 74"/>
+          <p:cNvSpPr/>
+          <p:nvPr/>
+        </p:nvSpPr>
+        <p:spPr>
+          <a:xfrm>
+            <a:off x="8220456" y="3639312"/>
+            <a:ext cx="45720" cy="699515"/>
+          </a:xfrm>
+          <a:prstGeom prst="rect">
+            <a:avLst/>
+          </a:prstGeom>
+          <a:gradFill rotWithShape="1">
+            <a:gsLst>
+              <a:gs pos="0">
+                <a:srgbClr val="FFD700"/>
+              </a:gs>
+              <a:gs pos="50000">
+                <a:srgbClr val="FF0069"/>
+              </a:gs>
+              <a:gs pos="100000">
+                <a:srgbClr val="00D6F2"/>
+              </a:gs>
+            </a:gsLst>
+            <a:lin ang="5400000" scaled="0"/>
+          </a:gradFill>
+          <a:ln>
+            <a:noFill/>
+          </a:ln>
+          <a:effectLst/>
+        </p:spPr>
+        <p:style>
+          <a:lnRef idx="1">
+            <a:schemeClr val="accent1"/>
+          </a:lnRef>
+          <a:fillRef idx="3">
+            <a:schemeClr val="accent1"/>
+          </a:fillRef>
+          <a:effectRef idx="2">
+            <a:schemeClr val="accent1"/>
+          </a:effectRef>
+          <a:fontRef idx="minor">
+            <a:schemeClr val="lt1"/>
+          </a:fontRef>
+        </p:style>
+        <p:txBody>
+          <a:bodyPr rtlCol="0" anchor="ctr"/>
+          <a:lstStyle/>
+          <a:p/>
+        </p:txBody>
+      </p:sp>
+      <p:sp>
+        <p:nvSpPr>
+          <p:cNvPr id="76" name="Text 75"/>
+          <p:cNvSpPr txBox="1"/>
+          <p:nvPr/>
+        </p:nvSpPr>
+        <p:spPr>
+          <a:xfrm>
+            <a:off x="8385048" y="3639312"/>
+            <a:ext cx="3191256" cy="699515"/>
+          </a:xfrm>
+          <a:prstGeom prst="rect">
+            <a:avLst/>
+          </a:prstGeom>
+          <a:noFill/>
+        </p:spPr>
+        <p:txBody>
+          <a:bodyPr wrap="square" lIns="0" rIns="0" tIns="0" bIns="0" anchor="ctr">
+            <a:spAutoFit/>
+          </a:bodyPr>
+          <a:lstStyle/>
+          <a:p>
+            <a:pPr>
+              <a:spcAft>
+                <a:spcPts val="200"/>
+              </a:spcAft>
+            </a:pPr>
+            <a:r>
+              <a:rPr sz="800" b="1" i="0">
+                <a:solidFill>
+                  <a:srgbClr val="00D6F2"/>
+                </a:solidFill>
+                <a:latin typeface="Trenda IG Text"/>
+              </a:rPr>
+              <a:t>Paid back in under 7 months</a:t>
+            </a:r>
+          </a:p>
+          <a:p>
+            <a:pPr>
+              <a:spcAft>
+                <a:spcPts val="200"/>
+              </a:spcAft>
+            </a:pPr>
+            <a:r>
+              <a:rPr sz="640" b="0" i="0">
+                <a:solidFill>
+                  <a:srgbClr val="B3B3B3"/>
+                </a:solidFill>
+                <a:latin typeface="Trenda IG Text"/>
+              </a:rPr>
+              <a:t>80% first-year return; 1.8x the investment back in year one</a:t>
+            </a:r>
+          </a:p>
+        </p:txBody>
+      </p:sp>
+      <p:sp>
+        <p:nvSpPr>
+          <p:cNvPr id="77" name="Shape 76"/>
+          <p:cNvSpPr/>
+          <p:nvPr/>
+        </p:nvSpPr>
+        <p:spPr>
+          <a:xfrm>
+            <a:off x="8220456" y="4430268"/>
+            <a:ext cx="3429000" cy="699515"/>
+          </a:xfrm>
+          <a:prstGeom prst="rect">
+            <a:avLst/>
+          </a:prstGeom>
+          <a:solidFill>
+            <a:srgbClr val="141414"/>
+          </a:solidFill>
+          <a:ln>
+            <a:noFill/>
+          </a:ln>
+          <a:effectLst/>
+        </p:spPr>
+        <p:style>
+          <a:lnRef idx="1">
+            <a:schemeClr val="accent1"/>
+          </a:lnRef>
+          <a:fillRef idx="3">
+            <a:schemeClr val="accent1"/>
+          </a:fillRef>
+          <a:effectRef idx="2">
+            <a:schemeClr val="accent1"/>
+          </a:effectRef>
+          <a:fontRef idx="minor">
+            <a:schemeClr val="lt1"/>
+          </a:fontRef>
+        </p:style>
+        <p:txBody>
+          <a:bodyPr rtlCol="0" anchor="ctr"/>
+          <a:lstStyle/>
+          <a:p/>
+        </p:txBody>
+      </p:sp>
+      <p:sp>
+        <p:nvSpPr>
+          <p:cNvPr id="78" name="Shape 77"/>
+          <p:cNvSpPr/>
+          <p:nvPr/>
+        </p:nvSpPr>
+        <p:spPr>
+          <a:xfrm>
+            <a:off x="8220456" y="4430268"/>
+            <a:ext cx="45720" cy="699515"/>
+          </a:xfrm>
+          <a:prstGeom prst="rect">
+            <a:avLst/>
+          </a:prstGeom>
+          <a:gradFill rotWithShape="1">
+            <a:gsLst>
+              <a:gs pos="0">
+                <a:srgbClr val="FFD700"/>
+              </a:gs>
+              <a:gs pos="50000">
+                <a:srgbClr val="FF0069"/>
+              </a:gs>
+              <a:gs pos="100000">
+                <a:srgbClr val="00D6F2"/>
+              </a:gs>
+            </a:gsLst>
+            <a:lin ang="5400000" scaled="0"/>
+          </a:gradFill>
+          <a:ln>
+            <a:noFill/>
+          </a:ln>
+          <a:effectLst/>
+        </p:spPr>
+        <p:style>
+          <a:lnRef idx="1">
+            <a:schemeClr val="accent1"/>
+          </a:lnRef>
+          <a:fillRef idx="3">
+            <a:schemeClr val="accent1"/>
+          </a:fillRef>
+          <a:effectRef idx="2">
+            <a:schemeClr val="accent1"/>
+          </a:effectRef>
+          <a:fontRef idx="minor">
+            <a:schemeClr val="lt1"/>
+          </a:fontRef>
+        </p:style>
+        <p:txBody>
+          <a:bodyPr rtlCol="0" anchor="ctr"/>
+          <a:lstStyle/>
+          <a:p/>
+        </p:txBody>
+      </p:sp>
+      <p:sp>
+        <p:nvSpPr>
+          <p:cNvPr id="79" name="Text 78"/>
+          <p:cNvSpPr txBox="1"/>
+          <p:nvPr/>
+        </p:nvSpPr>
+        <p:spPr>
+          <a:xfrm>
+            <a:off x="8385048" y="4430268"/>
+            <a:ext cx="3191256" cy="699515"/>
+          </a:xfrm>
+          <a:prstGeom prst="rect">
+            <a:avLst/>
+          </a:prstGeom>
+          <a:noFill/>
+        </p:spPr>
+        <p:txBody>
+          <a:bodyPr wrap="square" lIns="0" rIns="0" tIns="0" bIns="0" anchor="ctr">
+            <a:spAutoFit/>
+          </a:bodyPr>
+          <a:lstStyle/>
+          <a:p>
+            <a:pPr>
+              <a:spcAft>
+                <a:spcPts val="200"/>
+              </a:spcAft>
+            </a:pPr>
+            <a:r>
+              <a:rPr sz="800" b="1" i="0">
+                <a:solidFill>
+                  <a:srgbClr val="FFD700"/>
+                </a:solidFill>
+                <a:latin typeface="Trenda IG Text"/>
+              </a:rPr>
+              <a:t>Floor we commit to</a:t>
+            </a:r>
+          </a:p>
+          <a:p>
+            <a:pPr>
+              <a:spcAft>
+                <a:spcPts val="200"/>
+              </a:spcAft>
+            </a:pPr>
+            <a:r>
+              <a:rPr sz="640" b="0" i="0">
+                <a:solidFill>
+                  <a:srgbClr val="B3B3B3"/>
+                </a:solidFill>
+                <a:latin typeface="Trenda IG Text"/>
+              </a:rPr>
+              <a:t>20-25% lower net run cost per pod, against its own baseline</a:t>
+            </a:r>
+          </a:p>
+        </p:txBody>
+      </p:sp>
+      <p:sp>
+        <p:nvSpPr>
+          <p:cNvPr id="80" name="Text 79"/>
+          <p:cNvSpPr txBox="1"/>
+          <p:nvPr/>
+        </p:nvSpPr>
+        <p:spPr>
+          <a:xfrm>
+            <a:off x="411480" y="5394960"/>
+            <a:ext cx="1188720" cy="640080"/>
+          </a:xfrm>
+          <a:prstGeom prst="rect">
+            <a:avLst/>
+          </a:prstGeom>
+          <a:noFill/>
+        </p:spPr>
+        <p:txBody>
+          <a:bodyPr wrap="square" lIns="0" rIns="0" tIns="0" bIns="0" anchor="ctr">
+            <a:spAutoFit/>
+          </a:bodyPr>
+          <a:lstStyle/>
+          <a:p>
+            <a:pPr>
+              <a:spcAft>
+                <a:spcPts val="100"/>
+              </a:spcAft>
+            </a:pPr>
+            <a:r>
+              <a:rPr sz="640" b="1" i="0" spc="120">
+                <a:solidFill>
+                  <a:srgbClr val="F2F2F2"/>
+                </a:solidFill>
+                <a:latin typeface="Trenda IG Text"/>
+              </a:rPr>
+              <a:t>KEEP IT HONEST</a:t>
+            </a:r>
+          </a:p>
+          <a:p>
+            <a:pPr>
+              <a:spcAft>
+                <a:spcPts val="100"/>
+              </a:spcAft>
+            </a:pPr>
+            <a:r>
+              <a:rPr sz="520" b="0" i="0">
+                <a:solidFill>
+                  <a:srgbClr val="8C8C8C"/>
+                </a:solidFill>
+                <a:latin typeface="Trenda IG Text"/>
+              </a:rPr>
+              <a:t>how the numbers hold</a:t>
+            </a:r>
+          </a:p>
+        </p:txBody>
+      </p:sp>
+      <p:sp>
+        <p:nvSpPr>
+          <p:cNvPr id="81" name="Shape 80"/>
+          <p:cNvSpPr/>
+          <p:nvPr/>
+        </p:nvSpPr>
+        <p:spPr>
+          <a:xfrm>
+            <a:off x="1645920" y="5394960"/>
+            <a:ext cx="2464308" cy="640080"/>
+          </a:xfrm>
+          <a:prstGeom prst="rect">
+            <a:avLst/>
+          </a:prstGeom>
+          <a:solidFill>
+            <a:srgbClr val="141414"/>
+          </a:solidFill>
+          <a:ln>
+            <a:noFill/>
+          </a:ln>
+          <a:effectLst/>
+        </p:spPr>
+        <p:style>
+          <a:lnRef idx="1">
+            <a:schemeClr val="accent1"/>
+          </a:lnRef>
+          <a:fillRef idx="3">
+            <a:schemeClr val="accent1"/>
+          </a:fillRef>
+          <a:effectRef idx="2">
+            <a:schemeClr val="accent1"/>
+          </a:effectRef>
+          <a:fontRef idx="minor">
+            <a:schemeClr val="lt1"/>
+          </a:fontRef>
+        </p:style>
+        <p:txBody>
+          <a:bodyPr rtlCol="0" anchor="ctr"/>
+          <a:lstStyle/>
+          <a:p/>
+        </p:txBody>
+      </p:sp>
+      <p:sp>
+        <p:nvSpPr>
+          <p:cNvPr id="82" name="Shape 81"/>
+          <p:cNvSpPr/>
+          <p:nvPr/>
+        </p:nvSpPr>
+        <p:spPr>
+          <a:xfrm>
+            <a:off x="1645920" y="5394960"/>
+            <a:ext cx="36576" cy="640080"/>
+          </a:xfrm>
+          <a:prstGeom prst="rect">
+            <a:avLst/>
+          </a:prstGeom>
+          <a:solidFill>
+            <a:srgbClr val="00D6F2"/>
+          </a:solidFill>
+          <a:ln>
+            <a:noFill/>
+          </a:ln>
+          <a:effectLst/>
+        </p:spPr>
+        <p:style>
+          <a:lnRef idx="1">
+            <a:schemeClr val="accent1"/>
+          </a:lnRef>
+          <a:fillRef idx="3">
+            <a:schemeClr val="accent1"/>
+          </a:fillRef>
+          <a:effectRef idx="2">
+            <a:schemeClr val="accent1"/>
+          </a:effectRef>
+          <a:fontRef idx="minor">
+            <a:schemeClr val="lt1"/>
+          </a:fontRef>
+        </p:style>
+        <p:txBody>
+          <a:bodyPr rtlCol="0" anchor="ctr"/>
+          <a:lstStyle/>
+          <a:p/>
+        </p:txBody>
+      </p:sp>
+      <p:sp>
+        <p:nvSpPr>
+          <p:cNvPr id="83" name="Text 82"/>
+          <p:cNvSpPr txBox="1"/>
+          <p:nvPr/>
+        </p:nvSpPr>
+        <p:spPr>
+          <a:xfrm>
+            <a:off x="1773936" y="5394960"/>
+            <a:ext cx="2281427" cy="640080"/>
+          </a:xfrm>
+          <a:prstGeom prst="rect">
+            <a:avLst/>
+          </a:prstGeom>
+          <a:noFill/>
+        </p:spPr>
+        <p:txBody>
+          <a:bodyPr wrap="square" lIns="0" rIns="0" tIns="0" bIns="0" anchor="ctr">
+            <a:spAutoFit/>
+          </a:bodyPr>
+          <a:lstStyle/>
+          <a:p>
+            <a:pPr>
+              <a:spcAft>
+                <a:spcPts val="100"/>
+              </a:spcAft>
+            </a:pPr>
+            <a:r>
+              <a:rPr sz="700" b="1" i="0">
+                <a:solidFill>
+                  <a:srgbClr val="F2F2F2"/>
+                </a:solidFill>
+                <a:latin typeface="Trenda IG Text"/>
+              </a:rPr>
+              <a:t>Baseline every pod first</a:t>
+            </a:r>
+          </a:p>
+          <a:p>
+            <a:pPr>
+              <a:spcAft>
+                <a:spcPts val="100"/>
+              </a:spcAft>
+            </a:pPr>
+            <a:r>
+              <a:rPr sz="600" b="0" i="0">
+                <a:solidFill>
+                  <a:srgbClr val="B3B3B3"/>
+                </a:solidFill>
+                <a:latin typeface="Trenda IG Text"/>
+              </a:rPr>
+              <a:t>savings counted against each pod's own numbers</a:t>
+            </a:r>
+          </a:p>
+        </p:txBody>
+      </p:sp>
+      <p:sp>
+        <p:nvSpPr>
+          <p:cNvPr id="84" name="Shape 83"/>
+          <p:cNvSpPr/>
+          <p:nvPr/>
+        </p:nvSpPr>
+        <p:spPr>
+          <a:xfrm>
+            <a:off x="4201668" y="5394960"/>
+            <a:ext cx="2464308" cy="640080"/>
+          </a:xfrm>
+          <a:prstGeom prst="rect">
+            <a:avLst/>
+          </a:prstGeom>
+          <a:solidFill>
+            <a:srgbClr val="141414"/>
+          </a:solidFill>
+          <a:ln>
+            <a:noFill/>
+          </a:ln>
+          <a:effectLst/>
+        </p:spPr>
+        <p:style>
+          <a:lnRef idx="1">
+            <a:schemeClr val="accent1"/>
+          </a:lnRef>
+          <a:fillRef idx="3">
+            <a:schemeClr val="accent1"/>
+          </a:fillRef>
+          <a:effectRef idx="2">
+            <a:schemeClr val="accent1"/>
+          </a:effectRef>
+          <a:fontRef idx="minor">
+            <a:schemeClr val="lt1"/>
+          </a:fontRef>
+        </p:style>
+        <p:txBody>
+          <a:bodyPr rtlCol="0" anchor="ctr"/>
+          <a:lstStyle/>
+          <a:p/>
+        </p:txBody>
+      </p:sp>
+      <p:sp>
+        <p:nvSpPr>
+          <p:cNvPr id="85" name="Shape 84"/>
+          <p:cNvSpPr/>
+          <p:nvPr/>
+        </p:nvSpPr>
+        <p:spPr>
+          <a:xfrm>
+            <a:off x="4201668" y="5394960"/>
+            <a:ext cx="36576" cy="640080"/>
+          </a:xfrm>
+          <a:prstGeom prst="rect">
+            <a:avLst/>
+          </a:prstGeom>
+          <a:solidFill>
+            <a:srgbClr val="00D6F2"/>
+          </a:solidFill>
+          <a:ln>
+            <a:noFill/>
+          </a:ln>
+          <a:effectLst/>
+        </p:spPr>
+        <p:style>
+          <a:lnRef idx="1">
+            <a:schemeClr val="accent1"/>
+          </a:lnRef>
+          <a:fillRef idx="3">
+            <a:schemeClr val="accent1"/>
+          </a:fillRef>
+          <a:effectRef idx="2">
+            <a:schemeClr val="accent1"/>
+          </a:effectRef>
+          <a:fontRef idx="minor">
+            <a:schemeClr val="lt1"/>
+          </a:fontRef>
+        </p:style>
+        <p:txBody>
+          <a:bodyPr rtlCol="0" anchor="ctr"/>
+          <a:lstStyle/>
+          <a:p/>
+        </p:txBody>
+      </p:sp>
+      <p:sp>
+        <p:nvSpPr>
+          <p:cNvPr id="86" name="Text 85"/>
+          <p:cNvSpPr txBox="1"/>
+          <p:nvPr/>
+        </p:nvSpPr>
+        <p:spPr>
+          <a:xfrm>
+            <a:off x="4329683" y="5394960"/>
+            <a:ext cx="2281427" cy="640080"/>
+          </a:xfrm>
+          <a:prstGeom prst="rect">
+            <a:avLst/>
+          </a:prstGeom>
+          <a:noFill/>
+        </p:spPr>
+        <p:txBody>
+          <a:bodyPr wrap="square" lIns="0" rIns="0" tIns="0" bIns="0" anchor="ctr">
+            <a:spAutoFit/>
+          </a:bodyPr>
+          <a:lstStyle/>
+          <a:p>
+            <a:pPr>
+              <a:spcAft>
+                <a:spcPts val="100"/>
+              </a:spcAft>
+            </a:pPr>
+            <a:r>
+              <a:rPr sz="700" b="1" i="0">
+                <a:solidFill>
+                  <a:srgbClr val="F2F2F2"/>
+                </a:solidFill>
+                <a:latin typeface="Trenda IG Text"/>
+              </a:rPr>
+              <a:t>Year 1 at 60-70%</a:t>
+            </a:r>
+          </a:p>
+          <a:p>
+            <a:pPr>
+              <a:spcAft>
+                <a:spcPts val="100"/>
+              </a:spcAft>
+            </a:pPr>
+            <a:r>
+              <a:rPr sz="600" b="0" i="0">
+                <a:solidFill>
+                  <a:srgbClr val="B3B3B3"/>
+                </a:solidFill>
+                <a:latin typeface="Trenda IG Text"/>
+              </a:rPr>
+              <a:t>of steady state while pods onboard</a:t>
+            </a:r>
+          </a:p>
+        </p:txBody>
+      </p:sp>
+      <p:sp>
+        <p:nvSpPr>
+          <p:cNvPr id="87" name="Shape 86"/>
+          <p:cNvSpPr/>
+          <p:nvPr/>
+        </p:nvSpPr>
+        <p:spPr>
+          <a:xfrm>
+            <a:off x="6757416" y="5394960"/>
+            <a:ext cx="2464308" cy="640080"/>
+          </a:xfrm>
+          <a:prstGeom prst="rect">
+            <a:avLst/>
+          </a:prstGeom>
+          <a:solidFill>
+            <a:srgbClr val="141414"/>
+          </a:solidFill>
+          <a:ln>
+            <a:noFill/>
+          </a:ln>
+          <a:effectLst/>
+        </p:spPr>
+        <p:style>
+          <a:lnRef idx="1">
+            <a:schemeClr val="accent1"/>
+          </a:lnRef>
+          <a:fillRef idx="3">
+            <a:schemeClr val="accent1"/>
+          </a:fillRef>
+          <a:effectRef idx="2">
+            <a:schemeClr val="accent1"/>
+          </a:effectRef>
+          <a:fontRef idx="minor">
+            <a:schemeClr val="lt1"/>
+          </a:fontRef>
+        </p:style>
+        <p:txBody>
+          <a:bodyPr rtlCol="0" anchor="ctr"/>
+          <a:lstStyle/>
+          <a:p/>
+        </p:txBody>
+      </p:sp>
+      <p:sp>
+        <p:nvSpPr>
+          <p:cNvPr id="88" name="Shape 87"/>
+          <p:cNvSpPr/>
+          <p:nvPr/>
+        </p:nvSpPr>
+        <p:spPr>
+          <a:xfrm>
+            <a:off x="6757416" y="5394960"/>
+            <a:ext cx="36576" cy="640080"/>
+          </a:xfrm>
+          <a:prstGeom prst="rect">
+            <a:avLst/>
+          </a:prstGeom>
+          <a:solidFill>
+            <a:srgbClr val="00D6F2"/>
+          </a:solidFill>
+          <a:ln>
+            <a:noFill/>
+          </a:ln>
+          <a:effectLst/>
+        </p:spPr>
+        <p:style>
+          <a:lnRef idx="1">
+            <a:schemeClr val="accent1"/>
+          </a:lnRef>
+          <a:fillRef idx="3">
+            <a:schemeClr val="accent1"/>
+          </a:fillRef>
+          <a:effectRef idx="2">
+            <a:schemeClr val="accent1"/>
+          </a:effectRef>
+          <a:fontRef idx="minor">
+            <a:schemeClr val="lt1"/>
+          </a:fontRef>
+        </p:style>
+        <p:txBody>
+          <a:bodyPr rtlCol="0" anchor="ctr"/>
+          <a:lstStyle/>
+          <a:p/>
+        </p:txBody>
+      </p:sp>
+      <p:sp>
+        <p:nvSpPr>
+          <p:cNvPr id="89" name="Text 88"/>
+          <p:cNvSpPr txBox="1"/>
+          <p:nvPr/>
+        </p:nvSpPr>
+        <p:spPr>
+          <a:xfrm>
+            <a:off x="6885431" y="5394960"/>
+            <a:ext cx="2281427" cy="640080"/>
+          </a:xfrm>
+          <a:prstGeom prst="rect">
+            <a:avLst/>
+          </a:prstGeom>
+          <a:noFill/>
+        </p:spPr>
+        <p:txBody>
+          <a:bodyPr wrap="square" lIns="0" rIns="0" tIns="0" bIns="0" anchor="ctr">
+            <a:spAutoFit/>
+          </a:bodyPr>
+          <a:lstStyle/>
+          <a:p>
+            <a:pPr>
+              <a:spcAft>
+                <a:spcPts val="100"/>
+              </a:spcAft>
+            </a:pPr>
+            <a:r>
+              <a:rPr sz="700" b="1" i="0">
+                <a:solidFill>
+                  <a:srgbClr val="F2F2F2"/>
+                </a:solidFill>
+                <a:latin typeface="Trenda IG Text"/>
+              </a:rPr>
+              <a:t>Approvals stay human</a:t>
+            </a:r>
+          </a:p>
+          <a:p>
+            <a:pPr>
+              <a:spcAft>
+                <a:spcPts val="100"/>
+              </a:spcAft>
+            </a:pPr>
+            <a:r>
+              <a:rPr sz="600" b="0" i="0">
+                <a:solidFill>
+                  <a:srgbClr val="B3B3B3"/>
+                </a:solidFill>
+                <a:latin typeface="Trenda IG Text"/>
+              </a:rPr>
+              <a:t>UAT and CAB take the same time</a:t>
+            </a:r>
+          </a:p>
+        </p:txBody>
+      </p:sp>
+      <p:sp>
+        <p:nvSpPr>
+          <p:cNvPr id="90" name="Shape 89"/>
+          <p:cNvSpPr/>
+          <p:nvPr/>
+        </p:nvSpPr>
+        <p:spPr>
+          <a:xfrm>
+            <a:off x="9313164" y="5394960"/>
+            <a:ext cx="2464308" cy="640080"/>
+          </a:xfrm>
+          <a:prstGeom prst="rect">
+            <a:avLst/>
+          </a:prstGeom>
+          <a:solidFill>
+            <a:srgbClr val="141414"/>
+          </a:solidFill>
+          <a:ln>
+            <a:noFill/>
+          </a:ln>
+          <a:effectLst/>
+        </p:spPr>
+        <p:style>
+          <a:lnRef idx="1">
+            <a:schemeClr val="accent1"/>
+          </a:lnRef>
+          <a:fillRef idx="3">
+            <a:schemeClr val="accent1"/>
+          </a:fillRef>
+          <a:effectRef idx="2">
+            <a:schemeClr val="accent1"/>
+          </a:effectRef>
+          <a:fontRef idx="minor">
+            <a:schemeClr val="lt1"/>
+          </a:fontRef>
+        </p:style>
+        <p:txBody>
+          <a:bodyPr rtlCol="0" anchor="ctr"/>
+          <a:lstStyle/>
+          <a:p/>
+        </p:txBody>
+      </p:sp>
+      <p:sp>
+        <p:nvSpPr>
+          <p:cNvPr id="91" name="Shape 90"/>
+          <p:cNvSpPr/>
+          <p:nvPr/>
+        </p:nvSpPr>
+        <p:spPr>
+          <a:xfrm>
+            <a:off x="9313164" y="5394960"/>
+            <a:ext cx="36576" cy="640080"/>
+          </a:xfrm>
+          <a:prstGeom prst="rect">
+            <a:avLst/>
+          </a:prstGeom>
+          <a:solidFill>
+            <a:srgbClr val="00D6F2"/>
+          </a:solidFill>
+          <a:ln>
+            <a:noFill/>
+          </a:ln>
+          <a:effectLst/>
+        </p:spPr>
+        <p:style>
+          <a:lnRef idx="1">
+            <a:schemeClr val="accent1"/>
+          </a:lnRef>
+          <a:fillRef idx="3">
+            <a:schemeClr val="accent1"/>
+          </a:fillRef>
+          <a:effectRef idx="2">
+            <a:schemeClr val="accent1"/>
+          </a:effectRef>
+          <a:fontRef idx="minor">
+            <a:schemeClr val="lt1"/>
+          </a:fontRef>
+        </p:style>
+        <p:txBody>
+          <a:bodyPr rtlCol="0" anchor="ctr"/>
+          <a:lstStyle/>
+          <a:p/>
+        </p:txBody>
+      </p:sp>
+      <p:sp>
+        <p:nvSpPr>
+          <p:cNvPr id="92" name="Text 91"/>
+          <p:cNvSpPr txBox="1"/>
+          <p:nvPr/>
+        </p:nvSpPr>
+        <p:spPr>
+          <a:xfrm>
+            <a:off x="9441180" y="5394960"/>
+            <a:ext cx="2281427" cy="640080"/>
+          </a:xfrm>
+          <a:prstGeom prst="rect">
+            <a:avLst/>
+          </a:prstGeom>
+          <a:noFill/>
+        </p:spPr>
+        <p:txBody>
+          <a:bodyPr wrap="square" lIns="0" rIns="0" tIns="0" bIns="0" anchor="ctr">
+            <a:spAutoFit/>
+          </a:bodyPr>
+          <a:lstStyle/>
+          <a:p>
+            <a:pPr>
+              <a:spcAft>
+                <a:spcPts val="100"/>
+              </a:spcAft>
+            </a:pPr>
+            <a:r>
+              <a:rPr sz="700" b="1" i="0">
+                <a:solidFill>
+                  <a:srgbClr val="F2F2F2"/>
+                </a:solidFill>
+                <a:latin typeface="Trenda IG Text"/>
+              </a:rPr>
+              <a:t>Delivery only</a:t>
+            </a:r>
+          </a:p>
+          <a:p>
+            <a:pPr>
+              <a:spcAft>
+                <a:spcPts val="100"/>
+              </a:spcAft>
+            </a:pPr>
+            <a:r>
+              <a:rPr sz="600" b="0" i="0">
+                <a:solidFill>
+                  <a:srgbClr val="B3B3B3"/>
+                </a:solidFill>
+                <a:latin typeface="Trenda IG Text"/>
+              </a:rPr>
+              <a:t>campaign data platform and Sierra sized after Phase 0</a:t>
+            </a:r>
+          </a:p>
+        </p:txBody>
+      </p:sp>
+    </p:spTree>
   </p:cSld>
   <p:clrMapOvr>
     <a:masterClrMapping/>

--- a/poc/data_harness/Ascension Agentic Harness - Data Harness.pptx
+++ b/poc/data_harness/Ascension Agentic Harness - Data Harness.pptx
@@ -1479,7 +1479,7 @@
           </a:p>
           <a:p>
             <a:r>
-              <a:t>Every squad of 4-5 developers becomes 1 developer directing the harness agent, plus 1 QA. Pods run lean on one shared platform. $16M a year today becomes $7M: $9M back every year on a $5.0M build, paid back in under 7 months.</a:t>
+              <a:t>Every squad of 4-5 developers becomes 1 developer directing the harness agent, plus 1 QA. $16M a year today becomes $7M: $9M back every year on a $5.0M build, paid back in under 7 months.</a:t>
             </a:r>
           </a:p>
           <a:p/>
@@ -1491,11 +1491,6 @@
           <a:p>
             <a:r>
               <a:t>- The squad: 4 developers and a QA today; with the harness, one developer directs the agent, a QA verifies, and the agent drafts code, tests and the Copado package overnight. People review, approve and own every change.</a:t>
-            </a:r>
-          </a:p>
-          <a:p>
-            <a:r>
-              <a:t>- The pod: today every pod carries its own full stack. With the harness: owner, lead and 2-4 engineers, on one shared platform run by a small team. 20-30% smaller for the same scope, or 1.4-1.6x the output with the same team.</a:t>
             </a:r>
           </a:p>
           <a:p>
@@ -4011,7 +4006,7 @@
         <p:spPr>
           <a:xfrm>
             <a:off x="411480" y="1188720"/>
-            <a:ext cx="3715512" cy="1965960"/>
+            <a:ext cx="5628132" cy="1965960"/>
           </a:xfrm>
           <a:prstGeom prst="roundRect">
             <a:avLst>
@@ -4055,7 +4050,7 @@
         <p:spPr>
           <a:xfrm>
             <a:off x="411480" y="1188720"/>
-            <a:ext cx="3715512" cy="256032"/>
+            <a:ext cx="5628132" cy="256032"/>
           </a:xfrm>
           <a:prstGeom prst="rect">
             <a:avLst/>
@@ -4097,7 +4092,7 @@
         <p:spPr>
           <a:xfrm>
             <a:off x="521208" y="1188720"/>
-            <a:ext cx="3496056" cy="256032"/>
+            <a:ext cx="5408676" cy="256032"/>
           </a:xfrm>
           <a:prstGeom prst="rect">
             <a:avLst/>
@@ -4174,7 +4169,7 @@
         <p:spPr>
           <a:xfrm>
             <a:off x="539496" y="1719072"/>
-            <a:ext cx="648004" cy="274320"/>
+            <a:ext cx="1030528" cy="274320"/>
           </a:xfrm>
           <a:prstGeom prst="roundRect">
             <a:avLst>
@@ -4220,7 +4215,7 @@
         <p:spPr>
           <a:xfrm>
             <a:off x="539496" y="1719072"/>
-            <a:ext cx="648004" cy="274320"/>
+            <a:ext cx="1030528" cy="274320"/>
           </a:xfrm>
           <a:prstGeom prst="rect">
             <a:avLst/>
@@ -4254,8 +4249,8 @@
         </p:nvSpPr>
         <p:spPr>
           <a:xfrm>
-            <a:off x="1242364" y="1719072"/>
-            <a:ext cx="648004" cy="274320"/>
+            <a:off x="1624888" y="1719072"/>
+            <a:ext cx="1030528" cy="274320"/>
           </a:xfrm>
           <a:prstGeom prst="roundRect">
             <a:avLst>
@@ -4300,8 +4295,8 @@
         </p:nvSpPr>
         <p:spPr>
           <a:xfrm>
-            <a:off x="1242364" y="1719072"/>
-            <a:ext cx="648004" cy="274320"/>
+            <a:off x="1624888" y="1719072"/>
+            <a:ext cx="1030528" cy="274320"/>
           </a:xfrm>
           <a:prstGeom prst="rect">
             <a:avLst/>
@@ -4335,8 +4330,8 @@
         </p:nvSpPr>
         <p:spPr>
           <a:xfrm>
-            <a:off x="1945233" y="1719072"/>
-            <a:ext cx="648004" cy="274320"/>
+            <a:off x="2710281" y="1719072"/>
+            <a:ext cx="1030528" cy="274320"/>
           </a:xfrm>
           <a:prstGeom prst="roundRect">
             <a:avLst>
@@ -4381,8 +4376,8 @@
         </p:nvSpPr>
         <p:spPr>
           <a:xfrm>
-            <a:off x="1945233" y="1719072"/>
-            <a:ext cx="648004" cy="274320"/>
+            <a:off x="2710281" y="1719072"/>
+            <a:ext cx="1030528" cy="274320"/>
           </a:xfrm>
           <a:prstGeom prst="rect">
             <a:avLst/>
@@ -4416,8 +4411,8 @@
         </p:nvSpPr>
         <p:spPr>
           <a:xfrm>
-            <a:off x="2648102" y="1719072"/>
-            <a:ext cx="648004" cy="274320"/>
+            <a:off x="3795674" y="1719072"/>
+            <a:ext cx="1030528" cy="274320"/>
           </a:xfrm>
           <a:prstGeom prst="roundRect">
             <a:avLst>
@@ -4462,8 +4457,8 @@
         </p:nvSpPr>
         <p:spPr>
           <a:xfrm>
-            <a:off x="2648102" y="1719072"/>
-            <a:ext cx="648004" cy="274320"/>
+            <a:off x="3795674" y="1719072"/>
+            <a:ext cx="1030528" cy="274320"/>
           </a:xfrm>
           <a:prstGeom prst="rect">
             <a:avLst/>
@@ -4497,8 +4492,8 @@
         </p:nvSpPr>
         <p:spPr>
           <a:xfrm>
-            <a:off x="3350971" y="1719072"/>
-            <a:ext cx="648004" cy="274320"/>
+            <a:off x="4881067" y="1719072"/>
+            <a:ext cx="1030528" cy="274320"/>
           </a:xfrm>
           <a:prstGeom prst="roundRect">
             <a:avLst>
@@ -4543,8 +4538,8 @@
         </p:nvSpPr>
         <p:spPr>
           <a:xfrm>
-            <a:off x="3350971" y="1719072"/>
-            <a:ext cx="648004" cy="274320"/>
+            <a:off x="4881067" y="1719072"/>
+            <a:ext cx="1030528" cy="274320"/>
           </a:xfrm>
           <a:prstGeom prst="rect">
             <a:avLst/>
@@ -4613,7 +4608,7 @@
         <p:spPr>
           <a:xfrm>
             <a:off x="539496" y="2267712"/>
-            <a:ext cx="1116584" cy="274320"/>
+            <a:ext cx="1754124" cy="274320"/>
           </a:xfrm>
           <a:prstGeom prst="roundRect">
             <a:avLst>
@@ -4659,7 +4654,7 @@
         <p:spPr>
           <a:xfrm>
             <a:off x="539496" y="2267712"/>
-            <a:ext cx="1116584" cy="274320"/>
+            <a:ext cx="1754124" cy="274320"/>
           </a:xfrm>
           <a:prstGeom prst="rect">
             <a:avLst/>
@@ -4693,8 +4688,8 @@
         </p:nvSpPr>
         <p:spPr>
           <a:xfrm>
-            <a:off x="1710944" y="2267712"/>
-            <a:ext cx="1116584" cy="274320"/>
+            <a:off x="2348484" y="2267712"/>
+            <a:ext cx="1754124" cy="274320"/>
           </a:xfrm>
           <a:prstGeom prst="roundRect">
             <a:avLst>
@@ -4747,7 +4742,7 @@
         </p:blipFill>
         <p:spPr>
           <a:xfrm>
-            <a:off x="1784096" y="2322576"/>
+            <a:off x="2421636" y="2322576"/>
             <a:ext cx="164592" cy="164592"/>
           </a:xfrm>
           <a:prstGeom prst="rect">
@@ -4763,8 +4758,8 @@
         </p:nvSpPr>
         <p:spPr>
           <a:xfrm>
-            <a:off x="1930400" y="2267712"/>
-            <a:ext cx="860551" cy="274320"/>
+            <a:off x="2567940" y="2267712"/>
+            <a:ext cx="1498091" cy="274320"/>
           </a:xfrm>
           <a:prstGeom prst="rect">
             <a:avLst/>
@@ -4798,8 +4793,8 @@
         </p:nvSpPr>
         <p:spPr>
           <a:xfrm>
-            <a:off x="2882392" y="2267712"/>
-            <a:ext cx="1116584" cy="274320"/>
+            <a:off x="4157472" y="2267712"/>
+            <a:ext cx="1754124" cy="274320"/>
           </a:xfrm>
           <a:prstGeom prst="roundRect">
             <a:avLst>
@@ -4844,8 +4839,8 @@
         </p:nvSpPr>
         <p:spPr>
           <a:xfrm>
-            <a:off x="2882392" y="2267712"/>
-            <a:ext cx="1116584" cy="274320"/>
+            <a:off x="4157472" y="2267712"/>
+            <a:ext cx="1754124" cy="274320"/>
           </a:xfrm>
           <a:prstGeom prst="rect">
             <a:avLst/>
@@ -4880,7 +4875,7 @@
         <p:spPr>
           <a:xfrm>
             <a:off x="539496" y="2615184"/>
-            <a:ext cx="3459480" cy="384048"/>
+            <a:ext cx="5372100" cy="384048"/>
           </a:xfrm>
           <a:prstGeom prst="rect">
             <a:avLst/>
@@ -4958,8 +4953,8 @@
         </p:nvSpPr>
         <p:spPr>
           <a:xfrm>
-            <a:off x="4236720" y="1188720"/>
-            <a:ext cx="3715512" cy="1965960"/>
+            <a:off x="6149340" y="1188720"/>
+            <a:ext cx="5628132" cy="1965960"/>
           </a:xfrm>
           <a:prstGeom prst="roundRect">
             <a:avLst>
@@ -5002,8 +4997,8 @@
         </p:nvSpPr>
         <p:spPr>
           <a:xfrm>
-            <a:off x="4236720" y="1188720"/>
-            <a:ext cx="3715512" cy="256032"/>
+            <a:off x="6149340" y="1188720"/>
+            <a:ext cx="5628132" cy="256032"/>
           </a:xfrm>
           <a:prstGeom prst="rect">
             <a:avLst/>
@@ -5044,8 +5039,8 @@
         </p:nvSpPr>
         <p:spPr>
           <a:xfrm>
-            <a:off x="4346448" y="1188720"/>
-            <a:ext cx="3496056" cy="256032"/>
+            <a:off x="6259068" y="1188720"/>
+            <a:ext cx="5408676" cy="256032"/>
           </a:xfrm>
           <a:prstGeom prst="rect">
             <a:avLst/>
@@ -5065,7 +5060,7 @@
                 </a:solidFill>
                 <a:latin typeface="Trenda IG Text"/>
               </a:rPr>
-              <a:t>THE POD</a:t>
+              <a:t>THE BUILD AND RUN</a:t>
             </a:r>
             <a:r>
               <a:rPr sz="640" b="0" i="0">
@@ -5074,68 +5069,30 @@
                 </a:solidFill>
                 <a:latin typeface="Trenda IG Text"/>
               </a:rPr>
-              <a:t>   lean pods share one platform</a:t>
-            </a:r>
-          </a:p>
-        </p:txBody>
-      </p:sp>
-      <p:sp>
-        <p:nvSpPr>
-          <p:cNvPr id="31" name="Text 29"/>
-          <p:cNvSpPr txBox="1"/>
-          <p:nvPr/>
-        </p:nvSpPr>
-        <p:spPr>
-          <a:xfrm>
-            <a:off x="4364736" y="1536192"/>
-            <a:ext cx="1828800" cy="164592"/>
-          </a:xfrm>
-          <a:prstGeom prst="rect">
-            <a:avLst/>
-          </a:prstGeom>
-          <a:noFill/>
-        </p:spPr>
-        <p:txBody>
-          <a:bodyPr wrap="square" lIns="0" rIns="0" tIns="0" bIns="0" anchor="ctr">
-            <a:spAutoFit/>
-          </a:bodyPr>
-          <a:lstStyle/>
-          <a:p>
-            <a:r>
-              <a:rPr sz="540" b="1" i="0" spc="100">
-                <a:solidFill>
-                  <a:srgbClr val="8C8C8C"/>
-                </a:solidFill>
-                <a:latin typeface="Trenda IG Text"/>
-              </a:rPr>
-              <a:t>TODAY · EVERY POD, FULL STACK</a:t>
-            </a:r>
-          </a:p>
-        </p:txBody>
-      </p:sp>
-      <p:sp>
-        <p:nvSpPr>
-          <p:cNvPr id="32" name="Shape 30"/>
+              <a:t>   fixed fee, paid by gate</a:t>
+            </a:r>
+          </a:p>
+        </p:txBody>
+      </p:sp>
+      <p:sp>
+        <p:nvSpPr>
+          <p:cNvPr id="31" name="Shape 29"/>
           <p:cNvSpPr/>
           <p:nvPr/>
         </p:nvSpPr>
         <p:spPr>
           <a:xfrm>
-            <a:off x="4364736" y="1719072"/>
-            <a:ext cx="3459480" cy="274320"/>
-          </a:xfrm>
-          <a:prstGeom prst="roundRect">
-            <a:avLst>
-              <a:gd name="adj" fmla="val 25000"/>
-            </a:avLst>
+            <a:off x="6277356" y="1554480"/>
+            <a:ext cx="1741932" cy="896112"/>
+          </a:xfrm>
+          <a:prstGeom prst="rect">
+            <a:avLst/>
           </a:prstGeom>
           <a:solidFill>
             <a:srgbClr val="141414"/>
           </a:solidFill>
-          <a:ln w="9525">
-            <a:solidFill>
-              <a:srgbClr val="333333"/>
-            </a:solidFill>
+          <a:ln>
+            <a:noFill/>
           </a:ln>
           <a:effectLst/>
         </p:spPr>
@@ -5161,96 +5118,91 @@
       </p:sp>
       <p:sp>
         <p:nvSpPr>
+          <p:cNvPr id="32" name="Text 30"/>
+          <p:cNvSpPr txBox="1"/>
+          <p:nvPr/>
+        </p:nvSpPr>
+        <p:spPr>
+          <a:xfrm>
+            <a:off x="6368796" y="1591056"/>
+            <a:ext cx="1613916" cy="402336"/>
+          </a:xfrm>
+          <a:prstGeom prst="rect">
+            <a:avLst/>
+          </a:prstGeom>
+          <a:noFill/>
+        </p:spPr>
+        <p:txBody>
+          <a:bodyPr wrap="square" lIns="0" rIns="0" tIns="0" bIns="0" anchor="ctr">
+            <a:spAutoFit/>
+          </a:bodyPr>
+          <a:lstStyle/>
+          <a:p>
+            <a:r>
+              <a:rPr sz="1600" b="0" i="0">
+                <a:solidFill>
+                  <a:srgbClr val="F2F2F2"/>
+                </a:solidFill>
+                <a:latin typeface="Trenda IG Text"/>
+              </a:rPr>
+              <a:t>17</a:t>
+            </a:r>
+          </a:p>
+        </p:txBody>
+      </p:sp>
+      <p:sp>
+        <p:nvSpPr>
           <p:cNvPr id="33" name="Text 31"/>
           <p:cNvSpPr txBox="1"/>
           <p:nvPr/>
         </p:nvSpPr>
         <p:spPr>
           <a:xfrm>
-            <a:off x="4364736" y="1719072"/>
-            <a:ext cx="3459480" cy="274320"/>
-          </a:xfrm>
-          <a:prstGeom prst="rect">
-            <a:avLst/>
-          </a:prstGeom>
-          <a:noFill/>
-        </p:spPr>
-        <p:txBody>
-          <a:bodyPr wrap="square" lIns="0" rIns="0" tIns="0" bIns="0" anchor="ctr">
-            <a:spAutoFit/>
-          </a:bodyPr>
-          <a:lstStyle/>
-          <a:p>
-            <a:pPr algn="ctr"/>
-            <a:r>
-              <a:rPr sz="620" b="1" i="0">
+            <a:off x="6368796" y="1993392"/>
+            <a:ext cx="1613916" cy="420624"/>
+          </a:xfrm>
+          <a:prstGeom prst="rect">
+            <a:avLst/>
+          </a:prstGeom>
+          <a:noFill/>
+        </p:spPr>
+        <p:txBody>
+          <a:bodyPr wrap="square" lIns="0" rIns="0" tIns="0" bIns="0" anchor="t">
+            <a:spAutoFit/>
+          </a:bodyPr>
+          <a:lstStyle/>
+          <a:p>
+            <a:r>
+              <a:rPr sz="590" b="0" i="0">
                 <a:solidFill>
                   <a:srgbClr val="B3B3B3"/>
                 </a:solidFill>
                 <a:latin typeface="Trenda IG Text"/>
               </a:rPr>
-              <a:t>BA · Devs · QA · Release · Support</a:t>
-            </a:r>
-          </a:p>
-        </p:txBody>
-      </p:sp>
-      <p:sp>
-        <p:nvSpPr>
-          <p:cNvPr id="34" name="Text 32"/>
-          <p:cNvSpPr txBox="1"/>
-          <p:nvPr/>
-        </p:nvSpPr>
-        <p:spPr>
-          <a:xfrm>
-            <a:off x="4364736" y="2084832"/>
-            <a:ext cx="2194560" cy="164592"/>
-          </a:xfrm>
-          <a:prstGeom prst="rect">
-            <a:avLst/>
-          </a:prstGeom>
-          <a:noFill/>
-        </p:spPr>
-        <p:txBody>
-          <a:bodyPr wrap="square" lIns="0" rIns="0" tIns="0" bIns="0" anchor="ctr">
-            <a:spAutoFit/>
-          </a:bodyPr>
-          <a:lstStyle/>
-          <a:p>
-            <a:r>
-              <a:rPr sz="540" b="1" i="0" spc="100">
-                <a:solidFill>
-                  <a:srgbClr val="00D6F2"/>
-                </a:solidFill>
-                <a:latin typeface="Trenda IG Text"/>
-              </a:rPr>
-              <a:t>WITH THE HARNESS</a:t>
-            </a:r>
-          </a:p>
-        </p:txBody>
-      </p:sp>
-      <p:sp>
-        <p:nvSpPr>
-          <p:cNvPr id="35" name="Shape 33"/>
+              <a:t>people at peak, 10 roles</a:t>
+            </a:r>
+          </a:p>
+        </p:txBody>
+      </p:sp>
+      <p:sp>
+        <p:nvSpPr>
+          <p:cNvPr id="34" name="Shape 32"/>
           <p:cNvSpPr/>
           <p:nvPr/>
         </p:nvSpPr>
         <p:spPr>
           <a:xfrm>
-            <a:off x="4364736" y="2267712"/>
-            <a:ext cx="1872538" cy="274320"/>
-          </a:xfrm>
-          <a:prstGeom prst="roundRect">
-            <a:avLst>
-              <a:gd name="adj" fmla="val 25000"/>
-            </a:avLst>
+            <a:off x="8092440" y="1554480"/>
+            <a:ext cx="1741932" cy="896112"/>
+          </a:xfrm>
+          <a:prstGeom prst="rect">
+            <a:avLst/>
           </a:prstGeom>
           <a:solidFill>
             <a:srgbClr val="141414"/>
           </a:solidFill>
-          <a:ln w="9525">
-            <a:solidFill>
-              <a:srgbClr val="00D6F2"/>
-            </a:solidFill>
+          <a:ln>
+            <a:noFill/>
           </a:ln>
           <a:effectLst/>
         </p:spPr>
@@ -5276,35 +5228,68 @@
       </p:sp>
       <p:sp>
         <p:nvSpPr>
+          <p:cNvPr id="35" name="Text 33"/>
+          <p:cNvSpPr txBox="1"/>
+          <p:nvPr/>
+        </p:nvSpPr>
+        <p:spPr>
+          <a:xfrm>
+            <a:off x="8183879" y="1591056"/>
+            <a:ext cx="1613916" cy="402336"/>
+          </a:xfrm>
+          <a:prstGeom prst="rect">
+            <a:avLst/>
+          </a:prstGeom>
+          <a:noFill/>
+        </p:spPr>
+        <p:txBody>
+          <a:bodyPr wrap="square" lIns="0" rIns="0" tIns="0" bIns="0" anchor="ctr">
+            <a:spAutoFit/>
+          </a:bodyPr>
+          <a:lstStyle/>
+          <a:p>
+            <a:r>
+              <a:rPr sz="1600" b="0" i="0">
+                <a:solidFill>
+                  <a:srgbClr val="F2F2F2"/>
+                </a:solidFill>
+                <a:latin typeface="Trenda IG Text"/>
+              </a:rPr>
+              <a:t>18</a:t>
+            </a:r>
+          </a:p>
+        </p:txBody>
+      </p:sp>
+      <p:sp>
+        <p:nvSpPr>
           <p:cNvPr id="36" name="Text 34"/>
           <p:cNvSpPr txBox="1"/>
           <p:nvPr/>
         </p:nvSpPr>
         <p:spPr>
           <a:xfrm>
-            <a:off x="4364736" y="2267712"/>
-            <a:ext cx="1872538" cy="274320"/>
-          </a:xfrm>
-          <a:prstGeom prst="rect">
-            <a:avLst/>
-          </a:prstGeom>
-          <a:noFill/>
-        </p:spPr>
-        <p:txBody>
-          <a:bodyPr wrap="square" lIns="0" rIns="0" tIns="0" bIns="0" anchor="ctr">
-            <a:spAutoFit/>
-          </a:bodyPr>
-          <a:lstStyle/>
-          <a:p>
-            <a:pPr algn="ctr"/>
-            <a:r>
-              <a:rPr sz="600" b="1" i="0">
-                <a:solidFill>
-                  <a:srgbClr val="F2F2F2"/>
-                </a:solidFill>
-                <a:latin typeface="Trenda IG Text"/>
-              </a:rPr>
-              <a:t>Owner · Lead · 2-4 engineers</a:t>
+            <a:off x="8183879" y="1993392"/>
+            <a:ext cx="1613916" cy="420624"/>
+          </a:xfrm>
+          <a:prstGeom prst="rect">
+            <a:avLst/>
+          </a:prstGeom>
+          <a:noFill/>
+        </p:spPr>
+        <p:txBody>
+          <a:bodyPr wrap="square" lIns="0" rIns="0" tIns="0" bIns="0" anchor="t">
+            <a:spAutoFit/>
+          </a:bodyPr>
+          <a:lstStyle/>
+          <a:p>
+            <a:r>
+              <a:rPr sz="590" b="0" i="0">
+                <a:solidFill>
+                  <a:srgbClr val="B3B3B3"/>
+                </a:solidFill>
+                <a:latin typeface="Trenda IG Text"/>
+              </a:rPr>
+              <a:t>months, seven phases</a:t>
             </a:r>
           </a:p>
         </p:txBody>
@@ -5317,21 +5302,17 @@
         </p:nvSpPr>
         <p:spPr>
           <a:xfrm>
-            <a:off x="6292138" y="2267712"/>
-            <a:ext cx="1532077" cy="274320"/>
-          </a:xfrm>
-          <a:prstGeom prst="roundRect">
-            <a:avLst>
-              <a:gd name="adj" fmla="val 25000"/>
-            </a:avLst>
+            <a:off x="9907524" y="1554480"/>
+            <a:ext cx="1741932" cy="896112"/>
+          </a:xfrm>
+          <a:prstGeom prst="rect">
+            <a:avLst/>
           </a:prstGeom>
           <a:solidFill>
-            <a:srgbClr val="06262B"/>
+            <a:srgbClr val="141414"/>
           </a:solidFill>
-          <a:ln w="9525">
-            <a:solidFill>
-              <a:srgbClr val="00D6F2"/>
-            </a:solidFill>
+          <a:ln>
+            <a:noFill/>
           </a:ln>
           <a:effectLst/>
         </p:spPr>
@@ -5363,8 +5344,8 @@
         </p:nvSpPr>
         <p:spPr>
           <a:xfrm>
-            <a:off x="6292138" y="2267712"/>
-            <a:ext cx="1532077" cy="274320"/>
+            <a:off x="9998964" y="1591056"/>
+            <a:ext cx="1613916" cy="402336"/>
           </a:xfrm>
           <a:prstGeom prst="rect">
             <a:avLst/>
@@ -5377,52 +5358,83 @@
           </a:bodyPr>
           <a:lstStyle/>
           <a:p>
-            <a:pPr algn="ctr"/>
+            <a:r>
+              <a:rPr sz="1600" b="0" i="0">
+                <a:solidFill>
+                  <a:srgbClr val="F2F2F2"/>
+                </a:solidFill>
+                <a:latin typeface="Trenda IG Text"/>
+              </a:rPr>
+              <a:t>$4.79M</a:t>
+            </a:r>
+          </a:p>
+        </p:txBody>
+      </p:sp>
+      <p:sp>
+        <p:nvSpPr>
+          <p:cNvPr id="39" name="Text 37"/>
+          <p:cNvSpPr txBox="1"/>
+          <p:nvPr/>
+        </p:nvSpPr>
+        <p:spPr>
+          <a:xfrm>
+            <a:off x="9998964" y="1993392"/>
+            <a:ext cx="1613916" cy="420624"/>
+          </a:xfrm>
+          <a:prstGeom prst="rect">
+            <a:avLst/>
+          </a:prstGeom>
+          <a:noFill/>
+        </p:spPr>
+        <p:txBody>
+          <a:bodyPr wrap="square" lIns="0" rIns="0" tIns="0" bIns="0" anchor="t">
+            <a:spAutoFit/>
+          </a:bodyPr>
+          <a:lstStyle/>
+          <a:p>
+            <a:r>
+              <a:rPr sz="590" b="0" i="0">
+                <a:solidFill>
+                  <a:srgbClr val="B3B3B3"/>
+                </a:solidFill>
+                <a:latin typeface="Trenda IG Text"/>
+              </a:rPr>
+              <a:t>fixed fee, paid as each gate is signed</a:t>
+            </a:r>
+          </a:p>
+        </p:txBody>
+      </p:sp>
+      <p:sp>
+        <p:nvSpPr>
+          <p:cNvPr id="40" name="Text 38"/>
+          <p:cNvSpPr txBox="1"/>
+          <p:nvPr/>
+        </p:nvSpPr>
+        <p:spPr>
+          <a:xfrm>
+            <a:off x="6277356" y="2542032"/>
+            <a:ext cx="5372100" cy="457200"/>
+          </a:xfrm>
+          <a:prstGeom prst="rect">
+            <a:avLst/>
+          </a:prstGeom>
+          <a:noFill/>
+        </p:spPr>
+        <p:txBody>
+          <a:bodyPr wrap="square" lIns="0" rIns="0" tIns="0" bIns="0" anchor="t">
+            <a:spAutoFit/>
+          </a:bodyPr>
+          <a:lstStyle/>
+          <a:p>
             <a:r>
               <a:rPr sz="600" b="1" i="0">
                 <a:solidFill>
-                  <a:srgbClr val="00D6F2"/>
-                </a:solidFill>
-                <a:latin typeface="Trenda IG Text"/>
-              </a:rPr>
-              <a:t>Shared platform</a:t>
-            </a:r>
-          </a:p>
-        </p:txBody>
-      </p:sp>
-      <p:sp>
-        <p:nvSpPr>
-          <p:cNvPr id="39" name="Text 37"/>
-          <p:cNvSpPr txBox="1"/>
-          <p:nvPr/>
-        </p:nvSpPr>
-        <p:spPr>
-          <a:xfrm>
-            <a:off x="4364736" y="2615184"/>
-            <a:ext cx="1702308" cy="384048"/>
-          </a:xfrm>
-          <a:prstGeom prst="rect">
-            <a:avLst/>
-          </a:prstGeom>
-          <a:noFill/>
-        </p:spPr>
-        <p:txBody>
-          <a:bodyPr wrap="square" lIns="0" rIns="0" tIns="0" bIns="0" anchor="ctr">
-            <a:spAutoFit/>
-          </a:bodyPr>
-          <a:lstStyle/>
-          <a:p>
-            <a:r>
-              <a:rPr sz="1200" b="0" i="0">
-                <a:solidFill>
-                  <a:srgbClr val="00D6F2"/>
-                </a:solidFill>
-                <a:latin typeface="Trenda IG Text"/>
-              </a:rPr>
-              <a:t>20-30%</a:t>
-            </a:r>
-          </a:p>
-          <a:p>
+                  <a:srgbClr val="F2F2F2"/>
+                </a:solidFill>
+                <a:latin typeface="Trenda IG Text"/>
+              </a:rPr>
+              <a:t>From month 19 </a:t>
+            </a:r>
             <a:r>
               <a:rPr sz="600" b="0" i="0">
                 <a:solidFill>
@@ -5430,52 +5442,7 @@
                 </a:solidFill>
                 <a:latin typeface="Trenda IG Text"/>
               </a:rPr>
-              <a:t>smaller team, same scope</a:t>
-            </a:r>
-          </a:p>
-        </p:txBody>
-      </p:sp>
-      <p:sp>
-        <p:nvSpPr>
-          <p:cNvPr id="40" name="Text 38"/>
-          <p:cNvSpPr txBox="1"/>
-          <p:nvPr/>
-        </p:nvSpPr>
-        <p:spPr>
-          <a:xfrm>
-            <a:off x="6121908" y="2615184"/>
-            <a:ext cx="1702308" cy="384048"/>
-          </a:xfrm>
-          <a:prstGeom prst="rect">
-            <a:avLst/>
-          </a:prstGeom>
-          <a:noFill/>
-        </p:spPr>
-        <p:txBody>
-          <a:bodyPr wrap="square" lIns="0" rIns="0" tIns="0" bIns="0" anchor="ctr">
-            <a:spAutoFit/>
-          </a:bodyPr>
-          <a:lstStyle/>
-          <a:p>
-            <a:r>
-              <a:rPr sz="1200" b="0" i="0">
-                <a:solidFill>
-                  <a:srgbClr val="00D6F2"/>
-                </a:solidFill>
-                <a:latin typeface="Trenda IG Text"/>
-              </a:rPr>
-              <a:t>1.4-1.6x</a:t>
-            </a:r>
-          </a:p>
-          <a:p>
-            <a:r>
-              <a:rPr sz="600" b="0" i="0">
-                <a:solidFill>
-                  <a:srgbClr val="B3B3B3"/>
-                </a:solidFill>
-                <a:latin typeface="Trenda IG Text"/>
-              </a:rPr>
-              <a:t>output, same team</a:t>
+              <a:t>a run team of 4 keeps the graph, agents and evals current: about $1.24M a year with platform usage.</a:t>
             </a:r>
           </a:p>
         </p:txBody>
@@ -5488,8 +5455,8 @@
         </p:nvSpPr>
         <p:spPr>
           <a:xfrm>
-            <a:off x="8061960" y="1188720"/>
-            <a:ext cx="3715512" cy="1965960"/>
+            <a:off x="411480" y="3291840"/>
+            <a:ext cx="11365992" cy="1965960"/>
           </a:xfrm>
           <a:prstGeom prst="roundRect">
             <a:avLst>
@@ -5532,8 +5499,8 @@
         </p:nvSpPr>
         <p:spPr>
           <a:xfrm>
-            <a:off x="8061960" y="1188720"/>
-            <a:ext cx="3715512" cy="256032"/>
+            <a:off x="411480" y="3291840"/>
+            <a:ext cx="11365992" cy="256032"/>
           </a:xfrm>
           <a:prstGeom prst="rect">
             <a:avLst/>
@@ -5574,8 +5541,8 @@
         </p:nvSpPr>
         <p:spPr>
           <a:xfrm>
-            <a:off x="8171687" y="1188720"/>
-            <a:ext cx="3496056" cy="256032"/>
+            <a:off x="521208" y="3291840"/>
+            <a:ext cx="11146536" cy="256032"/>
           </a:xfrm>
           <a:prstGeom prst="rect">
             <a:avLst/>
@@ -5595,7 +5562,7 @@
                 </a:solidFill>
                 <a:latin typeface="Trenda IG Text"/>
               </a:rPr>
-              <a:t>THE BUILD AND RUN</a:t>
+              <a:t>THE RETURN</a:t>
             </a:r>
             <a:r>
               <a:rPr sz="640" b="0" i="0">
@@ -5604,7 +5571,7 @@
                 </a:solidFill>
                 <a:latin typeface="Trenda IG Text"/>
               </a:rPr>
-              <a:t>   fixed fee, paid by gate</a:t>
+              <a:t>   target · first full year after go-live</a:t>
             </a:r>
           </a:p>
         </p:txBody>
@@ -5617,8 +5584,8 @@
         </p:nvSpPr>
         <p:spPr>
           <a:xfrm>
-            <a:off x="8189976" y="1554480"/>
-            <a:ext cx="1104391" cy="896112"/>
+            <a:off x="539496" y="3639312"/>
+            <a:ext cx="1796796" cy="1490472"/>
           </a:xfrm>
           <a:prstGeom prst="rect">
             <a:avLst/>
@@ -5659,8 +5626,8 @@
         </p:nvSpPr>
         <p:spPr>
           <a:xfrm>
-            <a:off x="8281416" y="1591056"/>
-            <a:ext cx="976376" cy="402336"/>
+            <a:off x="667512" y="3977639"/>
+            <a:ext cx="1577340" cy="457200"/>
           </a:xfrm>
           <a:prstGeom prst="rect">
             <a:avLst/>
@@ -5674,13 +5641,13 @@
           <a:lstStyle/>
           <a:p>
             <a:r>
-              <a:rPr sz="1600" b="0" i="0">
+              <a:rPr sz="2200" b="0" i="0">
                 <a:solidFill>
                   <a:srgbClr val="F2F2F2"/>
                 </a:solidFill>
                 <a:latin typeface="Trenda IG Text"/>
               </a:rPr>
-              <a:t>17</a:t>
+              <a:t>$16M</a:t>
             </a:r>
           </a:p>
         </p:txBody>
@@ -5693,42 +5660,76 @@
         </p:nvSpPr>
         <p:spPr>
           <a:xfrm>
-            <a:off x="8281416" y="1993392"/>
-            <a:ext cx="976376" cy="420624"/>
-          </a:xfrm>
-          <a:prstGeom prst="rect">
-            <a:avLst/>
-          </a:prstGeom>
-          <a:noFill/>
-        </p:spPr>
-        <p:txBody>
-          <a:bodyPr wrap="square" lIns="0" rIns="0" tIns="0" bIns="0" anchor="t">
-            <a:spAutoFit/>
-          </a:bodyPr>
-          <a:lstStyle/>
-          <a:p>
-            <a:r>
-              <a:rPr sz="590" b="0" i="0">
+            <a:off x="667512" y="4453127"/>
+            <a:ext cx="1577340" cy="201168"/>
+          </a:xfrm>
+          <a:prstGeom prst="rect">
+            <a:avLst/>
+          </a:prstGeom>
+          <a:noFill/>
+        </p:spPr>
+        <p:txBody>
+          <a:bodyPr wrap="square" lIns="0" rIns="0" tIns="0" bIns="0" anchor="ctr">
+            <a:spAutoFit/>
+          </a:bodyPr>
+          <a:lstStyle/>
+          <a:p>
+            <a:r>
+              <a:rPr sz="700" b="1" i="0">
+                <a:solidFill>
+                  <a:srgbClr val="F2F2F2"/>
+                </a:solidFill>
+                <a:latin typeface="Trenda IG Text"/>
+              </a:rPr>
+              <a:t>a year today</a:t>
+            </a:r>
+          </a:p>
+        </p:txBody>
+      </p:sp>
+      <p:sp>
+        <p:nvSpPr>
+          <p:cNvPr id="47" name="Text 45"/>
+          <p:cNvSpPr txBox="1"/>
+          <p:nvPr/>
+        </p:nvSpPr>
+        <p:spPr>
+          <a:xfrm>
+            <a:off x="667512" y="4654296"/>
+            <a:ext cx="1577340" cy="201168"/>
+          </a:xfrm>
+          <a:prstGeom prst="rect">
+            <a:avLst/>
+          </a:prstGeom>
+          <a:noFill/>
+        </p:spPr>
+        <p:txBody>
+          <a:bodyPr wrap="square" lIns="0" rIns="0" tIns="0" bIns="0" anchor="ctr">
+            <a:spAutoFit/>
+          </a:bodyPr>
+          <a:lstStyle/>
+          <a:p>
+            <a:r>
+              <a:rPr sz="600" b="0" i="0">
                 <a:solidFill>
                   <a:srgbClr val="B3B3B3"/>
                 </a:solidFill>
                 <a:latin typeface="Trenda IG Text"/>
               </a:rPr>
-              <a:t>people at peak, 10 roles</a:t>
-            </a:r>
-          </a:p>
-        </p:txBody>
-      </p:sp>
-      <p:sp>
-        <p:nvSpPr>
-          <p:cNvPr id="47" name="Shape 45"/>
+              <a:t>as provided by Ascension</a:t>
+            </a:r>
+          </a:p>
+        </p:txBody>
+      </p:sp>
+      <p:sp>
+        <p:nvSpPr>
+          <p:cNvPr id="48" name="Shape 46"/>
           <p:cNvSpPr/>
           <p:nvPr/>
         </p:nvSpPr>
         <p:spPr>
           <a:xfrm>
-            <a:off x="9367520" y="1554480"/>
-            <a:ext cx="1104391" cy="896112"/>
+            <a:off x="2427732" y="3639312"/>
+            <a:ext cx="1796796" cy="1490472"/>
           </a:xfrm>
           <a:prstGeom prst="rect">
             <a:avLst/>
@@ -5763,543 +5764,7 @@
       </p:sp>
       <p:sp>
         <p:nvSpPr>
-          <p:cNvPr id="48" name="Text 46"/>
-          <p:cNvSpPr txBox="1"/>
-          <p:nvPr/>
-        </p:nvSpPr>
-        <p:spPr>
-          <a:xfrm>
-            <a:off x="9458960" y="1591056"/>
-            <a:ext cx="976376" cy="402336"/>
-          </a:xfrm>
-          <a:prstGeom prst="rect">
-            <a:avLst/>
-          </a:prstGeom>
-          <a:noFill/>
-        </p:spPr>
-        <p:txBody>
-          <a:bodyPr wrap="square" lIns="0" rIns="0" tIns="0" bIns="0" anchor="ctr">
-            <a:spAutoFit/>
-          </a:bodyPr>
-          <a:lstStyle/>
-          <a:p>
-            <a:r>
-              <a:rPr sz="1600" b="0" i="0">
-                <a:solidFill>
-                  <a:srgbClr val="F2F2F2"/>
-                </a:solidFill>
-                <a:latin typeface="Trenda IG Text"/>
-              </a:rPr>
-              <a:t>18</a:t>
-            </a:r>
-          </a:p>
-        </p:txBody>
-      </p:sp>
-      <p:sp>
-        <p:nvSpPr>
           <p:cNvPr id="49" name="Text 47"/>
-          <p:cNvSpPr txBox="1"/>
-          <p:nvPr/>
-        </p:nvSpPr>
-        <p:spPr>
-          <a:xfrm>
-            <a:off x="9458960" y="1993392"/>
-            <a:ext cx="976376" cy="420624"/>
-          </a:xfrm>
-          <a:prstGeom prst="rect">
-            <a:avLst/>
-          </a:prstGeom>
-          <a:noFill/>
-        </p:spPr>
-        <p:txBody>
-          <a:bodyPr wrap="square" lIns="0" rIns="0" tIns="0" bIns="0" anchor="t">
-            <a:spAutoFit/>
-          </a:bodyPr>
-          <a:lstStyle/>
-          <a:p>
-            <a:r>
-              <a:rPr sz="590" b="0" i="0">
-                <a:solidFill>
-                  <a:srgbClr val="B3B3B3"/>
-                </a:solidFill>
-                <a:latin typeface="Trenda IG Text"/>
-              </a:rPr>
-              <a:t>months, seven phases</a:t>
-            </a:r>
-          </a:p>
-        </p:txBody>
-      </p:sp>
-      <p:sp>
-        <p:nvSpPr>
-          <p:cNvPr id="50" name="Shape 48"/>
-          <p:cNvSpPr/>
-          <p:nvPr/>
-        </p:nvSpPr>
-        <p:spPr>
-          <a:xfrm>
-            <a:off x="10545064" y="1554480"/>
-            <a:ext cx="1104391" cy="896112"/>
-          </a:xfrm>
-          <a:prstGeom prst="rect">
-            <a:avLst/>
-          </a:prstGeom>
-          <a:solidFill>
-            <a:srgbClr val="141414"/>
-          </a:solidFill>
-          <a:ln>
-            <a:noFill/>
-          </a:ln>
-          <a:effectLst/>
-        </p:spPr>
-        <p:style>
-          <a:lnRef idx="1">
-            <a:schemeClr val="accent1"/>
-          </a:lnRef>
-          <a:fillRef idx="3">
-            <a:schemeClr val="accent1"/>
-          </a:fillRef>
-          <a:effectRef idx="2">
-            <a:schemeClr val="accent1"/>
-          </a:effectRef>
-          <a:fontRef idx="minor">
-            <a:schemeClr val="lt1"/>
-          </a:fontRef>
-        </p:style>
-        <p:txBody>
-          <a:bodyPr rtlCol="0" anchor="ctr"/>
-          <a:lstStyle/>
-          <a:p/>
-        </p:txBody>
-      </p:sp>
-      <p:sp>
-        <p:nvSpPr>
-          <p:cNvPr id="51" name="Text 49"/>
-          <p:cNvSpPr txBox="1"/>
-          <p:nvPr/>
-        </p:nvSpPr>
-        <p:spPr>
-          <a:xfrm>
-            <a:off x="10636504" y="1591056"/>
-            <a:ext cx="976376" cy="402336"/>
-          </a:xfrm>
-          <a:prstGeom prst="rect">
-            <a:avLst/>
-          </a:prstGeom>
-          <a:noFill/>
-        </p:spPr>
-        <p:txBody>
-          <a:bodyPr wrap="square" lIns="0" rIns="0" tIns="0" bIns="0" anchor="ctr">
-            <a:spAutoFit/>
-          </a:bodyPr>
-          <a:lstStyle/>
-          <a:p>
-            <a:r>
-              <a:rPr sz="1600" b="0" i="0">
-                <a:solidFill>
-                  <a:srgbClr val="F2F2F2"/>
-                </a:solidFill>
-                <a:latin typeface="Trenda IG Text"/>
-              </a:rPr>
-              <a:t>$4.79M</a:t>
-            </a:r>
-          </a:p>
-        </p:txBody>
-      </p:sp>
-      <p:sp>
-        <p:nvSpPr>
-          <p:cNvPr id="52" name="Text 50"/>
-          <p:cNvSpPr txBox="1"/>
-          <p:nvPr/>
-        </p:nvSpPr>
-        <p:spPr>
-          <a:xfrm>
-            <a:off x="10636504" y="1993392"/>
-            <a:ext cx="976376" cy="420624"/>
-          </a:xfrm>
-          <a:prstGeom prst="rect">
-            <a:avLst/>
-          </a:prstGeom>
-          <a:noFill/>
-        </p:spPr>
-        <p:txBody>
-          <a:bodyPr wrap="square" lIns="0" rIns="0" tIns="0" bIns="0" anchor="t">
-            <a:spAutoFit/>
-          </a:bodyPr>
-          <a:lstStyle/>
-          <a:p>
-            <a:r>
-              <a:rPr sz="590" b="0" i="0">
-                <a:solidFill>
-                  <a:srgbClr val="B3B3B3"/>
-                </a:solidFill>
-                <a:latin typeface="Trenda IG Text"/>
-              </a:rPr>
-              <a:t>fixed fee, paid as each gate is signed</a:t>
-            </a:r>
-          </a:p>
-        </p:txBody>
-      </p:sp>
-      <p:sp>
-        <p:nvSpPr>
-          <p:cNvPr id="53" name="Text 51"/>
-          <p:cNvSpPr txBox="1"/>
-          <p:nvPr/>
-        </p:nvSpPr>
-        <p:spPr>
-          <a:xfrm>
-            <a:off x="8189976" y="2542032"/>
-            <a:ext cx="3459480" cy="457200"/>
-          </a:xfrm>
-          <a:prstGeom prst="rect">
-            <a:avLst/>
-          </a:prstGeom>
-          <a:noFill/>
-        </p:spPr>
-        <p:txBody>
-          <a:bodyPr wrap="square" lIns="0" rIns="0" tIns="0" bIns="0" anchor="t">
-            <a:spAutoFit/>
-          </a:bodyPr>
-          <a:lstStyle/>
-          <a:p>
-            <a:r>
-              <a:rPr sz="600" b="1" i="0">
-                <a:solidFill>
-                  <a:srgbClr val="F2F2F2"/>
-                </a:solidFill>
-                <a:latin typeface="Trenda IG Text"/>
-              </a:rPr>
-              <a:t>From month 19 </a:t>
-            </a:r>
-            <a:r>
-              <a:rPr sz="600" b="0" i="0">
-                <a:solidFill>
-                  <a:srgbClr val="B3B3B3"/>
-                </a:solidFill>
-                <a:latin typeface="Trenda IG Text"/>
-              </a:rPr>
-              <a:t>a run team of 4 keeps the graph, agents and evals current: about $1.24M a year with platform usage.</a:t>
-            </a:r>
-          </a:p>
-        </p:txBody>
-      </p:sp>
-      <p:sp>
-        <p:nvSpPr>
-          <p:cNvPr id="54" name="Shape 52"/>
-          <p:cNvSpPr/>
-          <p:nvPr/>
-        </p:nvSpPr>
-        <p:spPr>
-          <a:xfrm>
-            <a:off x="411480" y="3291840"/>
-            <a:ext cx="11365992" cy="1965960"/>
-          </a:xfrm>
-          <a:prstGeom prst="roundRect">
-            <a:avLst>
-              <a:gd name="adj" fmla="val 2000"/>
-            </a:avLst>
-          </a:prstGeom>
-          <a:solidFill>
-            <a:srgbClr val="1E1E1E"/>
-          </a:solidFill>
-          <a:ln>
-            <a:noFill/>
-          </a:ln>
-          <a:effectLst/>
-        </p:spPr>
-        <p:style>
-          <a:lnRef idx="1">
-            <a:schemeClr val="accent1"/>
-          </a:lnRef>
-          <a:fillRef idx="3">
-            <a:schemeClr val="accent1"/>
-          </a:fillRef>
-          <a:effectRef idx="2">
-            <a:schemeClr val="accent1"/>
-          </a:effectRef>
-          <a:fontRef idx="minor">
-            <a:schemeClr val="lt1"/>
-          </a:fontRef>
-        </p:style>
-        <p:txBody>
-          <a:bodyPr rtlCol="0" anchor="ctr"/>
-          <a:lstStyle/>
-          <a:p/>
-        </p:txBody>
-      </p:sp>
-      <p:sp>
-        <p:nvSpPr>
-          <p:cNvPr id="55" name="Shape 53"/>
-          <p:cNvSpPr/>
-          <p:nvPr/>
-        </p:nvSpPr>
-        <p:spPr>
-          <a:xfrm>
-            <a:off x="411480" y="3291840"/>
-            <a:ext cx="11365992" cy="256032"/>
-          </a:xfrm>
-          <a:prstGeom prst="rect">
-            <a:avLst/>
-          </a:prstGeom>
-          <a:solidFill>
-            <a:srgbClr val="2B2B2B"/>
-          </a:solidFill>
-          <a:ln>
-            <a:noFill/>
-          </a:ln>
-          <a:effectLst/>
-        </p:spPr>
-        <p:style>
-          <a:lnRef idx="1">
-            <a:schemeClr val="accent1"/>
-          </a:lnRef>
-          <a:fillRef idx="3">
-            <a:schemeClr val="accent1"/>
-          </a:fillRef>
-          <a:effectRef idx="2">
-            <a:schemeClr val="accent1"/>
-          </a:effectRef>
-          <a:fontRef idx="minor">
-            <a:schemeClr val="lt1"/>
-          </a:fontRef>
-        </p:style>
-        <p:txBody>
-          <a:bodyPr rtlCol="0" anchor="ctr"/>
-          <a:lstStyle/>
-          <a:p/>
-        </p:txBody>
-      </p:sp>
-      <p:sp>
-        <p:nvSpPr>
-          <p:cNvPr id="56" name="Text 54"/>
-          <p:cNvSpPr txBox="1"/>
-          <p:nvPr/>
-        </p:nvSpPr>
-        <p:spPr>
-          <a:xfrm>
-            <a:off x="521208" y="3291840"/>
-            <a:ext cx="11146536" cy="256032"/>
-          </a:xfrm>
-          <a:prstGeom prst="rect">
-            <a:avLst/>
-          </a:prstGeom>
-          <a:noFill/>
-        </p:spPr>
-        <p:txBody>
-          <a:bodyPr wrap="square" lIns="0" rIns="0" tIns="0" bIns="0" anchor="ctr">
-            <a:spAutoFit/>
-          </a:bodyPr>
-          <a:lstStyle/>
-          <a:p>
-            <a:r>
-              <a:rPr sz="640" b="1" i="0" spc="120">
-                <a:solidFill>
-                  <a:srgbClr val="F2F2F2"/>
-                </a:solidFill>
-                <a:latin typeface="Trenda IG Text"/>
-              </a:rPr>
-              <a:t>THE RETURN</a:t>
-            </a:r>
-            <a:r>
-              <a:rPr sz="640" b="0" i="0">
-                <a:solidFill>
-                  <a:srgbClr val="B3B3B3"/>
-                </a:solidFill>
-                <a:latin typeface="Trenda IG Text"/>
-              </a:rPr>
-              <a:t>   target · first full year after go-live</a:t>
-            </a:r>
-          </a:p>
-        </p:txBody>
-      </p:sp>
-      <p:sp>
-        <p:nvSpPr>
-          <p:cNvPr id="57" name="Shape 55"/>
-          <p:cNvSpPr/>
-          <p:nvPr/>
-        </p:nvSpPr>
-        <p:spPr>
-          <a:xfrm>
-            <a:off x="539496" y="3639312"/>
-            <a:ext cx="1796796" cy="1490472"/>
-          </a:xfrm>
-          <a:prstGeom prst="rect">
-            <a:avLst/>
-          </a:prstGeom>
-          <a:solidFill>
-            <a:srgbClr val="141414"/>
-          </a:solidFill>
-          <a:ln>
-            <a:noFill/>
-          </a:ln>
-          <a:effectLst/>
-        </p:spPr>
-        <p:style>
-          <a:lnRef idx="1">
-            <a:schemeClr val="accent1"/>
-          </a:lnRef>
-          <a:fillRef idx="3">
-            <a:schemeClr val="accent1"/>
-          </a:fillRef>
-          <a:effectRef idx="2">
-            <a:schemeClr val="accent1"/>
-          </a:effectRef>
-          <a:fontRef idx="minor">
-            <a:schemeClr val="lt1"/>
-          </a:fontRef>
-        </p:style>
-        <p:txBody>
-          <a:bodyPr rtlCol="0" anchor="ctr"/>
-          <a:lstStyle/>
-          <a:p/>
-        </p:txBody>
-      </p:sp>
-      <p:sp>
-        <p:nvSpPr>
-          <p:cNvPr id="58" name="Text 56"/>
-          <p:cNvSpPr txBox="1"/>
-          <p:nvPr/>
-        </p:nvSpPr>
-        <p:spPr>
-          <a:xfrm>
-            <a:off x="667512" y="3977639"/>
-            <a:ext cx="1577340" cy="457200"/>
-          </a:xfrm>
-          <a:prstGeom prst="rect">
-            <a:avLst/>
-          </a:prstGeom>
-          <a:noFill/>
-        </p:spPr>
-        <p:txBody>
-          <a:bodyPr wrap="square" lIns="0" rIns="0" tIns="0" bIns="0" anchor="ctr">
-            <a:spAutoFit/>
-          </a:bodyPr>
-          <a:lstStyle/>
-          <a:p>
-            <a:r>
-              <a:rPr sz="2200" b="0" i="0">
-                <a:solidFill>
-                  <a:srgbClr val="F2F2F2"/>
-                </a:solidFill>
-                <a:latin typeface="Trenda IG Text"/>
-              </a:rPr>
-              <a:t>$16M</a:t>
-            </a:r>
-          </a:p>
-        </p:txBody>
-      </p:sp>
-      <p:sp>
-        <p:nvSpPr>
-          <p:cNvPr id="59" name="Text 57"/>
-          <p:cNvSpPr txBox="1"/>
-          <p:nvPr/>
-        </p:nvSpPr>
-        <p:spPr>
-          <a:xfrm>
-            <a:off x="667512" y="4453127"/>
-            <a:ext cx="1577340" cy="201168"/>
-          </a:xfrm>
-          <a:prstGeom prst="rect">
-            <a:avLst/>
-          </a:prstGeom>
-          <a:noFill/>
-        </p:spPr>
-        <p:txBody>
-          <a:bodyPr wrap="square" lIns="0" rIns="0" tIns="0" bIns="0" anchor="ctr">
-            <a:spAutoFit/>
-          </a:bodyPr>
-          <a:lstStyle/>
-          <a:p>
-            <a:r>
-              <a:rPr sz="700" b="1" i="0">
-                <a:solidFill>
-                  <a:srgbClr val="F2F2F2"/>
-                </a:solidFill>
-                <a:latin typeface="Trenda IG Text"/>
-              </a:rPr>
-              <a:t>a year today</a:t>
-            </a:r>
-          </a:p>
-        </p:txBody>
-      </p:sp>
-      <p:sp>
-        <p:nvSpPr>
-          <p:cNvPr id="60" name="Text 58"/>
-          <p:cNvSpPr txBox="1"/>
-          <p:nvPr/>
-        </p:nvSpPr>
-        <p:spPr>
-          <a:xfrm>
-            <a:off x="667512" y="4654296"/>
-            <a:ext cx="1577340" cy="201168"/>
-          </a:xfrm>
-          <a:prstGeom prst="rect">
-            <a:avLst/>
-          </a:prstGeom>
-          <a:noFill/>
-        </p:spPr>
-        <p:txBody>
-          <a:bodyPr wrap="square" lIns="0" rIns="0" tIns="0" bIns="0" anchor="ctr">
-            <a:spAutoFit/>
-          </a:bodyPr>
-          <a:lstStyle/>
-          <a:p>
-            <a:r>
-              <a:rPr sz="600" b="0" i="0">
-                <a:solidFill>
-                  <a:srgbClr val="B3B3B3"/>
-                </a:solidFill>
-                <a:latin typeface="Trenda IG Text"/>
-              </a:rPr>
-              <a:t>as provided by Ascension</a:t>
-            </a:r>
-          </a:p>
-        </p:txBody>
-      </p:sp>
-      <p:sp>
-        <p:nvSpPr>
-          <p:cNvPr id="61" name="Shape 59"/>
-          <p:cNvSpPr/>
-          <p:nvPr/>
-        </p:nvSpPr>
-        <p:spPr>
-          <a:xfrm>
-            <a:off x="2427732" y="3639312"/>
-            <a:ext cx="1796796" cy="1490472"/>
-          </a:xfrm>
-          <a:prstGeom prst="rect">
-            <a:avLst/>
-          </a:prstGeom>
-          <a:solidFill>
-            <a:srgbClr val="141414"/>
-          </a:solidFill>
-          <a:ln>
-            <a:noFill/>
-          </a:ln>
-          <a:effectLst/>
-        </p:spPr>
-        <p:style>
-          <a:lnRef idx="1">
-            <a:schemeClr val="accent1"/>
-          </a:lnRef>
-          <a:fillRef idx="3">
-            <a:schemeClr val="accent1"/>
-          </a:fillRef>
-          <a:effectRef idx="2">
-            <a:schemeClr val="accent1"/>
-          </a:effectRef>
-          <a:fontRef idx="minor">
-            <a:schemeClr val="lt1"/>
-          </a:fontRef>
-        </p:style>
-        <p:txBody>
-          <a:bodyPr rtlCol="0" anchor="ctr"/>
-          <a:lstStyle/>
-          <a:p/>
-        </p:txBody>
-      </p:sp>
-      <p:sp>
-        <p:nvSpPr>
-          <p:cNvPr id="62" name="Text 60"/>
           <p:cNvSpPr txBox="1"/>
           <p:nvPr/>
         </p:nvSpPr>
@@ -6333,7 +5798,7 @@
       </p:sp>
       <p:sp>
         <p:nvSpPr>
-          <p:cNvPr id="63" name="Text 61"/>
+          <p:cNvPr id="50" name="Text 48"/>
           <p:cNvSpPr txBox="1"/>
           <p:nvPr/>
         </p:nvSpPr>
@@ -6367,7 +5832,7 @@
       </p:sp>
       <p:sp>
         <p:nvSpPr>
-          <p:cNvPr id="64" name="Text 62"/>
+          <p:cNvPr id="51" name="Text 49"/>
           <p:cNvSpPr txBox="1"/>
           <p:nvPr/>
         </p:nvSpPr>
@@ -6401,7 +5866,7 @@
       </p:sp>
       <p:sp>
         <p:nvSpPr>
-          <p:cNvPr id="65" name="Differentiator Border 64"/>
+          <p:cNvPr id="52" name="Differentiator Border 51"/>
           <p:cNvSpPr/>
           <p:nvPr/>
         </p:nvSpPr>
@@ -6454,7 +5919,7 @@
       </p:sp>
       <p:sp>
         <p:nvSpPr>
-          <p:cNvPr id="66" name="Shape 65"/>
+          <p:cNvPr id="53" name="Shape 52"/>
           <p:cNvSpPr/>
           <p:nvPr/>
         </p:nvSpPr>
@@ -6496,7 +5961,7 @@
       </p:sp>
       <p:sp>
         <p:nvSpPr>
-          <p:cNvPr id="67" name="Text 66"/>
+          <p:cNvPr id="54" name="Text 53"/>
           <p:cNvSpPr txBox="1"/>
           <p:nvPr/>
         </p:nvSpPr>
@@ -6530,7 +5995,7 @@
       </p:sp>
       <p:sp>
         <p:nvSpPr>
-          <p:cNvPr id="68" name="Text 67"/>
+          <p:cNvPr id="55" name="Text 54"/>
           <p:cNvSpPr txBox="1"/>
           <p:nvPr/>
         </p:nvSpPr>
@@ -6564,7 +6029,7 @@
       </p:sp>
       <p:sp>
         <p:nvSpPr>
-          <p:cNvPr id="69" name="Text 68"/>
+          <p:cNvPr id="56" name="Text 55"/>
           <p:cNvSpPr txBox="1"/>
           <p:nvPr/>
         </p:nvSpPr>
@@ -6598,7 +6063,7 @@
       </p:sp>
       <p:sp>
         <p:nvSpPr>
-          <p:cNvPr id="70" name="Shape 69"/>
+          <p:cNvPr id="57" name="Shape 56"/>
           <p:cNvSpPr/>
           <p:nvPr/>
         </p:nvSpPr>
@@ -6640,7 +6105,7 @@
       </p:sp>
       <p:sp>
         <p:nvSpPr>
-          <p:cNvPr id="71" name="Text 70"/>
+          <p:cNvPr id="58" name="Text 57"/>
           <p:cNvSpPr txBox="1"/>
           <p:nvPr/>
         </p:nvSpPr>
@@ -6674,7 +6139,7 @@
       </p:sp>
       <p:sp>
         <p:nvSpPr>
-          <p:cNvPr id="72" name="Text 71"/>
+          <p:cNvPr id="59" name="Text 58"/>
           <p:cNvSpPr txBox="1"/>
           <p:nvPr/>
         </p:nvSpPr>
@@ -6708,7 +6173,7 @@
       </p:sp>
       <p:sp>
         <p:nvSpPr>
-          <p:cNvPr id="73" name="Text 72"/>
+          <p:cNvPr id="60" name="Text 59"/>
           <p:cNvSpPr txBox="1"/>
           <p:nvPr/>
         </p:nvSpPr>
@@ -6742,7 +6207,7 @@
       </p:sp>
       <p:sp>
         <p:nvSpPr>
-          <p:cNvPr id="74" name="Shape 73"/>
+          <p:cNvPr id="61" name="Shape 60"/>
           <p:cNvSpPr/>
           <p:nvPr/>
         </p:nvSpPr>
@@ -6784,7 +6249,7 @@
       </p:sp>
       <p:sp>
         <p:nvSpPr>
-          <p:cNvPr id="75" name="Shape 74"/>
+          <p:cNvPr id="62" name="Shape 61"/>
           <p:cNvSpPr/>
           <p:nvPr/>
         </p:nvSpPr>
@@ -6837,7 +6302,7 @@
       </p:sp>
       <p:sp>
         <p:nvSpPr>
-          <p:cNvPr id="76" name="Text 75"/>
+          <p:cNvPr id="63" name="Text 62"/>
           <p:cNvSpPr txBox="1"/>
           <p:nvPr/>
         </p:nvSpPr>
@@ -6892,7 +6357,7 @@
       </p:sp>
       <p:sp>
         <p:nvSpPr>
-          <p:cNvPr id="77" name="Shape 76"/>
+          <p:cNvPr id="64" name="Shape 63"/>
           <p:cNvSpPr/>
           <p:nvPr/>
         </p:nvSpPr>
@@ -6934,7 +6399,7 @@
       </p:sp>
       <p:sp>
         <p:nvSpPr>
-          <p:cNvPr id="78" name="Shape 77"/>
+          <p:cNvPr id="65" name="Shape 64"/>
           <p:cNvSpPr/>
           <p:nvPr/>
         </p:nvSpPr>
@@ -6987,7 +6452,7 @@
       </p:sp>
       <p:sp>
         <p:nvSpPr>
-          <p:cNvPr id="79" name="Text 78"/>
+          <p:cNvPr id="66" name="Text 65"/>
           <p:cNvSpPr txBox="1"/>
           <p:nvPr/>
         </p:nvSpPr>
@@ -7042,7 +6507,7 @@
       </p:sp>
       <p:sp>
         <p:nvSpPr>
-          <p:cNvPr id="80" name="Text 79"/>
+          <p:cNvPr id="67" name="Text 66"/>
           <p:cNvSpPr txBox="1"/>
           <p:nvPr/>
         </p:nvSpPr>
@@ -7097,7 +6562,7 @@
       </p:sp>
       <p:sp>
         <p:nvSpPr>
-          <p:cNvPr id="81" name="Shape 80"/>
+          <p:cNvPr id="68" name="Shape 67"/>
           <p:cNvSpPr/>
           <p:nvPr/>
         </p:nvSpPr>
@@ -7139,7 +6604,7 @@
       </p:sp>
       <p:sp>
         <p:nvSpPr>
-          <p:cNvPr id="82" name="Shape 81"/>
+          <p:cNvPr id="69" name="Shape 68"/>
           <p:cNvSpPr/>
           <p:nvPr/>
         </p:nvSpPr>
@@ -7181,7 +6646,7 @@
       </p:sp>
       <p:sp>
         <p:nvSpPr>
-          <p:cNvPr id="83" name="Text 82"/>
+          <p:cNvPr id="70" name="Text 69"/>
           <p:cNvSpPr txBox="1"/>
           <p:nvPr/>
         </p:nvSpPr>
@@ -7236,7 +6701,7 @@
       </p:sp>
       <p:sp>
         <p:nvSpPr>
-          <p:cNvPr id="84" name="Shape 83"/>
+          <p:cNvPr id="71" name="Shape 70"/>
           <p:cNvSpPr/>
           <p:nvPr/>
         </p:nvSpPr>
@@ -7278,7 +6743,7 @@
       </p:sp>
       <p:sp>
         <p:nvSpPr>
-          <p:cNvPr id="85" name="Shape 84"/>
+          <p:cNvPr id="72" name="Shape 71"/>
           <p:cNvSpPr/>
           <p:nvPr/>
         </p:nvSpPr>
@@ -7320,7 +6785,7 @@
       </p:sp>
       <p:sp>
         <p:nvSpPr>
-          <p:cNvPr id="86" name="Text 85"/>
+          <p:cNvPr id="73" name="Text 72"/>
           <p:cNvSpPr txBox="1"/>
           <p:nvPr/>
         </p:nvSpPr>
@@ -7375,7 +6840,7 @@
       </p:sp>
       <p:sp>
         <p:nvSpPr>
-          <p:cNvPr id="87" name="Shape 86"/>
+          <p:cNvPr id="74" name="Shape 73"/>
           <p:cNvSpPr/>
           <p:nvPr/>
         </p:nvSpPr>
@@ -7417,7 +6882,7 @@
       </p:sp>
       <p:sp>
         <p:nvSpPr>
-          <p:cNvPr id="88" name="Shape 87"/>
+          <p:cNvPr id="75" name="Shape 74"/>
           <p:cNvSpPr/>
           <p:nvPr/>
         </p:nvSpPr>
@@ -7459,7 +6924,7 @@
       </p:sp>
       <p:sp>
         <p:nvSpPr>
-          <p:cNvPr id="89" name="Text 88"/>
+          <p:cNvPr id="76" name="Text 75"/>
           <p:cNvSpPr txBox="1"/>
           <p:nvPr/>
         </p:nvSpPr>
@@ -7514,7 +6979,7 @@
       </p:sp>
       <p:sp>
         <p:nvSpPr>
-          <p:cNvPr id="90" name="Shape 89"/>
+          <p:cNvPr id="77" name="Shape 76"/>
           <p:cNvSpPr/>
           <p:nvPr/>
         </p:nvSpPr>
@@ -7556,7 +7021,7 @@
       </p:sp>
       <p:sp>
         <p:nvSpPr>
-          <p:cNvPr id="91" name="Shape 90"/>
+          <p:cNvPr id="78" name="Shape 77"/>
           <p:cNvSpPr/>
           <p:nvPr/>
         </p:nvSpPr>
@@ -7598,7 +7063,7 @@
       </p:sp>
       <p:sp>
         <p:nvSpPr>
-          <p:cNvPr id="92" name="Text 91"/>
+          <p:cNvPr id="79" name="Text 78"/>
           <p:cNvSpPr txBox="1"/>
           <p:nvPr/>
         </p:nvSpPr>

--- a/poc/data_harness/Ascension Agentic Harness - Data Harness.pptx
+++ b/poc/data_harness/Ascension Agentic Harness - Data Harness.pptx
@@ -1495,6 +1495,11 @@
           </a:p>
           <a:p>
             <a:r>
+              <a:t>- The pod: what changes for every pod (pilot targets, baselined per pod): a new engineer is productive in about a week instead of 4-6 weeks, because they ask the graph; agents work overnight, so delivery runs about 20 hours a day instead of office hours; every change is checked against the same standards; a new pod goes live on the platform in 2 weeks instead of about 2 months. The same team delivers 1.4-1.6x the output, or the same scope with 20-30% fewer people.</a:t>
+            </a:r>
+          </a:p>
+          <a:p>
+            <a:r>
               <a:t>- The build: 17 people at peak, 10 roles, 18 months, $4.79M fixed fee paid only when each gate is signed. From month 19 a run team of 4 keeps it running, about $1.24M a year with platform usage.</a:t>
             </a:r>
           </a:p>
@@ -4006,7 +4011,7 @@
         <p:spPr>
           <a:xfrm>
             <a:off x="411480" y="1188720"/>
-            <a:ext cx="5628132" cy="1965960"/>
+            <a:ext cx="3715512" cy="1965960"/>
           </a:xfrm>
           <a:prstGeom prst="roundRect">
             <a:avLst>
@@ -4050,7 +4055,7 @@
         <p:spPr>
           <a:xfrm>
             <a:off x="411480" y="1188720"/>
-            <a:ext cx="5628132" cy="256032"/>
+            <a:ext cx="3715512" cy="256032"/>
           </a:xfrm>
           <a:prstGeom prst="rect">
             <a:avLst/>
@@ -4092,7 +4097,7 @@
         <p:spPr>
           <a:xfrm>
             <a:off x="521208" y="1188720"/>
-            <a:ext cx="5408676" cy="256032"/>
+            <a:ext cx="3496056" cy="256032"/>
           </a:xfrm>
           <a:prstGeom prst="rect">
             <a:avLst/>
@@ -4169,7 +4174,7 @@
         <p:spPr>
           <a:xfrm>
             <a:off x="539496" y="1719072"/>
-            <a:ext cx="1030528" cy="274320"/>
+            <a:ext cx="648004" cy="274320"/>
           </a:xfrm>
           <a:prstGeom prst="roundRect">
             <a:avLst>
@@ -4215,7 +4220,7 @@
         <p:spPr>
           <a:xfrm>
             <a:off x="539496" y="1719072"/>
-            <a:ext cx="1030528" cy="274320"/>
+            <a:ext cx="648004" cy="274320"/>
           </a:xfrm>
           <a:prstGeom prst="rect">
             <a:avLst/>
@@ -4249,8 +4254,8 @@
         </p:nvSpPr>
         <p:spPr>
           <a:xfrm>
-            <a:off x="1624888" y="1719072"/>
-            <a:ext cx="1030528" cy="274320"/>
+            <a:off x="1242364" y="1719072"/>
+            <a:ext cx="648004" cy="274320"/>
           </a:xfrm>
           <a:prstGeom prst="roundRect">
             <a:avLst>
@@ -4295,8 +4300,8 @@
         </p:nvSpPr>
         <p:spPr>
           <a:xfrm>
-            <a:off x="1624888" y="1719072"/>
-            <a:ext cx="1030528" cy="274320"/>
+            <a:off x="1242364" y="1719072"/>
+            <a:ext cx="648004" cy="274320"/>
           </a:xfrm>
           <a:prstGeom prst="rect">
             <a:avLst/>
@@ -4330,8 +4335,8 @@
         </p:nvSpPr>
         <p:spPr>
           <a:xfrm>
-            <a:off x="2710281" y="1719072"/>
-            <a:ext cx="1030528" cy="274320"/>
+            <a:off x="1945233" y="1719072"/>
+            <a:ext cx="648004" cy="274320"/>
           </a:xfrm>
           <a:prstGeom prst="roundRect">
             <a:avLst>
@@ -4376,8 +4381,8 @@
         </p:nvSpPr>
         <p:spPr>
           <a:xfrm>
-            <a:off x="2710281" y="1719072"/>
-            <a:ext cx="1030528" cy="274320"/>
+            <a:off x="1945233" y="1719072"/>
+            <a:ext cx="648004" cy="274320"/>
           </a:xfrm>
           <a:prstGeom prst="rect">
             <a:avLst/>
@@ -4411,8 +4416,8 @@
         </p:nvSpPr>
         <p:spPr>
           <a:xfrm>
-            <a:off x="3795674" y="1719072"/>
-            <a:ext cx="1030528" cy="274320"/>
+            <a:off x="2648102" y="1719072"/>
+            <a:ext cx="648004" cy="274320"/>
           </a:xfrm>
           <a:prstGeom prst="roundRect">
             <a:avLst>
@@ -4457,8 +4462,8 @@
         </p:nvSpPr>
         <p:spPr>
           <a:xfrm>
-            <a:off x="3795674" y="1719072"/>
-            <a:ext cx="1030528" cy="274320"/>
+            <a:off x="2648102" y="1719072"/>
+            <a:ext cx="648004" cy="274320"/>
           </a:xfrm>
           <a:prstGeom prst="rect">
             <a:avLst/>
@@ -4492,8 +4497,8 @@
         </p:nvSpPr>
         <p:spPr>
           <a:xfrm>
-            <a:off x="4881067" y="1719072"/>
-            <a:ext cx="1030528" cy="274320"/>
+            <a:off x="3350971" y="1719072"/>
+            <a:ext cx="648004" cy="274320"/>
           </a:xfrm>
           <a:prstGeom prst="roundRect">
             <a:avLst>
@@ -4538,8 +4543,8 @@
         </p:nvSpPr>
         <p:spPr>
           <a:xfrm>
-            <a:off x="4881067" y="1719072"/>
-            <a:ext cx="1030528" cy="274320"/>
+            <a:off x="3350971" y="1719072"/>
+            <a:ext cx="648004" cy="274320"/>
           </a:xfrm>
           <a:prstGeom prst="rect">
             <a:avLst/>
@@ -4608,7 +4613,7 @@
         <p:spPr>
           <a:xfrm>
             <a:off x="539496" y="2267712"/>
-            <a:ext cx="1754124" cy="274320"/>
+            <a:ext cx="1116584" cy="274320"/>
           </a:xfrm>
           <a:prstGeom prst="roundRect">
             <a:avLst>
@@ -4654,7 +4659,7 @@
         <p:spPr>
           <a:xfrm>
             <a:off x="539496" y="2267712"/>
-            <a:ext cx="1754124" cy="274320"/>
+            <a:ext cx="1116584" cy="274320"/>
           </a:xfrm>
           <a:prstGeom prst="rect">
             <a:avLst/>
@@ -4688,8 +4693,8 @@
         </p:nvSpPr>
         <p:spPr>
           <a:xfrm>
-            <a:off x="2348484" y="2267712"/>
-            <a:ext cx="1754124" cy="274320"/>
+            <a:off x="1710944" y="2267712"/>
+            <a:ext cx="1116584" cy="274320"/>
           </a:xfrm>
           <a:prstGeom prst="roundRect">
             <a:avLst>
@@ -4742,7 +4747,7 @@
         </p:blipFill>
         <p:spPr>
           <a:xfrm>
-            <a:off x="2421636" y="2322576"/>
+            <a:off x="1784096" y="2322576"/>
             <a:ext cx="164592" cy="164592"/>
           </a:xfrm>
           <a:prstGeom prst="rect">
@@ -4758,8 +4763,8 @@
         </p:nvSpPr>
         <p:spPr>
           <a:xfrm>
-            <a:off x="2567940" y="2267712"/>
-            <a:ext cx="1498091" cy="274320"/>
+            <a:off x="1930400" y="2267712"/>
+            <a:ext cx="860551" cy="274320"/>
           </a:xfrm>
           <a:prstGeom prst="rect">
             <a:avLst/>
@@ -4793,8 +4798,8 @@
         </p:nvSpPr>
         <p:spPr>
           <a:xfrm>
-            <a:off x="4157472" y="2267712"/>
-            <a:ext cx="1754124" cy="274320"/>
+            <a:off x="2882392" y="2267712"/>
+            <a:ext cx="1116584" cy="274320"/>
           </a:xfrm>
           <a:prstGeom prst="roundRect">
             <a:avLst>
@@ -4839,8 +4844,8 @@
         </p:nvSpPr>
         <p:spPr>
           <a:xfrm>
-            <a:off x="4157472" y="2267712"/>
-            <a:ext cx="1754124" cy="274320"/>
+            <a:off x="2882392" y="2267712"/>
+            <a:ext cx="1116584" cy="274320"/>
           </a:xfrm>
           <a:prstGeom prst="rect">
             <a:avLst/>
@@ -4875,7 +4880,7 @@
         <p:spPr>
           <a:xfrm>
             <a:off x="539496" y="2615184"/>
-            <a:ext cx="5372100" cy="384048"/>
+            <a:ext cx="3459480" cy="384048"/>
           </a:xfrm>
           <a:prstGeom prst="rect">
             <a:avLst/>
@@ -4953,8 +4958,8 @@
         </p:nvSpPr>
         <p:spPr>
           <a:xfrm>
-            <a:off x="6149340" y="1188720"/>
-            <a:ext cx="5628132" cy="1965960"/>
+            <a:off x="4236720" y="1188720"/>
+            <a:ext cx="3715512" cy="1965960"/>
           </a:xfrm>
           <a:prstGeom prst="roundRect">
             <a:avLst>
@@ -4997,8 +5002,8 @@
         </p:nvSpPr>
         <p:spPr>
           <a:xfrm>
-            <a:off x="6149340" y="1188720"/>
-            <a:ext cx="5628132" cy="256032"/>
+            <a:off x="4236720" y="1188720"/>
+            <a:ext cx="3715512" cy="256032"/>
           </a:xfrm>
           <a:prstGeom prst="rect">
             <a:avLst/>
@@ -5039,8 +5044,8 @@
         </p:nvSpPr>
         <p:spPr>
           <a:xfrm>
-            <a:off x="6259068" y="1188720"/>
-            <a:ext cx="5408676" cy="256032"/>
+            <a:off x="4346448" y="1188720"/>
+            <a:ext cx="3496056" cy="256032"/>
           </a:xfrm>
           <a:prstGeom prst="rect">
             <a:avLst/>
@@ -5060,7 +5065,7 @@
                 </a:solidFill>
                 <a:latin typeface="Trenda IG Text"/>
               </a:rPr>
-              <a:t>THE BUILD AND RUN</a:t>
+              <a:t>THE POD</a:t>
             </a:r>
             <a:r>
               <a:rPr sz="640" b="0" i="0">
@@ -5069,21 +5074,89 @@
                 </a:solidFill>
                 <a:latin typeface="Trenda IG Text"/>
               </a:rPr>
-              <a:t>   fixed fee, paid by gate</a:t>
-            </a:r>
-          </a:p>
-        </p:txBody>
-      </p:sp>
-      <p:sp>
-        <p:nvSpPr>
-          <p:cNvPr id="31" name="Shape 29"/>
+              <a:t>   what changes for every pod</a:t>
+            </a:r>
+          </a:p>
+        </p:txBody>
+      </p:sp>
+      <p:sp>
+        <p:nvSpPr>
+          <p:cNvPr id="31" name="Text 29"/>
+          <p:cNvSpPr txBox="1"/>
+          <p:nvPr/>
+        </p:nvSpPr>
+        <p:spPr>
+          <a:xfrm>
+            <a:off x="5608320" y="1517904"/>
+            <a:ext cx="914400" cy="164592"/>
+          </a:xfrm>
+          <a:prstGeom prst="rect">
+            <a:avLst/>
+          </a:prstGeom>
+          <a:noFill/>
+        </p:spPr>
+        <p:txBody>
+          <a:bodyPr wrap="square" lIns="0" rIns="0" tIns="0" bIns="0" anchor="ctr">
+            <a:spAutoFit/>
+          </a:bodyPr>
+          <a:lstStyle/>
+          <a:p>
+            <a:r>
+              <a:rPr sz="540" b="1" i="0" spc="100">
+                <a:solidFill>
+                  <a:srgbClr val="8C8C8C"/>
+                </a:solidFill>
+                <a:latin typeface="Trenda IG Text"/>
+              </a:rPr>
+              <a:t>TODAY</a:t>
+            </a:r>
+          </a:p>
+        </p:txBody>
+      </p:sp>
+      <p:sp>
+        <p:nvSpPr>
+          <p:cNvPr id="32" name="Text 30"/>
+          <p:cNvSpPr txBox="1"/>
+          <p:nvPr/>
+        </p:nvSpPr>
+        <p:spPr>
+          <a:xfrm>
+            <a:off x="6614160" y="1517904"/>
+            <a:ext cx="1280160" cy="164592"/>
+          </a:xfrm>
+          <a:prstGeom prst="rect">
+            <a:avLst/>
+          </a:prstGeom>
+          <a:noFill/>
+        </p:spPr>
+        <p:txBody>
+          <a:bodyPr wrap="square" lIns="0" rIns="0" tIns="0" bIns="0" anchor="ctr">
+            <a:spAutoFit/>
+          </a:bodyPr>
+          <a:lstStyle/>
+          <a:p>
+            <a:r>
+              <a:rPr sz="540" b="1" i="0" spc="100">
+                <a:solidFill>
+                  <a:srgbClr val="00D6F2"/>
+                </a:solidFill>
+                <a:latin typeface="Trenda IG Text"/>
+              </a:rPr>
+              <a:t>WITH THE HARNESS</a:t>
+            </a:r>
+          </a:p>
+        </p:txBody>
+      </p:sp>
+      <p:sp>
+        <p:nvSpPr>
+          <p:cNvPr id="33" name="Shape 31"/>
           <p:cNvSpPr/>
           <p:nvPr/>
         </p:nvSpPr>
         <p:spPr>
           <a:xfrm>
-            <a:off x="6277356" y="1554480"/>
-            <a:ext cx="1741932" cy="896112"/>
+            <a:off x="4364736" y="1700784"/>
+            <a:ext cx="3459480" cy="228600"/>
           </a:xfrm>
           <a:prstGeom prst="rect">
             <a:avLst/>
@@ -5118,14 +5191,14 @@
       </p:sp>
       <p:sp>
         <p:nvSpPr>
-          <p:cNvPr id="32" name="Text 30"/>
-          <p:cNvSpPr txBox="1"/>
-          <p:nvPr/>
-        </p:nvSpPr>
-        <p:spPr>
-          <a:xfrm>
-            <a:off x="6368796" y="1591056"/>
-            <a:ext cx="1613916" cy="402336"/>
+          <p:cNvPr id="34" name="Text 32"/>
+          <p:cNvSpPr txBox="1"/>
+          <p:nvPr/>
+        </p:nvSpPr>
+        <p:spPr>
+          <a:xfrm>
+            <a:off x="4437888" y="1700784"/>
+            <a:ext cx="1188720" cy="228600"/>
           </a:xfrm>
           <a:prstGeom prst="rect">
             <a:avLst/>
@@ -5139,61 +5212,95 @@
           <a:lstStyle/>
           <a:p>
             <a:r>
-              <a:rPr sz="1600" b="0" i="0">
+              <a:rPr sz="600" b="1" i="0">
                 <a:solidFill>
                   <a:srgbClr val="F2F2F2"/>
                 </a:solidFill>
                 <a:latin typeface="Trenda IG Text"/>
               </a:rPr>
-              <a:t>17</a:t>
-            </a:r>
-          </a:p>
-        </p:txBody>
-      </p:sp>
-      <p:sp>
-        <p:nvSpPr>
-          <p:cNvPr id="33" name="Text 31"/>
-          <p:cNvSpPr txBox="1"/>
-          <p:nvPr/>
-        </p:nvSpPr>
-        <p:spPr>
-          <a:xfrm>
-            <a:off x="6368796" y="1993392"/>
-            <a:ext cx="1613916" cy="420624"/>
-          </a:xfrm>
-          <a:prstGeom prst="rect">
-            <a:avLst/>
-          </a:prstGeom>
-          <a:noFill/>
-        </p:spPr>
-        <p:txBody>
-          <a:bodyPr wrap="square" lIns="0" rIns="0" tIns="0" bIns="0" anchor="t">
-            <a:spAutoFit/>
-          </a:bodyPr>
-          <a:lstStyle/>
-          <a:p>
-            <a:r>
-              <a:rPr sz="590" b="0" i="0">
+              <a:t>New engineer productive</a:t>
+            </a:r>
+          </a:p>
+        </p:txBody>
+      </p:sp>
+      <p:sp>
+        <p:nvSpPr>
+          <p:cNvPr id="35" name="Text 33"/>
+          <p:cNvSpPr txBox="1"/>
+          <p:nvPr/>
+        </p:nvSpPr>
+        <p:spPr>
+          <a:xfrm>
+            <a:off x="5608320" y="1700784"/>
+            <a:ext cx="987552" cy="228600"/>
+          </a:xfrm>
+          <a:prstGeom prst="rect">
+            <a:avLst/>
+          </a:prstGeom>
+          <a:noFill/>
+        </p:spPr>
+        <p:txBody>
+          <a:bodyPr wrap="square" lIns="0" rIns="0" tIns="0" bIns="0" anchor="ctr">
+            <a:spAutoFit/>
+          </a:bodyPr>
+          <a:lstStyle/>
+          <a:p>
+            <a:r>
+              <a:rPr sz="600" b="0" i="0">
                 <a:solidFill>
                   <a:srgbClr val="B3B3B3"/>
                 </a:solidFill>
                 <a:latin typeface="Trenda IG Text"/>
               </a:rPr>
-              <a:t>people at peak, 10 roles</a:t>
-            </a:r>
-          </a:p>
-        </p:txBody>
-      </p:sp>
-      <p:sp>
-        <p:nvSpPr>
-          <p:cNvPr id="34" name="Shape 32"/>
+              <a:t>4-6 weeks</a:t>
+            </a:r>
+          </a:p>
+        </p:txBody>
+      </p:sp>
+      <p:sp>
+        <p:nvSpPr>
+          <p:cNvPr id="36" name="Text 34"/>
+          <p:cNvSpPr txBox="1"/>
+          <p:nvPr/>
+        </p:nvSpPr>
+        <p:spPr>
+          <a:xfrm>
+            <a:off x="6614160" y="1700784"/>
+            <a:ext cx="1429512" cy="228600"/>
+          </a:xfrm>
+          <a:prstGeom prst="rect">
+            <a:avLst/>
+          </a:prstGeom>
+          <a:noFill/>
+        </p:spPr>
+        <p:txBody>
+          <a:bodyPr wrap="square" lIns="0" rIns="0" tIns="0" bIns="0" anchor="ctr">
+            <a:spAutoFit/>
+          </a:bodyPr>
+          <a:lstStyle/>
+          <a:p>
+            <a:r>
+              <a:rPr sz="600" b="1" i="0">
+                <a:solidFill>
+                  <a:srgbClr val="00D6F2"/>
+                </a:solidFill>
+                <a:latin typeface="Trenda IG Text"/>
+              </a:rPr>
+              <a:t>about 1 week</a:t>
+            </a:r>
+          </a:p>
+        </p:txBody>
+      </p:sp>
+      <p:sp>
+        <p:nvSpPr>
+          <p:cNvPr id="37" name="Shape 35"/>
           <p:cNvSpPr/>
           <p:nvPr/>
         </p:nvSpPr>
         <p:spPr>
           <a:xfrm>
-            <a:off x="8092440" y="1554480"/>
-            <a:ext cx="1741932" cy="896112"/>
+            <a:off x="4364736" y="1965960"/>
+            <a:ext cx="3459480" cy="228600"/>
           </a:xfrm>
           <a:prstGeom prst="rect">
             <a:avLst/>
@@ -5228,14 +5335,14 @@
       </p:sp>
       <p:sp>
         <p:nvSpPr>
-          <p:cNvPr id="35" name="Text 33"/>
-          <p:cNvSpPr txBox="1"/>
-          <p:nvPr/>
-        </p:nvSpPr>
-        <p:spPr>
-          <a:xfrm>
-            <a:off x="8183879" y="1591056"/>
-            <a:ext cx="1613916" cy="402336"/>
+          <p:cNvPr id="38" name="Text 36"/>
+          <p:cNvSpPr txBox="1"/>
+          <p:nvPr/>
+        </p:nvSpPr>
+        <p:spPr>
+          <a:xfrm>
+            <a:off x="4437888" y="1965960"/>
+            <a:ext cx="1188720" cy="228600"/>
           </a:xfrm>
           <a:prstGeom prst="rect">
             <a:avLst/>
@@ -5249,61 +5356,95 @@
           <a:lstStyle/>
           <a:p>
             <a:r>
-              <a:rPr sz="1600" b="0" i="0">
+              <a:rPr sz="600" b="1" i="0">
                 <a:solidFill>
                   <a:srgbClr val="F2F2F2"/>
                 </a:solidFill>
                 <a:latin typeface="Trenda IG Text"/>
               </a:rPr>
-              <a:t>18</a:t>
-            </a:r>
-          </a:p>
-        </p:txBody>
-      </p:sp>
-      <p:sp>
-        <p:nvSpPr>
-          <p:cNvPr id="36" name="Text 34"/>
-          <p:cNvSpPr txBox="1"/>
-          <p:nvPr/>
-        </p:nvSpPr>
-        <p:spPr>
-          <a:xfrm>
-            <a:off x="8183879" y="1993392"/>
-            <a:ext cx="1613916" cy="420624"/>
-          </a:xfrm>
-          <a:prstGeom prst="rect">
-            <a:avLst/>
-          </a:prstGeom>
-          <a:noFill/>
-        </p:spPr>
-        <p:txBody>
-          <a:bodyPr wrap="square" lIns="0" rIns="0" tIns="0" bIns="0" anchor="t">
-            <a:spAutoFit/>
-          </a:bodyPr>
-          <a:lstStyle/>
-          <a:p>
-            <a:r>
-              <a:rPr sz="590" b="0" i="0">
+              <a:t>Delivery each day</a:t>
+            </a:r>
+          </a:p>
+        </p:txBody>
+      </p:sp>
+      <p:sp>
+        <p:nvSpPr>
+          <p:cNvPr id="39" name="Text 37"/>
+          <p:cNvSpPr txBox="1"/>
+          <p:nvPr/>
+        </p:nvSpPr>
+        <p:spPr>
+          <a:xfrm>
+            <a:off x="5608320" y="1965960"/>
+            <a:ext cx="987552" cy="228600"/>
+          </a:xfrm>
+          <a:prstGeom prst="rect">
+            <a:avLst/>
+          </a:prstGeom>
+          <a:noFill/>
+        </p:spPr>
+        <p:txBody>
+          <a:bodyPr wrap="square" lIns="0" rIns="0" tIns="0" bIns="0" anchor="ctr">
+            <a:spAutoFit/>
+          </a:bodyPr>
+          <a:lstStyle/>
+          <a:p>
+            <a:r>
+              <a:rPr sz="600" b="0" i="0">
                 <a:solidFill>
                   <a:srgbClr val="B3B3B3"/>
                 </a:solidFill>
                 <a:latin typeface="Trenda IG Text"/>
               </a:rPr>
-              <a:t>months, seven phases</a:t>
-            </a:r>
-          </a:p>
-        </p:txBody>
-      </p:sp>
-      <p:sp>
-        <p:nvSpPr>
-          <p:cNvPr id="37" name="Shape 35"/>
+              <a:t>office hours</a:t>
+            </a:r>
+          </a:p>
+        </p:txBody>
+      </p:sp>
+      <p:sp>
+        <p:nvSpPr>
+          <p:cNvPr id="40" name="Text 38"/>
+          <p:cNvSpPr txBox="1"/>
+          <p:nvPr/>
+        </p:nvSpPr>
+        <p:spPr>
+          <a:xfrm>
+            <a:off x="6614160" y="1965960"/>
+            <a:ext cx="1429512" cy="228600"/>
+          </a:xfrm>
+          <a:prstGeom prst="rect">
+            <a:avLst/>
+          </a:prstGeom>
+          <a:noFill/>
+        </p:spPr>
+        <p:txBody>
+          <a:bodyPr wrap="square" lIns="0" rIns="0" tIns="0" bIns="0" anchor="ctr">
+            <a:spAutoFit/>
+          </a:bodyPr>
+          <a:lstStyle/>
+          <a:p>
+            <a:r>
+              <a:rPr sz="600" b="1" i="0">
+                <a:solidFill>
+                  <a:srgbClr val="00D6F2"/>
+                </a:solidFill>
+                <a:latin typeface="Trenda IG Text"/>
+              </a:rPr>
+              <a:t>about 20 hours</a:t>
+            </a:r>
+          </a:p>
+        </p:txBody>
+      </p:sp>
+      <p:sp>
+        <p:nvSpPr>
+          <p:cNvPr id="41" name="Shape 39"/>
           <p:cNvSpPr/>
           <p:nvPr/>
         </p:nvSpPr>
         <p:spPr>
           <a:xfrm>
-            <a:off x="9907524" y="1554480"/>
-            <a:ext cx="1741932" cy="896112"/>
+            <a:off x="4364736" y="2231136"/>
+            <a:ext cx="3459480" cy="228600"/>
           </a:xfrm>
           <a:prstGeom prst="rect">
             <a:avLst/>
@@ -5338,14 +5479,14 @@
       </p:sp>
       <p:sp>
         <p:nvSpPr>
-          <p:cNvPr id="38" name="Text 36"/>
-          <p:cNvSpPr txBox="1"/>
-          <p:nvPr/>
-        </p:nvSpPr>
-        <p:spPr>
-          <a:xfrm>
-            <a:off x="9998964" y="1591056"/>
-            <a:ext cx="1613916" cy="402336"/>
+          <p:cNvPr id="42" name="Text 40"/>
+          <p:cNvSpPr txBox="1"/>
+          <p:nvPr/>
+        </p:nvSpPr>
+        <p:spPr>
+          <a:xfrm>
+            <a:off x="4437888" y="2231136"/>
+            <a:ext cx="1188720" cy="228600"/>
           </a:xfrm>
           <a:prstGeom prst="rect">
             <a:avLst/>
@@ -5359,39 +5500,260 @@
           <a:lstStyle/>
           <a:p>
             <a:r>
-              <a:rPr sz="1600" b="0" i="0">
+              <a:rPr sz="600" b="1" i="0">
                 <a:solidFill>
                   <a:srgbClr val="F2F2F2"/>
                 </a:solidFill>
                 <a:latin typeface="Trenda IG Text"/>
               </a:rPr>
-              <a:t>$4.79M</a:t>
-            </a:r>
-          </a:p>
-        </p:txBody>
-      </p:sp>
-      <p:sp>
-        <p:nvSpPr>
-          <p:cNvPr id="39" name="Text 37"/>
-          <p:cNvSpPr txBox="1"/>
-          <p:nvPr/>
-        </p:nvSpPr>
-        <p:spPr>
-          <a:xfrm>
-            <a:off x="9998964" y="1993392"/>
-            <a:ext cx="1613916" cy="420624"/>
-          </a:xfrm>
-          <a:prstGeom prst="rect">
-            <a:avLst/>
-          </a:prstGeom>
-          <a:noFill/>
-        </p:spPr>
-        <p:txBody>
-          <a:bodyPr wrap="square" lIns="0" rIns="0" tIns="0" bIns="0" anchor="t">
-            <a:spAutoFit/>
-          </a:bodyPr>
-          <a:lstStyle/>
-          <a:p>
+              <a:t>Changes checked</a:t>
+            </a:r>
+          </a:p>
+        </p:txBody>
+      </p:sp>
+      <p:sp>
+        <p:nvSpPr>
+          <p:cNvPr id="43" name="Text 41"/>
+          <p:cNvSpPr txBox="1"/>
+          <p:nvPr/>
+        </p:nvSpPr>
+        <p:spPr>
+          <a:xfrm>
+            <a:off x="5608320" y="2231136"/>
+            <a:ext cx="987552" cy="228600"/>
+          </a:xfrm>
+          <a:prstGeom prst="rect">
+            <a:avLst/>
+          </a:prstGeom>
+          <a:noFill/>
+        </p:spPr>
+        <p:txBody>
+          <a:bodyPr wrap="square" lIns="0" rIns="0" tIns="0" bIns="0" anchor="ctr">
+            <a:spAutoFit/>
+          </a:bodyPr>
+          <a:lstStyle/>
+          <a:p>
+            <a:r>
+              <a:rPr sz="600" b="0" i="0">
+                <a:solidFill>
+                  <a:srgbClr val="B3B3B3"/>
+                </a:solidFill>
+                <a:latin typeface="Trenda IG Text"/>
+              </a:rPr>
+              <a:t>depends on reviewer</a:t>
+            </a:r>
+          </a:p>
+        </p:txBody>
+      </p:sp>
+      <p:sp>
+        <p:nvSpPr>
+          <p:cNvPr id="44" name="Text 42"/>
+          <p:cNvSpPr txBox="1"/>
+          <p:nvPr/>
+        </p:nvSpPr>
+        <p:spPr>
+          <a:xfrm>
+            <a:off x="6614160" y="2231136"/>
+            <a:ext cx="1429512" cy="228600"/>
+          </a:xfrm>
+          <a:prstGeom prst="rect">
+            <a:avLst/>
+          </a:prstGeom>
+          <a:noFill/>
+        </p:spPr>
+        <p:txBody>
+          <a:bodyPr wrap="square" lIns="0" rIns="0" tIns="0" bIns="0" anchor="ctr">
+            <a:spAutoFit/>
+          </a:bodyPr>
+          <a:lstStyle/>
+          <a:p>
+            <a:r>
+              <a:rPr sz="600" b="1" i="0">
+                <a:solidFill>
+                  <a:srgbClr val="00D6F2"/>
+                </a:solidFill>
+                <a:latin typeface="Trenda IG Text"/>
+              </a:rPr>
+              <a:t>100%, same standards</a:t>
+            </a:r>
+          </a:p>
+        </p:txBody>
+      </p:sp>
+      <p:sp>
+        <p:nvSpPr>
+          <p:cNvPr id="45" name="Shape 43"/>
+          <p:cNvSpPr/>
+          <p:nvPr/>
+        </p:nvSpPr>
+        <p:spPr>
+          <a:xfrm>
+            <a:off x="4364736" y="2496312"/>
+            <a:ext cx="3459480" cy="228600"/>
+          </a:xfrm>
+          <a:prstGeom prst="rect">
+            <a:avLst/>
+          </a:prstGeom>
+          <a:solidFill>
+            <a:srgbClr val="141414"/>
+          </a:solidFill>
+          <a:ln>
+            <a:noFill/>
+          </a:ln>
+          <a:effectLst/>
+        </p:spPr>
+        <p:style>
+          <a:lnRef idx="1">
+            <a:schemeClr val="accent1"/>
+          </a:lnRef>
+          <a:fillRef idx="3">
+            <a:schemeClr val="accent1"/>
+          </a:fillRef>
+          <a:effectRef idx="2">
+            <a:schemeClr val="accent1"/>
+          </a:effectRef>
+          <a:fontRef idx="minor">
+            <a:schemeClr val="lt1"/>
+          </a:fontRef>
+        </p:style>
+        <p:txBody>
+          <a:bodyPr rtlCol="0" anchor="ctr"/>
+          <a:lstStyle/>
+          <a:p/>
+        </p:txBody>
+      </p:sp>
+      <p:sp>
+        <p:nvSpPr>
+          <p:cNvPr id="46" name="Text 44"/>
+          <p:cNvSpPr txBox="1"/>
+          <p:nvPr/>
+        </p:nvSpPr>
+        <p:spPr>
+          <a:xfrm>
+            <a:off x="4437888" y="2496312"/>
+            <a:ext cx="1188720" cy="228600"/>
+          </a:xfrm>
+          <a:prstGeom prst="rect">
+            <a:avLst/>
+          </a:prstGeom>
+          <a:noFill/>
+        </p:spPr>
+        <p:txBody>
+          <a:bodyPr wrap="square" lIns="0" rIns="0" tIns="0" bIns="0" anchor="ctr">
+            <a:spAutoFit/>
+          </a:bodyPr>
+          <a:lstStyle/>
+          <a:p>
+            <a:r>
+              <a:rPr sz="600" b="1" i="0">
+                <a:solidFill>
+                  <a:srgbClr val="F2F2F2"/>
+                </a:solidFill>
+                <a:latin typeface="Trenda IG Text"/>
+              </a:rPr>
+              <a:t>New pod live</a:t>
+            </a:r>
+          </a:p>
+        </p:txBody>
+      </p:sp>
+      <p:sp>
+        <p:nvSpPr>
+          <p:cNvPr id="47" name="Text 45"/>
+          <p:cNvSpPr txBox="1"/>
+          <p:nvPr/>
+        </p:nvSpPr>
+        <p:spPr>
+          <a:xfrm>
+            <a:off x="5608320" y="2496312"/>
+            <a:ext cx="987552" cy="228600"/>
+          </a:xfrm>
+          <a:prstGeom prst="rect">
+            <a:avLst/>
+          </a:prstGeom>
+          <a:noFill/>
+        </p:spPr>
+        <p:txBody>
+          <a:bodyPr wrap="square" lIns="0" rIns="0" tIns="0" bIns="0" anchor="ctr">
+            <a:spAutoFit/>
+          </a:bodyPr>
+          <a:lstStyle/>
+          <a:p>
+            <a:r>
+              <a:rPr sz="600" b="0" i="0">
+                <a:solidFill>
+                  <a:srgbClr val="B3B3B3"/>
+                </a:solidFill>
+                <a:latin typeface="Trenda IG Text"/>
+              </a:rPr>
+              <a:t>about 2 months</a:t>
+            </a:r>
+          </a:p>
+        </p:txBody>
+      </p:sp>
+      <p:sp>
+        <p:nvSpPr>
+          <p:cNvPr id="48" name="Text 46"/>
+          <p:cNvSpPr txBox="1"/>
+          <p:nvPr/>
+        </p:nvSpPr>
+        <p:spPr>
+          <a:xfrm>
+            <a:off x="6614160" y="2496312"/>
+            <a:ext cx="1429512" cy="228600"/>
+          </a:xfrm>
+          <a:prstGeom prst="rect">
+            <a:avLst/>
+          </a:prstGeom>
+          <a:noFill/>
+        </p:spPr>
+        <p:txBody>
+          <a:bodyPr wrap="square" lIns="0" rIns="0" tIns="0" bIns="0" anchor="ctr">
+            <a:spAutoFit/>
+          </a:bodyPr>
+          <a:lstStyle/>
+          <a:p>
+            <a:r>
+              <a:rPr sz="600" b="1" i="0">
+                <a:solidFill>
+                  <a:srgbClr val="00D6F2"/>
+                </a:solidFill>
+                <a:latin typeface="Trenda IG Text"/>
+              </a:rPr>
+              <a:t>2 weeks</a:t>
+            </a:r>
+          </a:p>
+        </p:txBody>
+      </p:sp>
+      <p:sp>
+        <p:nvSpPr>
+          <p:cNvPr id="49" name="Text 47"/>
+          <p:cNvSpPr txBox="1"/>
+          <p:nvPr/>
+        </p:nvSpPr>
+        <p:spPr>
+          <a:xfrm>
+            <a:off x="4364736" y="2779776"/>
+            <a:ext cx="3459480" cy="329184"/>
+          </a:xfrm>
+          <a:prstGeom prst="rect">
+            <a:avLst/>
+          </a:prstGeom>
+          <a:noFill/>
+        </p:spPr>
+        <p:txBody>
+          <a:bodyPr wrap="square" lIns="0" rIns="0" tIns="0" bIns="0" anchor="ctr">
+            <a:spAutoFit/>
+          </a:bodyPr>
+          <a:lstStyle/>
+          <a:p>
+            <a:r>
+              <a:rPr sz="590" b="1" i="0">
+                <a:solidFill>
+                  <a:srgbClr val="F2F2F2"/>
+                </a:solidFill>
+                <a:latin typeface="Trenda IG Text"/>
+              </a:rPr>
+              <a:t>Same team: </a:t>
+            </a:r>
             <a:r>
               <a:rPr sz="590" b="0" i="0">
                 <a:solidFill>
@@ -5399,64 +5761,30 @@
                 </a:solidFill>
                 <a:latin typeface="Trenda IG Text"/>
               </a:rPr>
-              <a:t>fixed fee, paid as each gate is signed</a:t>
-            </a:r>
-          </a:p>
-        </p:txBody>
-      </p:sp>
-      <p:sp>
-        <p:nvSpPr>
-          <p:cNvPr id="40" name="Text 38"/>
-          <p:cNvSpPr txBox="1"/>
-          <p:nvPr/>
-        </p:nvSpPr>
-        <p:spPr>
-          <a:xfrm>
-            <a:off x="6277356" y="2542032"/>
-            <a:ext cx="5372100" cy="457200"/>
-          </a:xfrm>
-          <a:prstGeom prst="rect">
-            <a:avLst/>
-          </a:prstGeom>
-          <a:noFill/>
-        </p:spPr>
-        <p:txBody>
-          <a:bodyPr wrap="square" lIns="0" rIns="0" tIns="0" bIns="0" anchor="t">
-            <a:spAutoFit/>
-          </a:bodyPr>
-          <a:lstStyle/>
-          <a:p>
-            <a:r>
-              <a:rPr sz="600" b="1" i="0">
-                <a:solidFill>
-                  <a:srgbClr val="F2F2F2"/>
-                </a:solidFill>
-                <a:latin typeface="Trenda IG Text"/>
-              </a:rPr>
-              <a:t>From month 19 </a:t>
-            </a:r>
-            <a:r>
-              <a:rPr sz="600" b="0" i="0">
-                <a:solidFill>
-                  <a:srgbClr val="B3B3B3"/>
-                </a:solidFill>
-                <a:latin typeface="Trenda IG Text"/>
-              </a:rPr>
-              <a:t>a run team of 4 keeps the graph, agents and evals current: about $1.24M a year with platform usage.</a:t>
-            </a:r>
-          </a:p>
-        </p:txBody>
-      </p:sp>
-      <p:sp>
-        <p:nvSpPr>
-          <p:cNvPr id="41" name="Shape 39"/>
+              <a:t>1.4-1.6x the output, or the same scope with 20-30% fewer people. </a:t>
+            </a:r>
+            <a:r>
+              <a:rPr sz="590" b="0" i="0">
+                <a:solidFill>
+                  <a:srgbClr val="8C8C8C"/>
+                </a:solidFill>
+                <a:latin typeface="Trenda IG Text"/>
+              </a:rPr>
+              <a:t>Pilot targets, baselined per pod.</a:t>
+            </a:r>
+          </a:p>
+        </p:txBody>
+      </p:sp>
+      <p:sp>
+        <p:nvSpPr>
+          <p:cNvPr id="50" name="Shape 48"/>
           <p:cNvSpPr/>
           <p:nvPr/>
         </p:nvSpPr>
         <p:spPr>
           <a:xfrm>
-            <a:off x="411480" y="3291840"/>
-            <a:ext cx="11365992" cy="1965960"/>
+            <a:off x="8061960" y="1188720"/>
+            <a:ext cx="3715512" cy="1965960"/>
           </a:xfrm>
           <a:prstGeom prst="roundRect">
             <a:avLst>
@@ -5493,14 +5821,14 @@
       </p:sp>
       <p:sp>
         <p:nvSpPr>
-          <p:cNvPr id="42" name="Shape 40"/>
+          <p:cNvPr id="51" name="Shape 49"/>
           <p:cNvSpPr/>
           <p:nvPr/>
         </p:nvSpPr>
         <p:spPr>
           <a:xfrm>
-            <a:off x="411480" y="3291840"/>
-            <a:ext cx="11365992" cy="256032"/>
+            <a:off x="8061960" y="1188720"/>
+            <a:ext cx="3715512" cy="256032"/>
           </a:xfrm>
           <a:prstGeom prst="rect">
             <a:avLst/>
@@ -5535,14 +5863,14 @@
       </p:sp>
       <p:sp>
         <p:nvSpPr>
-          <p:cNvPr id="43" name="Text 41"/>
-          <p:cNvSpPr txBox="1"/>
-          <p:nvPr/>
-        </p:nvSpPr>
-        <p:spPr>
-          <a:xfrm>
-            <a:off x="521208" y="3291840"/>
-            <a:ext cx="11146536" cy="256032"/>
+          <p:cNvPr id="52" name="Text 50"/>
+          <p:cNvSpPr txBox="1"/>
+          <p:nvPr/>
+        </p:nvSpPr>
+        <p:spPr>
+          <a:xfrm>
+            <a:off x="8171687" y="1188720"/>
+            <a:ext cx="3496056" cy="256032"/>
           </a:xfrm>
           <a:prstGeom prst="rect">
             <a:avLst/>
@@ -5562,7 +5890,7 @@
                 </a:solidFill>
                 <a:latin typeface="Trenda IG Text"/>
               </a:rPr>
-              <a:t>THE RETURN</a:t>
+              <a:t>THE BUILD AND RUN</a:t>
             </a:r>
             <a:r>
               <a:rPr sz="640" b="0" i="0">
@@ -5571,21 +5899,21 @@
                 </a:solidFill>
                 <a:latin typeface="Trenda IG Text"/>
               </a:rPr>
-              <a:t>   target · first full year after go-live</a:t>
-            </a:r>
-          </a:p>
-        </p:txBody>
-      </p:sp>
-      <p:sp>
-        <p:nvSpPr>
-          <p:cNvPr id="44" name="Shape 42"/>
+              <a:t>   fixed fee, paid by gate</a:t>
+            </a:r>
+          </a:p>
+        </p:txBody>
+      </p:sp>
+      <p:sp>
+        <p:nvSpPr>
+          <p:cNvPr id="53" name="Shape 51"/>
           <p:cNvSpPr/>
           <p:nvPr/>
         </p:nvSpPr>
         <p:spPr>
           <a:xfrm>
-            <a:off x="539496" y="3639312"/>
-            <a:ext cx="1796796" cy="1490472"/>
+            <a:off x="8189976" y="1554480"/>
+            <a:ext cx="1104391" cy="896112"/>
           </a:xfrm>
           <a:prstGeom prst="rect">
             <a:avLst/>
@@ -5620,14 +5948,14 @@
       </p:sp>
       <p:sp>
         <p:nvSpPr>
-          <p:cNvPr id="45" name="Text 43"/>
-          <p:cNvSpPr txBox="1"/>
-          <p:nvPr/>
-        </p:nvSpPr>
-        <p:spPr>
-          <a:xfrm>
-            <a:off x="667512" y="3977639"/>
-            <a:ext cx="1577340" cy="457200"/>
+          <p:cNvPr id="54" name="Text 52"/>
+          <p:cNvSpPr txBox="1"/>
+          <p:nvPr/>
+        </p:nvSpPr>
+        <p:spPr>
+          <a:xfrm>
+            <a:off x="8281416" y="1591056"/>
+            <a:ext cx="976376" cy="402336"/>
           </a:xfrm>
           <a:prstGeom prst="rect">
             <a:avLst/>
@@ -5641,95 +5969,61 @@
           <a:lstStyle/>
           <a:p>
             <a:r>
-              <a:rPr sz="2200" b="0" i="0">
+              <a:rPr sz="1600" b="0" i="0">
                 <a:solidFill>
                   <a:srgbClr val="F2F2F2"/>
                 </a:solidFill>
                 <a:latin typeface="Trenda IG Text"/>
               </a:rPr>
-              <a:t>$16M</a:t>
-            </a:r>
-          </a:p>
-        </p:txBody>
-      </p:sp>
-      <p:sp>
-        <p:nvSpPr>
-          <p:cNvPr id="46" name="Text 44"/>
-          <p:cNvSpPr txBox="1"/>
-          <p:nvPr/>
-        </p:nvSpPr>
-        <p:spPr>
-          <a:xfrm>
-            <a:off x="667512" y="4453127"/>
-            <a:ext cx="1577340" cy="201168"/>
-          </a:xfrm>
-          <a:prstGeom prst="rect">
-            <a:avLst/>
-          </a:prstGeom>
-          <a:noFill/>
-        </p:spPr>
-        <p:txBody>
-          <a:bodyPr wrap="square" lIns="0" rIns="0" tIns="0" bIns="0" anchor="ctr">
-            <a:spAutoFit/>
-          </a:bodyPr>
-          <a:lstStyle/>
-          <a:p>
-            <a:r>
-              <a:rPr sz="700" b="1" i="0">
-                <a:solidFill>
-                  <a:srgbClr val="F2F2F2"/>
-                </a:solidFill>
-                <a:latin typeface="Trenda IG Text"/>
-              </a:rPr>
-              <a:t>a year today</a:t>
-            </a:r>
-          </a:p>
-        </p:txBody>
-      </p:sp>
-      <p:sp>
-        <p:nvSpPr>
-          <p:cNvPr id="47" name="Text 45"/>
-          <p:cNvSpPr txBox="1"/>
-          <p:nvPr/>
-        </p:nvSpPr>
-        <p:spPr>
-          <a:xfrm>
-            <a:off x="667512" y="4654296"/>
-            <a:ext cx="1577340" cy="201168"/>
-          </a:xfrm>
-          <a:prstGeom prst="rect">
-            <a:avLst/>
-          </a:prstGeom>
-          <a:noFill/>
-        </p:spPr>
-        <p:txBody>
-          <a:bodyPr wrap="square" lIns="0" rIns="0" tIns="0" bIns="0" anchor="ctr">
-            <a:spAutoFit/>
-          </a:bodyPr>
-          <a:lstStyle/>
-          <a:p>
-            <a:r>
-              <a:rPr sz="600" b="0" i="0">
+              <a:t>17</a:t>
+            </a:r>
+          </a:p>
+        </p:txBody>
+      </p:sp>
+      <p:sp>
+        <p:nvSpPr>
+          <p:cNvPr id="55" name="Text 53"/>
+          <p:cNvSpPr txBox="1"/>
+          <p:nvPr/>
+        </p:nvSpPr>
+        <p:spPr>
+          <a:xfrm>
+            <a:off x="8281416" y="1993392"/>
+            <a:ext cx="976376" cy="420624"/>
+          </a:xfrm>
+          <a:prstGeom prst="rect">
+            <a:avLst/>
+          </a:prstGeom>
+          <a:noFill/>
+        </p:spPr>
+        <p:txBody>
+          <a:bodyPr wrap="square" lIns="0" rIns="0" tIns="0" bIns="0" anchor="t">
+            <a:spAutoFit/>
+          </a:bodyPr>
+          <a:lstStyle/>
+          <a:p>
+            <a:r>
+              <a:rPr sz="590" b="0" i="0">
                 <a:solidFill>
                   <a:srgbClr val="B3B3B3"/>
                 </a:solidFill>
                 <a:latin typeface="Trenda IG Text"/>
               </a:rPr>
-              <a:t>as provided by Ascension</a:t>
-            </a:r>
-          </a:p>
-        </p:txBody>
-      </p:sp>
-      <p:sp>
-        <p:nvSpPr>
-          <p:cNvPr id="48" name="Shape 46"/>
+              <a:t>people at peak, 10 roles</a:t>
+            </a:r>
+          </a:p>
+        </p:txBody>
+      </p:sp>
+      <p:sp>
+        <p:nvSpPr>
+          <p:cNvPr id="56" name="Shape 54"/>
           <p:cNvSpPr/>
           <p:nvPr/>
         </p:nvSpPr>
         <p:spPr>
           <a:xfrm>
-            <a:off x="2427732" y="3639312"/>
-            <a:ext cx="1796796" cy="1490472"/>
+            <a:off x="9367520" y="1554480"/>
+            <a:ext cx="1104391" cy="896112"/>
           </a:xfrm>
           <a:prstGeom prst="rect">
             <a:avLst/>
@@ -5764,7 +6058,543 @@
       </p:sp>
       <p:sp>
         <p:nvSpPr>
-          <p:cNvPr id="49" name="Text 47"/>
+          <p:cNvPr id="57" name="Text 55"/>
+          <p:cNvSpPr txBox="1"/>
+          <p:nvPr/>
+        </p:nvSpPr>
+        <p:spPr>
+          <a:xfrm>
+            <a:off x="9458960" y="1591056"/>
+            <a:ext cx="976376" cy="402336"/>
+          </a:xfrm>
+          <a:prstGeom prst="rect">
+            <a:avLst/>
+          </a:prstGeom>
+          <a:noFill/>
+        </p:spPr>
+        <p:txBody>
+          <a:bodyPr wrap="square" lIns="0" rIns="0" tIns="0" bIns="0" anchor="ctr">
+            <a:spAutoFit/>
+          </a:bodyPr>
+          <a:lstStyle/>
+          <a:p>
+            <a:r>
+              <a:rPr sz="1600" b="0" i="0">
+                <a:solidFill>
+                  <a:srgbClr val="F2F2F2"/>
+                </a:solidFill>
+                <a:latin typeface="Trenda IG Text"/>
+              </a:rPr>
+              <a:t>18</a:t>
+            </a:r>
+          </a:p>
+        </p:txBody>
+      </p:sp>
+      <p:sp>
+        <p:nvSpPr>
+          <p:cNvPr id="58" name="Text 56"/>
+          <p:cNvSpPr txBox="1"/>
+          <p:nvPr/>
+        </p:nvSpPr>
+        <p:spPr>
+          <a:xfrm>
+            <a:off x="9458960" y="1993392"/>
+            <a:ext cx="976376" cy="420624"/>
+          </a:xfrm>
+          <a:prstGeom prst="rect">
+            <a:avLst/>
+          </a:prstGeom>
+          <a:noFill/>
+        </p:spPr>
+        <p:txBody>
+          <a:bodyPr wrap="square" lIns="0" rIns="0" tIns="0" bIns="0" anchor="t">
+            <a:spAutoFit/>
+          </a:bodyPr>
+          <a:lstStyle/>
+          <a:p>
+            <a:r>
+              <a:rPr sz="590" b="0" i="0">
+                <a:solidFill>
+                  <a:srgbClr val="B3B3B3"/>
+                </a:solidFill>
+                <a:latin typeface="Trenda IG Text"/>
+              </a:rPr>
+              <a:t>months, seven phases</a:t>
+            </a:r>
+          </a:p>
+        </p:txBody>
+      </p:sp>
+      <p:sp>
+        <p:nvSpPr>
+          <p:cNvPr id="59" name="Shape 57"/>
+          <p:cNvSpPr/>
+          <p:nvPr/>
+        </p:nvSpPr>
+        <p:spPr>
+          <a:xfrm>
+            <a:off x="10545064" y="1554480"/>
+            <a:ext cx="1104391" cy="896112"/>
+          </a:xfrm>
+          <a:prstGeom prst="rect">
+            <a:avLst/>
+          </a:prstGeom>
+          <a:solidFill>
+            <a:srgbClr val="141414"/>
+          </a:solidFill>
+          <a:ln>
+            <a:noFill/>
+          </a:ln>
+          <a:effectLst/>
+        </p:spPr>
+        <p:style>
+          <a:lnRef idx="1">
+            <a:schemeClr val="accent1"/>
+          </a:lnRef>
+          <a:fillRef idx="3">
+            <a:schemeClr val="accent1"/>
+          </a:fillRef>
+          <a:effectRef idx="2">
+            <a:schemeClr val="accent1"/>
+          </a:effectRef>
+          <a:fontRef idx="minor">
+            <a:schemeClr val="lt1"/>
+          </a:fontRef>
+        </p:style>
+        <p:txBody>
+          <a:bodyPr rtlCol="0" anchor="ctr"/>
+          <a:lstStyle/>
+          <a:p/>
+        </p:txBody>
+      </p:sp>
+      <p:sp>
+        <p:nvSpPr>
+          <p:cNvPr id="60" name="Text 58"/>
+          <p:cNvSpPr txBox="1"/>
+          <p:nvPr/>
+        </p:nvSpPr>
+        <p:spPr>
+          <a:xfrm>
+            <a:off x="10636504" y="1591056"/>
+            <a:ext cx="976376" cy="402336"/>
+          </a:xfrm>
+          <a:prstGeom prst="rect">
+            <a:avLst/>
+          </a:prstGeom>
+          <a:noFill/>
+        </p:spPr>
+        <p:txBody>
+          <a:bodyPr wrap="square" lIns="0" rIns="0" tIns="0" bIns="0" anchor="ctr">
+            <a:spAutoFit/>
+          </a:bodyPr>
+          <a:lstStyle/>
+          <a:p>
+            <a:r>
+              <a:rPr sz="1600" b="0" i="0">
+                <a:solidFill>
+                  <a:srgbClr val="F2F2F2"/>
+                </a:solidFill>
+                <a:latin typeface="Trenda IG Text"/>
+              </a:rPr>
+              <a:t>$4.79M</a:t>
+            </a:r>
+          </a:p>
+        </p:txBody>
+      </p:sp>
+      <p:sp>
+        <p:nvSpPr>
+          <p:cNvPr id="61" name="Text 59"/>
+          <p:cNvSpPr txBox="1"/>
+          <p:nvPr/>
+        </p:nvSpPr>
+        <p:spPr>
+          <a:xfrm>
+            <a:off x="10636504" y="1993392"/>
+            <a:ext cx="976376" cy="420624"/>
+          </a:xfrm>
+          <a:prstGeom prst="rect">
+            <a:avLst/>
+          </a:prstGeom>
+          <a:noFill/>
+        </p:spPr>
+        <p:txBody>
+          <a:bodyPr wrap="square" lIns="0" rIns="0" tIns="0" bIns="0" anchor="t">
+            <a:spAutoFit/>
+          </a:bodyPr>
+          <a:lstStyle/>
+          <a:p>
+            <a:r>
+              <a:rPr sz="590" b="0" i="0">
+                <a:solidFill>
+                  <a:srgbClr val="B3B3B3"/>
+                </a:solidFill>
+                <a:latin typeface="Trenda IG Text"/>
+              </a:rPr>
+              <a:t>fixed fee, paid as each gate is signed</a:t>
+            </a:r>
+          </a:p>
+        </p:txBody>
+      </p:sp>
+      <p:sp>
+        <p:nvSpPr>
+          <p:cNvPr id="62" name="Text 60"/>
+          <p:cNvSpPr txBox="1"/>
+          <p:nvPr/>
+        </p:nvSpPr>
+        <p:spPr>
+          <a:xfrm>
+            <a:off x="8189976" y="2542032"/>
+            <a:ext cx="3459480" cy="457200"/>
+          </a:xfrm>
+          <a:prstGeom prst="rect">
+            <a:avLst/>
+          </a:prstGeom>
+          <a:noFill/>
+        </p:spPr>
+        <p:txBody>
+          <a:bodyPr wrap="square" lIns="0" rIns="0" tIns="0" bIns="0" anchor="t">
+            <a:spAutoFit/>
+          </a:bodyPr>
+          <a:lstStyle/>
+          <a:p>
+            <a:r>
+              <a:rPr sz="600" b="1" i="0">
+                <a:solidFill>
+                  <a:srgbClr val="F2F2F2"/>
+                </a:solidFill>
+                <a:latin typeface="Trenda IG Text"/>
+              </a:rPr>
+              <a:t>From month 19 </a:t>
+            </a:r>
+            <a:r>
+              <a:rPr sz="600" b="0" i="0">
+                <a:solidFill>
+                  <a:srgbClr val="B3B3B3"/>
+                </a:solidFill>
+                <a:latin typeface="Trenda IG Text"/>
+              </a:rPr>
+              <a:t>a run team of 4 keeps the graph, agents and evals current: about $1.24M a year with platform usage.</a:t>
+            </a:r>
+          </a:p>
+        </p:txBody>
+      </p:sp>
+      <p:sp>
+        <p:nvSpPr>
+          <p:cNvPr id="63" name="Shape 61"/>
+          <p:cNvSpPr/>
+          <p:nvPr/>
+        </p:nvSpPr>
+        <p:spPr>
+          <a:xfrm>
+            <a:off x="411480" y="3291840"/>
+            <a:ext cx="11365992" cy="1965960"/>
+          </a:xfrm>
+          <a:prstGeom prst="roundRect">
+            <a:avLst>
+              <a:gd name="adj" fmla="val 2000"/>
+            </a:avLst>
+          </a:prstGeom>
+          <a:solidFill>
+            <a:srgbClr val="1E1E1E"/>
+          </a:solidFill>
+          <a:ln>
+            <a:noFill/>
+          </a:ln>
+          <a:effectLst/>
+        </p:spPr>
+        <p:style>
+          <a:lnRef idx="1">
+            <a:schemeClr val="accent1"/>
+          </a:lnRef>
+          <a:fillRef idx="3">
+            <a:schemeClr val="accent1"/>
+          </a:fillRef>
+          <a:effectRef idx="2">
+            <a:schemeClr val="accent1"/>
+          </a:effectRef>
+          <a:fontRef idx="minor">
+            <a:schemeClr val="lt1"/>
+          </a:fontRef>
+        </p:style>
+        <p:txBody>
+          <a:bodyPr rtlCol="0" anchor="ctr"/>
+          <a:lstStyle/>
+          <a:p/>
+        </p:txBody>
+      </p:sp>
+      <p:sp>
+        <p:nvSpPr>
+          <p:cNvPr id="64" name="Shape 62"/>
+          <p:cNvSpPr/>
+          <p:nvPr/>
+        </p:nvSpPr>
+        <p:spPr>
+          <a:xfrm>
+            <a:off x="411480" y="3291840"/>
+            <a:ext cx="11365992" cy="256032"/>
+          </a:xfrm>
+          <a:prstGeom prst="rect">
+            <a:avLst/>
+          </a:prstGeom>
+          <a:solidFill>
+            <a:srgbClr val="2B2B2B"/>
+          </a:solidFill>
+          <a:ln>
+            <a:noFill/>
+          </a:ln>
+          <a:effectLst/>
+        </p:spPr>
+        <p:style>
+          <a:lnRef idx="1">
+            <a:schemeClr val="accent1"/>
+          </a:lnRef>
+          <a:fillRef idx="3">
+            <a:schemeClr val="accent1"/>
+          </a:fillRef>
+          <a:effectRef idx="2">
+            <a:schemeClr val="accent1"/>
+          </a:effectRef>
+          <a:fontRef idx="minor">
+            <a:schemeClr val="lt1"/>
+          </a:fontRef>
+        </p:style>
+        <p:txBody>
+          <a:bodyPr rtlCol="0" anchor="ctr"/>
+          <a:lstStyle/>
+          <a:p/>
+        </p:txBody>
+      </p:sp>
+      <p:sp>
+        <p:nvSpPr>
+          <p:cNvPr id="65" name="Text 63"/>
+          <p:cNvSpPr txBox="1"/>
+          <p:nvPr/>
+        </p:nvSpPr>
+        <p:spPr>
+          <a:xfrm>
+            <a:off x="521208" y="3291840"/>
+            <a:ext cx="11146536" cy="256032"/>
+          </a:xfrm>
+          <a:prstGeom prst="rect">
+            <a:avLst/>
+          </a:prstGeom>
+          <a:noFill/>
+        </p:spPr>
+        <p:txBody>
+          <a:bodyPr wrap="square" lIns="0" rIns="0" tIns="0" bIns="0" anchor="ctr">
+            <a:spAutoFit/>
+          </a:bodyPr>
+          <a:lstStyle/>
+          <a:p>
+            <a:r>
+              <a:rPr sz="640" b="1" i="0" spc="120">
+                <a:solidFill>
+                  <a:srgbClr val="F2F2F2"/>
+                </a:solidFill>
+                <a:latin typeface="Trenda IG Text"/>
+              </a:rPr>
+              <a:t>THE RETURN</a:t>
+            </a:r>
+            <a:r>
+              <a:rPr sz="640" b="0" i="0">
+                <a:solidFill>
+                  <a:srgbClr val="B3B3B3"/>
+                </a:solidFill>
+                <a:latin typeface="Trenda IG Text"/>
+              </a:rPr>
+              <a:t>   target · first full year after go-live</a:t>
+            </a:r>
+          </a:p>
+        </p:txBody>
+      </p:sp>
+      <p:sp>
+        <p:nvSpPr>
+          <p:cNvPr id="66" name="Shape 64"/>
+          <p:cNvSpPr/>
+          <p:nvPr/>
+        </p:nvSpPr>
+        <p:spPr>
+          <a:xfrm>
+            <a:off x="539496" y="3639312"/>
+            <a:ext cx="1796796" cy="1490472"/>
+          </a:xfrm>
+          <a:prstGeom prst="rect">
+            <a:avLst/>
+          </a:prstGeom>
+          <a:solidFill>
+            <a:srgbClr val="141414"/>
+          </a:solidFill>
+          <a:ln>
+            <a:noFill/>
+          </a:ln>
+          <a:effectLst/>
+        </p:spPr>
+        <p:style>
+          <a:lnRef idx="1">
+            <a:schemeClr val="accent1"/>
+          </a:lnRef>
+          <a:fillRef idx="3">
+            <a:schemeClr val="accent1"/>
+          </a:fillRef>
+          <a:effectRef idx="2">
+            <a:schemeClr val="accent1"/>
+          </a:effectRef>
+          <a:fontRef idx="minor">
+            <a:schemeClr val="lt1"/>
+          </a:fontRef>
+        </p:style>
+        <p:txBody>
+          <a:bodyPr rtlCol="0" anchor="ctr"/>
+          <a:lstStyle/>
+          <a:p/>
+        </p:txBody>
+      </p:sp>
+      <p:sp>
+        <p:nvSpPr>
+          <p:cNvPr id="67" name="Text 65"/>
+          <p:cNvSpPr txBox="1"/>
+          <p:nvPr/>
+        </p:nvSpPr>
+        <p:spPr>
+          <a:xfrm>
+            <a:off x="667512" y="3977639"/>
+            <a:ext cx="1577340" cy="457200"/>
+          </a:xfrm>
+          <a:prstGeom prst="rect">
+            <a:avLst/>
+          </a:prstGeom>
+          <a:noFill/>
+        </p:spPr>
+        <p:txBody>
+          <a:bodyPr wrap="square" lIns="0" rIns="0" tIns="0" bIns="0" anchor="ctr">
+            <a:spAutoFit/>
+          </a:bodyPr>
+          <a:lstStyle/>
+          <a:p>
+            <a:r>
+              <a:rPr sz="2200" b="0" i="0">
+                <a:solidFill>
+                  <a:srgbClr val="F2F2F2"/>
+                </a:solidFill>
+                <a:latin typeface="Trenda IG Text"/>
+              </a:rPr>
+              <a:t>$16M</a:t>
+            </a:r>
+          </a:p>
+        </p:txBody>
+      </p:sp>
+      <p:sp>
+        <p:nvSpPr>
+          <p:cNvPr id="68" name="Text 66"/>
+          <p:cNvSpPr txBox="1"/>
+          <p:nvPr/>
+        </p:nvSpPr>
+        <p:spPr>
+          <a:xfrm>
+            <a:off x="667512" y="4453127"/>
+            <a:ext cx="1577340" cy="201168"/>
+          </a:xfrm>
+          <a:prstGeom prst="rect">
+            <a:avLst/>
+          </a:prstGeom>
+          <a:noFill/>
+        </p:spPr>
+        <p:txBody>
+          <a:bodyPr wrap="square" lIns="0" rIns="0" tIns="0" bIns="0" anchor="ctr">
+            <a:spAutoFit/>
+          </a:bodyPr>
+          <a:lstStyle/>
+          <a:p>
+            <a:r>
+              <a:rPr sz="700" b="1" i="0">
+                <a:solidFill>
+                  <a:srgbClr val="F2F2F2"/>
+                </a:solidFill>
+                <a:latin typeface="Trenda IG Text"/>
+              </a:rPr>
+              <a:t>a year today</a:t>
+            </a:r>
+          </a:p>
+        </p:txBody>
+      </p:sp>
+      <p:sp>
+        <p:nvSpPr>
+          <p:cNvPr id="69" name="Text 67"/>
+          <p:cNvSpPr txBox="1"/>
+          <p:nvPr/>
+        </p:nvSpPr>
+        <p:spPr>
+          <a:xfrm>
+            <a:off x="667512" y="4654296"/>
+            <a:ext cx="1577340" cy="201168"/>
+          </a:xfrm>
+          <a:prstGeom prst="rect">
+            <a:avLst/>
+          </a:prstGeom>
+          <a:noFill/>
+        </p:spPr>
+        <p:txBody>
+          <a:bodyPr wrap="square" lIns="0" rIns="0" tIns="0" bIns="0" anchor="ctr">
+            <a:spAutoFit/>
+          </a:bodyPr>
+          <a:lstStyle/>
+          <a:p>
+            <a:r>
+              <a:rPr sz="600" b="0" i="0">
+                <a:solidFill>
+                  <a:srgbClr val="B3B3B3"/>
+                </a:solidFill>
+                <a:latin typeface="Trenda IG Text"/>
+              </a:rPr>
+              <a:t>as provided by Ascension</a:t>
+            </a:r>
+          </a:p>
+        </p:txBody>
+      </p:sp>
+      <p:sp>
+        <p:nvSpPr>
+          <p:cNvPr id="70" name="Shape 68"/>
+          <p:cNvSpPr/>
+          <p:nvPr/>
+        </p:nvSpPr>
+        <p:spPr>
+          <a:xfrm>
+            <a:off x="2427732" y="3639312"/>
+            <a:ext cx="1796796" cy="1490472"/>
+          </a:xfrm>
+          <a:prstGeom prst="rect">
+            <a:avLst/>
+          </a:prstGeom>
+          <a:solidFill>
+            <a:srgbClr val="141414"/>
+          </a:solidFill>
+          <a:ln>
+            <a:noFill/>
+          </a:ln>
+          <a:effectLst/>
+        </p:spPr>
+        <p:style>
+          <a:lnRef idx="1">
+            <a:schemeClr val="accent1"/>
+          </a:lnRef>
+          <a:fillRef idx="3">
+            <a:schemeClr val="accent1"/>
+          </a:fillRef>
+          <a:effectRef idx="2">
+            <a:schemeClr val="accent1"/>
+          </a:effectRef>
+          <a:fontRef idx="minor">
+            <a:schemeClr val="lt1"/>
+          </a:fontRef>
+        </p:style>
+        <p:txBody>
+          <a:bodyPr rtlCol="0" anchor="ctr"/>
+          <a:lstStyle/>
+          <a:p/>
+        </p:txBody>
+      </p:sp>
+      <p:sp>
+        <p:nvSpPr>
+          <p:cNvPr id="71" name="Text 69"/>
           <p:cNvSpPr txBox="1"/>
           <p:nvPr/>
         </p:nvSpPr>
@@ -5798,7 +6628,7 @@
       </p:sp>
       <p:sp>
         <p:nvSpPr>
-          <p:cNvPr id="50" name="Text 48"/>
+          <p:cNvPr id="72" name="Text 70"/>
           <p:cNvSpPr txBox="1"/>
           <p:nvPr/>
         </p:nvSpPr>
@@ -5832,7 +6662,7 @@
       </p:sp>
       <p:sp>
         <p:nvSpPr>
-          <p:cNvPr id="51" name="Text 49"/>
+          <p:cNvPr id="73" name="Text 71"/>
           <p:cNvSpPr txBox="1"/>
           <p:nvPr/>
         </p:nvSpPr>
@@ -5866,7 +6696,7 @@
       </p:sp>
       <p:sp>
         <p:nvSpPr>
-          <p:cNvPr id="52" name="Differentiator Border 51"/>
+          <p:cNvPr id="74" name="Differentiator Border 73"/>
           <p:cNvSpPr/>
           <p:nvPr/>
         </p:nvSpPr>
@@ -5919,7 +6749,7 @@
       </p:sp>
       <p:sp>
         <p:nvSpPr>
-          <p:cNvPr id="53" name="Shape 52"/>
+          <p:cNvPr id="75" name="Shape 74"/>
           <p:cNvSpPr/>
           <p:nvPr/>
         </p:nvSpPr>
@@ -5961,7 +6791,7 @@
       </p:sp>
       <p:sp>
         <p:nvSpPr>
-          <p:cNvPr id="54" name="Text 53"/>
+          <p:cNvPr id="76" name="Text 75"/>
           <p:cNvSpPr txBox="1"/>
           <p:nvPr/>
         </p:nvSpPr>
@@ -5995,7 +6825,7 @@
       </p:sp>
       <p:sp>
         <p:nvSpPr>
-          <p:cNvPr id="55" name="Text 54"/>
+          <p:cNvPr id="77" name="Text 76"/>
           <p:cNvSpPr txBox="1"/>
           <p:nvPr/>
         </p:nvSpPr>
@@ -6029,7 +6859,7 @@
       </p:sp>
       <p:sp>
         <p:nvSpPr>
-          <p:cNvPr id="56" name="Text 55"/>
+          <p:cNvPr id="78" name="Text 77"/>
           <p:cNvSpPr txBox="1"/>
           <p:nvPr/>
         </p:nvSpPr>
@@ -6063,7 +6893,7 @@
       </p:sp>
       <p:sp>
         <p:nvSpPr>
-          <p:cNvPr id="57" name="Shape 56"/>
+          <p:cNvPr id="79" name="Shape 78"/>
           <p:cNvSpPr/>
           <p:nvPr/>
         </p:nvSpPr>
@@ -6105,7 +6935,7 @@
       </p:sp>
       <p:sp>
         <p:nvSpPr>
-          <p:cNvPr id="58" name="Text 57"/>
+          <p:cNvPr id="80" name="Text 79"/>
           <p:cNvSpPr txBox="1"/>
           <p:nvPr/>
         </p:nvSpPr>
@@ -6139,7 +6969,7 @@
       </p:sp>
       <p:sp>
         <p:nvSpPr>
-          <p:cNvPr id="59" name="Text 58"/>
+          <p:cNvPr id="81" name="Text 80"/>
           <p:cNvSpPr txBox="1"/>
           <p:nvPr/>
         </p:nvSpPr>
@@ -6173,7 +7003,7 @@
       </p:sp>
       <p:sp>
         <p:nvSpPr>
-          <p:cNvPr id="60" name="Text 59"/>
+          <p:cNvPr id="82" name="Text 81"/>
           <p:cNvSpPr txBox="1"/>
           <p:nvPr/>
         </p:nvSpPr>
@@ -6207,7 +7037,7 @@
       </p:sp>
       <p:sp>
         <p:nvSpPr>
-          <p:cNvPr id="61" name="Shape 60"/>
+          <p:cNvPr id="83" name="Shape 82"/>
           <p:cNvSpPr/>
           <p:nvPr/>
         </p:nvSpPr>
@@ -6249,7 +7079,7 @@
       </p:sp>
       <p:sp>
         <p:nvSpPr>
-          <p:cNvPr id="62" name="Shape 61"/>
+          <p:cNvPr id="84" name="Shape 83"/>
           <p:cNvSpPr/>
           <p:nvPr/>
         </p:nvSpPr>
@@ -6302,7 +7132,7 @@
       </p:sp>
       <p:sp>
         <p:nvSpPr>
-          <p:cNvPr id="63" name="Text 62"/>
+          <p:cNvPr id="85" name="Text 84"/>
           <p:cNvSpPr txBox="1"/>
           <p:nvPr/>
         </p:nvSpPr>
@@ -6357,7 +7187,7 @@
       </p:sp>
       <p:sp>
         <p:nvSpPr>
-          <p:cNvPr id="64" name="Shape 63"/>
+          <p:cNvPr id="86" name="Shape 85"/>
           <p:cNvSpPr/>
           <p:nvPr/>
         </p:nvSpPr>
@@ -6399,7 +7229,7 @@
       </p:sp>
       <p:sp>
         <p:nvSpPr>
-          <p:cNvPr id="65" name="Shape 64"/>
+          <p:cNvPr id="87" name="Shape 86"/>
           <p:cNvSpPr/>
           <p:nvPr/>
         </p:nvSpPr>
@@ -6452,7 +7282,7 @@
       </p:sp>
       <p:sp>
         <p:nvSpPr>
-          <p:cNvPr id="66" name="Text 65"/>
+          <p:cNvPr id="88" name="Text 87"/>
           <p:cNvSpPr txBox="1"/>
           <p:nvPr/>
         </p:nvSpPr>
@@ -6507,7 +7337,7 @@
       </p:sp>
       <p:sp>
         <p:nvSpPr>
-          <p:cNvPr id="67" name="Text 66"/>
+          <p:cNvPr id="89" name="Text 88"/>
           <p:cNvSpPr txBox="1"/>
           <p:nvPr/>
         </p:nvSpPr>
@@ -6562,7 +7392,7 @@
       </p:sp>
       <p:sp>
         <p:nvSpPr>
-          <p:cNvPr id="68" name="Shape 67"/>
+          <p:cNvPr id="90" name="Shape 89"/>
           <p:cNvSpPr/>
           <p:nvPr/>
         </p:nvSpPr>
@@ -6604,7 +7434,7 @@
       </p:sp>
       <p:sp>
         <p:nvSpPr>
-          <p:cNvPr id="69" name="Shape 68"/>
+          <p:cNvPr id="91" name="Shape 90"/>
           <p:cNvSpPr/>
           <p:nvPr/>
         </p:nvSpPr>
@@ -6646,7 +7476,7 @@
       </p:sp>
       <p:sp>
         <p:nvSpPr>
-          <p:cNvPr id="70" name="Text 69"/>
+          <p:cNvPr id="92" name="Text 91"/>
           <p:cNvSpPr txBox="1"/>
           <p:nvPr/>
         </p:nvSpPr>
@@ -6701,7 +7531,7 @@
       </p:sp>
       <p:sp>
         <p:nvSpPr>
-          <p:cNvPr id="71" name="Shape 70"/>
+          <p:cNvPr id="93" name="Shape 92"/>
           <p:cNvSpPr/>
           <p:nvPr/>
         </p:nvSpPr>
@@ -6743,7 +7573,7 @@
       </p:sp>
       <p:sp>
         <p:nvSpPr>
-          <p:cNvPr id="72" name="Shape 71"/>
+          <p:cNvPr id="94" name="Shape 93"/>
           <p:cNvSpPr/>
           <p:nvPr/>
         </p:nvSpPr>
@@ -6785,7 +7615,7 @@
       </p:sp>
       <p:sp>
         <p:nvSpPr>
-          <p:cNvPr id="73" name="Text 72"/>
+          <p:cNvPr id="95" name="Text 94"/>
           <p:cNvSpPr txBox="1"/>
           <p:nvPr/>
         </p:nvSpPr>
@@ -6840,7 +7670,7 @@
       </p:sp>
       <p:sp>
         <p:nvSpPr>
-          <p:cNvPr id="74" name="Shape 73"/>
+          <p:cNvPr id="96" name="Shape 95"/>
           <p:cNvSpPr/>
           <p:nvPr/>
         </p:nvSpPr>
@@ -6882,7 +7712,7 @@
       </p:sp>
       <p:sp>
         <p:nvSpPr>
-          <p:cNvPr id="75" name="Shape 74"/>
+          <p:cNvPr id="97" name="Shape 96"/>
           <p:cNvSpPr/>
           <p:nvPr/>
         </p:nvSpPr>
@@ -6924,7 +7754,7 @@
       </p:sp>
       <p:sp>
         <p:nvSpPr>
-          <p:cNvPr id="76" name="Text 75"/>
+          <p:cNvPr id="98" name="Text 97"/>
           <p:cNvSpPr txBox="1"/>
           <p:nvPr/>
         </p:nvSpPr>
@@ -6979,7 +7809,7 @@
       </p:sp>
       <p:sp>
         <p:nvSpPr>
-          <p:cNvPr id="77" name="Shape 76"/>
+          <p:cNvPr id="99" name="Shape 98"/>
           <p:cNvSpPr/>
           <p:nvPr/>
         </p:nvSpPr>
@@ -7021,7 +7851,7 @@
       </p:sp>
       <p:sp>
         <p:nvSpPr>
-          <p:cNvPr id="78" name="Shape 77"/>
+          <p:cNvPr id="100" name="Shape 99"/>
           <p:cNvSpPr/>
           <p:nvPr/>
         </p:nvSpPr>
@@ -7063,7 +7893,7 @@
       </p:sp>
       <p:sp>
         <p:nvSpPr>
-          <p:cNvPr id="79" name="Text 78"/>
+          <p:cNvPr id="101" name="Text 100"/>
           <p:cNvSpPr txBox="1"/>
           <p:nvPr/>
         </p:nvSpPr>

--- a/poc/data_harness/Ascension Agentic Harness - Data Harness.pptx
+++ b/poc/data_harness/Ascension Agentic Harness - Data Harness.pptx
@@ -1495,7 +1495,7 @@
           </a:p>
           <a:p>
             <a:r>
-              <a:t>- The pod: what changes for every pod (pilot targets, baselined per pod): a new engineer is productive in about a week instead of 4-6 weeks, because they ask the graph; agents work overnight, so delivery runs about 20 hours a day instead of office hours; every change is checked against the same standards; a new pod goes live on the platform in 2 weeks instead of about 2 months. The same team delivers 1.4-1.6x the output, or the same scope with 20-30% fewer people.</a:t>
+              <a:t>- The pod: what changes for every pod (pilot targets, baselined per pod): a new engineer is productive in about a week instead of 4-6 weeks, because they ask the graph; agents work overnight, so delivery runs about 20 hours a day instead of office hours; every change is checked against the same standards; a new pod goes live on the platform in 2 weeks instead of about 2 months.</a:t>
             </a:r>
           </a:p>
           <a:p>
@@ -5745,24 +5745,6 @@
           </a:bodyPr>
           <a:lstStyle/>
           <a:p>
-            <a:r>
-              <a:rPr sz="590" b="1" i="0">
-                <a:solidFill>
-                  <a:srgbClr val="F2F2F2"/>
-                </a:solidFill>
-                <a:latin typeface="Trenda IG Text"/>
-              </a:rPr>
-              <a:t>Same team: </a:t>
-            </a:r>
-            <a:r>
-              <a:rPr sz="590" b="0" i="0">
-                <a:solidFill>
-                  <a:srgbClr val="B3B3B3"/>
-                </a:solidFill>
-                <a:latin typeface="Trenda IG Text"/>
-              </a:rPr>
-              <a:t>1.4-1.6x the output, or the same scope with 20-30% fewer people. </a:t>
-            </a:r>
             <a:r>
               <a:rPr sz="590" b="0" i="0">
                 <a:solidFill>

--- a/poc/data_harness/Ascension Agentic Harness - Data Harness.pptx
+++ b/poc/data_harness/Ascension Agentic Harness - Data Harness.pptx
@@ -4111,7 +4111,7 @@
           <a:lstStyle/>
           <a:p>
             <a:r>
-              <a:rPr sz="640" b="1" i="0" spc="120">
+              <a:rPr sz="700" b="1" i="0" spc="120">
                 <a:solidFill>
                   <a:srgbClr val="F2F2F2"/>
                 </a:solidFill>
@@ -4120,7 +4120,7 @@
               <a:t>THE SQUAD</a:t>
             </a:r>
             <a:r>
-              <a:rPr sz="640" b="0" i="0">
+              <a:rPr sz="700" b="0" i="0">
                 <a:solidFill>
                   <a:srgbClr val="B3B3B3"/>
                 </a:solidFill>
@@ -4154,7 +4154,7 @@
           <a:lstStyle/>
           <a:p>
             <a:r>
-              <a:rPr sz="540" b="1" i="0" spc="100">
+              <a:rPr sz="700" b="1" i="0" spc="100">
                 <a:solidFill>
                   <a:srgbClr val="8C8C8C"/>
                 </a:solidFill>
@@ -4235,7 +4235,7 @@
           <a:p>
             <a:pPr algn="ctr"/>
             <a:r>
-              <a:rPr sz="640" b="1" i="0">
+              <a:rPr sz="700" b="1" i="0">
                 <a:solidFill>
                   <a:srgbClr val="B3B3B3"/>
                 </a:solidFill>
@@ -4316,7 +4316,7 @@
           <a:p>
             <a:pPr algn="ctr"/>
             <a:r>
-              <a:rPr sz="640" b="1" i="0">
+              <a:rPr sz="700" b="1" i="0">
                 <a:solidFill>
                   <a:srgbClr val="B3B3B3"/>
                 </a:solidFill>
@@ -4397,7 +4397,7 @@
           <a:p>
             <a:pPr algn="ctr"/>
             <a:r>
-              <a:rPr sz="640" b="1" i="0">
+              <a:rPr sz="700" b="1" i="0">
                 <a:solidFill>
                   <a:srgbClr val="B3B3B3"/>
                 </a:solidFill>
@@ -4478,7 +4478,7 @@
           <a:p>
             <a:pPr algn="ctr"/>
             <a:r>
-              <a:rPr sz="640" b="1" i="0">
+              <a:rPr sz="700" b="1" i="0">
                 <a:solidFill>
                   <a:srgbClr val="B3B3B3"/>
                 </a:solidFill>
@@ -4559,7 +4559,7 @@
           <a:p>
             <a:pPr algn="ctr"/>
             <a:r>
-              <a:rPr sz="640" b="1" i="0">
+              <a:rPr sz="700" b="1" i="0">
                 <a:solidFill>
                   <a:srgbClr val="B3B3B3"/>
                 </a:solidFill>
@@ -4593,7 +4593,7 @@
           <a:lstStyle/>
           <a:p>
             <a:r>
-              <a:rPr sz="540" b="1" i="0" spc="100">
+              <a:rPr sz="700" b="1" i="0" spc="100">
                 <a:solidFill>
                   <a:srgbClr val="00D6F2"/>
                 </a:solidFill>
@@ -4674,7 +4674,7 @@
           <a:p>
             <a:pPr algn="ctr"/>
             <a:r>
-              <a:rPr sz="640" b="1" i="0">
+              <a:rPr sz="700" b="1" i="0">
                 <a:solidFill>
                   <a:srgbClr val="F2F2F2"/>
                 </a:solidFill>
@@ -4779,7 +4779,7 @@
           <a:p>
             <a:pPr algn="ctr"/>
             <a:r>
-              <a:rPr sz="600" b="1" i="0">
+              <a:rPr sz="700" b="1" i="0">
                 <a:solidFill>
                   <a:srgbClr val="00D6F2"/>
                 </a:solidFill>
@@ -4860,7 +4860,7 @@
           <a:p>
             <a:pPr algn="ctr"/>
             <a:r>
-              <a:rPr sz="640" b="1" i="0">
+              <a:rPr sz="700" b="1" i="0">
                 <a:solidFill>
                   <a:srgbClr val="F2F2F2"/>
                 </a:solidFill>
@@ -4894,7 +4894,7 @@
           <a:lstStyle/>
           <a:p>
             <a:r>
-              <a:rPr sz="600" b="1" i="0">
+              <a:rPr sz="700" b="1" i="0">
                 <a:solidFill>
                   <a:srgbClr val="00D6F2"/>
                 </a:solidFill>
@@ -4903,7 +4903,7 @@
               <a:t>Agent </a:t>
             </a:r>
             <a:r>
-              <a:rPr sz="600" b="0" i="0">
+              <a:rPr sz="700" b="0" i="0">
                 <a:solidFill>
                   <a:srgbClr val="B3B3B3"/>
                 </a:solidFill>
@@ -4912,7 +4912,7 @@
               <a:t>drafts code, tests and the Copado package overnight. </a:t>
             </a:r>
             <a:r>
-              <a:rPr sz="600" b="1" i="0">
+              <a:rPr sz="700" b="1" i="0">
                 <a:solidFill>
                   <a:srgbClr val="F2F2F2"/>
                 </a:solidFill>
@@ -4921,7 +4921,7 @@
               <a:t>Developer </a:t>
             </a:r>
             <a:r>
-              <a:rPr sz="600" b="0" i="0">
+              <a:rPr sz="700" b="0" i="0">
                 <a:solidFill>
                   <a:srgbClr val="B3B3B3"/>
                 </a:solidFill>
@@ -4930,7 +4930,7 @@
               <a:t>directs and approves. </a:t>
             </a:r>
             <a:r>
-              <a:rPr sz="600" b="1" i="0">
+              <a:rPr sz="700" b="1" i="0">
                 <a:solidFill>
                   <a:srgbClr val="F2F2F2"/>
                 </a:solidFill>
@@ -4939,7 +4939,7 @@
               <a:t>QA </a:t>
             </a:r>
             <a:r>
-              <a:rPr sz="600" b="0" i="0">
+              <a:rPr sz="700" b="0" i="0">
                 <a:solidFill>
                   <a:srgbClr val="B3B3B3"/>
                 </a:solidFill>
@@ -5059,7 +5059,7 @@
           <a:lstStyle/>
           <a:p>
             <a:r>
-              <a:rPr sz="640" b="1" i="0" spc="120">
+              <a:rPr sz="700" b="1" i="0" spc="120">
                 <a:solidFill>
                   <a:srgbClr val="F2F2F2"/>
                 </a:solidFill>
@@ -5068,7 +5068,7 @@
               <a:t>THE POD</a:t>
             </a:r>
             <a:r>
-              <a:rPr sz="640" b="0" i="0">
+              <a:rPr sz="700" b="0" i="0">
                 <a:solidFill>
                   <a:srgbClr val="B3B3B3"/>
                 </a:solidFill>
@@ -5102,7 +5102,7 @@
           <a:lstStyle/>
           <a:p>
             <a:r>
-              <a:rPr sz="540" b="1" i="0" spc="100">
+              <a:rPr sz="700" b="1" i="0" spc="100">
                 <a:solidFill>
                   <a:srgbClr val="8C8C8C"/>
                 </a:solidFill>
@@ -5136,7 +5136,7 @@
           <a:lstStyle/>
           <a:p>
             <a:r>
-              <a:rPr sz="540" b="1" i="0" spc="100">
+              <a:rPr sz="700" b="1" i="0" spc="100">
                 <a:solidFill>
                   <a:srgbClr val="00D6F2"/>
                 </a:solidFill>
@@ -5212,7 +5212,7 @@
           <a:lstStyle/>
           <a:p>
             <a:r>
-              <a:rPr sz="600" b="1" i="0">
+              <a:rPr sz="700" b="1" i="0">
                 <a:solidFill>
                   <a:srgbClr val="F2F2F2"/>
                 </a:solidFill>
@@ -5246,7 +5246,7 @@
           <a:lstStyle/>
           <a:p>
             <a:r>
-              <a:rPr sz="600" b="0" i="0">
+              <a:rPr sz="700" b="0" i="0">
                 <a:solidFill>
                   <a:srgbClr val="B3B3B3"/>
                 </a:solidFill>
@@ -5280,7 +5280,7 @@
           <a:lstStyle/>
           <a:p>
             <a:r>
-              <a:rPr sz="600" b="1" i="0">
+              <a:rPr sz="700" b="1" i="0">
                 <a:solidFill>
                   <a:srgbClr val="00D6F2"/>
                 </a:solidFill>
@@ -5356,7 +5356,7 @@
           <a:lstStyle/>
           <a:p>
             <a:r>
-              <a:rPr sz="600" b="1" i="0">
+              <a:rPr sz="700" b="1" i="0">
                 <a:solidFill>
                   <a:srgbClr val="F2F2F2"/>
                 </a:solidFill>
@@ -5390,7 +5390,7 @@
           <a:lstStyle/>
           <a:p>
             <a:r>
-              <a:rPr sz="600" b="0" i="0">
+              <a:rPr sz="700" b="0" i="0">
                 <a:solidFill>
                   <a:srgbClr val="B3B3B3"/>
                 </a:solidFill>
@@ -5424,7 +5424,7 @@
           <a:lstStyle/>
           <a:p>
             <a:r>
-              <a:rPr sz="600" b="1" i="0">
+              <a:rPr sz="700" b="1" i="0">
                 <a:solidFill>
                   <a:srgbClr val="00D6F2"/>
                 </a:solidFill>
@@ -5500,7 +5500,7 @@
           <a:lstStyle/>
           <a:p>
             <a:r>
-              <a:rPr sz="600" b="1" i="0">
+              <a:rPr sz="700" b="1" i="0">
                 <a:solidFill>
                   <a:srgbClr val="F2F2F2"/>
                 </a:solidFill>
@@ -5534,7 +5534,7 @@
           <a:lstStyle/>
           <a:p>
             <a:r>
-              <a:rPr sz="600" b="0" i="0">
+              <a:rPr sz="700" b="0" i="0">
                 <a:solidFill>
                   <a:srgbClr val="B3B3B3"/>
                 </a:solidFill>
@@ -5568,7 +5568,7 @@
           <a:lstStyle/>
           <a:p>
             <a:r>
-              <a:rPr sz="600" b="1" i="0">
+              <a:rPr sz="700" b="1" i="0">
                 <a:solidFill>
                   <a:srgbClr val="00D6F2"/>
                 </a:solidFill>
@@ -5644,7 +5644,7 @@
           <a:lstStyle/>
           <a:p>
             <a:r>
-              <a:rPr sz="600" b="1" i="0">
+              <a:rPr sz="700" b="1" i="0">
                 <a:solidFill>
                   <a:srgbClr val="F2F2F2"/>
                 </a:solidFill>
@@ -5678,7 +5678,7 @@
           <a:lstStyle/>
           <a:p>
             <a:r>
-              <a:rPr sz="600" b="0" i="0">
+              <a:rPr sz="700" b="0" i="0">
                 <a:solidFill>
                   <a:srgbClr val="B3B3B3"/>
                 </a:solidFill>
@@ -5712,7 +5712,7 @@
           <a:lstStyle/>
           <a:p>
             <a:r>
-              <a:rPr sz="600" b="1" i="0">
+              <a:rPr sz="700" b="1" i="0">
                 <a:solidFill>
                   <a:srgbClr val="00D6F2"/>
                 </a:solidFill>
@@ -5746,7 +5746,7 @@
           <a:lstStyle/>
           <a:p>
             <a:r>
-              <a:rPr sz="590" b="0" i="0">
+              <a:rPr sz="700" b="0" i="0">
                 <a:solidFill>
                   <a:srgbClr val="8C8C8C"/>
                 </a:solidFill>
@@ -5866,7 +5866,7 @@
           <a:lstStyle/>
           <a:p>
             <a:r>
-              <a:rPr sz="640" b="1" i="0" spc="120">
+              <a:rPr sz="700" b="1" i="0" spc="120">
                 <a:solidFill>
                   <a:srgbClr val="F2F2F2"/>
                 </a:solidFill>
@@ -5875,7 +5875,7 @@
               <a:t>THE BUILD AND RUN</a:t>
             </a:r>
             <a:r>
-              <a:rPr sz="640" b="0" i="0">
+              <a:rPr sz="700" b="0" i="0">
                 <a:solidFill>
                   <a:srgbClr val="B3B3B3"/>
                 </a:solidFill>
@@ -5985,7 +5985,7 @@
           <a:lstStyle/>
           <a:p>
             <a:r>
-              <a:rPr sz="590" b="0" i="0">
+              <a:rPr sz="700" b="0" i="0">
                 <a:solidFill>
                   <a:srgbClr val="B3B3B3"/>
                 </a:solidFill>
@@ -6095,7 +6095,7 @@
           <a:lstStyle/>
           <a:p>
             <a:r>
-              <a:rPr sz="590" b="0" i="0">
+              <a:rPr sz="700" b="0" i="0">
                 <a:solidFill>
                   <a:srgbClr val="B3B3B3"/>
                 </a:solidFill>
@@ -6205,7 +6205,7 @@
           <a:lstStyle/>
           <a:p>
             <a:r>
-              <a:rPr sz="590" b="0" i="0">
+              <a:rPr sz="700" b="0" i="0">
                 <a:solidFill>
                   <a:srgbClr val="B3B3B3"/>
                 </a:solidFill>
@@ -6239,7 +6239,7 @@
           <a:lstStyle/>
           <a:p>
             <a:r>
-              <a:rPr sz="600" b="1" i="0">
+              <a:rPr sz="700" b="1" i="0">
                 <a:solidFill>
                   <a:srgbClr val="F2F2F2"/>
                 </a:solidFill>
@@ -6248,7 +6248,7 @@
               <a:t>From month 19 </a:t>
             </a:r>
             <a:r>
-              <a:rPr sz="600" b="0" i="0">
+              <a:rPr sz="700" b="0" i="0">
                 <a:solidFill>
                   <a:srgbClr val="B3B3B3"/>
                 </a:solidFill>
@@ -6368,7 +6368,7 @@
           <a:lstStyle/>
           <a:p>
             <a:r>
-              <a:rPr sz="640" b="1" i="0" spc="120">
+              <a:rPr sz="700" b="1" i="0" spc="120">
                 <a:solidFill>
                   <a:srgbClr val="F2F2F2"/>
                 </a:solidFill>
@@ -6377,7 +6377,7 @@
               <a:t>THE RETURN</a:t>
             </a:r>
             <a:r>
-              <a:rPr sz="640" b="0" i="0">
+              <a:rPr sz="700" b="0" i="0">
                 <a:solidFill>
                   <a:srgbClr val="B3B3B3"/>
                 </a:solidFill>
@@ -6521,7 +6521,7 @@
           <a:lstStyle/>
           <a:p>
             <a:r>
-              <a:rPr sz="600" b="0" i="0">
+              <a:rPr sz="700" b="0" i="0">
                 <a:solidFill>
                   <a:srgbClr val="B3B3B3"/>
                 </a:solidFill>
@@ -6665,7 +6665,7 @@
           <a:lstStyle/>
           <a:p>
             <a:r>
-              <a:rPr sz="600" b="0" i="0">
+              <a:rPr sz="700" b="0" i="0">
                 <a:solidFill>
                   <a:srgbClr val="B3B3B3"/>
                 </a:solidFill>
@@ -6862,7 +6862,7 @@
           <a:lstStyle/>
           <a:p>
             <a:r>
-              <a:rPr sz="600" b="0" i="0">
+              <a:rPr sz="700" b="0" i="0">
                 <a:solidFill>
                   <a:srgbClr val="B3B3B3"/>
                 </a:solidFill>
@@ -7006,7 +7006,7 @@
           <a:lstStyle/>
           <a:p>
             <a:r>
-              <a:rPr sz="600" b="0" i="0">
+              <a:rPr sz="700" b="0" i="0">
                 <a:solidFill>
                   <a:srgbClr val="B3B3B3"/>
                 </a:solidFill>
@@ -7156,7 +7156,7 @@
               </a:spcAft>
             </a:pPr>
             <a:r>
-              <a:rPr sz="640" b="0" i="0">
+              <a:rPr sz="700" b="0" i="0">
                 <a:solidFill>
                   <a:srgbClr val="B3B3B3"/>
                 </a:solidFill>
@@ -7306,7 +7306,7 @@
               </a:spcAft>
             </a:pPr>
             <a:r>
-              <a:rPr sz="640" b="0" i="0">
+              <a:rPr sz="700" b="0" i="0">
                 <a:solidFill>
                   <a:srgbClr val="B3B3B3"/>
                 </a:solidFill>
@@ -7345,7 +7345,7 @@
               </a:spcAft>
             </a:pPr>
             <a:r>
-              <a:rPr sz="640" b="1" i="0" spc="120">
+              <a:rPr sz="700" b="1" i="0" spc="120">
                 <a:solidFill>
                   <a:srgbClr val="F2F2F2"/>
                 </a:solidFill>
@@ -7361,7 +7361,7 @@
               </a:spcAft>
             </a:pPr>
             <a:r>
-              <a:rPr sz="520" b="0" i="0">
+              <a:rPr sz="700" b="0" i="0">
                 <a:solidFill>
                   <a:srgbClr val="8C8C8C"/>
                 </a:solidFill>
@@ -7500,7 +7500,7 @@
               </a:spcAft>
             </a:pPr>
             <a:r>
-              <a:rPr sz="600" b="0" i="0">
+              <a:rPr sz="700" b="0" i="0">
                 <a:solidFill>
                   <a:srgbClr val="B3B3B3"/>
                 </a:solidFill>
@@ -7639,7 +7639,7 @@
               </a:spcAft>
             </a:pPr>
             <a:r>
-              <a:rPr sz="600" b="0" i="0">
+              <a:rPr sz="700" b="0" i="0">
                 <a:solidFill>
                   <a:srgbClr val="B3B3B3"/>
                 </a:solidFill>
@@ -7778,7 +7778,7 @@
               </a:spcAft>
             </a:pPr>
             <a:r>
-              <a:rPr sz="600" b="0" i="0">
+              <a:rPr sz="700" b="0" i="0">
                 <a:solidFill>
                   <a:srgbClr val="B3B3B3"/>
                 </a:solidFill>
@@ -7917,7 +7917,7 @@
               </a:spcAft>
             </a:pPr>
             <a:r>
-              <a:rPr sz="600" b="0" i="0">
+              <a:rPr sz="700" b="0" i="0">
                 <a:solidFill>
                   <a:srgbClr val="B3B3B3"/>
                 </a:solidFill>
@@ -8234,7 +8234,7 @@
           </a:p>
           <a:p>
             <a:r>
-              <a:rPr sz="600" b="0" i="0">
+              <a:rPr sz="700" b="0" i="0">
                 <a:solidFill>
                   <a:srgbClr val="8C8C8C"/>
                 </a:solidFill>
@@ -8303,7 +8303,7 @@
           </a:p>
           <a:p>
             <a:r>
-              <a:rPr sz="600" b="0" i="0">
+              <a:rPr sz="700" b="0" i="0">
                 <a:solidFill>
                   <a:srgbClr val="8C8C8C"/>
                 </a:solidFill>
@@ -8372,7 +8372,7 @@
           </a:p>
           <a:p>
             <a:r>
-              <a:rPr sz="600" b="0" i="0">
+              <a:rPr sz="700" b="0" i="0">
                 <a:solidFill>
                   <a:srgbClr val="8C8C8C"/>
                 </a:solidFill>
@@ -8441,7 +8441,7 @@
           </a:p>
           <a:p>
             <a:r>
-              <a:rPr sz="600" b="0" i="0">
+              <a:rPr sz="700" b="0" i="0">
                 <a:solidFill>
                   <a:srgbClr val="8C8C8C"/>
                 </a:solidFill>
@@ -8520,7 +8520,7 @@
           <a:p>
             <a:pPr algn="ctr"/>
             <a:r>
-              <a:rPr sz="520" b="1" i="0" spc="80">
+              <a:rPr sz="700" b="1" i="0" spc="80">
                 <a:solidFill>
                   <a:srgbClr val="BFBFBF"/>
                 </a:solidFill>
@@ -8565,7 +8565,7 @@
           </a:p>
           <a:p>
             <a:r>
-              <a:rPr sz="600" b="0" i="0">
+              <a:rPr sz="700" b="0" i="0">
                 <a:solidFill>
                   <a:srgbClr val="8C8C8C"/>
                 </a:solidFill>
@@ -8634,7 +8634,7 @@
           </a:p>
           <a:p>
             <a:r>
-              <a:rPr sz="600" b="0" i="0">
+              <a:rPr sz="700" b="0" i="0">
                 <a:solidFill>
                   <a:srgbClr val="8C8C8C"/>
                 </a:solidFill>
@@ -8668,7 +8668,7 @@
           <a:lstStyle/>
           <a:p>
             <a:r>
-              <a:rPr sz="580" b="1" i="0" spc="120">
+              <a:rPr sz="700" b="1" i="0" spc="120">
                 <a:solidFill>
                   <a:srgbClr val="00D6F2"/>
                 </a:solidFill>
@@ -8806,7 +8806,7 @@
           <a:lstStyle/>
           <a:p>
             <a:r>
-              <a:rPr sz="630" b="0" i="0">
+              <a:rPr sz="700" b="0" i="0">
                 <a:solidFill>
                   <a:srgbClr val="BFBFBF"/>
                 </a:solidFill>
@@ -8840,7 +8840,7 @@
           <a:lstStyle/>
           <a:p>
             <a:r>
-              <a:rPr sz="620" b="0" i="0">
+              <a:rPr sz="700" b="0" i="0">
                 <a:solidFill>
                   <a:srgbClr val="8C8C8C"/>
                 </a:solidFill>
@@ -9044,7 +9044,7 @@
           <a:p>
             <a:pPr algn="ctr"/>
             <a:r>
-              <a:rPr sz="660" b="1" i="0">
+              <a:rPr sz="700" b="1" i="0">
                 <a:solidFill>
                   <a:srgbClr val="FFFFFF"/>
                 </a:solidFill>
@@ -9112,7 +9112,7 @@
           <a:lstStyle/>
           <a:p>
             <a:r>
-              <a:rPr sz="600" b="0" i="0">
+              <a:rPr sz="700" b="0" i="0">
                 <a:solidFill>
                   <a:srgbClr val="BFBFBF"/>
                 </a:solidFill>
@@ -9191,7 +9191,7 @@
           <a:p>
             <a:pPr algn="ctr"/>
             <a:r>
-              <a:rPr sz="560" b="1" i="0" spc="80">
+              <a:rPr sz="700" b="1" i="0" spc="80">
                 <a:solidFill>
                   <a:srgbClr val="E6E6E6"/>
                 </a:solidFill>
@@ -9310,7 +9310,7 @@
           <a:p>
             <a:pPr algn="ctr"/>
             <a:r>
-              <a:rPr sz="660" b="1" i="0">
+              <a:rPr sz="700" b="1" i="0">
                 <a:solidFill>
                   <a:srgbClr val="FFFFFF"/>
                 </a:solidFill>
@@ -9378,7 +9378,7 @@
           <a:lstStyle/>
           <a:p>
             <a:r>
-              <a:rPr sz="600" b="0" i="0">
+              <a:rPr sz="700" b="0" i="0">
                 <a:solidFill>
                   <a:srgbClr val="BFBFBF"/>
                 </a:solidFill>
@@ -9457,7 +9457,7 @@
           <a:p>
             <a:pPr algn="ctr"/>
             <a:r>
-              <a:rPr sz="560" b="1" i="0" spc="80">
+              <a:rPr sz="700" b="1" i="0" spc="80">
                 <a:solidFill>
                   <a:srgbClr val="00D6F2"/>
                 </a:solidFill>
@@ -9576,7 +9576,7 @@
           <a:p>
             <a:pPr algn="ctr"/>
             <a:r>
-              <a:rPr sz="660" b="1" i="0">
+              <a:rPr sz="700" b="1" i="0">
                 <a:solidFill>
                   <a:srgbClr val="FFFFFF"/>
                 </a:solidFill>
@@ -9644,7 +9644,7 @@
           <a:lstStyle/>
           <a:p>
             <a:r>
-              <a:rPr sz="600" b="0" i="0">
+              <a:rPr sz="700" b="0" i="0">
                 <a:solidFill>
                   <a:srgbClr val="BFBFBF"/>
                 </a:solidFill>
@@ -9723,7 +9723,7 @@
           <a:p>
             <a:pPr algn="ctr"/>
             <a:r>
-              <a:rPr sz="560" b="1" i="0" spc="80">
+              <a:rPr sz="700" b="1" i="0" spc="80">
                 <a:solidFill>
                   <a:srgbClr val="00D6F2"/>
                 </a:solidFill>
@@ -9842,7 +9842,7 @@
           <a:p>
             <a:pPr algn="ctr"/>
             <a:r>
-              <a:rPr sz="660" b="1" i="0">
+              <a:rPr sz="700" b="1" i="0">
                 <a:solidFill>
                   <a:srgbClr val="FFFFFF"/>
                 </a:solidFill>
@@ -9910,7 +9910,7 @@
           <a:lstStyle/>
           <a:p>
             <a:r>
-              <a:rPr sz="600" b="0" i="0">
+              <a:rPr sz="700" b="0" i="0">
                 <a:solidFill>
                   <a:srgbClr val="BFBFBF"/>
                 </a:solidFill>
@@ -9989,7 +9989,7 @@
           <a:p>
             <a:pPr algn="ctr"/>
             <a:r>
-              <a:rPr sz="560" b="1" i="0" spc="80">
+              <a:rPr sz="700" b="1" i="0" spc="80">
                 <a:solidFill>
                   <a:srgbClr val="E6E6E6"/>
                 </a:solidFill>
@@ -10108,7 +10108,7 @@
           <a:p>
             <a:pPr algn="ctr"/>
             <a:r>
-              <a:rPr sz="660" b="1" i="0">
+              <a:rPr sz="700" b="1" i="0">
                 <a:solidFill>
                   <a:srgbClr val="FFFFFF"/>
                 </a:solidFill>
@@ -10176,7 +10176,7 @@
           <a:lstStyle/>
           <a:p>
             <a:r>
-              <a:rPr sz="600" b="0" i="0">
+              <a:rPr sz="700" b="0" i="0">
                 <a:solidFill>
                   <a:srgbClr val="BFBFBF"/>
                 </a:solidFill>
@@ -10255,7 +10255,7 @@
           <a:p>
             <a:pPr algn="ctr"/>
             <a:r>
-              <a:rPr sz="560" b="1" i="0" spc="80">
+              <a:rPr sz="700" b="1" i="0" spc="80">
                 <a:solidFill>
                   <a:srgbClr val="00D6F2"/>
                 </a:solidFill>
@@ -10374,7 +10374,7 @@
           <a:p>
             <a:pPr algn="ctr"/>
             <a:r>
-              <a:rPr sz="660" b="1" i="0">
+              <a:rPr sz="700" b="1" i="0">
                 <a:solidFill>
                   <a:srgbClr val="FFFFFF"/>
                 </a:solidFill>
@@ -10442,7 +10442,7 @@
           <a:lstStyle/>
           <a:p>
             <a:r>
-              <a:rPr sz="600" b="0" i="0">
+              <a:rPr sz="700" b="0" i="0">
                 <a:solidFill>
                   <a:srgbClr val="BFBFBF"/>
                 </a:solidFill>
@@ -10521,7 +10521,7 @@
           <a:p>
             <a:pPr algn="ctr"/>
             <a:r>
-              <a:rPr sz="560" b="1" i="0" spc="80">
+              <a:rPr sz="700" b="1" i="0" spc="80">
                 <a:solidFill>
                   <a:srgbClr val="00D6F2"/>
                 </a:solidFill>
@@ -10640,7 +10640,7 @@
           <a:p>
             <a:pPr algn="ctr"/>
             <a:r>
-              <a:rPr sz="660" b="1" i="0">
+              <a:rPr sz="700" b="1" i="0">
                 <a:solidFill>
                   <a:srgbClr val="FFFFFF"/>
                 </a:solidFill>
@@ -10708,7 +10708,7 @@
           <a:lstStyle/>
           <a:p>
             <a:r>
-              <a:rPr sz="600" b="0" i="0">
+              <a:rPr sz="700" b="0" i="0">
                 <a:solidFill>
                   <a:srgbClr val="BFBFBF"/>
                 </a:solidFill>
@@ -10787,7 +10787,7 @@
           <a:p>
             <a:pPr algn="ctr"/>
             <a:r>
-              <a:rPr sz="560" b="1" i="0" spc="80">
+              <a:rPr sz="700" b="1" i="0" spc="80">
                 <a:solidFill>
                   <a:srgbClr val="E6E6E6"/>
                 </a:solidFill>
@@ -10991,7 +10991,7 @@
           <a:p>
             <a:pPr algn="ctr"/>
             <a:r>
-              <a:rPr sz="660" b="1" i="0">
+              <a:rPr sz="700" b="1" i="0">
                 <a:solidFill>
                   <a:srgbClr val="FFFFFF"/>
                 </a:solidFill>
@@ -11059,7 +11059,7 @@
           <a:lstStyle/>
           <a:p>
             <a:r>
-              <a:rPr sz="600" b="0" i="0">
+              <a:rPr sz="700" b="0" i="0">
                 <a:solidFill>
                   <a:srgbClr val="BFBFBF"/>
                 </a:solidFill>
@@ -11138,7 +11138,7 @@
           <a:p>
             <a:pPr algn="ctr"/>
             <a:r>
-              <a:rPr sz="560" b="1" i="0" spc="80">
+              <a:rPr sz="700" b="1" i="0" spc="80">
                 <a:solidFill>
                   <a:srgbClr val="E6E6E6"/>
                 </a:solidFill>
@@ -11257,7 +11257,7 @@
           <a:p>
             <a:pPr algn="ctr"/>
             <a:r>
-              <a:rPr sz="660" b="1" i="0">
+              <a:rPr sz="700" b="1" i="0">
                 <a:solidFill>
                   <a:srgbClr val="FFFFFF"/>
                 </a:solidFill>
@@ -11325,7 +11325,7 @@
           <a:lstStyle/>
           <a:p>
             <a:r>
-              <a:rPr sz="600" b="0" i="0">
+              <a:rPr sz="700" b="0" i="0">
                 <a:solidFill>
                   <a:srgbClr val="BFBFBF"/>
                 </a:solidFill>
@@ -11404,7 +11404,7 @@
           <a:p>
             <a:pPr algn="ctr"/>
             <a:r>
-              <a:rPr sz="560" b="1" i="0" spc="80">
+              <a:rPr sz="700" b="1" i="0" spc="80">
                 <a:solidFill>
                   <a:srgbClr val="00D6F2"/>
                 </a:solidFill>
@@ -11523,7 +11523,7 @@
           <a:p>
             <a:pPr algn="ctr"/>
             <a:r>
-              <a:rPr sz="660" b="1" i="0">
+              <a:rPr sz="700" b="1" i="0">
                 <a:solidFill>
                   <a:srgbClr val="FFFFFF"/>
                 </a:solidFill>
@@ -11591,7 +11591,7 @@
           <a:lstStyle/>
           <a:p>
             <a:r>
-              <a:rPr sz="600" b="0" i="0">
+              <a:rPr sz="700" b="0" i="0">
                 <a:solidFill>
                   <a:srgbClr val="BFBFBF"/>
                 </a:solidFill>
@@ -11670,7 +11670,7 @@
           <a:p>
             <a:pPr algn="ctr"/>
             <a:r>
-              <a:rPr sz="560" b="1" i="0" spc="80">
+              <a:rPr sz="700" b="1" i="0" spc="80">
                 <a:solidFill>
                   <a:srgbClr val="E6E6E6"/>
                 </a:solidFill>
@@ -11789,7 +11789,7 @@
           <a:p>
             <a:pPr algn="ctr"/>
             <a:r>
-              <a:rPr sz="660" b="1" i="0">
+              <a:rPr sz="700" b="1" i="0">
                 <a:solidFill>
                   <a:srgbClr val="FFFFFF"/>
                 </a:solidFill>
@@ -11857,7 +11857,7 @@
           <a:lstStyle/>
           <a:p>
             <a:r>
-              <a:rPr sz="600" b="0" i="0">
+              <a:rPr sz="700" b="0" i="0">
                 <a:solidFill>
                   <a:srgbClr val="BFBFBF"/>
                 </a:solidFill>
@@ -11936,7 +11936,7 @@
           <a:p>
             <a:pPr algn="ctr"/>
             <a:r>
-              <a:rPr sz="560" b="1" i="0" spc="80">
+              <a:rPr sz="700" b="1" i="0" spc="80">
                 <a:solidFill>
                   <a:srgbClr val="00D6F2"/>
                 </a:solidFill>
@@ -12055,7 +12055,7 @@
           <a:p>
             <a:pPr algn="ctr"/>
             <a:r>
-              <a:rPr sz="660" b="1" i="0">
+              <a:rPr sz="700" b="1" i="0">
                 <a:solidFill>
                   <a:srgbClr val="FFFFFF"/>
                 </a:solidFill>
@@ -12123,13 +12123,13 @@
           <a:lstStyle/>
           <a:p>
             <a:r>
-              <a:rPr sz="600" b="0" i="0">
+              <a:rPr sz="700" b="0" i="0">
                 <a:solidFill>
                   <a:srgbClr val="BFBFBF"/>
                 </a:solidFill>
                 <a:latin typeface="Trenda IG Text"/>
               </a:rPr>
-              <a:t>Platform-ready specs; journeys through Marketing Cloud's native automation</a:t>
+              <a:t>Platform-ready specs; journeys on Marketing Cloud's native tools</a:t>
             </a:r>
           </a:p>
         </p:txBody>
@@ -12202,7 +12202,7 @@
           <a:p>
             <a:pPr algn="ctr"/>
             <a:r>
-              <a:rPr sz="560" b="1" i="0" spc="80">
+              <a:rPr sz="700" b="1" i="0" spc="80">
                 <a:solidFill>
                   <a:srgbClr val="00D6F2"/>
                 </a:solidFill>
@@ -12321,7 +12321,7 @@
           <a:p>
             <a:pPr algn="ctr"/>
             <a:r>
-              <a:rPr sz="660" b="1" i="0">
+              <a:rPr sz="700" b="1" i="0">
                 <a:solidFill>
                   <a:srgbClr val="FFFFFF"/>
                 </a:solidFill>
@@ -12389,7 +12389,7 @@
           <a:lstStyle/>
           <a:p>
             <a:r>
-              <a:rPr sz="600" b="0" i="0">
+              <a:rPr sz="700" b="0" i="0">
                 <a:solidFill>
                   <a:srgbClr val="BFBFBF"/>
                 </a:solidFill>
@@ -12468,7 +12468,7 @@
           <a:p>
             <a:pPr algn="ctr"/>
             <a:r>
-              <a:rPr sz="560" b="1" i="0" spc="80">
+              <a:rPr sz="700" b="1" i="0" spc="80">
                 <a:solidFill>
                   <a:srgbClr val="00D6F2"/>
                 </a:solidFill>
@@ -12587,7 +12587,7 @@
           <a:p>
             <a:pPr algn="ctr"/>
             <a:r>
-              <a:rPr sz="660" b="1" i="0">
+              <a:rPr sz="700" b="1" i="0">
                 <a:solidFill>
                   <a:srgbClr val="FFFFFF"/>
                 </a:solidFill>
@@ -12655,7 +12655,7 @@
           <a:lstStyle/>
           <a:p>
             <a:r>
-              <a:rPr sz="600" b="0" i="0">
+              <a:rPr sz="700" b="0" i="0">
                 <a:solidFill>
                   <a:srgbClr val="BFBFBF"/>
                 </a:solidFill>
@@ -12734,7 +12734,7 @@
           <a:p>
             <a:pPr algn="ctr"/>
             <a:r>
-              <a:rPr sz="560" b="1" i="0" spc="80">
+              <a:rPr sz="700" b="1" i="0" spc="80">
                 <a:solidFill>
                   <a:srgbClr val="E6E6E6"/>
                 </a:solidFill>
@@ -12955,7 +12955,7 @@
           <a:lstStyle/>
           <a:p>
             <a:r>
-              <a:rPr sz="600" b="0" i="0">
+              <a:rPr sz="700" b="0" i="0">
                 <a:solidFill>
                   <a:srgbClr val="8C8C8C"/>
                 </a:solidFill>
@@ -12989,7 +12989,7 @@
           <a:lstStyle/>
           <a:p>
             <a:r>
-              <a:rPr sz="660" b="0" i="0">
+              <a:rPr sz="700" b="0" i="0">
                 <a:solidFill>
                   <a:srgbClr val="FFFFFF"/>
                 </a:solidFill>
@@ -13009,7 +13009,7 @@
         <p:spPr>
           <a:xfrm>
             <a:off x="9116567" y="2267712"/>
-            <a:ext cx="937259" cy="164592"/>
+            <a:ext cx="1060704" cy="164592"/>
           </a:xfrm>
           <a:prstGeom prst="roundRect">
             <a:avLst>
@@ -13053,7 +13053,7 @@
         <p:spPr>
           <a:xfrm>
             <a:off x="9116567" y="2267712"/>
-            <a:ext cx="937259" cy="164592"/>
+            <a:ext cx="1060704" cy="164592"/>
           </a:xfrm>
           <a:prstGeom prst="rect">
             <a:avLst/>
@@ -13068,7 +13068,7 @@
           <a:p>
             <a:pPr algn="ctr"/>
             <a:r>
-              <a:rPr sz="560" b="1" i="0" spc="80">
+              <a:rPr sz="700" b="1" i="0" spc="80">
                 <a:solidFill>
                   <a:srgbClr val="E6E6E6"/>
                 </a:solidFill>
@@ -13160,7 +13160,7 @@
           <a:lstStyle/>
           <a:p>
             <a:r>
-              <a:rPr sz="600" b="0" i="0">
+              <a:rPr sz="700" b="0" i="0">
                 <a:solidFill>
                   <a:srgbClr val="8C8C8C"/>
                 </a:solidFill>
@@ -13194,7 +13194,7 @@
           <a:lstStyle/>
           <a:p>
             <a:r>
-              <a:rPr sz="660" b="0" i="0">
+              <a:rPr sz="700" b="0" i="0">
                 <a:solidFill>
                   <a:srgbClr val="FFFFFF"/>
                 </a:solidFill>
@@ -13214,7 +13214,7 @@
         <p:spPr>
           <a:xfrm>
             <a:off x="9116567" y="3291840"/>
-            <a:ext cx="1490472" cy="164592"/>
+            <a:ext cx="1704441" cy="164592"/>
           </a:xfrm>
           <a:prstGeom prst="roundRect">
             <a:avLst>
@@ -13258,7 +13258,7 @@
         <p:spPr>
           <a:xfrm>
             <a:off x="9116567" y="3291840"/>
-            <a:ext cx="1490472" cy="164592"/>
+            <a:ext cx="1704441" cy="164592"/>
           </a:xfrm>
           <a:prstGeom prst="rect">
             <a:avLst/>
@@ -13273,7 +13273,7 @@
           <a:p>
             <a:pPr algn="ctr"/>
             <a:r>
-              <a:rPr sz="560" b="1" i="0" spc="80">
+              <a:rPr sz="700" b="1" i="0" spc="80">
                 <a:solidFill>
                   <a:srgbClr val="00D6F2"/>
                 </a:solidFill>
@@ -13292,8 +13292,8 @@
         </p:nvSpPr>
         <p:spPr>
           <a:xfrm>
-            <a:off x="10661903" y="3291840"/>
-            <a:ext cx="585216" cy="164592"/>
+            <a:off x="10875873" y="3291840"/>
+            <a:ext cx="651052" cy="164592"/>
           </a:xfrm>
           <a:prstGeom prst="roundRect">
             <a:avLst>
@@ -13336,8 +13336,8 @@
         </p:nvSpPr>
         <p:spPr>
           <a:xfrm>
-            <a:off x="10661903" y="3291840"/>
-            <a:ext cx="585216" cy="164592"/>
+            <a:off x="10875873" y="3291840"/>
+            <a:ext cx="651052" cy="164592"/>
           </a:xfrm>
           <a:prstGeom prst="rect">
             <a:avLst/>
@@ -13352,7 +13352,7 @@
           <a:p>
             <a:pPr algn="ctr"/>
             <a:r>
-              <a:rPr sz="560" b="1" i="0" spc="80">
+              <a:rPr sz="700" b="1" i="0" spc="80">
                 <a:solidFill>
                   <a:srgbClr val="00D6F2"/>
                 </a:solidFill>
@@ -13420,7 +13420,7 @@
           <a:lstStyle/>
           <a:p>
             <a:r>
-              <a:rPr sz="600" b="0" i="0">
+              <a:rPr sz="700" b="0" i="0">
                 <a:solidFill>
                   <a:srgbClr val="8C8C8C"/>
                 </a:solidFill>
@@ -13454,7 +13454,7 @@
           <a:lstStyle/>
           <a:p>
             <a:r>
-              <a:rPr sz="660" b="0" i="0">
+              <a:rPr sz="700" b="0" i="0">
                 <a:solidFill>
                   <a:srgbClr val="FFFFFF"/>
                 </a:solidFill>
@@ -13532,7 +13532,7 @@
           <a:lstStyle/>
           <a:p>
             <a:r>
-              <a:rPr sz="660" b="0" i="0">
+              <a:rPr sz="700" b="0" i="0">
                 <a:solidFill>
                   <a:srgbClr val="FFFFFF"/>
                 </a:solidFill>
@@ -13566,7 +13566,7 @@
           <a:lstStyle/>
           <a:p>
             <a:r>
-              <a:rPr sz="640" b="1" i="0" spc="120">
+              <a:rPr sz="700" b="1" i="0" spc="120">
                 <a:solidFill>
                   <a:srgbClr val="E6E6E6"/>
                 </a:solidFill>
@@ -13647,7 +13647,7 @@
           <a:p>
             <a:pPr algn="ctr"/>
             <a:r>
-              <a:rPr sz="660" b="0" i="0">
+              <a:rPr sz="700" b="0" i="0">
                 <a:solidFill>
                   <a:srgbClr val="FFFFFF"/>
                 </a:solidFill>
@@ -13764,7 +13764,7 @@
           <a:p>
             <a:pPr algn="ctr"/>
             <a:r>
-              <a:rPr sz="660" b="0" i="0">
+              <a:rPr sz="700" b="0" i="0">
                 <a:solidFill>
                   <a:srgbClr val="FFFFFF"/>
                 </a:solidFill>
@@ -13881,7 +13881,7 @@
           <a:p>
             <a:pPr algn="ctr"/>
             <a:r>
-              <a:rPr sz="660" b="0" i="0">
+              <a:rPr sz="700" b="0" i="0">
                 <a:solidFill>
                   <a:srgbClr val="FFFFFF"/>
                 </a:solidFill>
@@ -13998,7 +13998,7 @@
           <a:p>
             <a:pPr algn="ctr"/>
             <a:r>
-              <a:rPr sz="660" b="0" i="0">
+              <a:rPr sz="700" b="0" i="0">
                 <a:solidFill>
                   <a:srgbClr val="FFFFFF"/>
                 </a:solidFill>
@@ -14115,7 +14115,7 @@
           <a:p>
             <a:pPr algn="ctr"/>
             <a:r>
-              <a:rPr sz="660" b="0" i="0">
+              <a:rPr sz="700" b="0" i="0">
                 <a:solidFill>
                   <a:srgbClr val="FFFFFF"/>
                 </a:solidFill>
@@ -14232,7 +14232,7 @@
           <a:p>
             <a:pPr algn="ctr"/>
             <a:r>
-              <a:rPr sz="660" b="1" i="0">
+              <a:rPr sz="700" b="1" i="0">
                 <a:solidFill>
                   <a:srgbClr val="00D6F2"/>
                 </a:solidFill>
@@ -14349,7 +14349,7 @@
           <a:p>
             <a:pPr algn="ctr"/>
             <a:r>
-              <a:rPr sz="660" b="1" i="0">
+              <a:rPr sz="700" b="1" i="0">
                 <a:solidFill>
                   <a:srgbClr val="00D6F2"/>
                 </a:solidFill>
@@ -14466,7 +14466,7 @@
           <a:p>
             <a:pPr algn="ctr"/>
             <a:r>
-              <a:rPr sz="660" b="1" i="0">
+              <a:rPr sz="700" b="1" i="0">
                 <a:solidFill>
                   <a:srgbClr val="00D6F2"/>
                 </a:solidFill>
@@ -14583,7 +14583,7 @@
           <a:p>
             <a:pPr algn="ctr"/>
             <a:r>
-              <a:rPr sz="660" b="0" i="0">
+              <a:rPr sz="700" b="0" i="0">
                 <a:solidFill>
                   <a:srgbClr val="FFFFFF"/>
                 </a:solidFill>
@@ -14617,7 +14617,7 @@
           <a:lstStyle/>
           <a:p>
             <a:r>
-              <a:rPr sz="640" b="1" i="0" spc="120">
+              <a:rPr sz="700" b="1" i="0" spc="120">
                 <a:solidFill>
                   <a:srgbClr val="00D6F2"/>
                 </a:solidFill>
@@ -14698,7 +14698,7 @@
           <a:p>
             <a:pPr algn="ctr"/>
             <a:r>
-              <a:rPr sz="660" b="0" i="0">
+              <a:rPr sz="700" b="0" i="0">
                 <a:solidFill>
                   <a:srgbClr val="FFFFFF"/>
                 </a:solidFill>
@@ -14815,7 +14815,7 @@
           <a:p>
             <a:pPr algn="ctr"/>
             <a:r>
-              <a:rPr sz="660" b="0" i="0">
+              <a:rPr sz="700" b="0" i="0">
                 <a:solidFill>
                   <a:srgbClr val="FFFFFF"/>
                 </a:solidFill>
@@ -14932,7 +14932,7 @@
           <a:p>
             <a:pPr algn="ctr"/>
             <a:r>
-              <a:rPr sz="660" b="0" i="0">
+              <a:rPr sz="700" b="0" i="0">
                 <a:solidFill>
                   <a:srgbClr val="FFFFFF"/>
                 </a:solidFill>
@@ -15049,7 +15049,7 @@
           <a:p>
             <a:pPr algn="ctr"/>
             <a:r>
-              <a:rPr sz="660" b="1" i="0">
+              <a:rPr sz="700" b="1" i="0">
                 <a:solidFill>
                   <a:srgbClr val="00D6F2"/>
                 </a:solidFill>
@@ -15166,7 +15166,7 @@
           <a:p>
             <a:pPr algn="ctr"/>
             <a:r>
-              <a:rPr sz="660" b="0" i="0">
+              <a:rPr sz="700" b="0" i="0">
                 <a:solidFill>
                   <a:srgbClr val="FFFFFF"/>
                 </a:solidFill>
@@ -15283,7 +15283,7 @@
           <a:p>
             <a:pPr algn="ctr"/>
             <a:r>
-              <a:rPr sz="660" b="0" i="0">
+              <a:rPr sz="700" b="0" i="0">
                 <a:solidFill>
                   <a:srgbClr val="FFFFFF"/>
                 </a:solidFill>
@@ -16066,7 +16066,7 @@
           <a:lstStyle/>
           <a:p>
             <a:r>
-              <a:rPr sz="630" b="0" i="0">
+              <a:rPr sz="700" b="0" i="0">
                 <a:solidFill>
                   <a:srgbClr val="B3B3B3"/>
                 </a:solidFill>
@@ -16158,7 +16158,7 @@
           <a:lstStyle/>
           <a:p>
             <a:r>
-              <a:rPr sz="630" b="0" i="0">
+              <a:rPr sz="700" b="0" i="0">
                 <a:solidFill>
                   <a:srgbClr val="B3B3B3"/>
                 </a:solidFill>
@@ -16250,7 +16250,7 @@
           <a:lstStyle/>
           <a:p>
             <a:r>
-              <a:rPr sz="630" b="0" i="0">
+              <a:rPr sz="700" b="0" i="0">
                 <a:solidFill>
                   <a:srgbClr val="B3B3B3"/>
                 </a:solidFill>
@@ -16342,7 +16342,7 @@
           <a:lstStyle/>
           <a:p>
             <a:r>
-              <a:rPr sz="630" b="0" i="0">
+              <a:rPr sz="700" b="0" i="0">
                 <a:solidFill>
                   <a:srgbClr val="B3B3B3"/>
                 </a:solidFill>
@@ -16423,7 +16423,7 @@
           <a:p>
             <a:pPr algn="ctr"/>
             <a:r>
-              <a:rPr sz="500" b="1" i="0" spc="80">
+              <a:rPr sz="700" b="1" i="0" spc="80">
                 <a:solidFill>
                   <a:srgbClr val="1A1A1A"/>
                 </a:solidFill>
@@ -16515,7 +16515,7 @@
           <a:lstStyle/>
           <a:p>
             <a:r>
-              <a:rPr sz="630" b="0" i="0">
+              <a:rPr sz="700" b="0" i="0">
                 <a:solidFill>
                   <a:srgbClr val="B3B3B3"/>
                 </a:solidFill>
@@ -16627,7 +16627,7 @@
           <a:lstStyle/>
           <a:p>
             <a:r>
-              <a:rPr sz="600" b="0" i="0">
+              <a:rPr sz="700" b="0" i="0">
                 <a:solidFill>
                   <a:srgbClr val="8C8C8C"/>
                 </a:solidFill>
@@ -16697,7 +16697,7 @@
           <a:p>
             <a:pPr algn="ctr"/>
             <a:r>
-              <a:rPr sz="600" b="0" i="0">
+              <a:rPr sz="700" b="0" i="0">
                 <a:solidFill>
                   <a:srgbClr val="B3B3B3"/>
                 </a:solidFill>
@@ -16767,7 +16767,7 @@
           <a:p>
             <a:pPr algn="ctr"/>
             <a:r>
-              <a:rPr sz="600" b="0" i="0">
+              <a:rPr sz="700" b="0" i="0">
                 <a:solidFill>
                   <a:srgbClr val="B3B3B3"/>
                 </a:solidFill>
@@ -16837,7 +16837,7 @@
           <a:p>
             <a:pPr algn="ctr"/>
             <a:r>
-              <a:rPr sz="600" b="0" i="0">
+              <a:rPr sz="700" b="0" i="0">
                 <a:solidFill>
                   <a:srgbClr val="B3B3B3"/>
                 </a:solidFill>
@@ -16949,7 +16949,7 @@
           <a:lstStyle/>
           <a:p>
             <a:r>
-              <a:rPr sz="600" b="0" i="0">
+              <a:rPr sz="700" b="0" i="0">
                 <a:solidFill>
                   <a:srgbClr val="8C8C8C"/>
                 </a:solidFill>
@@ -17019,7 +17019,7 @@
           <a:p>
             <a:pPr algn="ctr"/>
             <a:r>
-              <a:rPr sz="600" b="0" i="0">
+              <a:rPr sz="700" b="0" i="0">
                 <a:solidFill>
                   <a:srgbClr val="B3B3B3"/>
                 </a:solidFill>
@@ -17089,7 +17089,7 @@
           <a:p>
             <a:pPr algn="ctr"/>
             <a:r>
-              <a:rPr sz="600" b="0" i="0">
+              <a:rPr sz="700" b="0" i="0">
                 <a:solidFill>
                   <a:srgbClr val="B3B3B3"/>
                 </a:solidFill>
@@ -17170,7 +17170,7 @@
           <a:p>
             <a:pPr algn="ctr"/>
             <a:r>
-              <a:rPr sz="500" b="1" i="0" spc="80">
+              <a:rPr sz="700" b="1" i="0" spc="80">
                 <a:solidFill>
                   <a:srgbClr val="1A1A1A"/>
                 </a:solidFill>
@@ -17240,7 +17240,7 @@
           <a:p>
             <a:pPr algn="ctr"/>
             <a:r>
-              <a:rPr sz="600" b="0" i="0">
+              <a:rPr sz="700" b="0" i="0">
                 <a:solidFill>
                   <a:srgbClr val="B3B3B3"/>
                 </a:solidFill>
@@ -17321,7 +17321,7 @@
           <a:p>
             <a:pPr algn="ctr"/>
             <a:r>
-              <a:rPr sz="500" b="1" i="0" spc="80">
+              <a:rPr sz="700" b="1" i="0" spc="80">
                 <a:solidFill>
                   <a:srgbClr val="1A1A1A"/>
                 </a:solidFill>
@@ -17433,7 +17433,7 @@
           <a:lstStyle/>
           <a:p>
             <a:r>
-              <a:rPr sz="600" b="0" i="0">
+              <a:rPr sz="700" b="0" i="0">
                 <a:solidFill>
                   <a:srgbClr val="8C8C8C"/>
                 </a:solidFill>
@@ -17503,7 +17503,7 @@
           <a:p>
             <a:pPr algn="ctr"/>
             <a:r>
-              <a:rPr sz="600" b="0" i="0">
+              <a:rPr sz="700" b="0" i="0">
                 <a:solidFill>
                   <a:srgbClr val="B3B3B3"/>
                 </a:solidFill>
@@ -17573,7 +17573,7 @@
           <a:p>
             <a:pPr algn="ctr"/>
             <a:r>
-              <a:rPr sz="600" b="0" i="0">
+              <a:rPr sz="700" b="0" i="0">
                 <a:solidFill>
                   <a:srgbClr val="B3B3B3"/>
                 </a:solidFill>
@@ -17643,7 +17643,7 @@
           <a:p>
             <a:pPr algn="ctr"/>
             <a:r>
-              <a:rPr sz="600" b="0" i="0">
+              <a:rPr sz="700" b="0" i="0">
                 <a:solidFill>
                   <a:srgbClr val="B3B3B3"/>
                 </a:solidFill>
@@ -17724,7 +17724,7 @@
           <a:p>
             <a:pPr algn="ctr"/>
             <a:r>
-              <a:rPr sz="500" b="1" i="0" spc="80">
+              <a:rPr sz="700" b="1" i="0" spc="80">
                 <a:solidFill>
                   <a:srgbClr val="1A1A1A"/>
                 </a:solidFill>
@@ -17758,7 +17758,7 @@
           <a:lstStyle/>
           <a:p>
             <a:r>
-              <a:rPr sz="580" b="1" i="0" spc="150">
+              <a:rPr sz="700" b="1" i="0" spc="150">
                 <a:solidFill>
                   <a:srgbClr val="FFD700"/>
                 </a:solidFill>
@@ -17839,7 +17839,7 @@
           <a:p>
             <a:pPr algn="ctr"/>
             <a:r>
-              <a:rPr sz="590" b="0" i="0">
+              <a:rPr sz="700" b="0" i="0">
                 <a:solidFill>
                   <a:srgbClr val="F2F2F2"/>
                 </a:solidFill>
@@ -17920,7 +17920,7 @@
           <a:p>
             <a:pPr algn="ctr"/>
             <a:r>
-              <a:rPr sz="590" b="0" i="0">
+              <a:rPr sz="700" b="0" i="0">
                 <a:solidFill>
                   <a:srgbClr val="F2F2F2"/>
                 </a:solidFill>
@@ -18001,7 +18001,7 @@
           <a:p>
             <a:pPr algn="ctr"/>
             <a:r>
-              <a:rPr sz="590" b="0" i="0">
+              <a:rPr sz="700" b="0" i="0">
                 <a:solidFill>
                   <a:srgbClr val="F2F2F2"/>
                 </a:solidFill>
@@ -18082,7 +18082,7 @@
           <a:p>
             <a:pPr algn="ctr"/>
             <a:r>
-              <a:rPr sz="590" b="0" i="0">
+              <a:rPr sz="700" b="0" i="0">
                 <a:solidFill>
                   <a:srgbClr val="F2F2F2"/>
                 </a:solidFill>
@@ -18163,7 +18163,7 @@
           <a:p>
             <a:pPr algn="ctr"/>
             <a:r>
-              <a:rPr sz="590" b="0" i="0">
+              <a:rPr sz="700" b="0" i="0">
                 <a:solidFill>
                   <a:srgbClr val="F2F2F2"/>
                 </a:solidFill>
@@ -18244,7 +18244,7 @@
           <a:p>
             <a:pPr algn="ctr"/>
             <a:r>
-              <a:rPr sz="590" b="0" i="0">
+              <a:rPr sz="700" b="0" i="0">
                 <a:solidFill>
                   <a:srgbClr val="F2F2F2"/>
                 </a:solidFill>
@@ -18325,7 +18325,7 @@
           <a:p>
             <a:pPr algn="ctr"/>
             <a:r>
-              <a:rPr sz="590" b="1" i="0">
+              <a:rPr sz="700" b="1" i="0">
                 <a:solidFill>
                   <a:srgbClr val="F2F2F2"/>
                 </a:solidFill>
@@ -18437,7 +18437,7 @@
           <a:lstStyle/>
           <a:p>
             <a:r>
-              <a:rPr sz="600" b="0" i="0">
+              <a:rPr sz="700" b="0" i="0">
                 <a:solidFill>
                   <a:srgbClr val="8C8C8C"/>
                 </a:solidFill>
@@ -18654,7 +18654,7 @@
           <a:p>
             <a:pPr algn="ctr"/>
             <a:r>
-              <a:rPr sz="500" b="1" i="0" spc="80">
+              <a:rPr sz="700" b="1" i="0" spc="80">
                 <a:solidFill>
                   <a:srgbClr val="1A1A1A"/>
                 </a:solidFill>
@@ -18769,7 +18769,7 @@
           <a:p>
             <a:pPr algn="ctr"/>
             <a:r>
-              <a:rPr sz="500" b="1" i="0" spc="80">
+              <a:rPr sz="700" b="1" i="0" spc="80">
                 <a:solidFill>
                   <a:srgbClr val="1A1A1A"/>
                 </a:solidFill>
@@ -19076,7 +19076,7 @@
           <a:p>
             <a:pPr algn="ctr"/>
             <a:r>
-              <a:rPr sz="660" b="1" i="0">
+              <a:rPr sz="700" b="1" i="0">
                 <a:solidFill>
                   <a:srgbClr val="F2F2F2"/>
                 </a:solidFill>
@@ -19144,7 +19144,7 @@
           <a:lstStyle/>
           <a:p>
             <a:r>
-              <a:rPr sz="650" b="0" i="0">
+              <a:rPr sz="700" b="0" i="0">
                 <a:solidFill>
                   <a:srgbClr val="B3B3B3"/>
                 </a:solidFill>
@@ -19178,7 +19178,7 @@
           <a:lstStyle/>
           <a:p>
             <a:r>
-              <a:rPr sz="650" b="0" i="0">
+              <a:rPr sz="700" b="0" i="0">
                 <a:solidFill>
                   <a:srgbClr val="F2F2F2"/>
                 </a:solidFill>
@@ -19349,7 +19349,7 @@
           <a:p>
             <a:pPr algn="ctr"/>
             <a:r>
-              <a:rPr sz="660" b="1" i="0">
+              <a:rPr sz="700" b="1" i="0">
                 <a:solidFill>
                   <a:srgbClr val="F2F2F2"/>
                 </a:solidFill>
@@ -19417,7 +19417,7 @@
           <a:lstStyle/>
           <a:p>
             <a:r>
-              <a:rPr sz="650" b="0" i="0">
+              <a:rPr sz="700" b="0" i="0">
                 <a:solidFill>
                   <a:srgbClr val="B3B3B3"/>
                 </a:solidFill>
@@ -19451,7 +19451,7 @@
           <a:lstStyle/>
           <a:p>
             <a:r>
-              <a:rPr sz="650" b="0" i="0">
+              <a:rPr sz="700" b="0" i="0">
                 <a:solidFill>
                   <a:srgbClr val="F2F2F2"/>
                 </a:solidFill>
@@ -19622,7 +19622,7 @@
           <a:p>
             <a:pPr algn="ctr"/>
             <a:r>
-              <a:rPr sz="660" b="1" i="0">
+              <a:rPr sz="700" b="1" i="0">
                 <a:solidFill>
                   <a:srgbClr val="F2F2F2"/>
                 </a:solidFill>
@@ -19690,7 +19690,7 @@
           <a:lstStyle/>
           <a:p>
             <a:r>
-              <a:rPr sz="650" b="0" i="0">
+              <a:rPr sz="700" b="0" i="0">
                 <a:solidFill>
                   <a:srgbClr val="B3B3B3"/>
                 </a:solidFill>
@@ -19724,7 +19724,7 @@
           <a:lstStyle/>
           <a:p>
             <a:r>
-              <a:rPr sz="650" b="0" i="0">
+              <a:rPr sz="700" b="0" i="0">
                 <a:solidFill>
                   <a:srgbClr val="F2F2F2"/>
                 </a:solidFill>
@@ -19788,7 +19788,7 @@
         <p:spPr>
           <a:xfrm>
             <a:off x="731520" y="5468112"/>
-            <a:ext cx="1828800" cy="182880"/>
+            <a:ext cx="1965960" cy="182880"/>
           </a:xfrm>
           <a:prstGeom prst="rect">
             <a:avLst/>
@@ -19802,7 +19802,7 @@
           <a:lstStyle/>
           <a:p>
             <a:r>
-              <a:rPr sz="600" b="1" i="0" spc="150">
+              <a:rPr sz="700" b="1" i="0" spc="60">
                 <a:solidFill>
                   <a:srgbClr val="F2F2F2"/>
                 </a:solidFill>
@@ -19847,7 +19847,7 @@
           </a:p>
           <a:p>
             <a:r>
-              <a:rPr sz="650" b="0" i="0">
+              <a:rPr sz="700" b="0" i="0">
                 <a:solidFill>
                   <a:srgbClr val="B3B3B3"/>
                 </a:solidFill>
@@ -19939,7 +19939,7 @@
           <a:lstStyle/>
           <a:p>
             <a:r>
-              <a:rPr sz="660" b="0" i="0">
+              <a:rPr sz="700" b="0" i="0">
                 <a:solidFill>
                   <a:srgbClr val="B3B3B3"/>
                 </a:solidFill>
@@ -20031,7 +20031,7 @@
           <a:lstStyle/>
           <a:p>
             <a:r>
-              <a:rPr sz="660" b="0" i="0">
+              <a:rPr sz="700" b="0" i="0">
                 <a:solidFill>
                   <a:srgbClr val="B3B3B3"/>
                 </a:solidFill>
@@ -20123,7 +20123,7 @@
           <a:lstStyle/>
           <a:p>
             <a:r>
-              <a:rPr sz="660" b="0" i="0">
+              <a:rPr sz="700" b="0" i="0">
                 <a:solidFill>
                   <a:srgbClr val="B3B3B3"/>
                 </a:solidFill>
@@ -20215,7 +20215,7 @@
           <a:lstStyle/>
           <a:p>
             <a:r>
-              <a:rPr sz="660" b="0" i="0">
+              <a:rPr sz="700" b="0" i="0">
                 <a:solidFill>
                   <a:srgbClr val="B3B3B3"/>
                 </a:solidFill>
@@ -20307,7 +20307,7 @@
           <a:lstStyle/>
           <a:p>
             <a:r>
-              <a:rPr sz="660" b="0" i="0">
+              <a:rPr sz="700" b="0" i="0">
                 <a:solidFill>
                   <a:srgbClr val="B3B3B3"/>
                 </a:solidFill>
@@ -20558,7 +20558,7 @@
           <a:p>
             <a:pPr algn="ctr"/>
             <a:r>
-              <a:rPr sz="660" b="1" i="0">
+              <a:rPr sz="700" b="1" i="0">
                 <a:solidFill>
                   <a:srgbClr val="F2F2F2"/>
                 </a:solidFill>
@@ -20650,7 +20650,7 @@
           <a:lstStyle/>
           <a:p>
             <a:r>
-              <a:rPr sz="680" b="0" i="0">
+              <a:rPr sz="700" b="0" i="0">
                 <a:solidFill>
                   <a:srgbClr val="B3B3B3"/>
                 </a:solidFill>
@@ -20769,7 +20769,7 @@
               </a:spcAft>
             </a:pPr>
             <a:r>
-              <a:rPr sz="650" b="0" i="0">
+              <a:rPr sz="700" b="0" i="0">
                 <a:solidFill>
                   <a:srgbClr val="B3B3B3"/>
                 </a:solidFill>
@@ -20888,7 +20888,7 @@
               </a:spcAft>
             </a:pPr>
             <a:r>
-              <a:rPr sz="650" b="0" i="0">
+              <a:rPr sz="700" b="0" i="0">
                 <a:solidFill>
                   <a:srgbClr val="B3B3B3"/>
                 </a:solidFill>
@@ -21007,7 +21007,7 @@
               </a:spcAft>
             </a:pPr>
             <a:r>
-              <a:rPr sz="650" b="0" i="0">
+              <a:rPr sz="700" b="0" i="0">
                 <a:solidFill>
                   <a:srgbClr val="B3B3B3"/>
                 </a:solidFill>
@@ -21166,7 +21166,7 @@
           <a:p>
             <a:pPr algn="ctr"/>
             <a:r>
-              <a:rPr sz="660" b="1" i="0">
+              <a:rPr sz="700" b="1" i="0">
                 <a:solidFill>
                   <a:srgbClr val="F2F2F2"/>
                 </a:solidFill>
@@ -21239,7 +21239,7 @@
               </a:spcAft>
             </a:pPr>
             <a:r>
-              <a:rPr sz="630" b="0" i="0">
+              <a:rPr sz="700" b="0" i="0">
                 <a:solidFill>
                   <a:srgbClr val="B3B3B3"/>
                 </a:solidFill>
@@ -21320,7 +21320,7 @@
           <a:p>
             <a:pPr algn="ctr"/>
             <a:r>
-              <a:rPr sz="560" b="1" i="0" spc="80">
+              <a:rPr sz="700" b="1" i="0" spc="80">
                 <a:solidFill>
                   <a:srgbClr val="1A1A1A"/>
                 </a:solidFill>
@@ -21458,7 +21458,7 @@
           <a:p>
             <a:pPr algn="ctr"/>
             <a:r>
-              <a:rPr sz="600" b="0" i="0">
+              <a:rPr sz="700" b="0" i="0">
                 <a:solidFill>
                   <a:srgbClr val="1A1A1A"/>
                 </a:solidFill>
@@ -21581,7 +21581,7 @@
           <a:p>
             <a:pPr algn="ctr"/>
             <a:r>
-              <a:rPr sz="660" b="1" i="0">
+              <a:rPr sz="700" b="1" i="0">
                 <a:solidFill>
                   <a:srgbClr val="F2F2F2"/>
                 </a:solidFill>
@@ -21654,7 +21654,7 @@
               </a:spcAft>
             </a:pPr>
             <a:r>
-              <a:rPr sz="630" b="0" i="0">
+              <a:rPr sz="700" b="0" i="0">
                 <a:solidFill>
                   <a:srgbClr val="B3B3B3"/>
                 </a:solidFill>
@@ -21735,7 +21735,7 @@
           <a:p>
             <a:pPr algn="ctr"/>
             <a:r>
-              <a:rPr sz="560" b="1" i="0" spc="80">
+              <a:rPr sz="700" b="1" i="0" spc="80">
                 <a:solidFill>
                   <a:srgbClr val="1A1A1A"/>
                 </a:solidFill>
@@ -21873,7 +21873,7 @@
           <a:p>
             <a:pPr algn="ctr"/>
             <a:r>
-              <a:rPr sz="600" b="0" i="0">
+              <a:rPr sz="700" b="0" i="0">
                 <a:solidFill>
                   <a:srgbClr val="1A1A1A"/>
                 </a:solidFill>
@@ -21996,7 +21996,7 @@
           <a:p>
             <a:pPr algn="ctr"/>
             <a:r>
-              <a:rPr sz="660" b="1" i="0">
+              <a:rPr sz="700" b="1" i="0">
                 <a:solidFill>
                   <a:srgbClr val="F2F2F2"/>
                 </a:solidFill>
@@ -22069,7 +22069,7 @@
               </a:spcAft>
             </a:pPr>
             <a:r>
-              <a:rPr sz="630" b="0" i="0">
+              <a:rPr sz="700" b="0" i="0">
                 <a:solidFill>
                   <a:srgbClr val="B3B3B3"/>
                 </a:solidFill>
@@ -22150,7 +22150,7 @@
           <a:p>
             <a:pPr algn="ctr"/>
             <a:r>
-              <a:rPr sz="560" b="1" i="0" spc="80">
+              <a:rPr sz="700" b="1" i="0" spc="80">
                 <a:solidFill>
                   <a:srgbClr val="1A1A1A"/>
                 </a:solidFill>
@@ -22273,7 +22273,7 @@
           <a:p>
             <a:pPr algn="ctr"/>
             <a:r>
-              <a:rPr sz="660" b="1" i="0">
+              <a:rPr sz="700" b="1" i="0">
                 <a:solidFill>
                   <a:srgbClr val="F2F2F2"/>
                 </a:solidFill>
@@ -22346,7 +22346,7 @@
               </a:spcAft>
             </a:pPr>
             <a:r>
-              <a:rPr sz="630" b="0" i="0">
+              <a:rPr sz="700" b="0" i="0">
                 <a:solidFill>
                   <a:srgbClr val="B3B3B3"/>
                 </a:solidFill>
@@ -22427,7 +22427,7 @@
           <a:p>
             <a:pPr algn="ctr"/>
             <a:r>
-              <a:rPr sz="560" b="1" i="0" spc="80">
+              <a:rPr sz="700" b="1" i="0" spc="80">
                 <a:solidFill>
                   <a:srgbClr val="1A1A1A"/>
                 </a:solidFill>
@@ -22565,7 +22565,7 @@
           <a:p>
             <a:pPr algn="ctr"/>
             <a:r>
-              <a:rPr sz="600" b="0" i="0">
+              <a:rPr sz="700" b="0" i="0">
                 <a:solidFill>
                   <a:srgbClr val="1A1A1A"/>
                 </a:solidFill>
@@ -22688,7 +22688,7 @@
           <a:p>
             <a:pPr algn="ctr"/>
             <a:r>
-              <a:rPr sz="660" b="1" i="0">
+              <a:rPr sz="700" b="1" i="0">
                 <a:solidFill>
                   <a:srgbClr val="F2F2F2"/>
                 </a:solidFill>
@@ -22761,7 +22761,7 @@
               </a:spcAft>
             </a:pPr>
             <a:r>
-              <a:rPr sz="630" b="0" i="0">
+              <a:rPr sz="700" b="0" i="0">
                 <a:solidFill>
                   <a:srgbClr val="B3B3B3"/>
                 </a:solidFill>
@@ -22842,7 +22842,7 @@
           <a:p>
             <a:pPr algn="ctr"/>
             <a:r>
-              <a:rPr sz="560" b="1" i="0" spc="80">
+              <a:rPr sz="700" b="1" i="0" spc="80">
                 <a:solidFill>
                   <a:srgbClr val="1A1A1A"/>
                 </a:solidFill>
@@ -22980,7 +22980,7 @@
           <a:p>
             <a:pPr algn="ctr"/>
             <a:r>
-              <a:rPr sz="600" b="0" i="0">
+              <a:rPr sz="700" b="0" i="0">
                 <a:solidFill>
                   <a:srgbClr val="1A1A1A"/>
                 </a:solidFill>
@@ -23095,7 +23095,7 @@
           <a:p>
             <a:pPr algn="ctr"/>
             <a:r>
-              <a:rPr sz="620" b="0" i="0">
+              <a:rPr sz="700" b="0" i="0">
                 <a:solidFill>
                   <a:srgbClr val="B3B3B3"/>
                 </a:solidFill>
@@ -23580,8 +23580,8 @@
         </p:nvSpPr>
         <p:spPr>
           <a:xfrm>
-            <a:off x="6825996" y="1984248"/>
-            <a:ext cx="1783080" cy="164592"/>
+            <a:off x="6780276" y="1984248"/>
+            <a:ext cx="2377440" cy="164592"/>
           </a:xfrm>
           <a:prstGeom prst="roundRect">
             <a:avLst>
@@ -23626,8 +23626,8 @@
         </p:nvSpPr>
         <p:spPr>
           <a:xfrm>
-            <a:off x="6825996" y="1984248"/>
-            <a:ext cx="1783080" cy="164592"/>
+            <a:off x="6780276" y="1984248"/>
+            <a:ext cx="2377440" cy="164592"/>
           </a:xfrm>
           <a:prstGeom prst="rect">
             <a:avLst/>
@@ -23642,7 +23642,7 @@
           <a:p>
             <a:pPr algn="ctr"/>
             <a:r>
-              <a:rPr sz="560" b="1" i="0" spc="80">
+              <a:rPr sz="700" b="1" i="0" spc="80">
                 <a:solidFill>
                   <a:srgbClr val="F2F2F2"/>
                 </a:solidFill>
@@ -23869,7 +23869,7 @@
           <a:lstStyle/>
           <a:p>
             <a:r>
-              <a:rPr sz="580" b="0" i="0">
+              <a:rPr sz="700" b="0" i="0">
                 <a:solidFill>
                   <a:srgbClr val="B3B3B3"/>
                 </a:solidFill>
@@ -24007,7 +24007,7 @@
           <a:lstStyle/>
           <a:p>
             <a:r>
-              <a:rPr sz="580" b="0" i="0">
+              <a:rPr sz="700" b="0" i="0">
                 <a:solidFill>
                   <a:srgbClr val="B3B3B3"/>
                 </a:solidFill>
@@ -24145,7 +24145,7 @@
           <a:lstStyle/>
           <a:p>
             <a:r>
-              <a:rPr sz="580" b="0" i="0">
+              <a:rPr sz="700" b="0" i="0">
                 <a:solidFill>
                   <a:srgbClr val="B3B3B3"/>
                 </a:solidFill>
@@ -24283,7 +24283,7 @@
           <a:lstStyle/>
           <a:p>
             <a:r>
-              <a:rPr sz="580" b="0" i="0">
+              <a:rPr sz="700" b="0" i="0">
                 <a:solidFill>
                   <a:srgbClr val="B3B3B3"/>
                 </a:solidFill>
@@ -24408,7 +24408,7 @@
           <a:p>
             <a:pPr algn="ctr"/>
             <a:r>
-              <a:rPr sz="500" b="1" i="0" spc="80">
+              <a:rPr sz="700" b="1" i="0" spc="80">
                 <a:solidFill>
                   <a:srgbClr val="B3B3B3"/>
                 </a:solidFill>
@@ -24476,7 +24476,7 @@
           <a:lstStyle/>
           <a:p>
             <a:r>
-              <a:rPr sz="580" b="0" i="0">
+              <a:rPr sz="700" b="0" i="0">
                 <a:solidFill>
                   <a:srgbClr val="B3B3B3"/>
                 </a:solidFill>
@@ -24614,7 +24614,7 @@
           <a:lstStyle/>
           <a:p>
             <a:r>
-              <a:rPr sz="580" b="0" i="0">
+              <a:rPr sz="700" b="0" i="0">
                 <a:solidFill>
                   <a:srgbClr val="B3B3B3"/>
                 </a:solidFill>
@@ -24753,13 +24753,13 @@
           <a:lstStyle/>
           <a:p>
             <a:r>
-              <a:rPr sz="560" b="0" i="0">
+              <a:rPr sz="700" b="0" i="0">
                 <a:solidFill>
                   <a:srgbClr val="F2F2F2"/>
                 </a:solidFill>
                 <a:latin typeface="Trenda IG Text"/>
               </a:rPr>
-              <a:t>not needed for Health Cloud stories</a:t>
+              <a:t>not needed for Health Cloud</a:t>
             </a:r>
           </a:p>
         </p:txBody>
@@ -24787,7 +24787,7 @@
           <a:lstStyle/>
           <a:p>
             <a:r>
-              <a:rPr sz="580" b="1" i="0" spc="150">
+              <a:rPr sz="700" b="1" i="0" spc="150">
                 <a:solidFill>
                   <a:srgbClr val="F2F2F2"/>
                 </a:solidFill>
@@ -24868,7 +24868,7 @@
           <a:p>
             <a:pPr algn="ctr"/>
             <a:r>
-              <a:rPr sz="580" b="0" i="0">
+              <a:rPr sz="700" b="0" i="0">
                 <a:solidFill>
                   <a:srgbClr val="F2F2F2"/>
                 </a:solidFill>
@@ -24949,7 +24949,7 @@
           <a:p>
             <a:pPr algn="ctr"/>
             <a:r>
-              <a:rPr sz="580" b="0" i="0">
+              <a:rPr sz="700" b="0" i="0">
                 <a:solidFill>
                   <a:srgbClr val="F2F2F2"/>
                 </a:solidFill>
@@ -25030,7 +25030,7 @@
           <a:p>
             <a:pPr algn="ctr"/>
             <a:r>
-              <a:rPr sz="580" b="0" i="0">
+              <a:rPr sz="700" b="0" i="0">
                 <a:solidFill>
                   <a:srgbClr val="F2F2F2"/>
                 </a:solidFill>
@@ -25111,7 +25111,7 @@
           <a:p>
             <a:pPr algn="ctr"/>
             <a:r>
-              <a:rPr sz="580" b="0" i="0">
+              <a:rPr sz="700" b="0" i="0">
                 <a:solidFill>
                   <a:srgbClr val="F2F2F2"/>
                 </a:solidFill>
@@ -25192,7 +25192,7 @@
           <a:p>
             <a:pPr algn="ctr"/>
             <a:r>
-              <a:rPr sz="580" b="0" i="0">
+              <a:rPr sz="700" b="0" i="0">
                 <a:solidFill>
                   <a:srgbClr val="F2F2F2"/>
                 </a:solidFill>
@@ -25226,7 +25226,7 @@
           <a:lstStyle/>
           <a:p>
             <a:r>
-              <a:rPr sz="640" b="0" i="0">
+              <a:rPr sz="700" b="0" i="0">
                 <a:solidFill>
                   <a:srgbClr val="B3B3B3"/>
                 </a:solidFill>
@@ -25454,7 +25454,7 @@
               <a:t>Jira</a:t>
             </a:r>
             <a:r>
-              <a:rPr sz="600" b="0" i="0">
+              <a:rPr sz="700" b="0" i="0">
                 <a:solidFill>
                   <a:srgbClr val="B3B3B3"/>
                 </a:solidFill>
@@ -25521,7 +25521,7 @@
               <a:t>Confluence</a:t>
             </a:r>
             <a:r>
-              <a:rPr sz="600" b="0" i="0">
+              <a:rPr sz="700" b="0" i="0">
                 <a:solidFill>
                   <a:srgbClr val="B3B3B3"/>
                 </a:solidFill>
@@ -25588,7 +25588,7 @@
               <a:t>Git</a:t>
             </a:r>
             <a:r>
-              <a:rPr sz="600" b="0" i="0">
+              <a:rPr sz="700" b="0" i="0">
                 <a:solidFill>
                   <a:srgbClr val="B3B3B3"/>
                 </a:solidFill>
@@ -25655,7 +25655,7 @@
               <a:t>Salesforce DEV</a:t>
             </a:r>
             <a:r>
-              <a:rPr sz="600" b="0" i="0">
+              <a:rPr sz="700" b="0" i="0">
                 <a:solidFill>
                   <a:srgbClr val="B3B3B3"/>
                 </a:solidFill>
@@ -25734,7 +25734,7 @@
           <a:p>
             <a:pPr algn="ctr"/>
             <a:r>
-              <a:rPr sz="500" b="1" i="0" spc="80">
+              <a:rPr sz="700" b="1" i="0" spc="80">
                 <a:solidFill>
                   <a:srgbClr val="B3B3B3"/>
                 </a:solidFill>
@@ -25777,7 +25777,7 @@
               <a:t>Copado</a:t>
             </a:r>
             <a:r>
-              <a:rPr sz="600" b="0" i="0">
+              <a:rPr sz="700" b="0" i="0">
                 <a:solidFill>
                   <a:srgbClr val="B3B3B3"/>
                 </a:solidFill>
@@ -25856,7 +25856,7 @@
           <a:p>
             <a:pPr algn="ctr"/>
             <a:r>
-              <a:rPr sz="500" b="1" i="0" spc="80">
+              <a:rPr sz="700" b="1" i="0" spc="80">
                 <a:solidFill>
                   <a:srgbClr val="B3B3B3"/>
                 </a:solidFill>
@@ -25899,7 +25899,7 @@
               <a:t>Zephyr Scale</a:t>
             </a:r>
             <a:r>
-              <a:rPr sz="600" b="0" i="0">
+              <a:rPr sz="700" b="0" i="0">
                 <a:solidFill>
                   <a:srgbClr val="B3B3B3"/>
                 </a:solidFill>
@@ -25933,7 +25933,7 @@
           <a:lstStyle/>
           <a:p>
             <a:r>
-              <a:rPr sz="640" b="1" i="0">
+              <a:rPr sz="700" b="1" i="0">
                 <a:solidFill>
                   <a:srgbClr val="F2F2F2"/>
                 </a:solidFill>
@@ -26983,7 +26983,7 @@
           <a:lstStyle/>
           <a:p>
             <a:r>
-              <a:rPr sz="640" b="1" i="0" spc="120">
+              <a:rPr sz="700" b="1" i="0" spc="120">
                 <a:solidFill>
                   <a:srgbClr val="F2F2F2"/>
                 </a:solidFill>
@@ -27045,7 +27045,7 @@
         <p:spPr>
           <a:xfrm>
             <a:off x="411480" y="1463040"/>
-            <a:ext cx="841248" cy="512064"/>
+            <a:ext cx="1097280" cy="512064"/>
           </a:xfrm>
           <a:prstGeom prst="rect">
             <a:avLst/>
@@ -27111,7 +27111,7 @@
         <p:spPr>
           <a:xfrm>
             <a:off x="685800" y="1463040"/>
-            <a:ext cx="566928" cy="512064"/>
+            <a:ext cx="804672" cy="512064"/>
           </a:xfrm>
           <a:prstGeom prst="rect">
             <a:avLst/>
@@ -27125,7 +27125,7 @@
           <a:lstStyle/>
           <a:p>
             <a:r>
-              <a:rPr sz="540" b="1" i="0">
+              <a:rPr sz="700" b="1" i="0">
                 <a:solidFill>
                   <a:srgbClr val="F2F2F2"/>
                 </a:solidFill>
@@ -27136,7 +27136,7 @@
           </a:p>
           <a:p>
             <a:r>
-              <a:rPr sz="480" b="0" i="0">
+              <a:rPr sz="700" b="0" i="0">
                 <a:solidFill>
                   <a:srgbClr val="8C8C8C"/>
                 </a:solidFill>
@@ -27198,7 +27198,7 @@
         <p:spPr>
           <a:xfrm>
             <a:off x="411480" y="2020824"/>
-            <a:ext cx="841248" cy="512064"/>
+            <a:ext cx="1097280" cy="512064"/>
           </a:xfrm>
           <a:prstGeom prst="rect">
             <a:avLst/>
@@ -27264,7 +27264,7 @@
         <p:spPr>
           <a:xfrm>
             <a:off x="685800" y="2020824"/>
-            <a:ext cx="566928" cy="512064"/>
+            <a:ext cx="804672" cy="512064"/>
           </a:xfrm>
           <a:prstGeom prst="rect">
             <a:avLst/>
@@ -27278,7 +27278,7 @@
           <a:lstStyle/>
           <a:p>
             <a:r>
-              <a:rPr sz="540" b="1" i="0">
+              <a:rPr sz="700" b="1" i="0">
                 <a:solidFill>
                   <a:srgbClr val="F2F2F2"/>
                 </a:solidFill>
@@ -27289,7 +27289,7 @@
           </a:p>
           <a:p>
             <a:r>
-              <a:rPr sz="480" b="0" i="0">
+              <a:rPr sz="700" b="0" i="0">
                 <a:solidFill>
                   <a:srgbClr val="8C8C8C"/>
                 </a:solidFill>
@@ -27351,7 +27351,7 @@
         <p:spPr>
           <a:xfrm>
             <a:off x="411480" y="2578608"/>
-            <a:ext cx="841248" cy="512064"/>
+            <a:ext cx="1097280" cy="512064"/>
           </a:xfrm>
           <a:prstGeom prst="rect">
             <a:avLst/>
@@ -27417,7 +27417,7 @@
         <p:spPr>
           <a:xfrm>
             <a:off x="685800" y="2578608"/>
-            <a:ext cx="566928" cy="512064"/>
+            <a:ext cx="804672" cy="512064"/>
           </a:xfrm>
           <a:prstGeom prst="rect">
             <a:avLst/>
@@ -27431,7 +27431,7 @@
           <a:lstStyle/>
           <a:p>
             <a:r>
-              <a:rPr sz="540" b="1" i="0">
+              <a:rPr sz="700" b="1" i="0">
                 <a:solidFill>
                   <a:srgbClr val="F2F2F2"/>
                 </a:solidFill>
@@ -27442,7 +27442,7 @@
           </a:p>
           <a:p>
             <a:r>
-              <a:rPr sz="480" b="0" i="0">
+              <a:rPr sz="700" b="0" i="0">
                 <a:solidFill>
                   <a:srgbClr val="8C8C8C"/>
                 </a:solidFill>
@@ -27504,7 +27504,7 @@
         <p:spPr>
           <a:xfrm>
             <a:off x="411480" y="3136392"/>
-            <a:ext cx="841248" cy="512064"/>
+            <a:ext cx="1097280" cy="512064"/>
           </a:xfrm>
           <a:prstGeom prst="rect">
             <a:avLst/>
@@ -27570,7 +27570,7 @@
         <p:spPr>
           <a:xfrm>
             <a:off x="685800" y="3136392"/>
-            <a:ext cx="566928" cy="512064"/>
+            <a:ext cx="804672" cy="512064"/>
           </a:xfrm>
           <a:prstGeom prst="rect">
             <a:avLst/>
@@ -27584,7 +27584,7 @@
           <a:lstStyle/>
           <a:p>
             <a:r>
-              <a:rPr sz="540" b="1" i="0">
+              <a:rPr sz="700" b="1" i="0">
                 <a:solidFill>
                   <a:srgbClr val="F2F2F2"/>
                 </a:solidFill>
@@ -27595,7 +27595,7 @@
           </a:p>
           <a:p>
             <a:r>
-              <a:rPr sz="480" b="0" i="0">
+              <a:rPr sz="700" b="0" i="0">
                 <a:solidFill>
                   <a:srgbClr val="8C8C8C"/>
                 </a:solidFill>
@@ -27614,8 +27614,8 @@
         </p:nvCxnSpPr>
         <p:spPr>
           <a:xfrm>
-            <a:off x="2148840" y="2276856"/>
-            <a:ext cx="54864" cy="0"/>
+            <a:off x="2386584" y="2276856"/>
+            <a:ext cx="36576" cy="0"/>
           </a:xfrm>
           <a:prstGeom prst="line">
             <a:avLst/>
@@ -27649,7 +27649,7 @@
         </p:nvCxnSpPr>
         <p:spPr>
           <a:xfrm flipV="1">
-            <a:off x="2203704" y="1719072"/>
+            <a:off x="2423160" y="1719072"/>
             <a:ext cx="0" cy="557784"/>
           </a:xfrm>
           <a:prstGeom prst="line">
@@ -27684,8 +27684,8 @@
         </p:nvCxnSpPr>
         <p:spPr>
           <a:xfrm>
-            <a:off x="2203704" y="1719072"/>
-            <a:ext cx="54864" cy="0"/>
+            <a:off x="2423160" y="1719072"/>
+            <a:ext cx="36576" cy="0"/>
           </a:xfrm>
           <a:prstGeom prst="line">
             <a:avLst/>
@@ -27720,8 +27720,8 @@
         </p:nvCxnSpPr>
         <p:spPr>
           <a:xfrm>
-            <a:off x="3081527" y="1719072"/>
-            <a:ext cx="54864" cy="0"/>
+            <a:off x="3282696" y="1719072"/>
+            <a:ext cx="36576" cy="0"/>
           </a:xfrm>
           <a:prstGeom prst="line">
             <a:avLst/>
@@ -27755,7 +27755,7 @@
         </p:nvCxnSpPr>
         <p:spPr>
           <a:xfrm>
-            <a:off x="3136391" y="1719072"/>
+            <a:off x="3319272" y="1719072"/>
             <a:ext cx="0" cy="557784"/>
           </a:xfrm>
           <a:prstGeom prst="line">
@@ -27790,8 +27790,8 @@
         </p:nvCxnSpPr>
         <p:spPr>
           <a:xfrm>
-            <a:off x="3136391" y="2276856"/>
-            <a:ext cx="54865" cy="0"/>
+            <a:off x="3319272" y="2276856"/>
+            <a:ext cx="36576" cy="0"/>
           </a:xfrm>
           <a:prstGeom prst="line">
             <a:avLst/>
@@ -27826,8 +27826,8 @@
         </p:nvCxnSpPr>
         <p:spPr>
           <a:xfrm>
-            <a:off x="4014216" y="2276856"/>
-            <a:ext cx="54864" cy="0"/>
+            <a:off x="4178808" y="2276856"/>
+            <a:ext cx="36576" cy="0"/>
           </a:xfrm>
           <a:prstGeom prst="line">
             <a:avLst/>
@@ -27861,7 +27861,7 @@
         </p:nvCxnSpPr>
         <p:spPr>
           <a:xfrm>
-            <a:off x="4069080" y="2276856"/>
+            <a:off x="4215384" y="2276856"/>
             <a:ext cx="0" cy="557784"/>
           </a:xfrm>
           <a:prstGeom prst="line">
@@ -27896,8 +27896,8 @@
         </p:nvCxnSpPr>
         <p:spPr>
           <a:xfrm>
-            <a:off x="4069080" y="2834640"/>
-            <a:ext cx="54864" cy="0"/>
+            <a:off x="4215384" y="2834640"/>
+            <a:ext cx="36576" cy="0"/>
           </a:xfrm>
           <a:prstGeom prst="line">
             <a:avLst/>
@@ -27932,8 +27932,8 @@
         </p:nvCxnSpPr>
         <p:spPr>
           <a:xfrm>
-            <a:off x="4014216" y="2834640"/>
-            <a:ext cx="54864" cy="0"/>
+            <a:off x="4178808" y="2834640"/>
+            <a:ext cx="36576" cy="0"/>
           </a:xfrm>
           <a:prstGeom prst="line">
             <a:avLst/>
@@ -27967,7 +27967,7 @@
         </p:nvCxnSpPr>
         <p:spPr>
           <a:xfrm>
-            <a:off x="4069080" y="2834640"/>
+            <a:off x="4215384" y="2834640"/>
             <a:ext cx="0" cy="0"/>
           </a:xfrm>
           <a:prstGeom prst="line">
@@ -28002,8 +28002,8 @@
         </p:nvCxnSpPr>
         <p:spPr>
           <a:xfrm>
-            <a:off x="4069080" y="2834640"/>
-            <a:ext cx="54864" cy="0"/>
+            <a:off x="4215384" y="2834640"/>
+            <a:ext cx="36576" cy="0"/>
           </a:xfrm>
           <a:prstGeom prst="line">
             <a:avLst/>
@@ -28038,8 +28038,8 @@
         </p:nvCxnSpPr>
         <p:spPr>
           <a:xfrm>
-            <a:off x="4946904" y="2834640"/>
-            <a:ext cx="54864" cy="0"/>
+            <a:off x="5074920" y="2834640"/>
+            <a:ext cx="36576" cy="0"/>
           </a:xfrm>
           <a:prstGeom prst="line">
             <a:avLst/>
@@ -28073,7 +28073,7 @@
         </p:nvCxnSpPr>
         <p:spPr>
           <a:xfrm>
-            <a:off x="5001768" y="2834640"/>
+            <a:off x="5111496" y="2834640"/>
             <a:ext cx="0" cy="557784"/>
           </a:xfrm>
           <a:prstGeom prst="line">
@@ -28108,8 +28108,8 @@
         </p:nvCxnSpPr>
         <p:spPr>
           <a:xfrm>
-            <a:off x="5001768" y="3392424"/>
-            <a:ext cx="54864" cy="0"/>
+            <a:off x="5111496" y="3392424"/>
+            <a:ext cx="36576" cy="0"/>
           </a:xfrm>
           <a:prstGeom prst="line">
             <a:avLst/>
@@ -28144,8 +28144,8 @@
         </p:nvCxnSpPr>
         <p:spPr>
           <a:xfrm>
-            <a:off x="5879592" y="3392424"/>
-            <a:ext cx="54864" cy="0"/>
+            <a:off x="5971032" y="3392424"/>
+            <a:ext cx="36576" cy="0"/>
           </a:xfrm>
           <a:prstGeom prst="line">
             <a:avLst/>
@@ -28179,7 +28179,7 @@
         </p:nvCxnSpPr>
         <p:spPr>
           <a:xfrm flipV="1">
-            <a:off x="5934456" y="2276856"/>
+            <a:off x="6007608" y="2276856"/>
             <a:ext cx="0" cy="1115568"/>
           </a:xfrm>
           <a:prstGeom prst="line">
@@ -28214,8 +28214,8 @@
         </p:nvCxnSpPr>
         <p:spPr>
           <a:xfrm>
-            <a:off x="5934456" y="2276856"/>
-            <a:ext cx="54864" cy="0"/>
+            <a:off x="6007608" y="2276856"/>
+            <a:ext cx="36576" cy="0"/>
           </a:xfrm>
           <a:prstGeom prst="line">
             <a:avLst/>
@@ -28250,8 +28250,8 @@
         </p:nvCxnSpPr>
         <p:spPr>
           <a:xfrm>
-            <a:off x="4014216" y="2386584"/>
-            <a:ext cx="1453896" cy="0"/>
+            <a:off x="4178808" y="2386584"/>
+            <a:ext cx="1380744" cy="0"/>
           </a:xfrm>
           <a:prstGeom prst="line">
             <a:avLst/>
@@ -28286,8 +28286,8 @@
         </p:nvCxnSpPr>
         <p:spPr>
           <a:xfrm>
-            <a:off x="5468112" y="2386584"/>
-            <a:ext cx="0" cy="237744"/>
+            <a:off x="5559552" y="2386584"/>
+            <a:ext cx="0" cy="219456"/>
           </a:xfrm>
           <a:prstGeom prst="line">
             <a:avLst/>
@@ -28323,8 +28323,8 @@
         </p:nvCxnSpPr>
         <p:spPr>
           <a:xfrm>
-            <a:off x="5468112" y="3044952"/>
-            <a:ext cx="0" cy="137160"/>
+            <a:off x="5559552" y="3063240"/>
+            <a:ext cx="0" cy="100584"/>
           </a:xfrm>
           <a:prstGeom prst="line">
             <a:avLst/>
@@ -28360,8 +28360,8 @@
         </p:nvSpPr>
         <p:spPr>
           <a:xfrm>
-            <a:off x="1325880" y="2066543"/>
-            <a:ext cx="822960" cy="420624"/>
+            <a:off x="1563624" y="2048256"/>
+            <a:ext cx="822960" cy="457200"/>
           </a:xfrm>
           <a:prstGeom prst="roundRect">
             <a:avLst>
@@ -28406,7 +28406,7 @@
         </p:nvSpPr>
         <p:spPr>
           <a:xfrm>
-            <a:off x="1371600" y="2093975"/>
+            <a:off x="1609344" y="2075688"/>
             <a:ext cx="749808" cy="219456"/>
           </a:xfrm>
           <a:prstGeom prst="rect">
@@ -28426,7 +28426,7 @@
               </a:lnSpc>
             </a:pPr>
             <a:r>
-              <a:rPr sz="560" b="1" i="0">
+              <a:rPr sz="700" b="1" i="0">
                 <a:solidFill>
                   <a:srgbClr val="F2F2F2"/>
                 </a:solidFill>
@@ -28445,8 +28445,8 @@
         </p:nvSpPr>
         <p:spPr>
           <a:xfrm>
-            <a:off x="1371600" y="2331720"/>
-            <a:ext cx="398678" cy="118872"/>
+            <a:off x="1609344" y="2322576"/>
+            <a:ext cx="555955" cy="146304"/>
           </a:xfrm>
           <a:prstGeom prst="roundRect">
             <a:avLst>
@@ -28489,8 +28489,8 @@
         </p:nvSpPr>
         <p:spPr>
           <a:xfrm>
-            <a:off x="1371600" y="2331720"/>
-            <a:ext cx="398678" cy="118872"/>
+            <a:off x="1609344" y="2322576"/>
+            <a:ext cx="555955" cy="146304"/>
           </a:xfrm>
           <a:prstGeom prst="rect">
             <a:avLst/>
@@ -28505,7 +28505,7 @@
           <a:p>
             <a:pPr algn="ctr"/>
             <a:r>
-              <a:rPr sz="420" b="1" i="0" spc="80">
+              <a:rPr sz="700" b="1" i="0">
                 <a:solidFill>
                   <a:srgbClr val="B3B3B3"/>
                 </a:solidFill>
@@ -28524,8 +28524,8 @@
         </p:nvSpPr>
         <p:spPr>
           <a:xfrm>
-            <a:off x="2258568" y="1508760"/>
-            <a:ext cx="822960" cy="420624"/>
+            <a:off x="2459736" y="1490472"/>
+            <a:ext cx="822960" cy="457200"/>
           </a:xfrm>
           <a:prstGeom prst="roundRect">
             <a:avLst>
@@ -28570,7 +28570,7 @@
         </p:nvSpPr>
         <p:spPr>
           <a:xfrm>
-            <a:off x="2304287" y="1536192"/>
+            <a:off x="2505456" y="1517904"/>
             <a:ext cx="749808" cy="219456"/>
           </a:xfrm>
           <a:prstGeom prst="rect">
@@ -28590,7 +28590,7 @@
               </a:lnSpc>
             </a:pPr>
             <a:r>
-              <a:rPr sz="560" b="1" i="0">
+              <a:rPr sz="700" b="1" i="0">
                 <a:solidFill>
                   <a:srgbClr val="F2F2F2"/>
                 </a:solidFill>
@@ -28609,8 +28609,8 @@
         </p:nvSpPr>
         <p:spPr>
           <a:xfrm>
-            <a:off x="2304287" y="1773936"/>
-            <a:ext cx="398678" cy="118872"/>
+            <a:off x="2505456" y="1764792"/>
+            <a:ext cx="555955" cy="146304"/>
           </a:xfrm>
           <a:prstGeom prst="roundRect">
             <a:avLst>
@@ -28653,8 +28653,8 @@
         </p:nvSpPr>
         <p:spPr>
           <a:xfrm>
-            <a:off x="2304287" y="1773936"/>
-            <a:ext cx="398678" cy="118872"/>
+            <a:off x="2505456" y="1764792"/>
+            <a:ext cx="555955" cy="146304"/>
           </a:xfrm>
           <a:prstGeom prst="rect">
             <a:avLst/>
@@ -28669,7 +28669,7 @@
           <a:p>
             <a:pPr algn="ctr"/>
             <a:r>
-              <a:rPr sz="420" b="1" i="0" spc="80">
+              <a:rPr sz="700" b="1" i="0">
                 <a:solidFill>
                   <a:srgbClr val="B3B3B3"/>
                 </a:solidFill>
@@ -28688,8 +28688,8 @@
         </p:nvSpPr>
         <p:spPr>
           <a:xfrm>
-            <a:off x="3191256" y="2066543"/>
-            <a:ext cx="822960" cy="420624"/>
+            <a:off x="3355848" y="2048256"/>
+            <a:ext cx="822960" cy="457200"/>
           </a:xfrm>
           <a:prstGeom prst="roundRect">
             <a:avLst>
@@ -28734,7 +28734,7 @@
         </p:nvSpPr>
         <p:spPr>
           <a:xfrm>
-            <a:off x="3236976" y="2093975"/>
+            <a:off x="3401568" y="2075688"/>
             <a:ext cx="749808" cy="219456"/>
           </a:xfrm>
           <a:prstGeom prst="rect">
@@ -28754,7 +28754,7 @@
               </a:lnSpc>
             </a:pPr>
             <a:r>
-              <a:rPr sz="560" b="1" i="0">
+              <a:rPr sz="700" b="1" i="0">
                 <a:solidFill>
                   <a:srgbClr val="F2F2F2"/>
                 </a:solidFill>
@@ -28773,8 +28773,8 @@
         </p:nvSpPr>
         <p:spPr>
           <a:xfrm>
-            <a:off x="3236976" y="2331720"/>
-            <a:ext cx="283464" cy="118872"/>
+            <a:off x="3401568" y="2322576"/>
+            <a:ext cx="402336" cy="146304"/>
           </a:xfrm>
           <a:prstGeom prst="roundRect">
             <a:avLst>
@@ -28817,8 +28817,8 @@
         </p:nvSpPr>
         <p:spPr>
           <a:xfrm>
-            <a:off x="3236976" y="2331720"/>
-            <a:ext cx="283464" cy="118872"/>
+            <a:off x="3401568" y="2322576"/>
+            <a:ext cx="402336" cy="146304"/>
           </a:xfrm>
           <a:prstGeom prst="rect">
             <a:avLst/>
@@ -28833,7 +28833,7 @@
           <a:p>
             <a:pPr algn="ctr"/>
             <a:r>
-              <a:rPr sz="420" b="1" i="0" spc="80">
+              <a:rPr sz="700" b="1" i="0">
                 <a:solidFill>
                   <a:srgbClr val="F2F2F2"/>
                 </a:solidFill>
@@ -28852,8 +28852,8 @@
         </p:nvSpPr>
         <p:spPr>
           <a:xfrm>
-            <a:off x="3191256" y="2624328"/>
-            <a:ext cx="822960" cy="420624"/>
+            <a:off x="3355848" y="2606040"/>
+            <a:ext cx="822960" cy="457200"/>
           </a:xfrm>
           <a:prstGeom prst="roundRect">
             <a:avLst>
@@ -28899,7 +28899,7 @@
         </p:nvSpPr>
         <p:spPr>
           <a:xfrm>
-            <a:off x="3236976" y="2651760"/>
+            <a:off x="3401568" y="2633472"/>
             <a:ext cx="749808" cy="219456"/>
           </a:xfrm>
           <a:prstGeom prst="rect">
@@ -28919,7 +28919,7 @@
               </a:lnSpc>
             </a:pPr>
             <a:r>
-              <a:rPr sz="560" b="1" i="0">
+              <a:rPr sz="700" b="1" i="0">
                 <a:solidFill>
                   <a:srgbClr val="F2F2F2"/>
                 </a:solidFill>
@@ -28938,8 +28938,8 @@
         </p:nvSpPr>
         <p:spPr>
           <a:xfrm>
-            <a:off x="3236976" y="2889504"/>
-            <a:ext cx="283464" cy="118872"/>
+            <a:off x="3401568" y="2880360"/>
+            <a:ext cx="402336" cy="146304"/>
           </a:xfrm>
           <a:prstGeom prst="roundRect">
             <a:avLst>
@@ -28982,8 +28982,8 @@
         </p:nvSpPr>
         <p:spPr>
           <a:xfrm>
-            <a:off x="3236976" y="2889504"/>
-            <a:ext cx="283464" cy="118872"/>
+            <a:off x="3401568" y="2880360"/>
+            <a:ext cx="402336" cy="146304"/>
           </a:xfrm>
           <a:prstGeom prst="rect">
             <a:avLst/>
@@ -28998,7 +28998,7 @@
           <a:p>
             <a:pPr algn="ctr"/>
             <a:r>
-              <a:rPr sz="420" b="1" i="0" spc="80">
+              <a:rPr sz="700" b="1" i="0">
                 <a:solidFill>
                   <a:srgbClr val="F2F2F2"/>
                 </a:solidFill>
@@ -29017,8 +29017,8 @@
         </p:nvSpPr>
         <p:spPr>
           <a:xfrm>
-            <a:off x="4123944" y="2624328"/>
-            <a:ext cx="822960" cy="420624"/>
+            <a:off x="4251960" y="2606040"/>
+            <a:ext cx="822960" cy="457200"/>
           </a:xfrm>
           <a:prstGeom prst="roundRect">
             <a:avLst>
@@ -29063,7 +29063,7 @@
         </p:nvSpPr>
         <p:spPr>
           <a:xfrm>
-            <a:off x="4169663" y="2651760"/>
+            <a:off x="4297680" y="2633472"/>
             <a:ext cx="749808" cy="219456"/>
           </a:xfrm>
           <a:prstGeom prst="rect">
@@ -29083,7 +29083,7 @@
               </a:lnSpc>
             </a:pPr>
             <a:r>
-              <a:rPr sz="560" b="1" i="0">
+              <a:rPr sz="700" b="1" i="0">
                 <a:solidFill>
                   <a:srgbClr val="F2F2F2"/>
                 </a:solidFill>
@@ -29102,8 +29102,8 @@
         </p:nvSpPr>
         <p:spPr>
           <a:xfrm>
-            <a:off x="4169663" y="2889504"/>
-            <a:ext cx="513892" cy="118872"/>
+            <a:off x="4297680" y="2880360"/>
+            <a:ext cx="709574" cy="146304"/>
           </a:xfrm>
           <a:prstGeom prst="roundRect">
             <a:avLst>
@@ -29146,8 +29146,8 @@
         </p:nvSpPr>
         <p:spPr>
           <a:xfrm>
-            <a:off x="4169663" y="2889504"/>
-            <a:ext cx="513892" cy="118872"/>
+            <a:off x="4297680" y="2880360"/>
+            <a:ext cx="709574" cy="146304"/>
           </a:xfrm>
           <a:prstGeom prst="rect">
             <a:avLst/>
@@ -29162,7 +29162,7 @@
           <a:p>
             <a:pPr algn="ctr"/>
             <a:r>
-              <a:rPr sz="420" b="1" i="0" spc="80">
+              <a:rPr sz="700" b="1" i="0">
                 <a:solidFill>
                   <a:srgbClr val="00D6F2"/>
                 </a:solidFill>
@@ -29181,8 +29181,8 @@
         </p:nvSpPr>
         <p:spPr>
           <a:xfrm>
-            <a:off x="5056632" y="3182112"/>
-            <a:ext cx="822960" cy="420624"/>
+            <a:off x="5148072" y="3163824"/>
+            <a:ext cx="822960" cy="457200"/>
           </a:xfrm>
           <a:prstGeom prst="roundRect">
             <a:avLst>
@@ -29227,7 +29227,7 @@
         </p:nvSpPr>
         <p:spPr>
           <a:xfrm>
-            <a:off x="5102352" y="3209544"/>
+            <a:off x="5193792" y="3191256"/>
             <a:ext cx="749808" cy="219456"/>
           </a:xfrm>
           <a:prstGeom prst="rect">
@@ -29247,7 +29247,7 @@
               </a:lnSpc>
             </a:pPr>
             <a:r>
-              <a:rPr sz="560" b="1" i="0">
+              <a:rPr sz="700" b="1" i="0">
                 <a:solidFill>
                   <a:srgbClr val="F2F2F2"/>
                 </a:solidFill>
@@ -29266,8 +29266,8 @@
         </p:nvSpPr>
         <p:spPr>
           <a:xfrm>
-            <a:off x="5102352" y="3447288"/>
-            <a:ext cx="513892" cy="118872"/>
+            <a:off x="5193792" y="3438144"/>
+            <a:ext cx="709574" cy="146304"/>
           </a:xfrm>
           <a:prstGeom prst="roundRect">
             <a:avLst>
@@ -29310,8 +29310,8 @@
         </p:nvSpPr>
         <p:spPr>
           <a:xfrm>
-            <a:off x="5102352" y="3447288"/>
-            <a:ext cx="513892" cy="118872"/>
+            <a:off x="5193792" y="3438144"/>
+            <a:ext cx="709574" cy="146304"/>
           </a:xfrm>
           <a:prstGeom prst="rect">
             <a:avLst/>
@@ -29326,7 +29326,7 @@
           <a:p>
             <a:pPr algn="ctr"/>
             <a:r>
-              <a:rPr sz="420" b="1" i="0" spc="80">
+              <a:rPr sz="700" b="1" i="0">
                 <a:solidFill>
                   <a:srgbClr val="00D6F2"/>
                 </a:solidFill>
@@ -29345,8 +29345,8 @@
         </p:nvSpPr>
         <p:spPr>
           <a:xfrm>
-            <a:off x="5989320" y="2066543"/>
-            <a:ext cx="822960" cy="420624"/>
+            <a:off x="6044184" y="2048256"/>
+            <a:ext cx="822960" cy="457200"/>
           </a:xfrm>
           <a:prstGeom prst="roundRect">
             <a:avLst>
@@ -29391,7 +29391,7 @@
         </p:nvSpPr>
         <p:spPr>
           <a:xfrm>
-            <a:off x="6035040" y="2093975"/>
+            <a:off x="6089904" y="2075688"/>
             <a:ext cx="749808" cy="219456"/>
           </a:xfrm>
           <a:prstGeom prst="rect">
@@ -29411,7 +29411,7 @@
               </a:lnSpc>
             </a:pPr>
             <a:r>
-              <a:rPr sz="560" b="1" i="0">
+              <a:rPr sz="700" b="1" i="0">
                 <a:solidFill>
                   <a:srgbClr val="F2F2F2"/>
                 </a:solidFill>
@@ -29430,8 +29430,8 @@
         </p:nvSpPr>
         <p:spPr>
           <a:xfrm>
-            <a:off x="6035040" y="2331720"/>
-            <a:ext cx="283464" cy="118872"/>
+            <a:off x="6089904" y="2322576"/>
+            <a:ext cx="402336" cy="146304"/>
           </a:xfrm>
           <a:prstGeom prst="roundRect">
             <a:avLst>
@@ -29474,8 +29474,8 @@
         </p:nvSpPr>
         <p:spPr>
           <a:xfrm>
-            <a:off x="6035040" y="2331720"/>
-            <a:ext cx="283464" cy="118872"/>
+            <a:off x="6089904" y="2322576"/>
+            <a:ext cx="402336" cy="146304"/>
           </a:xfrm>
           <a:prstGeom prst="rect">
             <a:avLst/>
@@ -29490,7 +29490,7 @@
           <a:p>
             <a:pPr algn="ctr"/>
             <a:r>
-              <a:rPr sz="420" b="1" i="0" spc="80">
+              <a:rPr sz="700" b="1" i="0">
                 <a:solidFill>
                   <a:srgbClr val="F2F2F2"/>
                 </a:solidFill>
@@ -29509,8 +29509,8 @@
         </p:nvSpPr>
         <p:spPr>
           <a:xfrm>
-            <a:off x="5056632" y="2624328"/>
-            <a:ext cx="822960" cy="420624"/>
+            <a:off x="5148072" y="2606040"/>
+            <a:ext cx="822960" cy="457200"/>
           </a:xfrm>
           <a:prstGeom prst="roundRect">
             <a:avLst>
@@ -29556,7 +29556,7 @@
         </p:nvSpPr>
         <p:spPr>
           <a:xfrm>
-            <a:off x="5102352" y="2651760"/>
+            <a:off x="5193792" y="2633472"/>
             <a:ext cx="749808" cy="219456"/>
           </a:xfrm>
           <a:prstGeom prst="rect">
@@ -29576,7 +29576,7 @@
               </a:lnSpc>
             </a:pPr>
             <a:r>
-              <a:rPr sz="560" b="1" i="0">
+              <a:rPr sz="700" b="1" i="0">
                 <a:solidFill>
                   <a:srgbClr val="F2F2F2"/>
                 </a:solidFill>
@@ -29595,8 +29595,8 @@
         </p:nvSpPr>
         <p:spPr>
           <a:xfrm>
-            <a:off x="5102352" y="2889504"/>
-            <a:ext cx="398678" cy="118872"/>
+            <a:off x="5193792" y="2880360"/>
+            <a:ext cx="555955" cy="146304"/>
           </a:xfrm>
           <a:prstGeom prst="roundRect">
             <a:avLst>
@@ -29639,8 +29639,8 @@
         </p:nvSpPr>
         <p:spPr>
           <a:xfrm>
-            <a:off x="5102352" y="2889504"/>
-            <a:ext cx="398678" cy="118872"/>
+            <a:off x="5193792" y="2880360"/>
+            <a:ext cx="555955" cy="146304"/>
           </a:xfrm>
           <a:prstGeom prst="rect">
             <a:avLst/>
@@ -29655,7 +29655,7 @@
           <a:p>
             <a:pPr algn="ctr"/>
             <a:r>
-              <a:rPr sz="420" b="1" i="0" spc="80">
+              <a:rPr sz="700" b="1" i="0">
                 <a:solidFill>
                   <a:srgbClr val="F2F2F2"/>
                 </a:solidFill>
@@ -29689,7 +29689,7 @@
           <a:lstStyle/>
           <a:p>
             <a:r>
-              <a:rPr sz="580" b="1" i="0">
+              <a:rPr sz="700" b="1" i="0">
                 <a:solidFill>
                   <a:srgbClr val="F2F2F2"/>
                 </a:solidFill>
@@ -29698,7 +29698,7 @@
               <a:t>Fail-closed: </a:t>
             </a:r>
             <a:r>
-              <a:rPr sz="580" b="0" i="0">
+              <a:rPr sz="700" b="0" i="0">
                 <a:solidFill>
                   <a:srgbClr val="B3B3B3"/>
                 </a:solidFill>
@@ -29778,7 +29778,7 @@
           <a:lstStyle/>
           <a:p>
             <a:r>
-              <a:rPr sz="640" b="1" i="0" spc="120">
+              <a:rPr sz="700" b="1" i="0" spc="120">
                 <a:solidFill>
                   <a:srgbClr val="FFD700"/>
                 </a:solidFill>
@@ -29812,7 +29812,7 @@
           <a:lstStyle/>
           <a:p>
             <a:r>
-              <a:rPr sz="560" b="1" i="0">
+              <a:rPr sz="700" b="1" i="0">
                 <a:solidFill>
                   <a:srgbClr val="8C8C8C"/>
                 </a:solidFill>
@@ -29846,7 +29846,7 @@
           <a:lstStyle/>
           <a:p>
             <a:r>
-              <a:rPr sz="560" b="1" i="0">
+              <a:rPr sz="700" b="1" i="0">
                 <a:solidFill>
                   <a:srgbClr val="8C8C8C"/>
                 </a:solidFill>
@@ -29880,7 +29880,7 @@
           <a:lstStyle/>
           <a:p>
             <a:r>
-              <a:rPr sz="560" b="1" i="0">
+              <a:rPr sz="700" b="1" i="0">
                 <a:solidFill>
                   <a:srgbClr val="8C8C8C"/>
                 </a:solidFill>
@@ -29998,7 +29998,7 @@
           <a:lstStyle/>
           <a:p>
             <a:r>
-              <a:rPr sz="660" b="1" i="0">
+              <a:rPr sz="700" b="1" i="0">
                 <a:solidFill>
                   <a:srgbClr val="F2F2F2"/>
                 </a:solidFill>
@@ -30032,7 +30032,7 @@
           <a:lstStyle/>
           <a:p>
             <a:r>
-              <a:rPr sz="580" b="0" i="0">
+              <a:rPr sz="700" b="0" i="0">
                 <a:solidFill>
                   <a:srgbClr val="F2F2F2"/>
                 </a:solidFill>
@@ -30066,7 +30066,7 @@
           <a:lstStyle/>
           <a:p>
             <a:r>
-              <a:rPr sz="580" b="0" i="0">
+              <a:rPr sz="700" b="0" i="0">
                 <a:solidFill>
                   <a:srgbClr val="B3B3B3"/>
                 </a:solidFill>
@@ -30184,7 +30184,7 @@
           <a:lstStyle/>
           <a:p>
             <a:r>
-              <a:rPr sz="660" b="1" i="0">
+              <a:rPr sz="700" b="1" i="0">
                 <a:solidFill>
                   <a:srgbClr val="F2F2F2"/>
                 </a:solidFill>
@@ -30218,7 +30218,7 @@
           <a:lstStyle/>
           <a:p>
             <a:r>
-              <a:rPr sz="580" b="0" i="0">
+              <a:rPr sz="700" b="0" i="0">
                 <a:solidFill>
                   <a:srgbClr val="F2F2F2"/>
                 </a:solidFill>
@@ -30252,7 +30252,7 @@
           <a:lstStyle/>
           <a:p>
             <a:r>
-              <a:rPr sz="580" b="0" i="0">
+              <a:rPr sz="700" b="0" i="0">
                 <a:solidFill>
                   <a:srgbClr val="B3B3B3"/>
                 </a:solidFill>
@@ -30370,7 +30370,7 @@
           <a:lstStyle/>
           <a:p>
             <a:r>
-              <a:rPr sz="660" b="1" i="0">
+              <a:rPr sz="700" b="1" i="0">
                 <a:solidFill>
                   <a:srgbClr val="F2F2F2"/>
                 </a:solidFill>
@@ -30404,7 +30404,7 @@
           <a:lstStyle/>
           <a:p>
             <a:r>
-              <a:rPr sz="580" b="0" i="0">
+              <a:rPr sz="700" b="0" i="0">
                 <a:solidFill>
                   <a:srgbClr val="F2F2F2"/>
                 </a:solidFill>
@@ -30438,7 +30438,7 @@
           <a:lstStyle/>
           <a:p>
             <a:r>
-              <a:rPr sz="580" b="0" i="0">
+              <a:rPr sz="700" b="0" i="0">
                 <a:solidFill>
                   <a:srgbClr val="B3B3B3"/>
                 </a:solidFill>
@@ -30472,7 +30472,7 @@
           <a:lstStyle/>
           <a:p>
             <a:r>
-              <a:rPr sz="600" b="0" i="0">
+              <a:rPr sz="700" b="0" i="0">
                 <a:solidFill>
                   <a:srgbClr val="F2F2F2"/>
                 </a:solidFill>
@@ -30481,7 +30481,7 @@
               <a:t>A token, a count, a diagnosis combination or a small cohort can remain sensitive. </a:t>
             </a:r>
             <a:r>
-              <a:rPr sz="600" b="1" i="0">
+              <a:rPr sz="700" b="1" i="0">
                 <a:solidFill>
                   <a:srgbClr val="FFD700"/>
                 </a:solidFill>
@@ -30515,7 +30515,7 @@
           <a:lstStyle/>
           <a:p>
             <a:r>
-              <a:rPr sz="640" b="1" i="0" spc="120">
+              <a:rPr sz="700" b="1" i="0" spc="120">
                 <a:solidFill>
                   <a:srgbClr val="F2F2F2"/>
                 </a:solidFill>
@@ -30524,7 +30524,7 @@
               <a:t>WHAT MASKING ALONE DOES NOT GIVE US, AND WHAT WE ADD</a:t>
             </a:r>
             <a:r>
-              <a:rPr sz="640" b="0" i="0">
+              <a:rPr sz="700" b="0" i="0">
                 <a:solidFill>
                   <a:srgbClr val="B3B3B3"/>
                 </a:solidFill>
@@ -30722,8 +30722,8 @@
         </p:nvSpPr>
         <p:spPr>
           <a:xfrm>
-            <a:off x="2512314" y="4251960"/>
-            <a:ext cx="566928" cy="146304"/>
+            <a:off x="2329434" y="4251960"/>
+            <a:ext cx="749808" cy="146304"/>
           </a:xfrm>
           <a:prstGeom prst="roundRect">
             <a:avLst>
@@ -30766,8 +30766,8 @@
         </p:nvSpPr>
         <p:spPr>
           <a:xfrm>
-            <a:off x="2512314" y="4251960"/>
-            <a:ext cx="566928" cy="146304"/>
+            <a:off x="2329434" y="4251960"/>
+            <a:ext cx="749808" cy="146304"/>
           </a:xfrm>
           <a:prstGeom prst="rect">
             <a:avLst/>
@@ -30782,7 +30782,7 @@
           <a:p>
             <a:pPr algn="ctr"/>
             <a:r>
-              <a:rPr sz="459" b="1" i="0" spc="80">
+              <a:rPr sz="700" b="1" i="0" spc="80">
                 <a:solidFill>
                   <a:srgbClr val="F2F2F2"/>
                 </a:solidFill>
@@ -30816,7 +30816,7 @@
           <a:lstStyle/>
           <a:p>
             <a:r>
-              <a:rPr sz="580" b="1" i="0">
+              <a:rPr sz="700" b="1" i="0">
                 <a:solidFill>
                   <a:srgbClr val="F2F2F2"/>
                 </a:solidFill>
@@ -30825,7 +30825,7 @@
               <a:t>Gap: </a:t>
             </a:r>
             <a:r>
-              <a:rPr sz="580" b="0" i="0">
+              <a:rPr sz="700" b="0" i="0">
                 <a:solidFill>
                   <a:srgbClr val="B3B3B3"/>
                 </a:solidFill>
@@ -30901,7 +30901,7 @@
           <a:lstStyle/>
           <a:p>
             <a:r>
-              <a:rPr sz="570" b="0" i="0">
+              <a:rPr sz="700" b="0" i="0">
                 <a:solidFill>
                   <a:srgbClr val="F2F2F2"/>
                 </a:solidFill>
@@ -30977,7 +30977,7 @@
           <a:lstStyle/>
           <a:p>
             <a:r>
-              <a:rPr sz="570" b="0" i="0">
+              <a:rPr sz="700" b="0" i="0">
                 <a:solidFill>
                   <a:srgbClr val="F2F2F2"/>
                 </a:solidFill>
@@ -31053,7 +31053,7 @@
           <a:lstStyle/>
           <a:p>
             <a:r>
-              <a:rPr sz="570" b="0" i="0">
+              <a:rPr sz="700" b="0" i="0">
                 <a:solidFill>
                   <a:srgbClr val="F2F2F2"/>
                 </a:solidFill>
@@ -31251,8 +31251,8 @@
         </p:nvSpPr>
         <p:spPr>
           <a:xfrm>
-            <a:off x="5381244" y="4251960"/>
-            <a:ext cx="566928" cy="146304"/>
+            <a:off x="5198364" y="4251960"/>
+            <a:ext cx="749808" cy="146304"/>
           </a:xfrm>
           <a:prstGeom prst="roundRect">
             <a:avLst>
@@ -31295,8 +31295,8 @@
         </p:nvSpPr>
         <p:spPr>
           <a:xfrm>
-            <a:off x="5381244" y="4251960"/>
-            <a:ext cx="566928" cy="146304"/>
+            <a:off x="5198364" y="4251960"/>
+            <a:ext cx="749808" cy="146304"/>
           </a:xfrm>
           <a:prstGeom prst="rect">
             <a:avLst/>
@@ -31311,7 +31311,7 @@
           <a:p>
             <a:pPr algn="ctr"/>
             <a:r>
-              <a:rPr sz="459" b="1" i="0" spc="80">
+              <a:rPr sz="700" b="1" i="0" spc="80">
                 <a:solidFill>
                   <a:srgbClr val="F2F2F2"/>
                 </a:solidFill>
@@ -31345,7 +31345,7 @@
           <a:lstStyle/>
           <a:p>
             <a:r>
-              <a:rPr sz="580" b="1" i="0">
+              <a:rPr sz="700" b="1" i="0">
                 <a:solidFill>
                   <a:srgbClr val="F2F2F2"/>
                 </a:solidFill>
@@ -31354,7 +31354,7 @@
               <a:t>Gap: </a:t>
             </a:r>
             <a:r>
-              <a:rPr sz="580" b="0" i="0">
+              <a:rPr sz="700" b="0" i="0">
                 <a:solidFill>
                   <a:srgbClr val="B3B3B3"/>
                 </a:solidFill>
@@ -31430,7 +31430,7 @@
           <a:lstStyle/>
           <a:p>
             <a:r>
-              <a:rPr sz="570" b="0" i="0">
+              <a:rPr sz="700" b="0" i="0">
                 <a:solidFill>
                   <a:srgbClr val="F2F2F2"/>
                 </a:solidFill>
@@ -31506,7 +31506,7 @@
           <a:lstStyle/>
           <a:p>
             <a:r>
-              <a:rPr sz="570" b="0" i="0">
+              <a:rPr sz="700" b="0" i="0">
                 <a:solidFill>
                   <a:srgbClr val="F2F2F2"/>
                 </a:solidFill>
@@ -31582,7 +31582,7 @@
           <a:lstStyle/>
           <a:p>
             <a:r>
-              <a:rPr sz="570" b="0" i="0">
+              <a:rPr sz="700" b="0" i="0">
                 <a:solidFill>
                   <a:srgbClr val="F2F2F2"/>
                 </a:solidFill>
@@ -31780,8 +31780,8 @@
         </p:nvSpPr>
         <p:spPr>
           <a:xfrm>
-            <a:off x="8250173" y="4251960"/>
-            <a:ext cx="566928" cy="146304"/>
+            <a:off x="8067294" y="4251960"/>
+            <a:ext cx="749808" cy="146304"/>
           </a:xfrm>
           <a:prstGeom prst="roundRect">
             <a:avLst>
@@ -31824,8 +31824,8 @@
         </p:nvSpPr>
         <p:spPr>
           <a:xfrm>
-            <a:off x="8250173" y="4251960"/>
-            <a:ext cx="566928" cy="146304"/>
+            <a:off x="8067294" y="4251960"/>
+            <a:ext cx="749808" cy="146304"/>
           </a:xfrm>
           <a:prstGeom prst="rect">
             <a:avLst/>
@@ -31840,7 +31840,7 @@
           <a:p>
             <a:pPr algn="ctr"/>
             <a:r>
-              <a:rPr sz="459" b="1" i="0" spc="80">
+              <a:rPr sz="700" b="1" i="0" spc="80">
                 <a:solidFill>
                   <a:srgbClr val="F2F2F2"/>
                 </a:solidFill>
@@ -31874,7 +31874,7 @@
           <a:lstStyle/>
           <a:p>
             <a:r>
-              <a:rPr sz="580" b="1" i="0">
+              <a:rPr sz="700" b="1" i="0">
                 <a:solidFill>
                   <a:srgbClr val="F2F2F2"/>
                 </a:solidFill>
@@ -31883,7 +31883,7 @@
               <a:t>Gap: </a:t>
             </a:r>
             <a:r>
-              <a:rPr sz="580" b="0" i="0">
+              <a:rPr sz="700" b="0" i="0">
                 <a:solidFill>
                   <a:srgbClr val="B3B3B3"/>
                 </a:solidFill>
@@ -31959,7 +31959,7 @@
           <a:lstStyle/>
           <a:p>
             <a:r>
-              <a:rPr sz="570" b="0" i="0">
+              <a:rPr sz="700" b="0" i="0">
                 <a:solidFill>
                   <a:srgbClr val="F2F2F2"/>
                 </a:solidFill>
@@ -32035,7 +32035,7 @@
           <a:lstStyle/>
           <a:p>
             <a:r>
-              <a:rPr sz="570" b="0" i="0">
+              <a:rPr sz="700" b="0" i="0">
                 <a:solidFill>
                   <a:srgbClr val="F2F2F2"/>
                 </a:solidFill>
@@ -32111,7 +32111,7 @@
           <a:lstStyle/>
           <a:p>
             <a:r>
-              <a:rPr sz="570" b="0" i="0">
+              <a:rPr sz="700" b="0" i="0">
                 <a:solidFill>
                   <a:srgbClr val="F2F2F2"/>
                 </a:solidFill>
@@ -32309,8 +32309,8 @@
         </p:nvSpPr>
         <p:spPr>
           <a:xfrm>
-            <a:off x="11119104" y="4251960"/>
-            <a:ext cx="566928" cy="146304"/>
+            <a:off x="10936224" y="4251960"/>
+            <a:ext cx="749808" cy="146304"/>
           </a:xfrm>
           <a:prstGeom prst="roundRect">
             <a:avLst>
@@ -32353,8 +32353,8 @@
         </p:nvSpPr>
         <p:spPr>
           <a:xfrm>
-            <a:off x="11119104" y="4251960"/>
-            <a:ext cx="566928" cy="146304"/>
+            <a:off x="10936224" y="4251960"/>
+            <a:ext cx="749808" cy="146304"/>
           </a:xfrm>
           <a:prstGeom prst="rect">
             <a:avLst/>
@@ -32369,7 +32369,7 @@
           <a:p>
             <a:pPr algn="ctr"/>
             <a:r>
-              <a:rPr sz="459" b="1" i="0" spc="80">
+              <a:rPr sz="700" b="1" i="0" spc="80">
                 <a:solidFill>
                   <a:srgbClr val="F2F2F2"/>
                 </a:solidFill>
@@ -32403,7 +32403,7 @@
           <a:lstStyle/>
           <a:p>
             <a:r>
-              <a:rPr sz="580" b="1" i="0">
+              <a:rPr sz="700" b="1" i="0">
                 <a:solidFill>
                   <a:srgbClr val="F2F2F2"/>
                 </a:solidFill>
@@ -32412,7 +32412,7 @@
               <a:t>Gap: </a:t>
             </a:r>
             <a:r>
-              <a:rPr sz="580" b="0" i="0">
+              <a:rPr sz="700" b="0" i="0">
                 <a:solidFill>
                   <a:srgbClr val="B3B3B3"/>
                 </a:solidFill>
@@ -32488,7 +32488,7 @@
           <a:lstStyle/>
           <a:p>
             <a:r>
-              <a:rPr sz="570" b="0" i="0">
+              <a:rPr sz="700" b="0" i="0">
                 <a:solidFill>
                   <a:srgbClr val="F2F2F2"/>
                 </a:solidFill>
@@ -32564,7 +32564,7 @@
           <a:lstStyle/>
           <a:p>
             <a:r>
-              <a:rPr sz="570" b="0" i="0">
+              <a:rPr sz="700" b="0" i="0">
                 <a:solidFill>
                   <a:srgbClr val="F2F2F2"/>
                 </a:solidFill>
@@ -32640,7 +32640,7 @@
           <a:lstStyle/>
           <a:p>
             <a:r>
-              <a:rPr sz="570" b="0" i="0">
+              <a:rPr sz="700" b="0" i="0">
                 <a:solidFill>
                   <a:srgbClr val="F2F2F2"/>
                 </a:solidFill>
@@ -32720,7 +32720,7 @@
           <a:lstStyle/>
           <a:p>
             <a:r>
-              <a:rPr sz="590" b="1" i="0" spc="100">
+              <a:rPr sz="700" b="1" i="0" spc="100">
                 <a:solidFill>
                   <a:srgbClr val="F2F2F2"/>
                 </a:solidFill>
@@ -32729,7 +32729,7 @@
               <a:t>HOW WE PROVE IT  </a:t>
             </a:r>
             <a:r>
-              <a:rPr sz="590" b="0" i="0">
+              <a:rPr sz="700" b="0" i="0">
                 <a:solidFill>
                   <a:srgbClr val="F2F2F2"/>
                 </a:solidFill>
@@ -32738,7 +32738,7 @@
               <a:t>Discovery inventory across the approved scope · row-level security and authorized views with masking · raw access isolated from the LLM runtime · negative-access tests · drift detection · periodic access review. </a:t>
             </a:r>
             <a:r>
-              <a:rPr sz="590" b="1" i="0">
+              <a:rPr sz="700" b="1" i="0">
                 <a:solidFill>
                   <a:srgbClr val="F2F2F2"/>
                 </a:solidFill>
@@ -33013,7 +33013,7 @@
           <a:p>
             <a:pPr algn="r"/>
             <a:r>
-              <a:rPr sz="640" b="1" i="0" spc="100">
+              <a:rPr sz="700" b="1" i="0" spc="100">
                 <a:solidFill>
                   <a:srgbClr val="F2F2F2"/>
                 </a:solidFill>
@@ -33033,7 +33033,7 @@
         <p:spPr>
           <a:xfrm>
             <a:off x="548640" y="1481328"/>
-            <a:ext cx="2068372" cy="804672"/>
+            <a:ext cx="2068372" cy="877824"/>
           </a:xfrm>
           <a:prstGeom prst="roundRect">
             <a:avLst>
@@ -33136,7 +33136,7 @@
           <a:p>
             <a:pPr algn="ctr"/>
             <a:r>
-              <a:rPr sz="660" b="1" i="0">
+              <a:rPr sz="700" b="1" i="0">
                 <a:solidFill>
                   <a:srgbClr val="F2F2F2"/>
                 </a:solidFill>
@@ -33194,7 +33194,7 @@
           <a:lstStyle/>
           <a:p>
             <a:r>
-              <a:rPr sz="660" b="1" i="0">
+              <a:rPr sz="700" b="1" i="0">
                 <a:solidFill>
                   <a:srgbClr val="F2F2F2"/>
                 </a:solidFill>
@@ -33214,7 +33214,7 @@
         <p:spPr>
           <a:xfrm>
             <a:off x="640080" y="1764792"/>
-            <a:ext cx="1885492" cy="493776"/>
+            <a:ext cx="1885492" cy="566927"/>
           </a:xfrm>
           <a:prstGeom prst="rect">
             <a:avLst/>
@@ -33233,7 +33233,7 @@
               </a:spcAft>
             </a:pPr>
             <a:r>
-              <a:rPr sz="560" b="0" i="0">
+              <a:rPr sz="700" b="0" i="0">
                 <a:solidFill>
                   <a:srgbClr val="B3B3B3"/>
                 </a:solidFill>
@@ -33252,7 +33252,7 @@
         </p:nvCxnSpPr>
         <p:spPr>
           <a:xfrm>
-            <a:off x="2617012" y="1883664"/>
+            <a:off x="2617012" y="1920240"/>
             <a:ext cx="146304" cy="0"/>
           </a:xfrm>
           <a:prstGeom prst="line">
@@ -33289,7 +33289,7 @@
         <p:spPr>
           <a:xfrm>
             <a:off x="2763316" y="1481328"/>
-            <a:ext cx="2068372" cy="804672"/>
+            <a:ext cx="2068372" cy="877824"/>
           </a:xfrm>
           <a:prstGeom prst="roundRect">
             <a:avLst>
@@ -33392,7 +33392,7 @@
           <a:p>
             <a:pPr algn="ctr"/>
             <a:r>
-              <a:rPr sz="660" b="1" i="0">
+              <a:rPr sz="700" b="1" i="0">
                 <a:solidFill>
                   <a:srgbClr val="F2F2F2"/>
                 </a:solidFill>
@@ -33426,7 +33426,7 @@
           <a:lstStyle/>
           <a:p>
             <a:r>
-              <a:rPr sz="660" b="1" i="0">
+              <a:rPr sz="700" b="1" i="0">
                 <a:solidFill>
                   <a:srgbClr val="F2F2F2"/>
                 </a:solidFill>
@@ -33446,7 +33446,7 @@
         <p:spPr>
           <a:xfrm>
             <a:off x="2854756" y="1764792"/>
-            <a:ext cx="1885492" cy="493776"/>
+            <a:ext cx="1885492" cy="566927"/>
           </a:xfrm>
           <a:prstGeom prst="rect">
             <a:avLst/>
@@ -33465,7 +33465,7 @@
               </a:spcAft>
             </a:pPr>
             <a:r>
-              <a:rPr sz="560" b="0" i="0">
+              <a:rPr sz="700" b="0" i="0">
                 <a:solidFill>
                   <a:srgbClr val="B3B3B3"/>
                 </a:solidFill>
@@ -33484,7 +33484,7 @@
         </p:nvCxnSpPr>
         <p:spPr>
           <a:xfrm>
-            <a:off x="4831689" y="1883664"/>
+            <a:off x="4831689" y="1920240"/>
             <a:ext cx="146304" cy="0"/>
           </a:xfrm>
           <a:prstGeom prst="line">
@@ -33521,7 +33521,7 @@
         <p:spPr>
           <a:xfrm>
             <a:off x="4977993" y="1481328"/>
-            <a:ext cx="2068372" cy="804672"/>
+            <a:ext cx="2068372" cy="877824"/>
           </a:xfrm>
           <a:prstGeom prst="roundRect">
             <a:avLst>
@@ -33624,7 +33624,7 @@
           <a:p>
             <a:pPr algn="ctr"/>
             <a:r>
-              <a:rPr sz="660" b="1" i="0">
+              <a:rPr sz="700" b="1" i="0">
                 <a:solidFill>
                   <a:srgbClr val="F2F2F2"/>
                 </a:solidFill>
@@ -33658,7 +33658,7 @@
           <a:lstStyle/>
           <a:p>
             <a:r>
-              <a:rPr sz="660" b="1" i="0">
+              <a:rPr sz="700" b="1" i="0">
                 <a:solidFill>
                   <a:srgbClr val="F2F2F2"/>
                 </a:solidFill>
@@ -33678,7 +33678,7 @@
         <p:spPr>
           <a:xfrm>
             <a:off x="5069433" y="1764792"/>
-            <a:ext cx="1885492" cy="493776"/>
+            <a:ext cx="1885492" cy="566927"/>
           </a:xfrm>
           <a:prstGeom prst="rect">
             <a:avLst/>
@@ -33697,7 +33697,7 @@
               </a:spcAft>
             </a:pPr>
             <a:r>
-              <a:rPr sz="560" b="0" i="0">
+              <a:rPr sz="700" b="0" i="0">
                 <a:solidFill>
                   <a:srgbClr val="B3B3B3"/>
                 </a:solidFill>
@@ -33716,7 +33716,7 @@
         </p:nvCxnSpPr>
         <p:spPr>
           <a:xfrm>
-            <a:off x="7046366" y="1883664"/>
+            <a:off x="7046366" y="1920240"/>
             <a:ext cx="146304" cy="0"/>
           </a:xfrm>
           <a:prstGeom prst="line">
@@ -33753,7 +33753,7 @@
         <p:spPr>
           <a:xfrm>
             <a:off x="7192670" y="1481328"/>
-            <a:ext cx="2068372" cy="804672"/>
+            <a:ext cx="2068372" cy="877824"/>
           </a:xfrm>
           <a:prstGeom prst="roundRect">
             <a:avLst>
@@ -33856,7 +33856,7 @@
           <a:p>
             <a:pPr algn="ctr"/>
             <a:r>
-              <a:rPr sz="660" b="1" i="0">
+              <a:rPr sz="700" b="1" i="0">
                 <a:solidFill>
                   <a:srgbClr val="F2F2F2"/>
                 </a:solidFill>
@@ -33890,7 +33890,7 @@
           <a:lstStyle/>
           <a:p>
             <a:r>
-              <a:rPr sz="660" b="1" i="0">
+              <a:rPr sz="700" b="1" i="0">
                 <a:solidFill>
                   <a:srgbClr val="F2F2F2"/>
                 </a:solidFill>
@@ -33910,7 +33910,7 @@
         <p:spPr>
           <a:xfrm>
             <a:off x="7284110" y="1764792"/>
-            <a:ext cx="1885492" cy="493776"/>
+            <a:ext cx="1885492" cy="566927"/>
           </a:xfrm>
           <a:prstGeom prst="rect">
             <a:avLst/>
@@ -33929,7 +33929,7 @@
               </a:spcAft>
             </a:pPr>
             <a:r>
-              <a:rPr sz="560" b="0" i="0">
+              <a:rPr sz="700" b="0" i="0">
                 <a:solidFill>
                   <a:srgbClr val="B3B3B3"/>
                 </a:solidFill>
@@ -33949,7 +33949,7 @@
         <p:spPr>
           <a:xfrm>
             <a:off x="9407347" y="1481328"/>
-            <a:ext cx="2068372" cy="374904"/>
+            <a:ext cx="2068372" cy="411479"/>
           </a:xfrm>
           <a:prstGeom prst="roundRect">
             <a:avLst>
@@ -34052,7 +34052,7 @@
           <a:p>
             <a:pPr algn="ctr"/>
             <a:r>
-              <a:rPr sz="660" b="1" i="0">
+              <a:rPr sz="700" b="1" i="0">
                 <a:solidFill>
                   <a:srgbClr val="1A1A1A"/>
                 </a:solidFill>
@@ -34086,7 +34086,7 @@
           <a:lstStyle/>
           <a:p>
             <a:r>
-              <a:rPr sz="620" b="1" i="0">
+              <a:rPr sz="700" b="1" i="0">
                 <a:solidFill>
                   <a:srgbClr val="F2F2F2"/>
                 </a:solidFill>
@@ -34106,7 +34106,7 @@
         <p:spPr>
           <a:xfrm>
             <a:off x="9498787" y="1764792"/>
-            <a:ext cx="1885492" cy="64008"/>
+            <a:ext cx="1885492" cy="100583"/>
           </a:xfrm>
           <a:prstGeom prst="rect">
             <a:avLst/>
@@ -34125,13 +34125,13 @@
               </a:spcAft>
             </a:pPr>
             <a:r>
-              <a:rPr sz="520" b="0" i="0">
+              <a:rPr sz="700" b="0" i="0">
                 <a:solidFill>
                   <a:srgbClr val="B3B3B3"/>
                 </a:solidFill>
                 <a:latin typeface="Trenda IG Text"/>
               </a:rPr>
-              <a:t>Identity-linked inputs. Restricted services only.</a:t>
+              <a:t>Identity-linked; restricted services only</a:t>
             </a:r>
           </a:p>
         </p:txBody>
@@ -34144,8 +34144,8 @@
         </p:nvSpPr>
         <p:spPr>
           <a:xfrm>
-            <a:off x="9407347" y="1911096"/>
-            <a:ext cx="2068372" cy="374904"/>
+            <a:off x="9407347" y="1947672"/>
+            <a:ext cx="2068372" cy="411479"/>
           </a:xfrm>
           <a:prstGeom prst="roundRect">
             <a:avLst>
@@ -34190,7 +34190,7 @@
         </p:nvSpPr>
         <p:spPr>
           <a:xfrm>
-            <a:off x="9480499" y="1975104"/>
+            <a:off x="9480499" y="2011680"/>
             <a:ext cx="201168" cy="201168"/>
           </a:xfrm>
           <a:prstGeom prst="ellipse">
@@ -34232,7 +34232,7 @@
         </p:nvSpPr>
         <p:spPr>
           <a:xfrm>
-            <a:off x="9480499" y="1975104"/>
+            <a:off x="9480499" y="2011680"/>
             <a:ext cx="201168" cy="201168"/>
           </a:xfrm>
           <a:prstGeom prst="rect">
@@ -34248,7 +34248,7 @@
           <a:p>
             <a:pPr algn="ctr"/>
             <a:r>
-              <a:rPr sz="660" b="1" i="0">
+              <a:rPr sz="700" b="1" i="0">
                 <a:solidFill>
                   <a:srgbClr val="1A1A1A"/>
                 </a:solidFill>
@@ -34275,7 +34275,7 @@
         </p:blipFill>
         <p:spPr>
           <a:xfrm>
-            <a:off x="9736531" y="1975104"/>
+            <a:off x="9736531" y="2011680"/>
             <a:ext cx="182880" cy="182880"/>
           </a:xfrm>
           <a:prstGeom prst="rect">
@@ -34291,7 +34291,7 @@
         </p:nvSpPr>
         <p:spPr>
           <a:xfrm>
-            <a:off x="9974275" y="1965960"/>
+            <a:off x="9974275" y="2002536"/>
             <a:ext cx="1428292" cy="201168"/>
           </a:xfrm>
           <a:prstGeom prst="rect">
@@ -34306,7 +34306,7 @@
           <a:lstStyle/>
           <a:p>
             <a:r>
-              <a:rPr sz="620" b="1" i="0">
+              <a:rPr sz="700" b="1" i="0">
                 <a:solidFill>
                   <a:srgbClr val="F2F2F2"/>
                 </a:solidFill>
@@ -34325,8 +34325,8 @@
         </p:nvSpPr>
         <p:spPr>
           <a:xfrm>
-            <a:off x="9498787" y="2194560"/>
-            <a:ext cx="1885492" cy="64008"/>
+            <a:off x="9498787" y="2231136"/>
+            <a:ext cx="1885492" cy="100583"/>
           </a:xfrm>
           <a:prstGeom prst="rect">
             <a:avLst/>
@@ -34345,13 +34345,13 @@
               </a:spcAft>
             </a:pPr>
             <a:r>
-              <a:rPr sz="520" b="0" i="0">
+              <a:rPr sz="700" b="0" i="0">
                 <a:solidFill>
                   <a:srgbClr val="B3B3B3"/>
                 </a:solidFill>
                 <a:latin typeface="Trenda IG Text"/>
               </a:rPr>
-              <a:t>Protected aggregates: e.g. Heart · Maternity · General · more.</a:t>
+              <a:t>Aggregates: Heart, Maternity, General, more</a:t>
             </a:r>
           </a:p>
         </p:txBody>
@@ -34364,7 +34364,7 @@
         </p:nvCxnSpPr>
         <p:spPr>
           <a:xfrm>
-            <a:off x="9261043" y="1668780"/>
+            <a:off x="9261043" y="1687068"/>
             <a:ext cx="146304" cy="0"/>
           </a:xfrm>
           <a:prstGeom prst="line">
@@ -34400,7 +34400,7 @@
         </p:nvCxnSpPr>
         <p:spPr>
           <a:xfrm>
-            <a:off x="9261043" y="2098548"/>
+            <a:off x="9261043" y="2153412"/>
             <a:ext cx="146304" cy="0"/>
           </a:xfrm>
           <a:prstGeom prst="line">
@@ -34534,7 +34534,7 @@
           <a:p>
             <a:pPr algn="ctr"/>
             <a:r>
-              <a:rPr sz="500" b="1" i="0" spc="80">
+              <a:rPr sz="700" b="1" i="0" spc="80">
                 <a:solidFill>
                   <a:srgbClr val="F2F2F2"/>
                 </a:solidFill>
@@ -34681,7 +34681,7 @@
           <a:p>
             <a:pPr algn="r"/>
             <a:r>
-              <a:rPr sz="640" b="1" i="0" spc="100">
+              <a:rPr sz="700" b="1" i="0" spc="100">
                 <a:solidFill>
                   <a:srgbClr val="F2F2F2"/>
                 </a:solidFill>
@@ -34804,7 +34804,7 @@
           <a:p>
             <a:pPr algn="ctr"/>
             <a:r>
-              <a:rPr sz="660" b="1" i="0">
+              <a:rPr sz="700" b="1" i="0">
                 <a:solidFill>
                   <a:srgbClr val="F2F2F2"/>
                 </a:solidFill>
@@ -34862,7 +34862,7 @@
           <a:lstStyle/>
           <a:p>
             <a:r>
-              <a:rPr sz="640" b="1" i="0">
+              <a:rPr sz="700" b="1" i="0">
                 <a:solidFill>
                   <a:srgbClr val="F2F2F2"/>
                 </a:solidFill>
@@ -34901,7 +34901,7 @@
               </a:spcAft>
             </a:pPr>
             <a:r>
-              <a:rPr sz="530" b="0" i="0">
+              <a:rPr sz="700" b="0" i="0">
                 <a:solidFill>
                   <a:srgbClr val="B3B3B3"/>
                 </a:solidFill>
@@ -35024,7 +35024,7 @@
           <a:p>
             <a:pPr algn="ctr"/>
             <a:r>
-              <a:rPr sz="660" b="1" i="0">
+              <a:rPr sz="700" b="1" i="0">
                 <a:solidFill>
                   <a:srgbClr val="F2F2F2"/>
                 </a:solidFill>
@@ -35058,13 +35058,13 @@
           <a:lstStyle/>
           <a:p>
             <a:r>
-              <a:rPr sz="590" b="1" i="0">
+              <a:rPr sz="700" b="1" i="0">
                 <a:solidFill>
                   <a:srgbClr val="F2F2F2"/>
                 </a:solidFill>
                 <a:latin typeface="Trenda IG Text"/>
               </a:rPr>
-              <a:t>Orchestrator · Strategist · Analytics</a:t>
+              <a:t>Planning agents</a:t>
             </a:r>
           </a:p>
         </p:txBody>
@@ -35097,13 +35097,13 @@
               </a:spcAft>
             </a:pPr>
             <a:r>
-              <a:rPr sz="540" b="0" i="0">
+              <a:rPr sz="700" b="0" i="0">
                 <a:solidFill>
                   <a:srgbClr val="B3B3B3"/>
                 </a:solidFill>
                 <a:latin typeface="Trenda IG Text"/>
               </a:rPr>
-              <a:t>Read the graph and Gold A; size the audience as counts.</a:t>
+              <a:t>Orchestrator, Strategist and Analytics read the graph and Gold A; counts only.</a:t>
             </a:r>
           </a:p>
         </p:txBody>
@@ -35220,7 +35220,7 @@
           <a:p>
             <a:pPr algn="ctr"/>
             <a:r>
-              <a:rPr sz="660" b="1" i="0">
+              <a:rPr sz="700" b="1" i="0">
                 <a:solidFill>
                   <a:srgbClr val="1A1A1A"/>
                 </a:solidFill>
@@ -35278,7 +35278,7 @@
           <a:lstStyle/>
           <a:p>
             <a:r>
-              <a:rPr sz="680" b="1" i="0">
+              <a:rPr sz="700" b="1" i="0">
                 <a:solidFill>
                   <a:srgbClr val="F2F2F2"/>
                 </a:solidFill>
@@ -35359,7 +35359,7 @@
           <a:p>
             <a:pPr algn="ctr"/>
             <a:r>
-              <a:rPr sz="500" b="1" i="0" spc="80">
+              <a:rPr sz="700" b="1" i="0" spc="80">
                 <a:solidFill>
                   <a:srgbClr val="1A1A1A"/>
                 </a:solidFill>
@@ -35393,7 +35393,7 @@
           <a:lstStyle/>
           <a:p>
             <a:r>
-              <a:rPr sz="520" b="0" i="0">
+              <a:rPr sz="700" b="0" i="0">
                 <a:solidFill>
                   <a:srgbClr val="B3B3B3"/>
                 </a:solidFill>
@@ -35516,7 +35516,7 @@
           <a:p>
             <a:pPr algn="ctr"/>
             <a:r>
-              <a:rPr sz="660" b="1" i="0">
+              <a:rPr sz="700" b="1" i="0">
                 <a:solidFill>
                   <a:srgbClr val="F2F2F2"/>
                 </a:solidFill>
@@ -35550,7 +35550,7 @@
           <a:lstStyle/>
           <a:p>
             <a:r>
-              <a:rPr sz="620" b="1" i="0">
+              <a:rPr sz="700" b="1" i="0">
                 <a:solidFill>
                   <a:srgbClr val="F2F2F2"/>
                 </a:solidFill>
@@ -35589,7 +35589,7 @@
               </a:spcAft>
             </a:pPr>
             <a:r>
-              <a:rPr sz="520" b="0" i="0">
+              <a:rPr sz="700" b="0" i="0">
                 <a:solidFill>
                   <a:srgbClr val="B3B3B3"/>
                 </a:solidFill>
@@ -35712,7 +35712,7 @@
           <a:p>
             <a:pPr algn="ctr"/>
             <a:r>
-              <a:rPr sz="660" b="1" i="0">
+              <a:rPr sz="700" b="1" i="0">
                 <a:solidFill>
                   <a:srgbClr val="F2F2F2"/>
                 </a:solidFill>
@@ -35746,7 +35746,7 @@
           <a:lstStyle/>
           <a:p>
             <a:r>
-              <a:rPr sz="620" b="1" i="0">
+              <a:rPr sz="700" b="1" i="0">
                 <a:solidFill>
                   <a:srgbClr val="F2F2F2"/>
                 </a:solidFill>
@@ -35780,16 +35780,16 @@
           <a:lstStyle/>
           <a:p>
             <a:r>
-              <a:rPr sz="500" b="0" i="0">
+              <a:rPr sz="700" b="0" i="0">
                 <a:solidFill>
                   <a:srgbClr val="B3B3B3"/>
                 </a:solidFill>
                 <a:latin typeface="Trenda IG Text"/>
               </a:rPr>
-              <a:t>Test contacts only → failure modes (consent, STOP, links, hours) → classify + report. </a:t>
-            </a:r>
-            <a:r>
-              <a:rPr sz="500" b="1" i="0">
+              <a:t>Test contacts only; checks consent, STOP, links, hours. </a:t>
+            </a:r>
+            <a:r>
+              <a:rPr sz="700" b="1" i="0">
                 <a:solidFill>
                   <a:srgbClr val="F2F2F2"/>
                 </a:solidFill>
@@ -35912,7 +35912,7 @@
           <a:p>
             <a:pPr algn="ctr"/>
             <a:r>
-              <a:rPr sz="660" b="1" i="0">
+              <a:rPr sz="700" b="1" i="0">
                 <a:solidFill>
                   <a:srgbClr val="1A1A1A"/>
                 </a:solidFill>
@@ -35970,7 +35970,7 @@
           <a:lstStyle/>
           <a:p>
             <a:r>
-              <a:rPr sz="680" b="1" i="0">
+              <a:rPr sz="700" b="1" i="0">
                 <a:solidFill>
                   <a:srgbClr val="F2F2F2"/>
                 </a:solidFill>
@@ -36051,7 +36051,7 @@
           <a:p>
             <a:pPr algn="ctr"/>
             <a:r>
-              <a:rPr sz="500" b="1" i="0" spc="80">
+              <a:rPr sz="700" b="1" i="0" spc="80">
                 <a:solidFill>
                   <a:srgbClr val="1A1A1A"/>
                 </a:solidFill>
@@ -36085,7 +36085,7 @@
           <a:lstStyle/>
           <a:p>
             <a:r>
-              <a:rPr sz="520" b="0" i="0">
+              <a:rPr sz="700" b="0" i="0">
                 <a:solidFill>
                   <a:srgbClr val="B3B3B3"/>
                 </a:solidFill>
@@ -36410,7 +36410,7 @@
               </a:spcAft>
             </a:pPr>
             <a:r>
-              <a:rPr sz="540" b="1" i="0" spc="100">
+              <a:rPr sz="700" b="1" i="0" spc="100">
                 <a:solidFill>
                   <a:srgbClr val="8C8C8C"/>
                 </a:solidFill>
@@ -36426,7 +36426,7 @@
               </a:spcAft>
             </a:pPr>
             <a:r>
-              <a:rPr sz="500" b="0" i="0">
+              <a:rPr sz="700" b="0" i="0">
                 <a:solidFill>
                   <a:srgbClr val="8C8C8C"/>
                 </a:solidFill>
@@ -36530,7 +36530,7 @@
           <a:lstStyle/>
           <a:p>
             <a:r>
-              <a:rPr sz="580" b="1" i="0">
+              <a:rPr sz="700" b="1" i="0">
                 <a:solidFill>
                   <a:srgbClr val="F2F2F2"/>
                 </a:solidFill>
@@ -36569,7 +36569,7 @@
               </a:spcAft>
             </a:pPr>
             <a:r>
-              <a:rPr sz="500" b="0" i="0">
+              <a:rPr sz="700" b="0" i="0">
                 <a:solidFill>
                   <a:srgbClr val="B3B3B3"/>
                 </a:solidFill>
@@ -36673,7 +36673,7 @@
           <a:lstStyle/>
           <a:p>
             <a:r>
-              <a:rPr sz="580" b="1" i="0">
+              <a:rPr sz="700" b="1" i="0">
                 <a:solidFill>
                   <a:srgbClr val="F2F2F2"/>
                 </a:solidFill>
@@ -36712,7 +36712,7 @@
               </a:spcAft>
             </a:pPr>
             <a:r>
-              <a:rPr sz="500" b="0" i="0">
+              <a:rPr sz="700" b="0" i="0">
                 <a:solidFill>
                   <a:srgbClr val="B3B3B3"/>
                 </a:solidFill>
@@ -36792,7 +36792,7 @@
           <a:lstStyle/>
           <a:p>
             <a:r>
-              <a:rPr sz="580" b="1" i="0">
+              <a:rPr sz="700" b="1" i="0">
                 <a:solidFill>
                   <a:srgbClr val="F2F2F2"/>
                 </a:solidFill>
@@ -36831,7 +36831,7 @@
               </a:spcAft>
             </a:pPr>
             <a:r>
-              <a:rPr sz="500" b="0" i="0">
+              <a:rPr sz="700" b="0" i="0">
                 <a:solidFill>
                   <a:srgbClr val="B3B3B3"/>
                 </a:solidFill>
@@ -36911,7 +36911,7 @@
           <a:lstStyle/>
           <a:p>
             <a:r>
-              <a:rPr sz="580" b="1" i="0">
+              <a:rPr sz="700" b="1" i="0">
                 <a:solidFill>
                   <a:srgbClr val="F2F2F2"/>
                 </a:solidFill>
@@ -36950,7 +36950,7 @@
               </a:spcAft>
             </a:pPr>
             <a:r>
-              <a:rPr sz="500" b="0" i="0">
+              <a:rPr sz="700" b="0" i="0">
                 <a:solidFill>
                   <a:srgbClr val="B3B3B3"/>
                 </a:solidFill>
@@ -37054,7 +37054,7 @@
           <a:lstStyle/>
           <a:p>
             <a:r>
-              <a:rPr sz="680" b="1" i="0">
+              <a:rPr sz="700" b="1" i="0">
                 <a:solidFill>
                   <a:srgbClr val="F2F2F2"/>
                 </a:solidFill>
@@ -37135,7 +37135,7 @@
           <a:p>
             <a:pPr algn="ctr"/>
             <a:r>
-              <a:rPr sz="500" b="1" i="0" spc="80">
+              <a:rPr sz="700" b="1" i="0" spc="80">
                 <a:solidFill>
                   <a:srgbClr val="1A1A1A"/>
                 </a:solidFill>
@@ -37169,7 +37169,7 @@
           <a:lstStyle/>
           <a:p>
             <a:r>
-              <a:rPr sz="500" b="0" i="0">
+              <a:rPr sz="700" b="0" i="0">
                 <a:solidFill>
                   <a:srgbClr val="B3B3B3"/>
                 </a:solidFill>
@@ -37260,8 +37260,8 @@
         </p:nvCxnSpPr>
         <p:spPr>
           <a:xfrm>
-            <a:off x="10441533" y="2286000"/>
-            <a:ext cx="0" cy="164592"/>
+            <a:off x="10441533" y="2359152"/>
+            <a:ext cx="0" cy="91440"/>
           </a:xfrm>
           <a:prstGeom prst="line">
             <a:avLst/>
@@ -37464,7 +37464,7 @@
           <a:p>
             <a:pPr algn="ctr"/>
             <a:r>
-              <a:rPr sz="500" b="1" i="0" spc="80">
+              <a:rPr sz="700" b="1" i="0" spc="80">
                 <a:solidFill>
                   <a:srgbClr val="F2F2F2"/>
                 </a:solidFill>
@@ -37611,7 +37611,7 @@
           <a:p>
             <a:pPr algn="r"/>
             <a:r>
-              <a:rPr sz="640" b="1" i="0" spc="100">
+              <a:rPr sz="700" b="1" i="0" spc="100">
                 <a:solidFill>
                   <a:srgbClr val="F2F2F2"/>
                 </a:solidFill>
@@ -37734,7 +37734,7 @@
           <a:p>
             <a:pPr algn="ctr"/>
             <a:r>
-              <a:rPr sz="660" b="1" i="0">
+              <a:rPr sz="700" b="1" i="0">
                 <a:solidFill>
                   <a:srgbClr val="F2F2F2"/>
                 </a:solidFill>
@@ -37768,7 +37768,7 @@
           <a:lstStyle/>
           <a:p>
             <a:r>
-              <a:rPr sz="620" b="1" i="0">
+              <a:rPr sz="700" b="1" i="0">
                 <a:solidFill>
                   <a:srgbClr val="F2F2F2"/>
                 </a:solidFill>
@@ -37807,7 +37807,7 @@
               </a:spcAft>
             </a:pPr>
             <a:r>
-              <a:rPr sz="500" b="0" i="0">
+              <a:rPr sz="700" b="0" i="0">
                 <a:solidFill>
                   <a:srgbClr val="B3B3B3"/>
                 </a:solidFill>
@@ -37930,7 +37930,7 @@
           <a:p>
             <a:pPr algn="ctr"/>
             <a:r>
-              <a:rPr sz="660" b="1" i="0">
+              <a:rPr sz="700" b="1" i="0">
                 <a:solidFill>
                   <a:srgbClr val="1A1A1A"/>
                 </a:solidFill>
@@ -37988,7 +37988,7 @@
           <a:lstStyle/>
           <a:p>
             <a:r>
-              <a:rPr sz="680" b="1" i="0">
+              <a:rPr sz="700" b="1" i="0">
                 <a:solidFill>
                   <a:srgbClr val="F2F2F2"/>
                 </a:solidFill>
@@ -38069,7 +38069,7 @@
           <a:p>
             <a:pPr algn="ctr"/>
             <a:r>
-              <a:rPr sz="500" b="1" i="0" spc="80">
+              <a:rPr sz="700" b="1" i="0" spc="80">
                 <a:solidFill>
                   <a:srgbClr val="1A1A1A"/>
                 </a:solidFill>
@@ -38103,7 +38103,7 @@
           <a:lstStyle/>
           <a:p>
             <a:r>
-              <a:rPr sz="500" b="0" i="0">
+              <a:rPr sz="700" b="0" i="0">
                 <a:solidFill>
                   <a:srgbClr val="B3B3B3"/>
                 </a:solidFill>
@@ -38275,7 +38275,7 @@
           <a:p>
             <a:pPr algn="ctr"/>
             <a:r>
-              <a:rPr sz="660" b="1" i="0">
+              <a:rPr sz="700" b="1" i="0">
                 <a:solidFill>
                   <a:srgbClr val="1A1A1A"/>
                 </a:solidFill>
@@ -38314,7 +38314,7 @@
               </a:lnSpc>
             </a:pPr>
             <a:r>
-              <a:rPr sz="620" b="1" i="0">
+              <a:rPr sz="700" b="1" i="0">
                 <a:solidFill>
                   <a:srgbClr val="F2F2F2"/>
                 </a:solidFill>
@@ -38348,7 +38348,7 @@
           <a:lstStyle/>
           <a:p>
             <a:r>
-              <a:rPr sz="500" b="0" i="0">
+              <a:rPr sz="700" b="0" i="0">
                 <a:solidFill>
                   <a:srgbClr val="B3B3B3"/>
                 </a:solidFill>
@@ -38471,7 +38471,7 @@
           <a:p>
             <a:pPr algn="ctr"/>
             <a:r>
-              <a:rPr sz="660" b="1" i="0">
+              <a:rPr sz="700" b="1" i="0">
                 <a:solidFill>
                   <a:srgbClr val="F2F2F2"/>
                 </a:solidFill>
@@ -38529,7 +38529,7 @@
           <a:lstStyle/>
           <a:p>
             <a:r>
-              <a:rPr sz="560" b="1" i="0">
+              <a:rPr sz="700" b="1" i="0">
                 <a:solidFill>
                   <a:srgbClr val="F2F2F2"/>
                 </a:solidFill>
@@ -38610,7 +38610,7 @@
           <a:lstStyle/>
           <a:p>
             <a:r>
-              <a:rPr sz="560" b="1" i="0">
+              <a:rPr sz="700" b="1" i="0">
                 <a:solidFill>
                   <a:srgbClr val="F2F2F2"/>
                 </a:solidFill>
@@ -38733,7 +38733,7 @@
           <a:p>
             <a:pPr algn="ctr"/>
             <a:r>
-              <a:rPr sz="660" b="1" i="0">
+              <a:rPr sz="700" b="1" i="0">
                 <a:solidFill>
                   <a:srgbClr val="F2F2F2"/>
                 </a:solidFill>
@@ -38791,7 +38791,7 @@
           <a:lstStyle/>
           <a:p>
             <a:r>
-              <a:rPr sz="580" b="1" i="0">
+              <a:rPr sz="700" b="1" i="0">
                 <a:solidFill>
                   <a:srgbClr val="F2F2F2"/>
                 </a:solidFill>
@@ -38830,7 +38830,7 @@
               </a:spcAft>
             </a:pPr>
             <a:r>
-              <a:rPr sz="520" b="0" i="0">
+              <a:rPr sz="700" b="0" i="0">
                 <a:solidFill>
                   <a:srgbClr val="B3B3B3"/>
                 </a:solidFill>
@@ -38953,7 +38953,7 @@
           <a:p>
             <a:pPr algn="ctr"/>
             <a:r>
-              <a:rPr sz="660" b="1" i="0">
+              <a:rPr sz="700" b="1" i="0">
                 <a:solidFill>
                   <a:srgbClr val="F2F2F2"/>
                 </a:solidFill>
@@ -38987,7 +38987,7 @@
           <a:lstStyle/>
           <a:p>
             <a:r>
-              <a:rPr sz="580" b="1" i="0">
+              <a:rPr sz="700" b="1" i="0">
                 <a:solidFill>
                   <a:srgbClr val="F2F2F2"/>
                 </a:solidFill>
@@ -39026,7 +39026,7 @@
               </a:spcAft>
             </a:pPr>
             <a:r>
-              <a:rPr sz="520" b="0" i="0">
+              <a:rPr sz="700" b="0" i="0">
                 <a:solidFill>
                   <a:srgbClr val="B3B3B3"/>
                 </a:solidFill>
@@ -39149,7 +39149,7 @@
           <a:p>
             <a:pPr algn="ctr"/>
             <a:r>
-              <a:rPr sz="660" b="1" i="0">
+              <a:rPr sz="700" b="1" i="0">
                 <a:solidFill>
                   <a:srgbClr val="F2F2F2"/>
                 </a:solidFill>
@@ -39183,7 +39183,7 @@
           <a:lstStyle/>
           <a:p>
             <a:r>
-              <a:rPr sz="540" b="1" i="0">
+              <a:rPr sz="700" b="1" i="0">
                 <a:solidFill>
                   <a:srgbClr val="F2F2F2"/>
                 </a:solidFill>
@@ -39306,7 +39306,7 @@
           <a:p>
             <a:pPr algn="ctr"/>
             <a:r>
-              <a:rPr sz="660" b="1" i="0">
+              <a:rPr sz="700" b="1" i="0">
                 <a:solidFill>
                   <a:srgbClr val="F2F2F2"/>
                 </a:solidFill>
@@ -39340,7 +39340,7 @@
           <a:lstStyle/>
           <a:p>
             <a:r>
-              <a:rPr sz="540" b="1" i="0">
+              <a:rPr sz="700" b="1" i="0">
                 <a:solidFill>
                   <a:srgbClr val="F2F2F2"/>
                 </a:solidFill>
@@ -39683,7 +39683,7 @@
         </p:nvCxnSpPr>
         <p:spPr>
           <a:xfrm>
-            <a:off x="11475719" y="1668780"/>
+            <a:off x="11475719" y="1687068"/>
             <a:ext cx="246889" cy="0"/>
           </a:xfrm>
           <a:prstGeom prst="line">
@@ -39718,8 +39718,8 @@
         </p:nvCxnSpPr>
         <p:spPr>
           <a:xfrm>
-            <a:off x="11722608" y="1668780"/>
-            <a:ext cx="0" cy="2775204"/>
+            <a:off x="11722608" y="1687068"/>
+            <a:ext cx="0" cy="2756916"/>
           </a:xfrm>
           <a:prstGeom prst="line">
             <a:avLst/>
@@ -39894,8 +39894,8 @@
         </p:nvCxnSpPr>
         <p:spPr>
           <a:xfrm flipV="1">
-            <a:off x="301752" y="1883664"/>
-            <a:ext cx="0" cy="3849624"/>
+            <a:off x="301752" y="1920240"/>
+            <a:ext cx="0" cy="3813048"/>
           </a:xfrm>
           <a:prstGeom prst="line">
             <a:avLst/>
@@ -39929,7 +39929,7 @@
         </p:nvCxnSpPr>
         <p:spPr>
           <a:xfrm>
-            <a:off x="301752" y="1883664"/>
+            <a:off x="301752" y="1920240"/>
             <a:ext cx="246888" cy="0"/>
           </a:xfrm>
           <a:prstGeom prst="line">
@@ -40027,7 +40027,7 @@
           <a:p>
             <a:pPr algn="ctr"/>
             <a:r>
-              <a:rPr sz="459" b="1" i="0" spc="80">
+              <a:rPr sz="700" b="1" i="0" spc="80">
                 <a:solidFill>
                   <a:srgbClr val="F2F2F2"/>
                 </a:solidFill>
@@ -40066,7 +40066,7 @@
               </a:spcAft>
             </a:pPr>
             <a:r>
-              <a:rPr sz="620" b="1" i="0" spc="120">
+              <a:rPr sz="700" b="1" i="0" spc="120">
                 <a:solidFill>
                   <a:srgbClr val="F2F2F2"/>
                 </a:solidFill>
@@ -40082,7 +40082,7 @@
               </a:spcAft>
             </a:pPr>
             <a:r>
-              <a:rPr sz="500" b="0" i="0">
+              <a:rPr sz="700" b="0" i="0">
                 <a:solidFill>
                   <a:srgbClr val="8C8C8C"/>
                 </a:solidFill>
@@ -40211,7 +40211,7 @@
           <a:lstStyle/>
           <a:p>
             <a:r>
-              <a:rPr sz="580" b="0" i="0">
+              <a:rPr sz="700" b="0" i="0">
                 <a:solidFill>
                   <a:srgbClr val="F2F2F2"/>
                 </a:solidFill>
@@ -40340,7 +40340,7 @@
           <a:lstStyle/>
           <a:p>
             <a:r>
-              <a:rPr sz="580" b="0" i="0">
+              <a:rPr sz="700" b="0" i="0">
                 <a:solidFill>
                   <a:srgbClr val="F2F2F2"/>
                 </a:solidFill>
@@ -40469,7 +40469,7 @@
           <a:lstStyle/>
           <a:p>
             <a:r>
-              <a:rPr sz="580" b="0" i="0">
+              <a:rPr sz="700" b="0" i="0">
                 <a:solidFill>
                   <a:srgbClr val="F2F2F2"/>
                 </a:solidFill>
@@ -40598,7 +40598,7 @@
           <a:lstStyle/>
           <a:p>
             <a:r>
-              <a:rPr sz="580" b="0" i="0">
+              <a:rPr sz="700" b="0" i="0">
                 <a:solidFill>
                   <a:srgbClr val="F2F2F2"/>
                 </a:solidFill>
@@ -40727,7 +40727,7 @@
           <a:lstStyle/>
           <a:p>
             <a:r>
-              <a:rPr sz="580" b="0" i="0">
+              <a:rPr sz="700" b="0" i="0">
                 <a:solidFill>
                   <a:srgbClr val="F2F2F2"/>
                 </a:solidFill>
@@ -40856,7 +40856,7 @@
           <a:lstStyle/>
           <a:p>
             <a:r>
-              <a:rPr sz="580" b="0" i="0">
+              <a:rPr sz="700" b="0" i="0">
                 <a:solidFill>
                   <a:srgbClr val="F2F2F2"/>
                 </a:solidFill>
@@ -40985,7 +40985,7 @@
           <a:lstStyle/>
           <a:p>
             <a:r>
-              <a:rPr sz="580" b="0" i="0">
+              <a:rPr sz="700" b="0" i="0">
                 <a:solidFill>
                   <a:srgbClr val="F2F2F2"/>
                 </a:solidFill>
@@ -41189,7 +41189,7 @@
           <a:lstStyle/>
           <a:p>
             <a:r>
-              <a:rPr sz="620" b="1" i="0">
+              <a:rPr sz="700" b="1" i="0">
                 <a:solidFill>
                   <a:srgbClr val="F2F2F2"/>
                 </a:solidFill>
@@ -41198,7 +41198,7 @@
               <a:t>PHASE 0  </a:t>
             </a:r>
             <a:r>
-              <a:rPr sz="620" b="1" i="0">
+              <a:rPr sz="700" b="1" i="0">
                 <a:solidFill>
                   <a:srgbClr val="F2F2F2"/>
                 </a:solidFill>
@@ -41278,7 +41278,7 @@
           <a:lstStyle/>
           <a:p>
             <a:r>
-              <a:rPr sz="480" b="1" i="0" spc="100">
+              <a:rPr sz="700" b="1" i="0" spc="100">
                 <a:solidFill>
                   <a:srgbClr val="8C8C8C"/>
                 </a:solidFill>
@@ -41359,7 +41359,7 @@
           <a:p>
             <a:pPr algn="ctr"/>
             <a:r>
-              <a:rPr sz="640" b="1" i="0">
+              <a:rPr sz="740" b="1" i="0">
                 <a:solidFill>
                   <a:srgbClr val="F2F2F2"/>
                 </a:solidFill>
@@ -41378,8 +41378,8 @@
         </p:nvSpPr>
         <p:spPr>
           <a:xfrm>
-            <a:off x="521208" y="2221991"/>
-            <a:ext cx="54864" cy="54864"/>
+            <a:off x="502920" y="2240279"/>
+            <a:ext cx="64008" cy="64008"/>
           </a:xfrm>
           <a:prstGeom prst="ellipse">
             <a:avLst/>
@@ -41420,8 +41420,8 @@
         </p:nvSpPr>
         <p:spPr>
           <a:xfrm>
-            <a:off x="630936" y="2157984"/>
-            <a:ext cx="1268403" cy="365760"/>
+            <a:off x="612648" y="2157984"/>
+            <a:ext cx="1304979" cy="420623"/>
           </a:xfrm>
           <a:prstGeom prst="rect">
             <a:avLst/>
@@ -41435,9 +41435,9 @@
           <a:lstStyle/>
           <a:p>
             <a:r>
-              <a:rPr sz="580" b="0" i="0">
-                <a:solidFill>
-                  <a:srgbClr val="B3B3B3"/>
+              <a:rPr sz="700" b="0" i="0">
+                <a:solidFill>
+                  <a:srgbClr val="F2F2F2"/>
                 </a:solidFill>
                 <a:latin typeface="Trenda IG Text"/>
               </a:rPr>
@@ -41454,8 +41454,8 @@
         </p:nvSpPr>
         <p:spPr>
           <a:xfrm>
-            <a:off x="521208" y="2606039"/>
-            <a:ext cx="54864" cy="54864"/>
+            <a:off x="502920" y="2679191"/>
+            <a:ext cx="64008" cy="64008"/>
           </a:xfrm>
           <a:prstGeom prst="ellipse">
             <a:avLst/>
@@ -41496,8 +41496,8 @@
         </p:nvSpPr>
         <p:spPr>
           <a:xfrm>
-            <a:off x="630936" y="2542032"/>
-            <a:ext cx="1268403" cy="365760"/>
+            <a:off x="612648" y="2596896"/>
+            <a:ext cx="1304979" cy="420623"/>
           </a:xfrm>
           <a:prstGeom prst="rect">
             <a:avLst/>
@@ -41511,9 +41511,9 @@
           <a:lstStyle/>
           <a:p>
             <a:r>
-              <a:rPr sz="580" b="0" i="0">
-                <a:solidFill>
-                  <a:srgbClr val="B3B3B3"/>
+              <a:rPr sz="700" b="0" i="0">
+                <a:solidFill>
+                  <a:srgbClr val="F2F2F2"/>
                 </a:solidFill>
                 <a:latin typeface="Trenda IG Text"/>
               </a:rPr>
@@ -41530,8 +41530,8 @@
         </p:nvSpPr>
         <p:spPr>
           <a:xfrm>
-            <a:off x="521208" y="2990087"/>
-            <a:ext cx="54864" cy="54864"/>
+            <a:off x="502920" y="3118103"/>
+            <a:ext cx="64008" cy="64008"/>
           </a:xfrm>
           <a:prstGeom prst="ellipse">
             <a:avLst/>
@@ -41572,8 +41572,8 @@
         </p:nvSpPr>
         <p:spPr>
           <a:xfrm>
-            <a:off x="630936" y="2926079"/>
-            <a:ext cx="1268403" cy="365760"/>
+            <a:off x="612648" y="3035808"/>
+            <a:ext cx="1304979" cy="420623"/>
           </a:xfrm>
           <a:prstGeom prst="rect">
             <a:avLst/>
@@ -41587,9 +41587,9 @@
           <a:lstStyle/>
           <a:p>
             <a:r>
-              <a:rPr sz="580" b="0" i="0">
-                <a:solidFill>
-                  <a:srgbClr val="B3B3B3"/>
+              <a:rPr sz="700" b="0" i="0">
+                <a:solidFill>
+                  <a:srgbClr val="F2F2F2"/>
                 </a:solidFill>
                 <a:latin typeface="Trenda IG Text"/>
               </a:rPr>
@@ -41606,8 +41606,8 @@
         </p:nvSpPr>
         <p:spPr>
           <a:xfrm>
-            <a:off x="521208" y="3374136"/>
-            <a:ext cx="54864" cy="54864"/>
+            <a:off x="502920" y="3557015"/>
+            <a:ext cx="64008" cy="64008"/>
           </a:xfrm>
           <a:prstGeom prst="ellipse">
             <a:avLst/>
@@ -41648,8 +41648,8 @@
         </p:nvSpPr>
         <p:spPr>
           <a:xfrm>
-            <a:off x="630936" y="3310128"/>
-            <a:ext cx="1268403" cy="365760"/>
+            <a:off x="612648" y="3474720"/>
+            <a:ext cx="1304979" cy="420623"/>
           </a:xfrm>
           <a:prstGeom prst="rect">
             <a:avLst/>
@@ -41663,9 +41663,9 @@
           <a:lstStyle/>
           <a:p>
             <a:r>
-              <a:rPr sz="580" b="0" i="0">
-                <a:solidFill>
-                  <a:srgbClr val="B3B3B3"/>
+              <a:rPr sz="700" b="0" i="0">
+                <a:solidFill>
+                  <a:srgbClr val="F2F2F2"/>
                 </a:solidFill>
                 <a:latin typeface="Trenda IG Text"/>
               </a:rPr>
@@ -41682,8 +41682,8 @@
         </p:nvSpPr>
         <p:spPr>
           <a:xfrm>
-            <a:off x="484632" y="4005072"/>
-            <a:ext cx="1414707" cy="585216"/>
+            <a:off x="484632" y="3950208"/>
+            <a:ext cx="1414707" cy="658368"/>
           </a:xfrm>
           <a:prstGeom prst="roundRect">
             <a:avLst>
@@ -41726,8 +41726,8 @@
         </p:nvSpPr>
         <p:spPr>
           <a:xfrm>
-            <a:off x="539496" y="4005072"/>
-            <a:ext cx="1323267" cy="585216"/>
+            <a:off x="539496" y="3950208"/>
+            <a:ext cx="1341555" cy="658368"/>
           </a:xfrm>
           <a:prstGeom prst="rect">
             <a:avLst/>
@@ -41746,7 +41746,7 @@
               </a:spcAft>
             </a:pPr>
             <a:r>
-              <a:rPr sz="520" b="1" i="0">
+              <a:rPr sz="700" b="1" i="0">
                 <a:solidFill>
                   <a:srgbClr val="F2F2F2"/>
                 </a:solidFill>
@@ -41762,7 +41762,7 @@
               </a:spcAft>
             </a:pPr>
             <a:r>
-              <a:rPr sz="600" b="1" i="0">
+              <a:rPr sz="700" b="1" i="0">
                 <a:solidFill>
                   <a:srgbClr val="F2F2F2"/>
                 </a:solidFill>
@@ -41838,7 +41838,7 @@
           <a:lstStyle/>
           <a:p>
             <a:r>
-              <a:rPr sz="620" b="1" i="0">
+              <a:rPr sz="700" b="1" i="0">
                 <a:solidFill>
                   <a:srgbClr val="F2F2F2"/>
                 </a:solidFill>
@@ -41847,7 +41847,7 @@
               <a:t>PHASE 1  </a:t>
             </a:r>
             <a:r>
-              <a:rPr sz="620" b="1" i="0">
+              <a:rPr sz="700" b="1" i="0">
                 <a:solidFill>
                   <a:srgbClr val="F2F2F2"/>
                 </a:solidFill>
@@ -41927,7 +41927,7 @@
           <a:lstStyle/>
           <a:p>
             <a:r>
-              <a:rPr sz="480" b="1" i="0" spc="100">
+              <a:rPr sz="700" b="1" i="0" spc="100">
                 <a:solidFill>
                   <a:srgbClr val="8C8C8C"/>
                 </a:solidFill>
@@ -42008,7 +42008,7 @@
           <a:p>
             <a:pPr algn="ctr"/>
             <a:r>
-              <a:rPr sz="640" b="1" i="0">
+              <a:rPr sz="740" b="1" i="0">
                 <a:solidFill>
                   <a:srgbClr val="F2F2F2"/>
                 </a:solidFill>
@@ -42027,8 +42027,8 @@
         </p:nvSpPr>
         <p:spPr>
           <a:xfrm>
-            <a:off x="2155371" y="2221991"/>
-            <a:ext cx="54864" cy="54864"/>
+            <a:off x="2137083" y="2240279"/>
+            <a:ext cx="64008" cy="64008"/>
           </a:xfrm>
           <a:prstGeom prst="ellipse">
             <a:avLst/>
@@ -42069,8 +42069,8 @@
         </p:nvSpPr>
         <p:spPr>
           <a:xfrm>
-            <a:off x="2265099" y="2157984"/>
-            <a:ext cx="1268403" cy="365760"/>
+            <a:off x="2246811" y="2157984"/>
+            <a:ext cx="1304979" cy="420623"/>
           </a:xfrm>
           <a:prstGeom prst="rect">
             <a:avLst/>
@@ -42084,9 +42084,9 @@
           <a:lstStyle/>
           <a:p>
             <a:r>
-              <a:rPr sz="580" b="0" i="0">
-                <a:solidFill>
-                  <a:srgbClr val="B3B3B3"/>
+              <a:rPr sz="700" b="0" i="0">
+                <a:solidFill>
+                  <a:srgbClr val="F2F2F2"/>
                 </a:solidFill>
                 <a:latin typeface="Trenda IG Text"/>
               </a:rPr>
@@ -42103,8 +42103,8 @@
         </p:nvSpPr>
         <p:spPr>
           <a:xfrm>
-            <a:off x="2155371" y="2606039"/>
-            <a:ext cx="54864" cy="54864"/>
+            <a:off x="2137083" y="2679191"/>
+            <a:ext cx="64008" cy="64008"/>
           </a:xfrm>
           <a:prstGeom prst="ellipse">
             <a:avLst/>
@@ -42145,8 +42145,8 @@
         </p:nvSpPr>
         <p:spPr>
           <a:xfrm>
-            <a:off x="2265099" y="2542032"/>
-            <a:ext cx="1268403" cy="365760"/>
+            <a:off x="2246811" y="2596896"/>
+            <a:ext cx="1304979" cy="420623"/>
           </a:xfrm>
           <a:prstGeom prst="rect">
             <a:avLst/>
@@ -42160,9 +42160,9 @@
           <a:lstStyle/>
           <a:p>
             <a:r>
-              <a:rPr sz="580" b="0" i="0">
-                <a:solidFill>
-                  <a:srgbClr val="B3B3B3"/>
+              <a:rPr sz="700" b="0" i="0">
+                <a:solidFill>
+                  <a:srgbClr val="F2F2F2"/>
                 </a:solidFill>
                 <a:latin typeface="Trenda IG Text"/>
               </a:rPr>
@@ -42179,8 +42179,8 @@
         </p:nvSpPr>
         <p:spPr>
           <a:xfrm>
-            <a:off x="2155371" y="2990087"/>
-            <a:ext cx="54864" cy="54864"/>
+            <a:off x="2137083" y="3118103"/>
+            <a:ext cx="64008" cy="64008"/>
           </a:xfrm>
           <a:prstGeom prst="ellipse">
             <a:avLst/>
@@ -42221,8 +42221,8 @@
         </p:nvSpPr>
         <p:spPr>
           <a:xfrm>
-            <a:off x="2265099" y="2926079"/>
-            <a:ext cx="1268403" cy="365760"/>
+            <a:off x="2246811" y="3035808"/>
+            <a:ext cx="1304979" cy="420623"/>
           </a:xfrm>
           <a:prstGeom prst="rect">
             <a:avLst/>
@@ -42236,9 +42236,9 @@
           <a:lstStyle/>
           <a:p>
             <a:r>
-              <a:rPr sz="580" b="0" i="0">
-                <a:solidFill>
-                  <a:srgbClr val="B3B3B3"/>
+              <a:rPr sz="700" b="0" i="0">
+                <a:solidFill>
+                  <a:srgbClr val="F2F2F2"/>
                 </a:solidFill>
                 <a:latin typeface="Trenda IG Text"/>
               </a:rPr>
@@ -42255,8 +42255,8 @@
         </p:nvSpPr>
         <p:spPr>
           <a:xfrm>
-            <a:off x="2155371" y="3374136"/>
-            <a:ext cx="54864" cy="54864"/>
+            <a:off x="2137083" y="3557015"/>
+            <a:ext cx="64008" cy="64008"/>
           </a:xfrm>
           <a:prstGeom prst="ellipse">
             <a:avLst/>
@@ -42297,8 +42297,8 @@
         </p:nvSpPr>
         <p:spPr>
           <a:xfrm>
-            <a:off x="2265099" y="3310128"/>
-            <a:ext cx="1268403" cy="365760"/>
+            <a:off x="2246811" y="3474720"/>
+            <a:ext cx="1304979" cy="420623"/>
           </a:xfrm>
           <a:prstGeom prst="rect">
             <a:avLst/>
@@ -42312,9 +42312,9 @@
           <a:lstStyle/>
           <a:p>
             <a:r>
-              <a:rPr sz="580" b="0" i="0">
-                <a:solidFill>
-                  <a:srgbClr val="B3B3B3"/>
+              <a:rPr sz="700" b="0" i="0">
+                <a:solidFill>
+                  <a:srgbClr val="F2F2F2"/>
                 </a:solidFill>
                 <a:latin typeface="Trenda IG Text"/>
               </a:rPr>
@@ -42331,8 +42331,8 @@
         </p:nvSpPr>
         <p:spPr>
           <a:xfrm>
-            <a:off x="2118795" y="4005072"/>
-            <a:ext cx="1414707" cy="585216"/>
+            <a:off x="2118795" y="3950208"/>
+            <a:ext cx="1414707" cy="658368"/>
           </a:xfrm>
           <a:prstGeom prst="roundRect">
             <a:avLst>
@@ -42375,8 +42375,8 @@
         </p:nvSpPr>
         <p:spPr>
           <a:xfrm>
-            <a:off x="2173659" y="4005072"/>
-            <a:ext cx="1323267" cy="585216"/>
+            <a:off x="2173659" y="3950208"/>
+            <a:ext cx="1341555" cy="658368"/>
           </a:xfrm>
           <a:prstGeom prst="rect">
             <a:avLst/>
@@ -42395,7 +42395,7 @@
               </a:spcAft>
             </a:pPr>
             <a:r>
-              <a:rPr sz="520" b="1" i="0">
+              <a:rPr sz="700" b="1" i="0">
                 <a:solidFill>
                   <a:srgbClr val="F2F2F2"/>
                 </a:solidFill>
@@ -42411,7 +42411,7 @@
               </a:spcAft>
             </a:pPr>
             <a:r>
-              <a:rPr sz="600" b="1" i="0">
+              <a:rPr sz="700" b="1" i="0">
                 <a:solidFill>
                   <a:srgbClr val="F2F2F2"/>
                 </a:solidFill>
@@ -42487,7 +42487,7 @@
           <a:lstStyle/>
           <a:p>
             <a:r>
-              <a:rPr sz="620" b="1" i="0">
+              <a:rPr sz="700" b="1" i="0">
                 <a:solidFill>
                   <a:srgbClr val="F2F2F2"/>
                 </a:solidFill>
@@ -42496,7 +42496,7 @@
               <a:t>PHASE 2  </a:t>
             </a:r>
             <a:r>
-              <a:rPr sz="620" b="1" i="0">
+              <a:rPr sz="700" b="1" i="0">
                 <a:solidFill>
                   <a:srgbClr val="F2F2F2"/>
                 </a:solidFill>
@@ -42576,7 +42576,7 @@
           <a:lstStyle/>
           <a:p>
             <a:r>
-              <a:rPr sz="480" b="1" i="0" spc="100">
+              <a:rPr sz="700" b="1" i="0" spc="100">
                 <a:solidFill>
                   <a:srgbClr val="8C8C8C"/>
                 </a:solidFill>
@@ -42657,7 +42657,7 @@
           <a:p>
             <a:pPr algn="ctr"/>
             <a:r>
-              <a:rPr sz="640" b="1" i="0">
+              <a:rPr sz="740" b="1" i="0">
                 <a:solidFill>
                   <a:srgbClr val="F2F2F2"/>
                 </a:solidFill>
@@ -42676,8 +42676,8 @@
         </p:nvSpPr>
         <p:spPr>
           <a:xfrm>
-            <a:off x="3789534" y="2221991"/>
-            <a:ext cx="54864" cy="54864"/>
+            <a:off x="3771246" y="2240279"/>
+            <a:ext cx="64008" cy="64008"/>
           </a:xfrm>
           <a:prstGeom prst="ellipse">
             <a:avLst/>
@@ -42718,8 +42718,8 @@
         </p:nvSpPr>
         <p:spPr>
           <a:xfrm>
-            <a:off x="3899262" y="2157984"/>
-            <a:ext cx="1268403" cy="365760"/>
+            <a:off x="3880974" y="2157984"/>
+            <a:ext cx="1304979" cy="548640"/>
           </a:xfrm>
           <a:prstGeom prst="rect">
             <a:avLst/>
@@ -42733,9 +42733,9 @@
           <a:lstStyle/>
           <a:p>
             <a:r>
-              <a:rPr sz="580" b="0" i="0">
-                <a:solidFill>
-                  <a:srgbClr val="B3B3B3"/>
+              <a:rPr sz="700" b="0" i="0">
+                <a:solidFill>
+                  <a:srgbClr val="F2F2F2"/>
                 </a:solidFill>
                 <a:latin typeface="Trenda IG Text"/>
               </a:rPr>
@@ -42752,8 +42752,8 @@
         </p:nvSpPr>
         <p:spPr>
           <a:xfrm>
-            <a:off x="3789534" y="2606039"/>
-            <a:ext cx="54864" cy="54864"/>
+            <a:off x="3771246" y="2807208"/>
+            <a:ext cx="64008" cy="64008"/>
           </a:xfrm>
           <a:prstGeom prst="ellipse">
             <a:avLst/>
@@ -42794,8 +42794,8 @@
         </p:nvSpPr>
         <p:spPr>
           <a:xfrm>
-            <a:off x="3899262" y="2542032"/>
-            <a:ext cx="1268403" cy="365760"/>
+            <a:off x="3880974" y="2724912"/>
+            <a:ext cx="1304979" cy="548640"/>
           </a:xfrm>
           <a:prstGeom prst="rect">
             <a:avLst/>
@@ -42809,9 +42809,9 @@
           <a:lstStyle/>
           <a:p>
             <a:r>
-              <a:rPr sz="580" b="0" i="0">
-                <a:solidFill>
-                  <a:srgbClr val="B3B3B3"/>
+              <a:rPr sz="700" b="0" i="0">
+                <a:solidFill>
+                  <a:srgbClr val="F2F2F2"/>
                 </a:solidFill>
                 <a:latin typeface="Trenda IG Text"/>
               </a:rPr>
@@ -42828,8 +42828,8 @@
         </p:nvSpPr>
         <p:spPr>
           <a:xfrm>
-            <a:off x="3789534" y="2990087"/>
-            <a:ext cx="54864" cy="54864"/>
+            <a:off x="3771246" y="3374135"/>
+            <a:ext cx="64008" cy="64008"/>
           </a:xfrm>
           <a:prstGeom prst="ellipse">
             <a:avLst/>
@@ -42870,8 +42870,8 @@
         </p:nvSpPr>
         <p:spPr>
           <a:xfrm>
-            <a:off x="3899262" y="2926079"/>
-            <a:ext cx="1268403" cy="365760"/>
+            <a:off x="3880974" y="3291839"/>
+            <a:ext cx="1304979" cy="548640"/>
           </a:xfrm>
           <a:prstGeom prst="rect">
             <a:avLst/>
@@ -42885,9 +42885,9 @@
           <a:lstStyle/>
           <a:p>
             <a:r>
-              <a:rPr sz="580" b="0" i="0">
-                <a:solidFill>
-                  <a:srgbClr val="B3B3B3"/>
+              <a:rPr sz="700" b="0" i="0">
+                <a:solidFill>
+                  <a:srgbClr val="F2F2F2"/>
                 </a:solidFill>
                 <a:latin typeface="Trenda IG Text"/>
               </a:rPr>
@@ -42904,8 +42904,8 @@
         </p:nvSpPr>
         <p:spPr>
           <a:xfrm>
-            <a:off x="3752958" y="4005072"/>
-            <a:ext cx="1414707" cy="585216"/>
+            <a:off x="3752958" y="3950208"/>
+            <a:ext cx="1414707" cy="658368"/>
           </a:xfrm>
           <a:prstGeom prst="roundRect">
             <a:avLst>
@@ -42948,8 +42948,8 @@
         </p:nvSpPr>
         <p:spPr>
           <a:xfrm>
-            <a:off x="3807822" y="4005072"/>
-            <a:ext cx="1323267" cy="585216"/>
+            <a:off x="3807822" y="3950208"/>
+            <a:ext cx="1341555" cy="658368"/>
           </a:xfrm>
           <a:prstGeom prst="rect">
             <a:avLst/>
@@ -42968,7 +42968,7 @@
               </a:spcAft>
             </a:pPr>
             <a:r>
-              <a:rPr sz="520" b="1" i="0">
+              <a:rPr sz="700" b="1" i="0">
                 <a:solidFill>
                   <a:srgbClr val="F2F2F2"/>
                 </a:solidFill>
@@ -42984,7 +42984,7 @@
               </a:spcAft>
             </a:pPr>
             <a:r>
-              <a:rPr sz="600" b="1" i="0">
+              <a:rPr sz="700" b="1" i="0">
                 <a:solidFill>
                   <a:srgbClr val="F2F2F2"/>
                 </a:solidFill>
@@ -43060,7 +43060,7 @@
           <a:lstStyle/>
           <a:p>
             <a:r>
-              <a:rPr sz="620" b="1" i="0">
+              <a:rPr sz="700" b="1" i="0">
                 <a:solidFill>
                   <a:srgbClr val="F2F2F2"/>
                 </a:solidFill>
@@ -43069,7 +43069,7 @@
               <a:t>PHASE 3  </a:t>
             </a:r>
             <a:r>
-              <a:rPr sz="620" b="1" i="0">
+              <a:rPr sz="700" b="1" i="0">
                 <a:solidFill>
                   <a:srgbClr val="F2F2F2"/>
                 </a:solidFill>
@@ -43149,7 +43149,7 @@
           <a:lstStyle/>
           <a:p>
             <a:r>
-              <a:rPr sz="480" b="1" i="0" spc="100">
+              <a:rPr sz="700" b="1" i="0" spc="100">
                 <a:solidFill>
                   <a:srgbClr val="8C8C8C"/>
                 </a:solidFill>
@@ -43230,7 +43230,7 @@
           <a:p>
             <a:pPr algn="ctr"/>
             <a:r>
-              <a:rPr sz="640" b="1" i="0">
+              <a:rPr sz="740" b="1" i="0">
                 <a:solidFill>
                   <a:srgbClr val="F2F2F2"/>
                 </a:solidFill>
@@ -43249,8 +43249,8 @@
         </p:nvSpPr>
         <p:spPr>
           <a:xfrm>
-            <a:off x="5423698" y="2221991"/>
-            <a:ext cx="54864" cy="54864"/>
+            <a:off x="5405410" y="2240279"/>
+            <a:ext cx="64008" cy="64008"/>
           </a:xfrm>
           <a:prstGeom prst="ellipse">
             <a:avLst/>
@@ -43291,8 +43291,8 @@
         </p:nvSpPr>
         <p:spPr>
           <a:xfrm>
-            <a:off x="5533426" y="2157984"/>
-            <a:ext cx="1268403" cy="365760"/>
+            <a:off x="5515138" y="2157984"/>
+            <a:ext cx="1304979" cy="548640"/>
           </a:xfrm>
           <a:prstGeom prst="rect">
             <a:avLst/>
@@ -43306,9 +43306,9 @@
           <a:lstStyle/>
           <a:p>
             <a:r>
-              <a:rPr sz="580" b="0" i="0">
-                <a:solidFill>
-                  <a:srgbClr val="B3B3B3"/>
+              <a:rPr sz="700" b="0" i="0">
+                <a:solidFill>
+                  <a:srgbClr val="F2F2F2"/>
                 </a:solidFill>
                 <a:latin typeface="Trenda IG Text"/>
               </a:rPr>
@@ -43325,8 +43325,8 @@
         </p:nvSpPr>
         <p:spPr>
           <a:xfrm>
-            <a:off x="5423698" y="2606039"/>
-            <a:ext cx="54864" cy="54864"/>
+            <a:off x="5405410" y="2807208"/>
+            <a:ext cx="64008" cy="64008"/>
           </a:xfrm>
           <a:prstGeom prst="ellipse">
             <a:avLst/>
@@ -43367,8 +43367,8 @@
         </p:nvSpPr>
         <p:spPr>
           <a:xfrm>
-            <a:off x="5533426" y="2542032"/>
-            <a:ext cx="1268403" cy="365760"/>
+            <a:off x="5515138" y="2724912"/>
+            <a:ext cx="1304979" cy="548640"/>
           </a:xfrm>
           <a:prstGeom prst="rect">
             <a:avLst/>
@@ -43382,9 +43382,9 @@
           <a:lstStyle/>
           <a:p>
             <a:r>
-              <a:rPr sz="580" b="0" i="0">
-                <a:solidFill>
-                  <a:srgbClr val="B3B3B3"/>
+              <a:rPr sz="700" b="0" i="0">
+                <a:solidFill>
+                  <a:srgbClr val="F2F2F2"/>
                 </a:solidFill>
                 <a:latin typeface="Trenda IG Text"/>
               </a:rPr>
@@ -43401,8 +43401,8 @@
         </p:nvSpPr>
         <p:spPr>
           <a:xfrm>
-            <a:off x="5423698" y="2990087"/>
-            <a:ext cx="54864" cy="54864"/>
+            <a:off x="5405410" y="3374135"/>
+            <a:ext cx="64008" cy="64008"/>
           </a:xfrm>
           <a:prstGeom prst="ellipse">
             <a:avLst/>
@@ -43443,8 +43443,8 @@
         </p:nvSpPr>
         <p:spPr>
           <a:xfrm>
-            <a:off x="5533426" y="2926079"/>
-            <a:ext cx="1268403" cy="365760"/>
+            <a:off x="5515138" y="3291839"/>
+            <a:ext cx="1304979" cy="548640"/>
           </a:xfrm>
           <a:prstGeom prst="rect">
             <a:avLst/>
@@ -43458,9 +43458,9 @@
           <a:lstStyle/>
           <a:p>
             <a:r>
-              <a:rPr sz="580" b="0" i="0">
-                <a:solidFill>
-                  <a:srgbClr val="B3B3B3"/>
+              <a:rPr sz="700" b="0" i="0">
+                <a:solidFill>
+                  <a:srgbClr val="F2F2F2"/>
                 </a:solidFill>
                 <a:latin typeface="Trenda IG Text"/>
               </a:rPr>
@@ -43477,8 +43477,8 @@
         </p:nvSpPr>
         <p:spPr>
           <a:xfrm>
-            <a:off x="5387122" y="4005072"/>
-            <a:ext cx="1414707" cy="585216"/>
+            <a:off x="5387122" y="3950208"/>
+            <a:ext cx="1414707" cy="658368"/>
           </a:xfrm>
           <a:prstGeom prst="roundRect">
             <a:avLst>
@@ -43521,8 +43521,8 @@
         </p:nvSpPr>
         <p:spPr>
           <a:xfrm>
-            <a:off x="5441986" y="4005072"/>
-            <a:ext cx="1323267" cy="585216"/>
+            <a:off x="5441986" y="3950208"/>
+            <a:ext cx="1341555" cy="658368"/>
           </a:xfrm>
           <a:prstGeom prst="rect">
             <a:avLst/>
@@ -43541,7 +43541,7 @@
               </a:spcAft>
             </a:pPr>
             <a:r>
-              <a:rPr sz="520" b="1" i="0">
+              <a:rPr sz="700" b="1" i="0">
                 <a:solidFill>
                   <a:srgbClr val="F2F2F2"/>
                 </a:solidFill>
@@ -43557,7 +43557,7 @@
               </a:spcAft>
             </a:pPr>
             <a:r>
-              <a:rPr sz="600" b="1" i="0">
+              <a:rPr sz="700" b="1" i="0">
                 <a:solidFill>
                   <a:srgbClr val="F2F2F2"/>
                 </a:solidFill>
@@ -43633,7 +43633,7 @@
           <a:lstStyle/>
           <a:p>
             <a:r>
-              <a:rPr sz="620" b="1" i="0">
+              <a:rPr sz="700" b="1" i="0">
                 <a:solidFill>
                   <a:srgbClr val="F2F2F2"/>
                 </a:solidFill>
@@ -43642,7 +43642,7 @@
               <a:t>PHASE 4  </a:t>
             </a:r>
             <a:r>
-              <a:rPr sz="620" b="1" i="0">
+              <a:rPr sz="700" b="1" i="0">
                 <a:solidFill>
                   <a:srgbClr val="F2F2F2"/>
                 </a:solidFill>
@@ -43722,7 +43722,7 @@
           <a:lstStyle/>
           <a:p>
             <a:r>
-              <a:rPr sz="480" b="1" i="0" spc="100">
+              <a:rPr sz="700" b="1" i="0" spc="100">
                 <a:solidFill>
                   <a:srgbClr val="8C8C8C"/>
                 </a:solidFill>
@@ -43803,7 +43803,7 @@
           <a:p>
             <a:pPr algn="ctr"/>
             <a:r>
-              <a:rPr sz="640" b="1" i="0">
+              <a:rPr sz="740" b="1" i="0">
                 <a:solidFill>
                   <a:srgbClr val="F2F2F2"/>
                 </a:solidFill>
@@ -43822,8 +43822,8 @@
         </p:nvSpPr>
         <p:spPr>
           <a:xfrm>
-            <a:off x="7057861" y="2221991"/>
-            <a:ext cx="54864" cy="54864"/>
+            <a:off x="7039573" y="2240279"/>
+            <a:ext cx="64008" cy="64008"/>
           </a:xfrm>
           <a:prstGeom prst="ellipse">
             <a:avLst/>
@@ -43864,8 +43864,8 @@
         </p:nvSpPr>
         <p:spPr>
           <a:xfrm>
-            <a:off x="7167589" y="2157984"/>
-            <a:ext cx="1268403" cy="365760"/>
+            <a:off x="7149301" y="2157984"/>
+            <a:ext cx="1304979" cy="548640"/>
           </a:xfrm>
           <a:prstGeom prst="rect">
             <a:avLst/>
@@ -43879,9 +43879,9 @@
           <a:lstStyle/>
           <a:p>
             <a:r>
-              <a:rPr sz="580" b="0" i="0">
-                <a:solidFill>
-                  <a:srgbClr val="B3B3B3"/>
+              <a:rPr sz="700" b="0" i="0">
+                <a:solidFill>
+                  <a:srgbClr val="F2F2F2"/>
                 </a:solidFill>
                 <a:latin typeface="Trenda IG Text"/>
               </a:rPr>
@@ -43898,8 +43898,8 @@
         </p:nvSpPr>
         <p:spPr>
           <a:xfrm>
-            <a:off x="7057861" y="2606039"/>
-            <a:ext cx="54864" cy="54864"/>
+            <a:off x="7039573" y="2807208"/>
+            <a:ext cx="64008" cy="64008"/>
           </a:xfrm>
           <a:prstGeom prst="ellipse">
             <a:avLst/>
@@ -43940,8 +43940,8 @@
         </p:nvSpPr>
         <p:spPr>
           <a:xfrm>
-            <a:off x="7167589" y="2542032"/>
-            <a:ext cx="1268403" cy="365760"/>
+            <a:off x="7149301" y="2724912"/>
+            <a:ext cx="1304979" cy="548640"/>
           </a:xfrm>
           <a:prstGeom prst="rect">
             <a:avLst/>
@@ -43955,9 +43955,9 @@
           <a:lstStyle/>
           <a:p>
             <a:r>
-              <a:rPr sz="580" b="0" i="0">
-                <a:solidFill>
-                  <a:srgbClr val="B3B3B3"/>
+              <a:rPr sz="700" b="0" i="0">
+                <a:solidFill>
+                  <a:srgbClr val="F2F2F2"/>
                 </a:solidFill>
                 <a:latin typeface="Trenda IG Text"/>
               </a:rPr>
@@ -43974,8 +43974,8 @@
         </p:nvSpPr>
         <p:spPr>
           <a:xfrm>
-            <a:off x="7057861" y="2990087"/>
-            <a:ext cx="54864" cy="54864"/>
+            <a:off x="7039573" y="3374135"/>
+            <a:ext cx="64008" cy="64008"/>
           </a:xfrm>
           <a:prstGeom prst="ellipse">
             <a:avLst/>
@@ -44016,8 +44016,8 @@
         </p:nvSpPr>
         <p:spPr>
           <a:xfrm>
-            <a:off x="7167589" y="2926079"/>
-            <a:ext cx="1268403" cy="365760"/>
+            <a:off x="7149301" y="3291839"/>
+            <a:ext cx="1304979" cy="548640"/>
           </a:xfrm>
           <a:prstGeom prst="rect">
             <a:avLst/>
@@ -44031,9 +44031,9 @@
           <a:lstStyle/>
           <a:p>
             <a:r>
-              <a:rPr sz="580" b="0" i="0">
-                <a:solidFill>
-                  <a:srgbClr val="B3B3B3"/>
+              <a:rPr sz="700" b="0" i="0">
+                <a:solidFill>
+                  <a:srgbClr val="F2F2F2"/>
                 </a:solidFill>
                 <a:latin typeface="Trenda IG Text"/>
               </a:rPr>
@@ -44050,8 +44050,8 @@
         </p:nvSpPr>
         <p:spPr>
           <a:xfrm>
-            <a:off x="7021285" y="4005072"/>
-            <a:ext cx="1414707" cy="585216"/>
+            <a:off x="7021285" y="3950208"/>
+            <a:ext cx="1414707" cy="658368"/>
           </a:xfrm>
           <a:prstGeom prst="roundRect">
             <a:avLst>
@@ -44094,8 +44094,8 @@
         </p:nvSpPr>
         <p:spPr>
           <a:xfrm>
-            <a:off x="7076149" y="4005072"/>
-            <a:ext cx="1323267" cy="585216"/>
+            <a:off x="7076149" y="3950208"/>
+            <a:ext cx="1341555" cy="658368"/>
           </a:xfrm>
           <a:prstGeom prst="rect">
             <a:avLst/>
@@ -44114,7 +44114,7 @@
               </a:spcAft>
             </a:pPr>
             <a:r>
-              <a:rPr sz="520" b="1" i="0">
+              <a:rPr sz="700" b="1" i="0">
                 <a:solidFill>
                   <a:srgbClr val="F2F2F2"/>
                 </a:solidFill>
@@ -44130,7 +44130,7 @@
               </a:spcAft>
             </a:pPr>
             <a:r>
-              <a:rPr sz="600" b="1" i="0">
+              <a:rPr sz="700" b="1" i="0">
                 <a:solidFill>
                   <a:srgbClr val="F2F2F2"/>
                 </a:solidFill>
@@ -44206,7 +44206,7 @@
           <a:lstStyle/>
           <a:p>
             <a:r>
-              <a:rPr sz="620" b="1" i="0">
+              <a:rPr sz="700" b="1" i="0">
                 <a:solidFill>
                   <a:srgbClr val="1A1A1A"/>
                 </a:solidFill>
@@ -44215,7 +44215,7 @@
               <a:t>PHASE 5  </a:t>
             </a:r>
             <a:r>
-              <a:rPr sz="620" b="1" i="0">
+              <a:rPr sz="700" b="1" i="0">
                 <a:solidFill>
                   <a:srgbClr val="1A1A1A"/>
                 </a:solidFill>
@@ -44295,7 +44295,7 @@
           <a:lstStyle/>
           <a:p>
             <a:r>
-              <a:rPr sz="480" b="1" i="0" spc="100">
+              <a:rPr sz="700" b="1" i="0" spc="100">
                 <a:solidFill>
                   <a:srgbClr val="8C8C8C"/>
                 </a:solidFill>
@@ -44376,7 +44376,7 @@
           <a:p>
             <a:pPr algn="ctr"/>
             <a:r>
-              <a:rPr sz="640" b="1" i="0">
+              <a:rPr sz="740" b="1" i="0">
                 <a:solidFill>
                   <a:srgbClr val="F2F2F2"/>
                 </a:solidFill>
@@ -44395,8 +44395,8 @@
         </p:nvSpPr>
         <p:spPr>
           <a:xfrm>
-            <a:off x="8692025" y="2221991"/>
-            <a:ext cx="54864" cy="54864"/>
+            <a:off x="8673737" y="2240279"/>
+            <a:ext cx="64008" cy="64008"/>
           </a:xfrm>
           <a:prstGeom prst="ellipse">
             <a:avLst/>
@@ -44437,8 +44437,8 @@
         </p:nvSpPr>
         <p:spPr>
           <a:xfrm>
-            <a:off x="8801753" y="2157984"/>
-            <a:ext cx="1268403" cy="365760"/>
+            <a:off x="8783465" y="2157984"/>
+            <a:ext cx="1304979" cy="332841"/>
           </a:xfrm>
           <a:prstGeom prst="rect">
             <a:avLst/>
@@ -44452,9 +44452,9 @@
           <a:lstStyle/>
           <a:p>
             <a:r>
-              <a:rPr sz="580" b="0" i="0">
-                <a:solidFill>
-                  <a:srgbClr val="B3B3B3"/>
+              <a:rPr sz="700" b="0" i="0">
+                <a:solidFill>
+                  <a:srgbClr val="F2F2F2"/>
                 </a:solidFill>
                 <a:latin typeface="Trenda IG Text"/>
               </a:rPr>
@@ -44471,8 +44471,8 @@
         </p:nvSpPr>
         <p:spPr>
           <a:xfrm>
-            <a:off x="8692025" y="2606039"/>
-            <a:ext cx="54864" cy="54864"/>
+            <a:off x="8673737" y="2591409"/>
+            <a:ext cx="64008" cy="64008"/>
           </a:xfrm>
           <a:prstGeom prst="ellipse">
             <a:avLst/>
@@ -44513,8 +44513,8 @@
         </p:nvSpPr>
         <p:spPr>
           <a:xfrm>
-            <a:off x="8801753" y="2542032"/>
-            <a:ext cx="1268403" cy="365760"/>
+            <a:off x="8783465" y="2509113"/>
+            <a:ext cx="1304979" cy="332841"/>
           </a:xfrm>
           <a:prstGeom prst="rect">
             <a:avLst/>
@@ -44528,9 +44528,9 @@
           <a:lstStyle/>
           <a:p>
             <a:r>
-              <a:rPr sz="580" b="0" i="0">
-                <a:solidFill>
-                  <a:srgbClr val="B3B3B3"/>
+              <a:rPr sz="700" b="0" i="0">
+                <a:solidFill>
+                  <a:srgbClr val="F2F2F2"/>
                 </a:solidFill>
                 <a:latin typeface="Trenda IG Text"/>
               </a:rPr>
@@ -44547,8 +44547,8 @@
         </p:nvSpPr>
         <p:spPr>
           <a:xfrm>
-            <a:off x="8692025" y="2990087"/>
-            <a:ext cx="54864" cy="54864"/>
+            <a:off x="8673737" y="2942539"/>
+            <a:ext cx="64008" cy="64008"/>
           </a:xfrm>
           <a:prstGeom prst="ellipse">
             <a:avLst/>
@@ -44589,8 +44589,8 @@
         </p:nvSpPr>
         <p:spPr>
           <a:xfrm>
-            <a:off x="8801753" y="2926079"/>
-            <a:ext cx="1268403" cy="365760"/>
+            <a:off x="8783465" y="2860243"/>
+            <a:ext cx="1304979" cy="332841"/>
           </a:xfrm>
           <a:prstGeom prst="rect">
             <a:avLst/>
@@ -44604,9 +44604,9 @@
           <a:lstStyle/>
           <a:p>
             <a:r>
-              <a:rPr sz="580" b="0" i="0">
-                <a:solidFill>
-                  <a:srgbClr val="B3B3B3"/>
+              <a:rPr sz="700" b="0" i="0">
+                <a:solidFill>
+                  <a:srgbClr val="F2F2F2"/>
                 </a:solidFill>
                 <a:latin typeface="Trenda IG Text"/>
               </a:rPr>
@@ -44623,8 +44623,8 @@
         </p:nvSpPr>
         <p:spPr>
           <a:xfrm>
-            <a:off x="8692025" y="3374136"/>
-            <a:ext cx="54864" cy="54864"/>
+            <a:off x="8673737" y="3293668"/>
+            <a:ext cx="64008" cy="64008"/>
           </a:xfrm>
           <a:prstGeom prst="ellipse">
             <a:avLst/>
@@ -44665,8 +44665,8 @@
         </p:nvSpPr>
         <p:spPr>
           <a:xfrm>
-            <a:off x="8801753" y="3310128"/>
-            <a:ext cx="1268403" cy="365760"/>
+            <a:off x="8783465" y="3211372"/>
+            <a:ext cx="1304979" cy="332841"/>
           </a:xfrm>
           <a:prstGeom prst="rect">
             <a:avLst/>
@@ -44680,9 +44680,9 @@
           <a:lstStyle/>
           <a:p>
             <a:r>
-              <a:rPr sz="580" b="0" i="0">
-                <a:solidFill>
-                  <a:srgbClr val="B3B3B3"/>
+              <a:rPr sz="700" b="0" i="0">
+                <a:solidFill>
+                  <a:srgbClr val="F2F2F2"/>
                 </a:solidFill>
                 <a:latin typeface="Trenda IG Text"/>
               </a:rPr>
@@ -44699,8 +44699,8 @@
         </p:nvSpPr>
         <p:spPr>
           <a:xfrm>
-            <a:off x="8692025" y="3758184"/>
-            <a:ext cx="54864" cy="54864"/>
+            <a:off x="8673737" y="3644798"/>
+            <a:ext cx="64008" cy="64008"/>
           </a:xfrm>
           <a:prstGeom prst="ellipse">
             <a:avLst/>
@@ -44741,8 +44741,8 @@
         </p:nvSpPr>
         <p:spPr>
           <a:xfrm>
-            <a:off x="8801753" y="3694176"/>
-            <a:ext cx="1268403" cy="365760"/>
+            <a:off x="8783465" y="3562502"/>
+            <a:ext cx="1304979" cy="332841"/>
           </a:xfrm>
           <a:prstGeom prst="rect">
             <a:avLst/>
@@ -44756,9 +44756,9 @@
           <a:lstStyle/>
           <a:p>
             <a:r>
-              <a:rPr sz="580" b="0" i="0">
-                <a:solidFill>
-                  <a:srgbClr val="B3B3B3"/>
+              <a:rPr sz="700" b="0" i="0">
+                <a:solidFill>
+                  <a:srgbClr val="F2F2F2"/>
                 </a:solidFill>
                 <a:latin typeface="Trenda IG Text"/>
               </a:rPr>
@@ -44775,8 +44775,8 @@
         </p:nvSpPr>
         <p:spPr>
           <a:xfrm>
-            <a:off x="8655449" y="4005072"/>
-            <a:ext cx="1414707" cy="585216"/>
+            <a:off x="8655449" y="3950208"/>
+            <a:ext cx="1414707" cy="658368"/>
           </a:xfrm>
           <a:prstGeom prst="roundRect">
             <a:avLst>
@@ -44819,8 +44819,8 @@
         </p:nvSpPr>
         <p:spPr>
           <a:xfrm>
-            <a:off x="8710313" y="4005072"/>
-            <a:ext cx="1323267" cy="585216"/>
+            <a:off x="8710313" y="3950208"/>
+            <a:ext cx="1341555" cy="658368"/>
           </a:xfrm>
           <a:prstGeom prst="rect">
             <a:avLst/>
@@ -44839,7 +44839,7 @@
               </a:spcAft>
             </a:pPr>
             <a:r>
-              <a:rPr sz="520" b="1" i="0">
+              <a:rPr sz="700" b="1" i="0">
                 <a:solidFill>
                   <a:srgbClr val="FFD700"/>
                 </a:solidFill>
@@ -44855,7 +44855,7 @@
               </a:spcAft>
             </a:pPr>
             <a:r>
-              <a:rPr sz="600" b="1" i="0">
+              <a:rPr sz="700" b="1" i="0">
                 <a:solidFill>
                   <a:srgbClr val="F2F2F2"/>
                 </a:solidFill>
@@ -44931,7 +44931,7 @@
           <a:lstStyle/>
           <a:p>
             <a:r>
-              <a:rPr sz="620" b="1" i="0">
+              <a:rPr sz="700" b="1" i="0">
                 <a:solidFill>
                   <a:srgbClr val="F2F2F2"/>
                 </a:solidFill>
@@ -44940,7 +44940,7 @@
               <a:t>PHASE 6  </a:t>
             </a:r>
             <a:r>
-              <a:rPr sz="620" b="1" i="0">
+              <a:rPr sz="700" b="1" i="0">
                 <a:solidFill>
                   <a:srgbClr val="F2F2F2"/>
                 </a:solidFill>
@@ -45020,7 +45020,7 @@
           <a:lstStyle/>
           <a:p>
             <a:r>
-              <a:rPr sz="480" b="1" i="0" spc="100">
+              <a:rPr sz="700" b="1" i="0" spc="100">
                 <a:solidFill>
                   <a:srgbClr val="8C8C8C"/>
                 </a:solidFill>
@@ -45101,7 +45101,7 @@
           <a:p>
             <a:pPr algn="ctr"/>
             <a:r>
-              <a:rPr sz="640" b="1" i="0">
+              <a:rPr sz="740" b="1" i="0">
                 <a:solidFill>
                   <a:srgbClr val="F2F2F2"/>
                 </a:solidFill>
@@ -45120,8 +45120,8 @@
         </p:nvSpPr>
         <p:spPr>
           <a:xfrm>
-            <a:off x="10326188" y="2221991"/>
-            <a:ext cx="54864" cy="54864"/>
+            <a:off x="10307900" y="2240279"/>
+            <a:ext cx="64008" cy="64008"/>
           </a:xfrm>
           <a:prstGeom prst="ellipse">
             <a:avLst/>
@@ -45162,8 +45162,8 @@
         </p:nvSpPr>
         <p:spPr>
           <a:xfrm>
-            <a:off x="10435916" y="2157984"/>
-            <a:ext cx="1268403" cy="365760"/>
+            <a:off x="10417628" y="2157984"/>
+            <a:ext cx="1304979" cy="548640"/>
           </a:xfrm>
           <a:prstGeom prst="rect">
             <a:avLst/>
@@ -45177,9 +45177,9 @@
           <a:lstStyle/>
           <a:p>
             <a:r>
-              <a:rPr sz="580" b="0" i="0">
-                <a:solidFill>
-                  <a:srgbClr val="B3B3B3"/>
+              <a:rPr sz="700" b="0" i="0">
+                <a:solidFill>
+                  <a:srgbClr val="F2F2F2"/>
                 </a:solidFill>
                 <a:latin typeface="Trenda IG Text"/>
               </a:rPr>
@@ -45196,8 +45196,8 @@
         </p:nvSpPr>
         <p:spPr>
           <a:xfrm>
-            <a:off x="10326188" y="2606039"/>
-            <a:ext cx="54864" cy="54864"/>
+            <a:off x="10307900" y="2807208"/>
+            <a:ext cx="64008" cy="64008"/>
           </a:xfrm>
           <a:prstGeom prst="ellipse">
             <a:avLst/>
@@ -45238,8 +45238,8 @@
         </p:nvSpPr>
         <p:spPr>
           <a:xfrm>
-            <a:off x="10435916" y="2542032"/>
-            <a:ext cx="1268403" cy="365760"/>
+            <a:off x="10417628" y="2724912"/>
+            <a:ext cx="1304979" cy="548640"/>
           </a:xfrm>
           <a:prstGeom prst="rect">
             <a:avLst/>
@@ -45253,9 +45253,9 @@
           <a:lstStyle/>
           <a:p>
             <a:r>
-              <a:rPr sz="580" b="0" i="0">
-                <a:solidFill>
-                  <a:srgbClr val="B3B3B3"/>
+              <a:rPr sz="700" b="0" i="0">
+                <a:solidFill>
+                  <a:srgbClr val="F2F2F2"/>
                 </a:solidFill>
                 <a:latin typeface="Trenda IG Text"/>
               </a:rPr>
@@ -45272,8 +45272,8 @@
         </p:nvSpPr>
         <p:spPr>
           <a:xfrm>
-            <a:off x="10326188" y="2990087"/>
-            <a:ext cx="54864" cy="54864"/>
+            <a:off x="10307900" y="3374135"/>
+            <a:ext cx="64008" cy="64008"/>
           </a:xfrm>
           <a:prstGeom prst="ellipse">
             <a:avLst/>
@@ -45314,8 +45314,8 @@
         </p:nvSpPr>
         <p:spPr>
           <a:xfrm>
-            <a:off x="10435916" y="2926079"/>
-            <a:ext cx="1268403" cy="365760"/>
+            <a:off x="10417628" y="3291839"/>
+            <a:ext cx="1304979" cy="548640"/>
           </a:xfrm>
           <a:prstGeom prst="rect">
             <a:avLst/>
@@ -45329,9 +45329,9 @@
           <a:lstStyle/>
           <a:p>
             <a:r>
-              <a:rPr sz="580" b="0" i="0">
-                <a:solidFill>
-                  <a:srgbClr val="B3B3B3"/>
+              <a:rPr sz="700" b="0" i="0">
+                <a:solidFill>
+                  <a:srgbClr val="F2F2F2"/>
                 </a:solidFill>
                 <a:latin typeface="Trenda IG Text"/>
               </a:rPr>
@@ -45348,8 +45348,8 @@
         </p:nvSpPr>
         <p:spPr>
           <a:xfrm>
-            <a:off x="10289612" y="4005072"/>
-            <a:ext cx="1414707" cy="585216"/>
+            <a:off x="10289612" y="3950208"/>
+            <a:ext cx="1414707" cy="658368"/>
           </a:xfrm>
           <a:prstGeom prst="roundRect">
             <a:avLst>
@@ -45392,8 +45392,8 @@
         </p:nvSpPr>
         <p:spPr>
           <a:xfrm>
-            <a:off x="10344476" y="4005072"/>
-            <a:ext cx="1323267" cy="585216"/>
+            <a:off x="10344476" y="3950208"/>
+            <a:ext cx="1341555" cy="658368"/>
           </a:xfrm>
           <a:prstGeom prst="rect">
             <a:avLst/>
@@ -45412,7 +45412,7 @@
               </a:spcAft>
             </a:pPr>
             <a:r>
-              <a:rPr sz="520" b="1" i="0">
+              <a:rPr sz="700" b="1" i="0">
                 <a:solidFill>
                   <a:srgbClr val="F2F2F2"/>
                 </a:solidFill>
@@ -45428,7 +45428,7 @@
               </a:spcAft>
             </a:pPr>
             <a:r>
-              <a:rPr sz="600" b="1" i="0">
+              <a:rPr sz="700" b="1" i="0">
                 <a:solidFill>
                   <a:srgbClr val="F2F2F2"/>
                 </a:solidFill>
@@ -45508,7 +45508,7 @@
           <a:p>
             <a:pPr algn="ctr"/>
             <a:r>
-              <a:rPr sz="500" b="1" i="0" spc="80">
+              <a:rPr sz="700" b="1" i="0" spc="80">
                 <a:solidFill>
                   <a:srgbClr val="F2F2F2"/>
                 </a:solidFill>
@@ -45589,7 +45589,7 @@
           <a:p>
             <a:pPr algn="ctr"/>
             <a:r>
-              <a:rPr sz="500" b="1" i="0" spc="80">
+              <a:rPr sz="700" b="1" i="0" spc="80">
                 <a:solidFill>
                   <a:srgbClr val="F2F2F2"/>
                 </a:solidFill>
@@ -45669,13 +45669,13 @@
           <a:p>
             <a:pPr algn="ctr"/>
             <a:r>
-              <a:rPr sz="459" b="1" i="0">
+              <a:rPr sz="700" b="1" i="0">
                 <a:solidFill>
                   <a:srgbClr val="F2F2F2"/>
                 </a:solidFill>
                 <a:latin typeface="Trenda IG Text"/>
               </a:rPr>
-              <a:t>STARTS ON SYNTHETIC GOLD A</a:t>
+              <a:t>SYNTHETIC GOLD A FIRST</a:t>
             </a:r>
           </a:p>
         </p:txBody>
@@ -45748,7 +45748,7 @@
           <a:p>
             <a:pPr algn="ctr"/>
             <a:r>
-              <a:rPr sz="480" b="1" i="0" spc="80">
+              <a:rPr sz="700" b="1" i="0" spc="80">
                 <a:solidFill>
                   <a:srgbClr val="1A1A1A"/>
                 </a:solidFill>
@@ -45782,7 +45782,7 @@
           <a:lstStyle/>
           <a:p>
             <a:r>
-              <a:rPr sz="620" b="1" i="0" spc="120">
+              <a:rPr sz="700" b="1" i="0" spc="120">
                 <a:solidFill>
                   <a:srgbClr val="F2F2F2"/>
                 </a:solidFill>
@@ -45932,7 +45932,7 @@
               </a:spcAft>
             </a:pPr>
             <a:r>
-              <a:rPr sz="620" b="0" i="0">
+              <a:rPr sz="700" b="0" i="0">
                 <a:solidFill>
                   <a:srgbClr val="B3B3B3"/>
                 </a:solidFill>
@@ -46082,7 +46082,7 @@
               </a:spcAft>
             </a:pPr>
             <a:r>
-              <a:rPr sz="620" b="0" i="0">
+              <a:rPr sz="700" b="0" i="0">
                 <a:solidFill>
                   <a:srgbClr val="B3B3B3"/>
                 </a:solidFill>
@@ -46232,7 +46232,7 @@
               </a:spcAft>
             </a:pPr>
             <a:r>
-              <a:rPr sz="620" b="0" i="0">
+              <a:rPr sz="700" b="0" i="0">
                 <a:solidFill>
                   <a:srgbClr val="B3B3B3"/>
                 </a:solidFill>
@@ -46266,7 +46266,7 @@
           <a:lstStyle/>
           <a:p>
             <a:r>
-              <a:rPr sz="660" b="1" i="0">
+              <a:rPr sz="700" b="1" i="0">
                 <a:solidFill>
                   <a:srgbClr val="F2F2F2"/>
                 </a:solidFill>
@@ -46275,7 +46275,7 @@
               <a:t>Nothing in Phase 5 touches real patients until Phases 2 and 4 pass their exits. </a:t>
             </a:r>
             <a:r>
-              <a:rPr sz="660" b="0" i="0">
+              <a:rPr sz="700" b="0" i="0">
                 <a:solidFill>
                   <a:srgbClr val="B3B3B3"/>
                 </a:solidFill>
@@ -46541,7 +46541,7 @@
           <a:lstStyle/>
           <a:p>
             <a:r>
-              <a:rPr sz="620" b="0" i="0">
+              <a:rPr sz="700" b="0" i="0">
                 <a:solidFill>
                   <a:srgbClr val="B3B3B3"/>
                 </a:solidFill>
@@ -46642,7 +46642,7 @@
               </a:lnSpc>
             </a:pPr>
             <a:r>
-              <a:rPr sz="620" b="0" i="0">
+              <a:rPr sz="700" b="0" i="0">
                 <a:solidFill>
                   <a:srgbClr val="B3B3B3"/>
                 </a:solidFill>
@@ -46723,7 +46723,7 @@
               </a:spcAft>
             </a:pPr>
             <a:r>
-              <a:rPr sz="660" b="1" i="0">
+              <a:rPr sz="700" b="1" i="0">
                 <a:solidFill>
                   <a:srgbClr val="F2F2F2"/>
                 </a:solidFill>
@@ -46739,7 +46739,7 @@
               </a:spcAft>
             </a:pPr>
             <a:r>
-              <a:rPr sz="580" b="0" i="0">
+              <a:rPr sz="700" b="0" i="0">
                 <a:solidFill>
                   <a:srgbClr val="B3B3B3"/>
                 </a:solidFill>
@@ -46820,7 +46820,7 @@
               </a:spcAft>
             </a:pPr>
             <a:r>
-              <a:rPr sz="660" b="1" i="0">
+              <a:rPr sz="700" b="1" i="0">
                 <a:solidFill>
                   <a:srgbClr val="F2F2F2"/>
                 </a:solidFill>
@@ -46836,7 +46836,7 @@
               </a:spcAft>
             </a:pPr>
             <a:r>
-              <a:rPr sz="580" b="0" i="0">
+              <a:rPr sz="700" b="0" i="0">
                 <a:solidFill>
                   <a:srgbClr val="B3B3B3"/>
                 </a:solidFill>
@@ -46917,7 +46917,7 @@
               </a:spcAft>
             </a:pPr>
             <a:r>
-              <a:rPr sz="660" b="1" i="0">
+              <a:rPr sz="700" b="1" i="0">
                 <a:solidFill>
                   <a:srgbClr val="F2F2F2"/>
                 </a:solidFill>
@@ -46933,7 +46933,7 @@
               </a:spcAft>
             </a:pPr>
             <a:r>
-              <a:rPr sz="580" b="0" i="0">
+              <a:rPr sz="700" b="0" i="0">
                 <a:solidFill>
                   <a:srgbClr val="B3B3B3"/>
                 </a:solidFill>
@@ -47014,7 +47014,7 @@
               </a:spcAft>
             </a:pPr>
             <a:r>
-              <a:rPr sz="660" b="1" i="0">
+              <a:rPr sz="700" b="1" i="0">
                 <a:solidFill>
                   <a:srgbClr val="F2F2F2"/>
                 </a:solidFill>
@@ -47030,7 +47030,7 @@
               </a:spcAft>
             </a:pPr>
             <a:r>
-              <a:rPr sz="580" b="0" i="0">
+              <a:rPr sz="700" b="0" i="0">
                 <a:solidFill>
                   <a:srgbClr val="B3B3B3"/>
                 </a:solidFill>
@@ -47186,7 +47186,7 @@
           <a:lstStyle/>
           <a:p>
             <a:r>
-              <a:rPr sz="640" b="1" i="0" spc="120">
+              <a:rPr sz="700" b="1" i="0" spc="120">
                 <a:solidFill>
                   <a:srgbClr val="F2F2F2"/>
                 </a:solidFill>
@@ -47195,7 +47195,7 @@
               <a:t>1  KNOWLEDGE PATH</a:t>
             </a:r>
             <a:r>
-              <a:rPr sz="640" b="0" i="0">
+              <a:rPr sz="700" b="0" i="0">
                 <a:solidFill>
                   <a:srgbClr val="B3B3B3"/>
                 </a:solidFill>
@@ -47315,7 +47315,7 @@
           <a:lstStyle/>
           <a:p>
             <a:r>
-              <a:rPr sz="640" b="1" i="0" spc="120">
+              <a:rPr sz="700" b="1" i="0" spc="120">
                 <a:solidFill>
                   <a:srgbClr val="F2F2F2"/>
                 </a:solidFill>
@@ -47324,7 +47324,7 @@
               <a:t>2  PATIENT PATH</a:t>
             </a:r>
             <a:r>
-              <a:rPr sz="640" b="0" i="0">
+              <a:rPr sz="700" b="0" i="0">
                 <a:solidFill>
                   <a:srgbClr val="B3B3B3"/>
                 </a:solidFill>
@@ -47428,7 +47428,7 @@
           <a:lstStyle/>
           <a:p>
             <a:r>
-              <a:rPr sz="660" b="1" i="0">
+              <a:rPr sz="700" b="1" i="0">
                 <a:solidFill>
                   <a:srgbClr val="F2F2F2"/>
                 </a:solidFill>
@@ -47467,7 +47467,7 @@
               </a:spcAft>
             </a:pPr>
             <a:r>
-              <a:rPr sz="590" b="0" i="0">
+              <a:rPr sz="700" b="0" i="0">
                 <a:solidFill>
                   <a:srgbClr val="B3B3B3"/>
                 </a:solidFill>
@@ -47547,7 +47547,7 @@
           <a:lstStyle/>
           <a:p>
             <a:r>
-              <a:rPr sz="660" b="1" i="0">
+              <a:rPr sz="700" b="1" i="0">
                 <a:solidFill>
                   <a:srgbClr val="F2F2F2"/>
                 </a:solidFill>
@@ -47586,7 +47586,7 @@
               </a:spcAft>
             </a:pPr>
             <a:r>
-              <a:rPr sz="590" b="0" i="0">
+              <a:rPr sz="700" b="0" i="0">
                 <a:solidFill>
                   <a:srgbClr val="B3B3B3"/>
                 </a:solidFill>
@@ -47724,7 +47724,7 @@
           <a:lstStyle/>
           <a:p>
             <a:r>
-              <a:rPr sz="600" b="0" i="0">
+              <a:rPr sz="700" b="0" i="0">
                 <a:solidFill>
                   <a:srgbClr val="B3B3B3"/>
                 </a:solidFill>
@@ -47804,7 +47804,7 @@
           <a:lstStyle/>
           <a:p>
             <a:r>
-              <a:rPr sz="660" b="1" i="0">
+              <a:rPr sz="700" b="1" i="0">
                 <a:solidFill>
                   <a:srgbClr val="F2F2F2"/>
                 </a:solidFill>
@@ -47843,7 +47843,7 @@
               </a:spcAft>
             </a:pPr>
             <a:r>
-              <a:rPr sz="590" b="0" i="0">
+              <a:rPr sz="700" b="0" i="0">
                 <a:solidFill>
                   <a:srgbClr val="B3B3B3"/>
                 </a:solidFill>
@@ -48056,7 +48056,7 @@
           <a:lstStyle/>
           <a:p>
             <a:r>
-              <a:rPr sz="560" b="0" i="0">
+              <a:rPr sz="700" b="0" i="0">
                 <a:solidFill>
                   <a:srgbClr val="00D6F2"/>
                 </a:solidFill>
@@ -48090,7 +48090,7 @@
           <a:lstStyle/>
           <a:p>
             <a:r>
-              <a:rPr sz="540" b="1" i="0" spc="100">
+              <a:rPr sz="700" b="1" i="0" spc="100">
                 <a:solidFill>
                   <a:srgbClr val="8C8C8C"/>
                 </a:solidFill>
@@ -48171,7 +48171,7 @@
           <a:p>
             <a:pPr algn="ctr"/>
             <a:r>
-              <a:rPr sz="560" b="0" i="0">
+              <a:rPr sz="700" b="0" i="0">
                 <a:solidFill>
                   <a:srgbClr val="F2F2F2"/>
                 </a:solidFill>
@@ -48252,7 +48252,7 @@
           <a:p>
             <a:pPr algn="ctr"/>
             <a:r>
-              <a:rPr sz="560" b="0" i="0">
+              <a:rPr sz="700" b="0" i="0">
                 <a:solidFill>
                   <a:srgbClr val="F2F2F2"/>
                 </a:solidFill>
@@ -48333,7 +48333,7 @@
           <a:p>
             <a:pPr algn="ctr"/>
             <a:r>
-              <a:rPr sz="560" b="0" i="0">
+              <a:rPr sz="700" b="0" i="0">
                 <a:solidFill>
                   <a:srgbClr val="F2F2F2"/>
                 </a:solidFill>
@@ -48414,7 +48414,7 @@
           <a:p>
             <a:pPr algn="ctr"/>
             <a:r>
-              <a:rPr sz="560" b="0" i="0">
+              <a:rPr sz="700" b="0" i="0">
                 <a:solidFill>
                   <a:srgbClr val="F2F2F2"/>
                 </a:solidFill>
@@ -48495,7 +48495,7 @@
           <a:p>
             <a:pPr algn="ctr"/>
             <a:r>
-              <a:rPr sz="560" b="0" i="0">
+              <a:rPr sz="700" b="0" i="0">
                 <a:solidFill>
                   <a:srgbClr val="F2F2F2"/>
                 </a:solidFill>
@@ -48576,7 +48576,7 @@
           <a:p>
             <a:pPr algn="ctr"/>
             <a:r>
-              <a:rPr sz="560" b="0" i="0">
+              <a:rPr sz="700" b="0" i="0">
                 <a:solidFill>
                   <a:srgbClr val="F2F2F2"/>
                 </a:solidFill>
@@ -48733,7 +48733,7 @@
           <a:p>
             <a:pPr algn="ctr"/>
             <a:r>
-              <a:rPr sz="520" b="1" i="0" spc="80">
+              <a:rPr sz="700" b="1" i="0" spc="80">
                 <a:solidFill>
                   <a:srgbClr val="00D6F2"/>
                 </a:solidFill>
@@ -48871,7 +48871,7 @@
           <a:lstStyle/>
           <a:p>
             <a:r>
-              <a:rPr sz="600" b="0" i="0">
+              <a:rPr sz="700" b="0" i="0">
                 <a:solidFill>
                   <a:srgbClr val="B3B3B3"/>
                 </a:solidFill>
@@ -49034,7 +49034,7 @@
           <a:lstStyle/>
           <a:p>
             <a:r>
-              <a:rPr sz="600" b="0" i="0">
+              <a:rPr sz="700" b="0" i="0">
                 <a:solidFill>
                   <a:srgbClr val="B3B3B3"/>
                 </a:solidFill>
@@ -49161,7 +49161,7 @@
           <a:p>
             <a:pPr algn="ctr"/>
             <a:r>
-              <a:rPr sz="540" b="1" i="0">
+              <a:rPr sz="700" b="1" i="0">
                 <a:solidFill>
                   <a:srgbClr val="F2F2F2"/>
                 </a:solidFill>
@@ -49229,7 +49229,7 @@
           <a:lstStyle/>
           <a:p>
             <a:r>
-              <a:rPr sz="600" b="0" i="0">
+              <a:rPr sz="700" b="0" i="0">
                 <a:solidFill>
                   <a:srgbClr val="B3B3B3"/>
                 </a:solidFill>
@@ -49407,7 +49407,7 @@
           <a:lstStyle/>
           <a:p>
             <a:r>
-              <a:rPr sz="540" b="1" i="0" spc="100">
+              <a:rPr sz="700" b="1" i="0" spc="100">
                 <a:solidFill>
                   <a:srgbClr val="8C8C8C"/>
                 </a:solidFill>
@@ -49488,7 +49488,7 @@
           <a:p>
             <a:pPr algn="ctr"/>
             <a:r>
-              <a:rPr sz="560" b="0" i="0">
+              <a:rPr sz="700" b="0" i="0">
                 <a:solidFill>
                   <a:srgbClr val="F2F2F2"/>
                 </a:solidFill>
@@ -49569,7 +49569,7 @@
           <a:p>
             <a:pPr algn="ctr"/>
             <a:r>
-              <a:rPr sz="560" b="0" i="0">
+              <a:rPr sz="700" b="0" i="0">
                 <a:solidFill>
                   <a:srgbClr val="F2F2F2"/>
                 </a:solidFill>
@@ -49650,7 +49650,7 @@
           <a:p>
             <a:pPr algn="ctr"/>
             <a:r>
-              <a:rPr sz="560" b="0" i="0">
+              <a:rPr sz="700" b="0" i="0">
                 <a:solidFill>
                   <a:srgbClr val="F2F2F2"/>
                 </a:solidFill>
@@ -49731,7 +49731,7 @@
           <a:p>
             <a:pPr algn="ctr"/>
             <a:r>
-              <a:rPr sz="560" b="0" i="0">
+              <a:rPr sz="700" b="0" i="0">
                 <a:solidFill>
                   <a:srgbClr val="F2F2F2"/>
                 </a:solidFill>
@@ -49812,7 +49812,7 @@
           <a:p>
             <a:pPr algn="ctr"/>
             <a:r>
-              <a:rPr sz="560" b="0" i="0">
+              <a:rPr sz="700" b="0" i="0">
                 <a:solidFill>
                   <a:srgbClr val="F2F2F2"/>
                 </a:solidFill>
@@ -49932,7 +49932,7 @@
           <a:lstStyle/>
           <a:p>
             <a:r>
-              <a:rPr sz="640" b="1" i="0" spc="120">
+              <a:rPr sz="700" b="1" i="0" spc="120">
                 <a:solidFill>
                   <a:srgbClr val="F2F2F2"/>
                 </a:solidFill>
@@ -50070,7 +50070,7 @@
           <a:lstStyle/>
           <a:p>
             <a:r>
-              <a:rPr sz="600" b="0" i="0">
+              <a:rPr sz="700" b="0" i="0">
                 <a:solidFill>
                   <a:srgbClr val="B3B3B3"/>
                 </a:solidFill>
@@ -50150,7 +50150,7 @@
           <a:lstStyle/>
           <a:p>
             <a:r>
-              <a:rPr sz="680" b="1" i="0">
+              <a:rPr sz="700" b="1" i="0">
                 <a:solidFill>
                   <a:srgbClr val="F2F2F2"/>
                 </a:solidFill>
@@ -50189,7 +50189,7 @@
               </a:spcAft>
             </a:pPr>
             <a:r>
-              <a:rPr sz="600" b="0" i="0">
+              <a:rPr sz="700" b="0" i="0">
                 <a:solidFill>
                   <a:srgbClr val="B3B3B3"/>
                 </a:solidFill>
@@ -50293,7 +50293,7 @@
           <a:lstStyle/>
           <a:p>
             <a:r>
-              <a:rPr sz="680" b="1" i="0">
+              <a:rPr sz="700" b="1" i="0">
                 <a:solidFill>
                   <a:srgbClr val="F2F2F2"/>
                 </a:solidFill>
@@ -50332,7 +50332,7 @@
               </a:spcAft>
             </a:pPr>
             <a:r>
-              <a:rPr sz="600" b="0" i="0">
+              <a:rPr sz="700" b="0" i="0">
                 <a:solidFill>
                   <a:srgbClr val="B3B3B3"/>
                 </a:solidFill>
@@ -50412,7 +50412,7 @@
           <a:lstStyle/>
           <a:p>
             <a:r>
-              <a:rPr sz="680" b="1" i="0">
+              <a:rPr sz="700" b="1" i="0">
                 <a:solidFill>
                   <a:srgbClr val="F2F2F2"/>
                 </a:solidFill>
@@ -50451,7 +50451,7 @@
               </a:spcAft>
             </a:pPr>
             <a:r>
-              <a:rPr sz="600" b="0" i="0">
+              <a:rPr sz="700" b="0" i="0">
                 <a:solidFill>
                   <a:srgbClr val="B3B3B3"/>
                 </a:solidFill>
@@ -50490,7 +50490,7 @@
               </a:spcAft>
             </a:pPr>
             <a:r>
-              <a:rPr sz="640" b="1" i="0" spc="120">
+              <a:rPr sz="700" b="1" i="0" spc="120">
                 <a:solidFill>
                   <a:srgbClr val="F2F2F2"/>
                 </a:solidFill>
@@ -50506,7 +50506,7 @@
               </a:spcAft>
             </a:pPr>
             <a:r>
-              <a:rPr sz="520" b="0" i="0">
+              <a:rPr sz="700" b="0" i="0">
                 <a:solidFill>
                   <a:srgbClr val="8C8C8C"/>
                 </a:solidFill>
@@ -50656,7 +50656,7 @@
               </a:spcAft>
             </a:pPr>
             <a:r>
-              <a:rPr sz="600" b="0" i="0">
+              <a:rPr sz="700" b="0" i="0">
                 <a:solidFill>
                   <a:srgbClr val="B3B3B3"/>
                 </a:solidFill>
@@ -50806,7 +50806,7 @@
               </a:spcAft>
             </a:pPr>
             <a:r>
-              <a:rPr sz="600" b="0" i="0">
+              <a:rPr sz="700" b="0" i="0">
                 <a:solidFill>
                   <a:srgbClr val="B3B3B3"/>
                 </a:solidFill>
@@ -50956,7 +50956,7 @@
               </a:spcAft>
             </a:pPr>
             <a:r>
-              <a:rPr sz="600" b="0" i="0">
+              <a:rPr sz="700" b="0" i="0">
                 <a:solidFill>
                   <a:srgbClr val="B3B3B3"/>
                 </a:solidFill>
@@ -51106,7 +51106,7 @@
               </a:spcAft>
             </a:pPr>
             <a:r>
-              <a:rPr sz="600" b="0" i="0">
+              <a:rPr sz="700" b="0" i="0">
                 <a:solidFill>
                   <a:srgbClr val="B3B3B3"/>
                 </a:solidFill>
@@ -51256,7 +51256,7 @@
               </a:spcAft>
             </a:pPr>
             <a:r>
-              <a:rPr sz="600" b="0" i="0">
+              <a:rPr sz="700" b="0" i="0">
                 <a:solidFill>
                   <a:srgbClr val="B3B3B3"/>
                 </a:solidFill>
@@ -51406,7 +51406,7 @@
               </a:spcAft>
             </a:pPr>
             <a:r>
-              <a:rPr sz="600" b="0" i="0">
+              <a:rPr sz="700" b="0" i="0">
                 <a:solidFill>
                   <a:srgbClr val="B3B3B3"/>
                 </a:solidFill>

--- a/poc/data_harness/Ascension Agentic Harness - Data Harness.pptx
+++ b/poc/data_harness/Ascension Agentic Harness - Data Harness.pptx
@@ -19,6 +19,7 @@
     <p:sldId id="323" r:id="rId15"/>
     <p:sldId id="326" r:id="rId18"/>
     <p:sldId id="327" r:id="rId19"/>
+    <p:sldId id="328" r:id="rId20"/>
   </p:sldIdLst>
   <p:sldSz cx="12192000" cy="6858000"/>
   <p:notesSz cx="6858000" cy="12192000"/>
@@ -1468,6 +1469,104 @@
           <a:lstStyle/>
           <a:p>
             <a:r>
+              <a:t>SLIDE: Platform fit   (about 2-3 minutes)</a:t>
+            </a:r>
+          </a:p>
+          <a:p/>
+          <a:p>
+            <a:r>
+              <a:t>KEY MESSAGE</a:t>
+            </a:r>
+          </a:p>
+          <a:p>
+            <a:r>
+              <a:t>One harness serves every pod and three jobs: delivery, campaigns and the Sierra voice agent. Each agent is built once, scales across pods without losing accuracy, and stays under the same controls.</a:t>
+            </a:r>
+          </a:p>
+          <a:p/>
+          <a:p>
+            <a:r>
+              <a:t>WALK IT</a:t>
+            </a:r>
+          </a:p>
+          <a:p>
+            <a:r>
+              <a:t>- Top: one harness, three jobs, sharing the knowledge graph, governance, evals, approvals and the change passport.</a:t>
+            </a:r>
+          </a:p>
+          <a:p>
+            <a:r>
+              <a:t>- How we build: one definition per agent plus pod skill packs; versioned prompts, skills and model; an eval gate before any new version ships; pods onboard one at a time.</a:t>
+            </a:r>
+          </a:p>
+          <a:p>
+            <a:r>
+              <a:t>- How it scales (concurrency): each request is its own isolated run; up to 3 runs per pod so no pod crowds out another; about 30 at once, set by model and API quotas (proposed, sized in the Phase 0 load test); extra requests wait, none are dropped.</a:t>
+            </a:r>
+          </a:p>
+          <a:p>
+            <a:r>
+              <a:t>- How it stays accurate: cited facts only; the same eval bar for every pod, max 5 retries then an owner; load changes the wait, not the answer, because runs share no memory; measured every run.</a:t>
+            </a:r>
+          </a:p>
+          <a:p>
+            <a:r>
+              <a:t>- How we protect data (measured): share of sensitive fields classified by DLP and approved in Collibra (target 100% before use); masking policy tags verified against the schema every run, drift flagged; negative-access tests each release prove agent identities cannot read raw PHI (target zero); every PHI access logged, releases reconciled, access reviewed each quarter.</a:t>
+            </a:r>
+          </a:p>
+          <a:p>
+            <a:r>
+              <a:t>- How we control: no production access, guardrails, people decide at the gates, quotas and a kill switch.</a:t>
+            </a:r>
+          </a:p>
+          <a:p>
+            <a:r>
+              <a:t>- Bottom: the core benefits beyond cost: consistency, reuse, knowledge kept, quality, auditability, safe by design.</a:t>
+            </a:r>
+          </a:p>
+        </p:txBody>
+      </p:sp>
+    </p:spTree>
+  </p:cSld>
+  <p:clrMapOvr>
+    <a:masterClrMapping/>
+  </p:clrMapOvr>
+</p:notes>
+</file>
+
+<file path=ppt/notesSlides/notesSlide11.xml><?xml version="1.0" encoding="utf-8"?>
+<p:notes xmlns:a="http://schemas.openxmlformats.org/drawingml/2006/main" xmlns:p="http://schemas.openxmlformats.org/presentationml/2006/main" xmlns:r="http://schemas.openxmlformats.org/officeDocument/2006/relationships">
+  <p:cSld>
+    <p:spTree>
+      <p:nvGrpSpPr>
+        <p:cNvPr id="1" name=""/>
+        <p:cNvGrpSpPr/>
+        <p:nvPr/>
+      </p:nvGrpSpPr>
+      <p:grpSpPr>
+        <a:xfrm>
+          <a:off x="0" y="0"/>
+          <a:ext cx="0" cy="0"/>
+          <a:chOff x="0" y="0"/>
+          <a:chExt cx="0" cy="0"/>
+        </a:xfrm>
+      </p:grpSpPr>
+      <p:sp>
+        <p:nvSpPr>
+          <p:cNvPr id="3" name="Notes Placeholder 2"/>
+          <p:cNvSpPr>
+            <a:spLocks noGrp="1"/>
+          </p:cNvSpPr>
+          <p:nvPr>
+            <p:ph type="body" idx="1"/>
+          </p:nvPr>
+        </p:nvSpPr>
+        <p:spPr/>
+        <p:txBody>
+          <a:bodyPr/>
+          <a:lstStyle/>
+          <a:p>
+            <a:r>
               <a:t>SLIDE: Lean team and cost saving   (about 2-3 minutes)</a:t>
             </a:r>
           </a:p>
@@ -3883,6 +3982,4927 @@
 </file>
 
 <file path=ppt/slides/slide10.xml><?xml version="1.0" encoding="utf-8"?>
+<p:sld xmlns:a="http://schemas.openxmlformats.org/drawingml/2006/main" xmlns:p="http://schemas.openxmlformats.org/presentationml/2006/main" xmlns:r="http://schemas.openxmlformats.org/officeDocument/2006/relationships">
+  <p:cSld>
+    <p:bg>
+      <p:bgPr>
+        <a:solidFill>
+          <a:srgbClr val="000000"/>
+        </a:solidFill>
+        <a:effectLst/>
+      </p:bgPr>
+    </p:bg>
+    <p:spTree>
+      <p:nvGrpSpPr>
+        <p:cNvPr id="1" name=""/>
+        <p:cNvGrpSpPr/>
+        <p:nvPr/>
+      </p:nvGrpSpPr>
+      <p:grpSpPr/>
+      <p:sp>
+        <p:nvSpPr>
+          <p:cNvPr id="2" name="Text 1"/>
+          <p:cNvSpPr txBox="1"/>
+          <p:nvPr/>
+        </p:nvSpPr>
+        <p:spPr>
+          <a:xfrm>
+            <a:off x="411480" y="201168"/>
+            <a:ext cx="8229600" cy="182880"/>
+          </a:xfrm>
+          <a:prstGeom prst="rect">
+            <a:avLst/>
+          </a:prstGeom>
+          <a:noFill/>
+        </p:spPr>
+        <p:txBody>
+          <a:bodyPr wrap="square" lIns="0" rIns="0" tIns="0" bIns="0" anchor="ctr">
+            <a:spAutoFit/>
+          </a:bodyPr>
+          <a:lstStyle/>
+          <a:p>
+            <a:r>
+              <a:rPr sz="800" b="1" i="0" spc="300">
+                <a:solidFill>
+                  <a:srgbClr val="00D6F2"/>
+                </a:solidFill>
+                <a:latin typeface="Trenda IG Text"/>
+              </a:rPr>
+              <a:t>ASCENSION AGENTIC HARNESS · PLATFORM FIT</a:t>
+            </a:r>
+          </a:p>
+        </p:txBody>
+      </p:sp>
+      <p:sp>
+        <p:nvSpPr>
+          <p:cNvPr id="3" name="Text 2"/>
+          <p:cNvSpPr txBox="1"/>
+          <p:nvPr/>
+        </p:nvSpPr>
+        <p:spPr>
+          <a:xfrm>
+            <a:off x="411480" y="384048"/>
+            <a:ext cx="11365992" cy="411480"/>
+          </a:xfrm>
+          <a:prstGeom prst="rect">
+            <a:avLst/>
+          </a:prstGeom>
+          <a:noFill/>
+        </p:spPr>
+        <p:txBody>
+          <a:bodyPr wrap="square" lIns="0" rIns="0" tIns="0" bIns="0" anchor="ctr">
+            <a:spAutoFit/>
+          </a:bodyPr>
+          <a:lstStyle/>
+          <a:p>
+            <a:r>
+              <a:rPr sz="2200" b="1" i="0">
+                <a:solidFill>
+                  <a:srgbClr val="FFFFFF"/>
+                </a:solidFill>
+                <a:latin typeface="Trenda IG Text"/>
+              </a:rPr>
+              <a:t>Platform fit: one harness for every pod, every job</a:t>
+            </a:r>
+          </a:p>
+        </p:txBody>
+      </p:sp>
+      <p:sp>
+        <p:nvSpPr>
+          <p:cNvPr id="4" name="Text 3"/>
+          <p:cNvSpPr txBox="1"/>
+          <p:nvPr/>
+        </p:nvSpPr>
+        <p:spPr>
+          <a:xfrm>
+            <a:off x="411480" y="804672"/>
+            <a:ext cx="11365992" cy="237744"/>
+          </a:xfrm>
+          <a:prstGeom prst="rect">
+            <a:avLst/>
+          </a:prstGeom>
+          <a:noFill/>
+        </p:spPr>
+        <p:txBody>
+          <a:bodyPr wrap="square" lIns="0" rIns="0" tIns="0" bIns="0" anchor="ctr">
+            <a:spAutoFit/>
+          </a:bodyPr>
+          <a:lstStyle/>
+          <a:p>
+            <a:r>
+              <a:rPr sz="1050" b="0" i="0">
+                <a:solidFill>
+                  <a:srgbClr val="BFBFBF"/>
+                </a:solidFill>
+                <a:latin typeface="Trenda IG Text"/>
+              </a:rPr>
+              <a:t>Delivery, campaigns and the Sierra voice agent share one graph, one governance layer and one approval flow. Each agent is built once and serves every pod at once.</a:t>
+            </a:r>
+          </a:p>
+        </p:txBody>
+      </p:sp>
+      <p:sp>
+        <p:nvSpPr>
+          <p:cNvPr id="5" name="Text 4"/>
+          <p:cNvSpPr txBox="1"/>
+          <p:nvPr/>
+        </p:nvSpPr>
+        <p:spPr>
+          <a:xfrm>
+            <a:off x="411480" y="1188720"/>
+            <a:ext cx="1371600" cy="457200"/>
+          </a:xfrm>
+          <a:prstGeom prst="rect">
+            <a:avLst/>
+          </a:prstGeom>
+          <a:noFill/>
+        </p:spPr>
+        <p:txBody>
+          <a:bodyPr wrap="square" lIns="0" rIns="0" tIns="0" bIns="0" anchor="ctr">
+            <a:spAutoFit/>
+          </a:bodyPr>
+          <a:lstStyle/>
+          <a:p>
+            <a:pPr>
+              <a:spcAft>
+                <a:spcPts val="100"/>
+              </a:spcAft>
+            </a:pPr>
+            <a:r>
+              <a:rPr sz="700" b="1" i="0" spc="120">
+                <a:solidFill>
+                  <a:srgbClr val="F2F2F2"/>
+                </a:solidFill>
+                <a:latin typeface="Trenda IG Text"/>
+              </a:rPr>
+              <a:t>ONE HARNESS</a:t>
+            </a:r>
+          </a:p>
+          <a:p>
+            <a:pPr>
+              <a:spcAft>
+                <a:spcPts val="100"/>
+              </a:spcAft>
+            </a:pPr>
+            <a:r>
+              <a:rPr sz="700" b="0" i="0">
+                <a:solidFill>
+                  <a:srgbClr val="8C8C8C"/>
+                </a:solidFill>
+                <a:latin typeface="Trenda IG Text"/>
+              </a:rPr>
+              <a:t>three jobs</a:t>
+            </a:r>
+          </a:p>
+        </p:txBody>
+      </p:sp>
+      <p:sp>
+        <p:nvSpPr>
+          <p:cNvPr id="6" name="Shape 5"/>
+          <p:cNvSpPr/>
+          <p:nvPr/>
+        </p:nvSpPr>
+        <p:spPr>
+          <a:xfrm>
+            <a:off x="1783080" y="1188720"/>
+            <a:ext cx="2240280" cy="457200"/>
+          </a:xfrm>
+          <a:prstGeom prst="roundRect">
+            <a:avLst>
+              <a:gd name="adj" fmla="val 12000"/>
+            </a:avLst>
+          </a:prstGeom>
+          <a:solidFill>
+            <a:srgbClr val="141414"/>
+          </a:solidFill>
+          <a:ln w="9525">
+            <a:solidFill>
+              <a:srgbClr val="00D6F2"/>
+            </a:solidFill>
+          </a:ln>
+          <a:effectLst/>
+        </p:spPr>
+        <p:style>
+          <a:lnRef idx="1">
+            <a:schemeClr val="accent1"/>
+          </a:lnRef>
+          <a:fillRef idx="3">
+            <a:schemeClr val="accent1"/>
+          </a:fillRef>
+          <a:effectRef idx="2">
+            <a:schemeClr val="accent1"/>
+          </a:effectRef>
+          <a:fontRef idx="minor">
+            <a:schemeClr val="lt1"/>
+          </a:fontRef>
+        </p:style>
+        <p:txBody>
+          <a:bodyPr rtlCol="0" anchor="ctr"/>
+          <a:lstStyle/>
+          <a:p/>
+        </p:txBody>
+      </p:sp>
+      <p:pic>
+        <p:nvPicPr>
+          <p:cNvPr id="7" name="Picture 6" descr="openai-white.png"/>
+          <p:cNvPicPr>
+            <a:picLocks noChangeAspect="1"/>
+          </p:cNvPicPr>
+          <p:nvPr/>
+        </p:nvPicPr>
+        <p:blipFill>
+          <a:blip r:embed="rId2"/>
+          <a:stretch>
+            <a:fillRect/>
+          </a:stretch>
+        </p:blipFill>
+        <p:spPr>
+          <a:xfrm>
+            <a:off x="1892807" y="1316736"/>
+            <a:ext cx="201168" cy="201168"/>
+          </a:xfrm>
+          <a:prstGeom prst="rect">
+            <a:avLst/>
+          </a:prstGeom>
+        </p:spPr>
+      </p:pic>
+      <p:sp>
+        <p:nvSpPr>
+          <p:cNvPr id="8" name="Text 6"/>
+          <p:cNvSpPr txBox="1"/>
+          <p:nvPr/>
+        </p:nvSpPr>
+        <p:spPr>
+          <a:xfrm>
+            <a:off x="2167127" y="1188720"/>
+            <a:ext cx="1783080" cy="457200"/>
+          </a:xfrm>
+          <a:prstGeom prst="rect">
+            <a:avLst/>
+          </a:prstGeom>
+          <a:noFill/>
+        </p:spPr>
+        <p:txBody>
+          <a:bodyPr wrap="square" lIns="0" rIns="0" tIns="0" bIns="0" anchor="ctr">
+            <a:spAutoFit/>
+          </a:bodyPr>
+          <a:lstStyle/>
+          <a:p>
+            <a:r>
+              <a:rPr sz="720" b="1" i="0">
+                <a:solidFill>
+                  <a:srgbClr val="F2F2F2"/>
+                </a:solidFill>
+                <a:latin typeface="Trenda IG Text"/>
+              </a:rPr>
+              <a:t>Delivery</a:t>
+            </a:r>
+          </a:p>
+          <a:p>
+            <a:r>
+              <a:rPr sz="700" b="0" i="0">
+                <a:solidFill>
+                  <a:srgbClr val="B3B3B3"/>
+                </a:solidFill>
+                <a:latin typeface="Trenda IG Text"/>
+              </a:rPr>
+              <a:t>Codex to production · every pod</a:t>
+            </a:r>
+          </a:p>
+        </p:txBody>
+      </p:sp>
+      <p:sp>
+        <p:nvSpPr>
+          <p:cNvPr id="9" name="Shape 7"/>
+          <p:cNvSpPr/>
+          <p:nvPr/>
+        </p:nvSpPr>
+        <p:spPr>
+          <a:xfrm>
+            <a:off x="4133088" y="1188720"/>
+            <a:ext cx="2240280" cy="457200"/>
+          </a:xfrm>
+          <a:prstGeom prst="roundRect">
+            <a:avLst>
+              <a:gd name="adj" fmla="val 12000"/>
+            </a:avLst>
+          </a:prstGeom>
+          <a:solidFill>
+            <a:srgbClr val="141414"/>
+          </a:solidFill>
+          <a:ln w="9525">
+            <a:solidFill>
+              <a:srgbClr val="00D6F2"/>
+            </a:solidFill>
+          </a:ln>
+          <a:effectLst/>
+        </p:spPr>
+        <p:style>
+          <a:lnRef idx="1">
+            <a:schemeClr val="accent1"/>
+          </a:lnRef>
+          <a:fillRef idx="3">
+            <a:schemeClr val="accent1"/>
+          </a:fillRef>
+          <a:effectRef idx="2">
+            <a:schemeClr val="accent1"/>
+          </a:effectRef>
+          <a:fontRef idx="minor">
+            <a:schemeClr val="lt1"/>
+          </a:fontRef>
+        </p:style>
+        <p:txBody>
+          <a:bodyPr rtlCol="0" anchor="ctr"/>
+          <a:lstStyle/>
+          <a:p/>
+        </p:txBody>
+      </p:sp>
+      <p:pic>
+        <p:nvPicPr>
+          <p:cNvPr id="10" name="Picture 9" descr="salesforce.png"/>
+          <p:cNvPicPr>
+            <a:picLocks noChangeAspect="1"/>
+          </p:cNvPicPr>
+          <p:nvPr/>
+        </p:nvPicPr>
+        <p:blipFill>
+          <a:blip r:embed="rId3"/>
+          <a:stretch>
+            <a:fillRect/>
+          </a:stretch>
+        </p:blipFill>
+        <p:spPr>
+          <a:xfrm>
+            <a:off x="4242816" y="1316736"/>
+            <a:ext cx="201168" cy="201168"/>
+          </a:xfrm>
+          <a:prstGeom prst="rect">
+            <a:avLst/>
+          </a:prstGeom>
+        </p:spPr>
+      </p:pic>
+      <p:sp>
+        <p:nvSpPr>
+          <p:cNvPr id="11" name="Text 8"/>
+          <p:cNvSpPr txBox="1"/>
+          <p:nvPr/>
+        </p:nvSpPr>
+        <p:spPr>
+          <a:xfrm>
+            <a:off x="4517136" y="1188720"/>
+            <a:ext cx="1783080" cy="457200"/>
+          </a:xfrm>
+          <a:prstGeom prst="rect">
+            <a:avLst/>
+          </a:prstGeom>
+          <a:noFill/>
+        </p:spPr>
+        <p:txBody>
+          <a:bodyPr wrap="square" lIns="0" rIns="0" tIns="0" bIns="0" anchor="ctr">
+            <a:spAutoFit/>
+          </a:bodyPr>
+          <a:lstStyle/>
+          <a:p>
+            <a:r>
+              <a:rPr sz="720" b="1" i="0">
+                <a:solidFill>
+                  <a:srgbClr val="F2F2F2"/>
+                </a:solidFill>
+                <a:latin typeface="Trenda IG Text"/>
+              </a:rPr>
+              <a:t>Campaigns</a:t>
+            </a:r>
+          </a:p>
+          <a:p>
+            <a:r>
+              <a:rPr sz="700" b="0" i="0">
+                <a:solidFill>
+                  <a:srgbClr val="B3B3B3"/>
+                </a:solidFill>
+                <a:latin typeface="Trenda IG Text"/>
+              </a:rPr>
+              <a:t>Marketing Cloud on governed GCP data</a:t>
+            </a:r>
+          </a:p>
+        </p:txBody>
+      </p:sp>
+      <p:sp>
+        <p:nvSpPr>
+          <p:cNvPr id="12" name="Shape 9"/>
+          <p:cNvSpPr/>
+          <p:nvPr/>
+        </p:nvSpPr>
+        <p:spPr>
+          <a:xfrm>
+            <a:off x="6483096" y="1188720"/>
+            <a:ext cx="2240280" cy="457200"/>
+          </a:xfrm>
+          <a:prstGeom prst="roundRect">
+            <a:avLst>
+              <a:gd name="adj" fmla="val 12000"/>
+            </a:avLst>
+          </a:prstGeom>
+          <a:solidFill>
+            <a:srgbClr val="141414"/>
+          </a:solidFill>
+          <a:ln w="9525">
+            <a:solidFill>
+              <a:srgbClr val="00D6F2"/>
+            </a:solidFill>
+          </a:ln>
+          <a:effectLst/>
+        </p:spPr>
+        <p:style>
+          <a:lnRef idx="1">
+            <a:schemeClr val="accent1"/>
+          </a:lnRef>
+          <a:fillRef idx="3">
+            <a:schemeClr val="accent1"/>
+          </a:fillRef>
+          <a:effectRef idx="2">
+            <a:schemeClr val="accent1"/>
+          </a:effectRef>
+          <a:fontRef idx="minor">
+            <a:schemeClr val="lt1"/>
+          </a:fontRef>
+        </p:style>
+        <p:txBody>
+          <a:bodyPr rtlCol="0" anchor="ctr"/>
+          <a:lstStyle/>
+          <a:p/>
+        </p:txBody>
+      </p:sp>
+      <p:sp>
+        <p:nvSpPr>
+          <p:cNvPr id="13" name="Text 10"/>
+          <p:cNvSpPr txBox="1"/>
+          <p:nvPr/>
+        </p:nvSpPr>
+        <p:spPr>
+          <a:xfrm>
+            <a:off x="6592824" y="1188720"/>
+            <a:ext cx="2057400" cy="457200"/>
+          </a:xfrm>
+          <a:prstGeom prst="rect">
+            <a:avLst/>
+          </a:prstGeom>
+          <a:noFill/>
+        </p:spPr>
+        <p:txBody>
+          <a:bodyPr wrap="square" lIns="0" rIns="0" tIns="0" bIns="0" anchor="ctr">
+            <a:spAutoFit/>
+          </a:bodyPr>
+          <a:lstStyle/>
+          <a:p>
+            <a:r>
+              <a:rPr sz="720" b="1" i="0">
+                <a:solidFill>
+                  <a:srgbClr val="F2F2F2"/>
+                </a:solidFill>
+                <a:latin typeface="Trenda IG Text"/>
+              </a:rPr>
+              <a:t>Sierra voice agent</a:t>
+            </a:r>
+          </a:p>
+          <a:p>
+            <a:r>
+              <a:rPr sz="700" b="0" i="0">
+                <a:solidFill>
+                  <a:srgbClr val="B3B3B3"/>
+                </a:solidFill>
+                <a:latin typeface="Trenda IG Text"/>
+              </a:rPr>
+              <a:t>bookings, reschedules, questions</a:t>
+            </a:r>
+          </a:p>
+        </p:txBody>
+      </p:sp>
+      <p:sp>
+        <p:nvSpPr>
+          <p:cNvPr id="14" name="Text 11"/>
+          <p:cNvSpPr txBox="1"/>
+          <p:nvPr/>
+        </p:nvSpPr>
+        <p:spPr>
+          <a:xfrm>
+            <a:off x="8878824" y="1188720"/>
+            <a:ext cx="2898648" cy="457200"/>
+          </a:xfrm>
+          <a:prstGeom prst="rect">
+            <a:avLst/>
+          </a:prstGeom>
+          <a:noFill/>
+        </p:spPr>
+        <p:txBody>
+          <a:bodyPr wrap="square" lIns="0" rIns="0" tIns="0" bIns="0" anchor="ctr">
+            <a:spAutoFit/>
+          </a:bodyPr>
+          <a:lstStyle/>
+          <a:p>
+            <a:pPr>
+              <a:spcAft>
+                <a:spcPts val="100"/>
+              </a:spcAft>
+            </a:pPr>
+            <a:r>
+              <a:rPr sz="700" b="1" i="0" spc="100">
+                <a:solidFill>
+                  <a:srgbClr val="00D6F2"/>
+                </a:solidFill>
+                <a:latin typeface="Trenda IG Text"/>
+              </a:rPr>
+              <a:t>SHARED BY ALL THREE</a:t>
+            </a:r>
+          </a:p>
+          <a:p>
+            <a:pPr>
+              <a:spcAft>
+                <a:spcPts val="100"/>
+              </a:spcAft>
+            </a:pPr>
+            <a:r>
+              <a:rPr sz="700" b="0" i="0">
+                <a:solidFill>
+                  <a:srgbClr val="B3B3B3"/>
+                </a:solidFill>
+                <a:latin typeface="Trenda IG Text"/>
+              </a:rPr>
+              <a:t>knowledge graph · governance · evals · approvals · change passport</a:t>
+            </a:r>
+          </a:p>
+        </p:txBody>
+      </p:sp>
+      <p:sp>
+        <p:nvSpPr>
+          <p:cNvPr id="15" name="Shape 12"/>
+          <p:cNvSpPr/>
+          <p:nvPr/>
+        </p:nvSpPr>
+        <p:spPr>
+          <a:xfrm>
+            <a:off x="411480" y="1783080"/>
+            <a:ext cx="2185415" cy="3310128"/>
+          </a:xfrm>
+          <a:prstGeom prst="roundRect">
+            <a:avLst>
+              <a:gd name="adj" fmla="val 2000"/>
+            </a:avLst>
+          </a:prstGeom>
+          <a:solidFill>
+            <a:srgbClr val="1E1E1E"/>
+          </a:solidFill>
+          <a:ln>
+            <a:noFill/>
+          </a:ln>
+          <a:effectLst/>
+        </p:spPr>
+        <p:style>
+          <a:lnRef idx="1">
+            <a:schemeClr val="accent1"/>
+          </a:lnRef>
+          <a:fillRef idx="3">
+            <a:schemeClr val="accent1"/>
+          </a:fillRef>
+          <a:effectRef idx="2">
+            <a:schemeClr val="accent1"/>
+          </a:effectRef>
+          <a:fontRef idx="minor">
+            <a:schemeClr val="lt1"/>
+          </a:fontRef>
+        </p:style>
+        <p:txBody>
+          <a:bodyPr rtlCol="0" anchor="ctr"/>
+          <a:lstStyle/>
+          <a:p/>
+        </p:txBody>
+      </p:sp>
+      <p:sp>
+        <p:nvSpPr>
+          <p:cNvPr id="16" name="Shape 13"/>
+          <p:cNvSpPr/>
+          <p:nvPr/>
+        </p:nvSpPr>
+        <p:spPr>
+          <a:xfrm>
+            <a:off x="411480" y="1783080"/>
+            <a:ext cx="2185415" cy="256032"/>
+          </a:xfrm>
+          <a:prstGeom prst="rect">
+            <a:avLst/>
+          </a:prstGeom>
+          <a:solidFill>
+            <a:srgbClr val="2B2B2B"/>
+          </a:solidFill>
+          <a:ln>
+            <a:noFill/>
+          </a:ln>
+          <a:effectLst/>
+        </p:spPr>
+        <p:style>
+          <a:lnRef idx="1">
+            <a:schemeClr val="accent1"/>
+          </a:lnRef>
+          <a:fillRef idx="3">
+            <a:schemeClr val="accent1"/>
+          </a:fillRef>
+          <a:effectRef idx="2">
+            <a:schemeClr val="accent1"/>
+          </a:effectRef>
+          <a:fontRef idx="minor">
+            <a:schemeClr val="lt1"/>
+          </a:fontRef>
+        </p:style>
+        <p:txBody>
+          <a:bodyPr rtlCol="0" anchor="ctr"/>
+          <a:lstStyle/>
+          <a:p/>
+        </p:txBody>
+      </p:sp>
+      <p:sp>
+        <p:nvSpPr>
+          <p:cNvPr id="17" name="Text 14"/>
+          <p:cNvSpPr txBox="1"/>
+          <p:nvPr/>
+        </p:nvSpPr>
+        <p:spPr>
+          <a:xfrm>
+            <a:off x="521208" y="1783080"/>
+            <a:ext cx="1965959" cy="256032"/>
+          </a:xfrm>
+          <a:prstGeom prst="rect">
+            <a:avLst/>
+          </a:prstGeom>
+          <a:noFill/>
+        </p:spPr>
+        <p:txBody>
+          <a:bodyPr wrap="square" lIns="0" rIns="0" tIns="0" bIns="0" anchor="ctr">
+            <a:spAutoFit/>
+          </a:bodyPr>
+          <a:lstStyle/>
+          <a:p>
+            <a:r>
+              <a:rPr sz="700" b="1" i="0" spc="120">
+                <a:solidFill>
+                  <a:srgbClr val="F2F2F2"/>
+                </a:solidFill>
+                <a:latin typeface="Trenda IG Text"/>
+              </a:rPr>
+              <a:t>HOW WE BUILD</a:t>
+            </a:r>
+          </a:p>
+        </p:txBody>
+      </p:sp>
+      <p:sp>
+        <p:nvSpPr>
+          <p:cNvPr id="18" name="Shape 15"/>
+          <p:cNvSpPr/>
+          <p:nvPr/>
+        </p:nvSpPr>
+        <p:spPr>
+          <a:xfrm>
+            <a:off x="521208" y="2130552"/>
+            <a:ext cx="1965959" cy="681227"/>
+          </a:xfrm>
+          <a:prstGeom prst="rect">
+            <a:avLst/>
+          </a:prstGeom>
+          <a:solidFill>
+            <a:srgbClr val="141414"/>
+          </a:solidFill>
+          <a:ln>
+            <a:noFill/>
+          </a:ln>
+          <a:effectLst/>
+        </p:spPr>
+        <p:style>
+          <a:lnRef idx="1">
+            <a:schemeClr val="accent1"/>
+          </a:lnRef>
+          <a:fillRef idx="3">
+            <a:schemeClr val="accent1"/>
+          </a:fillRef>
+          <a:effectRef idx="2">
+            <a:schemeClr val="accent1"/>
+          </a:effectRef>
+          <a:fontRef idx="minor">
+            <a:schemeClr val="lt1"/>
+          </a:fontRef>
+        </p:style>
+        <p:txBody>
+          <a:bodyPr rtlCol="0" anchor="ctr"/>
+          <a:lstStyle/>
+          <a:p/>
+        </p:txBody>
+      </p:sp>
+      <p:sp>
+        <p:nvSpPr>
+          <p:cNvPr id="19" name="Shape 16"/>
+          <p:cNvSpPr/>
+          <p:nvPr/>
+        </p:nvSpPr>
+        <p:spPr>
+          <a:xfrm>
+            <a:off x="521208" y="2130552"/>
+            <a:ext cx="36576" cy="681227"/>
+          </a:xfrm>
+          <a:prstGeom prst="rect">
+            <a:avLst/>
+          </a:prstGeom>
+          <a:solidFill>
+            <a:srgbClr val="00D6F2"/>
+          </a:solidFill>
+          <a:ln>
+            <a:noFill/>
+          </a:ln>
+          <a:effectLst/>
+        </p:spPr>
+        <p:style>
+          <a:lnRef idx="1">
+            <a:schemeClr val="accent1"/>
+          </a:lnRef>
+          <a:fillRef idx="3">
+            <a:schemeClr val="accent1"/>
+          </a:fillRef>
+          <a:effectRef idx="2">
+            <a:schemeClr val="accent1"/>
+          </a:effectRef>
+          <a:fontRef idx="minor">
+            <a:schemeClr val="lt1"/>
+          </a:fontRef>
+        </p:style>
+        <p:txBody>
+          <a:bodyPr rtlCol="0" anchor="ctr"/>
+          <a:lstStyle/>
+          <a:p/>
+        </p:txBody>
+      </p:sp>
+      <p:sp>
+        <p:nvSpPr>
+          <p:cNvPr id="20" name="Text 17"/>
+          <p:cNvSpPr txBox="1"/>
+          <p:nvPr/>
+        </p:nvSpPr>
+        <p:spPr>
+          <a:xfrm>
+            <a:off x="630936" y="2167128"/>
+            <a:ext cx="1819655" cy="608075"/>
+          </a:xfrm>
+          <a:prstGeom prst="rect">
+            <a:avLst/>
+          </a:prstGeom>
+          <a:noFill/>
+        </p:spPr>
+        <p:txBody>
+          <a:bodyPr wrap="square" lIns="0" rIns="0" tIns="0" bIns="0" anchor="ctr">
+            <a:spAutoFit/>
+          </a:bodyPr>
+          <a:lstStyle/>
+          <a:p>
+            <a:pPr>
+              <a:spcAft>
+                <a:spcPts val="200"/>
+              </a:spcAft>
+            </a:pPr>
+            <a:r>
+              <a:rPr sz="720" b="1" i="0">
+                <a:solidFill>
+                  <a:srgbClr val="F2F2F2"/>
+                </a:solidFill>
+                <a:latin typeface="Trenda IG Text"/>
+              </a:rPr>
+              <a:t>One definition per agent</a:t>
+            </a:r>
+          </a:p>
+          <a:p>
+            <a:pPr>
+              <a:spcAft>
+                <a:spcPts val="200"/>
+              </a:spcAft>
+            </a:pPr>
+            <a:r>
+              <a:rPr sz="700" b="0" i="0">
+                <a:solidFill>
+                  <a:srgbClr val="B3B3B3"/>
+                </a:solidFill>
+                <a:latin typeface="Trenda IG Text"/>
+              </a:rPr>
+              <a:t>plus a skill pack per pod; a new pod adds skills, not agents</a:t>
+            </a:r>
+          </a:p>
+        </p:txBody>
+      </p:sp>
+      <p:sp>
+        <p:nvSpPr>
+          <p:cNvPr id="21" name="Shape 18"/>
+          <p:cNvSpPr/>
+          <p:nvPr/>
+        </p:nvSpPr>
+        <p:spPr>
+          <a:xfrm>
+            <a:off x="521208" y="2884932"/>
+            <a:ext cx="1965959" cy="681227"/>
+          </a:xfrm>
+          <a:prstGeom prst="rect">
+            <a:avLst/>
+          </a:prstGeom>
+          <a:solidFill>
+            <a:srgbClr val="141414"/>
+          </a:solidFill>
+          <a:ln>
+            <a:noFill/>
+          </a:ln>
+          <a:effectLst/>
+        </p:spPr>
+        <p:style>
+          <a:lnRef idx="1">
+            <a:schemeClr val="accent1"/>
+          </a:lnRef>
+          <a:fillRef idx="3">
+            <a:schemeClr val="accent1"/>
+          </a:fillRef>
+          <a:effectRef idx="2">
+            <a:schemeClr val="accent1"/>
+          </a:effectRef>
+          <a:fontRef idx="minor">
+            <a:schemeClr val="lt1"/>
+          </a:fontRef>
+        </p:style>
+        <p:txBody>
+          <a:bodyPr rtlCol="0" anchor="ctr"/>
+          <a:lstStyle/>
+          <a:p/>
+        </p:txBody>
+      </p:sp>
+      <p:sp>
+        <p:nvSpPr>
+          <p:cNvPr id="22" name="Shape 19"/>
+          <p:cNvSpPr/>
+          <p:nvPr/>
+        </p:nvSpPr>
+        <p:spPr>
+          <a:xfrm>
+            <a:off x="521208" y="2884932"/>
+            <a:ext cx="36576" cy="681227"/>
+          </a:xfrm>
+          <a:prstGeom prst="rect">
+            <a:avLst/>
+          </a:prstGeom>
+          <a:solidFill>
+            <a:srgbClr val="00D6F2"/>
+          </a:solidFill>
+          <a:ln>
+            <a:noFill/>
+          </a:ln>
+          <a:effectLst/>
+        </p:spPr>
+        <p:style>
+          <a:lnRef idx="1">
+            <a:schemeClr val="accent1"/>
+          </a:lnRef>
+          <a:fillRef idx="3">
+            <a:schemeClr val="accent1"/>
+          </a:fillRef>
+          <a:effectRef idx="2">
+            <a:schemeClr val="accent1"/>
+          </a:effectRef>
+          <a:fontRef idx="minor">
+            <a:schemeClr val="lt1"/>
+          </a:fontRef>
+        </p:style>
+        <p:txBody>
+          <a:bodyPr rtlCol="0" anchor="ctr"/>
+          <a:lstStyle/>
+          <a:p/>
+        </p:txBody>
+      </p:sp>
+      <p:sp>
+        <p:nvSpPr>
+          <p:cNvPr id="23" name="Text 20"/>
+          <p:cNvSpPr txBox="1"/>
+          <p:nvPr/>
+        </p:nvSpPr>
+        <p:spPr>
+          <a:xfrm>
+            <a:off x="630936" y="2921508"/>
+            <a:ext cx="1819655" cy="608075"/>
+          </a:xfrm>
+          <a:prstGeom prst="rect">
+            <a:avLst/>
+          </a:prstGeom>
+          <a:noFill/>
+        </p:spPr>
+        <p:txBody>
+          <a:bodyPr wrap="square" lIns="0" rIns="0" tIns="0" bIns="0" anchor="ctr">
+            <a:spAutoFit/>
+          </a:bodyPr>
+          <a:lstStyle/>
+          <a:p>
+            <a:pPr>
+              <a:spcAft>
+                <a:spcPts val="200"/>
+              </a:spcAft>
+            </a:pPr>
+            <a:r>
+              <a:rPr sz="720" b="1" i="0">
+                <a:solidFill>
+                  <a:srgbClr val="F2F2F2"/>
+                </a:solidFill>
+                <a:latin typeface="Trenda IG Text"/>
+              </a:rPr>
+              <a:t>Versioned</a:t>
+            </a:r>
+          </a:p>
+          <a:p>
+            <a:pPr>
+              <a:spcAft>
+                <a:spcPts val="200"/>
+              </a:spcAft>
+            </a:pPr>
+            <a:r>
+              <a:rPr sz="700" b="0" i="0">
+                <a:solidFill>
+                  <a:srgbClr val="B3B3B3"/>
+                </a:solidFill>
+                <a:latin typeface="Trenda IG Text"/>
+              </a:rPr>
+              <a:t>prompts, skills and model pinned in config; roll back in one step</a:t>
+            </a:r>
+          </a:p>
+        </p:txBody>
+      </p:sp>
+      <p:sp>
+        <p:nvSpPr>
+          <p:cNvPr id="24" name="Shape 21"/>
+          <p:cNvSpPr/>
+          <p:nvPr/>
+        </p:nvSpPr>
+        <p:spPr>
+          <a:xfrm>
+            <a:off x="521208" y="3639311"/>
+            <a:ext cx="1965959" cy="681227"/>
+          </a:xfrm>
+          <a:prstGeom prst="rect">
+            <a:avLst/>
+          </a:prstGeom>
+          <a:solidFill>
+            <a:srgbClr val="141414"/>
+          </a:solidFill>
+          <a:ln>
+            <a:noFill/>
+          </a:ln>
+          <a:effectLst/>
+        </p:spPr>
+        <p:style>
+          <a:lnRef idx="1">
+            <a:schemeClr val="accent1"/>
+          </a:lnRef>
+          <a:fillRef idx="3">
+            <a:schemeClr val="accent1"/>
+          </a:fillRef>
+          <a:effectRef idx="2">
+            <a:schemeClr val="accent1"/>
+          </a:effectRef>
+          <a:fontRef idx="minor">
+            <a:schemeClr val="lt1"/>
+          </a:fontRef>
+        </p:style>
+        <p:txBody>
+          <a:bodyPr rtlCol="0" anchor="ctr"/>
+          <a:lstStyle/>
+          <a:p/>
+        </p:txBody>
+      </p:sp>
+      <p:sp>
+        <p:nvSpPr>
+          <p:cNvPr id="25" name="Shape 22"/>
+          <p:cNvSpPr/>
+          <p:nvPr/>
+        </p:nvSpPr>
+        <p:spPr>
+          <a:xfrm>
+            <a:off x="521208" y="3639311"/>
+            <a:ext cx="36576" cy="681227"/>
+          </a:xfrm>
+          <a:prstGeom prst="rect">
+            <a:avLst/>
+          </a:prstGeom>
+          <a:solidFill>
+            <a:srgbClr val="00D6F2"/>
+          </a:solidFill>
+          <a:ln>
+            <a:noFill/>
+          </a:ln>
+          <a:effectLst/>
+        </p:spPr>
+        <p:style>
+          <a:lnRef idx="1">
+            <a:schemeClr val="accent1"/>
+          </a:lnRef>
+          <a:fillRef idx="3">
+            <a:schemeClr val="accent1"/>
+          </a:fillRef>
+          <a:effectRef idx="2">
+            <a:schemeClr val="accent1"/>
+          </a:effectRef>
+          <a:fontRef idx="minor">
+            <a:schemeClr val="lt1"/>
+          </a:fontRef>
+        </p:style>
+        <p:txBody>
+          <a:bodyPr rtlCol="0" anchor="ctr"/>
+          <a:lstStyle/>
+          <a:p/>
+        </p:txBody>
+      </p:sp>
+      <p:sp>
+        <p:nvSpPr>
+          <p:cNvPr id="26" name="Text 23"/>
+          <p:cNvSpPr txBox="1"/>
+          <p:nvPr/>
+        </p:nvSpPr>
+        <p:spPr>
+          <a:xfrm>
+            <a:off x="630936" y="3675887"/>
+            <a:ext cx="1819655" cy="608075"/>
+          </a:xfrm>
+          <a:prstGeom prst="rect">
+            <a:avLst/>
+          </a:prstGeom>
+          <a:noFill/>
+        </p:spPr>
+        <p:txBody>
+          <a:bodyPr wrap="square" lIns="0" rIns="0" tIns="0" bIns="0" anchor="ctr">
+            <a:spAutoFit/>
+          </a:bodyPr>
+          <a:lstStyle/>
+          <a:p>
+            <a:pPr>
+              <a:spcAft>
+                <a:spcPts val="200"/>
+              </a:spcAft>
+            </a:pPr>
+            <a:r>
+              <a:rPr sz="720" b="1" i="0">
+                <a:solidFill>
+                  <a:srgbClr val="F2F2F2"/>
+                </a:solidFill>
+                <a:latin typeface="Trenda IG Text"/>
+              </a:rPr>
+              <a:t>Eval gate</a:t>
+            </a:r>
+          </a:p>
+          <a:p>
+            <a:pPr>
+              <a:spcAft>
+                <a:spcPts val="200"/>
+              </a:spcAft>
+            </a:pPr>
+            <a:r>
+              <a:rPr sz="700" b="0" i="0">
+                <a:solidFill>
+                  <a:srgbClr val="B3B3B3"/>
+                </a:solidFill>
+                <a:latin typeface="Trenda IG Text"/>
+              </a:rPr>
+              <a:t>a new agent version ships only if it passes its eval set</a:t>
+            </a:r>
+          </a:p>
+        </p:txBody>
+      </p:sp>
+      <p:sp>
+        <p:nvSpPr>
+          <p:cNvPr id="27" name="Shape 24"/>
+          <p:cNvSpPr/>
+          <p:nvPr/>
+        </p:nvSpPr>
+        <p:spPr>
+          <a:xfrm>
+            <a:off x="521208" y="4393692"/>
+            <a:ext cx="1965959" cy="681227"/>
+          </a:xfrm>
+          <a:prstGeom prst="rect">
+            <a:avLst/>
+          </a:prstGeom>
+          <a:solidFill>
+            <a:srgbClr val="141414"/>
+          </a:solidFill>
+          <a:ln>
+            <a:noFill/>
+          </a:ln>
+          <a:effectLst/>
+        </p:spPr>
+        <p:style>
+          <a:lnRef idx="1">
+            <a:schemeClr val="accent1"/>
+          </a:lnRef>
+          <a:fillRef idx="3">
+            <a:schemeClr val="accent1"/>
+          </a:fillRef>
+          <a:effectRef idx="2">
+            <a:schemeClr val="accent1"/>
+          </a:effectRef>
+          <a:fontRef idx="minor">
+            <a:schemeClr val="lt1"/>
+          </a:fontRef>
+        </p:style>
+        <p:txBody>
+          <a:bodyPr rtlCol="0" anchor="ctr"/>
+          <a:lstStyle/>
+          <a:p/>
+        </p:txBody>
+      </p:sp>
+      <p:sp>
+        <p:nvSpPr>
+          <p:cNvPr id="28" name="Shape 25"/>
+          <p:cNvSpPr/>
+          <p:nvPr/>
+        </p:nvSpPr>
+        <p:spPr>
+          <a:xfrm>
+            <a:off x="521208" y="4393692"/>
+            <a:ext cx="36576" cy="681227"/>
+          </a:xfrm>
+          <a:prstGeom prst="rect">
+            <a:avLst/>
+          </a:prstGeom>
+          <a:solidFill>
+            <a:srgbClr val="00D6F2"/>
+          </a:solidFill>
+          <a:ln>
+            <a:noFill/>
+          </a:ln>
+          <a:effectLst/>
+        </p:spPr>
+        <p:style>
+          <a:lnRef idx="1">
+            <a:schemeClr val="accent1"/>
+          </a:lnRef>
+          <a:fillRef idx="3">
+            <a:schemeClr val="accent1"/>
+          </a:fillRef>
+          <a:effectRef idx="2">
+            <a:schemeClr val="accent1"/>
+          </a:effectRef>
+          <a:fontRef idx="minor">
+            <a:schemeClr val="lt1"/>
+          </a:fontRef>
+        </p:style>
+        <p:txBody>
+          <a:bodyPr rtlCol="0" anchor="ctr"/>
+          <a:lstStyle/>
+          <a:p/>
+        </p:txBody>
+      </p:sp>
+      <p:sp>
+        <p:nvSpPr>
+          <p:cNvPr id="29" name="Text 26"/>
+          <p:cNvSpPr txBox="1"/>
+          <p:nvPr/>
+        </p:nvSpPr>
+        <p:spPr>
+          <a:xfrm>
+            <a:off x="630936" y="4430268"/>
+            <a:ext cx="1819655" cy="608075"/>
+          </a:xfrm>
+          <a:prstGeom prst="rect">
+            <a:avLst/>
+          </a:prstGeom>
+          <a:noFill/>
+        </p:spPr>
+        <p:txBody>
+          <a:bodyPr wrap="square" lIns="0" rIns="0" tIns="0" bIns="0" anchor="ctr">
+            <a:spAutoFit/>
+          </a:bodyPr>
+          <a:lstStyle/>
+          <a:p>
+            <a:pPr>
+              <a:spcAft>
+                <a:spcPts val="200"/>
+              </a:spcAft>
+            </a:pPr>
+            <a:r>
+              <a:rPr sz="720" b="1" i="0">
+                <a:solidFill>
+                  <a:srgbClr val="F2F2F2"/>
+                </a:solidFill>
+                <a:latin typeface="Trenda IG Text"/>
+              </a:rPr>
+              <a:t>Pod by pod</a:t>
+            </a:r>
+          </a:p>
+          <a:p>
+            <a:pPr>
+              <a:spcAft>
+                <a:spcPts val="200"/>
+              </a:spcAft>
+            </a:pPr>
+            <a:r>
+              <a:rPr sz="700" b="0" i="0">
+                <a:solidFill>
+                  <a:srgbClr val="B3B3B3"/>
+                </a:solidFill>
+                <a:latin typeface="Trenda IG Text"/>
+              </a:rPr>
+              <a:t>onboard one pod, measure it, then the next</a:t>
+            </a:r>
+          </a:p>
+        </p:txBody>
+      </p:sp>
+      <p:sp>
+        <p:nvSpPr>
+          <p:cNvPr id="30" name="Shape 27"/>
+          <p:cNvSpPr/>
+          <p:nvPr/>
+        </p:nvSpPr>
+        <p:spPr>
+          <a:xfrm>
+            <a:off x="2706624" y="1783080"/>
+            <a:ext cx="2185415" cy="3310128"/>
+          </a:xfrm>
+          <a:prstGeom prst="roundRect">
+            <a:avLst>
+              <a:gd name="adj" fmla="val 2000"/>
+            </a:avLst>
+          </a:prstGeom>
+          <a:solidFill>
+            <a:srgbClr val="1E1E1E"/>
+          </a:solidFill>
+          <a:ln>
+            <a:noFill/>
+          </a:ln>
+          <a:effectLst/>
+        </p:spPr>
+        <p:style>
+          <a:lnRef idx="1">
+            <a:schemeClr val="accent1"/>
+          </a:lnRef>
+          <a:fillRef idx="3">
+            <a:schemeClr val="accent1"/>
+          </a:fillRef>
+          <a:effectRef idx="2">
+            <a:schemeClr val="accent1"/>
+          </a:effectRef>
+          <a:fontRef idx="minor">
+            <a:schemeClr val="lt1"/>
+          </a:fontRef>
+        </p:style>
+        <p:txBody>
+          <a:bodyPr rtlCol="0" anchor="ctr"/>
+          <a:lstStyle/>
+          <a:p/>
+        </p:txBody>
+      </p:sp>
+      <p:sp>
+        <p:nvSpPr>
+          <p:cNvPr id="31" name="Shape 28"/>
+          <p:cNvSpPr/>
+          <p:nvPr/>
+        </p:nvSpPr>
+        <p:spPr>
+          <a:xfrm>
+            <a:off x="2706624" y="1783080"/>
+            <a:ext cx="2185415" cy="256032"/>
+          </a:xfrm>
+          <a:prstGeom prst="rect">
+            <a:avLst/>
+          </a:prstGeom>
+          <a:solidFill>
+            <a:srgbClr val="2B2B2B"/>
+          </a:solidFill>
+          <a:ln>
+            <a:noFill/>
+          </a:ln>
+          <a:effectLst/>
+        </p:spPr>
+        <p:style>
+          <a:lnRef idx="1">
+            <a:schemeClr val="accent1"/>
+          </a:lnRef>
+          <a:fillRef idx="3">
+            <a:schemeClr val="accent1"/>
+          </a:fillRef>
+          <a:effectRef idx="2">
+            <a:schemeClr val="accent1"/>
+          </a:effectRef>
+          <a:fontRef idx="minor">
+            <a:schemeClr val="lt1"/>
+          </a:fontRef>
+        </p:style>
+        <p:txBody>
+          <a:bodyPr rtlCol="0" anchor="ctr"/>
+          <a:lstStyle/>
+          <a:p/>
+        </p:txBody>
+      </p:sp>
+      <p:sp>
+        <p:nvSpPr>
+          <p:cNvPr id="32" name="Text 29"/>
+          <p:cNvSpPr txBox="1"/>
+          <p:nvPr/>
+        </p:nvSpPr>
+        <p:spPr>
+          <a:xfrm>
+            <a:off x="2816352" y="1783080"/>
+            <a:ext cx="1965959" cy="256032"/>
+          </a:xfrm>
+          <a:prstGeom prst="rect">
+            <a:avLst/>
+          </a:prstGeom>
+          <a:noFill/>
+        </p:spPr>
+        <p:txBody>
+          <a:bodyPr wrap="square" lIns="0" rIns="0" tIns="0" bIns="0" anchor="ctr">
+            <a:spAutoFit/>
+          </a:bodyPr>
+          <a:lstStyle/>
+          <a:p>
+            <a:r>
+              <a:rPr sz="700" b="1" i="0" spc="120">
+                <a:solidFill>
+                  <a:srgbClr val="F2F2F2"/>
+                </a:solidFill>
+                <a:latin typeface="Trenda IG Text"/>
+              </a:rPr>
+              <a:t>HOW IT SCALES</a:t>
+            </a:r>
+            <a:r>
+              <a:rPr sz="700" b="0" i="0">
+                <a:solidFill>
+                  <a:srgbClr val="B3B3B3"/>
+                </a:solidFill>
+                <a:latin typeface="Trenda IG Text"/>
+              </a:rPr>
+              <a:t>   concurrency</a:t>
+            </a:r>
+          </a:p>
+        </p:txBody>
+      </p:sp>
+      <p:sp>
+        <p:nvSpPr>
+          <p:cNvPr id="33" name="Shape 30"/>
+          <p:cNvSpPr/>
+          <p:nvPr/>
+        </p:nvSpPr>
+        <p:spPr>
+          <a:xfrm>
+            <a:off x="2816352" y="2130552"/>
+            <a:ext cx="1965959" cy="681227"/>
+          </a:xfrm>
+          <a:prstGeom prst="rect">
+            <a:avLst/>
+          </a:prstGeom>
+          <a:solidFill>
+            <a:srgbClr val="141414"/>
+          </a:solidFill>
+          <a:ln>
+            <a:noFill/>
+          </a:ln>
+          <a:effectLst/>
+        </p:spPr>
+        <p:style>
+          <a:lnRef idx="1">
+            <a:schemeClr val="accent1"/>
+          </a:lnRef>
+          <a:fillRef idx="3">
+            <a:schemeClr val="accent1"/>
+          </a:fillRef>
+          <a:effectRef idx="2">
+            <a:schemeClr val="accent1"/>
+          </a:effectRef>
+          <a:fontRef idx="minor">
+            <a:schemeClr val="lt1"/>
+          </a:fontRef>
+        </p:style>
+        <p:txBody>
+          <a:bodyPr rtlCol="0" anchor="ctr"/>
+          <a:lstStyle/>
+          <a:p/>
+        </p:txBody>
+      </p:sp>
+      <p:sp>
+        <p:nvSpPr>
+          <p:cNvPr id="34" name="Shape 31"/>
+          <p:cNvSpPr/>
+          <p:nvPr/>
+        </p:nvSpPr>
+        <p:spPr>
+          <a:xfrm>
+            <a:off x="2816352" y="2130552"/>
+            <a:ext cx="36576" cy="681227"/>
+          </a:xfrm>
+          <a:prstGeom prst="rect">
+            <a:avLst/>
+          </a:prstGeom>
+          <a:solidFill>
+            <a:srgbClr val="00D6F2"/>
+          </a:solidFill>
+          <a:ln>
+            <a:noFill/>
+          </a:ln>
+          <a:effectLst/>
+        </p:spPr>
+        <p:style>
+          <a:lnRef idx="1">
+            <a:schemeClr val="accent1"/>
+          </a:lnRef>
+          <a:fillRef idx="3">
+            <a:schemeClr val="accent1"/>
+          </a:fillRef>
+          <a:effectRef idx="2">
+            <a:schemeClr val="accent1"/>
+          </a:effectRef>
+          <a:fontRef idx="minor">
+            <a:schemeClr val="lt1"/>
+          </a:fontRef>
+        </p:style>
+        <p:txBody>
+          <a:bodyPr rtlCol="0" anchor="ctr"/>
+          <a:lstStyle/>
+          <a:p/>
+        </p:txBody>
+      </p:sp>
+      <p:sp>
+        <p:nvSpPr>
+          <p:cNvPr id="35" name="Text 32"/>
+          <p:cNvSpPr txBox="1"/>
+          <p:nvPr/>
+        </p:nvSpPr>
+        <p:spPr>
+          <a:xfrm>
+            <a:off x="2926080" y="2167128"/>
+            <a:ext cx="1819655" cy="608075"/>
+          </a:xfrm>
+          <a:prstGeom prst="rect">
+            <a:avLst/>
+          </a:prstGeom>
+          <a:noFill/>
+        </p:spPr>
+        <p:txBody>
+          <a:bodyPr wrap="square" lIns="0" rIns="0" tIns="0" bIns="0" anchor="ctr">
+            <a:spAutoFit/>
+          </a:bodyPr>
+          <a:lstStyle/>
+          <a:p>
+            <a:pPr>
+              <a:spcAft>
+                <a:spcPts val="200"/>
+              </a:spcAft>
+            </a:pPr>
+            <a:r>
+              <a:rPr sz="720" b="1" i="0">
+                <a:solidFill>
+                  <a:srgbClr val="F2F2F2"/>
+                </a:solidFill>
+                <a:latin typeface="Trenda IG Text"/>
+              </a:rPr>
+              <a:t>One isolated run per request</a:t>
+            </a:r>
+          </a:p>
+          <a:p>
+            <a:pPr>
+              <a:spcAft>
+                <a:spcPts val="200"/>
+              </a:spcAft>
+            </a:pPr>
+            <a:r>
+              <a:rPr sz="700" b="0" i="0">
+                <a:solidFill>
+                  <a:srgbClr val="B3B3B3"/>
+                </a:solidFill>
+                <a:latin typeface="Trenda IG Text"/>
+              </a:rPr>
+              <a:t>own container, context, branch and checkpoint; no shared memory</a:t>
+            </a:r>
+          </a:p>
+        </p:txBody>
+      </p:sp>
+      <p:sp>
+        <p:nvSpPr>
+          <p:cNvPr id="36" name="Shape 33"/>
+          <p:cNvSpPr/>
+          <p:nvPr/>
+        </p:nvSpPr>
+        <p:spPr>
+          <a:xfrm>
+            <a:off x="2816352" y="2884932"/>
+            <a:ext cx="1965959" cy="681227"/>
+          </a:xfrm>
+          <a:prstGeom prst="rect">
+            <a:avLst/>
+          </a:prstGeom>
+          <a:solidFill>
+            <a:srgbClr val="141414"/>
+          </a:solidFill>
+          <a:ln>
+            <a:noFill/>
+          </a:ln>
+          <a:effectLst/>
+        </p:spPr>
+        <p:style>
+          <a:lnRef idx="1">
+            <a:schemeClr val="accent1"/>
+          </a:lnRef>
+          <a:fillRef idx="3">
+            <a:schemeClr val="accent1"/>
+          </a:fillRef>
+          <a:effectRef idx="2">
+            <a:schemeClr val="accent1"/>
+          </a:effectRef>
+          <a:fontRef idx="minor">
+            <a:schemeClr val="lt1"/>
+          </a:fontRef>
+        </p:style>
+        <p:txBody>
+          <a:bodyPr rtlCol="0" anchor="ctr"/>
+          <a:lstStyle/>
+          <a:p/>
+        </p:txBody>
+      </p:sp>
+      <p:sp>
+        <p:nvSpPr>
+          <p:cNvPr id="37" name="Shape 34"/>
+          <p:cNvSpPr/>
+          <p:nvPr/>
+        </p:nvSpPr>
+        <p:spPr>
+          <a:xfrm>
+            <a:off x="2816352" y="2884932"/>
+            <a:ext cx="36576" cy="681227"/>
+          </a:xfrm>
+          <a:prstGeom prst="rect">
+            <a:avLst/>
+          </a:prstGeom>
+          <a:solidFill>
+            <a:srgbClr val="00D6F2"/>
+          </a:solidFill>
+          <a:ln>
+            <a:noFill/>
+          </a:ln>
+          <a:effectLst/>
+        </p:spPr>
+        <p:style>
+          <a:lnRef idx="1">
+            <a:schemeClr val="accent1"/>
+          </a:lnRef>
+          <a:fillRef idx="3">
+            <a:schemeClr val="accent1"/>
+          </a:fillRef>
+          <a:effectRef idx="2">
+            <a:schemeClr val="accent1"/>
+          </a:effectRef>
+          <a:fontRef idx="minor">
+            <a:schemeClr val="lt1"/>
+          </a:fontRef>
+        </p:style>
+        <p:txBody>
+          <a:bodyPr rtlCol="0" anchor="ctr"/>
+          <a:lstStyle/>
+          <a:p/>
+        </p:txBody>
+      </p:sp>
+      <p:sp>
+        <p:nvSpPr>
+          <p:cNvPr id="38" name="Text 35"/>
+          <p:cNvSpPr txBox="1"/>
+          <p:nvPr/>
+        </p:nvSpPr>
+        <p:spPr>
+          <a:xfrm>
+            <a:off x="2926080" y="2921508"/>
+            <a:ext cx="1819655" cy="608075"/>
+          </a:xfrm>
+          <a:prstGeom prst="rect">
+            <a:avLst/>
+          </a:prstGeom>
+          <a:noFill/>
+        </p:spPr>
+        <p:txBody>
+          <a:bodyPr wrap="square" lIns="0" rIns="0" tIns="0" bIns="0" anchor="ctr">
+            <a:spAutoFit/>
+          </a:bodyPr>
+          <a:lstStyle/>
+          <a:p>
+            <a:pPr>
+              <a:spcAft>
+                <a:spcPts val="200"/>
+              </a:spcAft>
+            </a:pPr>
+            <a:r>
+              <a:rPr sz="720" b="1" i="0">
+                <a:solidFill>
+                  <a:srgbClr val="F2F2F2"/>
+                </a:solidFill>
+                <a:latin typeface="Trenda IG Text"/>
+              </a:rPr>
+              <a:t>Up to 3 runs per pod</a:t>
+            </a:r>
+          </a:p>
+          <a:p>
+            <a:pPr>
+              <a:spcAft>
+                <a:spcPts val="200"/>
+              </a:spcAft>
+            </a:pPr>
+            <a:r>
+              <a:rPr sz="700" b="0" i="0">
+                <a:solidFill>
+                  <a:srgbClr val="B3B3B3"/>
+                </a:solidFill>
+                <a:latin typeface="Trenda IG Text"/>
+              </a:rPr>
+              <a:t>fair share: no pod crowds out another</a:t>
+            </a:r>
+          </a:p>
+        </p:txBody>
+      </p:sp>
+      <p:sp>
+        <p:nvSpPr>
+          <p:cNvPr id="39" name="Shape 36"/>
+          <p:cNvSpPr/>
+          <p:nvPr/>
+        </p:nvSpPr>
+        <p:spPr>
+          <a:xfrm>
+            <a:off x="2816352" y="3639311"/>
+            <a:ext cx="1965959" cy="681227"/>
+          </a:xfrm>
+          <a:prstGeom prst="rect">
+            <a:avLst/>
+          </a:prstGeom>
+          <a:solidFill>
+            <a:srgbClr val="141414"/>
+          </a:solidFill>
+          <a:ln>
+            <a:noFill/>
+          </a:ln>
+          <a:effectLst/>
+        </p:spPr>
+        <p:style>
+          <a:lnRef idx="1">
+            <a:schemeClr val="accent1"/>
+          </a:lnRef>
+          <a:fillRef idx="3">
+            <a:schemeClr val="accent1"/>
+          </a:fillRef>
+          <a:effectRef idx="2">
+            <a:schemeClr val="accent1"/>
+          </a:effectRef>
+          <a:fontRef idx="minor">
+            <a:schemeClr val="lt1"/>
+          </a:fontRef>
+        </p:style>
+        <p:txBody>
+          <a:bodyPr rtlCol="0" anchor="ctr"/>
+          <a:lstStyle/>
+          <a:p/>
+        </p:txBody>
+      </p:sp>
+      <p:sp>
+        <p:nvSpPr>
+          <p:cNvPr id="40" name="Shape 37"/>
+          <p:cNvSpPr/>
+          <p:nvPr/>
+        </p:nvSpPr>
+        <p:spPr>
+          <a:xfrm>
+            <a:off x="2816352" y="3639311"/>
+            <a:ext cx="36576" cy="681227"/>
+          </a:xfrm>
+          <a:prstGeom prst="rect">
+            <a:avLst/>
+          </a:prstGeom>
+          <a:solidFill>
+            <a:srgbClr val="00D6F2"/>
+          </a:solidFill>
+          <a:ln>
+            <a:noFill/>
+          </a:ln>
+          <a:effectLst/>
+        </p:spPr>
+        <p:style>
+          <a:lnRef idx="1">
+            <a:schemeClr val="accent1"/>
+          </a:lnRef>
+          <a:fillRef idx="3">
+            <a:schemeClr val="accent1"/>
+          </a:fillRef>
+          <a:effectRef idx="2">
+            <a:schemeClr val="accent1"/>
+          </a:effectRef>
+          <a:fontRef idx="minor">
+            <a:schemeClr val="lt1"/>
+          </a:fontRef>
+        </p:style>
+        <p:txBody>
+          <a:bodyPr rtlCol="0" anchor="ctr"/>
+          <a:lstStyle/>
+          <a:p/>
+        </p:txBody>
+      </p:sp>
+      <p:sp>
+        <p:nvSpPr>
+          <p:cNvPr id="41" name="Text 38"/>
+          <p:cNvSpPr txBox="1"/>
+          <p:nvPr/>
+        </p:nvSpPr>
+        <p:spPr>
+          <a:xfrm>
+            <a:off x="2926080" y="3675887"/>
+            <a:ext cx="1819655" cy="608075"/>
+          </a:xfrm>
+          <a:prstGeom prst="rect">
+            <a:avLst/>
+          </a:prstGeom>
+          <a:noFill/>
+        </p:spPr>
+        <p:txBody>
+          <a:bodyPr wrap="square" lIns="0" rIns="0" tIns="0" bIns="0" anchor="ctr">
+            <a:spAutoFit/>
+          </a:bodyPr>
+          <a:lstStyle/>
+          <a:p>
+            <a:pPr>
+              <a:spcAft>
+                <a:spcPts val="200"/>
+              </a:spcAft>
+            </a:pPr>
+            <a:r>
+              <a:rPr sz="720" b="1" i="0">
+                <a:solidFill>
+                  <a:srgbClr val="F2F2F2"/>
+                </a:solidFill>
+                <a:latin typeface="Trenda IG Text"/>
+              </a:rPr>
+              <a:t>About 30 runs at once</a:t>
+            </a:r>
+          </a:p>
+          <a:p>
+            <a:pPr>
+              <a:spcAft>
+                <a:spcPts val="200"/>
+              </a:spcAft>
+            </a:pPr>
+            <a:r>
+              <a:rPr sz="700" b="0" i="0">
+                <a:solidFill>
+                  <a:srgbClr val="B3B3B3"/>
+                </a:solidFill>
+                <a:latin typeface="Trenda IG Text"/>
+              </a:rPr>
+              <a:t>set by model and API quotas; proposed, sized in the Phase 0 load test</a:t>
+            </a:r>
+          </a:p>
+        </p:txBody>
+      </p:sp>
+      <p:sp>
+        <p:nvSpPr>
+          <p:cNvPr id="42" name="Shape 39"/>
+          <p:cNvSpPr/>
+          <p:nvPr/>
+        </p:nvSpPr>
+        <p:spPr>
+          <a:xfrm>
+            <a:off x="2816352" y="4393692"/>
+            <a:ext cx="1965959" cy="681227"/>
+          </a:xfrm>
+          <a:prstGeom prst="rect">
+            <a:avLst/>
+          </a:prstGeom>
+          <a:solidFill>
+            <a:srgbClr val="141414"/>
+          </a:solidFill>
+          <a:ln>
+            <a:noFill/>
+          </a:ln>
+          <a:effectLst/>
+        </p:spPr>
+        <p:style>
+          <a:lnRef idx="1">
+            <a:schemeClr val="accent1"/>
+          </a:lnRef>
+          <a:fillRef idx="3">
+            <a:schemeClr val="accent1"/>
+          </a:fillRef>
+          <a:effectRef idx="2">
+            <a:schemeClr val="accent1"/>
+          </a:effectRef>
+          <a:fontRef idx="minor">
+            <a:schemeClr val="lt1"/>
+          </a:fontRef>
+        </p:style>
+        <p:txBody>
+          <a:bodyPr rtlCol="0" anchor="ctr"/>
+          <a:lstStyle/>
+          <a:p/>
+        </p:txBody>
+      </p:sp>
+      <p:sp>
+        <p:nvSpPr>
+          <p:cNvPr id="43" name="Shape 40"/>
+          <p:cNvSpPr/>
+          <p:nvPr/>
+        </p:nvSpPr>
+        <p:spPr>
+          <a:xfrm>
+            <a:off x="2816352" y="4393692"/>
+            <a:ext cx="36576" cy="681227"/>
+          </a:xfrm>
+          <a:prstGeom prst="rect">
+            <a:avLst/>
+          </a:prstGeom>
+          <a:solidFill>
+            <a:srgbClr val="00D6F2"/>
+          </a:solidFill>
+          <a:ln>
+            <a:noFill/>
+          </a:ln>
+          <a:effectLst/>
+        </p:spPr>
+        <p:style>
+          <a:lnRef idx="1">
+            <a:schemeClr val="accent1"/>
+          </a:lnRef>
+          <a:fillRef idx="3">
+            <a:schemeClr val="accent1"/>
+          </a:fillRef>
+          <a:effectRef idx="2">
+            <a:schemeClr val="accent1"/>
+          </a:effectRef>
+          <a:fontRef idx="minor">
+            <a:schemeClr val="lt1"/>
+          </a:fontRef>
+        </p:style>
+        <p:txBody>
+          <a:bodyPr rtlCol="0" anchor="ctr"/>
+          <a:lstStyle/>
+          <a:p/>
+        </p:txBody>
+      </p:sp>
+      <p:sp>
+        <p:nvSpPr>
+          <p:cNvPr id="44" name="Text 41"/>
+          <p:cNvSpPr txBox="1"/>
+          <p:nvPr/>
+        </p:nvSpPr>
+        <p:spPr>
+          <a:xfrm>
+            <a:off x="2926080" y="4430268"/>
+            <a:ext cx="1819655" cy="608075"/>
+          </a:xfrm>
+          <a:prstGeom prst="rect">
+            <a:avLst/>
+          </a:prstGeom>
+          <a:noFill/>
+        </p:spPr>
+        <p:txBody>
+          <a:bodyPr wrap="square" lIns="0" rIns="0" tIns="0" bIns="0" anchor="ctr">
+            <a:spAutoFit/>
+          </a:bodyPr>
+          <a:lstStyle/>
+          <a:p>
+            <a:pPr>
+              <a:spcAft>
+                <a:spcPts val="200"/>
+              </a:spcAft>
+            </a:pPr>
+            <a:r>
+              <a:rPr sz="720" b="1" i="0">
+                <a:solidFill>
+                  <a:srgbClr val="F2F2F2"/>
+                </a:solidFill>
+                <a:latin typeface="Trenda IG Text"/>
+              </a:rPr>
+              <a:t>Queued, never dropped</a:t>
+            </a:r>
+          </a:p>
+          <a:p>
+            <a:pPr>
+              <a:spcAft>
+                <a:spcPts val="200"/>
+              </a:spcAft>
+            </a:pPr>
+            <a:r>
+              <a:rPr sz="700" b="0" i="0">
+                <a:solidFill>
+                  <a:srgbClr val="B3B3B3"/>
+                </a:solidFill>
+                <a:latin typeface="Trenda IG Text"/>
+              </a:rPr>
+              <a:t>waits its turn, resumes from checkpoints; the wait time is measured</a:t>
+            </a:r>
+          </a:p>
+        </p:txBody>
+      </p:sp>
+      <p:sp>
+        <p:nvSpPr>
+          <p:cNvPr id="45" name="Shape 42"/>
+          <p:cNvSpPr/>
+          <p:nvPr/>
+        </p:nvSpPr>
+        <p:spPr>
+          <a:xfrm>
+            <a:off x="5001768" y="1783080"/>
+            <a:ext cx="2185415" cy="3310128"/>
+          </a:xfrm>
+          <a:prstGeom prst="roundRect">
+            <a:avLst>
+              <a:gd name="adj" fmla="val 2000"/>
+            </a:avLst>
+          </a:prstGeom>
+          <a:solidFill>
+            <a:srgbClr val="1E1E1E"/>
+          </a:solidFill>
+          <a:ln>
+            <a:noFill/>
+          </a:ln>
+          <a:effectLst/>
+        </p:spPr>
+        <p:style>
+          <a:lnRef idx="1">
+            <a:schemeClr val="accent1"/>
+          </a:lnRef>
+          <a:fillRef idx="3">
+            <a:schemeClr val="accent1"/>
+          </a:fillRef>
+          <a:effectRef idx="2">
+            <a:schemeClr val="accent1"/>
+          </a:effectRef>
+          <a:fontRef idx="minor">
+            <a:schemeClr val="lt1"/>
+          </a:fontRef>
+        </p:style>
+        <p:txBody>
+          <a:bodyPr rtlCol="0" anchor="ctr"/>
+          <a:lstStyle/>
+          <a:p/>
+        </p:txBody>
+      </p:sp>
+      <p:sp>
+        <p:nvSpPr>
+          <p:cNvPr id="46" name="Shape 43"/>
+          <p:cNvSpPr/>
+          <p:nvPr/>
+        </p:nvSpPr>
+        <p:spPr>
+          <a:xfrm>
+            <a:off x="5001768" y="1783080"/>
+            <a:ext cx="2185415" cy="256032"/>
+          </a:xfrm>
+          <a:prstGeom prst="rect">
+            <a:avLst/>
+          </a:prstGeom>
+          <a:solidFill>
+            <a:srgbClr val="2B2B2B"/>
+          </a:solidFill>
+          <a:ln>
+            <a:noFill/>
+          </a:ln>
+          <a:effectLst/>
+        </p:spPr>
+        <p:style>
+          <a:lnRef idx="1">
+            <a:schemeClr val="accent1"/>
+          </a:lnRef>
+          <a:fillRef idx="3">
+            <a:schemeClr val="accent1"/>
+          </a:fillRef>
+          <a:effectRef idx="2">
+            <a:schemeClr val="accent1"/>
+          </a:effectRef>
+          <a:fontRef idx="minor">
+            <a:schemeClr val="lt1"/>
+          </a:fontRef>
+        </p:style>
+        <p:txBody>
+          <a:bodyPr rtlCol="0" anchor="ctr"/>
+          <a:lstStyle/>
+          <a:p/>
+        </p:txBody>
+      </p:sp>
+      <p:sp>
+        <p:nvSpPr>
+          <p:cNvPr id="47" name="Text 44"/>
+          <p:cNvSpPr txBox="1"/>
+          <p:nvPr/>
+        </p:nvSpPr>
+        <p:spPr>
+          <a:xfrm>
+            <a:off x="5111496" y="1783080"/>
+            <a:ext cx="1965959" cy="256032"/>
+          </a:xfrm>
+          <a:prstGeom prst="rect">
+            <a:avLst/>
+          </a:prstGeom>
+          <a:noFill/>
+        </p:spPr>
+        <p:txBody>
+          <a:bodyPr wrap="square" lIns="0" rIns="0" tIns="0" bIns="0" anchor="ctr">
+            <a:spAutoFit/>
+          </a:bodyPr>
+          <a:lstStyle/>
+          <a:p>
+            <a:r>
+              <a:rPr sz="700" b="1" i="0" spc="120">
+                <a:solidFill>
+                  <a:srgbClr val="F2F2F2"/>
+                </a:solidFill>
+                <a:latin typeface="Trenda IG Text"/>
+              </a:rPr>
+              <a:t>HOW IT STAYS ACCURATE</a:t>
+            </a:r>
+            <a:r>
+              <a:rPr sz="700" b="0" i="0">
+                <a:solidFill>
+                  <a:srgbClr val="B3B3B3"/>
+                </a:solidFill>
+                <a:latin typeface="Trenda IG Text"/>
+              </a:rPr>
+              <a:t>   accuracy</a:t>
+            </a:r>
+          </a:p>
+        </p:txBody>
+      </p:sp>
+      <p:sp>
+        <p:nvSpPr>
+          <p:cNvPr id="48" name="Shape 45"/>
+          <p:cNvSpPr/>
+          <p:nvPr/>
+        </p:nvSpPr>
+        <p:spPr>
+          <a:xfrm>
+            <a:off x="5111496" y="2130552"/>
+            <a:ext cx="1965959" cy="681227"/>
+          </a:xfrm>
+          <a:prstGeom prst="rect">
+            <a:avLst/>
+          </a:prstGeom>
+          <a:solidFill>
+            <a:srgbClr val="141414"/>
+          </a:solidFill>
+          <a:ln>
+            <a:noFill/>
+          </a:ln>
+          <a:effectLst/>
+        </p:spPr>
+        <p:style>
+          <a:lnRef idx="1">
+            <a:schemeClr val="accent1"/>
+          </a:lnRef>
+          <a:fillRef idx="3">
+            <a:schemeClr val="accent1"/>
+          </a:fillRef>
+          <a:effectRef idx="2">
+            <a:schemeClr val="accent1"/>
+          </a:effectRef>
+          <a:fontRef idx="minor">
+            <a:schemeClr val="lt1"/>
+          </a:fontRef>
+        </p:style>
+        <p:txBody>
+          <a:bodyPr rtlCol="0" anchor="ctr"/>
+          <a:lstStyle/>
+          <a:p/>
+        </p:txBody>
+      </p:sp>
+      <p:sp>
+        <p:nvSpPr>
+          <p:cNvPr id="49" name="Shape 46"/>
+          <p:cNvSpPr/>
+          <p:nvPr/>
+        </p:nvSpPr>
+        <p:spPr>
+          <a:xfrm>
+            <a:off x="5111496" y="2130552"/>
+            <a:ext cx="36576" cy="681227"/>
+          </a:xfrm>
+          <a:prstGeom prst="rect">
+            <a:avLst/>
+          </a:prstGeom>
+          <a:solidFill>
+            <a:srgbClr val="00D6F2"/>
+          </a:solidFill>
+          <a:ln>
+            <a:noFill/>
+          </a:ln>
+          <a:effectLst/>
+        </p:spPr>
+        <p:style>
+          <a:lnRef idx="1">
+            <a:schemeClr val="accent1"/>
+          </a:lnRef>
+          <a:fillRef idx="3">
+            <a:schemeClr val="accent1"/>
+          </a:fillRef>
+          <a:effectRef idx="2">
+            <a:schemeClr val="accent1"/>
+          </a:effectRef>
+          <a:fontRef idx="minor">
+            <a:schemeClr val="lt1"/>
+          </a:fontRef>
+        </p:style>
+        <p:txBody>
+          <a:bodyPr rtlCol="0" anchor="ctr"/>
+          <a:lstStyle/>
+          <a:p/>
+        </p:txBody>
+      </p:sp>
+      <p:sp>
+        <p:nvSpPr>
+          <p:cNvPr id="50" name="Text 47"/>
+          <p:cNvSpPr txBox="1"/>
+          <p:nvPr/>
+        </p:nvSpPr>
+        <p:spPr>
+          <a:xfrm>
+            <a:off x="5221224" y="2167128"/>
+            <a:ext cx="1819655" cy="608075"/>
+          </a:xfrm>
+          <a:prstGeom prst="rect">
+            <a:avLst/>
+          </a:prstGeom>
+          <a:noFill/>
+        </p:spPr>
+        <p:txBody>
+          <a:bodyPr wrap="square" lIns="0" rIns="0" tIns="0" bIns="0" anchor="ctr">
+            <a:spAutoFit/>
+          </a:bodyPr>
+          <a:lstStyle/>
+          <a:p>
+            <a:pPr>
+              <a:spcAft>
+                <a:spcPts val="200"/>
+              </a:spcAft>
+            </a:pPr>
+            <a:r>
+              <a:rPr sz="720" b="1" i="0">
+                <a:solidFill>
+                  <a:srgbClr val="F2F2F2"/>
+                </a:solidFill>
+                <a:latin typeface="Trenda IG Text"/>
+              </a:rPr>
+              <a:t>Cited facts only</a:t>
+            </a:r>
+          </a:p>
+          <a:p>
+            <a:pPr>
+              <a:spcAft>
+                <a:spcPts val="200"/>
+              </a:spcAft>
+            </a:pPr>
+            <a:r>
+              <a:rPr sz="700" b="0" i="0">
+                <a:solidFill>
+                  <a:srgbClr val="B3B3B3"/>
+                </a:solidFill>
+                <a:latin typeface="Trenda IG Text"/>
+              </a:rPr>
+              <a:t>every fact from the graph carries its source; agents never guess</a:t>
+            </a:r>
+          </a:p>
+        </p:txBody>
+      </p:sp>
+      <p:sp>
+        <p:nvSpPr>
+          <p:cNvPr id="51" name="Shape 48"/>
+          <p:cNvSpPr/>
+          <p:nvPr/>
+        </p:nvSpPr>
+        <p:spPr>
+          <a:xfrm>
+            <a:off x="5111496" y="2884932"/>
+            <a:ext cx="1965959" cy="681227"/>
+          </a:xfrm>
+          <a:prstGeom prst="rect">
+            <a:avLst/>
+          </a:prstGeom>
+          <a:solidFill>
+            <a:srgbClr val="141414"/>
+          </a:solidFill>
+          <a:ln>
+            <a:noFill/>
+          </a:ln>
+          <a:effectLst/>
+        </p:spPr>
+        <p:style>
+          <a:lnRef idx="1">
+            <a:schemeClr val="accent1"/>
+          </a:lnRef>
+          <a:fillRef idx="3">
+            <a:schemeClr val="accent1"/>
+          </a:fillRef>
+          <a:effectRef idx="2">
+            <a:schemeClr val="accent1"/>
+          </a:effectRef>
+          <a:fontRef idx="minor">
+            <a:schemeClr val="lt1"/>
+          </a:fontRef>
+        </p:style>
+        <p:txBody>
+          <a:bodyPr rtlCol="0" anchor="ctr"/>
+          <a:lstStyle/>
+          <a:p/>
+        </p:txBody>
+      </p:sp>
+      <p:sp>
+        <p:nvSpPr>
+          <p:cNvPr id="52" name="Shape 49"/>
+          <p:cNvSpPr/>
+          <p:nvPr/>
+        </p:nvSpPr>
+        <p:spPr>
+          <a:xfrm>
+            <a:off x="5111496" y="2884932"/>
+            <a:ext cx="36576" cy="681227"/>
+          </a:xfrm>
+          <a:prstGeom prst="rect">
+            <a:avLst/>
+          </a:prstGeom>
+          <a:solidFill>
+            <a:srgbClr val="00D6F2"/>
+          </a:solidFill>
+          <a:ln>
+            <a:noFill/>
+          </a:ln>
+          <a:effectLst/>
+        </p:spPr>
+        <p:style>
+          <a:lnRef idx="1">
+            <a:schemeClr val="accent1"/>
+          </a:lnRef>
+          <a:fillRef idx="3">
+            <a:schemeClr val="accent1"/>
+          </a:fillRef>
+          <a:effectRef idx="2">
+            <a:schemeClr val="accent1"/>
+          </a:effectRef>
+          <a:fontRef idx="minor">
+            <a:schemeClr val="lt1"/>
+          </a:fontRef>
+        </p:style>
+        <p:txBody>
+          <a:bodyPr rtlCol="0" anchor="ctr"/>
+          <a:lstStyle/>
+          <a:p/>
+        </p:txBody>
+      </p:sp>
+      <p:sp>
+        <p:nvSpPr>
+          <p:cNvPr id="53" name="Text 50"/>
+          <p:cNvSpPr txBox="1"/>
+          <p:nvPr/>
+        </p:nvSpPr>
+        <p:spPr>
+          <a:xfrm>
+            <a:off x="5221224" y="2921508"/>
+            <a:ext cx="1819655" cy="608075"/>
+          </a:xfrm>
+          <a:prstGeom prst="rect">
+            <a:avLst/>
+          </a:prstGeom>
+          <a:noFill/>
+        </p:spPr>
+        <p:txBody>
+          <a:bodyPr wrap="square" lIns="0" rIns="0" tIns="0" bIns="0" anchor="ctr">
+            <a:spAutoFit/>
+          </a:bodyPr>
+          <a:lstStyle/>
+          <a:p>
+            <a:pPr>
+              <a:spcAft>
+                <a:spcPts val="200"/>
+              </a:spcAft>
+            </a:pPr>
+            <a:r>
+              <a:rPr sz="720" b="1" i="0">
+                <a:solidFill>
+                  <a:srgbClr val="F2F2F2"/>
+                </a:solidFill>
+                <a:latin typeface="Trenda IG Text"/>
+              </a:rPr>
+              <a:t>Same bar for every pod</a:t>
+            </a:r>
+          </a:p>
+          <a:p>
+            <a:pPr>
+              <a:spcAft>
+                <a:spcPts val="200"/>
+              </a:spcAft>
+            </a:pPr>
+            <a:r>
+              <a:rPr sz="700" b="0" i="0">
+                <a:solidFill>
+                  <a:srgbClr val="B3B3B3"/>
+                </a:solidFill>
+                <a:latin typeface="Trenda IG Text"/>
+              </a:rPr>
+              <a:t>every run scored before it moves; max 5 retries, then an owner</a:t>
+            </a:r>
+          </a:p>
+        </p:txBody>
+      </p:sp>
+      <p:sp>
+        <p:nvSpPr>
+          <p:cNvPr id="54" name="Shape 51"/>
+          <p:cNvSpPr/>
+          <p:nvPr/>
+        </p:nvSpPr>
+        <p:spPr>
+          <a:xfrm>
+            <a:off x="5111496" y="3639311"/>
+            <a:ext cx="1965959" cy="681227"/>
+          </a:xfrm>
+          <a:prstGeom prst="rect">
+            <a:avLst/>
+          </a:prstGeom>
+          <a:solidFill>
+            <a:srgbClr val="141414"/>
+          </a:solidFill>
+          <a:ln>
+            <a:noFill/>
+          </a:ln>
+          <a:effectLst/>
+        </p:spPr>
+        <p:style>
+          <a:lnRef idx="1">
+            <a:schemeClr val="accent1"/>
+          </a:lnRef>
+          <a:fillRef idx="3">
+            <a:schemeClr val="accent1"/>
+          </a:fillRef>
+          <a:effectRef idx="2">
+            <a:schemeClr val="accent1"/>
+          </a:effectRef>
+          <a:fontRef idx="minor">
+            <a:schemeClr val="lt1"/>
+          </a:fontRef>
+        </p:style>
+        <p:txBody>
+          <a:bodyPr rtlCol="0" anchor="ctr"/>
+          <a:lstStyle/>
+          <a:p/>
+        </p:txBody>
+      </p:sp>
+      <p:sp>
+        <p:nvSpPr>
+          <p:cNvPr id="55" name="Shape 52"/>
+          <p:cNvSpPr/>
+          <p:nvPr/>
+        </p:nvSpPr>
+        <p:spPr>
+          <a:xfrm>
+            <a:off x="5111496" y="3639311"/>
+            <a:ext cx="36576" cy="681227"/>
+          </a:xfrm>
+          <a:prstGeom prst="rect">
+            <a:avLst/>
+          </a:prstGeom>
+          <a:solidFill>
+            <a:srgbClr val="00D6F2"/>
+          </a:solidFill>
+          <a:ln>
+            <a:noFill/>
+          </a:ln>
+          <a:effectLst/>
+        </p:spPr>
+        <p:style>
+          <a:lnRef idx="1">
+            <a:schemeClr val="accent1"/>
+          </a:lnRef>
+          <a:fillRef idx="3">
+            <a:schemeClr val="accent1"/>
+          </a:fillRef>
+          <a:effectRef idx="2">
+            <a:schemeClr val="accent1"/>
+          </a:effectRef>
+          <a:fontRef idx="minor">
+            <a:schemeClr val="lt1"/>
+          </a:fontRef>
+        </p:style>
+        <p:txBody>
+          <a:bodyPr rtlCol="0" anchor="ctr"/>
+          <a:lstStyle/>
+          <a:p/>
+        </p:txBody>
+      </p:sp>
+      <p:sp>
+        <p:nvSpPr>
+          <p:cNvPr id="56" name="Text 53"/>
+          <p:cNvSpPr txBox="1"/>
+          <p:nvPr/>
+        </p:nvSpPr>
+        <p:spPr>
+          <a:xfrm>
+            <a:off x="5221224" y="3675887"/>
+            <a:ext cx="1819655" cy="608075"/>
+          </a:xfrm>
+          <a:prstGeom prst="rect">
+            <a:avLst/>
+          </a:prstGeom>
+          <a:noFill/>
+        </p:spPr>
+        <p:txBody>
+          <a:bodyPr wrap="square" lIns="0" rIns="0" tIns="0" bIns="0" anchor="ctr">
+            <a:spAutoFit/>
+          </a:bodyPr>
+          <a:lstStyle/>
+          <a:p>
+            <a:pPr>
+              <a:spcAft>
+                <a:spcPts val="200"/>
+              </a:spcAft>
+            </a:pPr>
+            <a:r>
+              <a:rPr sz="720" b="1" i="0">
+                <a:solidFill>
+                  <a:srgbClr val="F2F2F2"/>
+                </a:solidFill>
+                <a:latin typeface="Trenda IG Text"/>
+              </a:rPr>
+              <a:t>Load changes the wait, not the answer</a:t>
+            </a:r>
+          </a:p>
+          <a:p>
+            <a:pPr>
+              <a:spcAft>
+                <a:spcPts val="200"/>
+              </a:spcAft>
+            </a:pPr>
+            <a:r>
+              <a:rPr sz="700" b="0" i="0">
+                <a:solidFill>
+                  <a:srgbClr val="B3B3B3"/>
+                </a:solidFill>
+                <a:latin typeface="Trenda IG Text"/>
+              </a:rPr>
+              <a:t>runs share no memory; two pods on one object are sequenced</a:t>
+            </a:r>
+          </a:p>
+        </p:txBody>
+      </p:sp>
+      <p:sp>
+        <p:nvSpPr>
+          <p:cNvPr id="57" name="Shape 54"/>
+          <p:cNvSpPr/>
+          <p:nvPr/>
+        </p:nvSpPr>
+        <p:spPr>
+          <a:xfrm>
+            <a:off x="5111496" y="4393692"/>
+            <a:ext cx="1965959" cy="681227"/>
+          </a:xfrm>
+          <a:prstGeom prst="rect">
+            <a:avLst/>
+          </a:prstGeom>
+          <a:solidFill>
+            <a:srgbClr val="141414"/>
+          </a:solidFill>
+          <a:ln>
+            <a:noFill/>
+          </a:ln>
+          <a:effectLst/>
+        </p:spPr>
+        <p:style>
+          <a:lnRef idx="1">
+            <a:schemeClr val="accent1"/>
+          </a:lnRef>
+          <a:fillRef idx="3">
+            <a:schemeClr val="accent1"/>
+          </a:fillRef>
+          <a:effectRef idx="2">
+            <a:schemeClr val="accent1"/>
+          </a:effectRef>
+          <a:fontRef idx="minor">
+            <a:schemeClr val="lt1"/>
+          </a:fontRef>
+        </p:style>
+        <p:txBody>
+          <a:bodyPr rtlCol="0" anchor="ctr"/>
+          <a:lstStyle/>
+          <a:p/>
+        </p:txBody>
+      </p:sp>
+      <p:sp>
+        <p:nvSpPr>
+          <p:cNvPr id="58" name="Shape 55"/>
+          <p:cNvSpPr/>
+          <p:nvPr/>
+        </p:nvSpPr>
+        <p:spPr>
+          <a:xfrm>
+            <a:off x="5111496" y="4393692"/>
+            <a:ext cx="36576" cy="681227"/>
+          </a:xfrm>
+          <a:prstGeom prst="rect">
+            <a:avLst/>
+          </a:prstGeom>
+          <a:solidFill>
+            <a:srgbClr val="00D6F2"/>
+          </a:solidFill>
+          <a:ln>
+            <a:noFill/>
+          </a:ln>
+          <a:effectLst/>
+        </p:spPr>
+        <p:style>
+          <a:lnRef idx="1">
+            <a:schemeClr val="accent1"/>
+          </a:lnRef>
+          <a:fillRef idx="3">
+            <a:schemeClr val="accent1"/>
+          </a:fillRef>
+          <a:effectRef idx="2">
+            <a:schemeClr val="accent1"/>
+          </a:effectRef>
+          <a:fontRef idx="minor">
+            <a:schemeClr val="lt1"/>
+          </a:fontRef>
+        </p:style>
+        <p:txBody>
+          <a:bodyPr rtlCol="0" anchor="ctr"/>
+          <a:lstStyle/>
+          <a:p/>
+        </p:txBody>
+      </p:sp>
+      <p:sp>
+        <p:nvSpPr>
+          <p:cNvPr id="59" name="Text 56"/>
+          <p:cNvSpPr txBox="1"/>
+          <p:nvPr/>
+        </p:nvSpPr>
+        <p:spPr>
+          <a:xfrm>
+            <a:off x="5221224" y="4430268"/>
+            <a:ext cx="1819655" cy="608075"/>
+          </a:xfrm>
+          <a:prstGeom prst="rect">
+            <a:avLst/>
+          </a:prstGeom>
+          <a:noFill/>
+        </p:spPr>
+        <p:txBody>
+          <a:bodyPr wrap="square" lIns="0" rIns="0" tIns="0" bIns="0" anchor="ctr">
+            <a:spAutoFit/>
+          </a:bodyPr>
+          <a:lstStyle/>
+          <a:p>
+            <a:pPr>
+              <a:spcAft>
+                <a:spcPts val="200"/>
+              </a:spcAft>
+            </a:pPr>
+            <a:r>
+              <a:rPr sz="720" b="1" i="0">
+                <a:solidFill>
+                  <a:srgbClr val="F2F2F2"/>
+                </a:solidFill>
+                <a:latin typeface="Trenda IG Text"/>
+              </a:rPr>
+              <a:t>Measured every run</a:t>
+            </a:r>
+          </a:p>
+          <a:p>
+            <a:pPr>
+              <a:spcAft>
+                <a:spcPts val="200"/>
+              </a:spcAft>
+            </a:pPr>
+            <a:r>
+              <a:rPr sz="700" b="0" i="0">
+                <a:solidFill>
+                  <a:srgbClr val="B3B3B3"/>
+                </a:solidFill>
+                <a:latin typeface="Trenda IG Text"/>
+              </a:rPr>
+              <a:t>eval score per agent and pod, first-pass approval, defects after release</a:t>
+            </a:r>
+          </a:p>
+        </p:txBody>
+      </p:sp>
+      <p:sp>
+        <p:nvSpPr>
+          <p:cNvPr id="60" name="Shape 57"/>
+          <p:cNvSpPr/>
+          <p:nvPr/>
+        </p:nvSpPr>
+        <p:spPr>
+          <a:xfrm>
+            <a:off x="7296912" y="1783080"/>
+            <a:ext cx="2185415" cy="3310128"/>
+          </a:xfrm>
+          <a:prstGeom prst="roundRect">
+            <a:avLst>
+              <a:gd name="adj" fmla="val 2000"/>
+            </a:avLst>
+          </a:prstGeom>
+          <a:solidFill>
+            <a:srgbClr val="1E1E1E"/>
+          </a:solidFill>
+          <a:ln>
+            <a:noFill/>
+          </a:ln>
+          <a:effectLst/>
+        </p:spPr>
+        <p:style>
+          <a:lnRef idx="1">
+            <a:schemeClr val="accent1"/>
+          </a:lnRef>
+          <a:fillRef idx="3">
+            <a:schemeClr val="accent1"/>
+          </a:fillRef>
+          <a:effectRef idx="2">
+            <a:schemeClr val="accent1"/>
+          </a:effectRef>
+          <a:fontRef idx="minor">
+            <a:schemeClr val="lt1"/>
+          </a:fontRef>
+        </p:style>
+        <p:txBody>
+          <a:bodyPr rtlCol="0" anchor="ctr"/>
+          <a:lstStyle/>
+          <a:p/>
+        </p:txBody>
+      </p:sp>
+      <p:sp>
+        <p:nvSpPr>
+          <p:cNvPr id="61" name="Shape 58"/>
+          <p:cNvSpPr/>
+          <p:nvPr/>
+        </p:nvSpPr>
+        <p:spPr>
+          <a:xfrm>
+            <a:off x="7296912" y="1783080"/>
+            <a:ext cx="2185415" cy="256032"/>
+          </a:xfrm>
+          <a:prstGeom prst="rect">
+            <a:avLst/>
+          </a:prstGeom>
+          <a:solidFill>
+            <a:srgbClr val="2B2B2B"/>
+          </a:solidFill>
+          <a:ln>
+            <a:noFill/>
+          </a:ln>
+          <a:effectLst/>
+        </p:spPr>
+        <p:style>
+          <a:lnRef idx="1">
+            <a:schemeClr val="accent1"/>
+          </a:lnRef>
+          <a:fillRef idx="3">
+            <a:schemeClr val="accent1"/>
+          </a:fillRef>
+          <a:effectRef idx="2">
+            <a:schemeClr val="accent1"/>
+          </a:effectRef>
+          <a:fontRef idx="minor">
+            <a:schemeClr val="lt1"/>
+          </a:fontRef>
+        </p:style>
+        <p:txBody>
+          <a:bodyPr rtlCol="0" anchor="ctr"/>
+          <a:lstStyle/>
+          <a:p/>
+        </p:txBody>
+      </p:sp>
+      <p:sp>
+        <p:nvSpPr>
+          <p:cNvPr id="62" name="Text 59"/>
+          <p:cNvSpPr txBox="1"/>
+          <p:nvPr/>
+        </p:nvSpPr>
+        <p:spPr>
+          <a:xfrm>
+            <a:off x="7406640" y="1783080"/>
+            <a:ext cx="1965959" cy="256032"/>
+          </a:xfrm>
+          <a:prstGeom prst="rect">
+            <a:avLst/>
+          </a:prstGeom>
+          <a:noFill/>
+        </p:spPr>
+        <p:txBody>
+          <a:bodyPr wrap="square" lIns="0" rIns="0" tIns="0" bIns="0" anchor="ctr">
+            <a:spAutoFit/>
+          </a:bodyPr>
+          <a:lstStyle/>
+          <a:p>
+            <a:r>
+              <a:rPr sz="700" b="1" i="0" spc="120">
+                <a:solidFill>
+                  <a:srgbClr val="F2F2F2"/>
+                </a:solidFill>
+                <a:latin typeface="Trenda IG Text"/>
+              </a:rPr>
+              <a:t>HOW WE PROTECT DATA</a:t>
+            </a:r>
+            <a:r>
+              <a:rPr sz="700" b="0" i="0">
+                <a:solidFill>
+                  <a:srgbClr val="B3B3B3"/>
+                </a:solidFill>
+                <a:latin typeface="Trenda IG Text"/>
+              </a:rPr>
+              <a:t>   measured</a:t>
+            </a:r>
+          </a:p>
+        </p:txBody>
+      </p:sp>
+      <p:sp>
+        <p:nvSpPr>
+          <p:cNvPr id="63" name="Shape 60"/>
+          <p:cNvSpPr/>
+          <p:nvPr/>
+        </p:nvSpPr>
+        <p:spPr>
+          <a:xfrm>
+            <a:off x="7406640" y="2130552"/>
+            <a:ext cx="1965959" cy="681227"/>
+          </a:xfrm>
+          <a:prstGeom prst="rect">
+            <a:avLst/>
+          </a:prstGeom>
+          <a:solidFill>
+            <a:srgbClr val="141414"/>
+          </a:solidFill>
+          <a:ln>
+            <a:noFill/>
+          </a:ln>
+          <a:effectLst/>
+        </p:spPr>
+        <p:style>
+          <a:lnRef idx="1">
+            <a:schemeClr val="accent1"/>
+          </a:lnRef>
+          <a:fillRef idx="3">
+            <a:schemeClr val="accent1"/>
+          </a:fillRef>
+          <a:effectRef idx="2">
+            <a:schemeClr val="accent1"/>
+          </a:effectRef>
+          <a:fontRef idx="minor">
+            <a:schemeClr val="lt1"/>
+          </a:fontRef>
+        </p:style>
+        <p:txBody>
+          <a:bodyPr rtlCol="0" anchor="ctr"/>
+          <a:lstStyle/>
+          <a:p/>
+        </p:txBody>
+      </p:sp>
+      <p:sp>
+        <p:nvSpPr>
+          <p:cNvPr id="64" name="Shape 61"/>
+          <p:cNvSpPr/>
+          <p:nvPr/>
+        </p:nvSpPr>
+        <p:spPr>
+          <a:xfrm>
+            <a:off x="7406640" y="2130552"/>
+            <a:ext cx="36576" cy="681227"/>
+          </a:xfrm>
+          <a:prstGeom prst="rect">
+            <a:avLst/>
+          </a:prstGeom>
+          <a:solidFill>
+            <a:srgbClr val="00D6F2"/>
+          </a:solidFill>
+          <a:ln>
+            <a:noFill/>
+          </a:ln>
+          <a:effectLst/>
+        </p:spPr>
+        <p:style>
+          <a:lnRef idx="1">
+            <a:schemeClr val="accent1"/>
+          </a:lnRef>
+          <a:fillRef idx="3">
+            <a:schemeClr val="accent1"/>
+          </a:fillRef>
+          <a:effectRef idx="2">
+            <a:schemeClr val="accent1"/>
+          </a:effectRef>
+          <a:fontRef idx="minor">
+            <a:schemeClr val="lt1"/>
+          </a:fontRef>
+        </p:style>
+        <p:txBody>
+          <a:bodyPr rtlCol="0" anchor="ctr"/>
+          <a:lstStyle/>
+          <a:p/>
+        </p:txBody>
+      </p:sp>
+      <p:sp>
+        <p:nvSpPr>
+          <p:cNvPr id="65" name="Text 62"/>
+          <p:cNvSpPr txBox="1"/>
+          <p:nvPr/>
+        </p:nvSpPr>
+        <p:spPr>
+          <a:xfrm>
+            <a:off x="7516367" y="2167128"/>
+            <a:ext cx="1819655" cy="608075"/>
+          </a:xfrm>
+          <a:prstGeom prst="rect">
+            <a:avLst/>
+          </a:prstGeom>
+          <a:noFill/>
+        </p:spPr>
+        <p:txBody>
+          <a:bodyPr wrap="square" lIns="0" rIns="0" tIns="0" bIns="0" anchor="ctr">
+            <a:spAutoFit/>
+          </a:bodyPr>
+          <a:lstStyle/>
+          <a:p>
+            <a:pPr>
+              <a:spcAft>
+                <a:spcPts val="200"/>
+              </a:spcAft>
+            </a:pPr>
+            <a:r>
+              <a:rPr sz="720" b="1" i="0">
+                <a:solidFill>
+                  <a:srgbClr val="F2F2F2"/>
+                </a:solidFill>
+                <a:latin typeface="Trenda IG Text"/>
+              </a:rPr>
+              <a:t>Classified and approved</a:t>
+            </a:r>
+          </a:p>
+          <a:p>
+            <a:pPr>
+              <a:spcAft>
+                <a:spcPts val="200"/>
+              </a:spcAft>
+            </a:pPr>
+            <a:r>
+              <a:rPr sz="700" b="0" i="0">
+                <a:solidFill>
+                  <a:srgbClr val="B3B3B3"/>
+                </a:solidFill>
+                <a:latin typeface="Trenda IG Text"/>
+              </a:rPr>
+              <a:t>share of in-scope sensitive fields classified by DLP and approved by a Collibra steward; target 100% before use</a:t>
+            </a:r>
+          </a:p>
+        </p:txBody>
+      </p:sp>
+      <p:sp>
+        <p:nvSpPr>
+          <p:cNvPr id="66" name="Shape 63"/>
+          <p:cNvSpPr/>
+          <p:nvPr/>
+        </p:nvSpPr>
+        <p:spPr>
+          <a:xfrm>
+            <a:off x="7406640" y="2884932"/>
+            <a:ext cx="1965959" cy="681227"/>
+          </a:xfrm>
+          <a:prstGeom prst="rect">
+            <a:avLst/>
+          </a:prstGeom>
+          <a:solidFill>
+            <a:srgbClr val="141414"/>
+          </a:solidFill>
+          <a:ln>
+            <a:noFill/>
+          </a:ln>
+          <a:effectLst/>
+        </p:spPr>
+        <p:style>
+          <a:lnRef idx="1">
+            <a:schemeClr val="accent1"/>
+          </a:lnRef>
+          <a:fillRef idx="3">
+            <a:schemeClr val="accent1"/>
+          </a:fillRef>
+          <a:effectRef idx="2">
+            <a:schemeClr val="accent1"/>
+          </a:effectRef>
+          <a:fontRef idx="minor">
+            <a:schemeClr val="lt1"/>
+          </a:fontRef>
+        </p:style>
+        <p:txBody>
+          <a:bodyPr rtlCol="0" anchor="ctr"/>
+          <a:lstStyle/>
+          <a:p/>
+        </p:txBody>
+      </p:sp>
+      <p:sp>
+        <p:nvSpPr>
+          <p:cNvPr id="67" name="Shape 64"/>
+          <p:cNvSpPr/>
+          <p:nvPr/>
+        </p:nvSpPr>
+        <p:spPr>
+          <a:xfrm>
+            <a:off x="7406640" y="2884932"/>
+            <a:ext cx="36576" cy="681227"/>
+          </a:xfrm>
+          <a:prstGeom prst="rect">
+            <a:avLst/>
+          </a:prstGeom>
+          <a:solidFill>
+            <a:srgbClr val="00D6F2"/>
+          </a:solidFill>
+          <a:ln>
+            <a:noFill/>
+          </a:ln>
+          <a:effectLst/>
+        </p:spPr>
+        <p:style>
+          <a:lnRef idx="1">
+            <a:schemeClr val="accent1"/>
+          </a:lnRef>
+          <a:fillRef idx="3">
+            <a:schemeClr val="accent1"/>
+          </a:fillRef>
+          <a:effectRef idx="2">
+            <a:schemeClr val="accent1"/>
+          </a:effectRef>
+          <a:fontRef idx="minor">
+            <a:schemeClr val="lt1"/>
+          </a:fontRef>
+        </p:style>
+        <p:txBody>
+          <a:bodyPr rtlCol="0" anchor="ctr"/>
+          <a:lstStyle/>
+          <a:p/>
+        </p:txBody>
+      </p:sp>
+      <p:sp>
+        <p:nvSpPr>
+          <p:cNvPr id="68" name="Text 65"/>
+          <p:cNvSpPr txBox="1"/>
+          <p:nvPr/>
+        </p:nvSpPr>
+        <p:spPr>
+          <a:xfrm>
+            <a:off x="7516367" y="2921508"/>
+            <a:ext cx="1819655" cy="608075"/>
+          </a:xfrm>
+          <a:prstGeom prst="rect">
+            <a:avLst/>
+          </a:prstGeom>
+          <a:noFill/>
+        </p:spPr>
+        <p:txBody>
+          <a:bodyPr wrap="square" lIns="0" rIns="0" tIns="0" bIns="0" anchor="ctr">
+            <a:spAutoFit/>
+          </a:bodyPr>
+          <a:lstStyle/>
+          <a:p>
+            <a:pPr>
+              <a:spcAft>
+                <a:spcPts val="200"/>
+              </a:spcAft>
+            </a:pPr>
+            <a:r>
+              <a:rPr sz="720" b="1" i="0">
+                <a:solidFill>
+                  <a:srgbClr val="F2F2F2"/>
+                </a:solidFill>
+                <a:latin typeface="Trenda IG Text"/>
+              </a:rPr>
+              <a:t>Masked and verified</a:t>
+            </a:r>
+          </a:p>
+          <a:p>
+            <a:pPr>
+              <a:spcAft>
+                <a:spcPts val="200"/>
+              </a:spcAft>
+            </a:pPr>
+            <a:r>
+              <a:rPr sz="700" b="0" i="0">
+                <a:solidFill>
+                  <a:srgbClr val="B3B3B3"/>
+                </a:solidFill>
+                <a:latin typeface="Trenda IG Text"/>
+              </a:rPr>
+              <a:t>policy tags applied and checked against the schema every run; drift flagged</a:t>
+            </a:r>
+          </a:p>
+        </p:txBody>
+      </p:sp>
+      <p:sp>
+        <p:nvSpPr>
+          <p:cNvPr id="69" name="Shape 66"/>
+          <p:cNvSpPr/>
+          <p:nvPr/>
+        </p:nvSpPr>
+        <p:spPr>
+          <a:xfrm>
+            <a:off x="7406640" y="3639311"/>
+            <a:ext cx="1965959" cy="681227"/>
+          </a:xfrm>
+          <a:prstGeom prst="rect">
+            <a:avLst/>
+          </a:prstGeom>
+          <a:solidFill>
+            <a:srgbClr val="141414"/>
+          </a:solidFill>
+          <a:ln>
+            <a:noFill/>
+          </a:ln>
+          <a:effectLst/>
+        </p:spPr>
+        <p:style>
+          <a:lnRef idx="1">
+            <a:schemeClr val="accent1"/>
+          </a:lnRef>
+          <a:fillRef idx="3">
+            <a:schemeClr val="accent1"/>
+          </a:fillRef>
+          <a:effectRef idx="2">
+            <a:schemeClr val="accent1"/>
+          </a:effectRef>
+          <a:fontRef idx="minor">
+            <a:schemeClr val="lt1"/>
+          </a:fontRef>
+        </p:style>
+        <p:txBody>
+          <a:bodyPr rtlCol="0" anchor="ctr"/>
+          <a:lstStyle/>
+          <a:p/>
+        </p:txBody>
+      </p:sp>
+      <p:sp>
+        <p:nvSpPr>
+          <p:cNvPr id="70" name="Shape 67"/>
+          <p:cNvSpPr/>
+          <p:nvPr/>
+        </p:nvSpPr>
+        <p:spPr>
+          <a:xfrm>
+            <a:off x="7406640" y="3639311"/>
+            <a:ext cx="36576" cy="681227"/>
+          </a:xfrm>
+          <a:prstGeom prst="rect">
+            <a:avLst/>
+          </a:prstGeom>
+          <a:solidFill>
+            <a:srgbClr val="00D6F2"/>
+          </a:solidFill>
+          <a:ln>
+            <a:noFill/>
+          </a:ln>
+          <a:effectLst/>
+        </p:spPr>
+        <p:style>
+          <a:lnRef idx="1">
+            <a:schemeClr val="accent1"/>
+          </a:lnRef>
+          <a:fillRef idx="3">
+            <a:schemeClr val="accent1"/>
+          </a:fillRef>
+          <a:effectRef idx="2">
+            <a:schemeClr val="accent1"/>
+          </a:effectRef>
+          <a:fontRef idx="minor">
+            <a:schemeClr val="lt1"/>
+          </a:fontRef>
+        </p:style>
+        <p:txBody>
+          <a:bodyPr rtlCol="0" anchor="ctr"/>
+          <a:lstStyle/>
+          <a:p/>
+        </p:txBody>
+      </p:sp>
+      <p:sp>
+        <p:nvSpPr>
+          <p:cNvPr id="71" name="Text 68"/>
+          <p:cNvSpPr txBox="1"/>
+          <p:nvPr/>
+        </p:nvSpPr>
+        <p:spPr>
+          <a:xfrm>
+            <a:off x="7516367" y="3675887"/>
+            <a:ext cx="1819655" cy="608075"/>
+          </a:xfrm>
+          <a:prstGeom prst="rect">
+            <a:avLst/>
+          </a:prstGeom>
+          <a:noFill/>
+        </p:spPr>
+        <p:txBody>
+          <a:bodyPr wrap="square" lIns="0" rIns="0" tIns="0" bIns="0" anchor="ctr">
+            <a:spAutoFit/>
+          </a:bodyPr>
+          <a:lstStyle/>
+          <a:p>
+            <a:pPr>
+              <a:spcAft>
+                <a:spcPts val="200"/>
+              </a:spcAft>
+            </a:pPr>
+            <a:r>
+              <a:rPr sz="720" b="1" i="0">
+                <a:solidFill>
+                  <a:srgbClr val="F2F2F2"/>
+                </a:solidFill>
+                <a:latin typeface="Trenda IG Text"/>
+              </a:rPr>
+              <a:t>Zero unauthorized access</a:t>
+            </a:r>
+          </a:p>
+          <a:p>
+            <a:pPr>
+              <a:spcAft>
+                <a:spcPts val="200"/>
+              </a:spcAft>
+            </a:pPr>
+            <a:r>
+              <a:rPr sz="700" b="0" i="0">
+                <a:solidFill>
+                  <a:srgbClr val="B3B3B3"/>
+                </a:solidFill>
+                <a:latin typeface="Trenda IG Text"/>
+              </a:rPr>
+              <a:t>negative-access tests each release: agent identities cannot read raw PHI</a:t>
+            </a:r>
+          </a:p>
+        </p:txBody>
+      </p:sp>
+      <p:sp>
+        <p:nvSpPr>
+          <p:cNvPr id="72" name="Shape 69"/>
+          <p:cNvSpPr/>
+          <p:nvPr/>
+        </p:nvSpPr>
+        <p:spPr>
+          <a:xfrm>
+            <a:off x="7406640" y="4393692"/>
+            <a:ext cx="1965959" cy="681227"/>
+          </a:xfrm>
+          <a:prstGeom prst="rect">
+            <a:avLst/>
+          </a:prstGeom>
+          <a:solidFill>
+            <a:srgbClr val="141414"/>
+          </a:solidFill>
+          <a:ln>
+            <a:noFill/>
+          </a:ln>
+          <a:effectLst/>
+        </p:spPr>
+        <p:style>
+          <a:lnRef idx="1">
+            <a:schemeClr val="accent1"/>
+          </a:lnRef>
+          <a:fillRef idx="3">
+            <a:schemeClr val="accent1"/>
+          </a:fillRef>
+          <a:effectRef idx="2">
+            <a:schemeClr val="accent1"/>
+          </a:effectRef>
+          <a:fontRef idx="minor">
+            <a:schemeClr val="lt1"/>
+          </a:fontRef>
+        </p:style>
+        <p:txBody>
+          <a:bodyPr rtlCol="0" anchor="ctr"/>
+          <a:lstStyle/>
+          <a:p/>
+        </p:txBody>
+      </p:sp>
+      <p:sp>
+        <p:nvSpPr>
+          <p:cNvPr id="73" name="Shape 70"/>
+          <p:cNvSpPr/>
+          <p:nvPr/>
+        </p:nvSpPr>
+        <p:spPr>
+          <a:xfrm>
+            <a:off x="7406640" y="4393692"/>
+            <a:ext cx="36576" cy="681227"/>
+          </a:xfrm>
+          <a:prstGeom prst="rect">
+            <a:avLst/>
+          </a:prstGeom>
+          <a:solidFill>
+            <a:srgbClr val="00D6F2"/>
+          </a:solidFill>
+          <a:ln>
+            <a:noFill/>
+          </a:ln>
+          <a:effectLst/>
+        </p:spPr>
+        <p:style>
+          <a:lnRef idx="1">
+            <a:schemeClr val="accent1"/>
+          </a:lnRef>
+          <a:fillRef idx="3">
+            <a:schemeClr val="accent1"/>
+          </a:fillRef>
+          <a:effectRef idx="2">
+            <a:schemeClr val="accent1"/>
+          </a:effectRef>
+          <a:fontRef idx="minor">
+            <a:schemeClr val="lt1"/>
+          </a:fontRef>
+        </p:style>
+        <p:txBody>
+          <a:bodyPr rtlCol="0" anchor="ctr"/>
+          <a:lstStyle/>
+          <a:p/>
+        </p:txBody>
+      </p:sp>
+      <p:sp>
+        <p:nvSpPr>
+          <p:cNvPr id="74" name="Text 71"/>
+          <p:cNvSpPr txBox="1"/>
+          <p:nvPr/>
+        </p:nvSpPr>
+        <p:spPr>
+          <a:xfrm>
+            <a:off x="7516367" y="4430268"/>
+            <a:ext cx="1819655" cy="608075"/>
+          </a:xfrm>
+          <a:prstGeom prst="rect">
+            <a:avLst/>
+          </a:prstGeom>
+          <a:noFill/>
+        </p:spPr>
+        <p:txBody>
+          <a:bodyPr wrap="square" lIns="0" rIns="0" tIns="0" bIns="0" anchor="ctr">
+            <a:spAutoFit/>
+          </a:bodyPr>
+          <a:lstStyle/>
+          <a:p>
+            <a:pPr>
+              <a:spcAft>
+                <a:spcPts val="200"/>
+              </a:spcAft>
+            </a:pPr>
+            <a:r>
+              <a:rPr sz="720" b="1" i="0">
+                <a:solidFill>
+                  <a:srgbClr val="F2F2F2"/>
+                </a:solidFill>
+                <a:latin typeface="Trenda IG Text"/>
+              </a:rPr>
+              <a:t>Every access audited</a:t>
+            </a:r>
+          </a:p>
+          <a:p>
+            <a:pPr>
+              <a:spcAft>
+                <a:spcPts val="200"/>
+              </a:spcAft>
+            </a:pPr>
+            <a:r>
+              <a:rPr sz="700" b="0" i="0">
+                <a:solidFill>
+                  <a:srgbClr val="B3B3B3"/>
+                </a:solidFill>
+                <a:latin typeface="Trenda IG Text"/>
+              </a:rPr>
+              <a:t>PHI access logged, release reconciled, access reviewed each quarter</a:t>
+            </a:r>
+          </a:p>
+        </p:txBody>
+      </p:sp>
+      <p:sp>
+        <p:nvSpPr>
+          <p:cNvPr id="75" name="Shape 72"/>
+          <p:cNvSpPr/>
+          <p:nvPr/>
+        </p:nvSpPr>
+        <p:spPr>
+          <a:xfrm>
+            <a:off x="9592055" y="1783080"/>
+            <a:ext cx="2185415" cy="3310128"/>
+          </a:xfrm>
+          <a:prstGeom prst="roundRect">
+            <a:avLst>
+              <a:gd name="adj" fmla="val 2000"/>
+            </a:avLst>
+          </a:prstGeom>
+          <a:solidFill>
+            <a:srgbClr val="1E1E1E"/>
+          </a:solidFill>
+          <a:ln>
+            <a:noFill/>
+          </a:ln>
+          <a:effectLst/>
+        </p:spPr>
+        <p:style>
+          <a:lnRef idx="1">
+            <a:schemeClr val="accent1"/>
+          </a:lnRef>
+          <a:fillRef idx="3">
+            <a:schemeClr val="accent1"/>
+          </a:fillRef>
+          <a:effectRef idx="2">
+            <a:schemeClr val="accent1"/>
+          </a:effectRef>
+          <a:fontRef idx="minor">
+            <a:schemeClr val="lt1"/>
+          </a:fontRef>
+        </p:style>
+        <p:txBody>
+          <a:bodyPr rtlCol="0" anchor="ctr"/>
+          <a:lstStyle/>
+          <a:p/>
+        </p:txBody>
+      </p:sp>
+      <p:sp>
+        <p:nvSpPr>
+          <p:cNvPr id="76" name="Shape 73"/>
+          <p:cNvSpPr/>
+          <p:nvPr/>
+        </p:nvSpPr>
+        <p:spPr>
+          <a:xfrm>
+            <a:off x="9592055" y="1783080"/>
+            <a:ext cx="2185415" cy="256032"/>
+          </a:xfrm>
+          <a:prstGeom prst="rect">
+            <a:avLst/>
+          </a:prstGeom>
+          <a:solidFill>
+            <a:srgbClr val="2B2B2B"/>
+          </a:solidFill>
+          <a:ln>
+            <a:noFill/>
+          </a:ln>
+          <a:effectLst/>
+        </p:spPr>
+        <p:style>
+          <a:lnRef idx="1">
+            <a:schemeClr val="accent1"/>
+          </a:lnRef>
+          <a:fillRef idx="3">
+            <a:schemeClr val="accent1"/>
+          </a:fillRef>
+          <a:effectRef idx="2">
+            <a:schemeClr val="accent1"/>
+          </a:effectRef>
+          <a:fontRef idx="minor">
+            <a:schemeClr val="lt1"/>
+          </a:fontRef>
+        </p:style>
+        <p:txBody>
+          <a:bodyPr rtlCol="0" anchor="ctr"/>
+          <a:lstStyle/>
+          <a:p/>
+        </p:txBody>
+      </p:sp>
+      <p:sp>
+        <p:nvSpPr>
+          <p:cNvPr id="77" name="Text 74"/>
+          <p:cNvSpPr txBox="1"/>
+          <p:nvPr/>
+        </p:nvSpPr>
+        <p:spPr>
+          <a:xfrm>
+            <a:off x="9701783" y="1783080"/>
+            <a:ext cx="1965959" cy="256032"/>
+          </a:xfrm>
+          <a:prstGeom prst="rect">
+            <a:avLst/>
+          </a:prstGeom>
+          <a:noFill/>
+        </p:spPr>
+        <p:txBody>
+          <a:bodyPr wrap="square" lIns="0" rIns="0" tIns="0" bIns="0" anchor="ctr">
+            <a:spAutoFit/>
+          </a:bodyPr>
+          <a:lstStyle/>
+          <a:p>
+            <a:r>
+              <a:rPr sz="700" b="1" i="0" spc="120">
+                <a:solidFill>
+                  <a:srgbClr val="F2F2F2"/>
+                </a:solidFill>
+                <a:latin typeface="Trenda IG Text"/>
+              </a:rPr>
+              <a:t>HOW WE CONTROL</a:t>
+            </a:r>
+          </a:p>
+        </p:txBody>
+      </p:sp>
+      <p:sp>
+        <p:nvSpPr>
+          <p:cNvPr id="78" name="Shape 75"/>
+          <p:cNvSpPr/>
+          <p:nvPr/>
+        </p:nvSpPr>
+        <p:spPr>
+          <a:xfrm>
+            <a:off x="9701783" y="2130552"/>
+            <a:ext cx="1965959" cy="681227"/>
+          </a:xfrm>
+          <a:prstGeom prst="rect">
+            <a:avLst/>
+          </a:prstGeom>
+          <a:solidFill>
+            <a:srgbClr val="141414"/>
+          </a:solidFill>
+          <a:ln>
+            <a:noFill/>
+          </a:ln>
+          <a:effectLst/>
+        </p:spPr>
+        <p:style>
+          <a:lnRef idx="1">
+            <a:schemeClr val="accent1"/>
+          </a:lnRef>
+          <a:fillRef idx="3">
+            <a:schemeClr val="accent1"/>
+          </a:fillRef>
+          <a:effectRef idx="2">
+            <a:schemeClr val="accent1"/>
+          </a:effectRef>
+          <a:fontRef idx="minor">
+            <a:schemeClr val="lt1"/>
+          </a:fontRef>
+        </p:style>
+        <p:txBody>
+          <a:bodyPr rtlCol="0" anchor="ctr"/>
+          <a:lstStyle/>
+          <a:p/>
+        </p:txBody>
+      </p:sp>
+      <p:sp>
+        <p:nvSpPr>
+          <p:cNvPr id="79" name="Shape 76"/>
+          <p:cNvSpPr/>
+          <p:nvPr/>
+        </p:nvSpPr>
+        <p:spPr>
+          <a:xfrm>
+            <a:off x="9701783" y="2130552"/>
+            <a:ext cx="36576" cy="681227"/>
+          </a:xfrm>
+          <a:prstGeom prst="rect">
+            <a:avLst/>
+          </a:prstGeom>
+          <a:solidFill>
+            <a:srgbClr val="00D6F2"/>
+          </a:solidFill>
+          <a:ln>
+            <a:noFill/>
+          </a:ln>
+          <a:effectLst/>
+        </p:spPr>
+        <p:style>
+          <a:lnRef idx="1">
+            <a:schemeClr val="accent1"/>
+          </a:lnRef>
+          <a:fillRef idx="3">
+            <a:schemeClr val="accent1"/>
+          </a:fillRef>
+          <a:effectRef idx="2">
+            <a:schemeClr val="accent1"/>
+          </a:effectRef>
+          <a:fontRef idx="minor">
+            <a:schemeClr val="lt1"/>
+          </a:fontRef>
+        </p:style>
+        <p:txBody>
+          <a:bodyPr rtlCol="0" anchor="ctr"/>
+          <a:lstStyle/>
+          <a:p/>
+        </p:txBody>
+      </p:sp>
+      <p:sp>
+        <p:nvSpPr>
+          <p:cNvPr id="80" name="Text 77"/>
+          <p:cNvSpPr txBox="1"/>
+          <p:nvPr/>
+        </p:nvSpPr>
+        <p:spPr>
+          <a:xfrm>
+            <a:off x="9811511" y="2167128"/>
+            <a:ext cx="1819655" cy="608075"/>
+          </a:xfrm>
+          <a:prstGeom prst="rect">
+            <a:avLst/>
+          </a:prstGeom>
+          <a:noFill/>
+        </p:spPr>
+        <p:txBody>
+          <a:bodyPr wrap="square" lIns="0" rIns="0" tIns="0" bIns="0" anchor="ctr">
+            <a:spAutoFit/>
+          </a:bodyPr>
+          <a:lstStyle/>
+          <a:p>
+            <a:pPr>
+              <a:spcAft>
+                <a:spcPts val="200"/>
+              </a:spcAft>
+            </a:pPr>
+            <a:r>
+              <a:rPr sz="720" b="1" i="0">
+                <a:solidFill>
+                  <a:srgbClr val="F2F2F2"/>
+                </a:solidFill>
+                <a:latin typeface="Trenda IG Text"/>
+              </a:rPr>
+              <a:t>No production access</a:t>
+            </a:r>
+          </a:p>
+          <a:p>
+            <a:pPr>
+              <a:spcAft>
+                <a:spcPts val="200"/>
+              </a:spcAft>
+            </a:pPr>
+            <a:r>
+              <a:rPr sz="700" b="0" i="0">
+                <a:solidFill>
+                  <a:srgbClr val="B3B3B3"/>
+                </a:solidFill>
+                <a:latin typeface="Trenda IG Text"/>
+              </a:rPr>
+              <a:t>three identities, tool allowlist</a:t>
+            </a:r>
+          </a:p>
+        </p:txBody>
+      </p:sp>
+      <p:sp>
+        <p:nvSpPr>
+          <p:cNvPr id="81" name="Shape 78"/>
+          <p:cNvSpPr/>
+          <p:nvPr/>
+        </p:nvSpPr>
+        <p:spPr>
+          <a:xfrm>
+            <a:off x="9701783" y="2884932"/>
+            <a:ext cx="1965959" cy="681227"/>
+          </a:xfrm>
+          <a:prstGeom prst="rect">
+            <a:avLst/>
+          </a:prstGeom>
+          <a:solidFill>
+            <a:srgbClr val="141414"/>
+          </a:solidFill>
+          <a:ln>
+            <a:noFill/>
+          </a:ln>
+          <a:effectLst/>
+        </p:spPr>
+        <p:style>
+          <a:lnRef idx="1">
+            <a:schemeClr val="accent1"/>
+          </a:lnRef>
+          <a:fillRef idx="3">
+            <a:schemeClr val="accent1"/>
+          </a:fillRef>
+          <a:effectRef idx="2">
+            <a:schemeClr val="accent1"/>
+          </a:effectRef>
+          <a:fontRef idx="minor">
+            <a:schemeClr val="lt1"/>
+          </a:fontRef>
+        </p:style>
+        <p:txBody>
+          <a:bodyPr rtlCol="0" anchor="ctr"/>
+          <a:lstStyle/>
+          <a:p/>
+        </p:txBody>
+      </p:sp>
+      <p:sp>
+        <p:nvSpPr>
+          <p:cNvPr id="82" name="Shape 79"/>
+          <p:cNvSpPr/>
+          <p:nvPr/>
+        </p:nvSpPr>
+        <p:spPr>
+          <a:xfrm>
+            <a:off x="9701783" y="2884932"/>
+            <a:ext cx="36576" cy="681227"/>
+          </a:xfrm>
+          <a:prstGeom prst="rect">
+            <a:avLst/>
+          </a:prstGeom>
+          <a:solidFill>
+            <a:srgbClr val="00D6F2"/>
+          </a:solidFill>
+          <a:ln>
+            <a:noFill/>
+          </a:ln>
+          <a:effectLst/>
+        </p:spPr>
+        <p:style>
+          <a:lnRef idx="1">
+            <a:schemeClr val="accent1"/>
+          </a:lnRef>
+          <a:fillRef idx="3">
+            <a:schemeClr val="accent1"/>
+          </a:fillRef>
+          <a:effectRef idx="2">
+            <a:schemeClr val="accent1"/>
+          </a:effectRef>
+          <a:fontRef idx="minor">
+            <a:schemeClr val="lt1"/>
+          </a:fontRef>
+        </p:style>
+        <p:txBody>
+          <a:bodyPr rtlCol="0" anchor="ctr"/>
+          <a:lstStyle/>
+          <a:p/>
+        </p:txBody>
+      </p:sp>
+      <p:sp>
+        <p:nvSpPr>
+          <p:cNvPr id="83" name="Text 80"/>
+          <p:cNvSpPr txBox="1"/>
+          <p:nvPr/>
+        </p:nvSpPr>
+        <p:spPr>
+          <a:xfrm>
+            <a:off x="9811511" y="2921508"/>
+            <a:ext cx="1819655" cy="608075"/>
+          </a:xfrm>
+          <a:prstGeom prst="rect">
+            <a:avLst/>
+          </a:prstGeom>
+          <a:noFill/>
+        </p:spPr>
+        <p:txBody>
+          <a:bodyPr wrap="square" lIns="0" rIns="0" tIns="0" bIns="0" anchor="ctr">
+            <a:spAutoFit/>
+          </a:bodyPr>
+          <a:lstStyle/>
+          <a:p>
+            <a:pPr>
+              <a:spcAft>
+                <a:spcPts val="200"/>
+              </a:spcAft>
+            </a:pPr>
+            <a:r>
+              <a:rPr sz="720" b="1" i="0">
+                <a:solidFill>
+                  <a:srgbClr val="F2F2F2"/>
+                </a:solidFill>
+                <a:latin typeface="Trenda IG Text"/>
+              </a:rPr>
+              <a:t>Guardrails</a:t>
+            </a:r>
+          </a:p>
+          <a:p>
+            <a:pPr>
+              <a:spcAft>
+                <a:spcPts val="200"/>
+              </a:spcAft>
+            </a:pPr>
+            <a:r>
+              <a:rPr sz="700" b="0" i="0">
+                <a:solidFill>
+                  <a:srgbClr val="B3B3B3"/>
+                </a:solidFill>
+                <a:latin typeface="Trenda IG Text"/>
+              </a:rPr>
+              <a:t>Model Armor in and out; no raw PHI for agents</a:t>
+            </a:r>
+          </a:p>
+        </p:txBody>
+      </p:sp>
+      <p:sp>
+        <p:nvSpPr>
+          <p:cNvPr id="84" name="Shape 81"/>
+          <p:cNvSpPr/>
+          <p:nvPr/>
+        </p:nvSpPr>
+        <p:spPr>
+          <a:xfrm>
+            <a:off x="9701783" y="3639311"/>
+            <a:ext cx="1965959" cy="681227"/>
+          </a:xfrm>
+          <a:prstGeom prst="rect">
+            <a:avLst/>
+          </a:prstGeom>
+          <a:solidFill>
+            <a:srgbClr val="141414"/>
+          </a:solidFill>
+          <a:ln>
+            <a:noFill/>
+          </a:ln>
+          <a:effectLst/>
+        </p:spPr>
+        <p:style>
+          <a:lnRef idx="1">
+            <a:schemeClr val="accent1"/>
+          </a:lnRef>
+          <a:fillRef idx="3">
+            <a:schemeClr val="accent1"/>
+          </a:fillRef>
+          <a:effectRef idx="2">
+            <a:schemeClr val="accent1"/>
+          </a:effectRef>
+          <a:fontRef idx="minor">
+            <a:schemeClr val="lt1"/>
+          </a:fontRef>
+        </p:style>
+        <p:txBody>
+          <a:bodyPr rtlCol="0" anchor="ctr"/>
+          <a:lstStyle/>
+          <a:p/>
+        </p:txBody>
+      </p:sp>
+      <p:sp>
+        <p:nvSpPr>
+          <p:cNvPr id="85" name="Shape 82"/>
+          <p:cNvSpPr/>
+          <p:nvPr/>
+        </p:nvSpPr>
+        <p:spPr>
+          <a:xfrm>
+            <a:off x="9701783" y="3639311"/>
+            <a:ext cx="36576" cy="681227"/>
+          </a:xfrm>
+          <a:prstGeom prst="rect">
+            <a:avLst/>
+          </a:prstGeom>
+          <a:solidFill>
+            <a:srgbClr val="FFD700"/>
+          </a:solidFill>
+          <a:ln>
+            <a:noFill/>
+          </a:ln>
+          <a:effectLst/>
+        </p:spPr>
+        <p:style>
+          <a:lnRef idx="1">
+            <a:schemeClr val="accent1"/>
+          </a:lnRef>
+          <a:fillRef idx="3">
+            <a:schemeClr val="accent1"/>
+          </a:fillRef>
+          <a:effectRef idx="2">
+            <a:schemeClr val="accent1"/>
+          </a:effectRef>
+          <a:fontRef idx="minor">
+            <a:schemeClr val="lt1"/>
+          </a:fontRef>
+        </p:style>
+        <p:txBody>
+          <a:bodyPr rtlCol="0" anchor="ctr"/>
+          <a:lstStyle/>
+          <a:p/>
+        </p:txBody>
+      </p:sp>
+      <p:sp>
+        <p:nvSpPr>
+          <p:cNvPr id="86" name="Text 83"/>
+          <p:cNvSpPr txBox="1"/>
+          <p:nvPr/>
+        </p:nvSpPr>
+        <p:spPr>
+          <a:xfrm>
+            <a:off x="9811511" y="3675887"/>
+            <a:ext cx="1819655" cy="608075"/>
+          </a:xfrm>
+          <a:prstGeom prst="rect">
+            <a:avLst/>
+          </a:prstGeom>
+          <a:noFill/>
+        </p:spPr>
+        <p:txBody>
+          <a:bodyPr wrap="square" lIns="0" rIns="0" tIns="0" bIns="0" anchor="ctr">
+            <a:spAutoFit/>
+          </a:bodyPr>
+          <a:lstStyle/>
+          <a:p>
+            <a:pPr>
+              <a:spcAft>
+                <a:spcPts val="200"/>
+              </a:spcAft>
+            </a:pPr>
+            <a:r>
+              <a:rPr sz="720" b="1" i="0">
+                <a:solidFill>
+                  <a:srgbClr val="FFD700"/>
+                </a:solidFill>
+                <a:latin typeface="Trenda IG Text"/>
+              </a:rPr>
+              <a:t>People decide</a:t>
+            </a:r>
+          </a:p>
+          <a:p>
+            <a:pPr>
+              <a:spcAft>
+                <a:spcPts val="200"/>
+              </a:spcAft>
+            </a:pPr>
+            <a:r>
+              <a:rPr sz="700" b="0" i="0">
+                <a:solidFill>
+                  <a:srgbClr val="B3B3B3"/>
+                </a:solidFill>
+                <a:latin typeface="Trenda IG Text"/>
+              </a:rPr>
+              <a:t>human gates H1-H4, CAB, G1-G3; change passport</a:t>
+            </a:r>
+          </a:p>
+        </p:txBody>
+      </p:sp>
+      <p:sp>
+        <p:nvSpPr>
+          <p:cNvPr id="87" name="Shape 84"/>
+          <p:cNvSpPr/>
+          <p:nvPr/>
+        </p:nvSpPr>
+        <p:spPr>
+          <a:xfrm>
+            <a:off x="9701783" y="4393692"/>
+            <a:ext cx="1965959" cy="681227"/>
+          </a:xfrm>
+          <a:prstGeom prst="rect">
+            <a:avLst/>
+          </a:prstGeom>
+          <a:solidFill>
+            <a:srgbClr val="141414"/>
+          </a:solidFill>
+          <a:ln>
+            <a:noFill/>
+          </a:ln>
+          <a:effectLst/>
+        </p:spPr>
+        <p:style>
+          <a:lnRef idx="1">
+            <a:schemeClr val="accent1"/>
+          </a:lnRef>
+          <a:fillRef idx="3">
+            <a:schemeClr val="accent1"/>
+          </a:fillRef>
+          <a:effectRef idx="2">
+            <a:schemeClr val="accent1"/>
+          </a:effectRef>
+          <a:fontRef idx="minor">
+            <a:schemeClr val="lt1"/>
+          </a:fontRef>
+        </p:style>
+        <p:txBody>
+          <a:bodyPr rtlCol="0" anchor="ctr"/>
+          <a:lstStyle/>
+          <a:p/>
+        </p:txBody>
+      </p:sp>
+      <p:sp>
+        <p:nvSpPr>
+          <p:cNvPr id="88" name="Shape 85"/>
+          <p:cNvSpPr/>
+          <p:nvPr/>
+        </p:nvSpPr>
+        <p:spPr>
+          <a:xfrm>
+            <a:off x="9701783" y="4393692"/>
+            <a:ext cx="36576" cy="681227"/>
+          </a:xfrm>
+          <a:prstGeom prst="rect">
+            <a:avLst/>
+          </a:prstGeom>
+          <a:solidFill>
+            <a:srgbClr val="00D6F2"/>
+          </a:solidFill>
+          <a:ln>
+            <a:noFill/>
+          </a:ln>
+          <a:effectLst/>
+        </p:spPr>
+        <p:style>
+          <a:lnRef idx="1">
+            <a:schemeClr val="accent1"/>
+          </a:lnRef>
+          <a:fillRef idx="3">
+            <a:schemeClr val="accent1"/>
+          </a:fillRef>
+          <a:effectRef idx="2">
+            <a:schemeClr val="accent1"/>
+          </a:effectRef>
+          <a:fontRef idx="minor">
+            <a:schemeClr val="lt1"/>
+          </a:fontRef>
+        </p:style>
+        <p:txBody>
+          <a:bodyPr rtlCol="0" anchor="ctr"/>
+          <a:lstStyle/>
+          <a:p/>
+        </p:txBody>
+      </p:sp>
+      <p:sp>
+        <p:nvSpPr>
+          <p:cNvPr id="89" name="Text 86"/>
+          <p:cNvSpPr txBox="1"/>
+          <p:nvPr/>
+        </p:nvSpPr>
+        <p:spPr>
+          <a:xfrm>
+            <a:off x="9811511" y="4430268"/>
+            <a:ext cx="1819655" cy="608075"/>
+          </a:xfrm>
+          <a:prstGeom prst="rect">
+            <a:avLst/>
+          </a:prstGeom>
+          <a:noFill/>
+        </p:spPr>
+        <p:txBody>
+          <a:bodyPr wrap="square" lIns="0" rIns="0" tIns="0" bIns="0" anchor="ctr">
+            <a:spAutoFit/>
+          </a:bodyPr>
+          <a:lstStyle/>
+          <a:p>
+            <a:pPr>
+              <a:spcAft>
+                <a:spcPts val="200"/>
+              </a:spcAft>
+            </a:pPr>
+            <a:r>
+              <a:rPr sz="720" b="1" i="0">
+                <a:solidFill>
+                  <a:srgbClr val="F2F2F2"/>
+                </a:solidFill>
+                <a:latin typeface="Trenda IG Text"/>
+              </a:rPr>
+              <a:t>Quotas + kill switch</a:t>
+            </a:r>
+          </a:p>
+          <a:p>
+            <a:pPr>
+              <a:spcAft>
+                <a:spcPts val="200"/>
+              </a:spcAft>
+            </a:pPr>
+            <a:r>
+              <a:rPr sz="700" b="0" i="0">
+                <a:solidFill>
+                  <a:srgbClr val="B3B3B3"/>
+                </a:solidFill>
+                <a:latin typeface="Trenda IG Text"/>
+              </a:rPr>
+              <a:t>per pod and per agent</a:t>
+            </a:r>
+          </a:p>
+        </p:txBody>
+      </p:sp>
+      <p:sp>
+        <p:nvSpPr>
+          <p:cNvPr id="90" name="Text 87"/>
+          <p:cNvSpPr txBox="1"/>
+          <p:nvPr/>
+        </p:nvSpPr>
+        <p:spPr>
+          <a:xfrm>
+            <a:off x="411480" y="5230368"/>
+            <a:ext cx="1188720" cy="1005840"/>
+          </a:xfrm>
+          <a:prstGeom prst="rect">
+            <a:avLst/>
+          </a:prstGeom>
+          <a:noFill/>
+        </p:spPr>
+        <p:txBody>
+          <a:bodyPr wrap="square" lIns="0" rIns="0" tIns="0" bIns="0" anchor="ctr">
+            <a:spAutoFit/>
+          </a:bodyPr>
+          <a:lstStyle/>
+          <a:p>
+            <a:pPr>
+              <a:spcAft>
+                <a:spcPts val="100"/>
+              </a:spcAft>
+            </a:pPr>
+            <a:r>
+              <a:rPr sz="700" b="1" i="0" spc="120">
+                <a:solidFill>
+                  <a:srgbClr val="F2F2F2"/>
+                </a:solidFill>
+                <a:latin typeface="Trenda IG Text"/>
+              </a:rPr>
+              <a:t>CORE BENEFITS</a:t>
+            </a:r>
+          </a:p>
+          <a:p>
+            <a:pPr>
+              <a:spcAft>
+                <a:spcPts val="100"/>
+              </a:spcAft>
+            </a:pPr>
+            <a:r>
+              <a:rPr sz="700" b="0" i="0">
+                <a:solidFill>
+                  <a:srgbClr val="8C8C8C"/>
+                </a:solidFill>
+                <a:latin typeface="Trenda IG Text"/>
+              </a:rPr>
+              <a:t>beyond cost</a:t>
+            </a:r>
+          </a:p>
+        </p:txBody>
+      </p:sp>
+      <p:sp>
+        <p:nvSpPr>
+          <p:cNvPr id="91" name="Shape 88"/>
+          <p:cNvSpPr/>
+          <p:nvPr/>
+        </p:nvSpPr>
+        <p:spPr>
+          <a:xfrm>
+            <a:off x="1645920" y="5230368"/>
+            <a:ext cx="1612392" cy="1005840"/>
+          </a:xfrm>
+          <a:prstGeom prst="rect">
+            <a:avLst/>
+          </a:prstGeom>
+          <a:solidFill>
+            <a:srgbClr val="141414"/>
+          </a:solidFill>
+          <a:ln>
+            <a:noFill/>
+          </a:ln>
+          <a:effectLst/>
+        </p:spPr>
+        <p:style>
+          <a:lnRef idx="1">
+            <a:schemeClr val="accent1"/>
+          </a:lnRef>
+          <a:fillRef idx="3">
+            <a:schemeClr val="accent1"/>
+          </a:fillRef>
+          <a:effectRef idx="2">
+            <a:schemeClr val="accent1"/>
+          </a:effectRef>
+          <a:fontRef idx="minor">
+            <a:schemeClr val="lt1"/>
+          </a:fontRef>
+        </p:style>
+        <p:txBody>
+          <a:bodyPr rtlCol="0" anchor="ctr"/>
+          <a:lstStyle/>
+          <a:p/>
+        </p:txBody>
+      </p:sp>
+      <p:sp>
+        <p:nvSpPr>
+          <p:cNvPr id="92" name="Shape 89"/>
+          <p:cNvSpPr/>
+          <p:nvPr/>
+        </p:nvSpPr>
+        <p:spPr>
+          <a:xfrm>
+            <a:off x="1645920" y="5230368"/>
+            <a:ext cx="45720" cy="1005840"/>
+          </a:xfrm>
+          <a:prstGeom prst="rect">
+            <a:avLst/>
+          </a:prstGeom>
+          <a:gradFill rotWithShape="1">
+            <a:gsLst>
+              <a:gs pos="0">
+                <a:srgbClr val="FFD700"/>
+              </a:gs>
+              <a:gs pos="50000">
+                <a:srgbClr val="FF0069"/>
+              </a:gs>
+              <a:gs pos="100000">
+                <a:srgbClr val="00D6F2"/>
+              </a:gs>
+            </a:gsLst>
+            <a:lin ang="5400000" scaled="0"/>
+          </a:gradFill>
+          <a:ln>
+            <a:noFill/>
+          </a:ln>
+          <a:effectLst/>
+        </p:spPr>
+        <p:style>
+          <a:lnRef idx="1">
+            <a:schemeClr val="accent1"/>
+          </a:lnRef>
+          <a:fillRef idx="3">
+            <a:schemeClr val="accent1"/>
+          </a:fillRef>
+          <a:effectRef idx="2">
+            <a:schemeClr val="accent1"/>
+          </a:effectRef>
+          <a:fontRef idx="minor">
+            <a:schemeClr val="lt1"/>
+          </a:fontRef>
+        </p:style>
+        <p:txBody>
+          <a:bodyPr rtlCol="0" anchor="ctr"/>
+          <a:lstStyle/>
+          <a:p/>
+        </p:txBody>
+      </p:sp>
+      <p:sp>
+        <p:nvSpPr>
+          <p:cNvPr id="93" name="Text 90"/>
+          <p:cNvSpPr txBox="1"/>
+          <p:nvPr/>
+        </p:nvSpPr>
+        <p:spPr>
+          <a:xfrm>
+            <a:off x="1792224" y="5266944"/>
+            <a:ext cx="1392936" cy="932688"/>
+          </a:xfrm>
+          <a:prstGeom prst="rect">
+            <a:avLst/>
+          </a:prstGeom>
+          <a:noFill/>
+        </p:spPr>
+        <p:txBody>
+          <a:bodyPr wrap="square" lIns="0" rIns="0" tIns="0" bIns="0" anchor="ctr">
+            <a:spAutoFit/>
+          </a:bodyPr>
+          <a:lstStyle/>
+          <a:p>
+            <a:pPr>
+              <a:spcAft>
+                <a:spcPts val="200"/>
+              </a:spcAft>
+            </a:pPr>
+            <a:r>
+              <a:rPr sz="800" b="1" i="0">
+                <a:solidFill>
+                  <a:srgbClr val="F2F2F2"/>
+                </a:solidFill>
+                <a:latin typeface="Trenda IG Text"/>
+              </a:rPr>
+              <a:t>Consistency</a:t>
+            </a:r>
+          </a:p>
+          <a:p>
+            <a:pPr>
+              <a:spcAft>
+                <a:spcPts val="200"/>
+              </a:spcAft>
+            </a:pPr>
+            <a:r>
+              <a:rPr sz="700" b="0" i="0">
+                <a:solidFill>
+                  <a:srgbClr val="B3B3B3"/>
+                </a:solidFill>
+                <a:latin typeface="Trenda IG Text"/>
+              </a:rPr>
+              <a:t>Same standards and checks in every pod, every time.</a:t>
+            </a:r>
+          </a:p>
+        </p:txBody>
+      </p:sp>
+      <p:sp>
+        <p:nvSpPr>
+          <p:cNvPr id="94" name="Shape 91"/>
+          <p:cNvSpPr/>
+          <p:nvPr/>
+        </p:nvSpPr>
+        <p:spPr>
+          <a:xfrm>
+            <a:off x="3349752" y="5230368"/>
+            <a:ext cx="1612392" cy="1005840"/>
+          </a:xfrm>
+          <a:prstGeom prst="rect">
+            <a:avLst/>
+          </a:prstGeom>
+          <a:solidFill>
+            <a:srgbClr val="141414"/>
+          </a:solidFill>
+          <a:ln>
+            <a:noFill/>
+          </a:ln>
+          <a:effectLst/>
+        </p:spPr>
+        <p:style>
+          <a:lnRef idx="1">
+            <a:schemeClr val="accent1"/>
+          </a:lnRef>
+          <a:fillRef idx="3">
+            <a:schemeClr val="accent1"/>
+          </a:fillRef>
+          <a:effectRef idx="2">
+            <a:schemeClr val="accent1"/>
+          </a:effectRef>
+          <a:fontRef idx="minor">
+            <a:schemeClr val="lt1"/>
+          </a:fontRef>
+        </p:style>
+        <p:txBody>
+          <a:bodyPr rtlCol="0" anchor="ctr"/>
+          <a:lstStyle/>
+          <a:p/>
+        </p:txBody>
+      </p:sp>
+      <p:sp>
+        <p:nvSpPr>
+          <p:cNvPr id="95" name="Shape 92"/>
+          <p:cNvSpPr/>
+          <p:nvPr/>
+        </p:nvSpPr>
+        <p:spPr>
+          <a:xfrm>
+            <a:off x="3349752" y="5230368"/>
+            <a:ext cx="45720" cy="1005840"/>
+          </a:xfrm>
+          <a:prstGeom prst="rect">
+            <a:avLst/>
+          </a:prstGeom>
+          <a:gradFill rotWithShape="1">
+            <a:gsLst>
+              <a:gs pos="0">
+                <a:srgbClr val="FFD700"/>
+              </a:gs>
+              <a:gs pos="50000">
+                <a:srgbClr val="FF0069"/>
+              </a:gs>
+              <a:gs pos="100000">
+                <a:srgbClr val="00D6F2"/>
+              </a:gs>
+            </a:gsLst>
+            <a:lin ang="5400000" scaled="0"/>
+          </a:gradFill>
+          <a:ln>
+            <a:noFill/>
+          </a:ln>
+          <a:effectLst/>
+        </p:spPr>
+        <p:style>
+          <a:lnRef idx="1">
+            <a:schemeClr val="accent1"/>
+          </a:lnRef>
+          <a:fillRef idx="3">
+            <a:schemeClr val="accent1"/>
+          </a:fillRef>
+          <a:effectRef idx="2">
+            <a:schemeClr val="accent1"/>
+          </a:effectRef>
+          <a:fontRef idx="minor">
+            <a:schemeClr val="lt1"/>
+          </a:fontRef>
+        </p:style>
+        <p:txBody>
+          <a:bodyPr rtlCol="0" anchor="ctr"/>
+          <a:lstStyle/>
+          <a:p/>
+        </p:txBody>
+      </p:sp>
+      <p:sp>
+        <p:nvSpPr>
+          <p:cNvPr id="96" name="Text 93"/>
+          <p:cNvSpPr txBox="1"/>
+          <p:nvPr/>
+        </p:nvSpPr>
+        <p:spPr>
+          <a:xfrm>
+            <a:off x="3496056" y="5266944"/>
+            <a:ext cx="1392936" cy="932688"/>
+          </a:xfrm>
+          <a:prstGeom prst="rect">
+            <a:avLst/>
+          </a:prstGeom>
+          <a:noFill/>
+        </p:spPr>
+        <p:txBody>
+          <a:bodyPr wrap="square" lIns="0" rIns="0" tIns="0" bIns="0" anchor="ctr">
+            <a:spAutoFit/>
+          </a:bodyPr>
+          <a:lstStyle/>
+          <a:p>
+            <a:pPr>
+              <a:spcAft>
+                <a:spcPts val="200"/>
+              </a:spcAft>
+            </a:pPr>
+            <a:r>
+              <a:rPr sz="800" b="1" i="0">
+                <a:solidFill>
+                  <a:srgbClr val="F2F2F2"/>
+                </a:solidFill>
+                <a:latin typeface="Trenda IG Text"/>
+              </a:rPr>
+              <a:t>Reuse</a:t>
+            </a:r>
+          </a:p>
+          <a:p>
+            <a:pPr>
+              <a:spcAft>
+                <a:spcPts val="200"/>
+              </a:spcAft>
+            </a:pPr>
+            <a:r>
+              <a:rPr sz="700" b="0" i="0">
+                <a:solidFill>
+                  <a:srgbClr val="B3B3B3"/>
+                </a:solidFill>
+                <a:latin typeface="Trenda IG Text"/>
+              </a:rPr>
+              <a:t>Build once; a new pod adds skills, not agents.</a:t>
+            </a:r>
+          </a:p>
+        </p:txBody>
+      </p:sp>
+      <p:sp>
+        <p:nvSpPr>
+          <p:cNvPr id="97" name="Shape 94"/>
+          <p:cNvSpPr/>
+          <p:nvPr/>
+        </p:nvSpPr>
+        <p:spPr>
+          <a:xfrm>
+            <a:off x="5053584" y="5230368"/>
+            <a:ext cx="1612392" cy="1005840"/>
+          </a:xfrm>
+          <a:prstGeom prst="rect">
+            <a:avLst/>
+          </a:prstGeom>
+          <a:solidFill>
+            <a:srgbClr val="141414"/>
+          </a:solidFill>
+          <a:ln>
+            <a:noFill/>
+          </a:ln>
+          <a:effectLst/>
+        </p:spPr>
+        <p:style>
+          <a:lnRef idx="1">
+            <a:schemeClr val="accent1"/>
+          </a:lnRef>
+          <a:fillRef idx="3">
+            <a:schemeClr val="accent1"/>
+          </a:fillRef>
+          <a:effectRef idx="2">
+            <a:schemeClr val="accent1"/>
+          </a:effectRef>
+          <a:fontRef idx="minor">
+            <a:schemeClr val="lt1"/>
+          </a:fontRef>
+        </p:style>
+        <p:txBody>
+          <a:bodyPr rtlCol="0" anchor="ctr"/>
+          <a:lstStyle/>
+          <a:p/>
+        </p:txBody>
+      </p:sp>
+      <p:sp>
+        <p:nvSpPr>
+          <p:cNvPr id="98" name="Shape 95"/>
+          <p:cNvSpPr/>
+          <p:nvPr/>
+        </p:nvSpPr>
+        <p:spPr>
+          <a:xfrm>
+            <a:off x="5053584" y="5230368"/>
+            <a:ext cx="45720" cy="1005840"/>
+          </a:xfrm>
+          <a:prstGeom prst="rect">
+            <a:avLst/>
+          </a:prstGeom>
+          <a:gradFill rotWithShape="1">
+            <a:gsLst>
+              <a:gs pos="0">
+                <a:srgbClr val="FFD700"/>
+              </a:gs>
+              <a:gs pos="50000">
+                <a:srgbClr val="FF0069"/>
+              </a:gs>
+              <a:gs pos="100000">
+                <a:srgbClr val="00D6F2"/>
+              </a:gs>
+            </a:gsLst>
+            <a:lin ang="5400000" scaled="0"/>
+          </a:gradFill>
+          <a:ln>
+            <a:noFill/>
+          </a:ln>
+          <a:effectLst/>
+        </p:spPr>
+        <p:style>
+          <a:lnRef idx="1">
+            <a:schemeClr val="accent1"/>
+          </a:lnRef>
+          <a:fillRef idx="3">
+            <a:schemeClr val="accent1"/>
+          </a:fillRef>
+          <a:effectRef idx="2">
+            <a:schemeClr val="accent1"/>
+          </a:effectRef>
+          <a:fontRef idx="minor">
+            <a:schemeClr val="lt1"/>
+          </a:fontRef>
+        </p:style>
+        <p:txBody>
+          <a:bodyPr rtlCol="0" anchor="ctr"/>
+          <a:lstStyle/>
+          <a:p/>
+        </p:txBody>
+      </p:sp>
+      <p:sp>
+        <p:nvSpPr>
+          <p:cNvPr id="99" name="Text 96"/>
+          <p:cNvSpPr txBox="1"/>
+          <p:nvPr/>
+        </p:nvSpPr>
+        <p:spPr>
+          <a:xfrm>
+            <a:off x="5199888" y="5266944"/>
+            <a:ext cx="1392936" cy="932688"/>
+          </a:xfrm>
+          <a:prstGeom prst="rect">
+            <a:avLst/>
+          </a:prstGeom>
+          <a:noFill/>
+        </p:spPr>
+        <p:txBody>
+          <a:bodyPr wrap="square" lIns="0" rIns="0" tIns="0" bIns="0" anchor="ctr">
+            <a:spAutoFit/>
+          </a:bodyPr>
+          <a:lstStyle/>
+          <a:p>
+            <a:pPr>
+              <a:spcAft>
+                <a:spcPts val="200"/>
+              </a:spcAft>
+            </a:pPr>
+            <a:r>
+              <a:rPr sz="800" b="1" i="0">
+                <a:solidFill>
+                  <a:srgbClr val="F2F2F2"/>
+                </a:solidFill>
+                <a:latin typeface="Trenda IG Text"/>
+              </a:rPr>
+              <a:t>Knowledge kept</a:t>
+            </a:r>
+          </a:p>
+          <a:p>
+            <a:pPr>
+              <a:spcAft>
+                <a:spcPts val="200"/>
+              </a:spcAft>
+            </a:pPr>
+            <a:r>
+              <a:rPr sz="700" b="0" i="0">
+                <a:solidFill>
+                  <a:srgbClr val="B3B3B3"/>
+                </a:solidFill>
+                <a:latin typeface="Trenda IG Text"/>
+              </a:rPr>
+              <a:t>The graph keeps what people know when they move on.</a:t>
+            </a:r>
+          </a:p>
+        </p:txBody>
+      </p:sp>
+      <p:sp>
+        <p:nvSpPr>
+          <p:cNvPr id="100" name="Shape 97"/>
+          <p:cNvSpPr/>
+          <p:nvPr/>
+        </p:nvSpPr>
+        <p:spPr>
+          <a:xfrm>
+            <a:off x="6757416" y="5230368"/>
+            <a:ext cx="1612392" cy="1005840"/>
+          </a:xfrm>
+          <a:prstGeom prst="rect">
+            <a:avLst/>
+          </a:prstGeom>
+          <a:solidFill>
+            <a:srgbClr val="141414"/>
+          </a:solidFill>
+          <a:ln>
+            <a:noFill/>
+          </a:ln>
+          <a:effectLst/>
+        </p:spPr>
+        <p:style>
+          <a:lnRef idx="1">
+            <a:schemeClr val="accent1"/>
+          </a:lnRef>
+          <a:fillRef idx="3">
+            <a:schemeClr val="accent1"/>
+          </a:fillRef>
+          <a:effectRef idx="2">
+            <a:schemeClr val="accent1"/>
+          </a:effectRef>
+          <a:fontRef idx="minor">
+            <a:schemeClr val="lt1"/>
+          </a:fontRef>
+        </p:style>
+        <p:txBody>
+          <a:bodyPr rtlCol="0" anchor="ctr"/>
+          <a:lstStyle/>
+          <a:p/>
+        </p:txBody>
+      </p:sp>
+      <p:sp>
+        <p:nvSpPr>
+          <p:cNvPr id="101" name="Shape 98"/>
+          <p:cNvSpPr/>
+          <p:nvPr/>
+        </p:nvSpPr>
+        <p:spPr>
+          <a:xfrm>
+            <a:off x="6757416" y="5230368"/>
+            <a:ext cx="45720" cy="1005840"/>
+          </a:xfrm>
+          <a:prstGeom prst="rect">
+            <a:avLst/>
+          </a:prstGeom>
+          <a:gradFill rotWithShape="1">
+            <a:gsLst>
+              <a:gs pos="0">
+                <a:srgbClr val="FFD700"/>
+              </a:gs>
+              <a:gs pos="50000">
+                <a:srgbClr val="FF0069"/>
+              </a:gs>
+              <a:gs pos="100000">
+                <a:srgbClr val="00D6F2"/>
+              </a:gs>
+            </a:gsLst>
+            <a:lin ang="5400000" scaled="0"/>
+          </a:gradFill>
+          <a:ln>
+            <a:noFill/>
+          </a:ln>
+          <a:effectLst/>
+        </p:spPr>
+        <p:style>
+          <a:lnRef idx="1">
+            <a:schemeClr val="accent1"/>
+          </a:lnRef>
+          <a:fillRef idx="3">
+            <a:schemeClr val="accent1"/>
+          </a:fillRef>
+          <a:effectRef idx="2">
+            <a:schemeClr val="accent1"/>
+          </a:effectRef>
+          <a:fontRef idx="minor">
+            <a:schemeClr val="lt1"/>
+          </a:fontRef>
+        </p:style>
+        <p:txBody>
+          <a:bodyPr rtlCol="0" anchor="ctr"/>
+          <a:lstStyle/>
+          <a:p/>
+        </p:txBody>
+      </p:sp>
+      <p:sp>
+        <p:nvSpPr>
+          <p:cNvPr id="102" name="Text 99"/>
+          <p:cNvSpPr txBox="1"/>
+          <p:nvPr/>
+        </p:nvSpPr>
+        <p:spPr>
+          <a:xfrm>
+            <a:off x="6903720" y="5266944"/>
+            <a:ext cx="1392936" cy="932688"/>
+          </a:xfrm>
+          <a:prstGeom prst="rect">
+            <a:avLst/>
+          </a:prstGeom>
+          <a:noFill/>
+        </p:spPr>
+        <p:txBody>
+          <a:bodyPr wrap="square" lIns="0" rIns="0" tIns="0" bIns="0" anchor="ctr">
+            <a:spAutoFit/>
+          </a:bodyPr>
+          <a:lstStyle/>
+          <a:p>
+            <a:pPr>
+              <a:spcAft>
+                <a:spcPts val="200"/>
+              </a:spcAft>
+            </a:pPr>
+            <a:r>
+              <a:rPr sz="800" b="1" i="0">
+                <a:solidFill>
+                  <a:srgbClr val="F2F2F2"/>
+                </a:solidFill>
+                <a:latin typeface="Trenda IG Text"/>
+              </a:rPr>
+              <a:t>Quality</a:t>
+            </a:r>
+          </a:p>
+          <a:p>
+            <a:pPr>
+              <a:spcAft>
+                <a:spcPts val="200"/>
+              </a:spcAft>
+            </a:pPr>
+            <a:r>
+              <a:rPr sz="700" b="0" i="0">
+                <a:solidFill>
+                  <a:srgbClr val="B3B3B3"/>
+                </a:solidFill>
+                <a:latin typeface="Trenda IG Text"/>
+              </a:rPr>
+              <a:t>Every step scored before it moves.</a:t>
+            </a:r>
+          </a:p>
+        </p:txBody>
+      </p:sp>
+      <p:sp>
+        <p:nvSpPr>
+          <p:cNvPr id="103" name="Shape 100"/>
+          <p:cNvSpPr/>
+          <p:nvPr/>
+        </p:nvSpPr>
+        <p:spPr>
+          <a:xfrm>
+            <a:off x="8461248" y="5230368"/>
+            <a:ext cx="1612392" cy="1005840"/>
+          </a:xfrm>
+          <a:prstGeom prst="rect">
+            <a:avLst/>
+          </a:prstGeom>
+          <a:solidFill>
+            <a:srgbClr val="141414"/>
+          </a:solidFill>
+          <a:ln>
+            <a:noFill/>
+          </a:ln>
+          <a:effectLst/>
+        </p:spPr>
+        <p:style>
+          <a:lnRef idx="1">
+            <a:schemeClr val="accent1"/>
+          </a:lnRef>
+          <a:fillRef idx="3">
+            <a:schemeClr val="accent1"/>
+          </a:fillRef>
+          <a:effectRef idx="2">
+            <a:schemeClr val="accent1"/>
+          </a:effectRef>
+          <a:fontRef idx="minor">
+            <a:schemeClr val="lt1"/>
+          </a:fontRef>
+        </p:style>
+        <p:txBody>
+          <a:bodyPr rtlCol="0" anchor="ctr"/>
+          <a:lstStyle/>
+          <a:p/>
+        </p:txBody>
+      </p:sp>
+      <p:sp>
+        <p:nvSpPr>
+          <p:cNvPr id="104" name="Shape 101"/>
+          <p:cNvSpPr/>
+          <p:nvPr/>
+        </p:nvSpPr>
+        <p:spPr>
+          <a:xfrm>
+            <a:off x="8461248" y="5230368"/>
+            <a:ext cx="45720" cy="1005840"/>
+          </a:xfrm>
+          <a:prstGeom prst="rect">
+            <a:avLst/>
+          </a:prstGeom>
+          <a:gradFill rotWithShape="1">
+            <a:gsLst>
+              <a:gs pos="0">
+                <a:srgbClr val="FFD700"/>
+              </a:gs>
+              <a:gs pos="50000">
+                <a:srgbClr val="FF0069"/>
+              </a:gs>
+              <a:gs pos="100000">
+                <a:srgbClr val="00D6F2"/>
+              </a:gs>
+            </a:gsLst>
+            <a:lin ang="5400000" scaled="0"/>
+          </a:gradFill>
+          <a:ln>
+            <a:noFill/>
+          </a:ln>
+          <a:effectLst/>
+        </p:spPr>
+        <p:style>
+          <a:lnRef idx="1">
+            <a:schemeClr val="accent1"/>
+          </a:lnRef>
+          <a:fillRef idx="3">
+            <a:schemeClr val="accent1"/>
+          </a:fillRef>
+          <a:effectRef idx="2">
+            <a:schemeClr val="accent1"/>
+          </a:effectRef>
+          <a:fontRef idx="minor">
+            <a:schemeClr val="lt1"/>
+          </a:fontRef>
+        </p:style>
+        <p:txBody>
+          <a:bodyPr rtlCol="0" anchor="ctr"/>
+          <a:lstStyle/>
+          <a:p/>
+        </p:txBody>
+      </p:sp>
+      <p:sp>
+        <p:nvSpPr>
+          <p:cNvPr id="105" name="Text 102"/>
+          <p:cNvSpPr txBox="1"/>
+          <p:nvPr/>
+        </p:nvSpPr>
+        <p:spPr>
+          <a:xfrm>
+            <a:off x="8607552" y="5266944"/>
+            <a:ext cx="1392936" cy="932688"/>
+          </a:xfrm>
+          <a:prstGeom prst="rect">
+            <a:avLst/>
+          </a:prstGeom>
+          <a:noFill/>
+        </p:spPr>
+        <p:txBody>
+          <a:bodyPr wrap="square" lIns="0" rIns="0" tIns="0" bIns="0" anchor="ctr">
+            <a:spAutoFit/>
+          </a:bodyPr>
+          <a:lstStyle/>
+          <a:p>
+            <a:pPr>
+              <a:spcAft>
+                <a:spcPts val="200"/>
+              </a:spcAft>
+            </a:pPr>
+            <a:r>
+              <a:rPr sz="800" b="1" i="0">
+                <a:solidFill>
+                  <a:srgbClr val="F2F2F2"/>
+                </a:solidFill>
+                <a:latin typeface="Trenda IG Text"/>
+              </a:rPr>
+              <a:t>Auditability</a:t>
+            </a:r>
+          </a:p>
+          <a:p>
+            <a:pPr>
+              <a:spcAft>
+                <a:spcPts val="200"/>
+              </a:spcAft>
+            </a:pPr>
+            <a:r>
+              <a:rPr sz="700" b="0" i="0">
+                <a:solidFill>
+                  <a:srgbClr val="B3B3B3"/>
+                </a:solidFill>
+                <a:latin typeface="Trenda IG Text"/>
+              </a:rPr>
+              <a:t>Every step, approval and test recorded.</a:t>
+            </a:r>
+          </a:p>
+        </p:txBody>
+      </p:sp>
+      <p:sp>
+        <p:nvSpPr>
+          <p:cNvPr id="106" name="Shape 103"/>
+          <p:cNvSpPr/>
+          <p:nvPr/>
+        </p:nvSpPr>
+        <p:spPr>
+          <a:xfrm>
+            <a:off x="10165080" y="5230368"/>
+            <a:ext cx="1612392" cy="1005840"/>
+          </a:xfrm>
+          <a:prstGeom prst="rect">
+            <a:avLst/>
+          </a:prstGeom>
+          <a:solidFill>
+            <a:srgbClr val="141414"/>
+          </a:solidFill>
+          <a:ln>
+            <a:noFill/>
+          </a:ln>
+          <a:effectLst/>
+        </p:spPr>
+        <p:style>
+          <a:lnRef idx="1">
+            <a:schemeClr val="accent1"/>
+          </a:lnRef>
+          <a:fillRef idx="3">
+            <a:schemeClr val="accent1"/>
+          </a:fillRef>
+          <a:effectRef idx="2">
+            <a:schemeClr val="accent1"/>
+          </a:effectRef>
+          <a:fontRef idx="minor">
+            <a:schemeClr val="lt1"/>
+          </a:fontRef>
+        </p:style>
+        <p:txBody>
+          <a:bodyPr rtlCol="0" anchor="ctr"/>
+          <a:lstStyle/>
+          <a:p/>
+        </p:txBody>
+      </p:sp>
+      <p:sp>
+        <p:nvSpPr>
+          <p:cNvPr id="107" name="Shape 104"/>
+          <p:cNvSpPr/>
+          <p:nvPr/>
+        </p:nvSpPr>
+        <p:spPr>
+          <a:xfrm>
+            <a:off x="10165080" y="5230368"/>
+            <a:ext cx="45720" cy="1005840"/>
+          </a:xfrm>
+          <a:prstGeom prst="rect">
+            <a:avLst/>
+          </a:prstGeom>
+          <a:gradFill rotWithShape="1">
+            <a:gsLst>
+              <a:gs pos="0">
+                <a:srgbClr val="FFD700"/>
+              </a:gs>
+              <a:gs pos="50000">
+                <a:srgbClr val="FF0069"/>
+              </a:gs>
+              <a:gs pos="100000">
+                <a:srgbClr val="00D6F2"/>
+              </a:gs>
+            </a:gsLst>
+            <a:lin ang="5400000" scaled="0"/>
+          </a:gradFill>
+          <a:ln>
+            <a:noFill/>
+          </a:ln>
+          <a:effectLst/>
+        </p:spPr>
+        <p:style>
+          <a:lnRef idx="1">
+            <a:schemeClr val="accent1"/>
+          </a:lnRef>
+          <a:fillRef idx="3">
+            <a:schemeClr val="accent1"/>
+          </a:fillRef>
+          <a:effectRef idx="2">
+            <a:schemeClr val="accent1"/>
+          </a:effectRef>
+          <a:fontRef idx="minor">
+            <a:schemeClr val="lt1"/>
+          </a:fontRef>
+        </p:style>
+        <p:txBody>
+          <a:bodyPr rtlCol="0" anchor="ctr"/>
+          <a:lstStyle/>
+          <a:p/>
+        </p:txBody>
+      </p:sp>
+      <p:sp>
+        <p:nvSpPr>
+          <p:cNvPr id="108" name="Text 105"/>
+          <p:cNvSpPr txBox="1"/>
+          <p:nvPr/>
+        </p:nvSpPr>
+        <p:spPr>
+          <a:xfrm>
+            <a:off x="10311384" y="5266944"/>
+            <a:ext cx="1392936" cy="932688"/>
+          </a:xfrm>
+          <a:prstGeom prst="rect">
+            <a:avLst/>
+          </a:prstGeom>
+          <a:noFill/>
+        </p:spPr>
+        <p:txBody>
+          <a:bodyPr wrap="square" lIns="0" rIns="0" tIns="0" bIns="0" anchor="ctr">
+            <a:spAutoFit/>
+          </a:bodyPr>
+          <a:lstStyle/>
+          <a:p>
+            <a:pPr>
+              <a:spcAft>
+                <a:spcPts val="200"/>
+              </a:spcAft>
+            </a:pPr>
+            <a:r>
+              <a:rPr sz="800" b="1" i="0">
+                <a:solidFill>
+                  <a:srgbClr val="F2F2F2"/>
+                </a:solidFill>
+                <a:latin typeface="Trenda IG Text"/>
+              </a:rPr>
+              <a:t>Safe by design</a:t>
+            </a:r>
+          </a:p>
+          <a:p>
+            <a:pPr>
+              <a:spcAft>
+                <a:spcPts val="200"/>
+              </a:spcAft>
+            </a:pPr>
+            <a:r>
+              <a:rPr sz="700" b="0" i="0">
+                <a:solidFill>
+                  <a:srgbClr val="B3B3B3"/>
+                </a:solidFill>
+                <a:latin typeface="Trenda IG Text"/>
+              </a:rPr>
+              <a:t>No production credentials, no raw PHI for agents.</a:t>
+            </a:r>
+          </a:p>
+        </p:txBody>
+      </p:sp>
+    </p:spTree>
+  </p:cSld>
+  <p:clrMapOvr>
+    <a:masterClrMapping/>
+  </p:clrMapOvr>
+</p:sld>
+</file>
+
+<file path=ppt/slides/slide11.xml><?xml version="1.0" encoding="utf-8"?>
 <p:sld xmlns:a="http://schemas.openxmlformats.org/drawingml/2006/main" xmlns:p="http://schemas.openxmlformats.org/presentationml/2006/main" xmlns:r="http://schemas.openxmlformats.org/officeDocument/2006/relationships">
   <p:cSld>
     <p:bg>

--- a/poc/data_harness/Ascension Agentic Harness - Data Harness.pptx
+++ b/poc/data_harness/Ascension Agentic Harness - Data Harness.pptx
@@ -1703,7 +1703,7 @@
           </a:p>
           <a:p>
             <a:r>
-              <a:t>- Left: what the agents read. The engineering sources (Jira, Confluence, Salesforce, Git, Copado, Drive) for every pod. For Marketing Cloud pods, governed Google Cloud data: Gold A aggregates and masked views only.</a:t>
+              <a:t>- Left: agent sources. Agents read from and write to these systems, always through the tool gateway and never in production. The engineering sources (Jira, Confluence, Salesforce, Git, Copado, Drive) for every pod. For Marketing Cloud pods, governed Google Cloud data: Gold A aggregates and masked views only.</a:t>
             </a:r>
           </a:p>
           <a:p>
@@ -1723,7 +1723,12 @@
           </a:p>
           <a:p>
             <a:r>
-              <a:t>- Bottom: two governed paths. The delivery path is unchanged; the campaign path builds and tests first, then a masked pre-send review, then release through the gateway.</a:t>
+              <a:t>- Bottom: two governed paths, with who does each step. Delivery: the Developer Agent builds, the Release Agent moves it through Copado, Review and Test Agents run the quality gates; business users sign UAT and the change board approves at CAB. Campaigns: the Orchestrator takes the prompt, Strategist and Analytics plan on Gold A, Design and Readiness build and test, the SME and tech lead review before send, and the policy service releases.</a:t>
+            </a:r>
+          </a:p>
+          <a:p>
+            <a:r>
+              <a:t>- The Change Guardian sits with the Architect Agent: it flags any change that affects another pod before anything is built.</a:t>
             </a:r>
           </a:p>
         </p:txBody>
@@ -13157,7 +13162,16 @@
                 </a:solidFill>
                 <a:latin typeface="Trenda IG Text"/>
               </a:rPr>
-              <a:t>WHAT AGENTS READ</a:t>
+              <a:t>AGENT SOURCES</a:t>
+            </a:r>
+            <a:r>
+              <a:rPr sz="700" b="0" i="0">
+                <a:solidFill>
+                  <a:srgbClr val="FFFFFF"/>
+                </a:solidFill>
+                <a:latin typeface="Trenda IG Text"/>
+              </a:rPr>
+              <a:t>   read + write via the gateway</a:t>
             </a:r>
           </a:p>
         </p:txBody>
@@ -14414,7 +14428,7 @@
                 </a:solidFill>
                 <a:latin typeface="Trenda IG Text"/>
               </a:rPr>
-              <a:t>Jira story and Confluence design into a clear brief</a:t>
+              <a:t>User stories and functional decomposition from the Jira story</a:t>
             </a:r>
           </a:p>
         </p:txBody>
@@ -14680,7 +14694,25 @@
                 </a:solidFill>
                 <a:latin typeface="Trenda IG Text"/>
               </a:rPr>
-              <a:t>Impact, reuse and risk from the graph; the change plan</a:t>
+              <a:t>Impact and reuse from the graph; </a:t>
+            </a:r>
+            <a:r>
+              <a:rPr sz="700" b="1" i="0">
+                <a:solidFill>
+                  <a:srgbClr val="00D6F2"/>
+                </a:solidFill>
+                <a:latin typeface="Trenda IG Text"/>
+              </a:rPr>
+              <a:t>Change Guardian</a:t>
+            </a:r>
+            <a:r>
+              <a:rPr sz="700" b="0" i="0">
+                <a:solidFill>
+                  <a:srgbClr val="BFBFBF"/>
+                </a:solidFill>
+                <a:latin typeface="Trenda IG Text"/>
+              </a:rPr>
+              <a:t> flags cross-pod risk</a:t>
             </a:r>
           </a:p>
         </p:txBody>
@@ -18581,8 +18613,8 @@
         </p:nvSpPr>
         <p:spPr>
           <a:xfrm>
-            <a:off x="411480" y="5559552"/>
-            <a:ext cx="1188720" cy="292608"/>
+            <a:off x="411480" y="5504688"/>
+            <a:ext cx="1188720" cy="347472"/>
           </a:xfrm>
           <a:prstGeom prst="rect">
             <a:avLst/>
@@ -18615,8 +18647,8 @@
         </p:nvSpPr>
         <p:spPr>
           <a:xfrm>
-            <a:off x="1645920" y="5559552"/>
-            <a:ext cx="1060704" cy="292608"/>
+            <a:off x="1645920" y="5504688"/>
+            <a:ext cx="1202436" cy="347472"/>
           </a:xfrm>
           <a:prstGeom prst="roundRect">
             <a:avLst>
@@ -18661,8 +18693,8 @@
         </p:nvSpPr>
         <p:spPr>
           <a:xfrm>
-            <a:off x="1645920" y="5559552"/>
-            <a:ext cx="1060704" cy="292608"/>
+            <a:off x="1645920" y="5504688"/>
+            <a:ext cx="1202436" cy="347472"/>
           </a:xfrm>
           <a:prstGeom prst="rect">
             <a:avLst/>
@@ -18675,15 +18707,35 @@
           </a:bodyPr>
           <a:lstStyle/>
           <a:p>
-            <a:pPr algn="ctr"/>
+            <a:pPr algn="ctr">
+              <a:lnSpc>
+                <a:spcPct val="90000"/>
+              </a:lnSpc>
+            </a:pPr>
+            <a:r>
+              <a:rPr sz="700" b="1" i="0">
+                <a:solidFill>
+                  <a:srgbClr val="FFFFFF"/>
+                </a:solidFill>
+                <a:latin typeface="Trenda IG Text"/>
+              </a:rPr>
+              <a:t>AI build</a:t>
+            </a:r>
+          </a:p>
+          <a:p>
+            <a:pPr algn="ctr">
+              <a:lnSpc>
+                <a:spcPct val="90000"/>
+              </a:lnSpc>
+            </a:pPr>
             <a:r>
               <a:rPr sz="700" b="0" i="0">
                 <a:solidFill>
-                  <a:srgbClr val="FFFFFF"/>
-                </a:solidFill>
-                <a:latin typeface="Trenda IG Text"/>
-              </a:rPr>
-              <a:t>AI build</a:t>
+                  <a:srgbClr val="BFBFBF"/>
+                </a:solidFill>
+                <a:latin typeface="Trenda IG Text"/>
+              </a:rPr>
+              <a:t>Developer Agent</a:t>
             </a:r>
           </a:p>
         </p:txBody>
@@ -18696,7 +18748,7 @@
         </p:nvCxnSpPr>
         <p:spPr>
           <a:xfrm>
-            <a:off x="2706624" y="5705856"/>
+            <a:off x="2848356" y="5678424"/>
             <a:ext cx="73152" cy="0"/>
           </a:xfrm>
           <a:prstGeom prst="line">
@@ -18732,8 +18784,8 @@
         </p:nvSpPr>
         <p:spPr>
           <a:xfrm>
-            <a:off x="2779776" y="5559552"/>
-            <a:ext cx="1060704" cy="292608"/>
+            <a:off x="2921508" y="5504688"/>
+            <a:ext cx="1202436" cy="347472"/>
           </a:xfrm>
           <a:prstGeom prst="roundRect">
             <a:avLst>
@@ -18778,8 +18830,8 @@
         </p:nvSpPr>
         <p:spPr>
           <a:xfrm>
-            <a:off x="2779776" y="5559552"/>
-            <a:ext cx="1060704" cy="292608"/>
+            <a:off x="2921508" y="5504688"/>
+            <a:ext cx="1202436" cy="347472"/>
           </a:xfrm>
           <a:prstGeom prst="rect">
             <a:avLst/>
@@ -18792,15 +18844,35 @@
           </a:bodyPr>
           <a:lstStyle/>
           <a:p>
-            <a:pPr algn="ctr"/>
+            <a:pPr algn="ctr">
+              <a:lnSpc>
+                <a:spcPct val="90000"/>
+              </a:lnSpc>
+            </a:pPr>
+            <a:r>
+              <a:rPr sz="700" b="1" i="0">
+                <a:solidFill>
+                  <a:srgbClr val="FFFFFF"/>
+                </a:solidFill>
+                <a:latin typeface="Trenda IG Text"/>
+              </a:rPr>
+              <a:t>Copado</a:t>
+            </a:r>
+          </a:p>
+          <a:p>
+            <a:pPr algn="ctr">
+              <a:lnSpc>
+                <a:spcPct val="90000"/>
+              </a:lnSpc>
+            </a:pPr>
             <a:r>
               <a:rPr sz="700" b="0" i="0">
                 <a:solidFill>
-                  <a:srgbClr val="FFFFFF"/>
-                </a:solidFill>
-                <a:latin typeface="Trenda IG Text"/>
-              </a:rPr>
-              <a:t>Copado</a:t>
+                  <a:srgbClr val="BFBFBF"/>
+                </a:solidFill>
+                <a:latin typeface="Trenda IG Text"/>
+              </a:rPr>
+              <a:t>Release Agent</a:t>
             </a:r>
           </a:p>
         </p:txBody>
@@ -18813,7 +18885,7 @@
         </p:nvCxnSpPr>
         <p:spPr>
           <a:xfrm>
-            <a:off x="3840480" y="5705856"/>
+            <a:off x="4123944" y="5678424"/>
             <a:ext cx="73152" cy="0"/>
           </a:xfrm>
           <a:prstGeom prst="line">
@@ -18849,8 +18921,8 @@
         </p:nvSpPr>
         <p:spPr>
           <a:xfrm>
-            <a:off x="3913632" y="5559552"/>
-            <a:ext cx="1060704" cy="292608"/>
+            <a:off x="4197096" y="5504688"/>
+            <a:ext cx="1202436" cy="347472"/>
           </a:xfrm>
           <a:prstGeom prst="roundRect">
             <a:avLst>
@@ -18895,8 +18967,8 @@
         </p:nvSpPr>
         <p:spPr>
           <a:xfrm>
-            <a:off x="3913632" y="5559552"/>
-            <a:ext cx="1060704" cy="292608"/>
+            <a:off x="4197096" y="5504688"/>
+            <a:ext cx="1202436" cy="347472"/>
           </a:xfrm>
           <a:prstGeom prst="rect">
             <a:avLst/>
@@ -18909,15 +18981,35 @@
           </a:bodyPr>
           <a:lstStyle/>
           <a:p>
-            <a:pPr algn="ctr"/>
+            <a:pPr algn="ctr">
+              <a:lnSpc>
+                <a:spcPct val="90000"/>
+              </a:lnSpc>
+            </a:pPr>
+            <a:r>
+              <a:rPr sz="700" b="1" i="0">
+                <a:solidFill>
+                  <a:srgbClr val="FFFFFF"/>
+                </a:solidFill>
+                <a:latin typeface="Trenda IG Text"/>
+              </a:rPr>
+              <a:t>Quality gates</a:t>
+            </a:r>
+          </a:p>
+          <a:p>
+            <a:pPr algn="ctr">
+              <a:lnSpc>
+                <a:spcPct val="90000"/>
+              </a:lnSpc>
+            </a:pPr>
             <a:r>
               <a:rPr sz="700" b="0" i="0">
                 <a:solidFill>
-                  <a:srgbClr val="FFFFFF"/>
-                </a:solidFill>
-                <a:latin typeface="Trenda IG Text"/>
-              </a:rPr>
-              <a:t>Quality gates</a:t>
+                  <a:srgbClr val="BFBFBF"/>
+                </a:solidFill>
+                <a:latin typeface="Trenda IG Text"/>
+              </a:rPr>
+              <a:t>Review + Test Agents</a:t>
             </a:r>
           </a:p>
         </p:txBody>
@@ -18930,7 +19022,7 @@
         </p:nvCxnSpPr>
         <p:spPr>
           <a:xfrm>
-            <a:off x="4974336" y="5705856"/>
+            <a:off x="5399531" y="5678424"/>
             <a:ext cx="73152" cy="0"/>
           </a:xfrm>
           <a:prstGeom prst="line">
@@ -18966,8 +19058,8 @@
         </p:nvSpPr>
         <p:spPr>
           <a:xfrm>
-            <a:off x="5047488" y="5559552"/>
-            <a:ext cx="1060704" cy="292608"/>
+            <a:off x="5472683" y="5504688"/>
+            <a:ext cx="1202436" cy="347472"/>
           </a:xfrm>
           <a:prstGeom prst="roundRect">
             <a:avLst>
@@ -19012,8 +19104,8 @@
         </p:nvSpPr>
         <p:spPr>
           <a:xfrm>
-            <a:off x="5047488" y="5559552"/>
-            <a:ext cx="1060704" cy="292608"/>
+            <a:off x="5472683" y="5504688"/>
+            <a:ext cx="1202436" cy="347472"/>
           </a:xfrm>
           <a:prstGeom prst="rect">
             <a:avLst/>
@@ -19026,15 +19118,35 @@
           </a:bodyPr>
           <a:lstStyle/>
           <a:p>
-            <a:pPr algn="ctr"/>
+            <a:pPr algn="ctr">
+              <a:lnSpc>
+                <a:spcPct val="90000"/>
+              </a:lnSpc>
+            </a:pPr>
+            <a:r>
+              <a:rPr sz="700" b="1" i="0">
+                <a:solidFill>
+                  <a:srgbClr val="FFFFFF"/>
+                </a:solidFill>
+                <a:latin typeface="Trenda IG Text"/>
+              </a:rPr>
+              <a:t>DEV</a:t>
+            </a:r>
+          </a:p>
+          <a:p>
+            <a:pPr algn="ctr">
+              <a:lnSpc>
+                <a:spcPct val="90000"/>
+              </a:lnSpc>
+            </a:pPr>
             <a:r>
               <a:rPr sz="700" b="0" i="0">
                 <a:solidFill>
-                  <a:srgbClr val="FFFFFF"/>
-                </a:solidFill>
-                <a:latin typeface="Trenda IG Text"/>
-              </a:rPr>
-              <a:t>DEV</a:t>
+                  <a:srgbClr val="BFBFBF"/>
+                </a:solidFill>
+                <a:latin typeface="Trenda IG Text"/>
+              </a:rPr>
+              <a:t>Release Agent</a:t>
             </a:r>
           </a:p>
         </p:txBody>
@@ -19047,7 +19159,7 @@
         </p:nvCxnSpPr>
         <p:spPr>
           <a:xfrm>
-            <a:off x="6108192" y="5705856"/>
+            <a:off x="6675119" y="5678424"/>
             <a:ext cx="73152" cy="0"/>
           </a:xfrm>
           <a:prstGeom prst="line">
@@ -19083,8 +19195,8 @@
         </p:nvSpPr>
         <p:spPr>
           <a:xfrm>
-            <a:off x="6181344" y="5559552"/>
-            <a:ext cx="1060704" cy="292608"/>
+            <a:off x="6748271" y="5504688"/>
+            <a:ext cx="1202436" cy="347472"/>
           </a:xfrm>
           <a:prstGeom prst="roundRect">
             <a:avLst>
@@ -19129,8 +19241,8 @@
         </p:nvSpPr>
         <p:spPr>
           <a:xfrm>
-            <a:off x="6181344" y="5559552"/>
-            <a:ext cx="1060704" cy="292608"/>
+            <a:off x="6748271" y="5504688"/>
+            <a:ext cx="1202436" cy="347472"/>
           </a:xfrm>
           <a:prstGeom prst="rect">
             <a:avLst/>
@@ -19143,15 +19255,35 @@
           </a:bodyPr>
           <a:lstStyle/>
           <a:p>
-            <a:pPr algn="ctr"/>
+            <a:pPr algn="ctr">
+              <a:lnSpc>
+                <a:spcPct val="90000"/>
+              </a:lnSpc>
+            </a:pPr>
+            <a:r>
+              <a:rPr sz="700" b="1" i="0">
+                <a:solidFill>
+                  <a:srgbClr val="FFFFFF"/>
+                </a:solidFill>
+                <a:latin typeface="Trenda IG Text"/>
+              </a:rPr>
+              <a:t>SIT</a:t>
+            </a:r>
+          </a:p>
+          <a:p>
+            <a:pPr algn="ctr">
+              <a:lnSpc>
+                <a:spcPct val="90000"/>
+              </a:lnSpc>
+            </a:pPr>
             <a:r>
               <a:rPr sz="700" b="0" i="0">
                 <a:solidFill>
-                  <a:srgbClr val="FFFFFF"/>
-                </a:solidFill>
-                <a:latin typeface="Trenda IG Text"/>
-              </a:rPr>
-              <a:t>SIT</a:t>
+                  <a:srgbClr val="BFBFBF"/>
+                </a:solidFill>
+                <a:latin typeface="Trenda IG Text"/>
+              </a:rPr>
+              <a:t>Test Agent</a:t>
             </a:r>
           </a:p>
         </p:txBody>
@@ -19164,7 +19296,7 @@
         </p:nvCxnSpPr>
         <p:spPr>
           <a:xfrm>
-            <a:off x="7242048" y="5705856"/>
+            <a:off x="7950707" y="5678424"/>
             <a:ext cx="73152" cy="0"/>
           </a:xfrm>
           <a:prstGeom prst="line">
@@ -19200,8 +19332,8 @@
         </p:nvSpPr>
         <p:spPr>
           <a:xfrm>
-            <a:off x="7315200" y="5559552"/>
-            <a:ext cx="1060704" cy="292608"/>
+            <a:off x="8023859" y="5504688"/>
+            <a:ext cx="1202436" cy="347472"/>
           </a:xfrm>
           <a:prstGeom prst="roundRect">
             <a:avLst>
@@ -19246,8 +19378,8 @@
         </p:nvSpPr>
         <p:spPr>
           <a:xfrm>
-            <a:off x="7315200" y="5559552"/>
-            <a:ext cx="1060704" cy="292608"/>
+            <a:off x="8023859" y="5504688"/>
+            <a:ext cx="1202436" cy="347472"/>
           </a:xfrm>
           <a:prstGeom prst="rect">
             <a:avLst/>
@@ -19260,7 +19392,11 @@
           </a:bodyPr>
           <a:lstStyle/>
           <a:p>
-            <a:pPr algn="ctr"/>
+            <a:pPr algn="ctr">
+              <a:lnSpc>
+                <a:spcPct val="90000"/>
+              </a:lnSpc>
+            </a:pPr>
             <a:r>
               <a:rPr sz="700" b="1" i="0">
                 <a:solidFill>
@@ -19269,6 +19405,22 @@
                 <a:latin typeface="Trenda IG Text"/>
               </a:rPr>
               <a:t>UAT</a:t>
+            </a:r>
+          </a:p>
+          <a:p>
+            <a:pPr algn="ctr">
+              <a:lnSpc>
+                <a:spcPct val="90000"/>
+              </a:lnSpc>
+            </a:pPr>
+            <a:r>
+              <a:rPr sz="700" b="0" i="0">
+                <a:solidFill>
+                  <a:srgbClr val="FFD700"/>
+                </a:solidFill>
+                <a:latin typeface="Trenda IG Text"/>
+              </a:rPr>
+              <a:t>business users</a:t>
             </a:r>
           </a:p>
         </p:txBody>
@@ -19281,7 +19433,7 @@
         </p:nvCxnSpPr>
         <p:spPr>
           <a:xfrm>
-            <a:off x="8375904" y="5705856"/>
+            <a:off x="9226295" y="5678424"/>
             <a:ext cx="73152" cy="0"/>
           </a:xfrm>
           <a:prstGeom prst="line">
@@ -19317,8 +19469,8 @@
         </p:nvSpPr>
         <p:spPr>
           <a:xfrm>
-            <a:off x="8449056" y="5559552"/>
-            <a:ext cx="1060704" cy="292608"/>
+            <a:off x="9299447" y="5504688"/>
+            <a:ext cx="1202436" cy="347472"/>
           </a:xfrm>
           <a:prstGeom prst="roundRect">
             <a:avLst>
@@ -19363,8 +19515,8 @@
         </p:nvSpPr>
         <p:spPr>
           <a:xfrm>
-            <a:off x="8449056" y="5559552"/>
-            <a:ext cx="1060704" cy="292608"/>
+            <a:off x="9299447" y="5504688"/>
+            <a:ext cx="1202436" cy="347472"/>
           </a:xfrm>
           <a:prstGeom prst="rect">
             <a:avLst/>
@@ -19377,7 +19529,11 @@
           </a:bodyPr>
           <a:lstStyle/>
           <a:p>
-            <a:pPr algn="ctr"/>
+            <a:pPr algn="ctr">
+              <a:lnSpc>
+                <a:spcPct val="90000"/>
+              </a:lnSpc>
+            </a:pPr>
             <a:r>
               <a:rPr sz="700" b="1" i="0">
                 <a:solidFill>
@@ -19385,7 +19541,23 @@
                 </a:solidFill>
                 <a:latin typeface="Trenda IG Text"/>
               </a:rPr>
-              <a:t>Human approval</a:t>
+              <a:t>CAB</a:t>
+            </a:r>
+          </a:p>
+          <a:p>
+            <a:pPr algn="ctr">
+              <a:lnSpc>
+                <a:spcPct val="90000"/>
+              </a:lnSpc>
+            </a:pPr>
+            <a:r>
+              <a:rPr sz="700" b="0" i="0">
+                <a:solidFill>
+                  <a:srgbClr val="FFD700"/>
+                </a:solidFill>
+                <a:latin typeface="Trenda IG Text"/>
+              </a:rPr>
+              <a:t>change board</a:t>
             </a:r>
           </a:p>
         </p:txBody>
@@ -19398,7 +19570,7 @@
         </p:nvCxnSpPr>
         <p:spPr>
           <a:xfrm>
-            <a:off x="9509760" y="5705856"/>
+            <a:off x="10501883" y="5678424"/>
             <a:ext cx="73152" cy="0"/>
           </a:xfrm>
           <a:prstGeom prst="line">
@@ -19434,8 +19606,554 @@
         </p:nvSpPr>
         <p:spPr>
           <a:xfrm>
-            <a:off x="9582912" y="5559552"/>
-            <a:ext cx="1060704" cy="292608"/>
+            <a:off x="10575035" y="5504688"/>
+            <a:ext cx="1202436" cy="347472"/>
+          </a:xfrm>
+          <a:prstGeom prst="roundRect">
+            <a:avLst>
+              <a:gd name="adj" fmla="val 30000"/>
+            </a:avLst>
+          </a:prstGeom>
+          <a:solidFill>
+            <a:srgbClr val="141414"/>
+          </a:solidFill>
+          <a:ln w="6858">
+            <a:solidFill>
+              <a:srgbClr val="00D6F2"/>
+            </a:solidFill>
+          </a:ln>
+          <a:effectLst/>
+        </p:spPr>
+        <p:style>
+          <a:lnRef idx="1">
+            <a:schemeClr val="accent1"/>
+          </a:lnRef>
+          <a:fillRef idx="3">
+            <a:schemeClr val="accent1"/>
+          </a:fillRef>
+          <a:effectRef idx="2">
+            <a:schemeClr val="accent1"/>
+          </a:effectRef>
+          <a:fontRef idx="minor">
+            <a:schemeClr val="lt1"/>
+          </a:fontRef>
+        </p:style>
+        <p:txBody>
+          <a:bodyPr rtlCol="0" anchor="ctr"/>
+          <a:lstStyle/>
+          <a:p/>
+        </p:txBody>
+      </p:sp>
+      <p:sp>
+        <p:nvSpPr>
+          <p:cNvPr id="174" name="Text 165"/>
+          <p:cNvSpPr txBox="1"/>
+          <p:nvPr/>
+        </p:nvSpPr>
+        <p:spPr>
+          <a:xfrm>
+            <a:off x="10575035" y="5504688"/>
+            <a:ext cx="1202436" cy="347472"/>
+          </a:xfrm>
+          <a:prstGeom prst="rect">
+            <a:avLst/>
+          </a:prstGeom>
+          <a:noFill/>
+        </p:spPr>
+        <p:txBody>
+          <a:bodyPr wrap="square" lIns="0" rIns="0" tIns="0" bIns="0" anchor="ctr">
+            <a:spAutoFit/>
+          </a:bodyPr>
+          <a:lstStyle/>
+          <a:p>
+            <a:pPr algn="ctr">
+              <a:lnSpc>
+                <a:spcPct val="90000"/>
+              </a:lnSpc>
+            </a:pPr>
+            <a:r>
+              <a:rPr sz="700" b="1" i="0">
+                <a:solidFill>
+                  <a:srgbClr val="FFFFFF"/>
+                </a:solidFill>
+                <a:latin typeface="Trenda IG Text"/>
+              </a:rPr>
+              <a:t>PROD</a:t>
+            </a:r>
+          </a:p>
+          <a:p>
+            <a:pPr algn="ctr">
+              <a:lnSpc>
+                <a:spcPct val="90000"/>
+              </a:lnSpc>
+            </a:pPr>
+            <a:r>
+              <a:rPr sz="700" b="0" i="0">
+                <a:solidFill>
+                  <a:srgbClr val="BFBFBF"/>
+                </a:solidFill>
+                <a:latin typeface="Trenda IG Text"/>
+              </a:rPr>
+              <a:t>owning team</a:t>
+            </a:r>
+          </a:p>
+        </p:txBody>
+      </p:sp>
+      <p:sp>
+        <p:nvSpPr>
+          <p:cNvPr id="175" name="Text 166"/>
+          <p:cNvSpPr txBox="1"/>
+          <p:nvPr/>
+        </p:nvSpPr>
+        <p:spPr>
+          <a:xfrm>
+            <a:off x="411480" y="5907024"/>
+            <a:ext cx="1188720" cy="347472"/>
+          </a:xfrm>
+          <a:prstGeom prst="rect">
+            <a:avLst/>
+          </a:prstGeom>
+          <a:noFill/>
+        </p:spPr>
+        <p:txBody>
+          <a:bodyPr wrap="square" lIns="0" rIns="0" tIns="0" bIns="0" anchor="ctr">
+            <a:spAutoFit/>
+          </a:bodyPr>
+          <a:lstStyle/>
+          <a:p>
+            <a:r>
+              <a:rPr sz="700" b="1" i="0" spc="120">
+                <a:solidFill>
+                  <a:srgbClr val="FF0069"/>
+                </a:solidFill>
+                <a:latin typeface="Trenda IG Text"/>
+              </a:rPr>
+              <a:t>CAMPAIGN PATH</a:t>
+            </a:r>
+          </a:p>
+        </p:txBody>
+      </p:sp>
+      <p:sp>
+        <p:nvSpPr>
+          <p:cNvPr id="176" name="Shape 167"/>
+          <p:cNvSpPr/>
+          <p:nvPr/>
+        </p:nvSpPr>
+        <p:spPr>
+          <a:xfrm>
+            <a:off x="1645920" y="5907024"/>
+            <a:ext cx="1627632" cy="347472"/>
+          </a:xfrm>
+          <a:prstGeom prst="roundRect">
+            <a:avLst>
+              <a:gd name="adj" fmla="val 30000"/>
+            </a:avLst>
+          </a:prstGeom>
+          <a:solidFill>
+            <a:srgbClr val="141414"/>
+          </a:solidFill>
+          <a:ln w="6858">
+            <a:solidFill>
+              <a:srgbClr val="FF0069"/>
+            </a:solidFill>
+          </a:ln>
+          <a:effectLst/>
+        </p:spPr>
+        <p:style>
+          <a:lnRef idx="1">
+            <a:schemeClr val="accent1"/>
+          </a:lnRef>
+          <a:fillRef idx="3">
+            <a:schemeClr val="accent1"/>
+          </a:fillRef>
+          <a:effectRef idx="2">
+            <a:schemeClr val="accent1"/>
+          </a:effectRef>
+          <a:fontRef idx="minor">
+            <a:schemeClr val="lt1"/>
+          </a:fontRef>
+        </p:style>
+        <p:txBody>
+          <a:bodyPr rtlCol="0" anchor="ctr"/>
+          <a:lstStyle/>
+          <a:p/>
+        </p:txBody>
+      </p:sp>
+      <p:sp>
+        <p:nvSpPr>
+          <p:cNvPr id="177" name="Text 168"/>
+          <p:cNvSpPr txBox="1"/>
+          <p:nvPr/>
+        </p:nvSpPr>
+        <p:spPr>
+          <a:xfrm>
+            <a:off x="1645920" y="5907024"/>
+            <a:ext cx="1627632" cy="347472"/>
+          </a:xfrm>
+          <a:prstGeom prst="rect">
+            <a:avLst/>
+          </a:prstGeom>
+          <a:noFill/>
+        </p:spPr>
+        <p:txBody>
+          <a:bodyPr wrap="square" lIns="0" rIns="0" tIns="0" bIns="0" anchor="ctr">
+            <a:spAutoFit/>
+          </a:bodyPr>
+          <a:lstStyle/>
+          <a:p>
+            <a:pPr algn="ctr">
+              <a:lnSpc>
+                <a:spcPct val="90000"/>
+              </a:lnSpc>
+            </a:pPr>
+            <a:r>
+              <a:rPr sz="700" b="1" i="0">
+                <a:solidFill>
+                  <a:srgbClr val="FFFFFF"/>
+                </a:solidFill>
+                <a:latin typeface="Trenda IG Text"/>
+              </a:rPr>
+              <a:t>Prompt in Codex</a:t>
+            </a:r>
+          </a:p>
+          <a:p>
+            <a:pPr algn="ctr">
+              <a:lnSpc>
+                <a:spcPct val="90000"/>
+              </a:lnSpc>
+            </a:pPr>
+            <a:r>
+              <a:rPr sz="700" b="0" i="0">
+                <a:solidFill>
+                  <a:srgbClr val="BFBFBF"/>
+                </a:solidFill>
+                <a:latin typeface="Trenda IG Text"/>
+              </a:rPr>
+              <a:t>Orchestrator</a:t>
+            </a:r>
+          </a:p>
+        </p:txBody>
+      </p:sp>
+      <p:cxnSp>
+        <p:nvCxnSpPr>
+          <p:cNvPr id="178" name="Arrow 169"/>
+          <p:cNvCxnSpPr/>
+          <p:nvPr/>
+        </p:nvCxnSpPr>
+        <p:spPr>
+          <a:xfrm>
+            <a:off x="3273552" y="6080760"/>
+            <a:ext cx="73152" cy="0"/>
+          </a:xfrm>
+          <a:prstGeom prst="line">
+            <a:avLst/>
+          </a:prstGeom>
+          <a:ln w="9525">
+            <a:solidFill>
+              <a:srgbClr val="8C8C8C"/>
+            </a:solidFill>
+            <a:tailEnd type="triangle" w="med" len="med"/>
+          </a:ln>
+        </p:spPr>
+        <p:style>
+          <a:lnRef idx="2">
+            <a:schemeClr val="accent1"/>
+          </a:lnRef>
+          <a:fillRef idx="0">
+            <a:schemeClr val="accent1"/>
+          </a:fillRef>
+          <a:effectRef idx="1">
+            <a:schemeClr val="accent1"/>
+          </a:effectRef>
+          <a:fontRef idx="minor">
+            <a:schemeClr val="tx1"/>
+          </a:fontRef>
+        </p:style>
+      </p:cxnSp>
+      <p:sp>
+        <p:nvSpPr>
+          <p:cNvPr id="179" name="Shape 170"/>
+          <p:cNvSpPr/>
+          <p:nvPr/>
+        </p:nvSpPr>
+        <p:spPr>
+          <a:xfrm>
+            <a:off x="3346704" y="5907024"/>
+            <a:ext cx="1627632" cy="347472"/>
+          </a:xfrm>
+          <a:prstGeom prst="roundRect">
+            <a:avLst>
+              <a:gd name="adj" fmla="val 30000"/>
+            </a:avLst>
+          </a:prstGeom>
+          <a:solidFill>
+            <a:srgbClr val="141414"/>
+          </a:solidFill>
+          <a:ln w="6858">
+            <a:solidFill>
+              <a:srgbClr val="FF0069"/>
+            </a:solidFill>
+          </a:ln>
+          <a:effectLst/>
+        </p:spPr>
+        <p:style>
+          <a:lnRef idx="1">
+            <a:schemeClr val="accent1"/>
+          </a:lnRef>
+          <a:fillRef idx="3">
+            <a:schemeClr val="accent1"/>
+          </a:fillRef>
+          <a:effectRef idx="2">
+            <a:schemeClr val="accent1"/>
+          </a:effectRef>
+          <a:fontRef idx="minor">
+            <a:schemeClr val="lt1"/>
+          </a:fontRef>
+        </p:style>
+        <p:txBody>
+          <a:bodyPr rtlCol="0" anchor="ctr"/>
+          <a:lstStyle/>
+          <a:p/>
+        </p:txBody>
+      </p:sp>
+      <p:sp>
+        <p:nvSpPr>
+          <p:cNvPr id="180" name="Text 171"/>
+          <p:cNvSpPr txBox="1"/>
+          <p:nvPr/>
+        </p:nvSpPr>
+        <p:spPr>
+          <a:xfrm>
+            <a:off x="3346704" y="5907024"/>
+            <a:ext cx="1627632" cy="347472"/>
+          </a:xfrm>
+          <a:prstGeom prst="rect">
+            <a:avLst/>
+          </a:prstGeom>
+          <a:noFill/>
+        </p:spPr>
+        <p:txBody>
+          <a:bodyPr wrap="square" lIns="0" rIns="0" tIns="0" bIns="0" anchor="ctr">
+            <a:spAutoFit/>
+          </a:bodyPr>
+          <a:lstStyle/>
+          <a:p>
+            <a:pPr algn="ctr">
+              <a:lnSpc>
+                <a:spcPct val="90000"/>
+              </a:lnSpc>
+            </a:pPr>
+            <a:r>
+              <a:rPr sz="700" b="1" i="0">
+                <a:solidFill>
+                  <a:srgbClr val="FFFFFF"/>
+                </a:solidFill>
+                <a:latin typeface="Trenda IG Text"/>
+              </a:rPr>
+              <a:t>Gold A insights</a:t>
+            </a:r>
+          </a:p>
+          <a:p>
+            <a:pPr algn="ctr">
+              <a:lnSpc>
+                <a:spcPct val="90000"/>
+              </a:lnSpc>
+            </a:pPr>
+            <a:r>
+              <a:rPr sz="700" b="0" i="0">
+                <a:solidFill>
+                  <a:srgbClr val="BFBFBF"/>
+                </a:solidFill>
+                <a:latin typeface="Trenda IG Text"/>
+              </a:rPr>
+              <a:t>Strategist + Analytics</a:t>
+            </a:r>
+          </a:p>
+        </p:txBody>
+      </p:sp>
+      <p:cxnSp>
+        <p:nvCxnSpPr>
+          <p:cNvPr id="181" name="Arrow 172"/>
+          <p:cNvCxnSpPr/>
+          <p:nvPr/>
+        </p:nvCxnSpPr>
+        <p:spPr>
+          <a:xfrm>
+            <a:off x="4974336" y="6080760"/>
+            <a:ext cx="73152" cy="0"/>
+          </a:xfrm>
+          <a:prstGeom prst="line">
+            <a:avLst/>
+          </a:prstGeom>
+          <a:ln w="9525">
+            <a:solidFill>
+              <a:srgbClr val="8C8C8C"/>
+            </a:solidFill>
+            <a:tailEnd type="triangle" w="med" len="med"/>
+          </a:ln>
+        </p:spPr>
+        <p:style>
+          <a:lnRef idx="2">
+            <a:schemeClr val="accent1"/>
+          </a:lnRef>
+          <a:fillRef idx="0">
+            <a:schemeClr val="accent1"/>
+          </a:fillRef>
+          <a:effectRef idx="1">
+            <a:schemeClr val="accent1"/>
+          </a:effectRef>
+          <a:fontRef idx="minor">
+            <a:schemeClr val="tx1"/>
+          </a:fontRef>
+        </p:style>
+      </p:cxnSp>
+      <p:sp>
+        <p:nvSpPr>
+          <p:cNvPr id="182" name="Shape 173"/>
+          <p:cNvSpPr/>
+          <p:nvPr/>
+        </p:nvSpPr>
+        <p:spPr>
+          <a:xfrm>
+            <a:off x="5047488" y="5907024"/>
+            <a:ext cx="1627632" cy="347472"/>
+          </a:xfrm>
+          <a:prstGeom prst="roundRect">
+            <a:avLst>
+              <a:gd name="adj" fmla="val 30000"/>
+            </a:avLst>
+          </a:prstGeom>
+          <a:solidFill>
+            <a:srgbClr val="141414"/>
+          </a:solidFill>
+          <a:ln w="6858">
+            <a:solidFill>
+              <a:srgbClr val="FF0069"/>
+            </a:solidFill>
+          </a:ln>
+          <a:effectLst/>
+        </p:spPr>
+        <p:style>
+          <a:lnRef idx="1">
+            <a:schemeClr val="accent1"/>
+          </a:lnRef>
+          <a:fillRef idx="3">
+            <a:schemeClr val="accent1"/>
+          </a:fillRef>
+          <a:effectRef idx="2">
+            <a:schemeClr val="accent1"/>
+          </a:effectRef>
+          <a:fontRef idx="minor">
+            <a:schemeClr val="lt1"/>
+          </a:fontRef>
+        </p:style>
+        <p:txBody>
+          <a:bodyPr rtlCol="0" anchor="ctr"/>
+          <a:lstStyle/>
+          <a:p/>
+        </p:txBody>
+      </p:sp>
+      <p:sp>
+        <p:nvSpPr>
+          <p:cNvPr id="183" name="Text 174"/>
+          <p:cNvSpPr txBox="1"/>
+          <p:nvPr/>
+        </p:nvSpPr>
+        <p:spPr>
+          <a:xfrm>
+            <a:off x="5047488" y="5907024"/>
+            <a:ext cx="1627632" cy="347472"/>
+          </a:xfrm>
+          <a:prstGeom prst="rect">
+            <a:avLst/>
+          </a:prstGeom>
+          <a:noFill/>
+        </p:spPr>
+        <p:txBody>
+          <a:bodyPr wrap="square" lIns="0" rIns="0" tIns="0" bIns="0" anchor="ctr">
+            <a:spAutoFit/>
+          </a:bodyPr>
+          <a:lstStyle/>
+          <a:p>
+            <a:pPr algn="ctr">
+              <a:lnSpc>
+                <a:spcPct val="90000"/>
+              </a:lnSpc>
+            </a:pPr>
+            <a:r>
+              <a:rPr sz="700" b="1" i="0">
+                <a:solidFill>
+                  <a:srgbClr val="FFFFFF"/>
+                </a:solidFill>
+                <a:latin typeface="Trenda IG Text"/>
+              </a:rPr>
+              <a:t>Build + test</a:t>
+            </a:r>
+          </a:p>
+          <a:p>
+            <a:pPr algn="ctr">
+              <a:lnSpc>
+                <a:spcPct val="90000"/>
+              </a:lnSpc>
+            </a:pPr>
+            <a:r>
+              <a:rPr sz="700" b="0" i="0">
+                <a:solidFill>
+                  <a:srgbClr val="BFBFBF"/>
+                </a:solidFill>
+                <a:latin typeface="Trenda IG Text"/>
+              </a:rPr>
+              <a:t>Design + Readiness</a:t>
+            </a:r>
+          </a:p>
+        </p:txBody>
+      </p:sp>
+      <p:cxnSp>
+        <p:nvCxnSpPr>
+          <p:cNvPr id="184" name="Arrow 175"/>
+          <p:cNvCxnSpPr/>
+          <p:nvPr/>
+        </p:nvCxnSpPr>
+        <p:spPr>
+          <a:xfrm>
+            <a:off x="6675120" y="6080760"/>
+            <a:ext cx="73152" cy="0"/>
+          </a:xfrm>
+          <a:prstGeom prst="line">
+            <a:avLst/>
+          </a:prstGeom>
+          <a:ln w="9525">
+            <a:solidFill>
+              <a:srgbClr val="8C8C8C"/>
+            </a:solidFill>
+            <a:tailEnd type="triangle" w="med" len="med"/>
+          </a:ln>
+        </p:spPr>
+        <p:style>
+          <a:lnRef idx="2">
+            <a:schemeClr val="accent1"/>
+          </a:lnRef>
+          <a:fillRef idx="0">
+            <a:schemeClr val="accent1"/>
+          </a:fillRef>
+          <a:effectRef idx="1">
+            <a:schemeClr val="accent1"/>
+          </a:effectRef>
+          <a:fontRef idx="minor">
+            <a:schemeClr val="tx1"/>
+          </a:fontRef>
+        </p:style>
+      </p:cxnSp>
+      <p:sp>
+        <p:nvSpPr>
+          <p:cNvPr id="185" name="Shape 176"/>
+          <p:cNvSpPr/>
+          <p:nvPr/>
+        </p:nvSpPr>
+        <p:spPr>
+          <a:xfrm>
+            <a:off x="6748272" y="5907024"/>
+            <a:ext cx="1627632" cy="347472"/>
           </a:xfrm>
           <a:prstGeom prst="roundRect">
             <a:avLst>
@@ -19474,14 +20192,14 @@
       </p:sp>
       <p:sp>
         <p:nvSpPr>
-          <p:cNvPr id="174" name="Text 165"/>
-          <p:cNvSpPr txBox="1"/>
-          <p:nvPr/>
-        </p:nvSpPr>
-        <p:spPr>
-          <a:xfrm>
-            <a:off x="9582912" y="5559552"/>
-            <a:ext cx="1060704" cy="292608"/>
+          <p:cNvPr id="186" name="Text 177"/>
+          <p:cNvSpPr txBox="1"/>
+          <p:nvPr/>
+        </p:nvSpPr>
+        <p:spPr>
+          <a:xfrm>
+            <a:off x="6748272" y="5907024"/>
+            <a:ext cx="1627632" cy="347472"/>
           </a:xfrm>
           <a:prstGeom prst="rect">
             <a:avLst/>
@@ -19494,7 +20212,11 @@
           </a:bodyPr>
           <a:lstStyle/>
           <a:p>
-            <a:pPr algn="ctr"/>
+            <a:pPr algn="ctr">
+              <a:lnSpc>
+                <a:spcPct val="90000"/>
+              </a:lnSpc>
+            </a:pPr>
             <a:r>
               <a:rPr sz="700" b="1" i="0">
                 <a:solidFill>
@@ -19502,20 +20224,36 @@
                 </a:solidFill>
                 <a:latin typeface="Trenda IG Text"/>
               </a:rPr>
-              <a:t>CAB</a:t>
+              <a:t>Pre-send review</a:t>
+            </a:r>
+          </a:p>
+          <a:p>
+            <a:pPr algn="ctr">
+              <a:lnSpc>
+                <a:spcPct val="90000"/>
+              </a:lnSpc>
+            </a:pPr>
+            <a:r>
+              <a:rPr sz="700" b="0" i="0">
+                <a:solidFill>
+                  <a:srgbClr val="FFD700"/>
+                </a:solidFill>
+                <a:latin typeface="Trenda IG Text"/>
+              </a:rPr>
+              <a:t>SME + tech lead</a:t>
             </a:r>
           </a:p>
         </p:txBody>
       </p:sp>
       <p:cxnSp>
         <p:nvCxnSpPr>
-          <p:cNvPr id="175" name="Arrow 166"/>
+          <p:cNvPr id="187" name="Arrow 178"/>
           <p:cNvCxnSpPr/>
           <p:nvPr/>
         </p:nvCxnSpPr>
         <p:spPr>
           <a:xfrm>
-            <a:off x="10643616" y="5705856"/>
+            <a:off x="8375904" y="6080760"/>
             <a:ext cx="73152" cy="0"/>
           </a:xfrm>
           <a:prstGeom prst="line">
@@ -19545,129 +20283,14 @@
       </p:cxnSp>
       <p:sp>
         <p:nvSpPr>
-          <p:cNvPr id="176" name="Shape 167"/>
+          <p:cNvPr id="188" name="Shape 179"/>
           <p:cNvSpPr/>
           <p:nvPr/>
         </p:nvSpPr>
         <p:spPr>
           <a:xfrm>
-            <a:off x="10716768" y="5559552"/>
-            <a:ext cx="1060704" cy="292608"/>
-          </a:xfrm>
-          <a:prstGeom prst="roundRect">
-            <a:avLst>
-              <a:gd name="adj" fmla="val 30000"/>
-            </a:avLst>
-          </a:prstGeom>
-          <a:solidFill>
-            <a:srgbClr val="141414"/>
-          </a:solidFill>
-          <a:ln w="6858">
-            <a:solidFill>
-              <a:srgbClr val="00D6F2"/>
-            </a:solidFill>
-          </a:ln>
-          <a:effectLst/>
-        </p:spPr>
-        <p:style>
-          <a:lnRef idx="1">
-            <a:schemeClr val="accent1"/>
-          </a:lnRef>
-          <a:fillRef idx="3">
-            <a:schemeClr val="accent1"/>
-          </a:fillRef>
-          <a:effectRef idx="2">
-            <a:schemeClr val="accent1"/>
-          </a:effectRef>
-          <a:fontRef idx="minor">
-            <a:schemeClr val="lt1"/>
-          </a:fontRef>
-        </p:style>
-        <p:txBody>
-          <a:bodyPr rtlCol="0" anchor="ctr"/>
-          <a:lstStyle/>
-          <a:p/>
-        </p:txBody>
-      </p:sp>
-      <p:sp>
-        <p:nvSpPr>
-          <p:cNvPr id="177" name="Text 168"/>
-          <p:cNvSpPr txBox="1"/>
-          <p:nvPr/>
-        </p:nvSpPr>
-        <p:spPr>
-          <a:xfrm>
-            <a:off x="10716768" y="5559552"/>
-            <a:ext cx="1060704" cy="292608"/>
-          </a:xfrm>
-          <a:prstGeom prst="rect">
-            <a:avLst/>
-          </a:prstGeom>
-          <a:noFill/>
-        </p:spPr>
-        <p:txBody>
-          <a:bodyPr wrap="square" lIns="0" rIns="0" tIns="0" bIns="0" anchor="ctr">
-            <a:spAutoFit/>
-          </a:bodyPr>
-          <a:lstStyle/>
-          <a:p>
-            <a:pPr algn="ctr"/>
-            <a:r>
-              <a:rPr sz="700" b="0" i="0">
-                <a:solidFill>
-                  <a:srgbClr val="FFFFFF"/>
-                </a:solidFill>
-                <a:latin typeface="Trenda IG Text"/>
-              </a:rPr>
-              <a:t>PROD</a:t>
-            </a:r>
-          </a:p>
-        </p:txBody>
-      </p:sp>
-      <p:sp>
-        <p:nvSpPr>
-          <p:cNvPr id="178" name="Text 169"/>
-          <p:cNvSpPr txBox="1"/>
-          <p:nvPr/>
-        </p:nvSpPr>
-        <p:spPr>
-          <a:xfrm>
-            <a:off x="411480" y="5925312"/>
-            <a:ext cx="1188720" cy="292608"/>
-          </a:xfrm>
-          <a:prstGeom prst="rect">
-            <a:avLst/>
-          </a:prstGeom>
-          <a:noFill/>
-        </p:spPr>
-        <p:txBody>
-          <a:bodyPr wrap="square" lIns="0" rIns="0" tIns="0" bIns="0" anchor="ctr">
-            <a:spAutoFit/>
-          </a:bodyPr>
-          <a:lstStyle/>
-          <a:p>
-            <a:r>
-              <a:rPr sz="700" b="1" i="0" spc="120">
-                <a:solidFill>
-                  <a:srgbClr val="FF0069"/>
-                </a:solidFill>
-                <a:latin typeface="Trenda IG Text"/>
-              </a:rPr>
-              <a:t>CAMPAIGN PATH</a:t>
-            </a:r>
-          </a:p>
-        </p:txBody>
-      </p:sp>
-      <p:sp>
-        <p:nvSpPr>
-          <p:cNvPr id="179" name="Shape 170"/>
-          <p:cNvSpPr/>
-          <p:nvPr/>
-        </p:nvSpPr>
-        <p:spPr>
-          <a:xfrm>
-            <a:off x="1645920" y="5925312"/>
-            <a:ext cx="1627632" cy="292608"/>
+            <a:off x="8449056" y="5907024"/>
+            <a:ext cx="1627632" cy="347472"/>
           </a:xfrm>
           <a:prstGeom prst="roundRect">
             <a:avLst>
@@ -19706,14 +20329,14 @@
       </p:sp>
       <p:sp>
         <p:nvSpPr>
-          <p:cNvPr id="180" name="Text 171"/>
-          <p:cNvSpPr txBox="1"/>
-          <p:nvPr/>
-        </p:nvSpPr>
-        <p:spPr>
-          <a:xfrm>
-            <a:off x="1645920" y="5925312"/>
-            <a:ext cx="1627632" cy="292608"/>
+          <p:cNvPr id="189" name="Text 180"/>
+          <p:cNvSpPr txBox="1"/>
+          <p:nvPr/>
+        </p:nvSpPr>
+        <p:spPr>
+          <a:xfrm>
+            <a:off x="8449056" y="5907024"/>
+            <a:ext cx="1627632" cy="347472"/>
           </a:xfrm>
           <a:prstGeom prst="rect">
             <a:avLst/>
@@ -19726,28 +20349,48 @@
           </a:bodyPr>
           <a:lstStyle/>
           <a:p>
-            <a:pPr algn="ctr"/>
+            <a:pPr algn="ctr">
+              <a:lnSpc>
+                <a:spcPct val="90000"/>
+              </a:lnSpc>
+            </a:pPr>
+            <a:r>
+              <a:rPr sz="700" b="1" i="0">
+                <a:solidFill>
+                  <a:srgbClr val="FFFFFF"/>
+                </a:solidFill>
+                <a:latin typeface="Trenda IG Text"/>
+              </a:rPr>
+              <a:t>Gateway release</a:t>
+            </a:r>
+          </a:p>
+          <a:p>
+            <a:pPr algn="ctr">
+              <a:lnSpc>
+                <a:spcPct val="90000"/>
+              </a:lnSpc>
+            </a:pPr>
             <a:r>
               <a:rPr sz="700" b="0" i="0">
                 <a:solidFill>
-                  <a:srgbClr val="FFFFFF"/>
-                </a:solidFill>
-                <a:latin typeface="Trenda IG Text"/>
-              </a:rPr>
-              <a:t>Prompt in Codex</a:t>
+                  <a:srgbClr val="BFBFBF"/>
+                </a:solidFill>
+                <a:latin typeface="Trenda IG Text"/>
+              </a:rPr>
+              <a:t>policy service</a:t>
             </a:r>
           </a:p>
         </p:txBody>
       </p:sp>
       <p:cxnSp>
         <p:nvCxnSpPr>
-          <p:cNvPr id="181" name="Arrow 172"/>
+          <p:cNvPr id="190" name="Arrow 181"/>
           <p:cNvCxnSpPr/>
           <p:nvPr/>
         </p:nvCxnSpPr>
         <p:spPr>
           <a:xfrm>
-            <a:off x="3273552" y="6071616"/>
+            <a:off x="10076688" y="6080760"/>
             <a:ext cx="73152" cy="0"/>
           </a:xfrm>
           <a:prstGeom prst="line">
@@ -19777,14 +20420,14 @@
       </p:cxnSp>
       <p:sp>
         <p:nvSpPr>
-          <p:cNvPr id="182" name="Shape 173"/>
+          <p:cNvPr id="191" name="Shape 182"/>
           <p:cNvSpPr/>
           <p:nvPr/>
         </p:nvSpPr>
         <p:spPr>
           <a:xfrm>
-            <a:off x="3346704" y="5925312"/>
-            <a:ext cx="1627632" cy="292608"/>
+            <a:off x="10149840" y="5907024"/>
+            <a:ext cx="1627632" cy="347472"/>
           </a:xfrm>
           <a:prstGeom prst="roundRect">
             <a:avLst>
@@ -19823,14 +20466,14 @@
       </p:sp>
       <p:sp>
         <p:nvSpPr>
-          <p:cNvPr id="183" name="Text 174"/>
-          <p:cNvSpPr txBox="1"/>
-          <p:nvPr/>
-        </p:nvSpPr>
-        <p:spPr>
-          <a:xfrm>
-            <a:off x="3346704" y="5925312"/>
-            <a:ext cx="1627632" cy="292608"/>
+          <p:cNvPr id="192" name="Text 183"/>
+          <p:cNvSpPr txBox="1"/>
+          <p:nvPr/>
+        </p:nvSpPr>
+        <p:spPr>
+          <a:xfrm>
+            <a:off x="10149840" y="5907024"/>
+            <a:ext cx="1627632" cy="347472"/>
           </a:xfrm>
           <a:prstGeom prst="rect">
             <a:avLst/>
@@ -19843,483 +20486,35 @@
           </a:bodyPr>
           <a:lstStyle/>
           <a:p>
-            <a:pPr algn="ctr"/>
+            <a:pPr algn="ctr">
+              <a:lnSpc>
+                <a:spcPct val="90000"/>
+              </a:lnSpc>
+            </a:pPr>
+            <a:r>
+              <a:rPr sz="700" b="1" i="0">
+                <a:solidFill>
+                  <a:srgbClr val="FFFFFF"/>
+                </a:solidFill>
+                <a:latin typeface="Trenda IG Text"/>
+              </a:rPr>
+              <a:t>Journey runs</a:t>
+            </a:r>
+          </a:p>
+          <a:p>
+            <a:pPr algn="ctr">
+              <a:lnSpc>
+                <a:spcPct val="90000"/>
+              </a:lnSpc>
+            </a:pPr>
             <a:r>
               <a:rPr sz="700" b="0" i="0">
                 <a:solidFill>
-                  <a:srgbClr val="FFFFFF"/>
-                </a:solidFill>
-                <a:latin typeface="Trenda IG Text"/>
-              </a:rPr>
-              <a:t>Gold A insights</a:t>
-            </a:r>
-          </a:p>
-        </p:txBody>
-      </p:sp>
-      <p:cxnSp>
-        <p:nvCxnSpPr>
-          <p:cNvPr id="184" name="Arrow 175"/>
-          <p:cNvCxnSpPr/>
-          <p:nvPr/>
-        </p:nvCxnSpPr>
-        <p:spPr>
-          <a:xfrm>
-            <a:off x="4974336" y="6071616"/>
-            <a:ext cx="73152" cy="0"/>
-          </a:xfrm>
-          <a:prstGeom prst="line">
-            <a:avLst/>
-          </a:prstGeom>
-          <a:ln w="9525">
-            <a:solidFill>
-              <a:srgbClr val="8C8C8C"/>
-            </a:solidFill>
-            <a:tailEnd type="triangle" w="med" len="med"/>
-          </a:ln>
-        </p:spPr>
-        <p:style>
-          <a:lnRef idx="2">
-            <a:schemeClr val="accent1"/>
-          </a:lnRef>
-          <a:fillRef idx="0">
-            <a:schemeClr val="accent1"/>
-          </a:fillRef>
-          <a:effectRef idx="1">
-            <a:schemeClr val="accent1"/>
-          </a:effectRef>
-          <a:fontRef idx="minor">
-            <a:schemeClr val="tx1"/>
-          </a:fontRef>
-        </p:style>
-      </p:cxnSp>
-      <p:sp>
-        <p:nvSpPr>
-          <p:cNvPr id="185" name="Shape 176"/>
-          <p:cNvSpPr/>
-          <p:nvPr/>
-        </p:nvSpPr>
-        <p:spPr>
-          <a:xfrm>
-            <a:off x="5047488" y="5925312"/>
-            <a:ext cx="1627632" cy="292608"/>
-          </a:xfrm>
-          <a:prstGeom prst="roundRect">
-            <a:avLst>
-              <a:gd name="adj" fmla="val 30000"/>
-            </a:avLst>
-          </a:prstGeom>
-          <a:solidFill>
-            <a:srgbClr val="141414"/>
-          </a:solidFill>
-          <a:ln w="6858">
-            <a:solidFill>
-              <a:srgbClr val="FF0069"/>
-            </a:solidFill>
-          </a:ln>
-          <a:effectLst/>
-        </p:spPr>
-        <p:style>
-          <a:lnRef idx="1">
-            <a:schemeClr val="accent1"/>
-          </a:lnRef>
-          <a:fillRef idx="3">
-            <a:schemeClr val="accent1"/>
-          </a:fillRef>
-          <a:effectRef idx="2">
-            <a:schemeClr val="accent1"/>
-          </a:effectRef>
-          <a:fontRef idx="minor">
-            <a:schemeClr val="lt1"/>
-          </a:fontRef>
-        </p:style>
-        <p:txBody>
-          <a:bodyPr rtlCol="0" anchor="ctr"/>
-          <a:lstStyle/>
-          <a:p/>
-        </p:txBody>
-      </p:sp>
-      <p:sp>
-        <p:nvSpPr>
-          <p:cNvPr id="186" name="Text 177"/>
-          <p:cNvSpPr txBox="1"/>
-          <p:nvPr/>
-        </p:nvSpPr>
-        <p:spPr>
-          <a:xfrm>
-            <a:off x="5047488" y="5925312"/>
-            <a:ext cx="1627632" cy="292608"/>
-          </a:xfrm>
-          <a:prstGeom prst="rect">
-            <a:avLst/>
-          </a:prstGeom>
-          <a:noFill/>
-        </p:spPr>
-        <p:txBody>
-          <a:bodyPr wrap="square" lIns="0" rIns="0" tIns="0" bIns="0" anchor="ctr">
-            <a:spAutoFit/>
-          </a:bodyPr>
-          <a:lstStyle/>
-          <a:p>
-            <a:pPr algn="ctr"/>
-            <a:r>
-              <a:rPr sz="700" b="0" i="0">
-                <a:solidFill>
-                  <a:srgbClr val="FFFFFF"/>
-                </a:solidFill>
-                <a:latin typeface="Trenda IG Text"/>
-              </a:rPr>
-              <a:t>Build + test</a:t>
-            </a:r>
-          </a:p>
-        </p:txBody>
-      </p:sp>
-      <p:cxnSp>
-        <p:nvCxnSpPr>
-          <p:cNvPr id="187" name="Arrow 178"/>
-          <p:cNvCxnSpPr/>
-          <p:nvPr/>
-        </p:nvCxnSpPr>
-        <p:spPr>
-          <a:xfrm>
-            <a:off x="6675120" y="6071616"/>
-            <a:ext cx="73152" cy="0"/>
-          </a:xfrm>
-          <a:prstGeom prst="line">
-            <a:avLst/>
-          </a:prstGeom>
-          <a:ln w="9525">
-            <a:solidFill>
-              <a:srgbClr val="8C8C8C"/>
-            </a:solidFill>
-            <a:tailEnd type="triangle" w="med" len="med"/>
-          </a:ln>
-        </p:spPr>
-        <p:style>
-          <a:lnRef idx="2">
-            <a:schemeClr val="accent1"/>
-          </a:lnRef>
-          <a:fillRef idx="0">
-            <a:schemeClr val="accent1"/>
-          </a:fillRef>
-          <a:effectRef idx="1">
-            <a:schemeClr val="accent1"/>
-          </a:effectRef>
-          <a:fontRef idx="minor">
-            <a:schemeClr val="tx1"/>
-          </a:fontRef>
-        </p:style>
-      </p:cxnSp>
-      <p:sp>
-        <p:nvSpPr>
-          <p:cNvPr id="188" name="Shape 179"/>
-          <p:cNvSpPr/>
-          <p:nvPr/>
-        </p:nvSpPr>
-        <p:spPr>
-          <a:xfrm>
-            <a:off x="6748272" y="5925312"/>
-            <a:ext cx="1627632" cy="292608"/>
-          </a:xfrm>
-          <a:prstGeom prst="roundRect">
-            <a:avLst>
-              <a:gd name="adj" fmla="val 30000"/>
-            </a:avLst>
-          </a:prstGeom>
-          <a:solidFill>
-            <a:srgbClr val="2B2508"/>
-          </a:solidFill>
-          <a:ln w="6858">
-            <a:solidFill>
-              <a:srgbClr val="FFD700"/>
-            </a:solidFill>
-          </a:ln>
-          <a:effectLst/>
-        </p:spPr>
-        <p:style>
-          <a:lnRef idx="1">
-            <a:schemeClr val="accent1"/>
-          </a:lnRef>
-          <a:fillRef idx="3">
-            <a:schemeClr val="accent1"/>
-          </a:fillRef>
-          <a:effectRef idx="2">
-            <a:schemeClr val="accent1"/>
-          </a:effectRef>
-          <a:fontRef idx="minor">
-            <a:schemeClr val="lt1"/>
-          </a:fontRef>
-        </p:style>
-        <p:txBody>
-          <a:bodyPr rtlCol="0" anchor="ctr"/>
-          <a:lstStyle/>
-          <a:p/>
-        </p:txBody>
-      </p:sp>
-      <p:sp>
-        <p:nvSpPr>
-          <p:cNvPr id="189" name="Text 180"/>
-          <p:cNvSpPr txBox="1"/>
-          <p:nvPr/>
-        </p:nvSpPr>
-        <p:spPr>
-          <a:xfrm>
-            <a:off x="6748272" y="5925312"/>
-            <a:ext cx="1627632" cy="292608"/>
-          </a:xfrm>
-          <a:prstGeom prst="rect">
-            <a:avLst/>
-          </a:prstGeom>
-          <a:noFill/>
-        </p:spPr>
-        <p:txBody>
-          <a:bodyPr wrap="square" lIns="0" rIns="0" tIns="0" bIns="0" anchor="ctr">
-            <a:spAutoFit/>
-          </a:bodyPr>
-          <a:lstStyle/>
-          <a:p>
-            <a:pPr algn="ctr"/>
-            <a:r>
-              <a:rPr sz="700" b="1" i="0">
-                <a:solidFill>
-                  <a:srgbClr val="FFD700"/>
-                </a:solidFill>
-                <a:latin typeface="Trenda IG Text"/>
-              </a:rPr>
-              <a:t>Pre-send review</a:t>
-            </a:r>
-          </a:p>
-        </p:txBody>
-      </p:sp>
-      <p:cxnSp>
-        <p:nvCxnSpPr>
-          <p:cNvPr id="190" name="Arrow 181"/>
-          <p:cNvCxnSpPr/>
-          <p:nvPr/>
-        </p:nvCxnSpPr>
-        <p:spPr>
-          <a:xfrm>
-            <a:off x="8375904" y="6071616"/>
-            <a:ext cx="73152" cy="0"/>
-          </a:xfrm>
-          <a:prstGeom prst="line">
-            <a:avLst/>
-          </a:prstGeom>
-          <a:ln w="9525">
-            <a:solidFill>
-              <a:srgbClr val="8C8C8C"/>
-            </a:solidFill>
-            <a:tailEnd type="triangle" w="med" len="med"/>
-          </a:ln>
-        </p:spPr>
-        <p:style>
-          <a:lnRef idx="2">
-            <a:schemeClr val="accent1"/>
-          </a:lnRef>
-          <a:fillRef idx="0">
-            <a:schemeClr val="accent1"/>
-          </a:fillRef>
-          <a:effectRef idx="1">
-            <a:schemeClr val="accent1"/>
-          </a:effectRef>
-          <a:fontRef idx="minor">
-            <a:schemeClr val="tx1"/>
-          </a:fontRef>
-        </p:style>
-      </p:cxnSp>
-      <p:sp>
-        <p:nvSpPr>
-          <p:cNvPr id="191" name="Shape 182"/>
-          <p:cNvSpPr/>
-          <p:nvPr/>
-        </p:nvSpPr>
-        <p:spPr>
-          <a:xfrm>
-            <a:off x="8449056" y="5925312"/>
-            <a:ext cx="1627632" cy="292608"/>
-          </a:xfrm>
-          <a:prstGeom prst="roundRect">
-            <a:avLst>
-              <a:gd name="adj" fmla="val 30000"/>
-            </a:avLst>
-          </a:prstGeom>
-          <a:solidFill>
-            <a:srgbClr val="141414"/>
-          </a:solidFill>
-          <a:ln w="6858">
-            <a:solidFill>
-              <a:srgbClr val="FF0069"/>
-            </a:solidFill>
-          </a:ln>
-          <a:effectLst/>
-        </p:spPr>
-        <p:style>
-          <a:lnRef idx="1">
-            <a:schemeClr val="accent1"/>
-          </a:lnRef>
-          <a:fillRef idx="3">
-            <a:schemeClr val="accent1"/>
-          </a:fillRef>
-          <a:effectRef idx="2">
-            <a:schemeClr val="accent1"/>
-          </a:effectRef>
-          <a:fontRef idx="minor">
-            <a:schemeClr val="lt1"/>
-          </a:fontRef>
-        </p:style>
-        <p:txBody>
-          <a:bodyPr rtlCol="0" anchor="ctr"/>
-          <a:lstStyle/>
-          <a:p/>
-        </p:txBody>
-      </p:sp>
-      <p:sp>
-        <p:nvSpPr>
-          <p:cNvPr id="192" name="Text 183"/>
-          <p:cNvSpPr txBox="1"/>
-          <p:nvPr/>
-        </p:nvSpPr>
-        <p:spPr>
-          <a:xfrm>
-            <a:off x="8449056" y="5925312"/>
-            <a:ext cx="1627632" cy="292608"/>
-          </a:xfrm>
-          <a:prstGeom prst="rect">
-            <a:avLst/>
-          </a:prstGeom>
-          <a:noFill/>
-        </p:spPr>
-        <p:txBody>
-          <a:bodyPr wrap="square" lIns="0" rIns="0" tIns="0" bIns="0" anchor="ctr">
-            <a:spAutoFit/>
-          </a:bodyPr>
-          <a:lstStyle/>
-          <a:p>
-            <a:pPr algn="ctr"/>
-            <a:r>
-              <a:rPr sz="700" b="0" i="0">
-                <a:solidFill>
-                  <a:srgbClr val="FFFFFF"/>
-                </a:solidFill>
-                <a:latin typeface="Trenda IG Text"/>
-              </a:rPr>
-              <a:t>Gateway release</a:t>
-            </a:r>
-          </a:p>
-        </p:txBody>
-      </p:sp>
-      <p:cxnSp>
-        <p:nvCxnSpPr>
-          <p:cNvPr id="193" name="Arrow 184"/>
-          <p:cNvCxnSpPr/>
-          <p:nvPr/>
-        </p:nvCxnSpPr>
-        <p:spPr>
-          <a:xfrm>
-            <a:off x="10076688" y="6071616"/>
-            <a:ext cx="73152" cy="0"/>
-          </a:xfrm>
-          <a:prstGeom prst="line">
-            <a:avLst/>
-          </a:prstGeom>
-          <a:ln w="9525">
-            <a:solidFill>
-              <a:srgbClr val="8C8C8C"/>
-            </a:solidFill>
-            <a:tailEnd type="triangle" w="med" len="med"/>
-          </a:ln>
-        </p:spPr>
-        <p:style>
-          <a:lnRef idx="2">
-            <a:schemeClr val="accent1"/>
-          </a:lnRef>
-          <a:fillRef idx="0">
-            <a:schemeClr val="accent1"/>
-          </a:fillRef>
-          <a:effectRef idx="1">
-            <a:schemeClr val="accent1"/>
-          </a:effectRef>
-          <a:fontRef idx="minor">
-            <a:schemeClr val="tx1"/>
-          </a:fontRef>
-        </p:style>
-      </p:cxnSp>
-      <p:sp>
-        <p:nvSpPr>
-          <p:cNvPr id="194" name="Shape 185"/>
-          <p:cNvSpPr/>
-          <p:nvPr/>
-        </p:nvSpPr>
-        <p:spPr>
-          <a:xfrm>
-            <a:off x="10149840" y="5925312"/>
-            <a:ext cx="1627632" cy="292608"/>
-          </a:xfrm>
-          <a:prstGeom prst="roundRect">
-            <a:avLst>
-              <a:gd name="adj" fmla="val 30000"/>
-            </a:avLst>
-          </a:prstGeom>
-          <a:solidFill>
-            <a:srgbClr val="141414"/>
-          </a:solidFill>
-          <a:ln w="6858">
-            <a:solidFill>
-              <a:srgbClr val="FF0069"/>
-            </a:solidFill>
-          </a:ln>
-          <a:effectLst/>
-        </p:spPr>
-        <p:style>
-          <a:lnRef idx="1">
-            <a:schemeClr val="accent1"/>
-          </a:lnRef>
-          <a:fillRef idx="3">
-            <a:schemeClr val="accent1"/>
-          </a:fillRef>
-          <a:effectRef idx="2">
-            <a:schemeClr val="accent1"/>
-          </a:effectRef>
-          <a:fontRef idx="minor">
-            <a:schemeClr val="lt1"/>
-          </a:fontRef>
-        </p:style>
-        <p:txBody>
-          <a:bodyPr rtlCol="0" anchor="ctr"/>
-          <a:lstStyle/>
-          <a:p/>
-        </p:txBody>
-      </p:sp>
-      <p:sp>
-        <p:nvSpPr>
-          <p:cNvPr id="195" name="Text 186"/>
-          <p:cNvSpPr txBox="1"/>
-          <p:nvPr/>
-        </p:nvSpPr>
-        <p:spPr>
-          <a:xfrm>
-            <a:off x="10149840" y="5925312"/>
-            <a:ext cx="1627632" cy="292608"/>
-          </a:xfrm>
-          <a:prstGeom prst="rect">
-            <a:avLst/>
-          </a:prstGeom>
-          <a:noFill/>
-        </p:spPr>
-        <p:txBody>
-          <a:bodyPr wrap="square" lIns="0" rIns="0" tIns="0" bIns="0" anchor="ctr">
-            <a:spAutoFit/>
-          </a:bodyPr>
-          <a:lstStyle/>
-          <a:p>
-            <a:pPr algn="ctr"/>
-            <a:r>
-              <a:rPr sz="700" b="0" i="0">
-                <a:solidFill>
-                  <a:srgbClr val="FFFFFF"/>
-                </a:solidFill>
-                <a:latin typeface="Trenda IG Text"/>
-              </a:rPr>
-              <a:t>Journey runs</a:t>
+                  <a:srgbClr val="BFBFBF"/>
+                </a:solidFill>
+                <a:latin typeface="Trenda IG Text"/>
+              </a:rPr>
+              <a:t>Marketing Cloud</a:t>
             </a:r>
           </a:p>
         </p:txBody>
@@ -23501,9 +23696,9 @@
           <a:lstStyle/>
           <a:p>
             <a:r>
-              <a:rPr sz="740" b="1" i="0">
-                <a:solidFill>
-                  <a:srgbClr val="FFFFFF"/>
+              <a:rPr sz="860" b="1" i="0">
+                <a:solidFill>
+                  <a:srgbClr val="00D6F2"/>
                 </a:solidFill>
                 <a:latin typeface="Trenda IG Text"/>
               </a:rPr>
@@ -23514,116 +23709,14 @@
       </p:sp>
       <p:sp>
         <p:nvSpPr>
-          <p:cNvPr id="88" name="Text 81"/>
-          <p:cNvSpPr txBox="1"/>
-          <p:nvPr/>
-        </p:nvSpPr>
-        <p:spPr>
-          <a:xfrm>
-            <a:off x="6528816" y="2688336"/>
-            <a:ext cx="1691640" cy="310896"/>
-          </a:xfrm>
-          <a:prstGeom prst="rect">
-            <a:avLst/>
-          </a:prstGeom>
-          <a:noFill/>
-        </p:spPr>
-        <p:txBody>
-          <a:bodyPr wrap="square" lIns="0" rIns="0" tIns="0" bIns="0" anchor="ctr">
-            <a:spAutoFit/>
-          </a:bodyPr>
-          <a:lstStyle/>
-          <a:p>
-            <a:r>
-              <a:rPr sz="740" b="1" i="0">
-                <a:solidFill>
-                  <a:srgbClr val="FFFFFF"/>
-                </a:solidFill>
-                <a:latin typeface="Trenda IG Text"/>
-              </a:rPr>
-              <a:t>Guardrails in + out · Model Armor</a:t>
-            </a:r>
-          </a:p>
-        </p:txBody>
-      </p:sp>
-      <p:sp>
-        <p:nvSpPr>
-          <p:cNvPr id="89" name="Text 82"/>
-          <p:cNvSpPr txBox="1"/>
-          <p:nvPr/>
-        </p:nvSpPr>
-        <p:spPr>
-          <a:xfrm>
-            <a:off x="6528816" y="3035808"/>
-            <a:ext cx="1691640" cy="310896"/>
-          </a:xfrm>
-          <a:prstGeom prst="rect">
-            <a:avLst/>
-          </a:prstGeom>
-          <a:noFill/>
-        </p:spPr>
-        <p:txBody>
-          <a:bodyPr wrap="square" lIns="0" rIns="0" tIns="0" bIns="0" anchor="ctr">
-            <a:spAutoFit/>
-          </a:bodyPr>
-          <a:lstStyle/>
-          <a:p>
-            <a:r>
-              <a:rPr sz="740" b="1" i="0">
-                <a:solidFill>
-                  <a:srgbClr val="FFFFFF"/>
-                </a:solidFill>
-                <a:latin typeface="Trenda IG Text"/>
-              </a:rPr>
-              <a:t>Identity + access</a:t>
-            </a:r>
-          </a:p>
-        </p:txBody>
-      </p:sp>
-      <p:sp>
-        <p:nvSpPr>
-          <p:cNvPr id="90" name="Text 83"/>
-          <p:cNvSpPr txBox="1"/>
-          <p:nvPr/>
-        </p:nvSpPr>
-        <p:spPr>
-          <a:xfrm>
-            <a:off x="6528816" y="3383279"/>
-            <a:ext cx="1691640" cy="310896"/>
-          </a:xfrm>
-          <a:prstGeom prst="rect">
-            <a:avLst/>
-          </a:prstGeom>
-          <a:noFill/>
-        </p:spPr>
-        <p:txBody>
-          <a:bodyPr wrap="square" lIns="0" rIns="0" tIns="0" bIns="0" anchor="ctr">
-            <a:spAutoFit/>
-          </a:bodyPr>
-          <a:lstStyle/>
-          <a:p>
-            <a:r>
-              <a:rPr sz="740" b="1" i="0">
-                <a:solidFill>
-                  <a:srgbClr val="FF0069"/>
-                </a:solidFill>
-                <a:latin typeface="Trenda IG Text"/>
-              </a:rPr>
-              <a:t>Collibra masking + DLP</a:t>
-            </a:r>
-          </a:p>
-        </p:txBody>
-      </p:sp>
-      <p:sp>
-        <p:nvSpPr>
-          <p:cNvPr id="91" name="Shape 84"/>
+          <p:cNvPr id="88" name="Shape 81"/>
           <p:cNvSpPr/>
           <p:nvPr/>
         </p:nvSpPr>
         <p:spPr>
           <a:xfrm>
-            <a:off x="8202167" y="3474720"/>
-            <a:ext cx="329184" cy="137160"/>
+            <a:off x="7854696" y="2423160"/>
+            <a:ext cx="694944" cy="155448"/>
           </a:xfrm>
           <a:prstGeom prst="roundRect">
             <a:avLst>
@@ -23662,82 +23755,150 @@
       </p:sp>
       <p:sp>
         <p:nvSpPr>
+          <p:cNvPr id="89" name="Text 82"/>
+          <p:cNvSpPr txBox="1"/>
+          <p:nvPr/>
+        </p:nvSpPr>
+        <p:spPr>
+          <a:xfrm>
+            <a:off x="7854696" y="2423160"/>
+            <a:ext cx="694944" cy="155448"/>
+          </a:xfrm>
+          <a:prstGeom prst="rect">
+            <a:avLst/>
+          </a:prstGeom>
+          <a:noFill/>
+        </p:spPr>
+        <p:txBody>
+          <a:bodyPr wrap="square" lIns="0" rIns="0" tIns="0" bIns="0" anchor="ctr">
+            <a:spAutoFit/>
+          </a:bodyPr>
+          <a:lstStyle/>
+          <a:p>
+            <a:pPr algn="ctr"/>
+            <a:r>
+              <a:rPr sz="700" b="1" i="0" spc="80">
+                <a:solidFill>
+                  <a:srgbClr val="000000"/>
+                </a:solidFill>
+                <a:latin typeface="Trenda IG Text"/>
+              </a:rPr>
+              <a:t>WE BUILD IT</a:t>
+            </a:r>
+          </a:p>
+        </p:txBody>
+      </p:sp>
+      <p:sp>
+        <p:nvSpPr>
+          <p:cNvPr id="90" name="Text 83"/>
+          <p:cNvSpPr txBox="1"/>
+          <p:nvPr/>
+        </p:nvSpPr>
+        <p:spPr>
+          <a:xfrm>
+            <a:off x="6528816" y="2688336"/>
+            <a:ext cx="1691640" cy="310896"/>
+          </a:xfrm>
+          <a:prstGeom prst="rect">
+            <a:avLst/>
+          </a:prstGeom>
+          <a:noFill/>
+        </p:spPr>
+        <p:txBody>
+          <a:bodyPr wrap="square" lIns="0" rIns="0" tIns="0" bIns="0" anchor="ctr">
+            <a:spAutoFit/>
+          </a:bodyPr>
+          <a:lstStyle/>
+          <a:p>
+            <a:r>
+              <a:rPr sz="740" b="1" i="0">
+                <a:solidFill>
+                  <a:srgbClr val="FFFFFF"/>
+                </a:solidFill>
+                <a:latin typeface="Trenda IG Text"/>
+              </a:rPr>
+              <a:t>Guardrails in + out · Model Armor</a:t>
+            </a:r>
+          </a:p>
+        </p:txBody>
+      </p:sp>
+      <p:sp>
+        <p:nvSpPr>
+          <p:cNvPr id="91" name="Text 84"/>
+          <p:cNvSpPr txBox="1"/>
+          <p:nvPr/>
+        </p:nvSpPr>
+        <p:spPr>
+          <a:xfrm>
+            <a:off x="6528816" y="3035808"/>
+            <a:ext cx="1691640" cy="310896"/>
+          </a:xfrm>
+          <a:prstGeom prst="rect">
+            <a:avLst/>
+          </a:prstGeom>
+          <a:noFill/>
+        </p:spPr>
+        <p:txBody>
+          <a:bodyPr wrap="square" lIns="0" rIns="0" tIns="0" bIns="0" anchor="ctr">
+            <a:spAutoFit/>
+          </a:bodyPr>
+          <a:lstStyle/>
+          <a:p>
+            <a:r>
+              <a:rPr sz="740" b="1" i="0">
+                <a:solidFill>
+                  <a:srgbClr val="FFFFFF"/>
+                </a:solidFill>
+                <a:latin typeface="Trenda IG Text"/>
+              </a:rPr>
+              <a:t>Identity + access</a:t>
+            </a:r>
+          </a:p>
+        </p:txBody>
+      </p:sp>
+      <p:sp>
+        <p:nvSpPr>
           <p:cNvPr id="92" name="Text 85"/>
           <p:cNvSpPr txBox="1"/>
           <p:nvPr/>
         </p:nvSpPr>
         <p:spPr>
           <a:xfrm>
+            <a:off x="6528816" y="3383279"/>
+            <a:ext cx="1691640" cy="310896"/>
+          </a:xfrm>
+          <a:prstGeom prst="rect">
+            <a:avLst/>
+          </a:prstGeom>
+          <a:noFill/>
+        </p:spPr>
+        <p:txBody>
+          <a:bodyPr wrap="square" lIns="0" rIns="0" tIns="0" bIns="0" anchor="ctr">
+            <a:spAutoFit/>
+          </a:bodyPr>
+          <a:lstStyle/>
+          <a:p>
+            <a:r>
+              <a:rPr sz="740" b="1" i="0">
+                <a:solidFill>
+                  <a:srgbClr val="FF0069"/>
+                </a:solidFill>
+                <a:latin typeface="Trenda IG Text"/>
+              </a:rPr>
+              <a:t>Collibra masking + DLP</a:t>
+            </a:r>
+          </a:p>
+        </p:txBody>
+      </p:sp>
+      <p:sp>
+        <p:nvSpPr>
+          <p:cNvPr id="93" name="Shape 86"/>
+          <p:cNvSpPr/>
+          <p:nvPr/>
+        </p:nvSpPr>
+        <p:spPr>
+          <a:xfrm>
             <a:off x="8202167" y="3474720"/>
-            <a:ext cx="329184" cy="137160"/>
-          </a:xfrm>
-          <a:prstGeom prst="rect">
-            <a:avLst/>
-          </a:prstGeom>
-          <a:noFill/>
-        </p:spPr>
-        <p:txBody>
-          <a:bodyPr wrap="square" lIns="0" rIns="0" tIns="0" bIns="0" anchor="ctr">
-            <a:spAutoFit/>
-          </a:bodyPr>
-          <a:lstStyle/>
-          <a:p>
-            <a:pPr algn="ctr"/>
-            <a:r>
-              <a:rPr sz="700" b="1" i="0" spc="80">
-                <a:solidFill>
-                  <a:srgbClr val="000000"/>
-                </a:solidFill>
-                <a:latin typeface="Trenda IG Text"/>
-              </a:rPr>
-              <a:t>NEW</a:t>
-            </a:r>
-          </a:p>
-        </p:txBody>
-      </p:sp>
-      <p:sp>
-        <p:nvSpPr>
-          <p:cNvPr id="93" name="Text 86"/>
-          <p:cNvSpPr txBox="1"/>
-          <p:nvPr/>
-        </p:nvSpPr>
-        <p:spPr>
-          <a:xfrm>
-            <a:off x="6528816" y="3730752"/>
-            <a:ext cx="1691640" cy="310896"/>
-          </a:xfrm>
-          <a:prstGeom prst="rect">
-            <a:avLst/>
-          </a:prstGeom>
-          <a:noFill/>
-        </p:spPr>
-        <p:txBody>
-          <a:bodyPr wrap="square" lIns="0" rIns="0" tIns="0" bIns="0" anchor="ctr">
-            <a:spAutoFit/>
-          </a:bodyPr>
-          <a:lstStyle/>
-          <a:p>
-            <a:r>
-              <a:rPr sz="740" b="1" i="0">
-                <a:solidFill>
-                  <a:srgbClr val="FF0069"/>
-                </a:solidFill>
-                <a:latin typeface="Trenda IG Text"/>
-              </a:rPr>
-              <a:t>Compliance Guardian + policy engine</a:t>
-            </a:r>
-          </a:p>
-        </p:txBody>
-      </p:sp>
-      <p:sp>
-        <p:nvSpPr>
-          <p:cNvPr id="94" name="Shape 87"/>
-          <p:cNvSpPr/>
-          <p:nvPr/>
-        </p:nvSpPr>
-        <p:spPr>
-          <a:xfrm>
-            <a:off x="8202167" y="3822191"/>
             <a:ext cx="329184" cy="137160"/>
           </a:xfrm>
           <a:prstGeom prst="roundRect">
@@ -23777,8 +23938,77 @@
       </p:sp>
       <p:sp>
         <p:nvSpPr>
+          <p:cNvPr id="94" name="Text 87"/>
+          <p:cNvSpPr txBox="1"/>
+          <p:nvPr/>
+        </p:nvSpPr>
+        <p:spPr>
+          <a:xfrm>
+            <a:off x="8202167" y="3474720"/>
+            <a:ext cx="329184" cy="137160"/>
+          </a:xfrm>
+          <a:prstGeom prst="rect">
+            <a:avLst/>
+          </a:prstGeom>
+          <a:noFill/>
+        </p:spPr>
+        <p:txBody>
+          <a:bodyPr wrap="square" lIns="0" rIns="0" tIns="0" bIns="0" anchor="ctr">
+            <a:spAutoFit/>
+          </a:bodyPr>
+          <a:lstStyle/>
+          <a:p>
+            <a:pPr algn="ctr"/>
+            <a:r>
+              <a:rPr sz="700" b="1" i="0" spc="80">
+                <a:solidFill>
+                  <a:srgbClr val="000000"/>
+                </a:solidFill>
+                <a:latin typeface="Trenda IG Text"/>
+              </a:rPr>
+              <a:t>NEW</a:t>
+            </a:r>
+          </a:p>
+        </p:txBody>
+      </p:sp>
+      <p:sp>
+        <p:nvSpPr>
           <p:cNvPr id="95" name="Text 88"/>
           <p:cNvSpPr txBox="1"/>
+          <p:nvPr/>
+        </p:nvSpPr>
+        <p:spPr>
+          <a:xfrm>
+            <a:off x="6528816" y="3730752"/>
+            <a:ext cx="1691640" cy="310896"/>
+          </a:xfrm>
+          <a:prstGeom prst="rect">
+            <a:avLst/>
+          </a:prstGeom>
+          <a:noFill/>
+        </p:spPr>
+        <p:txBody>
+          <a:bodyPr wrap="square" lIns="0" rIns="0" tIns="0" bIns="0" anchor="ctr">
+            <a:spAutoFit/>
+          </a:bodyPr>
+          <a:lstStyle/>
+          <a:p>
+            <a:r>
+              <a:rPr sz="740" b="1" i="0">
+                <a:solidFill>
+                  <a:srgbClr val="FF0069"/>
+                </a:solidFill>
+                <a:latin typeface="Trenda IG Text"/>
+              </a:rPr>
+              <a:t>Compliance Guardian + policy engine</a:t>
+            </a:r>
+          </a:p>
+        </p:txBody>
+      </p:sp>
+      <p:sp>
+        <p:nvSpPr>
+          <p:cNvPr id="96" name="Shape 89"/>
+          <p:cNvSpPr/>
           <p:nvPr/>
         </p:nvSpPr>
         <p:spPr>
@@ -23786,6 +24016,52 @@
             <a:off x="8202167" y="3822191"/>
             <a:ext cx="329184" cy="137160"/>
           </a:xfrm>
+          <a:prstGeom prst="roundRect">
+            <a:avLst>
+              <a:gd name="adj" fmla="val 50000"/>
+            </a:avLst>
+          </a:prstGeom>
+          <a:solidFill>
+            <a:srgbClr val="00D6F2"/>
+          </a:solidFill>
+          <a:ln w="6350">
+            <a:solidFill>
+              <a:srgbClr val="00D6F2"/>
+            </a:solidFill>
+          </a:ln>
+          <a:effectLst/>
+        </p:spPr>
+        <p:style>
+          <a:lnRef idx="1">
+            <a:schemeClr val="accent1"/>
+          </a:lnRef>
+          <a:fillRef idx="3">
+            <a:schemeClr val="accent1"/>
+          </a:fillRef>
+          <a:effectRef idx="2">
+            <a:schemeClr val="accent1"/>
+          </a:effectRef>
+          <a:fontRef idx="minor">
+            <a:schemeClr val="lt1"/>
+          </a:fontRef>
+        </p:style>
+        <p:txBody>
+          <a:bodyPr rtlCol="0" anchor="ctr"/>
+          <a:lstStyle/>
+          <a:p/>
+        </p:txBody>
+      </p:sp>
+      <p:sp>
+        <p:nvSpPr>
+          <p:cNvPr id="97" name="Text 90"/>
+          <p:cNvSpPr txBox="1"/>
+          <p:nvPr/>
+        </p:nvSpPr>
+        <p:spPr>
+          <a:xfrm>
+            <a:off x="8202167" y="3822191"/>
+            <a:ext cx="329184" cy="137160"/>
+          </a:xfrm>
           <a:prstGeom prst="rect">
             <a:avLst/>
           </a:prstGeom>
@@ -23812,7 +24088,7 @@
       </p:sp>
       <p:sp>
         <p:nvSpPr>
-          <p:cNvPr id="96" name="Text 89"/>
+          <p:cNvPr id="98" name="Text 91"/>
           <p:cNvSpPr txBox="1"/>
           <p:nvPr/>
         </p:nvSpPr>
@@ -23846,7 +24122,7 @@
       </p:sp>
       <p:sp>
         <p:nvSpPr>
-          <p:cNvPr id="97" name="Text 90"/>
+          <p:cNvPr id="99" name="Text 92"/>
           <p:cNvSpPr txBox="1"/>
           <p:nvPr/>
         </p:nvSpPr>
@@ -23880,7 +24156,7 @@
       </p:sp>
       <p:sp>
         <p:nvSpPr>
-          <p:cNvPr id="98" name="Text 91"/>
+          <p:cNvPr id="100" name="Text 93"/>
           <p:cNvSpPr txBox="1"/>
           <p:nvPr/>
         </p:nvSpPr>
@@ -23914,7 +24190,7 @@
       </p:sp>
       <p:sp>
         <p:nvSpPr>
-          <p:cNvPr id="99" name="Text 92"/>
+          <p:cNvPr id="101" name="Text 94"/>
           <p:cNvSpPr txBox="1"/>
           <p:nvPr/>
         </p:nvSpPr>
@@ -23948,7 +24224,7 @@
       </p:sp>
       <p:sp>
         <p:nvSpPr>
-          <p:cNvPr id="100" name="Shape 93"/>
+          <p:cNvPr id="102" name="Shape 95"/>
           <p:cNvSpPr/>
           <p:nvPr/>
         </p:nvSpPr>
@@ -23994,7 +24270,7 @@
       </p:sp>
       <p:sp>
         <p:nvSpPr>
-          <p:cNvPr id="101" name="Shape 94"/>
+          <p:cNvPr id="103" name="Shape 96"/>
           <p:cNvSpPr/>
           <p:nvPr/>
         </p:nvSpPr>
@@ -24036,7 +24312,7 @@
       </p:sp>
       <p:sp>
         <p:nvSpPr>
-          <p:cNvPr id="102" name="Text 95"/>
+          <p:cNvPr id="104" name="Text 97"/>
           <p:cNvSpPr txBox="1"/>
           <p:nvPr/>
         </p:nvSpPr>
@@ -24071,7 +24347,7 @@
       </p:sp>
       <p:sp>
         <p:nvSpPr>
-          <p:cNvPr id="103" name="Text 96"/>
+          <p:cNvPr id="105" name="Text 98"/>
           <p:cNvSpPr txBox="1"/>
           <p:nvPr/>
         </p:nvSpPr>
@@ -24105,7 +24381,7 @@
       </p:sp>
       <p:sp>
         <p:nvSpPr>
-          <p:cNvPr id="104" name="Text 97"/>
+          <p:cNvPr id="106" name="Text 99"/>
           <p:cNvSpPr txBox="1"/>
           <p:nvPr/>
         </p:nvSpPr>
@@ -24139,7 +24415,7 @@
       </p:sp>
       <p:sp>
         <p:nvSpPr>
-          <p:cNvPr id="105" name="Text 98"/>
+          <p:cNvPr id="107" name="Text 100"/>
           <p:cNvSpPr txBox="1"/>
           <p:nvPr/>
         </p:nvSpPr>
@@ -24173,7 +24449,7 @@
       </p:sp>
       <p:sp>
         <p:nvSpPr>
-          <p:cNvPr id="106" name="Shape 99"/>
+          <p:cNvPr id="108" name="Shape 101"/>
           <p:cNvSpPr/>
           <p:nvPr/>
         </p:nvSpPr>
@@ -24219,7 +24495,7 @@
       </p:sp>
       <p:sp>
         <p:nvSpPr>
-          <p:cNvPr id="107" name="Shape 100"/>
+          <p:cNvPr id="109" name="Shape 102"/>
           <p:cNvSpPr/>
           <p:nvPr/>
         </p:nvSpPr>
@@ -24261,7 +24537,7 @@
       </p:sp>
       <p:sp>
         <p:nvSpPr>
-          <p:cNvPr id="108" name="Text 101"/>
+          <p:cNvPr id="110" name="Text 103"/>
           <p:cNvSpPr txBox="1"/>
           <p:nvPr/>
         </p:nvSpPr>
@@ -24296,7 +24572,7 @@
       </p:sp>
       <p:sp>
         <p:nvSpPr>
-          <p:cNvPr id="109" name="Text 102"/>
+          <p:cNvPr id="111" name="Text 104"/>
           <p:cNvSpPr txBox="1"/>
           <p:nvPr/>
         </p:nvSpPr>
@@ -24330,7 +24606,7 @@
       </p:sp>
       <p:sp>
         <p:nvSpPr>
-          <p:cNvPr id="110" name="Text 103"/>
+          <p:cNvPr id="112" name="Text 105"/>
           <p:cNvSpPr txBox="1"/>
           <p:nvPr/>
         </p:nvSpPr>
@@ -24357,14 +24633,32 @@
                 </a:solidFill>
                 <a:latin typeface="Trenda IG Text"/>
               </a:rPr>
-              <a:t>The Change Guardian checks every change against who owns and uses it.</a:t>
-            </a:r>
-          </a:p>
-        </p:txBody>
-      </p:sp>
-      <p:sp>
-        <p:nvSpPr>
-          <p:cNvPr id="111" name="Text 104"/>
+              <a:t>The </a:t>
+            </a:r>
+            <a:r>
+              <a:rPr sz="700" b="1" i="0">
+                <a:solidFill>
+                  <a:srgbClr val="00D6F2"/>
+                </a:solidFill>
+                <a:latin typeface="Trenda IG Text"/>
+              </a:rPr>
+              <a:t>Change Guardian</a:t>
+            </a:r>
+            <a:r>
+              <a:rPr sz="700" b="0" i="0">
+                <a:solidFill>
+                  <a:srgbClr val="BFBFBF"/>
+                </a:solidFill>
+                <a:latin typeface="Trenda IG Text"/>
+              </a:rPr>
+              <a:t> checks every change against who owns and uses it.</a:t>
+            </a:r>
+          </a:p>
+        </p:txBody>
+      </p:sp>
+      <p:sp>
+        <p:nvSpPr>
+          <p:cNvPr id="113" name="Text 106"/>
           <p:cNvSpPr txBox="1"/>
           <p:nvPr/>
         </p:nvSpPr>
@@ -24398,7 +24692,7 @@
       </p:sp>
       <p:sp>
         <p:nvSpPr>
-          <p:cNvPr id="112" name="Shape 105"/>
+          <p:cNvPr id="114" name="Shape 107"/>
           <p:cNvSpPr/>
           <p:nvPr/>
         </p:nvSpPr>
@@ -24444,7 +24738,7 @@
       </p:sp>
       <p:sp>
         <p:nvSpPr>
-          <p:cNvPr id="113" name="Shape 106"/>
+          <p:cNvPr id="115" name="Shape 108"/>
           <p:cNvSpPr/>
           <p:nvPr/>
         </p:nvSpPr>
@@ -24486,7 +24780,7 @@
       </p:sp>
       <p:sp>
         <p:nvSpPr>
-          <p:cNvPr id="114" name="Text 107"/>
+          <p:cNvPr id="116" name="Text 109"/>
           <p:cNvSpPr txBox="1"/>
           <p:nvPr/>
         </p:nvSpPr>
@@ -24521,7 +24815,7 @@
       </p:sp>
       <p:sp>
         <p:nvSpPr>
-          <p:cNvPr id="115" name="Text 108"/>
+          <p:cNvPr id="117" name="Text 110"/>
           <p:cNvSpPr txBox="1"/>
           <p:nvPr/>
         </p:nvSpPr>
@@ -24555,7 +24849,7 @@
       </p:sp>
       <p:sp>
         <p:nvSpPr>
-          <p:cNvPr id="116" name="Text 109"/>
+          <p:cNvPr id="118" name="Text 111"/>
           <p:cNvSpPr txBox="1"/>
           <p:nvPr/>
         </p:nvSpPr>
@@ -24589,7 +24883,7 @@
       </p:sp>
       <p:sp>
         <p:nvSpPr>
-          <p:cNvPr id="117" name="Text 110"/>
+          <p:cNvPr id="119" name="Text 112"/>
           <p:cNvSpPr txBox="1"/>
           <p:nvPr/>
         </p:nvSpPr>
@@ -24623,7 +24917,7 @@
       </p:sp>
       <p:sp>
         <p:nvSpPr>
-          <p:cNvPr id="118" name="Shape 111"/>
+          <p:cNvPr id="120" name="Shape 113"/>
           <p:cNvSpPr/>
           <p:nvPr/>
         </p:nvSpPr>
@@ -24667,7 +24961,7 @@
       </p:sp>
       <p:sp>
         <p:nvSpPr>
-          <p:cNvPr id="119" name="Text 112"/>
+          <p:cNvPr id="121" name="Text 114"/>
           <p:cNvSpPr txBox="1"/>
           <p:nvPr/>
         </p:nvSpPr>
@@ -24701,7 +24995,7 @@
       </p:sp>
       <p:sp>
         <p:nvSpPr>
-          <p:cNvPr id="120" name="Text 113"/>
+          <p:cNvPr id="122" name="Text 115"/>
           <p:cNvSpPr txBox="1"/>
           <p:nvPr/>
         </p:nvSpPr>
@@ -24746,7 +25040,7 @@
       </p:sp>
       <p:pic>
         <p:nvPicPr>
-          <p:cNvPr id="121" name="Picture 120" descr="salesforce.png"/>
+          <p:cNvPr id="123" name="Picture 122" descr="salesforce.png"/>
           <p:cNvPicPr>
             <a:picLocks noChangeAspect="1"/>
           </p:cNvPicPr>
@@ -24770,7 +25064,7 @@
       </p:pic>
       <p:sp>
         <p:nvSpPr>
-          <p:cNvPr id="122" name="Text 114"/>
+          <p:cNvPr id="124" name="Text 116"/>
           <p:cNvSpPr txBox="1"/>
           <p:nvPr/>
         </p:nvSpPr>
@@ -24804,7 +25098,7 @@
       </p:sp>
       <p:sp>
         <p:nvSpPr>
-          <p:cNvPr id="123" name="Text 115"/>
+          <p:cNvPr id="125" name="Text 117"/>
           <p:cNvSpPr txBox="1"/>
           <p:nvPr/>
         </p:nvSpPr>
@@ -24838,7 +25132,7 @@
       </p:sp>
       <p:pic>
         <p:nvPicPr>
-          <p:cNvPr id="124" name="Picture 123" descr="git.png"/>
+          <p:cNvPr id="126" name="Picture 125" descr="git.png"/>
           <p:cNvPicPr>
             <a:picLocks noChangeAspect="1"/>
           </p:cNvPicPr>
@@ -24862,7 +25156,7 @@
       </p:pic>
       <p:sp>
         <p:nvSpPr>
-          <p:cNvPr id="125" name="Text 116"/>
+          <p:cNvPr id="127" name="Text 118"/>
           <p:cNvSpPr txBox="1"/>
           <p:nvPr/>
         </p:nvSpPr>
@@ -24896,7 +25190,7 @@
       </p:sp>
       <p:sp>
         <p:nvSpPr>
-          <p:cNvPr id="126" name="Text 117"/>
+          <p:cNvPr id="128" name="Text 119"/>
           <p:cNvSpPr txBox="1"/>
           <p:nvPr/>
         </p:nvSpPr>
@@ -24930,7 +25224,7 @@
       </p:sp>
       <p:pic>
         <p:nvPicPr>
-          <p:cNvPr id="127" name="Picture 126" descr="googlebigquery.png"/>
+          <p:cNvPr id="129" name="Picture 128" descr="googlebigquery.png"/>
           <p:cNvPicPr>
             <a:picLocks noChangeAspect="1"/>
           </p:cNvPicPr>
@@ -24954,7 +25248,7 @@
       </p:pic>
       <p:sp>
         <p:nvSpPr>
-          <p:cNvPr id="128" name="Text 118"/>
+          <p:cNvPr id="130" name="Text 120"/>
           <p:cNvSpPr txBox="1"/>
           <p:nvPr/>
         </p:nvSpPr>
@@ -24988,7 +25282,7 @@
       </p:sp>
       <p:sp>
         <p:nvSpPr>
-          <p:cNvPr id="129" name="Text 119"/>
+          <p:cNvPr id="131" name="Text 121"/>
           <p:cNvSpPr txBox="1"/>
           <p:nvPr/>
         </p:nvSpPr>
@@ -25022,7 +25316,7 @@
       </p:sp>
       <p:pic>
         <p:nvPicPr>
-          <p:cNvPr id="130" name="Picture 129" descr="openai-white.png"/>
+          <p:cNvPr id="132" name="Picture 131" descr="openai-white.png"/>
           <p:cNvPicPr>
             <a:picLocks noChangeAspect="1"/>
           </p:cNvPicPr>
@@ -25046,7 +25340,7 @@
       </p:pic>
       <p:sp>
         <p:nvSpPr>
-          <p:cNvPr id="131" name="Text 120"/>
+          <p:cNvPr id="133" name="Text 122"/>
           <p:cNvSpPr txBox="1"/>
           <p:nvPr/>
         </p:nvSpPr>
@@ -25080,7 +25374,7 @@
       </p:sp>
       <p:sp>
         <p:nvSpPr>
-          <p:cNvPr id="132" name="Text 121"/>
+          <p:cNvPr id="134" name="Text 123"/>
           <p:cNvSpPr txBox="1"/>
           <p:nvPr/>
         </p:nvSpPr>
@@ -25114,7 +25408,7 @@
       </p:sp>
       <p:pic>
         <p:nvPicPr>
-          <p:cNvPr id="133" name="Picture 132" descr="googlecloud.png"/>
+          <p:cNvPr id="135" name="Picture 134" descr="googlecloud.png"/>
           <p:cNvPicPr>
             <a:picLocks noChangeAspect="1"/>
           </p:cNvPicPr>
@@ -25138,7 +25432,7 @@
       </p:pic>
       <p:sp>
         <p:nvSpPr>
-          <p:cNvPr id="134" name="Text 122"/>
+          <p:cNvPr id="136" name="Text 124"/>
           <p:cNvSpPr txBox="1"/>
           <p:nvPr/>
         </p:nvSpPr>
@@ -25172,7 +25466,7 @@
       </p:sp>
       <p:sp>
         <p:nvSpPr>
-          <p:cNvPr id="135" name="Text 123"/>
+          <p:cNvPr id="137" name="Text 125"/>
           <p:cNvSpPr txBox="1"/>
           <p:nvPr/>
         </p:nvSpPr>
@@ -26131,7 +26425,7 @@
                 </a:solidFill>
                 <a:latin typeface="Trenda IG Text"/>
               </a:rPr>
-              <a:t>Brief from the Jira story + Confluence design; open questions flagged.</a:t>
+              <a:t>User stories and functional decomposition from the Jira story; open questions flagged.</a:t>
             </a:r>
           </a:p>
         </p:txBody>

--- a/poc/data_harness/Ascension Agentic Harness - Data Harness.pptx
+++ b/poc/data_harness/Ascension Agentic Harness - Data Harness.pptx
@@ -2152,7 +2152,7 @@
           </a:p>
           <a:p>
             <a:r>
-              <a:t>A typical Health Cloud task on the Network Services pod, from Jira story to UAT sign-off, takes about two weeks today. On the Agentic Harness the same task takes about two days. People still approve at every gate.</a:t>
+              <a:t>A typical Health Cloud task on the Network Services pod takes about two weeks today, from Jira story to UAT sign-off. On the Agentic Harness the same task goes from story to production in about two days. People still approve at every gate.</a:t>
             </a:r>
           </a:p>
           <a:p/>
@@ -2174,7 +2174,17 @@
           </a:p>
           <a:p>
             <a:r>
-              <a:t>The same seven delivery agents as every pod, with Health Cloud skills. Day 1 morning: the Requirements Agent turns the story into a brief and the product owner approves (H1); the Architect Agent reads impact and reuse from the knowledge graph, the Change Guardian names affected pods, and the architect and pod owners approve (H2). Day 1 afternoon and overnight: the Developer Agent builds in DEV. Day 2: the Review and Test Agents check code, security and sharing and run the tests, and the tech lead approves (H3); the Release Agent promotes through Copado to SIT and UAT; the business signs UAT (H4).</a:t>
+              <a:t>The same seven delivery agents as every pod, with Health Cloud skills; about 26 working hours over two days.</a:t>
+            </a:r>
+          </a:p>
+          <a:p>
+            <a:r>
+              <a:t>Day 1: the Requirements Agent turns the story into a brief in about 3 hours and the product owner approves (H1); the Architect Agent reads impact and reuse from the knowledge graph in about 5 hours, the Change Guardian names affected pods, and the architect and pod owners approve (H2). The Developer Agent builds in DEV in about 4 hours; the Review and Test Agents check code, security and sharing and run the tests in about 4 hours, and the tech lead approves (H3); the Release Agent promotes through Copado to SIT and UAT in about 2 hours.</a:t>
+            </a:r>
+          </a:p>
+          <a:p>
+            <a:r>
+              <a:t>Day 2: about 8 hours of business UAT (H4), CAB approval and the owning team's deployment to production.</a:t>
             </a:r>
           </a:p>
           <a:p/>
@@ -2185,7 +2195,7 @@
           </a:p>
           <a:p>
             <a:r>
-              <a:t>About 80% faster: 10 working days to about 2 days. Already measured with agent-assisted delivery: 1-2 weeks down to 2-4 days. The graph, the overnight build and the automated tests take it to about 2 days: the target, confirmed against the Phase 0 baseline.</a:t>
+              <a:t>About 80% faster: 10 working days to about 2 days. Already measured with agent-assisted delivery: 1-2 weeks down to 2-4 days. The graph, the agent build and the automated tests take it to about 2 days, story to production: the target, confirmed against the Phase 0 baseline.</a:t>
             </a:r>
           </a:p>
           <a:p/>
@@ -2201,7 +2211,12 @@
           </a:p>
           <a:p>
             <a:r>
-              <a:t>- "And production?" It still goes through CAB in its normal window; the two days are story to UAT sign-off.</a:t>
+              <a:t>- "Does CAB meet every day?" Day 2 assumes a CAB slot; otherwise production waits for the next CAB window. The agents never deploy to production.</a:t>
+            </a:r>
+          </a:p>
+          <a:p>
+            <a:r>
+              <a:t>- "Why only 4 hours to build?" A typical Health Cloud task is a validation rule, a Flow or a small Apex change; the agent builds it with the design already approved and the context from the graph.</a:t>
             </a:r>
           </a:p>
         </p:txBody>
@@ -5239,7 +5254,7 @@
             </a:avLst>
           </a:prstGeom>
           <a:solidFill>
-            <a:srgbClr val="5A5A5A"/>
+            <a:srgbClr val="9E9E9E"/>
           </a:solidFill>
           <a:ln>
             <a:noFill/>
@@ -5292,7 +5307,7 @@
             <a:r>
               <a:rPr sz="700" b="1" i="0">
                 <a:solidFill>
-                  <a:srgbClr val="FFFFFE"/>
+                  <a:srgbClr val="000000"/>
                 </a:solidFill>
                 <a:latin typeface="Trenda IG Text"/>
               </a:rPr>
@@ -5405,7 +5420,7 @@
             </a:avLst>
           </a:prstGeom>
           <a:solidFill>
-            <a:srgbClr val="5A5A5A"/>
+            <a:srgbClr val="9E9E9E"/>
           </a:solidFill>
           <a:ln>
             <a:noFill/>
@@ -5458,7 +5473,7 @@
             <a:r>
               <a:rPr sz="700" b="1" i="0">
                 <a:solidFill>
-                  <a:srgbClr val="FFFFFE"/>
+                  <a:srgbClr val="000000"/>
                 </a:solidFill>
                 <a:latin typeface="Trenda IG Text"/>
               </a:rPr>
@@ -5571,7 +5586,7 @@
             </a:avLst>
           </a:prstGeom>
           <a:solidFill>
-            <a:srgbClr val="5A5A5A"/>
+            <a:srgbClr val="9E9E9E"/>
           </a:solidFill>
           <a:ln>
             <a:noFill/>
@@ -5624,7 +5639,7 @@
             <a:r>
               <a:rPr sz="700" b="1" i="0">
                 <a:solidFill>
-                  <a:srgbClr val="FFFFFE"/>
+                  <a:srgbClr val="000000"/>
                 </a:solidFill>
                 <a:latin typeface="Trenda IG Text"/>
               </a:rPr>
@@ -5737,7 +5752,7 @@
             </a:avLst>
           </a:prstGeom>
           <a:solidFill>
-            <a:srgbClr val="5A5A5A"/>
+            <a:srgbClr val="9E9E9E"/>
           </a:solidFill>
           <a:ln>
             <a:noFill/>
@@ -5790,7 +5805,7 @@
             <a:r>
               <a:rPr sz="700" b="1" i="0">
                 <a:solidFill>
-                  <a:srgbClr val="FFFFFE"/>
+                  <a:srgbClr val="000000"/>
                 </a:solidFill>
                 <a:latin typeface="Trenda IG Text"/>
               </a:rPr>
@@ -5903,7 +5918,7 @@
             </a:avLst>
           </a:prstGeom>
           <a:solidFill>
-            <a:srgbClr val="5A5A5A"/>
+            <a:srgbClr val="9E9E9E"/>
           </a:solidFill>
           <a:ln>
             <a:noFill/>
@@ -5956,7 +5971,7 @@
             <a:r>
               <a:rPr sz="700" b="1" i="0">
                 <a:solidFill>
-                  <a:srgbClr val="FFFFFE"/>
+                  <a:srgbClr val="000000"/>
                 </a:solidFill>
                 <a:latin typeface="Trenda IG Text"/>
               </a:rPr>
@@ -41671,7 +41686,7 @@
                 </a:solidFill>
                 <a:latin typeface="Trenda IG Text"/>
               </a:rPr>
-              <a:t>Any Health Cloud task, Jira story to UAT sign-off. The same seven delivery agents with Health Cloud skills; agents build overnight, people approve by day.</a:t>
+              <a:t>Any Health Cloud task. The same seven delivery agents with Health Cloud skills: day 1 takes the story to UAT, day 2 is UAT and production. People approve at every gate.</a:t>
             </a:r>
           </a:p>
         </p:txBody>
@@ -42444,7 +42459,7 @@
             </a:avLst>
           </a:prstGeom>
           <a:solidFill>
-            <a:srgbClr val="5A5A5A"/>
+            <a:srgbClr val="9E9E9E"/>
           </a:solidFill>
           <a:ln>
             <a:noFill/>
@@ -42497,7 +42512,7 @@
             <a:r>
               <a:rPr sz="700" b="1" i="0">
                 <a:solidFill>
-                  <a:srgbClr val="FFFFFE"/>
+                  <a:srgbClr val="000000"/>
                 </a:solidFill>
                 <a:latin typeface="Trenda IG Text"/>
               </a:rPr>
@@ -42610,7 +42625,7 @@
             </a:avLst>
           </a:prstGeom>
           <a:solidFill>
-            <a:srgbClr val="5A5A5A"/>
+            <a:srgbClr val="9E9E9E"/>
           </a:solidFill>
           <a:ln>
             <a:noFill/>
@@ -42663,7 +42678,7 @@
             <a:r>
               <a:rPr sz="700" b="1" i="0">
                 <a:solidFill>
-                  <a:srgbClr val="FFFFFE"/>
+                  <a:srgbClr val="000000"/>
                 </a:solidFill>
                 <a:latin typeface="Trenda IG Text"/>
               </a:rPr>
@@ -42776,7 +42791,7 @@
             </a:avLst>
           </a:prstGeom>
           <a:solidFill>
-            <a:srgbClr val="5A5A5A"/>
+            <a:srgbClr val="9E9E9E"/>
           </a:solidFill>
           <a:ln>
             <a:noFill/>
@@ -42829,7 +42844,7 @@
             <a:r>
               <a:rPr sz="700" b="1" i="0">
                 <a:solidFill>
-                  <a:srgbClr val="FFFFFE"/>
+                  <a:srgbClr val="000000"/>
                 </a:solidFill>
                 <a:latin typeface="Trenda IG Text"/>
               </a:rPr>
@@ -43108,7 +43123,7 @@
             </a:avLst>
           </a:prstGeom>
           <a:solidFill>
-            <a:srgbClr val="5A5A5A"/>
+            <a:srgbClr val="9E9E9E"/>
           </a:solidFill>
           <a:ln>
             <a:noFill/>
@@ -43161,7 +43176,7 @@
             <a:r>
               <a:rPr sz="700" b="1" i="0">
                 <a:solidFill>
-                  <a:srgbClr val="FFFFFE"/>
+                  <a:srgbClr val="000000"/>
                 </a:solidFill>
                 <a:latin typeface="Trenda IG Text"/>
               </a:rPr>
@@ -43274,7 +43289,7 @@
             </a:avLst>
           </a:prstGeom>
           <a:solidFill>
-            <a:srgbClr val="5A5A5A"/>
+            <a:srgbClr val="9E9E9E"/>
           </a:solidFill>
           <a:ln>
             <a:noFill/>
@@ -43327,7 +43342,7 @@
             <a:r>
               <a:rPr sz="700" b="1" i="0">
                 <a:solidFill>
-                  <a:srgbClr val="FFFFFE"/>
+                  <a:srgbClr val="000000"/>
                 </a:solidFill>
                 <a:latin typeface="Trenda IG Text"/>
               </a:rPr>
@@ -43344,7 +43359,7 @@
         </p:nvSpPr>
         <p:spPr>
           <a:xfrm>
-            <a:off x="2331720" y="1865375"/>
+            <a:off x="2494026" y="1865375"/>
             <a:ext cx="548640" cy="146304"/>
           </a:xfrm>
           <a:prstGeom prst="rect">
@@ -43366,7 +43381,7 @@
                 </a:solidFill>
                 <a:latin typeface="Trenda IG Text"/>
               </a:rPr>
-              <a:t>Day 0</a:t>
+              <a:t>Day 1</a:t>
             </a:r>
           </a:p>
         </p:txBody>
@@ -43379,7 +43394,7 @@
         </p:nvSpPr>
         <p:spPr>
           <a:xfrm>
-            <a:off x="3954780" y="1865375"/>
+            <a:off x="3792474" y="1865375"/>
             <a:ext cx="548640" cy="146304"/>
           </a:xfrm>
           <a:prstGeom prst="rect">
@@ -43414,7 +43429,7 @@
         </p:nvSpPr>
         <p:spPr>
           <a:xfrm>
-            <a:off x="5577840" y="1865375"/>
+            <a:off x="5415534" y="1865375"/>
             <a:ext cx="548640" cy="146304"/>
           </a:xfrm>
           <a:prstGeom prst="rect">
@@ -43633,7 +43648,7 @@
                 </a:solidFill>
                 <a:latin typeface="Trenda IG Text"/>
               </a:rPr>
-              <a:t>~48 hours elapsed: agents build overnight, people approve by day</a:t>
+              <a:t>~26 working hours: day 1 story to UAT, day 2 UAT and production</a:t>
             </a:r>
           </a:p>
         </p:txBody>
@@ -43734,7 +43749,7 @@
         <p:spPr>
           <a:xfrm>
             <a:off x="8540496" y="2148839"/>
-            <a:ext cx="274320" cy="201168"/>
+            <a:ext cx="352395" cy="201168"/>
           </a:xfrm>
           <a:prstGeom prst="roundRect">
             <a:avLst>
@@ -43778,7 +43793,7 @@
         <p:spPr>
           <a:xfrm>
             <a:off x="8540496" y="2148839"/>
-            <a:ext cx="274320" cy="201168"/>
+            <a:ext cx="352395" cy="201168"/>
           </a:xfrm>
           <a:prstGeom prst="rect">
             <a:avLst/>
@@ -43899,8 +43914,8 @@
         </p:nvSpPr>
         <p:spPr>
           <a:xfrm>
-            <a:off x="8731377" y="2560320"/>
-            <a:ext cx="318134" cy="201168"/>
+            <a:off x="8892891" y="2560320"/>
+            <a:ext cx="587326" cy="201168"/>
           </a:xfrm>
           <a:prstGeom prst="roundRect">
             <a:avLst>
@@ -43943,8 +43958,8 @@
         </p:nvSpPr>
         <p:spPr>
           <a:xfrm>
-            <a:off x="8731377" y="2560320"/>
-            <a:ext cx="318134" cy="201168"/>
+            <a:off x="8892891" y="2560320"/>
+            <a:ext cx="587326" cy="201168"/>
           </a:xfrm>
           <a:prstGeom prst="rect">
             <a:avLst/>
@@ -44052,7 +44067,7 @@
                 </a:solidFill>
                 <a:latin typeface="Trenda IG Text"/>
               </a:rPr>
-              <a:t>Apex, LWC, Flows, sharing in DEV, overnight</a:t>
+              <a:t>Apex, LWC, Flows, sharing in DEV</a:t>
             </a:r>
           </a:p>
         </p:txBody>
@@ -44065,8 +44080,8 @@
         </p:nvSpPr>
         <p:spPr>
           <a:xfrm>
-            <a:off x="9049512" y="2971799"/>
-            <a:ext cx="1018032" cy="201168"/>
+            <a:off x="9480217" y="2971799"/>
+            <a:ext cx="469860" cy="201168"/>
           </a:xfrm>
           <a:prstGeom prst="roundRect">
             <a:avLst>
@@ -44109,8 +44124,8 @@
         </p:nvSpPr>
         <p:spPr>
           <a:xfrm>
-            <a:off x="9049512" y="2971799"/>
-            <a:ext cx="1018032" cy="201168"/>
+            <a:off x="9480217" y="2971799"/>
+            <a:ext cx="469860" cy="201168"/>
           </a:xfrm>
           <a:prstGeom prst="rect">
             <a:avLst/>
@@ -44131,7 +44146,7 @@
                 </a:solidFill>
                 <a:latin typeface="Trenda IG Text"/>
               </a:rPr>
-              <a:t>16h</a:t>
+              <a:t>4h</a:t>
             </a:r>
           </a:p>
         </p:txBody>
@@ -44231,8 +44246,8 @@
         </p:nvSpPr>
         <p:spPr>
           <a:xfrm>
-            <a:off x="10067544" y="3383279"/>
-            <a:ext cx="509016" cy="201168"/>
+            <a:off x="9950078" y="3383279"/>
+            <a:ext cx="469860" cy="201168"/>
           </a:xfrm>
           <a:prstGeom prst="roundRect">
             <a:avLst>
@@ -44275,8 +44290,8 @@
         </p:nvSpPr>
         <p:spPr>
           <a:xfrm>
-            <a:off x="10067544" y="3383279"/>
-            <a:ext cx="509016" cy="201168"/>
+            <a:off x="9950078" y="3383279"/>
+            <a:ext cx="469860" cy="201168"/>
           </a:xfrm>
           <a:prstGeom prst="rect">
             <a:avLst/>
@@ -44297,7 +44312,7 @@
                 </a:solidFill>
                 <a:latin typeface="Trenda IG Text"/>
               </a:rPr>
-              <a:t>8h</a:t>
+              <a:t>4h</a:t>
             </a:r>
           </a:p>
         </p:txBody>
@@ -44397,8 +44412,8 @@
         </p:nvSpPr>
         <p:spPr>
           <a:xfrm>
-            <a:off x="10576560" y="3794759"/>
-            <a:ext cx="381762" cy="201168"/>
+            <a:off x="10419939" y="3794759"/>
+            <a:ext cx="274320" cy="201168"/>
           </a:xfrm>
           <a:prstGeom prst="roundRect">
             <a:avLst>
@@ -44441,8 +44456,8 @@
         </p:nvSpPr>
         <p:spPr>
           <a:xfrm>
-            <a:off x="10576560" y="3794759"/>
-            <a:ext cx="381762" cy="201168"/>
+            <a:off x="10419939" y="3794759"/>
+            <a:ext cx="274320" cy="201168"/>
           </a:xfrm>
           <a:prstGeom prst="rect">
             <a:avLst/>
@@ -44463,7 +44478,7 @@
                 </a:solidFill>
                 <a:latin typeface="Trenda IG Text"/>
               </a:rPr>
-              <a:t>6h</a:t>
+              <a:t>2h</a:t>
             </a:r>
           </a:p>
         </p:txBody>
@@ -44539,7 +44554,7 @@
                 </a:solidFill>
                 <a:latin typeface="Trenda IG Text"/>
               </a:rPr>
-              <a:t>Business UAT sign-off · H4</a:t>
+              <a:t>UAT + production · H4 · CAB</a:t>
             </a:r>
           </a:p>
           <a:p>
@@ -44550,7 +44565,7 @@
                 </a:solidFill>
                 <a:latin typeface="Trenda IG Text"/>
               </a:rPr>
-              <a:t>the business owner signs UAT</a:t>
+              <a:t>business signs UAT; CAB; the owning team deploys</a:t>
             </a:r>
           </a:p>
         </p:txBody>
@@ -44563,8 +44578,8 @@
         </p:nvSpPr>
         <p:spPr>
           <a:xfrm>
-            <a:off x="10958322" y="4206240"/>
-            <a:ext cx="636269" cy="201168"/>
+            <a:off x="10654870" y="4206240"/>
+            <a:ext cx="939721" cy="201168"/>
           </a:xfrm>
           <a:prstGeom prst="roundRect">
             <a:avLst>
@@ -44607,8 +44622,8 @@
         </p:nvSpPr>
         <p:spPr>
           <a:xfrm>
-            <a:off x="10958322" y="4206240"/>
-            <a:ext cx="636269" cy="201168"/>
+            <a:off x="10654870" y="4206240"/>
+            <a:ext cx="939721" cy="201168"/>
           </a:xfrm>
           <a:prstGeom prst="rect">
             <a:avLst/>
@@ -44629,7 +44644,7 @@
                 </a:solidFill>
                 <a:latin typeface="Trenda IG Text"/>
               </a:rPr>
-              <a:t>10h</a:t>
+              <a:t>8h</a:t>
             </a:r>
           </a:p>
         </p:txBody>
@@ -44642,7 +44657,7 @@
         </p:nvSpPr>
         <p:spPr>
           <a:xfrm>
-            <a:off x="8266175" y="1865375"/>
+            <a:off x="9323363" y="1865375"/>
             <a:ext cx="548640" cy="146304"/>
           </a:xfrm>
           <a:prstGeom prst="rect">
@@ -44664,7 +44679,7 @@
                 </a:solidFill>
                 <a:latin typeface="Trenda IG Text"/>
               </a:rPr>
-              <a:t>Day 0</a:t>
+              <a:t>Day 1</a:t>
             </a:r>
           </a:p>
         </p:txBody>
@@ -44677,7 +44692,7 @@
         </p:nvSpPr>
         <p:spPr>
           <a:xfrm>
-            <a:off x="9793224" y="1865375"/>
+            <a:off x="10850411" y="1865375"/>
             <a:ext cx="548640" cy="146304"/>
           </a:xfrm>
           <a:prstGeom prst="rect">
@@ -44699,44 +44714,51 @@
                 </a:solidFill>
                 <a:latin typeface="Trenda IG Text"/>
               </a:rPr>
-              <a:t>Day 1</a:t>
-            </a:r>
-          </a:p>
-        </p:txBody>
-      </p:sp>
-      <p:sp>
-        <p:nvSpPr>
-          <p:cNvPr id="79" name="Text 79"/>
-          <p:cNvSpPr txBox="1"/>
-          <p:nvPr/>
-        </p:nvSpPr>
-        <p:spPr>
-          <a:xfrm>
-            <a:off x="11320272" y="1865375"/>
-            <a:ext cx="548640" cy="146304"/>
-          </a:xfrm>
-          <a:prstGeom prst="rect">
-            <a:avLst/>
-          </a:prstGeom>
-          <a:noFill/>
-        </p:spPr>
-        <p:txBody>
-          <a:bodyPr wrap="square" lIns="0" rIns="0" tIns="0" bIns="0" anchor="ctr">
-            <a:spAutoFit/>
-          </a:bodyPr>
-          <a:lstStyle/>
-          <a:p>
-            <a:pPr algn="ctr"/>
-            <a:r>
-              <a:rPr sz="700" b="0" i="0">
-                <a:solidFill>
-                  <a:srgbClr val="8C8C8C"/>
-                </a:solidFill>
-                <a:latin typeface="Trenda IG Text"/>
-              </a:rPr>
               <a:t>Day 2</a:t>
             </a:r>
           </a:p>
+        </p:txBody>
+      </p:sp>
+      <p:sp>
+        <p:nvSpPr>
+          <p:cNvPr id="79" name="Shape 79"/>
+          <p:cNvSpPr/>
+          <p:nvPr/>
+        </p:nvSpPr>
+        <p:spPr>
+          <a:xfrm>
+            <a:off x="10707975" y="2011679"/>
+            <a:ext cx="9144" cy="2478024"/>
+          </a:xfrm>
+          <a:prstGeom prst="rect">
+            <a:avLst/>
+          </a:prstGeom>
+          <a:solidFill>
+            <a:srgbClr val="5A5A5A"/>
+          </a:solidFill>
+          <a:ln>
+            <a:noFill/>
+          </a:ln>
+          <a:effectLst/>
+        </p:spPr>
+        <p:style>
+          <a:lnRef idx="1">
+            <a:schemeClr val="accent1"/>
+          </a:lnRef>
+          <a:fillRef idx="3">
+            <a:schemeClr val="accent1"/>
+          </a:fillRef>
+          <a:effectRef idx="2">
+            <a:schemeClr val="accent1"/>
+          </a:effectRef>
+          <a:fontRef idx="minor">
+            <a:schemeClr val="lt1"/>
+          </a:fontRef>
+        </p:style>
+        <p:txBody>
+          <a:bodyPr rtlCol="0" anchor="ctr"/>
+          <a:lstStyle/>
+          <a:p/>
         </p:txBody>
       </p:sp>
       <p:sp>
@@ -44747,7 +44769,7 @@
         </p:nvSpPr>
         <p:spPr>
           <a:xfrm>
-            <a:off x="8860536" y="2148839"/>
+            <a:off x="8938611" y="2148839"/>
             <a:ext cx="310896" cy="201168"/>
           </a:xfrm>
           <a:prstGeom prst="roundRect">
@@ -44791,7 +44813,7 @@
         </p:nvSpPr>
         <p:spPr>
           <a:xfrm>
-            <a:off x="8860536" y="2148839"/>
+            <a:off x="8938611" y="2148839"/>
             <a:ext cx="310896" cy="201168"/>
           </a:xfrm>
           <a:prstGeom prst="rect">
@@ -44826,7 +44848,7 @@
         </p:nvSpPr>
         <p:spPr>
           <a:xfrm>
-            <a:off x="9095232" y="2560320"/>
+            <a:off x="9525937" y="2560320"/>
             <a:ext cx="310896" cy="201168"/>
           </a:xfrm>
           <a:prstGeom prst="roundRect">
@@ -44870,7 +44892,7 @@
         </p:nvSpPr>
         <p:spPr>
           <a:xfrm>
-            <a:off x="9095232" y="2560320"/>
+            <a:off x="9525937" y="2560320"/>
             <a:ext cx="310896" cy="201168"/>
           </a:xfrm>
           <a:prstGeom prst="rect">
@@ -44905,7 +44927,7 @@
         </p:nvSpPr>
         <p:spPr>
           <a:xfrm>
-            <a:off x="10622280" y="3383279"/>
+            <a:off x="10465659" y="3383279"/>
             <a:ext cx="310896" cy="201168"/>
           </a:xfrm>
           <a:prstGeom prst="roundRect">
@@ -44949,7 +44971,7 @@
         </p:nvSpPr>
         <p:spPr>
           <a:xfrm>
-            <a:off x="10622280" y="3383279"/>
+            <a:off x="10465659" y="3383279"/>
             <a:ext cx="310896" cy="201168"/>
           </a:xfrm>
           <a:prstGeom prst="rect">
@@ -45005,7 +45027,7 @@
                 </a:solidFill>
                 <a:latin typeface="Trenda IG Text"/>
               </a:rPr>
-              <a:t>Production follows the normal CAB window. </a:t>
+              <a:t>Day 2 assumes a CAB slot; otherwise the next CAB window. </a:t>
             </a:r>
             <a:r>
               <a:rPr sz="700" b="0" i="0">
@@ -45188,7 +45210,7 @@
                 </a:solidFill>
                 <a:latin typeface="Trenda IG Text"/>
               </a:rPr>
-              <a:t>~10 working days to ~2 days</a:t>
+              <a:t>~10 working days to ~2 days, now to production</a:t>
             </a:r>
           </a:p>
         </p:txBody>
@@ -45710,7 +45732,7 @@
                 </a:solidFill>
                 <a:latin typeface="Trenda IG Text"/>
               </a:rPr>
-              <a:t>H1 brief, H2 design, H3 code, H4 UAT; then CAB</a:t>
+              <a:t>H1 brief, H2 design, H3 code, H4 UAT; plus CAB</a:t>
             </a:r>
           </a:p>
         </p:txBody>
@@ -45744,7 +45766,7 @@
                 </a:solidFill>
                 <a:latin typeface="Trenda IG Text"/>
               </a:rPr>
-              <a:t>Today: a typical Health Cloud task on the Network Services pod, Jira story to UAT sign-off. Measured: agent-assisted delivery at Ascension, 1-2 weeks to 2-4 days. ~2 days is the harness target, confirmed against the Phase 0 baseline.</a:t>
+              <a:t>Today: a typical Health Cloud task on the Network Services pod, Jira story to UAT sign-off. Measured: agent-assisted delivery at Ascension, 1-2 weeks to 2-4 days. ~2 days to production is the harness target, confirmed against the Phase 0 baseline.</a:t>
             </a:r>
           </a:p>
         </p:txBody>
